--- a/outputs/pptx/ai_knowledge_institution_styled_draft.pptx
+++ b/outputs/pptx/ai_knowledge_institution_styled_draft.pptx
@@ -9600,7 +9600,7 @@
         <p:spPr>
           <a:xfrm>
             <a:off x="572414" y="411480"/>
-            <a:ext cx="10972800" cy="685800"/>
+            <a:ext cx="6720840" cy="685800"/>
           </a:xfrm>
           <a:prstGeom prst="rect">
             <a:avLst/>
@@ -9634,7 +9634,7 @@
         <p:spPr>
           <a:xfrm>
             <a:off x="572414" y="1208836"/>
-            <a:ext cx="11193170" cy="1302105"/>
+            <a:ext cx="6720840" cy="1302105"/>
           </a:xfrm>
           <a:prstGeom prst="rect">
             <a:avLst/>
@@ -9653,7 +9653,7 @@
               </a:spcAft>
             </a:pPr>
             <a:r>
-              <a:rPr sz="2400">
+              <a:rPr sz="2000">
                 <a:solidFill>
                   <a:srgbClr val="FF0000"/>
                 </a:solidFill>
@@ -9669,7 +9669,7 @@
               </a:spcAft>
             </a:pPr>
             <a:r>
-              <a:rPr sz="2400">
+              <a:rPr sz="2000">
                 <a:solidFill>
                   <a:srgbClr val="FF0000"/>
                 </a:solidFill>
@@ -9685,7 +9685,7 @@
               </a:spcAft>
             </a:pPr>
             <a:r>
-              <a:rPr sz="2400">
+              <a:rPr sz="2000">
                 <a:solidFill>
                   <a:srgbClr val="FF0000"/>
                 </a:solidFill>
@@ -9704,8 +9704,8 @@
         </p:nvSpPr>
         <p:spPr>
           <a:xfrm>
-            <a:off x="8183879" y="1417320"/>
-            <a:ext cx="3291840" cy="4251960"/>
+            <a:off x="8001000" y="1572768"/>
+            <a:ext cx="3337560" cy="3611880"/>
           </a:xfrm>
           <a:prstGeom prst="rect">
             <a:avLst/>
@@ -9739,23 +9739,13 @@
           <a:p>
             <a:pPr algn="ctr"/>
             <a:r>
-              <a:rPr sz="1600">
+              <a:rPr sz="1300">
                 <a:solidFill>
                   <a:srgbClr val="566070"/>
                 </a:solidFill>
                 <a:latin typeface="맑은 고딕"/>
               </a:rPr>
-              <a:t>[수동 삽입 필요]</a:t>
-            </a:r>
-            <a:br/>
-            <a:r>
-              <a:rPr sz="1600">
-                <a:solidFill>
-                  <a:srgbClr val="566070"/>
-                </a:solidFill>
-                <a:latin typeface="맑은 고딕"/>
-              </a:rPr>
-              <a:t>Manual visual placeholder; choose asset during later Piti/PPT work.</a:t>
+              <a:t>[수동 삽입]</a:t>
             </a:r>
           </a:p>
         </p:txBody>
@@ -9962,7 +9952,7 @@
               </a:spcAft>
             </a:pPr>
             <a:r>
-              <a:rPr sz="2400">
+              <a:rPr sz="2800">
                 <a:solidFill>
                   <a:srgbClr val="FF0000"/>
                 </a:solidFill>
@@ -9978,7 +9968,7 @@
               </a:spcAft>
             </a:pPr>
             <a:r>
-              <a:rPr sz="2400">
+              <a:rPr sz="2800">
                 <a:solidFill>
                   <a:srgbClr val="FF0000"/>
                 </a:solidFill>
@@ -9994,7 +9984,7 @@
               </a:spcAft>
             </a:pPr>
             <a:r>
-              <a:rPr sz="2400">
+              <a:rPr sz="2800">
                 <a:solidFill>
                   <a:srgbClr val="FF0000"/>
                 </a:solidFill>
@@ -10143,7 +10133,7 @@
         <p:spPr>
           <a:xfrm>
             <a:off x="713232" y="2795320"/>
-            <a:ext cx="9875520" cy="2651760"/>
+            <a:ext cx="6766560" cy="2651760"/>
           </a:xfrm>
           <a:prstGeom prst="rect">
             <a:avLst/>
@@ -10162,7 +10152,7 @@
               </a:spcAft>
             </a:pPr>
             <a:r>
-              <a:rPr sz="2400">
+              <a:rPr sz="2000">
                 <a:solidFill>
                   <a:srgbClr val="FF0000"/>
                 </a:solidFill>
@@ -10178,7 +10168,7 @@
               </a:spcAft>
             </a:pPr>
             <a:r>
-              <a:rPr sz="2400">
+              <a:rPr sz="2000">
                 <a:solidFill>
                   <a:srgbClr val="FF0000"/>
                 </a:solidFill>
@@ -10194,7 +10184,7 @@
               </a:spcAft>
             </a:pPr>
             <a:r>
-              <a:rPr sz="2400">
+              <a:rPr sz="2000">
                 <a:solidFill>
                   <a:srgbClr val="FF0000"/>
                 </a:solidFill>
@@ -10213,8 +10203,8 @@
         </p:nvSpPr>
         <p:spPr>
           <a:xfrm>
-            <a:off x="8778240" y="4389120"/>
-            <a:ext cx="2377440" cy="1097280"/>
+            <a:off x="8458200" y="4389120"/>
+            <a:ext cx="2560320" cy="1097280"/>
           </a:xfrm>
           <a:prstGeom prst="rect">
             <a:avLst/>
@@ -10248,23 +10238,13 @@
           <a:p>
             <a:pPr algn="ctr"/>
             <a:r>
-              <a:rPr sz="1600">
+              <a:rPr sz="1300">
                 <a:solidFill>
                   <a:srgbClr val="566070"/>
                 </a:solidFill>
                 <a:latin typeface="맑은 고딕"/>
               </a:rPr>
-              <a:t>[수동 삽입 필요]</a:t>
-            </a:r>
-            <a:br/>
-            <a:r>
-              <a:rPr sz="1600">
-                <a:solidFill>
-                  <a:srgbClr val="566070"/>
-                </a:solidFill>
-                <a:latin typeface="맑은 고딕"/>
-              </a:rPr>
-              <a:t>Manual visual placeholder; choose asset during later Piti/PPT work.</a:t>
+              <a:t>[수동 삽입]</a:t>
             </a:r>
           </a:p>
         </p:txBody>
@@ -10389,7 +10369,7 @@
             <a:r>
               <a:rPr sz="5400" b="1">
                 <a:solidFill>
-                  <a:srgbClr val="FF0000"/>
+                  <a:srgbClr val="181C23"/>
                 </a:solidFill>
                 <a:latin typeface="맑은 고딕"/>
               </a:rPr>
@@ -10428,7 +10408,7 @@
             <a:r>
               <a:rPr sz="2800">
                 <a:solidFill>
-                  <a:srgbClr val="FF0000"/>
+                  <a:srgbClr val="181C23"/>
                 </a:solidFill>
                 <a:latin typeface="맑은 고딕"/>
               </a:rPr>
@@ -10541,7 +10521,7 @@
         <p:spPr>
           <a:xfrm>
             <a:off x="572414" y="411480"/>
-            <a:ext cx="10972800" cy="685800"/>
+            <a:ext cx="6720840" cy="685800"/>
           </a:xfrm>
           <a:prstGeom prst="rect">
             <a:avLst/>
@@ -10575,7 +10555,7 @@
         <p:spPr>
           <a:xfrm>
             <a:off x="572414" y="1208836"/>
-            <a:ext cx="11193170" cy="1302105"/>
+            <a:ext cx="6720840" cy="1302105"/>
           </a:xfrm>
           <a:prstGeom prst="rect">
             <a:avLst/>
@@ -10594,7 +10574,7 @@
               </a:spcAft>
             </a:pPr>
             <a:r>
-              <a:rPr sz="2400">
+              <a:rPr sz="2000">
                 <a:solidFill>
                   <a:srgbClr val="FF0000"/>
                 </a:solidFill>
@@ -10610,7 +10590,7 @@
               </a:spcAft>
             </a:pPr>
             <a:r>
-              <a:rPr sz="2400">
+              <a:rPr sz="2000">
                 <a:solidFill>
                   <a:srgbClr val="FF0000"/>
                 </a:solidFill>
@@ -10626,7 +10606,7 @@
               </a:spcAft>
             </a:pPr>
             <a:r>
-              <a:rPr sz="2400">
+              <a:rPr sz="2000">
                 <a:solidFill>
                   <a:srgbClr val="FF0000"/>
                 </a:solidFill>
@@ -10645,8 +10625,8 @@
         </p:nvSpPr>
         <p:spPr>
           <a:xfrm>
-            <a:off x="8183879" y="1417320"/>
-            <a:ext cx="3291840" cy="4251960"/>
+            <a:off x="8001000" y="1572768"/>
+            <a:ext cx="3337560" cy="3611880"/>
           </a:xfrm>
           <a:prstGeom prst="rect">
             <a:avLst/>
@@ -10680,23 +10660,13 @@
           <a:p>
             <a:pPr algn="ctr"/>
             <a:r>
-              <a:rPr sz="1600">
+              <a:rPr sz="1300">
                 <a:solidFill>
                   <a:srgbClr val="566070"/>
                 </a:solidFill>
                 <a:latin typeface="맑은 고딕"/>
               </a:rPr>
-              <a:t>[수동 삽입 필요]</a:t>
-            </a:r>
-            <a:br/>
-            <a:r>
-              <a:rPr sz="1600">
-                <a:solidFill>
-                  <a:srgbClr val="566070"/>
-                </a:solidFill>
-                <a:latin typeface="맑은 고딕"/>
-              </a:rPr>
-              <a:t>Manual visual placeholder; choose asset during later Piti/PPT work.</a:t>
+              <a:t>[수동 삽입]</a:t>
             </a:r>
           </a:p>
         </p:txBody>
@@ -10805,7 +10775,7 @@
         <p:spPr>
           <a:xfrm>
             <a:off x="572414" y="411480"/>
-            <a:ext cx="10972800" cy="685800"/>
+            <a:ext cx="6720840" cy="685800"/>
           </a:xfrm>
           <a:prstGeom prst="rect">
             <a:avLst/>
@@ -10839,7 +10809,7 @@
         <p:spPr>
           <a:xfrm>
             <a:off x="572414" y="1208836"/>
-            <a:ext cx="11193170" cy="1302105"/>
+            <a:ext cx="6720840" cy="1302105"/>
           </a:xfrm>
           <a:prstGeom prst="rect">
             <a:avLst/>
@@ -10858,7 +10828,7 @@
               </a:spcAft>
             </a:pPr>
             <a:r>
-              <a:rPr sz="2400">
+              <a:rPr sz="2000">
                 <a:solidFill>
                   <a:srgbClr val="FF0000"/>
                 </a:solidFill>
@@ -10874,7 +10844,7 @@
               </a:spcAft>
             </a:pPr>
             <a:r>
-              <a:rPr sz="2400">
+              <a:rPr sz="2000">
                 <a:solidFill>
                   <a:srgbClr val="FF0000"/>
                 </a:solidFill>
@@ -10890,7 +10860,7 @@
               </a:spcAft>
             </a:pPr>
             <a:r>
-              <a:rPr sz="2400">
+              <a:rPr sz="2000">
                 <a:solidFill>
                   <a:srgbClr val="FF0000"/>
                 </a:solidFill>
@@ -10909,8 +10879,8 @@
         </p:nvSpPr>
         <p:spPr>
           <a:xfrm>
-            <a:off x="8183879" y="1417320"/>
-            <a:ext cx="3291840" cy="4251960"/>
+            <a:off x="8001000" y="1572768"/>
+            <a:ext cx="3337560" cy="3611880"/>
           </a:xfrm>
           <a:prstGeom prst="rect">
             <a:avLst/>
@@ -10944,23 +10914,13 @@
           <a:p>
             <a:pPr algn="ctr"/>
             <a:r>
-              <a:rPr sz="1600">
+              <a:rPr sz="1300">
                 <a:solidFill>
                   <a:srgbClr val="566070"/>
                 </a:solidFill>
                 <a:latin typeface="맑은 고딕"/>
               </a:rPr>
-              <a:t>[수동 삽입 필요]</a:t>
-            </a:r>
-            <a:br/>
-            <a:r>
-              <a:rPr sz="1600">
-                <a:solidFill>
-                  <a:srgbClr val="566070"/>
-                </a:solidFill>
-                <a:latin typeface="맑은 고딕"/>
-              </a:rPr>
-              <a:t>Manual visual placeholder; choose asset during later Piti/PPT work.</a:t>
+              <a:t>[수동 삽입]</a:t>
             </a:r>
           </a:p>
         </p:txBody>
@@ -11069,7 +11029,7 @@
         <p:spPr>
           <a:xfrm>
             <a:off x="572414" y="411480"/>
-            <a:ext cx="10972800" cy="685800"/>
+            <a:ext cx="6720840" cy="685800"/>
           </a:xfrm>
           <a:prstGeom prst="rect">
             <a:avLst/>
@@ -11103,7 +11063,7 @@
         <p:spPr>
           <a:xfrm>
             <a:off x="572414" y="1208836"/>
-            <a:ext cx="11193170" cy="1302105"/>
+            <a:ext cx="6720840" cy="1302105"/>
           </a:xfrm>
           <a:prstGeom prst="rect">
             <a:avLst/>
@@ -11122,7 +11082,7 @@
               </a:spcAft>
             </a:pPr>
             <a:r>
-              <a:rPr sz="2400">
+              <a:rPr sz="2000">
                 <a:solidFill>
                   <a:srgbClr val="FF0000"/>
                 </a:solidFill>
@@ -11138,7 +11098,7 @@
               </a:spcAft>
             </a:pPr>
             <a:r>
-              <a:rPr sz="2400">
+              <a:rPr sz="2000">
                 <a:solidFill>
                   <a:srgbClr val="FF0000"/>
                 </a:solidFill>
@@ -11154,7 +11114,7 @@
               </a:spcAft>
             </a:pPr>
             <a:r>
-              <a:rPr sz="2400">
+              <a:rPr sz="2000">
                 <a:solidFill>
                   <a:srgbClr val="FF0000"/>
                 </a:solidFill>
@@ -11173,8 +11133,8 @@
         </p:nvSpPr>
         <p:spPr>
           <a:xfrm>
-            <a:off x="8183879" y="1417320"/>
-            <a:ext cx="3291840" cy="4251960"/>
+            <a:off x="8001000" y="1572768"/>
+            <a:ext cx="3337560" cy="3611880"/>
           </a:xfrm>
           <a:prstGeom prst="rect">
             <a:avLst/>
@@ -11208,23 +11168,13 @@
           <a:p>
             <a:pPr algn="ctr"/>
             <a:r>
-              <a:rPr sz="1600">
+              <a:rPr sz="1300">
                 <a:solidFill>
                   <a:srgbClr val="566070"/>
                 </a:solidFill>
                 <a:latin typeface="맑은 고딕"/>
               </a:rPr>
-              <a:t>[수동 삽입 필요]</a:t>
-            </a:r>
-            <a:br/>
-            <a:r>
-              <a:rPr sz="1600">
-                <a:solidFill>
-                  <a:srgbClr val="566070"/>
-                </a:solidFill>
-                <a:latin typeface="맑은 고딕"/>
-              </a:rPr>
-              <a:t>Manual visual placeholder; choose asset during later Piti/PPT work.</a:t>
+              <a:t>[수동 삽입]</a:t>
             </a:r>
           </a:p>
         </p:txBody>
@@ -11367,7 +11317,7 @@
         <p:spPr>
           <a:xfrm>
             <a:off x="572414" y="1162202"/>
-            <a:ext cx="11193170" cy="1828800"/>
+            <a:ext cx="11193170" cy="1645920"/>
           </a:xfrm>
           <a:prstGeom prst="rect">
             <a:avLst/>
@@ -11401,23 +11351,13 @@
           <a:p>
             <a:pPr algn="ctr"/>
             <a:r>
-              <a:rPr sz="1600">
+              <a:rPr sz="1300">
                 <a:solidFill>
                   <a:srgbClr val="566070"/>
                 </a:solidFill>
                 <a:latin typeface="맑은 고딕"/>
               </a:rPr>
               <a:t>[차트 후보]</a:t>
-            </a:r>
-            <a:br/>
-            <a:r>
-              <a:rPr sz="1600">
-                <a:solidFill>
-                  <a:srgbClr val="566070"/>
-                </a:solidFill>
-                <a:latin typeface="맑은 고딕"/>
-              </a:rPr>
-              <a:t>Chart or simple number card candidate; no chart is rendered yet.</a:t>
             </a:r>
           </a:p>
         </p:txBody>
@@ -11450,7 +11390,7 @@
               </a:spcAft>
             </a:pPr>
             <a:r>
-              <a:rPr sz="2400">
+              <a:rPr sz="2000">
                 <a:solidFill>
                   <a:srgbClr val="FF0000"/>
                 </a:solidFill>
@@ -11466,7 +11406,7 @@
               </a:spcAft>
             </a:pPr>
             <a:r>
-              <a:rPr sz="2400">
+              <a:rPr sz="2000">
                 <a:solidFill>
                   <a:srgbClr val="FF0000"/>
                 </a:solidFill>
@@ -11482,7 +11422,7 @@
               </a:spcAft>
             </a:pPr>
             <a:r>
-              <a:rPr sz="2400">
+              <a:rPr sz="2000">
                 <a:solidFill>
                   <a:srgbClr val="FF0000"/>
                 </a:solidFill>
@@ -11651,7 +11591,7 @@
               </a:spcAft>
             </a:pPr>
             <a:r>
-              <a:rPr sz="2400">
+              <a:rPr sz="2800">
                 <a:solidFill>
                   <a:srgbClr val="FF0000"/>
                 </a:solidFill>
@@ -11667,7 +11607,7 @@
               </a:spcAft>
             </a:pPr>
             <a:r>
-              <a:rPr sz="2400">
+              <a:rPr sz="2800">
                 <a:solidFill>
                   <a:srgbClr val="FF0000"/>
                 </a:solidFill>
@@ -11683,7 +11623,7 @@
               </a:spcAft>
             </a:pPr>
             <a:r>
-              <a:rPr sz="2400">
+              <a:rPr sz="2800">
                 <a:solidFill>
                   <a:srgbClr val="FF0000"/>
                 </a:solidFill>
@@ -11852,7 +11792,7 @@
               </a:spcAft>
             </a:pPr>
             <a:r>
-              <a:rPr sz="2400">
+              <a:rPr sz="2800">
                 <a:solidFill>
                   <a:srgbClr val="FF0000"/>
                 </a:solidFill>
@@ -11868,7 +11808,7 @@
               </a:spcAft>
             </a:pPr>
             <a:r>
-              <a:rPr sz="2400">
+              <a:rPr sz="2800">
                 <a:solidFill>
                   <a:srgbClr val="FF0000"/>
                 </a:solidFill>
@@ -11884,7 +11824,7 @@
               </a:spcAft>
             </a:pPr>
             <a:r>
-              <a:rPr sz="2400">
+              <a:rPr sz="2800">
                 <a:solidFill>
                   <a:srgbClr val="FF0000"/>
                 </a:solidFill>
@@ -12033,7 +11973,7 @@
         <p:spPr>
           <a:xfrm>
             <a:off x="713232" y="2795320"/>
-            <a:ext cx="9875520" cy="2651760"/>
+            <a:ext cx="6766560" cy="2651760"/>
           </a:xfrm>
           <a:prstGeom prst="rect">
             <a:avLst/>
@@ -12052,7 +11992,7 @@
               </a:spcAft>
             </a:pPr>
             <a:r>
-              <a:rPr sz="2400">
+              <a:rPr sz="2000">
                 <a:solidFill>
                   <a:srgbClr val="FF0000"/>
                 </a:solidFill>
@@ -12068,7 +12008,7 @@
               </a:spcAft>
             </a:pPr>
             <a:r>
-              <a:rPr sz="2400">
+              <a:rPr sz="2000">
                 <a:solidFill>
                   <a:srgbClr val="FF0000"/>
                 </a:solidFill>
@@ -12084,7 +12024,7 @@
               </a:spcAft>
             </a:pPr>
             <a:r>
-              <a:rPr sz="2400">
+              <a:rPr sz="2000">
                 <a:solidFill>
                   <a:srgbClr val="FF0000"/>
                 </a:solidFill>
@@ -12103,8 +12043,8 @@
         </p:nvSpPr>
         <p:spPr>
           <a:xfrm>
-            <a:off x="8778240" y="4389120"/>
-            <a:ext cx="2377440" cy="1097280"/>
+            <a:off x="8458200" y="4389120"/>
+            <a:ext cx="2560320" cy="1097280"/>
           </a:xfrm>
           <a:prstGeom prst="rect">
             <a:avLst/>
@@ -12138,23 +12078,13 @@
           <a:p>
             <a:pPr algn="ctr"/>
             <a:r>
-              <a:rPr sz="1600">
+              <a:rPr sz="1300">
                 <a:solidFill>
                   <a:srgbClr val="566070"/>
                 </a:solidFill>
                 <a:latin typeface="맑은 고딕"/>
               </a:rPr>
-              <a:t>[수동 삽입 필요]</a:t>
-            </a:r>
-            <a:br/>
-            <a:r>
-              <a:rPr sz="1600">
-                <a:solidFill>
-                  <a:srgbClr val="566070"/>
-                </a:solidFill>
-                <a:latin typeface="맑은 고딕"/>
-              </a:rPr>
-              <a:t>Manual visual placeholder; choose asset during later Piti/PPT work.</a:t>
+              <a:t>[수동 삽입]</a:t>
             </a:r>
           </a:p>
         </p:txBody>
@@ -12279,7 +12209,7 @@
             <a:r>
               <a:rPr sz="5400" b="1">
                 <a:solidFill>
-                  <a:srgbClr val="FF0000"/>
+                  <a:srgbClr val="181C23"/>
                 </a:solidFill>
                 <a:latin typeface="맑은 고딕"/>
               </a:rPr>
@@ -12318,7 +12248,7 @@
             <a:r>
               <a:rPr sz="2800">
                 <a:solidFill>
-                  <a:srgbClr val="FF0000"/>
+                  <a:srgbClr val="181C23"/>
                 </a:solidFill>
                 <a:latin typeface="맑은 고딕"/>
               </a:rPr>
@@ -12744,7 +12674,7 @@
         <p:spPr>
           <a:xfrm>
             <a:off x="572414" y="411480"/>
-            <a:ext cx="10972800" cy="685800"/>
+            <a:ext cx="6720840" cy="685800"/>
           </a:xfrm>
           <a:prstGeom prst="rect">
             <a:avLst/>
@@ -12778,7 +12708,7 @@
         <p:spPr>
           <a:xfrm>
             <a:off x="572414" y="1208836"/>
-            <a:ext cx="11193170" cy="1302105"/>
+            <a:ext cx="6720840" cy="1302105"/>
           </a:xfrm>
           <a:prstGeom prst="rect">
             <a:avLst/>
@@ -12797,7 +12727,7 @@
               </a:spcAft>
             </a:pPr>
             <a:r>
-              <a:rPr sz="2400">
+              <a:rPr sz="2000">
                 <a:solidFill>
                   <a:srgbClr val="FF0000"/>
                 </a:solidFill>
@@ -12813,7 +12743,7 @@
               </a:spcAft>
             </a:pPr>
             <a:r>
-              <a:rPr sz="2400">
+              <a:rPr sz="2000">
                 <a:solidFill>
                   <a:srgbClr val="FF0000"/>
                 </a:solidFill>
@@ -12829,7 +12759,7 @@
               </a:spcAft>
             </a:pPr>
             <a:r>
-              <a:rPr sz="2400">
+              <a:rPr sz="2000">
                 <a:solidFill>
                   <a:srgbClr val="FF0000"/>
                 </a:solidFill>
@@ -12845,7 +12775,7 @@
               </a:spcAft>
             </a:pPr>
             <a:r>
-              <a:rPr sz="2400">
+              <a:rPr sz="2000">
                 <a:solidFill>
                   <a:srgbClr val="FF0000"/>
                 </a:solidFill>
@@ -12864,8 +12794,8 @@
         </p:nvSpPr>
         <p:spPr>
           <a:xfrm>
-            <a:off x="8183879" y="1417320"/>
-            <a:ext cx="3291840" cy="4251960"/>
+            <a:off x="8001000" y="1572768"/>
+            <a:ext cx="3337560" cy="3611880"/>
           </a:xfrm>
           <a:prstGeom prst="rect">
             <a:avLst/>
@@ -12899,23 +12829,13 @@
           <a:p>
             <a:pPr algn="ctr"/>
             <a:r>
-              <a:rPr sz="1600">
+              <a:rPr sz="1300">
                 <a:solidFill>
                   <a:srgbClr val="566070"/>
                 </a:solidFill>
                 <a:latin typeface="맑은 고딕"/>
               </a:rPr>
-              <a:t>[수동 삽입 필요]</a:t>
-            </a:r>
-            <a:br/>
-            <a:r>
-              <a:rPr sz="1600">
-                <a:solidFill>
-                  <a:srgbClr val="566070"/>
-                </a:solidFill>
-                <a:latin typeface="맑은 고딕"/>
-              </a:rPr>
-              <a:t>Manual visual placeholder; choose asset during later Piti/PPT work.</a:t>
+              <a:t>[수동 삽입]</a:t>
             </a:r>
           </a:p>
         </p:txBody>
@@ -13078,7 +12998,7 @@
               </a:spcAft>
             </a:pPr>
             <a:r>
-              <a:rPr sz="2400">
+              <a:rPr sz="2800">
                 <a:solidFill>
                   <a:srgbClr val="FF0000"/>
                 </a:solidFill>
@@ -13094,7 +13014,7 @@
               </a:spcAft>
             </a:pPr>
             <a:r>
-              <a:rPr sz="2400">
+              <a:rPr sz="2800">
                 <a:solidFill>
                   <a:srgbClr val="FF0000"/>
                 </a:solidFill>
@@ -13110,7 +13030,7 @@
               </a:spcAft>
             </a:pPr>
             <a:r>
-              <a:rPr sz="2400">
+              <a:rPr sz="2800">
                 <a:solidFill>
                   <a:srgbClr val="FF0000"/>
                 </a:solidFill>
@@ -13511,7 +13431,7 @@
               </a:spcAft>
             </a:pPr>
             <a:r>
-              <a:rPr sz="2400">
+              <a:rPr sz="2800">
                 <a:solidFill>
                   <a:srgbClr val="FF0000"/>
                 </a:solidFill>
@@ -13527,7 +13447,7 @@
               </a:spcAft>
             </a:pPr>
             <a:r>
-              <a:rPr sz="2400">
+              <a:rPr sz="2800">
                 <a:solidFill>
                   <a:srgbClr val="FF0000"/>
                 </a:solidFill>
@@ -13543,7 +13463,7 @@
               </a:spcAft>
             </a:pPr>
             <a:r>
-              <a:rPr sz="2400">
+              <a:rPr sz="2800">
                 <a:solidFill>
                   <a:srgbClr val="FF0000"/>
                 </a:solidFill>
@@ -13692,7 +13612,7 @@
         <p:spPr>
           <a:xfrm>
             <a:off x="713232" y="2795320"/>
-            <a:ext cx="9875520" cy="2651760"/>
+            <a:ext cx="6766560" cy="2651760"/>
           </a:xfrm>
           <a:prstGeom prst="rect">
             <a:avLst/>
@@ -13711,7 +13631,7 @@
               </a:spcAft>
             </a:pPr>
             <a:r>
-              <a:rPr sz="2800">
+              <a:rPr sz="2400">
                 <a:solidFill>
                   <a:srgbClr val="FF0000"/>
                 </a:solidFill>
@@ -13727,7 +13647,7 @@
               </a:spcAft>
             </a:pPr>
             <a:r>
-              <a:rPr sz="2800">
+              <a:rPr sz="2400">
                 <a:solidFill>
                   <a:srgbClr val="FF0000"/>
                 </a:solidFill>
@@ -13746,8 +13666,8 @@
         </p:nvSpPr>
         <p:spPr>
           <a:xfrm>
-            <a:off x="8778240" y="4389120"/>
-            <a:ext cx="2377440" cy="1097280"/>
+            <a:off x="8458200" y="4389120"/>
+            <a:ext cx="2560320" cy="1097280"/>
           </a:xfrm>
           <a:prstGeom prst="rect">
             <a:avLst/>
@@ -13781,23 +13701,13 @@
           <a:p>
             <a:pPr algn="ctr"/>
             <a:r>
-              <a:rPr sz="1600">
+              <a:rPr sz="1300">
                 <a:solidFill>
                   <a:srgbClr val="566070"/>
                 </a:solidFill>
                 <a:latin typeface="맑은 고딕"/>
               </a:rPr>
-              <a:t>[수동 삽입 필요]</a:t>
-            </a:r>
-            <a:br/>
-            <a:r>
-              <a:rPr sz="1600">
-                <a:solidFill>
-                  <a:srgbClr val="566070"/>
-                </a:solidFill>
-                <a:latin typeface="맑은 고딕"/>
-              </a:rPr>
-              <a:t>Manual visual placeholder; choose asset during later Piti/PPT work.</a:t>
+              <a:t>[수동 삽입]</a:t>
             </a:r>
           </a:p>
         </p:txBody>
@@ -14004,7 +13914,7 @@
               </a:spcAft>
             </a:pPr>
             <a:r>
-              <a:rPr sz="2400">
+              <a:rPr sz="2800">
                 <a:solidFill>
                   <a:srgbClr val="FF0000"/>
                 </a:solidFill>
@@ -14020,7 +13930,7 @@
               </a:spcAft>
             </a:pPr>
             <a:r>
-              <a:rPr sz="2400">
+              <a:rPr sz="2800">
                 <a:solidFill>
                   <a:srgbClr val="FF0000"/>
                 </a:solidFill>
@@ -14036,7 +13946,7 @@
               </a:spcAft>
             </a:pPr>
             <a:r>
-              <a:rPr sz="2400">
+              <a:rPr sz="2800">
                 <a:solidFill>
                   <a:srgbClr val="FF0000"/>
                 </a:solidFill>
@@ -14151,7 +14061,7 @@
         <p:spPr>
           <a:xfrm>
             <a:off x="572414" y="411480"/>
-            <a:ext cx="10972800" cy="685800"/>
+            <a:ext cx="6720840" cy="685800"/>
           </a:xfrm>
           <a:prstGeom prst="rect">
             <a:avLst/>
@@ -14185,7 +14095,7 @@
         <p:spPr>
           <a:xfrm>
             <a:off x="572414" y="1208836"/>
-            <a:ext cx="11193170" cy="1302105"/>
+            <a:ext cx="6720840" cy="1302105"/>
           </a:xfrm>
           <a:prstGeom prst="rect">
             <a:avLst/>
@@ -14204,7 +14114,7 @@
               </a:spcAft>
             </a:pPr>
             <a:r>
-              <a:rPr sz="2400">
+              <a:rPr sz="2000">
                 <a:solidFill>
                   <a:srgbClr val="FF0000"/>
                 </a:solidFill>
@@ -14220,7 +14130,7 @@
               </a:spcAft>
             </a:pPr>
             <a:r>
-              <a:rPr sz="2400">
+              <a:rPr sz="2000">
                 <a:solidFill>
                   <a:srgbClr val="FF0000"/>
                 </a:solidFill>
@@ -14236,7 +14146,7 @@
               </a:spcAft>
             </a:pPr>
             <a:r>
-              <a:rPr sz="2400">
+              <a:rPr sz="2000">
                 <a:solidFill>
                   <a:srgbClr val="FF0000"/>
                 </a:solidFill>
@@ -14255,8 +14165,8 @@
         </p:nvSpPr>
         <p:spPr>
           <a:xfrm>
-            <a:off x="8183879" y="1417320"/>
-            <a:ext cx="3291840" cy="4251960"/>
+            <a:off x="8001000" y="1572768"/>
+            <a:ext cx="3337560" cy="3611880"/>
           </a:xfrm>
           <a:prstGeom prst="rect">
             <a:avLst/>
@@ -14290,23 +14200,13 @@
           <a:p>
             <a:pPr algn="ctr"/>
             <a:r>
-              <a:rPr sz="1600">
+              <a:rPr sz="1300">
                 <a:solidFill>
                   <a:srgbClr val="566070"/>
                 </a:solidFill>
                 <a:latin typeface="맑은 고딕"/>
               </a:rPr>
-              <a:t>[수동 삽입 필요]</a:t>
-            </a:r>
-            <a:br/>
-            <a:r>
-              <a:rPr sz="1600">
-                <a:solidFill>
-                  <a:srgbClr val="566070"/>
-                </a:solidFill>
-                <a:latin typeface="맑은 고딕"/>
-              </a:rPr>
-              <a:t>Manual visual placeholder; choose asset during later Piti/PPT work.</a:t>
+              <a:t>[수동 삽입]</a:t>
             </a:r>
           </a:p>
         </p:txBody>
@@ -14469,7 +14369,7 @@
               </a:spcAft>
             </a:pPr>
             <a:r>
-              <a:rPr sz="2400">
+              <a:rPr sz="2800">
                 <a:solidFill>
                   <a:srgbClr val="FF0000"/>
                 </a:solidFill>
@@ -14485,7 +14385,7 @@
               </a:spcAft>
             </a:pPr>
             <a:r>
-              <a:rPr sz="2400">
+              <a:rPr sz="2800">
                 <a:solidFill>
                   <a:srgbClr val="FF0000"/>
                 </a:solidFill>
@@ -14501,7 +14401,7 @@
               </a:spcAft>
             </a:pPr>
             <a:r>
-              <a:rPr sz="2400">
+              <a:rPr sz="2800">
                 <a:solidFill>
                   <a:srgbClr val="FF0000"/>
                 </a:solidFill>
@@ -14670,7 +14570,7 @@
               </a:spcAft>
             </a:pPr>
             <a:r>
-              <a:rPr sz="2400">
+              <a:rPr sz="2800">
                 <a:solidFill>
                   <a:srgbClr val="FF0000"/>
                 </a:solidFill>
@@ -14686,7 +14586,7 @@
               </a:spcAft>
             </a:pPr>
             <a:r>
-              <a:rPr sz="2400">
+              <a:rPr sz="2800">
                 <a:solidFill>
                   <a:srgbClr val="FF0000"/>
                 </a:solidFill>
@@ -14702,7 +14602,7 @@
               </a:spcAft>
             </a:pPr>
             <a:r>
-              <a:rPr sz="2400">
+              <a:rPr sz="2800">
                 <a:solidFill>
                   <a:srgbClr val="FF0000"/>
                 </a:solidFill>
@@ -14833,7 +14733,7 @@
             <a:r>
               <a:rPr sz="5400" b="1">
                 <a:solidFill>
-                  <a:srgbClr val="FF0000"/>
+                  <a:srgbClr val="181C23"/>
                 </a:solidFill>
                 <a:latin typeface="맑은 고딕"/>
               </a:rPr>
@@ -14872,7 +14772,7 @@
             <a:r>
               <a:rPr sz="2800">
                 <a:solidFill>
-                  <a:srgbClr val="FF0000"/>
+                  <a:srgbClr val="181C23"/>
                 </a:solidFill>
                 <a:latin typeface="맑은 고딕"/>
               </a:rPr>
@@ -14985,7 +14885,7 @@
         <p:spPr>
           <a:xfrm>
             <a:off x="572414" y="411480"/>
-            <a:ext cx="10972800" cy="685800"/>
+            <a:ext cx="6720840" cy="685800"/>
           </a:xfrm>
           <a:prstGeom prst="rect">
             <a:avLst/>
@@ -15019,7 +14919,7 @@
         <p:spPr>
           <a:xfrm>
             <a:off x="572414" y="1208836"/>
-            <a:ext cx="11193170" cy="1302105"/>
+            <a:ext cx="6720840" cy="1302105"/>
           </a:xfrm>
           <a:prstGeom prst="rect">
             <a:avLst/>
@@ -15038,7 +14938,7 @@
               </a:spcAft>
             </a:pPr>
             <a:r>
-              <a:rPr sz="2400">
+              <a:rPr sz="2000">
                 <a:solidFill>
                   <a:srgbClr val="FF0000"/>
                 </a:solidFill>
@@ -15054,7 +14954,7 @@
               </a:spcAft>
             </a:pPr>
             <a:r>
-              <a:rPr sz="2400">
+              <a:rPr sz="2000">
                 <a:solidFill>
                   <a:srgbClr val="FF0000"/>
                 </a:solidFill>
@@ -15070,7 +14970,7 @@
               </a:spcAft>
             </a:pPr>
             <a:r>
-              <a:rPr sz="2400">
+              <a:rPr sz="2000">
                 <a:solidFill>
                   <a:srgbClr val="FF0000"/>
                 </a:solidFill>
@@ -15089,8 +14989,8 @@
         </p:nvSpPr>
         <p:spPr>
           <a:xfrm>
-            <a:off x="8183879" y="1417320"/>
-            <a:ext cx="3291840" cy="4251960"/>
+            <a:off x="8001000" y="1572768"/>
+            <a:ext cx="3337560" cy="3611880"/>
           </a:xfrm>
           <a:prstGeom prst="rect">
             <a:avLst/>
@@ -15124,23 +15024,13 @@
           <a:p>
             <a:pPr algn="ctr"/>
             <a:r>
-              <a:rPr sz="1600">
+              <a:rPr sz="1300">
                 <a:solidFill>
                   <a:srgbClr val="566070"/>
                 </a:solidFill>
                 <a:latin typeface="맑은 고딕"/>
               </a:rPr>
-              <a:t>[수동 삽입 필요]</a:t>
-            </a:r>
-            <a:br/>
-            <a:r>
-              <a:rPr sz="1600">
-                <a:solidFill>
-                  <a:srgbClr val="566070"/>
-                </a:solidFill>
-                <a:latin typeface="맑은 고딕"/>
-              </a:rPr>
-              <a:t>Manual visual placeholder; choose asset during later Piti/PPT work.</a:t>
+              <a:t>[수동 삽입]</a:t>
             </a:r>
           </a:p>
         </p:txBody>

--- a/outputs/pptx/ai_knowledge_institution_styled_draft.pptx
+++ b/outputs/pptx/ai_knowledge_institution_styled_draft.pptx
@@ -570,6 +570,47 @@
               <a:t>]</a:t>
             </a:r>
           </a:p>
+          <a:p>
+            <a:r>
+              <a:t>manual_placeholder_hidden: True</a:t>
+            </a:r>
+          </a:p>
+          <a:p/>
+          <a:p>
+            <a:r>
+              <a:t>screen_body_lines:</a:t>
+            </a:r>
+          </a:p>
+          <a:p>
+            <a:r>
+              <a:t>[</a:t>
+            </a:r>
+          </a:p>
+          <a:p>
+            <a:r>
+              <a:t>  "검색창이 아니라 답안지가 된 AI",</a:t>
+            </a:r>
+          </a:p>
+          <a:p>
+            <a:r>
+              <a:t>  "학교와 박물관은 이제 무엇을 가르쳐야 할까"</a:t>
+            </a:r>
+          </a:p>
+          <a:p>
+            <a:r>
+              <a:t>]</a:t>
+            </a:r>
+          </a:p>
+          <a:p>
+            <a:r>
+              <a:t>overflow_body_lines:</a:t>
+            </a:r>
+          </a:p>
+          <a:p>
+            <a:r>
+              <a:t>[]</a:t>
+            </a:r>
+          </a:p>
           <a:p/>
           <a:p>
             <a:r>
@@ -780,6 +821,52 @@
               <a:t>]</a:t>
             </a:r>
           </a:p>
+          <a:p>
+            <a:r>
+              <a:t>manual_placeholder_hidden: True</a:t>
+            </a:r>
+          </a:p>
+          <a:p/>
+          <a:p>
+            <a:r>
+              <a:t>screen_body_lines:</a:t>
+            </a:r>
+          </a:p>
+          <a:p>
+            <a:r>
+              <a:t>[</a:t>
+            </a:r>
+          </a:p>
+          <a:p>
+            <a:r>
+              <a:t>  "틀린 가설을 세워보고, 다른 자료와 부딪히고, 왜 틀렸는지 고치는 시간이 사고를 만든다",</a:t>
+            </a:r>
+          </a:p>
+          <a:p>
+            <a:r>
+              <a:t>  "AI 역량 교육은 답을 받는 법보다 질문하고 평가하고 책임 있게 쓰는 법으로 확장될 필요가 있다",</a:t>
+            </a:r>
+          </a:p>
+          <a:p>
+            <a:r>
+              <a:t>  "이 주장은 연구·프레임워크에 기대되, 인지 효과를 확정적으로 말하지 않는다"</a:t>
+            </a:r>
+          </a:p>
+          <a:p>
+            <a:r>
+              <a:t>]</a:t>
+            </a:r>
+          </a:p>
+          <a:p>
+            <a:r>
+              <a:t>overflow_body_lines:</a:t>
+            </a:r>
+          </a:p>
+          <a:p>
+            <a:r>
+              <a:t>[]</a:t>
+            </a:r>
+          </a:p>
           <a:p/>
           <a:p>
             <a:r>
@@ -1015,6 +1102,52 @@
               <a:t>]</a:t>
             </a:r>
           </a:p>
+          <a:p>
+            <a:r>
+              <a:t>manual_placeholder_hidden: True</a:t>
+            </a:r>
+          </a:p>
+          <a:p/>
+          <a:p>
+            <a:r>
+              <a:t>screen_body_lines:</a:t>
+            </a:r>
+          </a:p>
+          <a:p>
+            <a:r>
+              <a:t>[</a:t>
+            </a:r>
+          </a:p>
+          <a:p>
+            <a:r>
+              <a:t>  "Royal Observatory 관련 보도는 AI 의존 경고를 인간 지식과 배움의 가치라는 맥락에 둔다",</a:t>
+            </a:r>
+          </a:p>
+          <a:p>
+            <a:r>
+              <a:t>  "이를 AI 반대가 아니라 질문과 검증의 필요성을 상기시키는 장면으로 사용한다",</a:t>
+            </a:r>
+          </a:p>
+          <a:p>
+            <a:r>
+              <a:t>  "단일 기사 기반 맥락이므로 표현은 보수적으로 유지한다"</a:t>
+            </a:r>
+          </a:p>
+          <a:p>
+            <a:r>
+              <a:t>]</a:t>
+            </a:r>
+          </a:p>
+          <a:p>
+            <a:r>
+              <a:t>overflow_body_lines:</a:t>
+            </a:r>
+          </a:p>
+          <a:p>
+            <a:r>
+              <a:t>[]</a:t>
+            </a:r>
+          </a:p>
           <a:p/>
           <a:p>
             <a:r>
@@ -1240,6 +1373,52 @@
               <a:t>]</a:t>
             </a:r>
           </a:p>
+          <a:p>
+            <a:r>
+              <a:t>manual_placeholder_hidden: True</a:t>
+            </a:r>
+          </a:p>
+          <a:p/>
+          <a:p>
+            <a:r>
+              <a:t>screen_body_lines:</a:t>
+            </a:r>
+          </a:p>
+          <a:p>
+            <a:r>
+              <a:t>[</a:t>
+            </a:r>
+          </a:p>
+          <a:p>
+            <a:r>
+              <a:t>  "예전엔 누가 더 잘 찾느냐의 싸움이었다면",</a:t>
+            </a:r>
+          </a:p>
+          <a:p>
+            <a:r>
+              <a:t>  "이제는 누가 더 좋은 질문을 하느냐의 싸움일 수 있다",</a:t>
+            </a:r>
+          </a:p>
+          <a:p>
+            <a:r>
+              <a:t>  "AI가 정답을 말할수록, 사람은 질문을 더 잘해야 한다"</a:t>
+            </a:r>
+          </a:p>
+          <a:p>
+            <a:r>
+              <a:t>]</a:t>
+            </a:r>
+          </a:p>
+          <a:p>
+            <a:r>
+              <a:t>overflow_body_lines:</a:t>
+            </a:r>
+          </a:p>
+          <a:p>
+            <a:r>
+              <a:t>[]</a:t>
+            </a:r>
+          </a:p>
           <a:p/>
           <a:p>
             <a:r>
@@ -1450,6 +1629,42 @@
               <a:t>]</a:t>
             </a:r>
           </a:p>
+          <a:p>
+            <a:r>
+              <a:t>manual_placeholder_hidden: True</a:t>
+            </a:r>
+          </a:p>
+          <a:p/>
+          <a:p>
+            <a:r>
+              <a:t>screen_body_lines:</a:t>
+            </a:r>
+          </a:p>
+          <a:p>
+            <a:r>
+              <a:t>[</a:t>
+            </a:r>
+          </a:p>
+          <a:p>
+            <a:r>
+              <a:t>  "답을 알려주는 곳에서, 질문을 훈련하는 곳으로"</a:t>
+            </a:r>
+          </a:p>
+          <a:p>
+            <a:r>
+              <a:t>]</a:t>
+            </a:r>
+          </a:p>
+          <a:p>
+            <a:r>
+              <a:t>overflow_body_lines:</a:t>
+            </a:r>
+          </a:p>
+          <a:p>
+            <a:r>
+              <a:t>[]</a:t>
+            </a:r>
+          </a:p>
           <a:p/>
           <a:p>
             <a:r>
@@ -1660,6 +1875,52 @@
               <a:t>]</a:t>
             </a:r>
           </a:p>
+          <a:p>
+            <a:r>
+              <a:t>manual_placeholder_hidden: True</a:t>
+            </a:r>
+          </a:p>
+          <a:p/>
+          <a:p>
+            <a:r>
+              <a:t>screen_body_lines:</a:t>
+            </a:r>
+          </a:p>
+          <a:p>
+            <a:r>
+              <a:t>[</a:t>
+            </a:r>
+          </a:p>
+          <a:p>
+            <a:r>
+              <a:t>  "AI가 많은 정보를 설명할 수 있다면, 수업은 무엇을 외웠나보다 어떻게 확인했나를 더 물어야 할 수 있다",</a:t>
+            </a:r>
+          </a:p>
+          <a:p>
+            <a:r>
+              <a:t>  "OECD와 UNESCO 자료는 AI 교육을 교수 원칙과 학생 역량의 문제로 다룬다",</a:t>
+            </a:r>
+          </a:p>
+          <a:p>
+            <a:r>
+              <a:t>  "다만 교육 효과는 아직 단정하지 않고, 수업 설계의 과제로 남긴다"</a:t>
+            </a:r>
+          </a:p>
+          <a:p>
+            <a:r>
+              <a:t>]</a:t>
+            </a:r>
+          </a:p>
+          <a:p>
+            <a:r>
+              <a:t>overflow_body_lines:</a:t>
+            </a:r>
+          </a:p>
+          <a:p>
+            <a:r>
+              <a:t>[]</a:t>
+            </a:r>
+          </a:p>
           <a:p/>
           <a:p>
             <a:r>
@@ -1895,6 +2156,52 @@
               <a:t>]</a:t>
             </a:r>
           </a:p>
+          <a:p>
+            <a:r>
+              <a:t>manual_placeholder_hidden: True</a:t>
+            </a:r>
+          </a:p>
+          <a:p/>
+          <a:p>
+            <a:r>
+              <a:t>screen_body_lines:</a:t>
+            </a:r>
+          </a:p>
+          <a:p>
+            <a:r>
+              <a:t>[</a:t>
+            </a:r>
+          </a:p>
+          <a:p>
+            <a:r>
+              <a:t>  "설명 자체는 AI도 해줄 수 있다",</a:t>
+            </a:r>
+          </a:p>
+          <a:p>
+            <a:r>
+              <a:t>  "그렇다면 박물관·과학관은 맥락, 경험, 질문, 토론을 더 강조해야 할 수 있다",</a:t>
+            </a:r>
+          </a:p>
+          <a:p>
+            <a:r>
+              <a:t>  "국립과학관 AI 전시 사례는 기술을 체험형 맥락으로 보여주는 보조 사례로만 사용한다"</a:t>
+            </a:r>
+          </a:p>
+          <a:p>
+            <a:r>
+              <a:t>]</a:t>
+            </a:r>
+          </a:p>
+          <a:p>
+            <a:r>
+              <a:t>overflow_body_lines:</a:t>
+            </a:r>
+          </a:p>
+          <a:p>
+            <a:r>
+              <a:t>[]</a:t>
+            </a:r>
+          </a:p>
           <a:p/>
           <a:p>
             <a:r>
@@ -2136,6 +2443,52 @@
               <a:t>]</a:t>
             </a:r>
           </a:p>
+          <a:p>
+            <a:r>
+              <a:t>manual_placeholder_hidden: True</a:t>
+            </a:r>
+          </a:p>
+          <a:p/>
+          <a:p>
+            <a:r>
+              <a:t>screen_body_lines:</a:t>
+            </a:r>
+          </a:p>
+          <a:p>
+            <a:r>
+              <a:t>[</a:t>
+            </a:r>
+          </a:p>
+          <a:p>
+            <a:r>
+              <a:t>  "AI는 별자리 정보를 바로 줄 수 있다",</a:t>
+            </a:r>
+          </a:p>
+          <a:p>
+            <a:r>
+              <a:t>  "하지만 밤하늘을 관찰하고, 위치를 추정하고, 계절과 시간을 연결하는 경험은 다르다",</a:t>
+            </a:r>
+          </a:p>
+          <a:p>
+            <a:r>
+              <a:t>  "천문관 비유는 정보 전달보다 보는 법과 질문하는 법을 강조하기 위한 방송용 구조다"</a:t>
+            </a:r>
+          </a:p>
+          <a:p>
+            <a:r>
+              <a:t>]</a:t>
+            </a:r>
+          </a:p>
+          <a:p>
+            <a:r>
+              <a:t>overflow_body_lines:</a:t>
+            </a:r>
+          </a:p>
+          <a:p>
+            <a:r>
+              <a:t>[]</a:t>
+            </a:r>
+          </a:p>
           <a:p/>
           <a:p>
             <a:r>
@@ -2371,6 +2724,52 @@
               <a:t>]</a:t>
             </a:r>
           </a:p>
+          <a:p>
+            <a:r>
+              <a:t>manual_placeholder_hidden: False</a:t>
+            </a:r>
+          </a:p>
+          <a:p/>
+          <a:p>
+            <a:r>
+              <a:t>screen_body_lines:</a:t>
+            </a:r>
+          </a:p>
+          <a:p>
+            <a:r>
+              <a:t>[</a:t>
+            </a:r>
+          </a:p>
+          <a:p>
+            <a:r>
+              <a:t>  "방송용 완성본에는 AI 검색 사용, 학교 AI 지침, 과학관·박물관 AI 활용 사례가 더 필요하다",</a:t>
+            </a:r>
+          </a:p>
+          <a:p>
+            <a:r>
+              <a:t>  "이번 enriched dry run은 OECD·정책브리핑·과학관 사례로 1차 틀만 보강한다",</a:t>
+            </a:r>
+          </a:p>
+          <a:p>
+            <a:r>
+              <a:t>  "정량 수치가 필요한 문장은 여전히 fact check 대상으로 남긴다"</a:t>
+            </a:r>
+          </a:p>
+          <a:p>
+            <a:r>
+              <a:t>]</a:t>
+            </a:r>
+          </a:p>
+          <a:p>
+            <a:r>
+              <a:t>overflow_body_lines:</a:t>
+            </a:r>
+          </a:p>
+          <a:p>
+            <a:r>
+              <a:t>[]</a:t>
+            </a:r>
+          </a:p>
           <a:p/>
           <a:p>
             <a:r>
@@ -2616,6 +3015,52 @@
               <a:t>]</a:t>
             </a:r>
           </a:p>
+          <a:p>
+            <a:r>
+              <a:t>manual_placeholder_hidden: False</a:t>
+            </a:r>
+          </a:p>
+          <a:p/>
+          <a:p>
+            <a:r>
+              <a:t>screen_body_lines:</a:t>
+            </a:r>
+          </a:p>
+          <a:p>
+            <a:r>
+              <a:t>[</a:t>
+            </a:r>
+          </a:p>
+          <a:p>
+            <a:r>
+              <a:t>  "한국에서도 AI 디지털교과서와 AI 체험 전시가 이미 정책·기관 사례로 등장한다",</a:t>
+            </a:r>
+          </a:p>
+          <a:p>
+            <a:r>
+              <a:t>  "다만 한국 사례는 메인 논지의 증명이 아니라 후반 보조 연결로 사용한다",</a:t>
+            </a:r>
+          </a:p>
+          <a:p>
+            <a:r>
+              <a:t>  "핵심 질문은 한국도 결국 AI를 금지할지보다 어떻게 다룰지라는 쪽으로 옮겨갈 수 있다는 점이다"</a:t>
+            </a:r>
+          </a:p>
+          <a:p>
+            <a:r>
+              <a:t>]</a:t>
+            </a:r>
+          </a:p>
+          <a:p>
+            <a:r>
+              <a:t>overflow_body_lines:</a:t>
+            </a:r>
+          </a:p>
+          <a:p>
+            <a:r>
+              <a:t>[]</a:t>
+            </a:r>
+          </a:p>
           <a:p/>
           <a:p>
             <a:r>
@@ -2851,6 +3296,52 @@
               <a:t>]</a:t>
             </a:r>
           </a:p>
+          <a:p>
+            <a:r>
+              <a:t>manual_placeholder_hidden: True</a:t>
+            </a:r>
+          </a:p>
+          <a:p/>
+          <a:p>
+            <a:r>
+              <a:t>screen_body_lines:</a:t>
+            </a:r>
+          </a:p>
+          <a:p>
+            <a:r>
+              <a:t>[</a:t>
+            </a:r>
+          </a:p>
+          <a:p>
+            <a:r>
+              <a:t>  "AI가 답을 주는 건 막기 어렵다",</a:t>
+            </a:r>
+          </a:p>
+          <a:p>
+            <a:r>
+              <a:t>  "그렇다면 사람에게 남겨야 할 것은 답이 아니라 과정일 수 있다",</a:t>
+            </a:r>
+          </a:p>
+          <a:p>
+            <a:r>
+              <a:t>  "보고, 의심하고, 질문하고, 다시 확인하는 습관이 지식기관의 교육 목표가 될 수 있다"</a:t>
+            </a:r>
+          </a:p>
+          <a:p>
+            <a:r>
+              <a:t>]</a:t>
+            </a:r>
+          </a:p>
+          <a:p>
+            <a:r>
+              <a:t>overflow_body_lines:</a:t>
+            </a:r>
+          </a:p>
+          <a:p>
+            <a:r>
+              <a:t>[]</a:t>
+            </a:r>
+          </a:p>
           <a:p/>
           <a:p>
             <a:r>
@@ -3071,6 +3562,52 @@
               <a:t>]</a:t>
             </a:r>
           </a:p>
+          <a:p>
+            <a:r>
+              <a:t>manual_placeholder_hidden: True</a:t>
+            </a:r>
+          </a:p>
+          <a:p/>
+          <a:p>
+            <a:r>
+              <a:t>screen_body_lines:</a:t>
+            </a:r>
+          </a:p>
+          <a:p>
+            <a:r>
+              <a:t>[</a:t>
+            </a:r>
+          </a:p>
+          <a:p>
+            <a:r>
+              <a:t>  "모르는 것을 물으면 바로 답이 나오고, 검색 결과를 여러 개 열어보던 시간이 줄어든다",</a:t>
+            </a:r>
+          </a:p>
+          <a:p>
+            <a:r>
+              <a:t>  "AI는 접근성과 개인화 가능성도 넓힐 수 있다",</a:t>
+            </a:r>
+          </a:p>
+          <a:p>
+            <a:r>
+              <a:t>  "다만 편리함이 곧 배움이라는 뜻은 아니므로, 정보 탐색 과정의 변화로 조심스럽게 다룬다"</a:t>
+            </a:r>
+          </a:p>
+          <a:p>
+            <a:r>
+              <a:t>]</a:t>
+            </a:r>
+          </a:p>
+          <a:p>
+            <a:r>
+              <a:t>overflow_body_lines:</a:t>
+            </a:r>
+          </a:p>
+          <a:p>
+            <a:r>
+              <a:t>[]</a:t>
+            </a:r>
+          </a:p>
           <a:p/>
           <a:p>
             <a:r>
@@ -3306,6 +3843,42 @@
               <a:t>]</a:t>
             </a:r>
           </a:p>
+          <a:p>
+            <a:r>
+              <a:t>manual_placeholder_hidden: True</a:t>
+            </a:r>
+          </a:p>
+          <a:p/>
+          <a:p>
+            <a:r>
+              <a:t>screen_body_lines:</a:t>
+            </a:r>
+          </a:p>
+          <a:p>
+            <a:r>
+              <a:t>[</a:t>
+            </a:r>
+          </a:p>
+          <a:p>
+            <a:r>
+              <a:t>  "마지막 질문은 찬반이 아니라 교육의 역할"</a:t>
+            </a:r>
+          </a:p>
+          <a:p>
+            <a:r>
+              <a:t>]</a:t>
+            </a:r>
+          </a:p>
+          <a:p>
+            <a:r>
+              <a:t>overflow_body_lines:</a:t>
+            </a:r>
+          </a:p>
+          <a:p>
+            <a:r>
+              <a:t>[]</a:t>
+            </a:r>
+          </a:p>
           <a:p/>
           <a:p>
             <a:r>
@@ -3516,6 +4089,52 @@
               <a:t>]</a:t>
             </a:r>
           </a:p>
+          <a:p>
+            <a:r>
+              <a:t>manual_placeholder_hidden: False</a:t>
+            </a:r>
+          </a:p>
+          <a:p/>
+          <a:p>
+            <a:r>
+              <a:t>screen_body_lines:</a:t>
+            </a:r>
+          </a:p>
+          <a:p>
+            <a:r>
+              <a:t>[</a:t>
+            </a:r>
+          </a:p>
+          <a:p>
+            <a:r>
+              <a:t>  "학생도, 직장인도, 관람객도 이미 AI와 함께 정보를 찾는다",</a:t>
+            </a:r>
+          </a:p>
+          <a:p>
+            <a:r>
+              <a:t>  "반대로 AI는 학습 접근성과 개인화 가능성을 높일 수 있다는 주장도 있다",</a:t>
+            </a:r>
+          </a:p>
+          <a:p>
+            <a:r>
+              <a:t>  "그래서 문제는 사용 여부가 아니라, 어떤 질문을 던지고 어떤 답을 의심할지에 가깝다"</a:t>
+            </a:r>
+          </a:p>
+          <a:p>
+            <a:r>
+              <a:t>]</a:t>
+            </a:r>
+          </a:p>
+          <a:p>
+            <a:r>
+              <a:t>overflow_body_lines:</a:t>
+            </a:r>
+          </a:p>
+          <a:p>
+            <a:r>
+              <a:t>[]</a:t>
+            </a:r>
+          </a:p>
           <a:p/>
           <a:p>
             <a:r>
@@ -3751,6 +4370,62 @@
               <a:t>]</a:t>
             </a:r>
           </a:p>
+          <a:p>
+            <a:r>
+              <a:t>manual_placeholder_hidden: True</a:t>
+            </a:r>
+          </a:p>
+          <a:p/>
+          <a:p>
+            <a:r>
+              <a:t>screen_body_lines:</a:t>
+            </a:r>
+          </a:p>
+          <a:p>
+            <a:r>
+              <a:t>[</a:t>
+            </a:r>
+          </a:p>
+          <a:p>
+            <a:r>
+              <a:t>  "출처를 확인하는 법",</a:t>
+            </a:r>
+          </a:p>
+          <a:p>
+            <a:r>
+              <a:t>  "AI 답변의 빈틈을 찾는 법",</a:t>
+            </a:r>
+          </a:p>
+          <a:p>
+            <a:r>
+              <a:t>  "다른 자료와 비교하는 법"</a:t>
+            </a:r>
+          </a:p>
+          <a:p>
+            <a:r>
+              <a:t>]</a:t>
+            </a:r>
+          </a:p>
+          <a:p>
+            <a:r>
+              <a:t>overflow_body_lines:</a:t>
+            </a:r>
+          </a:p>
+          <a:p>
+            <a:r>
+              <a:t>[</a:t>
+            </a:r>
+          </a:p>
+          <a:p>
+            <a:r>
+              <a:t>  "모르는 것을 모른다고 남기는 법"</a:t>
+            </a:r>
+          </a:p>
+          <a:p>
+            <a:r>
+              <a:t>]</a:t>
+            </a:r>
+          </a:p>
           <a:p/>
           <a:p>
             <a:r>
@@ -3996,6 +4671,52 @@
               <a:t>]</a:t>
             </a:r>
           </a:p>
+          <a:p>
+            <a:r>
+              <a:t>manual_placeholder_hidden: False</a:t>
+            </a:r>
+          </a:p>
+          <a:p/>
+          <a:p>
+            <a:r>
+              <a:t>screen_body_lines:</a:t>
+            </a:r>
+          </a:p>
+          <a:p>
+            <a:r>
+              <a:t>[</a:t>
+            </a:r>
+          </a:p>
+          <a:p>
+            <a:r>
+              <a:t>  "망원경은 하늘을 대신 봐주지 않는다",</a:t>
+            </a:r>
+          </a:p>
+          <a:p>
+            <a:r>
+              <a:t>  "더 멀리 보게 해줄 뿐, 어디를 볼지는 사람이 정한다",</a:t>
+            </a:r>
+          </a:p>
+          <a:p>
+            <a:r>
+              <a:t>  "AI도 답을 대신 주는 도구로만 쓰기보다, 더 좋은 질문을 돕는 도구가 될 수 있는지 묻는다"</a:t>
+            </a:r>
+          </a:p>
+          <a:p>
+            <a:r>
+              <a:t>]</a:t>
+            </a:r>
+          </a:p>
+          <a:p>
+            <a:r>
+              <a:t>overflow_body_lines:</a:t>
+            </a:r>
+          </a:p>
+          <a:p>
+            <a:r>
+              <a:t>[]</a:t>
+            </a:r>
+          </a:p>
           <a:p/>
           <a:p>
             <a:r>
@@ -4216,6 +4937,67 @@
               <a:t>]</a:t>
             </a:r>
           </a:p>
+          <a:p>
+            <a:r>
+              <a:t>manual_placeholder_hidden: False</a:t>
+            </a:r>
+          </a:p>
+          <a:p/>
+          <a:p>
+            <a:r>
+              <a:t>screen_body_lines:</a:t>
+            </a:r>
+          </a:p>
+          <a:p>
+            <a:r>
+              <a:t>[</a:t>
+            </a:r>
+          </a:p>
+          <a:p>
+            <a:r>
+              <a:t>  "BBC/Royal Observatory 원문 맥락",</a:t>
+            </a:r>
+          </a:p>
+          <a:p>
+            <a:r>
+              <a:t>  "AI 정보탐색·교육 관련 보조 연구",</a:t>
+            </a:r>
+          </a:p>
+          <a:p>
+            <a:r>
+              <a:t>  "AI 접근성/개인화라는 counterpoint"</a:t>
+            </a:r>
+          </a:p>
+          <a:p>
+            <a:r>
+              <a:t>]</a:t>
+            </a:r>
+          </a:p>
+          <a:p>
+            <a:r>
+              <a:t>overflow_body_lines:</a:t>
+            </a:r>
+          </a:p>
+          <a:p>
+            <a:r>
+              <a:t>[</a:t>
+            </a:r>
+          </a:p>
+          <a:p>
+            <a:r>
+              <a:t>  "한국 학교·과학관 사례",</a:t>
+            </a:r>
+          </a:p>
+          <a:p>
+            <a:r>
+              <a:t>  "남은 숫자와 사례는 production 전에 추가 확인"</a:t>
+            </a:r>
+          </a:p>
+          <a:p>
+            <a:r>
+              <a:t>]</a:t>
+            </a:r>
+          </a:p>
           <a:p/>
           <a:p>
             <a:r>
@@ -4511,6 +5293,52 @@
               <a:t>]</a:t>
             </a:r>
           </a:p>
+          <a:p>
+            <a:r>
+              <a:t>manual_placeholder_hidden: True</a:t>
+            </a:r>
+          </a:p>
+          <a:p/>
+          <a:p>
+            <a:r>
+              <a:t>screen_body_lines:</a:t>
+            </a:r>
+          </a:p>
+          <a:p>
+            <a:r>
+              <a:t>[</a:t>
+            </a:r>
+          </a:p>
+          <a:p>
+            <a:r>
+              <a:t>  "좋은 질문을 만들고",</a:t>
+            </a:r>
+          </a:p>
+          <a:p>
+            <a:r>
+              <a:t>  "답의 출처를 확인하고",</a:t>
+            </a:r>
+          </a:p>
+          <a:p>
+            <a:r>
+              <a:t>  "모르는 것을 남겨두는 법을 배우는 일일지도 모른다"</a:t>
+            </a:r>
+          </a:p>
+          <a:p>
+            <a:r>
+              <a:t>]</a:t>
+            </a:r>
+          </a:p>
+          <a:p>
+            <a:r>
+              <a:t>overflow_body_lines:</a:t>
+            </a:r>
+          </a:p>
+          <a:p>
+            <a:r>
+              <a:t>[]</a:t>
+            </a:r>
+          </a:p>
           <a:p/>
           <a:p>
             <a:r>
@@ -4721,6 +5549,47 @@
               <a:t>]</a:t>
             </a:r>
           </a:p>
+          <a:p>
+            <a:r>
+              <a:t>manual_placeholder_hidden: True</a:t>
+            </a:r>
+          </a:p>
+          <a:p/>
+          <a:p>
+            <a:r>
+              <a:t>screen_body_lines:</a:t>
+            </a:r>
+          </a:p>
+          <a:p>
+            <a:r>
+              <a:t>[</a:t>
+            </a:r>
+          </a:p>
+          <a:p>
+            <a:r>
+              <a:t>  "이제 진짜 시험 문제는 이걸지도 모른다",</a:t>
+            </a:r>
+          </a:p>
+          <a:p>
+            <a:r>
+              <a:t>  "답은 AI가 했는데, 질문은 누가 했습니까?"</a:t>
+            </a:r>
+          </a:p>
+          <a:p>
+            <a:r>
+              <a:t>]</a:t>
+            </a:r>
+          </a:p>
+          <a:p>
+            <a:r>
+              <a:t>overflow_body_lines:</a:t>
+            </a:r>
+          </a:p>
+          <a:p>
+            <a:r>
+              <a:t>[]</a:t>
+            </a:r>
+          </a:p>
           <a:p/>
           <a:p>
             <a:r>
@@ -4931,6 +5800,52 @@
               <a:t>]</a:t>
             </a:r>
           </a:p>
+          <a:p>
+            <a:r>
+              <a:t>manual_placeholder_hidden: True</a:t>
+            </a:r>
+          </a:p>
+          <a:p/>
+          <a:p>
+            <a:r>
+              <a:t>screen_body_lines:</a:t>
+            </a:r>
+          </a:p>
+          <a:p>
+            <a:r>
+              <a:t>[</a:t>
+            </a:r>
+          </a:p>
+          <a:p>
+            <a:r>
+              <a:t>  "BBC 보도는 Royal Observatory 쪽 경고를 AI 의존과 인간 지식의 역할이라는 맥락에서 소개한다",</a:t>
+            </a:r>
+          </a:p>
+          <a:p>
+            <a:r>
+              <a:t>  "이 메시지는 AI 금지가 아니라, 답을 받는 사람이 무엇을 배워야 하느냐는 질문으로 읽는다",</a:t>
+            </a:r>
+          </a:p>
+          <a:p>
+            <a:r>
+              <a:t>  "단일 기관 사례이므로 모든 지식기관의 공식 입장처럼 일반화하지 않는다"</a:t>
+            </a:r>
+          </a:p>
+          <a:p>
+            <a:r>
+              <a:t>]</a:t>
+            </a:r>
+          </a:p>
+          <a:p>
+            <a:r>
+              <a:t>overflow_body_lines:</a:t>
+            </a:r>
+          </a:p>
+          <a:p>
+            <a:r>
+              <a:t>[]</a:t>
+            </a:r>
+          </a:p>
           <a:p/>
           <a:p>
             <a:r>
@@ -5156,6 +6071,52 @@
               <a:t>]</a:t>
             </a:r>
           </a:p>
+          <a:p>
+            <a:r>
+              <a:t>manual_placeholder_hidden: True</a:t>
+            </a:r>
+          </a:p>
+          <a:p/>
+          <a:p>
+            <a:r>
+              <a:t>screen_body_lines:</a:t>
+            </a:r>
+          </a:p>
+          <a:p>
+            <a:r>
+              <a:t>[</a:t>
+            </a:r>
+          </a:p>
+          <a:p>
+            <a:r>
+              <a:t>  "천문학은 답 하나보다 관찰·추론·검증의 과정이 중요한 분야다",</a:t>
+            </a:r>
+          </a:p>
+          <a:p>
+            <a:r>
+              <a:t>  "AI 즉답은 그 과정을 도와줄 수도, 일부 건너뛰게 만들 수도 있다",</a:t>
+            </a:r>
+          </a:p>
+          <a:p>
+            <a:r>
+              <a:t>  "여기서는 사실 증명보다 방송용 문제 제기: 도구가 답을 줄 때 사람의 관찰은 어디에 남는가"</a:t>
+            </a:r>
+          </a:p>
+          <a:p>
+            <a:r>
+              <a:t>]</a:t>
+            </a:r>
+          </a:p>
+          <a:p>
+            <a:r>
+              <a:t>overflow_body_lines:</a:t>
+            </a:r>
+          </a:p>
+          <a:p>
+            <a:r>
+              <a:t>[]</a:t>
+            </a:r>
+          </a:p>
           <a:p/>
           <a:p>
             <a:r>
@@ -5391,6 +6352,52 @@
               <a:t>]</a:t>
             </a:r>
           </a:p>
+          <a:p>
+            <a:r>
+              <a:t>manual_placeholder_hidden: False</a:t>
+            </a:r>
+          </a:p>
+          <a:p/>
+          <a:p>
+            <a:r>
+              <a:t>screen_body_lines:</a:t>
+            </a:r>
+          </a:p>
+          <a:p>
+            <a:r>
+              <a:t>[</a:t>
+            </a:r>
+          </a:p>
+          <a:p>
+            <a:r>
+              <a:t>  "학교, 박물관, 도서관, 과학관도 AI가 설명을 대신하는 시대의 질문을 마주한다",</a:t>
+            </a:r>
+          </a:p>
+          <a:p>
+            <a:r>
+              <a:t>  "UNESCO와 OECD 자료는 AI 교육을 단순 도구 사용이 아니라 역량·원칙의 문제로 다룬다",</a:t>
+            </a:r>
+          </a:p>
+          <a:p>
+            <a:r>
+              <a:t>  "따라서 핵심은 답 제공 경쟁이 아니라 질문·검증·맥락을 가르치는 역할 변화다"</a:t>
+            </a:r>
+          </a:p>
+          <a:p>
+            <a:r>
+              <a:t>]</a:t>
+            </a:r>
+          </a:p>
+          <a:p>
+            <a:r>
+              <a:t>overflow_body_lines:</a:t>
+            </a:r>
+          </a:p>
+          <a:p>
+            <a:r>
+              <a:t>[]</a:t>
+            </a:r>
+          </a:p>
           <a:p/>
           <a:p>
             <a:r>
@@ -5626,6 +6633,52 @@
               <a:t>]</a:t>
             </a:r>
           </a:p>
+          <a:p>
+            <a:r>
+              <a:t>manual_placeholder_hidden: True</a:t>
+            </a:r>
+          </a:p>
+          <a:p/>
+          <a:p>
+            <a:r>
+              <a:t>screen_body_lines:</a:t>
+            </a:r>
+          </a:p>
+          <a:p>
+            <a:r>
+              <a:t>[</a:t>
+            </a:r>
+          </a:p>
+          <a:p>
+            <a:r>
+              <a:t>  "답을 아는 능력인가",</a:t>
+            </a:r>
+          </a:p>
+          <a:p>
+            <a:r>
+              <a:t>  "답을 의심하고 확인하는 능력인가",</a:t>
+            </a:r>
+          </a:p>
+          <a:p>
+            <a:r>
+              <a:t>  "혹은 더 좋은 질문을 만드는 능력인가"</a:t>
+            </a:r>
+          </a:p>
+          <a:p>
+            <a:r>
+              <a:t>]</a:t>
+            </a:r>
+          </a:p>
+          <a:p>
+            <a:r>
+              <a:t>overflow_body_lines:</a:t>
+            </a:r>
+          </a:p>
+          <a:p>
+            <a:r>
+              <a:t>[]</a:t>
+            </a:r>
+          </a:p>
           <a:p/>
           <a:p>
             <a:r>
@@ -5836,6 +6889,42 @@
               <a:t>]</a:t>
             </a:r>
           </a:p>
+          <a:p>
+            <a:r>
+              <a:t>manual_placeholder_hidden: True</a:t>
+            </a:r>
+          </a:p>
+          <a:p/>
+          <a:p>
+            <a:r>
+              <a:t>screen_body_lines:</a:t>
+            </a:r>
+          </a:p>
+          <a:p>
+            <a:r>
+              <a:t>[</a:t>
+            </a:r>
+          </a:p>
+          <a:p>
+            <a:r>
+              <a:t>  "AI가 답을 주면, 사람은 무엇을 덜 하게 될까"</a:t>
+            </a:r>
+          </a:p>
+          <a:p>
+            <a:r>
+              <a:t>]</a:t>
+            </a:r>
+          </a:p>
+          <a:p>
+            <a:r>
+              <a:t>overflow_body_lines:</a:t>
+            </a:r>
+          </a:p>
+          <a:p>
+            <a:r>
+              <a:t>[]</a:t>
+            </a:r>
+          </a:p>
           <a:p/>
           <a:p>
             <a:r>
@@ -6046,6 +7135,52 @@
               <a:t>]</a:t>
             </a:r>
           </a:p>
+          <a:p>
+            <a:r>
+              <a:t>manual_placeholder_hidden: True</a:t>
+            </a:r>
+          </a:p>
+          <a:p/>
+          <a:p>
+            <a:r>
+              <a:t>screen_body_lines:</a:t>
+            </a:r>
+          </a:p>
+          <a:p>
+            <a:r>
+              <a:t>[</a:t>
+            </a:r>
+          </a:p>
+          <a:p>
+            <a:r>
+              <a:t>  "검색어를 바꿔보고, 여러 결과를 비교하고, 출처를 고르는 과정이 있었다",</a:t>
+            </a:r>
+          </a:p>
+          <a:p>
+            <a:r>
+              <a:t>  "이 과정은 느리지만 정보 탐색의 다양성과 판단 훈련을 남긴다",</a:t>
+            </a:r>
+          </a:p>
+          <a:p>
+            <a:r>
+              <a:t>  "Microsoft Research 자료는 generative AI가 정보 탐색 다양성에 어떤 영향을 줄 수 있는지 문제를 제기한다"</a:t>
+            </a:r>
+          </a:p>
+          <a:p>
+            <a:r>
+              <a:t>]</a:t>
+            </a:r>
+          </a:p>
+          <a:p>
+            <a:r>
+              <a:t>overflow_body_lines:</a:t>
+            </a:r>
+          </a:p>
+          <a:p>
+            <a:r>
+              <a:t>[]</a:t>
+            </a:r>
+          </a:p>
           <a:p/>
           <a:p>
             <a:r>
@@ -6269,6 +7404,52 @@
           <a:p>
             <a:r>
               <a:t>]</a:t>
+            </a:r>
+          </a:p>
+          <a:p>
+            <a:r>
+              <a:t>manual_placeholder_hidden: False</a:t>
+            </a:r>
+          </a:p>
+          <a:p/>
+          <a:p>
+            <a:r>
+              <a:t>screen_body_lines:</a:t>
+            </a:r>
+          </a:p>
+          <a:p>
+            <a:r>
+              <a:t>[</a:t>
+            </a:r>
+          </a:p>
+          <a:p>
+            <a:r>
+              <a:t>  "좋은 점: 빠르고, 친절하고, 맥락을 이어준다",</a:t>
+            </a:r>
+          </a:p>
+          <a:p>
+            <a:r>
+              <a:t>  "걱정되는 점: 비교·검증·실패의 경험이 줄어들 가능성이 있다",</a:t>
+            </a:r>
+          </a:p>
+          <a:p>
+            <a:r>
+              <a:t>  "중요: 이것이 곧 학습 저하라는 단정은 아니며, 설계와 교육 원칙에 따라 달라질 수 있다"</a:t>
+            </a:r>
+          </a:p>
+          <a:p>
+            <a:r>
+              <a:t>]</a:t>
+            </a:r>
+          </a:p>
+          <a:p>
+            <a:r>
+              <a:t>overflow_body_lines:</a:t>
+            </a:r>
+          </a:p>
+          <a:p>
+            <a:r>
+              <a:t>[]</a:t>
             </a:r>
           </a:p>
           <a:p/>
@@ -9415,8 +10596,8 @@
         </p:nvSpPr>
         <p:spPr>
           <a:xfrm>
-            <a:off x="856792" y="1122883"/>
-            <a:ext cx="10478109" cy="2387498"/>
+            <a:off x="685800" y="438912"/>
+            <a:ext cx="10789920" cy="685800"/>
           </a:xfrm>
           <a:prstGeom prst="rect">
             <a:avLst/>
@@ -9430,7 +10611,7 @@
           <a:lstStyle/>
           <a:p>
             <a:r>
-              <a:rPr sz="3800" b="1">
+              <a:rPr sz="2800" b="1" u="none">
                 <a:solidFill>
                   <a:srgbClr val="FF0000"/>
                 </a:solidFill>
@@ -9449,8 +10630,8 @@
         </p:nvSpPr>
         <p:spPr>
           <a:xfrm>
-            <a:off x="948232" y="3043123"/>
-            <a:ext cx="9875520" cy="914400"/>
+            <a:off x="685800" y="1444752"/>
+            <a:ext cx="9875520" cy="1280160"/>
           </a:xfrm>
           <a:prstGeom prst="rect">
             <a:avLst/>
@@ -9469,9 +10650,9 @@
               </a:spcAft>
             </a:pPr>
             <a:r>
-              <a:rPr sz="2800">
-                <a:solidFill>
-                  <a:srgbClr val="FF0000"/>
+              <a:rPr sz="2800" b="0" u="none">
+                <a:solidFill>
+                  <a:srgbClr val="000000"/>
                 </a:solidFill>
                 <a:latin typeface="맑은 고딕"/>
               </a:rPr>
@@ -9485,9 +10666,9 @@
               </a:spcAft>
             </a:pPr>
             <a:r>
-              <a:rPr sz="2800">
-                <a:solidFill>
-                  <a:srgbClr val="FF0000"/>
+              <a:rPr sz="2800" b="0" u="none">
+                <a:solidFill>
+                  <a:srgbClr val="000000"/>
                 </a:solidFill>
                 <a:latin typeface="맑은 고딕"/>
               </a:rPr>
@@ -9519,7 +10700,7 @@
           <a:lstStyle/>
           <a:p>
             <a:r>
-              <a:rPr sz="800" b="0">
+              <a:rPr sz="800" b="0" u="none">
                 <a:solidFill>
                   <a:srgbClr val="566070"/>
                 </a:solidFill>
@@ -9554,7 +10735,7 @@
           <a:p>
             <a:pPr algn="r"/>
             <a:r>
-              <a:rPr sz="800" b="0">
+              <a:rPr sz="800" b="0" u="none">
                 <a:solidFill>
                   <a:srgbClr val="566070"/>
                 </a:solidFill>
@@ -9600,7 +10781,7 @@
         <p:spPr>
           <a:xfrm>
             <a:off x="572414" y="411480"/>
-            <a:ext cx="6720840" cy="685800"/>
+            <a:ext cx="10972800" cy="685800"/>
           </a:xfrm>
           <a:prstGeom prst="rect">
             <a:avLst/>
@@ -9614,7 +10795,7 @@
           <a:lstStyle/>
           <a:p>
             <a:r>
-              <a:rPr sz="2800" b="1">
+              <a:rPr sz="2800" b="1" u="none">
                 <a:solidFill>
                   <a:srgbClr val="FF0000"/>
                 </a:solidFill>
@@ -9634,7 +10815,7 @@
         <p:spPr>
           <a:xfrm>
             <a:off x="572414" y="1208836"/>
-            <a:ext cx="6720840" cy="1302105"/>
+            <a:ext cx="11193170" cy="1302105"/>
           </a:xfrm>
           <a:prstGeom prst="rect">
             <a:avLst/>
@@ -9653,9 +10834,9 @@
               </a:spcAft>
             </a:pPr>
             <a:r>
-              <a:rPr sz="2000">
-                <a:solidFill>
-                  <a:srgbClr val="FF0000"/>
+              <a:rPr sz="2800" b="0" u="none">
+                <a:solidFill>
+                  <a:srgbClr val="000000"/>
                 </a:solidFill>
                 <a:latin typeface="맑은 고딕"/>
               </a:rPr>
@@ -9669,9 +10850,9 @@
               </a:spcAft>
             </a:pPr>
             <a:r>
-              <a:rPr sz="2000">
-                <a:solidFill>
-                  <a:srgbClr val="FF0000"/>
+              <a:rPr sz="2800" b="0" u="none">
+                <a:solidFill>
+                  <a:srgbClr val="000000"/>
                 </a:solidFill>
                 <a:latin typeface="맑은 고딕"/>
               </a:rPr>
@@ -9685,9 +10866,9 @@
               </a:spcAft>
             </a:pPr>
             <a:r>
-              <a:rPr sz="2000">
-                <a:solidFill>
-                  <a:srgbClr val="FF0000"/>
+              <a:rPr sz="2800" b="0" u="none">
+                <a:solidFill>
+                  <a:srgbClr val="000000"/>
                 </a:solidFill>
                 <a:latin typeface="맑은 고딕"/>
               </a:rPr>
@@ -9698,61 +10879,7 @@
       </p:sp>
       <p:sp>
         <p:nvSpPr>
-          <p:cNvPr id="4" name="Rectangle 3"/>
-          <p:cNvSpPr/>
-          <p:nvPr/>
-        </p:nvSpPr>
-        <p:spPr>
-          <a:xfrm>
-            <a:off x="8001000" y="1572768"/>
-            <a:ext cx="3337560" cy="3611880"/>
-          </a:xfrm>
-          <a:prstGeom prst="rect">
-            <a:avLst/>
-          </a:prstGeom>
-          <a:solidFill>
-            <a:srgbClr val="F5F5F5"/>
-          </a:solidFill>
-          <a:ln w="12700">
-            <a:solidFill>
-              <a:srgbClr val="BEBEBE"/>
-            </a:solidFill>
-          </a:ln>
-        </p:spPr>
-        <p:style>
-          <a:lnRef idx="1">
-            <a:schemeClr val="accent1"/>
-          </a:lnRef>
-          <a:fillRef idx="3">
-            <a:schemeClr val="accent1"/>
-          </a:fillRef>
-          <a:effectRef idx="2">
-            <a:schemeClr val="accent1"/>
-          </a:effectRef>
-          <a:fontRef idx="minor">
-            <a:schemeClr val="lt1"/>
-          </a:fontRef>
-        </p:style>
-        <p:txBody>
-          <a:bodyPr rtlCol="0" anchor="ctr" wrap="square"/>
-          <a:lstStyle/>
-          <a:p>
-            <a:pPr algn="ctr"/>
-            <a:r>
-              <a:rPr sz="1300">
-                <a:solidFill>
-                  <a:srgbClr val="566070"/>
-                </a:solidFill>
-                <a:latin typeface="맑은 고딕"/>
-              </a:rPr>
-              <a:t>[수동 삽입]</a:t>
-            </a:r>
-          </a:p>
-        </p:txBody>
-      </p:sp>
-      <p:sp>
-        <p:nvSpPr>
-          <p:cNvPr id="5" name="TextBox 4"/>
+          <p:cNvPr id="4" name="TextBox 3"/>
           <p:cNvSpPr txBox="1"/>
           <p:nvPr/>
         </p:nvSpPr>
@@ -9773,7 +10900,7 @@
           <a:lstStyle/>
           <a:p>
             <a:r>
-              <a:rPr sz="800" b="0">
+              <a:rPr sz="800" b="0" u="none">
                 <a:solidFill>
                   <a:srgbClr val="566070"/>
                 </a:solidFill>
@@ -9786,7 +10913,7 @@
       </p:sp>
       <p:sp>
         <p:nvSpPr>
-          <p:cNvPr id="6" name="TextBox 5"/>
+          <p:cNvPr id="5" name="TextBox 4"/>
           <p:cNvSpPr txBox="1"/>
           <p:nvPr/>
         </p:nvSpPr>
@@ -9808,7 +10935,7 @@
           <a:p>
             <a:pPr algn="r"/>
             <a:r>
-              <a:rPr sz="800" b="0">
+              <a:rPr sz="800" b="0" u="none">
                 <a:solidFill>
                   <a:srgbClr val="566070"/>
                 </a:solidFill>
@@ -9913,7 +11040,7 @@
           <a:lstStyle/>
           <a:p>
             <a:r>
-              <a:rPr sz="2800" b="1">
+              <a:rPr sz="2800" b="1" u="none">
                 <a:solidFill>
                   <a:srgbClr val="FF0000"/>
                 </a:solidFill>
@@ -9952,9 +11079,9 @@
               </a:spcAft>
             </a:pPr>
             <a:r>
-              <a:rPr sz="2800">
-                <a:solidFill>
-                  <a:srgbClr val="FF0000"/>
+              <a:rPr sz="2800" b="0" u="none">
+                <a:solidFill>
+                  <a:srgbClr val="000000"/>
                 </a:solidFill>
                 <a:latin typeface="맑은 고딕"/>
               </a:rPr>
@@ -9968,9 +11095,9 @@
               </a:spcAft>
             </a:pPr>
             <a:r>
-              <a:rPr sz="2800">
-                <a:solidFill>
-                  <a:srgbClr val="FF0000"/>
+              <a:rPr sz="2800" b="0" u="none">
+                <a:solidFill>
+                  <a:srgbClr val="000000"/>
                 </a:solidFill>
                 <a:latin typeface="맑은 고딕"/>
               </a:rPr>
@@ -9984,9 +11111,9 @@
               </a:spcAft>
             </a:pPr>
             <a:r>
-              <a:rPr sz="2800">
-                <a:solidFill>
-                  <a:srgbClr val="FF0000"/>
+              <a:rPr sz="2800" b="0" u="none">
+                <a:solidFill>
+                  <a:srgbClr val="000000"/>
                 </a:solidFill>
                 <a:latin typeface="맑은 고딕"/>
               </a:rPr>
@@ -10018,7 +11145,7 @@
           <a:lstStyle/>
           <a:p>
             <a:r>
-              <a:rPr sz="800" b="0">
+              <a:rPr sz="800" b="0" u="none">
                 <a:solidFill>
                   <a:srgbClr val="566070"/>
                 </a:solidFill>
@@ -10053,7 +11180,7 @@
           <a:p>
             <a:pPr algn="r"/>
             <a:r>
-              <a:rPr sz="800" b="0">
+              <a:rPr sz="800" b="0" u="none">
                 <a:solidFill>
                   <a:srgbClr val="566070"/>
                 </a:solidFill>
@@ -10113,7 +11240,7 @@
           <a:lstStyle/>
           <a:p>
             <a:r>
-              <a:rPr sz="2800" b="1">
+              <a:rPr sz="2800" b="1" u="none">
                 <a:solidFill>
                   <a:srgbClr val="FF0000"/>
                 </a:solidFill>
@@ -10133,7 +11260,7 @@
         <p:spPr>
           <a:xfrm>
             <a:off x="713232" y="2795320"/>
-            <a:ext cx="6766560" cy="2651760"/>
+            <a:ext cx="9875520" cy="2651760"/>
           </a:xfrm>
           <a:prstGeom prst="rect">
             <a:avLst/>
@@ -10152,9 +11279,9 @@
               </a:spcAft>
             </a:pPr>
             <a:r>
-              <a:rPr sz="2000">
-                <a:solidFill>
-                  <a:srgbClr val="FF0000"/>
+              <a:rPr sz="2800" b="0" u="none">
+                <a:solidFill>
+                  <a:srgbClr val="000000"/>
                 </a:solidFill>
                 <a:latin typeface="맑은 고딕"/>
               </a:rPr>
@@ -10168,9 +11295,9 @@
               </a:spcAft>
             </a:pPr>
             <a:r>
-              <a:rPr sz="2000">
-                <a:solidFill>
-                  <a:srgbClr val="FF0000"/>
+              <a:rPr sz="2800" b="0" u="none">
+                <a:solidFill>
+                  <a:srgbClr val="000000"/>
                 </a:solidFill>
                 <a:latin typeface="맑은 고딕"/>
               </a:rPr>
@@ -10184,9 +11311,9 @@
               </a:spcAft>
             </a:pPr>
             <a:r>
-              <a:rPr sz="2000">
-                <a:solidFill>
-                  <a:srgbClr val="FF0000"/>
+              <a:rPr sz="2800" b="0" u="none">
+                <a:solidFill>
+                  <a:srgbClr val="000000"/>
                 </a:solidFill>
                 <a:latin typeface="맑은 고딕"/>
               </a:rPr>
@@ -10197,61 +11324,7 @@
       </p:sp>
       <p:sp>
         <p:nvSpPr>
-          <p:cNvPr id="4" name="Rectangle 3"/>
-          <p:cNvSpPr/>
-          <p:nvPr/>
-        </p:nvSpPr>
-        <p:spPr>
-          <a:xfrm>
-            <a:off x="8458200" y="4389120"/>
-            <a:ext cx="2560320" cy="1097280"/>
-          </a:xfrm>
-          <a:prstGeom prst="rect">
-            <a:avLst/>
-          </a:prstGeom>
-          <a:solidFill>
-            <a:srgbClr val="F5F5F5"/>
-          </a:solidFill>
-          <a:ln w="12700">
-            <a:solidFill>
-              <a:srgbClr val="BEBEBE"/>
-            </a:solidFill>
-          </a:ln>
-        </p:spPr>
-        <p:style>
-          <a:lnRef idx="1">
-            <a:schemeClr val="accent1"/>
-          </a:lnRef>
-          <a:fillRef idx="3">
-            <a:schemeClr val="accent1"/>
-          </a:fillRef>
-          <a:effectRef idx="2">
-            <a:schemeClr val="accent1"/>
-          </a:effectRef>
-          <a:fontRef idx="minor">
-            <a:schemeClr val="lt1"/>
-          </a:fontRef>
-        </p:style>
-        <p:txBody>
-          <a:bodyPr rtlCol="0" anchor="ctr" wrap="square"/>
-          <a:lstStyle/>
-          <a:p>
-            <a:pPr algn="ctr"/>
-            <a:r>
-              <a:rPr sz="1300">
-                <a:solidFill>
-                  <a:srgbClr val="566070"/>
-                </a:solidFill>
-                <a:latin typeface="맑은 고딕"/>
-              </a:rPr>
-              <a:t>[수동 삽입]</a:t>
-            </a:r>
-          </a:p>
-        </p:txBody>
-      </p:sp>
-      <p:sp>
-        <p:nvSpPr>
-          <p:cNvPr id="5" name="TextBox 4"/>
+          <p:cNvPr id="4" name="TextBox 3"/>
           <p:cNvSpPr txBox="1"/>
           <p:nvPr/>
         </p:nvSpPr>
@@ -10272,7 +11345,7 @@
           <a:lstStyle/>
           <a:p>
             <a:r>
-              <a:rPr sz="800" b="0">
+              <a:rPr sz="800" b="0" u="none">
                 <a:solidFill>
                   <a:srgbClr val="566070"/>
                 </a:solidFill>
@@ -10285,7 +11358,7 @@
       </p:sp>
       <p:sp>
         <p:nvSpPr>
-          <p:cNvPr id="6" name="TextBox 5"/>
+          <p:cNvPr id="5" name="TextBox 4"/>
           <p:cNvSpPr txBox="1"/>
           <p:nvPr/>
         </p:nvSpPr>
@@ -10307,7 +11380,7 @@
           <a:p>
             <a:pPr algn="r"/>
             <a:r>
-              <a:rPr sz="800" b="0">
+              <a:rPr sz="800" b="0" u="none">
                 <a:solidFill>
                   <a:srgbClr val="566070"/>
                 </a:solidFill>
@@ -10367,7 +11440,7 @@
           <a:lstStyle/>
           <a:p>
             <a:r>
-              <a:rPr sz="5400" b="1">
+              <a:rPr sz="5400" b="1" u="none">
                 <a:solidFill>
                   <a:srgbClr val="181C23"/>
                 </a:solidFill>
@@ -10406,7 +11479,7 @@
               </a:spcAft>
             </a:pPr>
             <a:r>
-              <a:rPr sz="2800">
+              <a:rPr sz="2800" b="0" u="none">
                 <a:solidFill>
                   <a:srgbClr val="181C23"/>
                 </a:solidFill>
@@ -10440,7 +11513,7 @@
           <a:lstStyle/>
           <a:p>
             <a:r>
-              <a:rPr sz="800" b="0">
+              <a:rPr sz="800" b="0" u="none">
                 <a:solidFill>
                   <a:srgbClr val="566070"/>
                 </a:solidFill>
@@ -10475,7 +11548,7 @@
           <a:p>
             <a:pPr algn="r"/>
             <a:r>
-              <a:rPr sz="800" b="0">
+              <a:rPr sz="800" b="0" u="none">
                 <a:solidFill>
                   <a:srgbClr val="566070"/>
                 </a:solidFill>
@@ -10521,7 +11594,7 @@
         <p:spPr>
           <a:xfrm>
             <a:off x="572414" y="411480"/>
-            <a:ext cx="6720840" cy="685800"/>
+            <a:ext cx="10972800" cy="685800"/>
           </a:xfrm>
           <a:prstGeom prst="rect">
             <a:avLst/>
@@ -10535,7 +11608,7 @@
           <a:lstStyle/>
           <a:p>
             <a:r>
-              <a:rPr sz="2800" b="1">
+              <a:rPr sz="2800" b="1" u="none">
                 <a:solidFill>
                   <a:srgbClr val="FF0000"/>
                 </a:solidFill>
@@ -10555,7 +11628,7 @@
         <p:spPr>
           <a:xfrm>
             <a:off x="572414" y="1208836"/>
-            <a:ext cx="6720840" cy="1302105"/>
+            <a:ext cx="11193170" cy="1302105"/>
           </a:xfrm>
           <a:prstGeom prst="rect">
             <a:avLst/>
@@ -10574,9 +11647,9 @@
               </a:spcAft>
             </a:pPr>
             <a:r>
-              <a:rPr sz="2000">
-                <a:solidFill>
-                  <a:srgbClr val="FF0000"/>
+              <a:rPr sz="2800" b="0" u="none">
+                <a:solidFill>
+                  <a:srgbClr val="000000"/>
                 </a:solidFill>
                 <a:latin typeface="맑은 고딕"/>
               </a:rPr>
@@ -10590,9 +11663,9 @@
               </a:spcAft>
             </a:pPr>
             <a:r>
-              <a:rPr sz="2000">
-                <a:solidFill>
-                  <a:srgbClr val="FF0000"/>
+              <a:rPr sz="2800" b="0" u="none">
+                <a:solidFill>
+                  <a:srgbClr val="000000"/>
                 </a:solidFill>
                 <a:latin typeface="맑은 고딕"/>
               </a:rPr>
@@ -10606,9 +11679,9 @@
               </a:spcAft>
             </a:pPr>
             <a:r>
-              <a:rPr sz="2000">
-                <a:solidFill>
-                  <a:srgbClr val="FF0000"/>
+              <a:rPr sz="2800" b="0" u="none">
+                <a:solidFill>
+                  <a:srgbClr val="000000"/>
                 </a:solidFill>
                 <a:latin typeface="맑은 고딕"/>
               </a:rPr>
@@ -10619,61 +11692,7 @@
       </p:sp>
       <p:sp>
         <p:nvSpPr>
-          <p:cNvPr id="4" name="Rectangle 3"/>
-          <p:cNvSpPr/>
-          <p:nvPr/>
-        </p:nvSpPr>
-        <p:spPr>
-          <a:xfrm>
-            <a:off x="8001000" y="1572768"/>
-            <a:ext cx="3337560" cy="3611880"/>
-          </a:xfrm>
-          <a:prstGeom prst="rect">
-            <a:avLst/>
-          </a:prstGeom>
-          <a:solidFill>
-            <a:srgbClr val="F5F5F5"/>
-          </a:solidFill>
-          <a:ln w="12700">
-            <a:solidFill>
-              <a:srgbClr val="BEBEBE"/>
-            </a:solidFill>
-          </a:ln>
-        </p:spPr>
-        <p:style>
-          <a:lnRef idx="1">
-            <a:schemeClr val="accent1"/>
-          </a:lnRef>
-          <a:fillRef idx="3">
-            <a:schemeClr val="accent1"/>
-          </a:fillRef>
-          <a:effectRef idx="2">
-            <a:schemeClr val="accent1"/>
-          </a:effectRef>
-          <a:fontRef idx="minor">
-            <a:schemeClr val="lt1"/>
-          </a:fontRef>
-        </p:style>
-        <p:txBody>
-          <a:bodyPr rtlCol="0" anchor="ctr" wrap="square"/>
-          <a:lstStyle/>
-          <a:p>
-            <a:pPr algn="ctr"/>
-            <a:r>
-              <a:rPr sz="1300">
-                <a:solidFill>
-                  <a:srgbClr val="566070"/>
-                </a:solidFill>
-                <a:latin typeface="맑은 고딕"/>
-              </a:rPr>
-              <a:t>[수동 삽입]</a:t>
-            </a:r>
-          </a:p>
-        </p:txBody>
-      </p:sp>
-      <p:sp>
-        <p:nvSpPr>
-          <p:cNvPr id="5" name="TextBox 4"/>
+          <p:cNvPr id="4" name="TextBox 3"/>
           <p:cNvSpPr txBox="1"/>
           <p:nvPr/>
         </p:nvSpPr>
@@ -10694,7 +11713,7 @@
           <a:lstStyle/>
           <a:p>
             <a:r>
-              <a:rPr sz="800" b="0">
+              <a:rPr sz="800" b="0" u="none">
                 <a:solidFill>
                   <a:srgbClr val="566070"/>
                 </a:solidFill>
@@ -10707,7 +11726,7 @@
       </p:sp>
       <p:sp>
         <p:nvSpPr>
-          <p:cNvPr id="6" name="TextBox 5"/>
+          <p:cNvPr id="5" name="TextBox 4"/>
           <p:cNvSpPr txBox="1"/>
           <p:nvPr/>
         </p:nvSpPr>
@@ -10729,7 +11748,7 @@
           <a:p>
             <a:pPr algn="r"/>
             <a:r>
-              <a:rPr sz="800" b="0">
+              <a:rPr sz="800" b="0" u="none">
                 <a:solidFill>
                   <a:srgbClr val="566070"/>
                 </a:solidFill>
@@ -10775,7 +11794,7 @@
         <p:spPr>
           <a:xfrm>
             <a:off x="572414" y="411480"/>
-            <a:ext cx="6720840" cy="685800"/>
+            <a:ext cx="10972800" cy="685800"/>
           </a:xfrm>
           <a:prstGeom prst="rect">
             <a:avLst/>
@@ -10789,7 +11808,7 @@
           <a:lstStyle/>
           <a:p>
             <a:r>
-              <a:rPr sz="2800" b="1">
+              <a:rPr sz="2800" b="1" u="none">
                 <a:solidFill>
                   <a:srgbClr val="FF0000"/>
                 </a:solidFill>
@@ -10809,7 +11828,7 @@
         <p:spPr>
           <a:xfrm>
             <a:off x="572414" y="1208836"/>
-            <a:ext cx="6720840" cy="1302105"/>
+            <a:ext cx="11193170" cy="1302105"/>
           </a:xfrm>
           <a:prstGeom prst="rect">
             <a:avLst/>
@@ -10828,9 +11847,9 @@
               </a:spcAft>
             </a:pPr>
             <a:r>
-              <a:rPr sz="2000">
-                <a:solidFill>
-                  <a:srgbClr val="FF0000"/>
+              <a:rPr sz="2800" b="0" u="none">
+                <a:solidFill>
+                  <a:srgbClr val="000000"/>
                 </a:solidFill>
                 <a:latin typeface="맑은 고딕"/>
               </a:rPr>
@@ -10844,9 +11863,9 @@
               </a:spcAft>
             </a:pPr>
             <a:r>
-              <a:rPr sz="2000">
-                <a:solidFill>
-                  <a:srgbClr val="FF0000"/>
+              <a:rPr sz="2800" b="0" u="none">
+                <a:solidFill>
+                  <a:srgbClr val="000000"/>
                 </a:solidFill>
                 <a:latin typeface="맑은 고딕"/>
               </a:rPr>
@@ -10860,9 +11879,9 @@
               </a:spcAft>
             </a:pPr>
             <a:r>
-              <a:rPr sz="2000">
-                <a:solidFill>
-                  <a:srgbClr val="FF0000"/>
+              <a:rPr sz="2800" b="0" u="none">
+                <a:solidFill>
+                  <a:srgbClr val="000000"/>
                 </a:solidFill>
                 <a:latin typeface="맑은 고딕"/>
               </a:rPr>
@@ -10873,61 +11892,7 @@
       </p:sp>
       <p:sp>
         <p:nvSpPr>
-          <p:cNvPr id="4" name="Rectangle 3"/>
-          <p:cNvSpPr/>
-          <p:nvPr/>
-        </p:nvSpPr>
-        <p:spPr>
-          <a:xfrm>
-            <a:off x="8001000" y="1572768"/>
-            <a:ext cx="3337560" cy="3611880"/>
-          </a:xfrm>
-          <a:prstGeom prst="rect">
-            <a:avLst/>
-          </a:prstGeom>
-          <a:solidFill>
-            <a:srgbClr val="F5F5F5"/>
-          </a:solidFill>
-          <a:ln w="12700">
-            <a:solidFill>
-              <a:srgbClr val="BEBEBE"/>
-            </a:solidFill>
-          </a:ln>
-        </p:spPr>
-        <p:style>
-          <a:lnRef idx="1">
-            <a:schemeClr val="accent1"/>
-          </a:lnRef>
-          <a:fillRef idx="3">
-            <a:schemeClr val="accent1"/>
-          </a:fillRef>
-          <a:effectRef idx="2">
-            <a:schemeClr val="accent1"/>
-          </a:effectRef>
-          <a:fontRef idx="minor">
-            <a:schemeClr val="lt1"/>
-          </a:fontRef>
-        </p:style>
-        <p:txBody>
-          <a:bodyPr rtlCol="0" anchor="ctr" wrap="square"/>
-          <a:lstStyle/>
-          <a:p>
-            <a:pPr algn="ctr"/>
-            <a:r>
-              <a:rPr sz="1300">
-                <a:solidFill>
-                  <a:srgbClr val="566070"/>
-                </a:solidFill>
-                <a:latin typeface="맑은 고딕"/>
-              </a:rPr>
-              <a:t>[수동 삽입]</a:t>
-            </a:r>
-          </a:p>
-        </p:txBody>
-      </p:sp>
-      <p:sp>
-        <p:nvSpPr>
-          <p:cNvPr id="5" name="TextBox 4"/>
+          <p:cNvPr id="4" name="TextBox 3"/>
           <p:cNvSpPr txBox="1"/>
           <p:nvPr/>
         </p:nvSpPr>
@@ -10948,7 +11913,7 @@
           <a:lstStyle/>
           <a:p>
             <a:r>
-              <a:rPr sz="800" b="0">
+              <a:rPr sz="800" b="0" u="none">
                 <a:solidFill>
                   <a:srgbClr val="566070"/>
                 </a:solidFill>
@@ -10961,7 +11926,7 @@
       </p:sp>
       <p:sp>
         <p:nvSpPr>
-          <p:cNvPr id="6" name="TextBox 5"/>
+          <p:cNvPr id="5" name="TextBox 4"/>
           <p:cNvSpPr txBox="1"/>
           <p:nvPr/>
         </p:nvSpPr>
@@ -10983,7 +11948,7 @@
           <a:p>
             <a:pPr algn="r"/>
             <a:r>
-              <a:rPr sz="800" b="0">
+              <a:rPr sz="800" b="0" u="none">
                 <a:solidFill>
                   <a:srgbClr val="566070"/>
                 </a:solidFill>
@@ -11029,7 +11994,7 @@
         <p:spPr>
           <a:xfrm>
             <a:off x="572414" y="411480"/>
-            <a:ext cx="6720840" cy="685800"/>
+            <a:ext cx="10972800" cy="685800"/>
           </a:xfrm>
           <a:prstGeom prst="rect">
             <a:avLst/>
@@ -11043,7 +12008,7 @@
           <a:lstStyle/>
           <a:p>
             <a:r>
-              <a:rPr sz="2800" b="1">
+              <a:rPr sz="2800" b="1" u="none">
                 <a:solidFill>
                   <a:srgbClr val="FF0000"/>
                 </a:solidFill>
@@ -11063,7 +12028,7 @@
         <p:spPr>
           <a:xfrm>
             <a:off x="572414" y="1208836"/>
-            <a:ext cx="6720840" cy="1302105"/>
+            <a:ext cx="11193170" cy="1302105"/>
           </a:xfrm>
           <a:prstGeom prst="rect">
             <a:avLst/>
@@ -11082,9 +12047,9 @@
               </a:spcAft>
             </a:pPr>
             <a:r>
-              <a:rPr sz="2000">
-                <a:solidFill>
-                  <a:srgbClr val="FF0000"/>
+              <a:rPr sz="2800" b="0" u="none">
+                <a:solidFill>
+                  <a:srgbClr val="000000"/>
                 </a:solidFill>
                 <a:latin typeface="맑은 고딕"/>
               </a:rPr>
@@ -11098,9 +12063,9 @@
               </a:spcAft>
             </a:pPr>
             <a:r>
-              <a:rPr sz="2000">
-                <a:solidFill>
-                  <a:srgbClr val="FF0000"/>
+              <a:rPr sz="2800" b="0" u="none">
+                <a:solidFill>
+                  <a:srgbClr val="000000"/>
                 </a:solidFill>
                 <a:latin typeface="맑은 고딕"/>
               </a:rPr>
@@ -11114,9 +12079,9 @@
               </a:spcAft>
             </a:pPr>
             <a:r>
-              <a:rPr sz="2000">
-                <a:solidFill>
-                  <a:srgbClr val="FF0000"/>
+              <a:rPr sz="2800" b="0" u="none">
+                <a:solidFill>
+                  <a:srgbClr val="000000"/>
                 </a:solidFill>
                 <a:latin typeface="맑은 고딕"/>
               </a:rPr>
@@ -11127,61 +12092,7 @@
       </p:sp>
       <p:sp>
         <p:nvSpPr>
-          <p:cNvPr id="4" name="Rectangle 3"/>
-          <p:cNvSpPr/>
-          <p:nvPr/>
-        </p:nvSpPr>
-        <p:spPr>
-          <a:xfrm>
-            <a:off x="8001000" y="1572768"/>
-            <a:ext cx="3337560" cy="3611880"/>
-          </a:xfrm>
-          <a:prstGeom prst="rect">
-            <a:avLst/>
-          </a:prstGeom>
-          <a:solidFill>
-            <a:srgbClr val="F5F5F5"/>
-          </a:solidFill>
-          <a:ln w="12700">
-            <a:solidFill>
-              <a:srgbClr val="BEBEBE"/>
-            </a:solidFill>
-          </a:ln>
-        </p:spPr>
-        <p:style>
-          <a:lnRef idx="1">
-            <a:schemeClr val="accent1"/>
-          </a:lnRef>
-          <a:fillRef idx="3">
-            <a:schemeClr val="accent1"/>
-          </a:fillRef>
-          <a:effectRef idx="2">
-            <a:schemeClr val="accent1"/>
-          </a:effectRef>
-          <a:fontRef idx="minor">
-            <a:schemeClr val="lt1"/>
-          </a:fontRef>
-        </p:style>
-        <p:txBody>
-          <a:bodyPr rtlCol="0" anchor="ctr" wrap="square"/>
-          <a:lstStyle/>
-          <a:p>
-            <a:pPr algn="ctr"/>
-            <a:r>
-              <a:rPr sz="1300">
-                <a:solidFill>
-                  <a:srgbClr val="566070"/>
-                </a:solidFill>
-                <a:latin typeface="맑은 고딕"/>
-              </a:rPr>
-              <a:t>[수동 삽입]</a:t>
-            </a:r>
-          </a:p>
-        </p:txBody>
-      </p:sp>
-      <p:sp>
-        <p:nvSpPr>
-          <p:cNvPr id="5" name="TextBox 4"/>
+          <p:cNvPr id="4" name="TextBox 3"/>
           <p:cNvSpPr txBox="1"/>
           <p:nvPr/>
         </p:nvSpPr>
@@ -11202,7 +12113,7 @@
           <a:lstStyle/>
           <a:p>
             <a:r>
-              <a:rPr sz="800" b="0">
+              <a:rPr sz="800" b="0" u="none">
                 <a:solidFill>
                   <a:srgbClr val="566070"/>
                 </a:solidFill>
@@ -11215,7 +12126,7 @@
       </p:sp>
       <p:sp>
         <p:nvSpPr>
-          <p:cNvPr id="6" name="TextBox 5"/>
+          <p:cNvPr id="5" name="TextBox 4"/>
           <p:cNvSpPr txBox="1"/>
           <p:nvPr/>
         </p:nvSpPr>
@@ -11237,7 +12148,7 @@
           <a:p>
             <a:pPr algn="r"/>
             <a:r>
-              <a:rPr sz="800" b="0">
+              <a:rPr sz="800" b="0" u="none">
                 <a:solidFill>
                   <a:srgbClr val="566070"/>
                 </a:solidFill>
@@ -11282,8 +12193,8 @@
         </p:nvSpPr>
         <p:spPr>
           <a:xfrm>
-            <a:off x="572414" y="411480"/>
-            <a:ext cx="10972800" cy="777240"/>
+            <a:off x="868680" y="502920"/>
+            <a:ext cx="10698480" cy="594360"/>
           </a:xfrm>
           <a:prstGeom prst="rect">
             <a:avLst/>
@@ -11296,10 +12207,11 @@
           </a:bodyPr>
           <a:lstStyle/>
           <a:p>
-            <a:r>
-              <a:rPr sz="2800" b="1">
-                <a:solidFill>
-                  <a:srgbClr val="FF0000"/>
+            <a:pPr algn="ctr"/>
+            <a:r>
+              <a:rPr sz="2800" b="1" u="sng">
+                <a:solidFill>
+                  <a:srgbClr val="000000"/>
                 </a:solidFill>
                 <a:latin typeface="맑은 고딕"/>
               </a:rPr>
@@ -11316,18 +12228,18 @@
         </p:nvSpPr>
         <p:spPr>
           <a:xfrm>
-            <a:off x="572414" y="1162202"/>
-            <a:ext cx="11193170" cy="1645920"/>
+            <a:off x="914400" y="1234440"/>
+            <a:ext cx="10378440" cy="4434840"/>
           </a:xfrm>
           <a:prstGeom prst="rect">
             <a:avLst/>
           </a:prstGeom>
           <a:solidFill>
-            <a:srgbClr val="F5F5F5"/>
+            <a:srgbClr val="FFFFFF"/>
           </a:solidFill>
-          <a:ln w="12700">
+          <a:ln w="15240">
             <a:solidFill>
-              <a:srgbClr val="BEBEBE"/>
+              <a:srgbClr val="D2D8E0"/>
             </a:solidFill>
           </a:ln>
         </p:spPr>
@@ -11346,19 +12258,10 @@
           </a:fontRef>
         </p:style>
         <p:txBody>
-          <a:bodyPr rtlCol="0" anchor="ctr" wrap="square"/>
+          <a:bodyPr rtlCol="0" anchor="ctr"/>
           <a:lstStyle/>
           <a:p>
             <a:pPr algn="ctr"/>
-            <a:r>
-              <a:rPr sz="1300">
-                <a:solidFill>
-                  <a:srgbClr val="566070"/>
-                </a:solidFill>
-                <a:latin typeface="맑은 고딕"/>
-              </a:rPr>
-              <a:t>[차트 후보]</a:t>
-            </a:r>
           </a:p>
         </p:txBody>
       </p:sp>
@@ -11370,8 +12273,8 @@
         </p:nvSpPr>
         <p:spPr>
           <a:xfrm>
-            <a:off x="572414" y="3311042"/>
-            <a:ext cx="10058400" cy="1234440"/>
+            <a:off x="1234440" y="1828800"/>
+            <a:ext cx="9692640" cy="2880360"/>
           </a:xfrm>
           <a:prstGeom prst="rect">
             <a:avLst/>
@@ -11390,9 +12293,9 @@
               </a:spcAft>
             </a:pPr>
             <a:r>
-              <a:rPr sz="2000">
-                <a:solidFill>
-                  <a:srgbClr val="FF0000"/>
+              <a:rPr sz="1800" b="1" u="none">
+                <a:solidFill>
+                  <a:srgbClr val="373737"/>
                 </a:solidFill>
                 <a:latin typeface="맑은 고딕"/>
               </a:rPr>
@@ -11406,9 +12309,9 @@
               </a:spcAft>
             </a:pPr>
             <a:r>
-              <a:rPr sz="2000">
-                <a:solidFill>
-                  <a:srgbClr val="FF0000"/>
+              <a:rPr sz="1800" b="1" u="none">
+                <a:solidFill>
+                  <a:srgbClr val="373737"/>
                 </a:solidFill>
                 <a:latin typeface="맑은 고딕"/>
               </a:rPr>
@@ -11422,9 +12325,9 @@
               </a:spcAft>
             </a:pPr>
             <a:r>
-              <a:rPr sz="2000">
-                <a:solidFill>
-                  <a:srgbClr val="FF0000"/>
+              <a:rPr sz="1800" b="1" u="none">
+                <a:solidFill>
+                  <a:srgbClr val="373737"/>
                 </a:solidFill>
                 <a:latin typeface="맑은 고딕"/>
               </a:rPr>
@@ -11436,6 +12339,41 @@
       <p:sp>
         <p:nvSpPr>
           <p:cNvPr id="5" name="TextBox 4"/>
+          <p:cNvSpPr txBox="1"/>
+          <p:nvPr/>
+        </p:nvSpPr>
+        <p:spPr>
+          <a:xfrm>
+            <a:off x="6126480" y="5806440"/>
+            <a:ext cx="5257800" cy="347472"/>
+          </a:xfrm>
+          <a:prstGeom prst="rect">
+            <a:avLst/>
+          </a:prstGeom>
+          <a:noFill/>
+        </p:spPr>
+        <p:txBody>
+          <a:bodyPr wrap="square">
+            <a:spAutoFit/>
+          </a:bodyPr>
+          <a:lstStyle/>
+          <a:p>
+            <a:pPr algn="r"/>
+            <a:r>
+              <a:rPr sz="2000" b="0" u="sng">
+                <a:solidFill>
+                  <a:srgbClr val="000000"/>
+                </a:solidFill>
+                <a:latin typeface="맑은 고딕"/>
+              </a:rPr>
+              <a:t>(출처: www.oecd.org; speaker notes 참조)</a:t>
+            </a:r>
+          </a:p>
+        </p:txBody>
+      </p:sp>
+      <p:sp>
+        <p:nvSpPr>
+          <p:cNvPr id="6" name="TextBox 5"/>
           <p:cNvSpPr txBox="1"/>
           <p:nvPr/>
         </p:nvSpPr>
@@ -11456,7 +12394,7 @@
           <a:lstStyle/>
           <a:p>
             <a:r>
-              <a:rPr sz="800" b="0">
+              <a:rPr sz="800" b="0" u="none">
                 <a:solidFill>
                   <a:srgbClr val="566070"/>
                 </a:solidFill>
@@ -11469,7 +12407,7 @@
       </p:sp>
       <p:sp>
         <p:nvSpPr>
-          <p:cNvPr id="6" name="TextBox 5"/>
+          <p:cNvPr id="7" name="TextBox 6"/>
           <p:cNvSpPr txBox="1"/>
           <p:nvPr/>
         </p:nvSpPr>
@@ -11491,7 +12429,7 @@
           <a:p>
             <a:pPr algn="r"/>
             <a:r>
-              <a:rPr sz="800" b="0">
+              <a:rPr sz="800" b="0" u="none">
                 <a:solidFill>
                   <a:srgbClr val="566070"/>
                 </a:solidFill>
@@ -11552,7 +12490,7 @@
           <a:p>
             <a:pPr algn="ctr"/>
             <a:r>
-              <a:rPr sz="3200" b="1">
+              <a:rPr sz="2800" b="1" u="none">
                 <a:solidFill>
                   <a:srgbClr val="FF0000"/>
                 </a:solidFill>
@@ -11591,9 +12529,9 @@
               </a:spcAft>
             </a:pPr>
             <a:r>
-              <a:rPr sz="2800">
-                <a:solidFill>
-                  <a:srgbClr val="FF0000"/>
+              <a:rPr sz="2800" b="0" u="none">
+                <a:solidFill>
+                  <a:srgbClr val="000000"/>
                 </a:solidFill>
                 <a:latin typeface="맑은 고딕"/>
               </a:rPr>
@@ -11607,9 +12545,9 @@
               </a:spcAft>
             </a:pPr>
             <a:r>
-              <a:rPr sz="2800">
-                <a:solidFill>
-                  <a:srgbClr val="FF0000"/>
+              <a:rPr sz="2800" b="0" u="none">
+                <a:solidFill>
+                  <a:srgbClr val="000000"/>
                 </a:solidFill>
                 <a:latin typeface="맑은 고딕"/>
               </a:rPr>
@@ -11623,9 +12561,9 @@
               </a:spcAft>
             </a:pPr>
             <a:r>
-              <a:rPr sz="2800">
-                <a:solidFill>
-                  <a:srgbClr val="FF0000"/>
+              <a:rPr sz="2800" b="0" u="none">
+                <a:solidFill>
+                  <a:srgbClr val="000000"/>
                 </a:solidFill>
                 <a:latin typeface="맑은 고딕"/>
               </a:rPr>
@@ -11657,7 +12595,7 @@
           <a:lstStyle/>
           <a:p>
             <a:r>
-              <a:rPr sz="800" b="0">
+              <a:rPr sz="800" b="0" u="none">
                 <a:solidFill>
                   <a:srgbClr val="566070"/>
                 </a:solidFill>
@@ -11692,7 +12630,7 @@
           <a:p>
             <a:pPr algn="r"/>
             <a:r>
-              <a:rPr sz="800" b="0">
+              <a:rPr sz="800" b="0" u="none">
                 <a:solidFill>
                   <a:srgbClr val="566070"/>
                 </a:solidFill>
@@ -11753,7 +12691,7 @@
           <a:p>
             <a:pPr algn="ctr"/>
             <a:r>
-              <a:rPr sz="3200" b="1">
+              <a:rPr sz="2800" b="1" u="none">
                 <a:solidFill>
                   <a:srgbClr val="FF0000"/>
                 </a:solidFill>
@@ -11792,9 +12730,9 @@
               </a:spcAft>
             </a:pPr>
             <a:r>
-              <a:rPr sz="2800">
-                <a:solidFill>
-                  <a:srgbClr val="FF0000"/>
+              <a:rPr sz="2800" b="0" u="none">
+                <a:solidFill>
+                  <a:srgbClr val="000000"/>
                 </a:solidFill>
                 <a:latin typeface="맑은 고딕"/>
               </a:rPr>
@@ -11808,9 +12746,9 @@
               </a:spcAft>
             </a:pPr>
             <a:r>
-              <a:rPr sz="2800">
-                <a:solidFill>
-                  <a:srgbClr val="FF0000"/>
+              <a:rPr sz="2800" b="0" u="none">
+                <a:solidFill>
+                  <a:srgbClr val="000000"/>
                 </a:solidFill>
                 <a:latin typeface="맑은 고딕"/>
               </a:rPr>
@@ -11824,9 +12762,9 @@
               </a:spcAft>
             </a:pPr>
             <a:r>
-              <a:rPr sz="2800">
-                <a:solidFill>
-                  <a:srgbClr val="FF0000"/>
+              <a:rPr sz="2800" b="0" u="none">
+                <a:solidFill>
+                  <a:srgbClr val="000000"/>
                 </a:solidFill>
                 <a:latin typeface="맑은 고딕"/>
               </a:rPr>
@@ -11858,7 +12796,7 @@
           <a:lstStyle/>
           <a:p>
             <a:r>
-              <a:rPr sz="800" b="0">
+              <a:rPr sz="800" b="0" u="none">
                 <a:solidFill>
                   <a:srgbClr val="566070"/>
                 </a:solidFill>
@@ -11893,7 +12831,7 @@
           <a:p>
             <a:pPr algn="r"/>
             <a:r>
-              <a:rPr sz="800" b="0">
+              <a:rPr sz="800" b="0" u="none">
                 <a:solidFill>
                   <a:srgbClr val="566070"/>
                 </a:solidFill>
@@ -11953,7 +12891,7 @@
           <a:lstStyle/>
           <a:p>
             <a:r>
-              <a:rPr sz="2800" b="1">
+              <a:rPr sz="2800" b="1" u="none">
                 <a:solidFill>
                   <a:srgbClr val="FF0000"/>
                 </a:solidFill>
@@ -11973,7 +12911,7 @@
         <p:spPr>
           <a:xfrm>
             <a:off x="713232" y="2795320"/>
-            <a:ext cx="6766560" cy="2651760"/>
+            <a:ext cx="9875520" cy="2651760"/>
           </a:xfrm>
           <a:prstGeom prst="rect">
             <a:avLst/>
@@ -11992,9 +12930,9 @@
               </a:spcAft>
             </a:pPr>
             <a:r>
-              <a:rPr sz="2000">
-                <a:solidFill>
-                  <a:srgbClr val="FF0000"/>
+              <a:rPr sz="2800" b="0" u="none">
+                <a:solidFill>
+                  <a:srgbClr val="000000"/>
                 </a:solidFill>
                 <a:latin typeface="맑은 고딕"/>
               </a:rPr>
@@ -12008,9 +12946,9 @@
               </a:spcAft>
             </a:pPr>
             <a:r>
-              <a:rPr sz="2000">
-                <a:solidFill>
-                  <a:srgbClr val="FF0000"/>
+              <a:rPr sz="2800" b="0" u="none">
+                <a:solidFill>
+                  <a:srgbClr val="000000"/>
                 </a:solidFill>
                 <a:latin typeface="맑은 고딕"/>
               </a:rPr>
@@ -12024,9 +12962,9 @@
               </a:spcAft>
             </a:pPr>
             <a:r>
-              <a:rPr sz="2000">
-                <a:solidFill>
-                  <a:srgbClr val="FF0000"/>
+              <a:rPr sz="2800" b="0" u="none">
+                <a:solidFill>
+                  <a:srgbClr val="000000"/>
                 </a:solidFill>
                 <a:latin typeface="맑은 고딕"/>
               </a:rPr>
@@ -12037,61 +12975,7 @@
       </p:sp>
       <p:sp>
         <p:nvSpPr>
-          <p:cNvPr id="4" name="Rectangle 3"/>
-          <p:cNvSpPr/>
-          <p:nvPr/>
-        </p:nvSpPr>
-        <p:spPr>
-          <a:xfrm>
-            <a:off x="8458200" y="4389120"/>
-            <a:ext cx="2560320" cy="1097280"/>
-          </a:xfrm>
-          <a:prstGeom prst="rect">
-            <a:avLst/>
-          </a:prstGeom>
-          <a:solidFill>
-            <a:srgbClr val="F5F5F5"/>
-          </a:solidFill>
-          <a:ln w="12700">
-            <a:solidFill>
-              <a:srgbClr val="BEBEBE"/>
-            </a:solidFill>
-          </a:ln>
-        </p:spPr>
-        <p:style>
-          <a:lnRef idx="1">
-            <a:schemeClr val="accent1"/>
-          </a:lnRef>
-          <a:fillRef idx="3">
-            <a:schemeClr val="accent1"/>
-          </a:fillRef>
-          <a:effectRef idx="2">
-            <a:schemeClr val="accent1"/>
-          </a:effectRef>
-          <a:fontRef idx="minor">
-            <a:schemeClr val="lt1"/>
-          </a:fontRef>
-        </p:style>
-        <p:txBody>
-          <a:bodyPr rtlCol="0" anchor="ctr" wrap="square"/>
-          <a:lstStyle/>
-          <a:p>
-            <a:pPr algn="ctr"/>
-            <a:r>
-              <a:rPr sz="1300">
-                <a:solidFill>
-                  <a:srgbClr val="566070"/>
-                </a:solidFill>
-                <a:latin typeface="맑은 고딕"/>
-              </a:rPr>
-              <a:t>[수동 삽입]</a:t>
-            </a:r>
-          </a:p>
-        </p:txBody>
-      </p:sp>
-      <p:sp>
-        <p:nvSpPr>
-          <p:cNvPr id="5" name="TextBox 4"/>
+          <p:cNvPr id="4" name="TextBox 3"/>
           <p:cNvSpPr txBox="1"/>
           <p:nvPr/>
         </p:nvSpPr>
@@ -12112,7 +12996,7 @@
           <a:lstStyle/>
           <a:p>
             <a:r>
-              <a:rPr sz="800" b="0">
+              <a:rPr sz="800" b="0" u="none">
                 <a:solidFill>
                   <a:srgbClr val="566070"/>
                 </a:solidFill>
@@ -12125,7 +13009,7 @@
       </p:sp>
       <p:sp>
         <p:nvSpPr>
-          <p:cNvPr id="6" name="TextBox 5"/>
+          <p:cNvPr id="5" name="TextBox 4"/>
           <p:cNvSpPr txBox="1"/>
           <p:nvPr/>
         </p:nvSpPr>
@@ -12147,7 +13031,7 @@
           <a:p>
             <a:pPr algn="r"/>
             <a:r>
-              <a:rPr sz="800" b="0">
+              <a:rPr sz="800" b="0" u="none">
                 <a:solidFill>
                   <a:srgbClr val="566070"/>
                 </a:solidFill>
@@ -12207,7 +13091,7 @@
           <a:lstStyle/>
           <a:p>
             <a:r>
-              <a:rPr sz="5400" b="1">
+              <a:rPr sz="5400" b="1" u="none">
                 <a:solidFill>
                   <a:srgbClr val="181C23"/>
                 </a:solidFill>
@@ -12246,7 +13130,7 @@
               </a:spcAft>
             </a:pPr>
             <a:r>
-              <a:rPr sz="2800">
+              <a:rPr sz="2800" b="0" u="none">
                 <a:solidFill>
                   <a:srgbClr val="181C23"/>
                 </a:solidFill>
@@ -12280,7 +13164,7 @@
           <a:lstStyle/>
           <a:p>
             <a:r>
-              <a:rPr sz="800" b="0">
+              <a:rPr sz="800" b="0" u="none">
                 <a:solidFill>
                   <a:srgbClr val="566070"/>
                 </a:solidFill>
@@ -12315,7 +13199,7 @@
           <a:p>
             <a:pPr algn="r"/>
             <a:r>
-              <a:rPr sz="800" b="0">
+              <a:rPr sz="800" b="0" u="none">
                 <a:solidFill>
                   <a:srgbClr val="566070"/>
                 </a:solidFill>
@@ -12375,7 +13259,7 @@
           <a:lstStyle/>
           <a:p>
             <a:r>
-              <a:rPr sz="2700" b="1">
+              <a:rPr sz="2800" b="1" u="none">
                 <a:solidFill>
                   <a:srgbClr val="FF0000"/>
                 </a:solidFill>
@@ -12504,9 +13388,9 @@
               </a:spcAft>
             </a:pPr>
             <a:r>
-              <a:rPr sz="2800">
-                <a:solidFill>
-                  <a:srgbClr val="FF0000"/>
+              <a:rPr sz="2800" b="0" u="none">
+                <a:solidFill>
+                  <a:srgbClr val="000000"/>
                 </a:solidFill>
                 <a:latin typeface="맑은 고딕"/>
               </a:rPr>
@@ -12520,9 +13404,9 @@
               </a:spcAft>
             </a:pPr>
             <a:r>
-              <a:rPr sz="2800">
-                <a:solidFill>
-                  <a:srgbClr val="FF0000"/>
+              <a:rPr sz="2800" b="0" u="none">
+                <a:solidFill>
+                  <a:srgbClr val="000000"/>
                 </a:solidFill>
                 <a:latin typeface="맑은 고딕"/>
               </a:rPr>
@@ -12559,9 +13443,9 @@
               </a:spcAft>
             </a:pPr>
             <a:r>
-              <a:rPr sz="2800">
-                <a:solidFill>
-                  <a:srgbClr val="FF0000"/>
+              <a:rPr sz="2800" b="0" u="none">
+                <a:solidFill>
+                  <a:srgbClr val="000000"/>
                 </a:solidFill>
                 <a:latin typeface="맑은 고딕"/>
               </a:rPr>
@@ -12593,7 +13477,7 @@
           <a:lstStyle/>
           <a:p>
             <a:r>
-              <a:rPr sz="800" b="0">
+              <a:rPr sz="800" b="0" u="none">
                 <a:solidFill>
                   <a:srgbClr val="566070"/>
                 </a:solidFill>
@@ -12628,7 +13512,7 @@
           <a:p>
             <a:pPr algn="r"/>
             <a:r>
-              <a:rPr sz="800" b="0">
+              <a:rPr sz="800" b="0" u="none">
                 <a:solidFill>
                   <a:srgbClr val="566070"/>
                 </a:solidFill>
@@ -12674,7 +13558,7 @@
         <p:spPr>
           <a:xfrm>
             <a:off x="572414" y="411480"/>
-            <a:ext cx="6720840" cy="685800"/>
+            <a:ext cx="10972800" cy="685800"/>
           </a:xfrm>
           <a:prstGeom prst="rect">
             <a:avLst/>
@@ -12688,7 +13572,7 @@
           <a:lstStyle/>
           <a:p>
             <a:r>
-              <a:rPr sz="2800" b="1">
+              <a:rPr sz="2800" b="1" u="none">
                 <a:solidFill>
                   <a:srgbClr val="FF0000"/>
                 </a:solidFill>
@@ -12708,7 +13592,7 @@
         <p:spPr>
           <a:xfrm>
             <a:off x="572414" y="1208836"/>
-            <a:ext cx="6720840" cy="1302105"/>
+            <a:ext cx="11193170" cy="1302105"/>
           </a:xfrm>
           <a:prstGeom prst="rect">
             <a:avLst/>
@@ -12727,9 +13611,9 @@
               </a:spcAft>
             </a:pPr>
             <a:r>
-              <a:rPr sz="2000">
-                <a:solidFill>
-                  <a:srgbClr val="FF0000"/>
+              <a:rPr sz="2800" b="0" u="none">
+                <a:solidFill>
+                  <a:srgbClr val="000000"/>
                 </a:solidFill>
                 <a:latin typeface="맑은 고딕"/>
               </a:rPr>
@@ -12743,9 +13627,9 @@
               </a:spcAft>
             </a:pPr>
             <a:r>
-              <a:rPr sz="2000">
-                <a:solidFill>
-                  <a:srgbClr val="FF0000"/>
+              <a:rPr sz="2800" b="0" u="none">
+                <a:solidFill>
+                  <a:srgbClr val="000000"/>
                 </a:solidFill>
                 <a:latin typeface="맑은 고딕"/>
               </a:rPr>
@@ -12759,90 +13643,20 @@
               </a:spcAft>
             </a:pPr>
             <a:r>
-              <a:rPr sz="2000">
-                <a:solidFill>
-                  <a:srgbClr val="FF0000"/>
+              <a:rPr sz="2800" b="0" u="none">
+                <a:solidFill>
+                  <a:srgbClr val="000000"/>
                 </a:solidFill>
                 <a:latin typeface="맑은 고딕"/>
               </a:rPr>
               <a:t>다른 자료와 비교하는 법</a:t>
             </a:r>
           </a:p>
-          <a:p>
-            <a:pPr>
-              <a:spcAft>
-                <a:spcPts val="800"/>
-              </a:spcAft>
-            </a:pPr>
-            <a:r>
-              <a:rPr sz="2000">
-                <a:solidFill>
-                  <a:srgbClr val="FF0000"/>
-                </a:solidFill>
-                <a:latin typeface="맑은 고딕"/>
-              </a:rPr>
-              <a:t>모르는 것을 모른다고 남기는 법</a:t>
-            </a:r>
-          </a:p>
-        </p:txBody>
-      </p:sp>
-      <p:sp>
-        <p:nvSpPr>
-          <p:cNvPr id="4" name="Rectangle 3"/>
-          <p:cNvSpPr/>
-          <p:nvPr/>
-        </p:nvSpPr>
-        <p:spPr>
-          <a:xfrm>
-            <a:off x="8001000" y="1572768"/>
-            <a:ext cx="3337560" cy="3611880"/>
-          </a:xfrm>
-          <a:prstGeom prst="rect">
-            <a:avLst/>
-          </a:prstGeom>
-          <a:solidFill>
-            <a:srgbClr val="F5F5F5"/>
-          </a:solidFill>
-          <a:ln w="12700">
-            <a:solidFill>
-              <a:srgbClr val="BEBEBE"/>
-            </a:solidFill>
-          </a:ln>
-        </p:spPr>
-        <p:style>
-          <a:lnRef idx="1">
-            <a:schemeClr val="accent1"/>
-          </a:lnRef>
-          <a:fillRef idx="3">
-            <a:schemeClr val="accent1"/>
-          </a:fillRef>
-          <a:effectRef idx="2">
-            <a:schemeClr val="accent1"/>
-          </a:effectRef>
-          <a:fontRef idx="minor">
-            <a:schemeClr val="lt1"/>
-          </a:fontRef>
-        </p:style>
-        <p:txBody>
-          <a:bodyPr rtlCol="0" anchor="ctr" wrap="square"/>
-          <a:lstStyle/>
-          <a:p>
-            <a:pPr algn="ctr"/>
-            <a:r>
-              <a:rPr sz="1300">
-                <a:solidFill>
-                  <a:srgbClr val="566070"/>
-                </a:solidFill>
-                <a:latin typeface="맑은 고딕"/>
-              </a:rPr>
-              <a:t>[수동 삽입]</a:t>
-            </a:r>
-          </a:p>
-        </p:txBody>
-      </p:sp>
-      <p:sp>
-        <p:nvSpPr>
-          <p:cNvPr id="5" name="TextBox 4"/>
+        </p:txBody>
+      </p:sp>
+      <p:sp>
+        <p:nvSpPr>
+          <p:cNvPr id="4" name="TextBox 3"/>
           <p:cNvSpPr txBox="1"/>
           <p:nvPr/>
         </p:nvSpPr>
@@ -12863,7 +13677,7 @@
           <a:lstStyle/>
           <a:p>
             <a:r>
-              <a:rPr sz="800" b="0">
+              <a:rPr sz="800" b="0" u="none">
                 <a:solidFill>
                   <a:srgbClr val="566070"/>
                 </a:solidFill>
@@ -12876,7 +13690,7 @@
       </p:sp>
       <p:sp>
         <p:nvSpPr>
-          <p:cNvPr id="6" name="TextBox 5"/>
+          <p:cNvPr id="5" name="TextBox 4"/>
           <p:cNvSpPr txBox="1"/>
           <p:nvPr/>
         </p:nvSpPr>
@@ -12898,7 +13712,7 @@
           <a:p>
             <a:pPr algn="r"/>
             <a:r>
-              <a:rPr sz="800" b="0">
+              <a:rPr sz="800" b="0" u="none">
                 <a:solidFill>
                   <a:srgbClr val="566070"/>
                 </a:solidFill>
@@ -12959,7 +13773,7 @@
           <a:p>
             <a:pPr algn="ctr"/>
             <a:r>
-              <a:rPr sz="3200" b="1">
+              <a:rPr sz="2800" b="1" u="none">
                 <a:solidFill>
                   <a:srgbClr val="FF0000"/>
                 </a:solidFill>
@@ -12998,9 +13812,9 @@
               </a:spcAft>
             </a:pPr>
             <a:r>
-              <a:rPr sz="2800">
-                <a:solidFill>
-                  <a:srgbClr val="FF0000"/>
+              <a:rPr sz="2800" b="0" u="none">
+                <a:solidFill>
+                  <a:srgbClr val="000000"/>
                 </a:solidFill>
                 <a:latin typeface="맑은 고딕"/>
               </a:rPr>
@@ -13014,9 +13828,9 @@
               </a:spcAft>
             </a:pPr>
             <a:r>
-              <a:rPr sz="2800">
-                <a:solidFill>
-                  <a:srgbClr val="FF0000"/>
+              <a:rPr sz="2800" b="0" u="none">
+                <a:solidFill>
+                  <a:srgbClr val="000000"/>
                 </a:solidFill>
                 <a:latin typeface="맑은 고딕"/>
               </a:rPr>
@@ -13030,9 +13844,9 @@
               </a:spcAft>
             </a:pPr>
             <a:r>
-              <a:rPr sz="2800">
-                <a:solidFill>
-                  <a:srgbClr val="FF0000"/>
+              <a:rPr sz="2800" b="0" u="none">
+                <a:solidFill>
+                  <a:srgbClr val="000000"/>
                 </a:solidFill>
                 <a:latin typeface="맑은 고딕"/>
               </a:rPr>
@@ -13064,7 +13878,7 @@
           <a:lstStyle/>
           <a:p>
             <a:r>
-              <a:rPr sz="800" b="0">
+              <a:rPr sz="800" b="0" u="none">
                 <a:solidFill>
                   <a:srgbClr val="566070"/>
                 </a:solidFill>
@@ -13099,7 +13913,7 @@
           <a:p>
             <a:pPr algn="r"/>
             <a:r>
-              <a:rPr sz="800" b="0">
+              <a:rPr sz="800" b="0" u="none">
                 <a:solidFill>
                   <a:srgbClr val="566070"/>
                 </a:solidFill>
@@ -13159,7 +13973,7 @@
           <a:lstStyle/>
           <a:p>
             <a:r>
-              <a:rPr sz="2800" b="1">
+              <a:rPr sz="2800" b="1" u="none">
                 <a:solidFill>
                   <a:srgbClr val="FF0000"/>
                 </a:solidFill>
@@ -13198,9 +14012,9 @@
               </a:spcAft>
             </a:pPr>
             <a:r>
-              <a:rPr sz="2000">
-                <a:solidFill>
-                  <a:srgbClr val="FF0000"/>
+              <a:rPr sz="2800" b="0" u="none">
+                <a:solidFill>
+                  <a:srgbClr val="000000"/>
                 </a:solidFill>
                 <a:latin typeface="맑은 고딕"/>
               </a:rPr>
@@ -13214,9 +14028,9 @@
               </a:spcAft>
             </a:pPr>
             <a:r>
-              <a:rPr sz="2000">
-                <a:solidFill>
-                  <a:srgbClr val="FF0000"/>
+              <a:rPr sz="2800" b="0" u="none">
+                <a:solidFill>
+                  <a:srgbClr val="000000"/>
                 </a:solidFill>
                 <a:latin typeface="맑은 고딕"/>
               </a:rPr>
@@ -13230,45 +14044,13 @@
               </a:spcAft>
             </a:pPr>
             <a:r>
-              <a:rPr sz="2000">
-                <a:solidFill>
-                  <a:srgbClr val="FF0000"/>
+              <a:rPr sz="2800" b="0" u="none">
+                <a:solidFill>
+                  <a:srgbClr val="000000"/>
                 </a:solidFill>
                 <a:latin typeface="맑은 고딕"/>
               </a:rPr>
               <a:t>AI 접근성/개인화라는 counterpoint</a:t>
-            </a:r>
-          </a:p>
-          <a:p>
-            <a:pPr>
-              <a:spcAft>
-                <a:spcPts val="800"/>
-              </a:spcAft>
-            </a:pPr>
-            <a:r>
-              <a:rPr sz="2000">
-                <a:solidFill>
-                  <a:srgbClr val="FF0000"/>
-                </a:solidFill>
-                <a:latin typeface="맑은 고딕"/>
-              </a:rPr>
-              <a:t>한국 학교·과학관 사례</a:t>
-            </a:r>
-          </a:p>
-          <a:p>
-            <a:pPr>
-              <a:spcAft>
-                <a:spcPts val="800"/>
-              </a:spcAft>
-            </a:pPr>
-            <a:r>
-              <a:rPr sz="2000">
-                <a:solidFill>
-                  <a:srgbClr val="FF0000"/>
-                </a:solidFill>
-                <a:latin typeface="맑은 고딕"/>
-              </a:rPr>
-              <a:t>남은 숫자와 사례는 production 전에 추가 확인</a:t>
             </a:r>
           </a:p>
         </p:txBody>
@@ -13296,7 +14078,7 @@
           <a:lstStyle/>
           <a:p>
             <a:r>
-              <a:rPr sz="800" b="0">
+              <a:rPr sz="800" b="0" u="none">
                 <a:solidFill>
                   <a:srgbClr val="566070"/>
                 </a:solidFill>
@@ -13331,7 +14113,7 @@
           <a:p>
             <a:pPr algn="r"/>
             <a:r>
-              <a:rPr sz="800" b="0">
+              <a:rPr sz="800" b="0" u="none">
                 <a:solidFill>
                   <a:srgbClr val="566070"/>
                 </a:solidFill>
@@ -13392,7 +14174,7 @@
           <a:p>
             <a:pPr algn="ctr"/>
             <a:r>
-              <a:rPr sz="3200" b="1">
+              <a:rPr sz="2800" b="1" u="none">
                 <a:solidFill>
                   <a:srgbClr val="FF0000"/>
                 </a:solidFill>
@@ -13431,9 +14213,9 @@
               </a:spcAft>
             </a:pPr>
             <a:r>
-              <a:rPr sz="2800">
-                <a:solidFill>
-                  <a:srgbClr val="FF0000"/>
+              <a:rPr sz="2800" b="0" u="none">
+                <a:solidFill>
+                  <a:srgbClr val="000000"/>
                 </a:solidFill>
                 <a:latin typeface="맑은 고딕"/>
               </a:rPr>
@@ -13447,9 +14229,9 @@
               </a:spcAft>
             </a:pPr>
             <a:r>
-              <a:rPr sz="2800">
-                <a:solidFill>
-                  <a:srgbClr val="FF0000"/>
+              <a:rPr sz="2800" b="0" u="none">
+                <a:solidFill>
+                  <a:srgbClr val="000000"/>
                 </a:solidFill>
                 <a:latin typeface="맑은 고딕"/>
               </a:rPr>
@@ -13463,9 +14245,9 @@
               </a:spcAft>
             </a:pPr>
             <a:r>
-              <a:rPr sz="2800">
-                <a:solidFill>
-                  <a:srgbClr val="FF0000"/>
+              <a:rPr sz="2800" b="0" u="none">
+                <a:solidFill>
+                  <a:srgbClr val="000000"/>
                 </a:solidFill>
                 <a:latin typeface="맑은 고딕"/>
               </a:rPr>
@@ -13497,7 +14279,7 @@
           <a:lstStyle/>
           <a:p>
             <a:r>
-              <a:rPr sz="800" b="0">
+              <a:rPr sz="800" b="0" u="none">
                 <a:solidFill>
                   <a:srgbClr val="566070"/>
                 </a:solidFill>
@@ -13532,7 +14314,7 @@
           <a:p>
             <a:pPr algn="r"/>
             <a:r>
-              <a:rPr sz="800" b="0">
+              <a:rPr sz="800" b="0" u="none">
                 <a:solidFill>
                   <a:srgbClr val="566070"/>
                 </a:solidFill>
@@ -13592,7 +14374,7 @@
           <a:lstStyle/>
           <a:p>
             <a:r>
-              <a:rPr sz="2800" b="1">
+              <a:rPr sz="2800" b="1" u="none">
                 <a:solidFill>
                   <a:srgbClr val="FF0000"/>
                 </a:solidFill>
@@ -13612,7 +14394,7 @@
         <p:spPr>
           <a:xfrm>
             <a:off x="713232" y="2795320"/>
-            <a:ext cx="6766560" cy="2651760"/>
+            <a:ext cx="9875520" cy="2651760"/>
           </a:xfrm>
           <a:prstGeom prst="rect">
             <a:avLst/>
@@ -13631,9 +14413,9 @@
               </a:spcAft>
             </a:pPr>
             <a:r>
-              <a:rPr sz="2400">
-                <a:solidFill>
-                  <a:srgbClr val="FF0000"/>
+              <a:rPr sz="2800" b="0" u="none">
+                <a:solidFill>
+                  <a:srgbClr val="000000"/>
                 </a:solidFill>
                 <a:latin typeface="맑은 고딕"/>
               </a:rPr>
@@ -13647,9 +14429,9 @@
               </a:spcAft>
             </a:pPr>
             <a:r>
-              <a:rPr sz="2400">
-                <a:solidFill>
-                  <a:srgbClr val="FF0000"/>
+              <a:rPr sz="2800" b="0" u="none">
+                <a:solidFill>
+                  <a:srgbClr val="000000"/>
                 </a:solidFill>
                 <a:latin typeface="맑은 고딕"/>
               </a:rPr>
@@ -13660,61 +14442,7 @@
       </p:sp>
       <p:sp>
         <p:nvSpPr>
-          <p:cNvPr id="4" name="Rectangle 3"/>
-          <p:cNvSpPr/>
-          <p:nvPr/>
-        </p:nvSpPr>
-        <p:spPr>
-          <a:xfrm>
-            <a:off x="8458200" y="4389120"/>
-            <a:ext cx="2560320" cy="1097280"/>
-          </a:xfrm>
-          <a:prstGeom prst="rect">
-            <a:avLst/>
-          </a:prstGeom>
-          <a:solidFill>
-            <a:srgbClr val="F5F5F5"/>
-          </a:solidFill>
-          <a:ln w="12700">
-            <a:solidFill>
-              <a:srgbClr val="BEBEBE"/>
-            </a:solidFill>
-          </a:ln>
-        </p:spPr>
-        <p:style>
-          <a:lnRef idx="1">
-            <a:schemeClr val="accent1"/>
-          </a:lnRef>
-          <a:fillRef idx="3">
-            <a:schemeClr val="accent1"/>
-          </a:fillRef>
-          <a:effectRef idx="2">
-            <a:schemeClr val="accent1"/>
-          </a:effectRef>
-          <a:fontRef idx="minor">
-            <a:schemeClr val="lt1"/>
-          </a:fontRef>
-        </p:style>
-        <p:txBody>
-          <a:bodyPr rtlCol="0" anchor="ctr" wrap="square"/>
-          <a:lstStyle/>
-          <a:p>
-            <a:pPr algn="ctr"/>
-            <a:r>
-              <a:rPr sz="1300">
-                <a:solidFill>
-                  <a:srgbClr val="566070"/>
-                </a:solidFill>
-                <a:latin typeface="맑은 고딕"/>
-              </a:rPr>
-              <a:t>[수동 삽입]</a:t>
-            </a:r>
-          </a:p>
-        </p:txBody>
-      </p:sp>
-      <p:sp>
-        <p:nvSpPr>
-          <p:cNvPr id="5" name="TextBox 4"/>
+          <p:cNvPr id="4" name="TextBox 3"/>
           <p:cNvSpPr txBox="1"/>
           <p:nvPr/>
         </p:nvSpPr>
@@ -13735,7 +14463,7 @@
           <a:lstStyle/>
           <a:p>
             <a:r>
-              <a:rPr sz="800" b="0">
+              <a:rPr sz="800" b="0" u="none">
                 <a:solidFill>
                   <a:srgbClr val="566070"/>
                 </a:solidFill>
@@ -13748,7 +14476,7 @@
       </p:sp>
       <p:sp>
         <p:nvSpPr>
-          <p:cNvPr id="6" name="TextBox 5"/>
+          <p:cNvPr id="5" name="TextBox 4"/>
           <p:cNvSpPr txBox="1"/>
           <p:nvPr/>
         </p:nvSpPr>
@@ -13770,7 +14498,7 @@
           <a:p>
             <a:pPr algn="r"/>
             <a:r>
-              <a:rPr sz="800" b="0">
+              <a:rPr sz="800" b="0" u="none">
                 <a:solidFill>
                   <a:srgbClr val="566070"/>
                 </a:solidFill>
@@ -13875,7 +14603,7 @@
           <a:lstStyle/>
           <a:p>
             <a:r>
-              <a:rPr sz="2800" b="1">
+              <a:rPr sz="2800" b="1" u="none">
                 <a:solidFill>
                   <a:srgbClr val="FF0000"/>
                 </a:solidFill>
@@ -13914,9 +14642,9 @@
               </a:spcAft>
             </a:pPr>
             <a:r>
-              <a:rPr sz="2800">
-                <a:solidFill>
-                  <a:srgbClr val="FF0000"/>
+              <a:rPr sz="2800" b="0" u="none">
+                <a:solidFill>
+                  <a:srgbClr val="000000"/>
                 </a:solidFill>
                 <a:latin typeface="맑은 고딕"/>
               </a:rPr>
@@ -13930,9 +14658,9 @@
               </a:spcAft>
             </a:pPr>
             <a:r>
-              <a:rPr sz="2800">
-                <a:solidFill>
-                  <a:srgbClr val="FF0000"/>
+              <a:rPr sz="2800" b="0" u="none">
+                <a:solidFill>
+                  <a:srgbClr val="000000"/>
                 </a:solidFill>
                 <a:latin typeface="맑은 고딕"/>
               </a:rPr>
@@ -13946,9 +14674,9 @@
               </a:spcAft>
             </a:pPr>
             <a:r>
-              <a:rPr sz="2800">
-                <a:solidFill>
-                  <a:srgbClr val="FF0000"/>
+              <a:rPr sz="2800" b="0" u="none">
+                <a:solidFill>
+                  <a:srgbClr val="000000"/>
                 </a:solidFill>
                 <a:latin typeface="맑은 고딕"/>
               </a:rPr>
@@ -13980,7 +14708,7 @@
           <a:lstStyle/>
           <a:p>
             <a:r>
-              <a:rPr sz="800" b="0">
+              <a:rPr sz="800" b="0" u="none">
                 <a:solidFill>
                   <a:srgbClr val="566070"/>
                 </a:solidFill>
@@ -14015,7 +14743,7 @@
           <a:p>
             <a:pPr algn="r"/>
             <a:r>
-              <a:rPr sz="800" b="0">
+              <a:rPr sz="800" b="0" u="none">
                 <a:solidFill>
                   <a:srgbClr val="566070"/>
                 </a:solidFill>
@@ -14061,7 +14789,7 @@
         <p:spPr>
           <a:xfrm>
             <a:off x="572414" y="411480"/>
-            <a:ext cx="6720840" cy="685800"/>
+            <a:ext cx="10972800" cy="685800"/>
           </a:xfrm>
           <a:prstGeom prst="rect">
             <a:avLst/>
@@ -14075,7 +14803,7 @@
           <a:lstStyle/>
           <a:p>
             <a:r>
-              <a:rPr sz="2800" b="1">
+              <a:rPr sz="2800" b="1" u="none">
                 <a:solidFill>
                   <a:srgbClr val="FF0000"/>
                 </a:solidFill>
@@ -14095,7 +14823,7 @@
         <p:spPr>
           <a:xfrm>
             <a:off x="572414" y="1208836"/>
-            <a:ext cx="6720840" cy="1302105"/>
+            <a:ext cx="11193170" cy="1302105"/>
           </a:xfrm>
           <a:prstGeom prst="rect">
             <a:avLst/>
@@ -14114,9 +14842,9 @@
               </a:spcAft>
             </a:pPr>
             <a:r>
-              <a:rPr sz="2000">
-                <a:solidFill>
-                  <a:srgbClr val="FF0000"/>
+              <a:rPr sz="2800" b="0" u="none">
+                <a:solidFill>
+                  <a:srgbClr val="000000"/>
                 </a:solidFill>
                 <a:latin typeface="맑은 고딕"/>
               </a:rPr>
@@ -14130,9 +14858,9 @@
               </a:spcAft>
             </a:pPr>
             <a:r>
-              <a:rPr sz="2000">
-                <a:solidFill>
-                  <a:srgbClr val="FF0000"/>
+              <a:rPr sz="2800" b="0" u="none">
+                <a:solidFill>
+                  <a:srgbClr val="000000"/>
                 </a:solidFill>
                 <a:latin typeface="맑은 고딕"/>
               </a:rPr>
@@ -14146,9 +14874,9 @@
               </a:spcAft>
             </a:pPr>
             <a:r>
-              <a:rPr sz="2000">
-                <a:solidFill>
-                  <a:srgbClr val="FF0000"/>
+              <a:rPr sz="2800" b="0" u="none">
+                <a:solidFill>
+                  <a:srgbClr val="000000"/>
                 </a:solidFill>
                 <a:latin typeface="맑은 고딕"/>
               </a:rPr>
@@ -14159,61 +14887,7 @@
       </p:sp>
       <p:sp>
         <p:nvSpPr>
-          <p:cNvPr id="4" name="Rectangle 3"/>
-          <p:cNvSpPr/>
-          <p:nvPr/>
-        </p:nvSpPr>
-        <p:spPr>
-          <a:xfrm>
-            <a:off x="8001000" y="1572768"/>
-            <a:ext cx="3337560" cy="3611880"/>
-          </a:xfrm>
-          <a:prstGeom prst="rect">
-            <a:avLst/>
-          </a:prstGeom>
-          <a:solidFill>
-            <a:srgbClr val="F5F5F5"/>
-          </a:solidFill>
-          <a:ln w="12700">
-            <a:solidFill>
-              <a:srgbClr val="BEBEBE"/>
-            </a:solidFill>
-          </a:ln>
-        </p:spPr>
-        <p:style>
-          <a:lnRef idx="1">
-            <a:schemeClr val="accent1"/>
-          </a:lnRef>
-          <a:fillRef idx="3">
-            <a:schemeClr val="accent1"/>
-          </a:fillRef>
-          <a:effectRef idx="2">
-            <a:schemeClr val="accent1"/>
-          </a:effectRef>
-          <a:fontRef idx="minor">
-            <a:schemeClr val="lt1"/>
-          </a:fontRef>
-        </p:style>
-        <p:txBody>
-          <a:bodyPr rtlCol="0" anchor="ctr" wrap="square"/>
-          <a:lstStyle/>
-          <a:p>
-            <a:pPr algn="ctr"/>
-            <a:r>
-              <a:rPr sz="1300">
-                <a:solidFill>
-                  <a:srgbClr val="566070"/>
-                </a:solidFill>
-                <a:latin typeface="맑은 고딕"/>
-              </a:rPr>
-              <a:t>[수동 삽입]</a:t>
-            </a:r>
-          </a:p>
-        </p:txBody>
-      </p:sp>
-      <p:sp>
-        <p:nvSpPr>
-          <p:cNvPr id="5" name="TextBox 4"/>
+          <p:cNvPr id="4" name="TextBox 3"/>
           <p:cNvSpPr txBox="1"/>
           <p:nvPr/>
         </p:nvSpPr>
@@ -14234,7 +14908,7 @@
           <a:lstStyle/>
           <a:p>
             <a:r>
-              <a:rPr sz="800" b="0">
+              <a:rPr sz="800" b="0" u="none">
                 <a:solidFill>
                   <a:srgbClr val="566070"/>
                 </a:solidFill>
@@ -14247,7 +14921,7 @@
       </p:sp>
       <p:sp>
         <p:nvSpPr>
-          <p:cNvPr id="6" name="TextBox 5"/>
+          <p:cNvPr id="5" name="TextBox 4"/>
           <p:cNvSpPr txBox="1"/>
           <p:nvPr/>
         </p:nvSpPr>
@@ -14269,7 +14943,7 @@
           <a:p>
             <a:pPr algn="r"/>
             <a:r>
-              <a:rPr sz="800" b="0">
+              <a:rPr sz="800" b="0" u="none">
                 <a:solidFill>
                   <a:srgbClr val="566070"/>
                 </a:solidFill>
@@ -14330,7 +15004,7 @@
           <a:p>
             <a:pPr algn="ctr"/>
             <a:r>
-              <a:rPr sz="3200" b="1">
+              <a:rPr sz="2800" b="1" u="none">
                 <a:solidFill>
                   <a:srgbClr val="FF0000"/>
                 </a:solidFill>
@@ -14369,9 +15043,9 @@
               </a:spcAft>
             </a:pPr>
             <a:r>
-              <a:rPr sz="2800">
-                <a:solidFill>
-                  <a:srgbClr val="FF0000"/>
+              <a:rPr sz="2800" b="0" u="none">
+                <a:solidFill>
+                  <a:srgbClr val="000000"/>
                 </a:solidFill>
                 <a:latin typeface="맑은 고딕"/>
               </a:rPr>
@@ -14385,9 +15059,9 @@
               </a:spcAft>
             </a:pPr>
             <a:r>
-              <a:rPr sz="2800">
-                <a:solidFill>
-                  <a:srgbClr val="FF0000"/>
+              <a:rPr sz="2800" b="0" u="none">
+                <a:solidFill>
+                  <a:srgbClr val="000000"/>
                 </a:solidFill>
                 <a:latin typeface="맑은 고딕"/>
               </a:rPr>
@@ -14401,9 +15075,9 @@
               </a:spcAft>
             </a:pPr>
             <a:r>
-              <a:rPr sz="2800">
-                <a:solidFill>
-                  <a:srgbClr val="FF0000"/>
+              <a:rPr sz="2800" b="0" u="none">
+                <a:solidFill>
+                  <a:srgbClr val="000000"/>
                 </a:solidFill>
                 <a:latin typeface="맑은 고딕"/>
               </a:rPr>
@@ -14435,7 +15109,7 @@
           <a:lstStyle/>
           <a:p>
             <a:r>
-              <a:rPr sz="800" b="0">
+              <a:rPr sz="800" b="0" u="none">
                 <a:solidFill>
                   <a:srgbClr val="566070"/>
                 </a:solidFill>
@@ -14470,7 +15144,7 @@
           <a:p>
             <a:pPr algn="r"/>
             <a:r>
-              <a:rPr sz="800" b="0">
+              <a:rPr sz="800" b="0" u="none">
                 <a:solidFill>
                   <a:srgbClr val="566070"/>
                 </a:solidFill>
@@ -14531,7 +15205,7 @@
           <a:p>
             <a:pPr algn="ctr"/>
             <a:r>
-              <a:rPr sz="3200" b="1">
+              <a:rPr sz="2800" b="1" u="none">
                 <a:solidFill>
                   <a:srgbClr val="FF0000"/>
                 </a:solidFill>
@@ -14570,9 +15244,9 @@
               </a:spcAft>
             </a:pPr>
             <a:r>
-              <a:rPr sz="2800">
-                <a:solidFill>
-                  <a:srgbClr val="FF0000"/>
+              <a:rPr sz="2800" b="0" u="none">
+                <a:solidFill>
+                  <a:srgbClr val="000000"/>
                 </a:solidFill>
                 <a:latin typeface="맑은 고딕"/>
               </a:rPr>
@@ -14586,9 +15260,9 @@
               </a:spcAft>
             </a:pPr>
             <a:r>
-              <a:rPr sz="2800">
-                <a:solidFill>
-                  <a:srgbClr val="FF0000"/>
+              <a:rPr sz="2800" b="0" u="none">
+                <a:solidFill>
+                  <a:srgbClr val="000000"/>
                 </a:solidFill>
                 <a:latin typeface="맑은 고딕"/>
               </a:rPr>
@@ -14602,9 +15276,9 @@
               </a:spcAft>
             </a:pPr>
             <a:r>
-              <a:rPr sz="2800">
-                <a:solidFill>
-                  <a:srgbClr val="FF0000"/>
+              <a:rPr sz="2800" b="0" u="none">
+                <a:solidFill>
+                  <a:srgbClr val="000000"/>
                 </a:solidFill>
                 <a:latin typeface="맑은 고딕"/>
               </a:rPr>
@@ -14636,7 +15310,7 @@
           <a:lstStyle/>
           <a:p>
             <a:r>
-              <a:rPr sz="800" b="0">
+              <a:rPr sz="800" b="0" u="none">
                 <a:solidFill>
                   <a:srgbClr val="566070"/>
                 </a:solidFill>
@@ -14671,7 +15345,7 @@
           <a:p>
             <a:pPr algn="r"/>
             <a:r>
-              <a:rPr sz="800" b="0">
+              <a:rPr sz="800" b="0" u="none">
                 <a:solidFill>
                   <a:srgbClr val="566070"/>
                 </a:solidFill>
@@ -14731,7 +15405,7 @@
           <a:lstStyle/>
           <a:p>
             <a:r>
-              <a:rPr sz="5400" b="1">
+              <a:rPr sz="5400" b="1" u="none">
                 <a:solidFill>
                   <a:srgbClr val="181C23"/>
                 </a:solidFill>
@@ -14770,7 +15444,7 @@
               </a:spcAft>
             </a:pPr>
             <a:r>
-              <a:rPr sz="2800">
+              <a:rPr sz="2800" b="0" u="none">
                 <a:solidFill>
                   <a:srgbClr val="181C23"/>
                 </a:solidFill>
@@ -14804,7 +15478,7 @@
           <a:lstStyle/>
           <a:p>
             <a:r>
-              <a:rPr sz="800" b="0">
+              <a:rPr sz="800" b="0" u="none">
                 <a:solidFill>
                   <a:srgbClr val="566070"/>
                 </a:solidFill>
@@ -14839,7 +15513,7 @@
           <a:p>
             <a:pPr algn="r"/>
             <a:r>
-              <a:rPr sz="800" b="0">
+              <a:rPr sz="800" b="0" u="none">
                 <a:solidFill>
                   <a:srgbClr val="566070"/>
                 </a:solidFill>
@@ -14885,7 +15559,7 @@
         <p:spPr>
           <a:xfrm>
             <a:off x="572414" y="411480"/>
-            <a:ext cx="6720840" cy="685800"/>
+            <a:ext cx="10972800" cy="685800"/>
           </a:xfrm>
           <a:prstGeom prst="rect">
             <a:avLst/>
@@ -14899,7 +15573,7 @@
           <a:lstStyle/>
           <a:p>
             <a:r>
-              <a:rPr sz="2800" b="1">
+              <a:rPr sz="2800" b="1" u="none">
                 <a:solidFill>
                   <a:srgbClr val="FF0000"/>
                 </a:solidFill>
@@ -14919,7 +15593,7 @@
         <p:spPr>
           <a:xfrm>
             <a:off x="572414" y="1208836"/>
-            <a:ext cx="6720840" cy="1302105"/>
+            <a:ext cx="11193170" cy="1302105"/>
           </a:xfrm>
           <a:prstGeom prst="rect">
             <a:avLst/>
@@ -14938,9 +15612,9 @@
               </a:spcAft>
             </a:pPr>
             <a:r>
-              <a:rPr sz="2000">
-                <a:solidFill>
-                  <a:srgbClr val="FF0000"/>
+              <a:rPr sz="2800" b="0" u="none">
+                <a:solidFill>
+                  <a:srgbClr val="000000"/>
                 </a:solidFill>
                 <a:latin typeface="맑은 고딕"/>
               </a:rPr>
@@ -14954,9 +15628,9 @@
               </a:spcAft>
             </a:pPr>
             <a:r>
-              <a:rPr sz="2000">
-                <a:solidFill>
-                  <a:srgbClr val="FF0000"/>
+              <a:rPr sz="2800" b="0" u="none">
+                <a:solidFill>
+                  <a:srgbClr val="000000"/>
                 </a:solidFill>
                 <a:latin typeface="맑은 고딕"/>
               </a:rPr>
@@ -14970,9 +15644,9 @@
               </a:spcAft>
             </a:pPr>
             <a:r>
-              <a:rPr sz="2000">
-                <a:solidFill>
-                  <a:srgbClr val="FF0000"/>
+              <a:rPr sz="2800" b="0" u="none">
+                <a:solidFill>
+                  <a:srgbClr val="000000"/>
                 </a:solidFill>
                 <a:latin typeface="맑은 고딕"/>
               </a:rPr>
@@ -14983,61 +15657,7 @@
       </p:sp>
       <p:sp>
         <p:nvSpPr>
-          <p:cNvPr id="4" name="Rectangle 3"/>
-          <p:cNvSpPr/>
-          <p:nvPr/>
-        </p:nvSpPr>
-        <p:spPr>
-          <a:xfrm>
-            <a:off x="8001000" y="1572768"/>
-            <a:ext cx="3337560" cy="3611880"/>
-          </a:xfrm>
-          <a:prstGeom prst="rect">
-            <a:avLst/>
-          </a:prstGeom>
-          <a:solidFill>
-            <a:srgbClr val="F5F5F5"/>
-          </a:solidFill>
-          <a:ln w="12700">
-            <a:solidFill>
-              <a:srgbClr val="BEBEBE"/>
-            </a:solidFill>
-          </a:ln>
-        </p:spPr>
-        <p:style>
-          <a:lnRef idx="1">
-            <a:schemeClr val="accent1"/>
-          </a:lnRef>
-          <a:fillRef idx="3">
-            <a:schemeClr val="accent1"/>
-          </a:fillRef>
-          <a:effectRef idx="2">
-            <a:schemeClr val="accent1"/>
-          </a:effectRef>
-          <a:fontRef idx="minor">
-            <a:schemeClr val="lt1"/>
-          </a:fontRef>
-        </p:style>
-        <p:txBody>
-          <a:bodyPr rtlCol="0" anchor="ctr" wrap="square"/>
-          <a:lstStyle/>
-          <a:p>
-            <a:pPr algn="ctr"/>
-            <a:r>
-              <a:rPr sz="1300">
-                <a:solidFill>
-                  <a:srgbClr val="566070"/>
-                </a:solidFill>
-                <a:latin typeface="맑은 고딕"/>
-              </a:rPr>
-              <a:t>[수동 삽입]</a:t>
-            </a:r>
-          </a:p>
-        </p:txBody>
-      </p:sp>
-      <p:sp>
-        <p:nvSpPr>
-          <p:cNvPr id="5" name="TextBox 4"/>
+          <p:cNvPr id="4" name="TextBox 3"/>
           <p:cNvSpPr txBox="1"/>
           <p:nvPr/>
         </p:nvSpPr>
@@ -15058,7 +15678,7 @@
           <a:lstStyle/>
           <a:p>
             <a:r>
-              <a:rPr sz="800" b="0">
+              <a:rPr sz="800" b="0" u="none">
                 <a:solidFill>
                   <a:srgbClr val="566070"/>
                 </a:solidFill>
@@ -15071,7 +15691,7 @@
       </p:sp>
       <p:sp>
         <p:nvSpPr>
-          <p:cNvPr id="6" name="TextBox 5"/>
+          <p:cNvPr id="5" name="TextBox 4"/>
           <p:cNvSpPr txBox="1"/>
           <p:nvPr/>
         </p:nvSpPr>
@@ -15093,7 +15713,7 @@
           <a:p>
             <a:pPr algn="r"/>
             <a:r>
-              <a:rPr sz="800" b="0">
+              <a:rPr sz="800" b="0" u="none">
                 <a:solidFill>
                   <a:srgbClr val="566070"/>
                 </a:solidFill>
@@ -15153,7 +15773,7 @@
           <a:lstStyle/>
           <a:p>
             <a:r>
-              <a:rPr sz="2700" b="1">
+              <a:rPr sz="2800" b="1" u="none">
                 <a:solidFill>
                   <a:srgbClr val="FF0000"/>
                 </a:solidFill>
@@ -15282,9 +15902,9 @@
               </a:spcAft>
             </a:pPr>
             <a:r>
-              <a:rPr sz="2800">
-                <a:solidFill>
-                  <a:srgbClr val="FF0000"/>
+              <a:rPr sz="2800" b="0" u="none">
+                <a:solidFill>
+                  <a:srgbClr val="000000"/>
                 </a:solidFill>
                 <a:latin typeface="맑은 고딕"/>
               </a:rPr>
@@ -15298,9 +15918,9 @@
               </a:spcAft>
             </a:pPr>
             <a:r>
-              <a:rPr sz="2800">
-                <a:solidFill>
-                  <a:srgbClr val="FF0000"/>
+              <a:rPr sz="2800" b="0" u="none">
+                <a:solidFill>
+                  <a:srgbClr val="000000"/>
                 </a:solidFill>
                 <a:latin typeface="맑은 고딕"/>
               </a:rPr>
@@ -15337,9 +15957,9 @@
               </a:spcAft>
             </a:pPr>
             <a:r>
-              <a:rPr sz="2800">
-                <a:solidFill>
-                  <a:srgbClr val="FF0000"/>
+              <a:rPr sz="2800" b="0" u="none">
+                <a:solidFill>
+                  <a:srgbClr val="000000"/>
                 </a:solidFill>
                 <a:latin typeface="맑은 고딕"/>
               </a:rPr>
@@ -15371,7 +15991,7 @@
           <a:lstStyle/>
           <a:p>
             <a:r>
-              <a:rPr sz="800" b="0">
+              <a:rPr sz="800" b="0" u="none">
                 <a:solidFill>
                   <a:srgbClr val="566070"/>
                 </a:solidFill>
@@ -15406,7 +16026,7 @@
           <a:p>
             <a:pPr algn="r"/>
             <a:r>
-              <a:rPr sz="800" b="0">
+              <a:rPr sz="800" b="0" u="none">
                 <a:solidFill>
                   <a:srgbClr val="566070"/>
                 </a:solidFill>

--- a/outputs/pptx/ai_knowledge_institution_styled_draft.pptx
+++ b/outputs/pptx/ai_knowledge_institution_styled_draft.pptx
@@ -10596,8 +10596,8 @@
         </p:nvSpPr>
         <p:spPr>
           <a:xfrm>
-            <a:off x="685800" y="438912"/>
-            <a:ext cx="10789920" cy="685800"/>
+            <a:off x="856792" y="1122883"/>
+            <a:ext cx="10478109" cy="2387498"/>
           </a:xfrm>
           <a:prstGeom prst="rect">
             <a:avLst/>
@@ -10611,137 +10611,13 @@
           <a:lstStyle/>
           <a:p>
             <a:r>
-              <a:rPr sz="2800" b="1" u="none">
-                <a:solidFill>
-                  <a:srgbClr val="FF0000"/>
-                </a:solidFill>
-                <a:latin typeface="맑은 고딕"/>
-              </a:rPr>
-              <a:t>AI 즉답 시대의 지식기관 역할</a:t>
-            </a:r>
-          </a:p>
-        </p:txBody>
-      </p:sp>
-      <p:sp>
-        <p:nvSpPr>
-          <p:cNvPr id="3" name="TextBox 2"/>
-          <p:cNvSpPr txBox="1"/>
-          <p:nvPr/>
-        </p:nvSpPr>
-        <p:spPr>
-          <a:xfrm>
-            <a:off x="685800" y="1444752"/>
-            <a:ext cx="9875520" cy="1280160"/>
-          </a:xfrm>
-          <a:prstGeom prst="rect">
-            <a:avLst/>
-          </a:prstGeom>
-          <a:noFill/>
-        </p:spPr>
-        <p:txBody>
-          <a:bodyPr wrap="square">
-            <a:spAutoFit/>
-          </a:bodyPr>
-          <a:lstStyle/>
-          <a:p>
-            <a:pPr>
-              <a:spcAft>
-                <a:spcPts val="800"/>
-              </a:spcAft>
-            </a:pPr>
-            <a:r>
-              <a:rPr sz="2800" b="0" u="none">
+              <a:rPr sz="5400" b="1" u="none">
                 <a:solidFill>
                   <a:srgbClr val="000000"/>
                 </a:solidFill>
                 <a:latin typeface="맑은 고딕"/>
               </a:rPr>
-              <a:t>검색창이 아니라 답안지가 된 AI</a:t>
-            </a:r>
-          </a:p>
-          <a:p>
-            <a:pPr>
-              <a:spcAft>
-                <a:spcPts val="800"/>
-              </a:spcAft>
-            </a:pPr>
-            <a:r>
-              <a:rPr sz="2800" b="0" u="none">
-                <a:solidFill>
-                  <a:srgbClr val="000000"/>
-                </a:solidFill>
-                <a:latin typeface="맑은 고딕"/>
-              </a:rPr>
-              <a:t>학교와 박물관은 이제 무엇을 가르쳐야 할까</a:t>
-            </a:r>
-          </a:p>
-        </p:txBody>
-      </p:sp>
-      <p:sp>
-        <p:nvSpPr>
-          <p:cNvPr id="4" name="TextBox 3"/>
-          <p:cNvSpPr txBox="1"/>
-          <p:nvPr/>
-        </p:nvSpPr>
-        <p:spPr>
-          <a:xfrm>
-            <a:off x="411480" y="6510528"/>
-            <a:ext cx="9875520" cy="201168"/>
-          </a:xfrm>
-          <a:prstGeom prst="rect">
-            <a:avLst/>
-          </a:prstGeom>
-          <a:noFill/>
-        </p:spPr>
-        <p:txBody>
-          <a:bodyPr wrap="square">
-            <a:spAutoFit/>
-          </a:bodyPr>
-          <a:lstStyle/>
-          <a:p>
-            <a:r>
-              <a:rPr sz="800" b="0" u="none">
-                <a:solidFill>
-                  <a:srgbClr val="566070"/>
-                </a:solidFill>
-                <a:latin typeface="맑은 고딕"/>
-              </a:rPr>
-              <a:t>draft skeleton</a:t>
-            </a:r>
-          </a:p>
-        </p:txBody>
-      </p:sp>
-      <p:sp>
-        <p:nvSpPr>
-          <p:cNvPr id="5" name="TextBox 4"/>
-          <p:cNvSpPr txBox="1"/>
-          <p:nvPr/>
-        </p:nvSpPr>
-        <p:spPr>
-          <a:xfrm>
-            <a:off x="10607040" y="6510528"/>
-            <a:ext cx="1143000" cy="201168"/>
-          </a:xfrm>
-          <a:prstGeom prst="rect">
-            <a:avLst/>
-          </a:prstGeom>
-          <a:noFill/>
-        </p:spPr>
-        <p:txBody>
-          <a:bodyPr wrap="square">
-            <a:spAutoFit/>
-          </a:bodyPr>
-          <a:lstStyle/>
-          <a:p>
-            <a:pPr algn="r"/>
-            <a:r>
-              <a:rPr sz="800" b="0" u="none">
-                <a:solidFill>
-                  <a:srgbClr val="566070"/>
-                </a:solidFill>
-                <a:latin typeface="맑은 고딕"/>
-              </a:rPr>
-              <a:t>01</a:t>
+              <a:t>AI 즉답 시대의 지식기관 역할</a:t>
             </a:r>
           </a:p>
         </p:txBody>
@@ -10780,8 +10656,8 @@
         </p:nvSpPr>
         <p:spPr>
           <a:xfrm>
-            <a:off x="572414" y="411480"/>
-            <a:ext cx="10972800" cy="685800"/>
+            <a:off x="572414" y="356616"/>
+            <a:ext cx="11192256" cy="521207"/>
           </a:xfrm>
           <a:prstGeom prst="rect">
             <a:avLst/>
@@ -10814,7 +10690,7 @@
         </p:nvSpPr>
         <p:spPr>
           <a:xfrm>
-            <a:off x="572414" y="1208836"/>
+            <a:off x="572414" y="1874519"/>
             <a:ext cx="11193170" cy="1302105"/>
           </a:xfrm>
           <a:prstGeom prst="rect">
@@ -10873,75 +10749,6 @@
                 <a:latin typeface="맑은 고딕"/>
               </a:rPr>
               <a:t>이 주장은 연구·프레임워크에 기대되, 인지 효과를 확정적으로 말하지 않는다</a:t>
-            </a:r>
-          </a:p>
-        </p:txBody>
-      </p:sp>
-      <p:sp>
-        <p:nvSpPr>
-          <p:cNvPr id="4" name="TextBox 3"/>
-          <p:cNvSpPr txBox="1"/>
-          <p:nvPr/>
-        </p:nvSpPr>
-        <p:spPr>
-          <a:xfrm>
-            <a:off x="411480" y="6510528"/>
-            <a:ext cx="9875520" cy="201168"/>
-          </a:xfrm>
-          <a:prstGeom prst="rect">
-            <a:avLst/>
-          </a:prstGeom>
-          <a:noFill/>
-        </p:spPr>
-        <p:txBody>
-          <a:bodyPr wrap="square">
-            <a:spAutoFit/>
-          </a:bodyPr>
-          <a:lstStyle/>
-          <a:p>
-            <a:r>
-              <a:rPr sz="800" b="0" u="none">
-                <a:solidFill>
-                  <a:srgbClr val="566070"/>
-                </a:solidFill>
-                <a:latin typeface="맑은 고딕"/>
-              </a:rPr>
-              <a:t>needs_fact_check</a:t>
-            </a:r>
-          </a:p>
-        </p:txBody>
-      </p:sp>
-      <p:sp>
-        <p:nvSpPr>
-          <p:cNvPr id="5" name="TextBox 4"/>
-          <p:cNvSpPr txBox="1"/>
-          <p:nvPr/>
-        </p:nvSpPr>
-        <p:spPr>
-          <a:xfrm>
-            <a:off x="10607040" y="6510528"/>
-            <a:ext cx="1143000" cy="201168"/>
-          </a:xfrm>
-          <a:prstGeom prst="rect">
-            <a:avLst/>
-          </a:prstGeom>
-          <a:noFill/>
-        </p:spPr>
-        <p:txBody>
-          <a:bodyPr wrap="square">
-            <a:spAutoFit/>
-          </a:bodyPr>
-          <a:lstStyle/>
-          <a:p>
-            <a:pPr algn="r"/>
-            <a:r>
-              <a:rPr sz="800" b="0" u="none">
-                <a:solidFill>
-                  <a:srgbClr val="566070"/>
-                </a:solidFill>
-                <a:latin typeface="맑은 고딕"/>
-              </a:rPr>
-              <a:t>10</a:t>
             </a:r>
           </a:p>
         </p:txBody>
@@ -11025,8 +10832,8 @@
         </p:nvSpPr>
         <p:spPr>
           <a:xfrm>
-            <a:off x="572414" y="940003"/>
-            <a:ext cx="7295083" cy="868680"/>
+            <a:off x="572414" y="356616"/>
+            <a:ext cx="11192256" cy="521207"/>
           </a:xfrm>
           <a:prstGeom prst="rect">
             <a:avLst/>
@@ -11059,7 +10866,7 @@
         </p:nvSpPr>
         <p:spPr>
           <a:xfrm>
-            <a:off x="572414" y="2174443"/>
+            <a:off x="572414" y="1874519"/>
             <a:ext cx="7295083" cy="2468880"/>
           </a:xfrm>
           <a:prstGeom prst="rect">
@@ -11118,75 +10925,6 @@
                 <a:latin typeface="맑은 고딕"/>
               </a:rPr>
               <a:t>단일 기사 기반 맥락이므로 표현은 보수적으로 유지한다</a:t>
-            </a:r>
-          </a:p>
-        </p:txBody>
-      </p:sp>
-      <p:sp>
-        <p:nvSpPr>
-          <p:cNvPr id="5" name="TextBox 4"/>
-          <p:cNvSpPr txBox="1"/>
-          <p:nvPr/>
-        </p:nvSpPr>
-        <p:spPr>
-          <a:xfrm>
-            <a:off x="411480" y="6510528"/>
-            <a:ext cx="9875520" cy="201168"/>
-          </a:xfrm>
-          <a:prstGeom prst="rect">
-            <a:avLst/>
-          </a:prstGeom>
-          <a:noFill/>
-        </p:spPr>
-        <p:txBody>
-          <a:bodyPr wrap="square">
-            <a:spAutoFit/>
-          </a:bodyPr>
-          <a:lstStyle/>
-          <a:p>
-            <a:r>
-              <a:rPr sz="800" b="0" u="none">
-                <a:solidFill>
-                  <a:srgbClr val="566070"/>
-                </a:solidFill>
-                <a:latin typeface="맑은 고딕"/>
-              </a:rPr>
-              <a:t>needs_fact_check</a:t>
-            </a:r>
-          </a:p>
-        </p:txBody>
-      </p:sp>
-      <p:sp>
-        <p:nvSpPr>
-          <p:cNvPr id="6" name="TextBox 5"/>
-          <p:cNvSpPr txBox="1"/>
-          <p:nvPr/>
-        </p:nvSpPr>
-        <p:spPr>
-          <a:xfrm>
-            <a:off x="10607040" y="6510528"/>
-            <a:ext cx="1143000" cy="201168"/>
-          </a:xfrm>
-          <a:prstGeom prst="rect">
-            <a:avLst/>
-          </a:prstGeom>
-          <a:noFill/>
-        </p:spPr>
-        <p:txBody>
-          <a:bodyPr wrap="square">
-            <a:spAutoFit/>
-          </a:bodyPr>
-          <a:lstStyle/>
-          <a:p>
-            <a:pPr algn="r"/>
-            <a:r>
-              <a:rPr sz="800" b="0" u="none">
-                <a:solidFill>
-                  <a:srgbClr val="566070"/>
-                </a:solidFill>
-                <a:latin typeface="맑은 고딕"/>
-              </a:rPr>
-              <a:t>11</a:t>
             </a:r>
           </a:p>
         </p:txBody>
@@ -11225,8 +10963,8 @@
         </p:nvSpPr>
         <p:spPr>
           <a:xfrm>
-            <a:off x="6372453" y="1952243"/>
-            <a:ext cx="3709720" cy="523036"/>
+            <a:off x="572414" y="356616"/>
+            <a:ext cx="11192256" cy="521207"/>
           </a:xfrm>
           <a:prstGeom prst="rect">
             <a:avLst/>
@@ -11259,7 +10997,7 @@
         </p:nvSpPr>
         <p:spPr>
           <a:xfrm>
-            <a:off x="713232" y="2795320"/>
+            <a:off x="713232" y="1874519"/>
             <a:ext cx="9875520" cy="2651760"/>
           </a:xfrm>
           <a:prstGeom prst="rect">
@@ -11318,75 +11056,6 @@
                 <a:latin typeface="맑은 고딕"/>
               </a:rPr>
               <a:t>AI가 정답을 말할수록, 사람은 질문을 더 잘해야 한다</a:t>
-            </a:r>
-          </a:p>
-        </p:txBody>
-      </p:sp>
-      <p:sp>
-        <p:nvSpPr>
-          <p:cNvPr id="4" name="TextBox 3"/>
-          <p:cNvSpPr txBox="1"/>
-          <p:nvPr/>
-        </p:nvSpPr>
-        <p:spPr>
-          <a:xfrm>
-            <a:off x="411480" y="6510528"/>
-            <a:ext cx="9875520" cy="201168"/>
-          </a:xfrm>
-          <a:prstGeom prst="rect">
-            <a:avLst/>
-          </a:prstGeom>
-          <a:noFill/>
-        </p:spPr>
-        <p:txBody>
-          <a:bodyPr wrap="square">
-            <a:spAutoFit/>
-          </a:bodyPr>
-          <a:lstStyle/>
-          <a:p>
-            <a:r>
-              <a:rPr sz="800" b="0" u="none">
-                <a:solidFill>
-                  <a:srgbClr val="566070"/>
-                </a:solidFill>
-                <a:latin typeface="맑은 고딕"/>
-              </a:rPr>
-              <a:t>draft skeleton</a:t>
-            </a:r>
-          </a:p>
-        </p:txBody>
-      </p:sp>
-      <p:sp>
-        <p:nvSpPr>
-          <p:cNvPr id="5" name="TextBox 4"/>
-          <p:cNvSpPr txBox="1"/>
-          <p:nvPr/>
-        </p:nvSpPr>
-        <p:spPr>
-          <a:xfrm>
-            <a:off x="10607040" y="6510528"/>
-            <a:ext cx="1143000" cy="201168"/>
-          </a:xfrm>
-          <a:prstGeom prst="rect">
-            <a:avLst/>
-          </a:prstGeom>
-          <a:noFill/>
-        </p:spPr>
-        <p:txBody>
-          <a:bodyPr wrap="square">
-            <a:spAutoFit/>
-          </a:bodyPr>
-          <a:lstStyle/>
-          <a:p>
-            <a:pPr algn="r"/>
-            <a:r>
-              <a:rPr sz="800" b="0" u="none">
-                <a:solidFill>
-                  <a:srgbClr val="566070"/>
-                </a:solidFill>
-                <a:latin typeface="맑은 고딕"/>
-              </a:rPr>
-              <a:t>12</a:t>
             </a:r>
           </a:p>
         </p:txBody>
@@ -11451,114 +11120,6 @@
           </a:p>
         </p:txBody>
       </p:sp>
-      <p:sp>
-        <p:nvSpPr>
-          <p:cNvPr id="3" name="TextBox 2"/>
-          <p:cNvSpPr txBox="1"/>
-          <p:nvPr/>
-        </p:nvSpPr>
-        <p:spPr>
-          <a:xfrm>
-            <a:off x="843991" y="2508199"/>
-            <a:ext cx="9875520" cy="914400"/>
-          </a:xfrm>
-          <a:prstGeom prst="rect">
-            <a:avLst/>
-          </a:prstGeom>
-          <a:noFill/>
-        </p:spPr>
-        <p:txBody>
-          <a:bodyPr wrap="square">
-            <a:spAutoFit/>
-          </a:bodyPr>
-          <a:lstStyle/>
-          <a:p>
-            <a:pPr>
-              <a:spcAft>
-                <a:spcPts val="800"/>
-              </a:spcAft>
-            </a:pPr>
-            <a:r>
-              <a:rPr sz="2800" b="0" u="none">
-                <a:solidFill>
-                  <a:srgbClr val="181C23"/>
-                </a:solidFill>
-                <a:latin typeface="맑은 고딕"/>
-              </a:rPr>
-              <a:t>답을 알려주는 곳에서, 질문을 훈련하는 곳으로</a:t>
-            </a:r>
-          </a:p>
-        </p:txBody>
-      </p:sp>
-      <p:sp>
-        <p:nvSpPr>
-          <p:cNvPr id="4" name="TextBox 3"/>
-          <p:cNvSpPr txBox="1"/>
-          <p:nvPr/>
-        </p:nvSpPr>
-        <p:spPr>
-          <a:xfrm>
-            <a:off x="411480" y="6510528"/>
-            <a:ext cx="9875520" cy="201168"/>
-          </a:xfrm>
-          <a:prstGeom prst="rect">
-            <a:avLst/>
-          </a:prstGeom>
-          <a:noFill/>
-        </p:spPr>
-        <p:txBody>
-          <a:bodyPr wrap="square">
-            <a:spAutoFit/>
-          </a:bodyPr>
-          <a:lstStyle/>
-          <a:p>
-            <a:r>
-              <a:rPr sz="800" b="0" u="none">
-                <a:solidFill>
-                  <a:srgbClr val="566070"/>
-                </a:solidFill>
-                <a:latin typeface="맑은 고딕"/>
-              </a:rPr>
-              <a:t>draft skeleton</a:t>
-            </a:r>
-          </a:p>
-        </p:txBody>
-      </p:sp>
-      <p:sp>
-        <p:nvSpPr>
-          <p:cNvPr id="5" name="TextBox 4"/>
-          <p:cNvSpPr txBox="1"/>
-          <p:nvPr/>
-        </p:nvSpPr>
-        <p:spPr>
-          <a:xfrm>
-            <a:off x="10607040" y="6510528"/>
-            <a:ext cx="1143000" cy="201168"/>
-          </a:xfrm>
-          <a:prstGeom prst="rect">
-            <a:avLst/>
-          </a:prstGeom>
-          <a:noFill/>
-        </p:spPr>
-        <p:txBody>
-          <a:bodyPr wrap="square">
-            <a:spAutoFit/>
-          </a:bodyPr>
-          <a:lstStyle/>
-          <a:p>
-            <a:pPr algn="r"/>
-            <a:r>
-              <a:rPr sz="800" b="0" u="none">
-                <a:solidFill>
-                  <a:srgbClr val="566070"/>
-                </a:solidFill>
-                <a:latin typeface="맑은 고딕"/>
-              </a:rPr>
-              <a:t>13</a:t>
-            </a:r>
-          </a:p>
-        </p:txBody>
-      </p:sp>
     </p:spTree>
   </p:cSld>
   <p:clrMapOvr>
@@ -11593,8 +11154,8 @@
         </p:nvSpPr>
         <p:spPr>
           <a:xfrm>
-            <a:off x="572414" y="411480"/>
-            <a:ext cx="10972800" cy="685800"/>
+            <a:off x="572414" y="356616"/>
+            <a:ext cx="11192256" cy="521207"/>
           </a:xfrm>
           <a:prstGeom prst="rect">
             <a:avLst/>
@@ -11627,7 +11188,7 @@
         </p:nvSpPr>
         <p:spPr>
           <a:xfrm>
-            <a:off x="572414" y="1208836"/>
+            <a:off x="572414" y="1874519"/>
             <a:ext cx="11193170" cy="1302105"/>
           </a:xfrm>
           <a:prstGeom prst="rect">
@@ -11686,75 +11247,6 @@
                 <a:latin typeface="맑은 고딕"/>
               </a:rPr>
               <a:t>다만 교육 효과는 아직 단정하지 않고, 수업 설계의 과제로 남긴다</a:t>
-            </a:r>
-          </a:p>
-        </p:txBody>
-      </p:sp>
-      <p:sp>
-        <p:nvSpPr>
-          <p:cNvPr id="4" name="TextBox 3"/>
-          <p:cNvSpPr txBox="1"/>
-          <p:nvPr/>
-        </p:nvSpPr>
-        <p:spPr>
-          <a:xfrm>
-            <a:off x="411480" y="6510528"/>
-            <a:ext cx="9875520" cy="201168"/>
-          </a:xfrm>
-          <a:prstGeom prst="rect">
-            <a:avLst/>
-          </a:prstGeom>
-          <a:noFill/>
-        </p:spPr>
-        <p:txBody>
-          <a:bodyPr wrap="square">
-            <a:spAutoFit/>
-          </a:bodyPr>
-          <a:lstStyle/>
-          <a:p>
-            <a:r>
-              <a:rPr sz="800" b="0" u="none">
-                <a:solidFill>
-                  <a:srgbClr val="566070"/>
-                </a:solidFill>
-                <a:latin typeface="맑은 고딕"/>
-              </a:rPr>
-              <a:t>needs_fact_check</a:t>
-            </a:r>
-          </a:p>
-        </p:txBody>
-      </p:sp>
-      <p:sp>
-        <p:nvSpPr>
-          <p:cNvPr id="5" name="TextBox 4"/>
-          <p:cNvSpPr txBox="1"/>
-          <p:nvPr/>
-        </p:nvSpPr>
-        <p:spPr>
-          <a:xfrm>
-            <a:off x="10607040" y="6510528"/>
-            <a:ext cx="1143000" cy="201168"/>
-          </a:xfrm>
-          <a:prstGeom prst="rect">
-            <a:avLst/>
-          </a:prstGeom>
-          <a:noFill/>
-        </p:spPr>
-        <p:txBody>
-          <a:bodyPr wrap="square">
-            <a:spAutoFit/>
-          </a:bodyPr>
-          <a:lstStyle/>
-          <a:p>
-            <a:pPr algn="r"/>
-            <a:r>
-              <a:rPr sz="800" b="0" u="none">
-                <a:solidFill>
-                  <a:srgbClr val="566070"/>
-                </a:solidFill>
-                <a:latin typeface="맑은 고딕"/>
-              </a:rPr>
-              <a:t>14</a:t>
             </a:r>
           </a:p>
         </p:txBody>
@@ -11793,8 +11285,8 @@
         </p:nvSpPr>
         <p:spPr>
           <a:xfrm>
-            <a:off x="572414" y="411480"/>
-            <a:ext cx="10972800" cy="685800"/>
+            <a:off x="572414" y="356616"/>
+            <a:ext cx="11192256" cy="521207"/>
           </a:xfrm>
           <a:prstGeom prst="rect">
             <a:avLst/>
@@ -11827,7 +11319,7 @@
         </p:nvSpPr>
         <p:spPr>
           <a:xfrm>
-            <a:off x="572414" y="1208836"/>
+            <a:off x="572414" y="1874519"/>
             <a:ext cx="11193170" cy="1302105"/>
           </a:xfrm>
           <a:prstGeom prst="rect">
@@ -11886,75 +11378,6 @@
                 <a:latin typeface="맑은 고딕"/>
               </a:rPr>
               <a:t>국립과학관 AI 전시 사례는 기술을 체험형 맥락으로 보여주는 보조 사례로만 사용한다</a:t>
-            </a:r>
-          </a:p>
-        </p:txBody>
-      </p:sp>
-      <p:sp>
-        <p:nvSpPr>
-          <p:cNvPr id="4" name="TextBox 3"/>
-          <p:cNvSpPr txBox="1"/>
-          <p:nvPr/>
-        </p:nvSpPr>
-        <p:spPr>
-          <a:xfrm>
-            <a:off x="411480" y="6510528"/>
-            <a:ext cx="9875520" cy="201168"/>
-          </a:xfrm>
-          <a:prstGeom prst="rect">
-            <a:avLst/>
-          </a:prstGeom>
-          <a:noFill/>
-        </p:spPr>
-        <p:txBody>
-          <a:bodyPr wrap="square">
-            <a:spAutoFit/>
-          </a:bodyPr>
-          <a:lstStyle/>
-          <a:p>
-            <a:r>
-              <a:rPr sz="800" b="0" u="none">
-                <a:solidFill>
-                  <a:srgbClr val="566070"/>
-                </a:solidFill>
-                <a:latin typeface="맑은 고딕"/>
-              </a:rPr>
-              <a:t>needs_fact_check</a:t>
-            </a:r>
-          </a:p>
-        </p:txBody>
-      </p:sp>
-      <p:sp>
-        <p:nvSpPr>
-          <p:cNvPr id="5" name="TextBox 4"/>
-          <p:cNvSpPr txBox="1"/>
-          <p:nvPr/>
-        </p:nvSpPr>
-        <p:spPr>
-          <a:xfrm>
-            <a:off x="10607040" y="6510528"/>
-            <a:ext cx="1143000" cy="201168"/>
-          </a:xfrm>
-          <a:prstGeom prst="rect">
-            <a:avLst/>
-          </a:prstGeom>
-          <a:noFill/>
-        </p:spPr>
-        <p:txBody>
-          <a:bodyPr wrap="square">
-            <a:spAutoFit/>
-          </a:bodyPr>
-          <a:lstStyle/>
-          <a:p>
-            <a:pPr algn="r"/>
-            <a:r>
-              <a:rPr sz="800" b="0" u="none">
-                <a:solidFill>
-                  <a:srgbClr val="566070"/>
-                </a:solidFill>
-                <a:latin typeface="맑은 고딕"/>
-              </a:rPr>
-              <a:t>15</a:t>
             </a:r>
           </a:p>
         </p:txBody>
@@ -11993,8 +11416,8 @@
         </p:nvSpPr>
         <p:spPr>
           <a:xfrm>
-            <a:off x="572414" y="411480"/>
-            <a:ext cx="10972800" cy="685800"/>
+            <a:off x="572414" y="356616"/>
+            <a:ext cx="11192256" cy="521207"/>
           </a:xfrm>
           <a:prstGeom prst="rect">
             <a:avLst/>
@@ -12027,7 +11450,7 @@
         </p:nvSpPr>
         <p:spPr>
           <a:xfrm>
-            <a:off x="572414" y="1208836"/>
+            <a:off x="572414" y="1874519"/>
             <a:ext cx="11193170" cy="1302105"/>
           </a:xfrm>
           <a:prstGeom prst="rect">
@@ -12086,75 +11509,6 @@
                 <a:latin typeface="맑은 고딕"/>
               </a:rPr>
               <a:t>천문관 비유는 정보 전달보다 보는 법과 질문하는 법을 강조하기 위한 방송용 구조다</a:t>
-            </a:r>
-          </a:p>
-        </p:txBody>
-      </p:sp>
-      <p:sp>
-        <p:nvSpPr>
-          <p:cNvPr id="4" name="TextBox 3"/>
-          <p:cNvSpPr txBox="1"/>
-          <p:nvPr/>
-        </p:nvSpPr>
-        <p:spPr>
-          <a:xfrm>
-            <a:off x="411480" y="6510528"/>
-            <a:ext cx="9875520" cy="201168"/>
-          </a:xfrm>
-          <a:prstGeom prst="rect">
-            <a:avLst/>
-          </a:prstGeom>
-          <a:noFill/>
-        </p:spPr>
-        <p:txBody>
-          <a:bodyPr wrap="square">
-            <a:spAutoFit/>
-          </a:bodyPr>
-          <a:lstStyle/>
-          <a:p>
-            <a:r>
-              <a:rPr sz="800" b="0" u="none">
-                <a:solidFill>
-                  <a:srgbClr val="566070"/>
-                </a:solidFill>
-                <a:latin typeface="맑은 고딕"/>
-              </a:rPr>
-              <a:t>needs_fact_check</a:t>
-            </a:r>
-          </a:p>
-        </p:txBody>
-      </p:sp>
-      <p:sp>
-        <p:nvSpPr>
-          <p:cNvPr id="5" name="TextBox 4"/>
-          <p:cNvSpPr txBox="1"/>
-          <p:nvPr/>
-        </p:nvSpPr>
-        <p:spPr>
-          <a:xfrm>
-            <a:off x="10607040" y="6510528"/>
-            <a:ext cx="1143000" cy="201168"/>
-          </a:xfrm>
-          <a:prstGeom prst="rect">
-            <a:avLst/>
-          </a:prstGeom>
-          <a:noFill/>
-        </p:spPr>
-        <p:txBody>
-          <a:bodyPr wrap="square">
-            <a:spAutoFit/>
-          </a:bodyPr>
-          <a:lstStyle/>
-          <a:p>
-            <a:pPr algn="r"/>
-            <a:r>
-              <a:rPr sz="800" b="0" u="none">
-                <a:solidFill>
-                  <a:srgbClr val="566070"/>
-                </a:solidFill>
-                <a:latin typeface="맑은 고딕"/>
-              </a:rPr>
-              <a:t>16</a:t>
             </a:r>
           </a:p>
         </p:txBody>
@@ -12193,7 +11547,41 @@
         </p:nvSpPr>
         <p:spPr>
           <a:xfrm>
-            <a:off x="868680" y="502920"/>
+            <a:off x="572414" y="356616"/>
+            <a:ext cx="11192256" cy="521207"/>
+          </a:xfrm>
+          <a:prstGeom prst="rect">
+            <a:avLst/>
+          </a:prstGeom>
+          <a:noFill/>
+        </p:spPr>
+        <p:txBody>
+          <a:bodyPr wrap="square">
+            <a:spAutoFit/>
+          </a:bodyPr>
+          <a:lstStyle/>
+          <a:p>
+            <a:r>
+              <a:rPr sz="2800" b="1" u="none">
+                <a:solidFill>
+                  <a:srgbClr val="FF0000"/>
+                </a:solidFill>
+                <a:latin typeface="맑은 고딕"/>
+              </a:rPr>
+              <a:t>이 부분은 아직 숫자가 필요하다</a:t>
+            </a:r>
+          </a:p>
+        </p:txBody>
+      </p:sp>
+      <p:sp>
+        <p:nvSpPr>
+          <p:cNvPr id="3" name="TextBox 2"/>
+          <p:cNvSpPr txBox="1"/>
+          <p:nvPr/>
+        </p:nvSpPr>
+        <p:spPr>
+          <a:xfrm>
+            <a:off x="868680" y="1143000"/>
             <a:ext cx="10698480" cy="594360"/>
           </a:xfrm>
           <a:prstGeom prst="rect">
@@ -12215,21 +11603,21 @@
                 </a:solidFill>
                 <a:latin typeface="맑은 고딕"/>
               </a:rPr>
-              <a:t>이 부분은 아직 숫자가 필요하다</a:t>
-            </a:r>
-          </a:p>
-        </p:txBody>
-      </p:sp>
-      <p:sp>
-        <p:nvSpPr>
-          <p:cNvPr id="3" name="Rectangle 2"/>
+              <a:t>방송용 완성본에는 AI 검색 사용, 학교 AI 지침, 과학관·박물관 AI 활용 사례가 더 필요하다</a:t>
+            </a:r>
+          </a:p>
+        </p:txBody>
+      </p:sp>
+      <p:sp>
+        <p:nvSpPr>
+          <p:cNvPr id="4" name="Rectangle 3"/>
           <p:cNvSpPr/>
           <p:nvPr/>
         </p:nvSpPr>
         <p:spPr>
           <a:xfrm>
-            <a:off x="914400" y="1234440"/>
-            <a:ext cx="10378440" cy="4434840"/>
+            <a:off x="914400" y="1828800"/>
+            <a:ext cx="10378440" cy="3840480"/>
           </a:xfrm>
           <a:prstGeom prst="rect">
             <a:avLst/>
@@ -12267,14 +11655,14 @@
       </p:sp>
       <p:sp>
         <p:nvSpPr>
-          <p:cNvPr id="4" name="TextBox 3"/>
+          <p:cNvPr id="5" name="TextBox 4"/>
           <p:cNvSpPr txBox="1"/>
           <p:nvPr/>
         </p:nvSpPr>
         <p:spPr>
           <a:xfrm>
-            <a:off x="1234440" y="1828800"/>
-            <a:ext cx="9692640" cy="2880360"/>
+            <a:off x="1234440" y="2423160"/>
+            <a:ext cx="9692640" cy="2514600"/>
           </a:xfrm>
           <a:prstGeom prst="rect">
             <a:avLst/>
@@ -12286,22 +11674,6 @@
             <a:spAutoFit/>
           </a:bodyPr>
           <a:lstStyle/>
-          <a:p>
-            <a:pPr>
-              <a:spcAft>
-                <a:spcPts val="800"/>
-              </a:spcAft>
-            </a:pPr>
-            <a:r>
-              <a:rPr sz="1800" b="1" u="none">
-                <a:solidFill>
-                  <a:srgbClr val="373737"/>
-                </a:solidFill>
-                <a:latin typeface="맑은 고딕"/>
-              </a:rPr>
-              <a:t>방송용 완성본에는 AI 검색 사용, 학교 AI 지침, 과학관·박물관 AI 활용 사례가 더 필요하다</a:t>
-            </a:r>
-          </a:p>
           <a:p>
             <a:pPr>
               <a:spcAft>
@@ -12338,7 +11710,7 @@
       </p:sp>
       <p:sp>
         <p:nvSpPr>
-          <p:cNvPr id="5" name="TextBox 4"/>
+          <p:cNvPr id="6" name="TextBox 5"/>
           <p:cNvSpPr txBox="1"/>
           <p:nvPr/>
         </p:nvSpPr>
@@ -12367,75 +11739,6 @@
                 <a:latin typeface="맑은 고딕"/>
               </a:rPr>
               <a:t>(출처: www.oecd.org; speaker notes 참조)</a:t>
-            </a:r>
-          </a:p>
-        </p:txBody>
-      </p:sp>
-      <p:sp>
-        <p:nvSpPr>
-          <p:cNvPr id="6" name="TextBox 5"/>
-          <p:cNvSpPr txBox="1"/>
-          <p:nvPr/>
-        </p:nvSpPr>
-        <p:spPr>
-          <a:xfrm>
-            <a:off x="411480" y="6510528"/>
-            <a:ext cx="9875520" cy="201168"/>
-          </a:xfrm>
-          <a:prstGeom prst="rect">
-            <a:avLst/>
-          </a:prstGeom>
-          <a:noFill/>
-        </p:spPr>
-        <p:txBody>
-          <a:bodyPr wrap="square">
-            <a:spAutoFit/>
-          </a:bodyPr>
-          <a:lstStyle/>
-          <a:p>
-            <a:r>
-              <a:rPr sz="800" b="0" u="none">
-                <a:solidFill>
-                  <a:srgbClr val="566070"/>
-                </a:solidFill>
-                <a:latin typeface="맑은 고딕"/>
-              </a:rPr>
-              <a:t>needs_fact_check</a:t>
-            </a:r>
-          </a:p>
-        </p:txBody>
-      </p:sp>
-      <p:sp>
-        <p:nvSpPr>
-          <p:cNvPr id="7" name="TextBox 6"/>
-          <p:cNvSpPr txBox="1"/>
-          <p:nvPr/>
-        </p:nvSpPr>
-        <p:spPr>
-          <a:xfrm>
-            <a:off x="10607040" y="6510528"/>
-            <a:ext cx="1143000" cy="201168"/>
-          </a:xfrm>
-          <a:prstGeom prst="rect">
-            <a:avLst/>
-          </a:prstGeom>
-          <a:noFill/>
-        </p:spPr>
-        <p:txBody>
-          <a:bodyPr wrap="square">
-            <a:spAutoFit/>
-          </a:bodyPr>
-          <a:lstStyle/>
-          <a:p>
-            <a:pPr algn="r"/>
-            <a:r>
-              <a:rPr sz="800" b="0" u="none">
-                <a:solidFill>
-                  <a:srgbClr val="566070"/>
-                </a:solidFill>
-                <a:latin typeface="맑은 고딕"/>
-              </a:rPr>
-              <a:t>17</a:t>
             </a:r>
           </a:p>
         </p:txBody>
@@ -12474,8 +11777,8 @@
         </p:nvSpPr>
         <p:spPr>
           <a:xfrm>
-            <a:off x="914400" y="1234440"/>
-            <a:ext cx="10332720" cy="1280160"/>
+            <a:off x="572414" y="356616"/>
+            <a:ext cx="11192256" cy="521207"/>
           </a:xfrm>
           <a:prstGeom prst="rect">
             <a:avLst/>
@@ -12488,7 +11791,6 @@
           </a:bodyPr>
           <a:lstStyle/>
           <a:p>
-            <a:pPr algn="ctr"/>
             <a:r>
               <a:rPr sz="2800" b="1" u="none">
                 <a:solidFill>
@@ -12509,8 +11811,8 @@
         </p:nvSpPr>
         <p:spPr>
           <a:xfrm>
-            <a:off x="1417320" y="2926080"/>
-            <a:ext cx="9326880" cy="2011680"/>
+            <a:off x="713232" y="2103120"/>
+            <a:ext cx="10652760" cy="2926080"/>
           </a:xfrm>
           <a:prstGeom prst="rect">
             <a:avLst/>
@@ -12568,75 +11870,6 @@
                 <a:latin typeface="맑은 고딕"/>
               </a:rPr>
               <a:t>핵심 질문은 한국도 결국 AI를 금지할지보다 어떻게 다룰지라는 쪽으로 옮겨갈 수 있다는 점이다</a:t>
-            </a:r>
-          </a:p>
-        </p:txBody>
-      </p:sp>
-      <p:sp>
-        <p:nvSpPr>
-          <p:cNvPr id="4" name="TextBox 3"/>
-          <p:cNvSpPr txBox="1"/>
-          <p:nvPr/>
-        </p:nvSpPr>
-        <p:spPr>
-          <a:xfrm>
-            <a:off x="411480" y="6510528"/>
-            <a:ext cx="9875520" cy="201168"/>
-          </a:xfrm>
-          <a:prstGeom prst="rect">
-            <a:avLst/>
-          </a:prstGeom>
-          <a:noFill/>
-        </p:spPr>
-        <p:txBody>
-          <a:bodyPr wrap="square">
-            <a:spAutoFit/>
-          </a:bodyPr>
-          <a:lstStyle/>
-          <a:p>
-            <a:r>
-              <a:rPr sz="800" b="0" u="none">
-                <a:solidFill>
-                  <a:srgbClr val="566070"/>
-                </a:solidFill>
-                <a:latin typeface="맑은 고딕"/>
-              </a:rPr>
-              <a:t>needs_fact_check</a:t>
-            </a:r>
-          </a:p>
-        </p:txBody>
-      </p:sp>
-      <p:sp>
-        <p:nvSpPr>
-          <p:cNvPr id="5" name="TextBox 4"/>
-          <p:cNvSpPr txBox="1"/>
-          <p:nvPr/>
-        </p:nvSpPr>
-        <p:spPr>
-          <a:xfrm>
-            <a:off x="10607040" y="6510528"/>
-            <a:ext cx="1143000" cy="201168"/>
-          </a:xfrm>
-          <a:prstGeom prst="rect">
-            <a:avLst/>
-          </a:prstGeom>
-          <a:noFill/>
-        </p:spPr>
-        <p:txBody>
-          <a:bodyPr wrap="square">
-            <a:spAutoFit/>
-          </a:bodyPr>
-          <a:lstStyle/>
-          <a:p>
-            <a:pPr algn="r"/>
-            <a:r>
-              <a:rPr sz="800" b="0" u="none">
-                <a:solidFill>
-                  <a:srgbClr val="566070"/>
-                </a:solidFill>
-                <a:latin typeface="맑은 고딕"/>
-              </a:rPr>
-              <a:t>18</a:t>
             </a:r>
           </a:p>
         </p:txBody>
@@ -12675,8 +11908,8 @@
         </p:nvSpPr>
         <p:spPr>
           <a:xfrm>
-            <a:off x="914400" y="1234440"/>
-            <a:ext cx="10332720" cy="1280160"/>
+            <a:off x="572414" y="356616"/>
+            <a:ext cx="11192256" cy="521207"/>
           </a:xfrm>
           <a:prstGeom prst="rect">
             <a:avLst/>
@@ -12689,7 +11922,6 @@
           </a:bodyPr>
           <a:lstStyle/>
           <a:p>
-            <a:pPr algn="ctr"/>
             <a:r>
               <a:rPr sz="2800" b="1" u="none">
                 <a:solidFill>
@@ -12710,8 +11942,8 @@
         </p:nvSpPr>
         <p:spPr>
           <a:xfrm>
-            <a:off x="1417320" y="2926080"/>
-            <a:ext cx="9326880" cy="2011680"/>
+            <a:off x="713232" y="2103120"/>
+            <a:ext cx="10652760" cy="2926080"/>
           </a:xfrm>
           <a:prstGeom prst="rect">
             <a:avLst/>
@@ -12769,75 +12001,6 @@
                 <a:latin typeface="맑은 고딕"/>
               </a:rPr>
               <a:t>보고, 의심하고, 질문하고, 다시 확인하는 습관이 지식기관의 교육 목표가 될 수 있다</a:t>
-            </a:r>
-          </a:p>
-        </p:txBody>
-      </p:sp>
-      <p:sp>
-        <p:nvSpPr>
-          <p:cNvPr id="4" name="TextBox 3"/>
-          <p:cNvSpPr txBox="1"/>
-          <p:nvPr/>
-        </p:nvSpPr>
-        <p:spPr>
-          <a:xfrm>
-            <a:off x="411480" y="6510528"/>
-            <a:ext cx="9875520" cy="201168"/>
-          </a:xfrm>
-          <a:prstGeom prst="rect">
-            <a:avLst/>
-          </a:prstGeom>
-          <a:noFill/>
-        </p:spPr>
-        <p:txBody>
-          <a:bodyPr wrap="square">
-            <a:spAutoFit/>
-          </a:bodyPr>
-          <a:lstStyle/>
-          <a:p>
-            <a:r>
-              <a:rPr sz="800" b="0" u="none">
-                <a:solidFill>
-                  <a:srgbClr val="566070"/>
-                </a:solidFill>
-                <a:latin typeface="맑은 고딕"/>
-              </a:rPr>
-              <a:t>draft skeleton</a:t>
-            </a:r>
-          </a:p>
-        </p:txBody>
-      </p:sp>
-      <p:sp>
-        <p:nvSpPr>
-          <p:cNvPr id="5" name="TextBox 4"/>
-          <p:cNvSpPr txBox="1"/>
-          <p:nvPr/>
-        </p:nvSpPr>
-        <p:spPr>
-          <a:xfrm>
-            <a:off x="10607040" y="6510528"/>
-            <a:ext cx="1143000" cy="201168"/>
-          </a:xfrm>
-          <a:prstGeom prst="rect">
-            <a:avLst/>
-          </a:prstGeom>
-          <a:noFill/>
-        </p:spPr>
-        <p:txBody>
-          <a:bodyPr wrap="square">
-            <a:spAutoFit/>
-          </a:bodyPr>
-          <a:lstStyle/>
-          <a:p>
-            <a:pPr algn="r"/>
-            <a:r>
-              <a:rPr sz="800" b="0" u="none">
-                <a:solidFill>
-                  <a:srgbClr val="566070"/>
-                </a:solidFill>
-                <a:latin typeface="맑은 고딕"/>
-              </a:rPr>
-              <a:t>19</a:t>
             </a:r>
           </a:p>
         </p:txBody>
@@ -12876,8 +12039,8 @@
         </p:nvSpPr>
         <p:spPr>
           <a:xfrm>
-            <a:off x="6372453" y="1952243"/>
-            <a:ext cx="3709720" cy="523036"/>
+            <a:off x="572414" y="356616"/>
+            <a:ext cx="11192256" cy="521207"/>
           </a:xfrm>
           <a:prstGeom prst="rect">
             <a:avLst/>
@@ -12910,7 +12073,7 @@
         </p:nvSpPr>
         <p:spPr>
           <a:xfrm>
-            <a:off x="713232" y="2795320"/>
+            <a:off x="713232" y="1874519"/>
             <a:ext cx="9875520" cy="2651760"/>
           </a:xfrm>
           <a:prstGeom prst="rect">
@@ -12969,75 +12132,6 @@
                 <a:latin typeface="맑은 고딕"/>
               </a:rPr>
               <a:t>다만 편리함이 곧 배움이라는 뜻은 아니므로, 정보 탐색 과정의 변화로 조심스럽게 다룬다</a:t>
-            </a:r>
-          </a:p>
-        </p:txBody>
-      </p:sp>
-      <p:sp>
-        <p:nvSpPr>
-          <p:cNvPr id="4" name="TextBox 3"/>
-          <p:cNvSpPr txBox="1"/>
-          <p:nvPr/>
-        </p:nvSpPr>
-        <p:spPr>
-          <a:xfrm>
-            <a:off x="411480" y="6510528"/>
-            <a:ext cx="9875520" cy="201168"/>
-          </a:xfrm>
-          <a:prstGeom prst="rect">
-            <a:avLst/>
-          </a:prstGeom>
-          <a:noFill/>
-        </p:spPr>
-        <p:txBody>
-          <a:bodyPr wrap="square">
-            <a:spAutoFit/>
-          </a:bodyPr>
-          <a:lstStyle/>
-          <a:p>
-            <a:r>
-              <a:rPr sz="800" b="0" u="none">
-                <a:solidFill>
-                  <a:srgbClr val="566070"/>
-                </a:solidFill>
-                <a:latin typeface="맑은 고딕"/>
-              </a:rPr>
-              <a:t>needs_fact_check</a:t>
-            </a:r>
-          </a:p>
-        </p:txBody>
-      </p:sp>
-      <p:sp>
-        <p:nvSpPr>
-          <p:cNvPr id="5" name="TextBox 4"/>
-          <p:cNvSpPr txBox="1"/>
-          <p:nvPr/>
-        </p:nvSpPr>
-        <p:spPr>
-          <a:xfrm>
-            <a:off x="10607040" y="6510528"/>
-            <a:ext cx="1143000" cy="201168"/>
-          </a:xfrm>
-          <a:prstGeom prst="rect">
-            <a:avLst/>
-          </a:prstGeom>
-          <a:noFill/>
-        </p:spPr>
-        <p:txBody>
-          <a:bodyPr wrap="square">
-            <a:spAutoFit/>
-          </a:bodyPr>
-          <a:lstStyle/>
-          <a:p>
-            <a:pPr algn="r"/>
-            <a:r>
-              <a:rPr sz="800" b="0" u="none">
-                <a:solidFill>
-                  <a:srgbClr val="566070"/>
-                </a:solidFill>
-                <a:latin typeface="맑은 고딕"/>
-              </a:rPr>
-              <a:t>02</a:t>
             </a:r>
           </a:p>
         </p:txBody>
@@ -13102,114 +12196,6 @@
           </a:p>
         </p:txBody>
       </p:sp>
-      <p:sp>
-        <p:nvSpPr>
-          <p:cNvPr id="3" name="TextBox 2"/>
-          <p:cNvSpPr txBox="1"/>
-          <p:nvPr/>
-        </p:nvSpPr>
-        <p:spPr>
-          <a:xfrm>
-            <a:off x="843991" y="2508199"/>
-            <a:ext cx="9875520" cy="914400"/>
-          </a:xfrm>
-          <a:prstGeom prst="rect">
-            <a:avLst/>
-          </a:prstGeom>
-          <a:noFill/>
-        </p:spPr>
-        <p:txBody>
-          <a:bodyPr wrap="square">
-            <a:spAutoFit/>
-          </a:bodyPr>
-          <a:lstStyle/>
-          <a:p>
-            <a:pPr>
-              <a:spcAft>
-                <a:spcPts val="800"/>
-              </a:spcAft>
-            </a:pPr>
-            <a:r>
-              <a:rPr sz="2800" b="0" u="none">
-                <a:solidFill>
-                  <a:srgbClr val="181C23"/>
-                </a:solidFill>
-                <a:latin typeface="맑은 고딕"/>
-              </a:rPr>
-              <a:t>마지막 질문은 찬반이 아니라 교육의 역할</a:t>
-            </a:r>
-          </a:p>
-        </p:txBody>
-      </p:sp>
-      <p:sp>
-        <p:nvSpPr>
-          <p:cNvPr id="4" name="TextBox 3"/>
-          <p:cNvSpPr txBox="1"/>
-          <p:nvPr/>
-        </p:nvSpPr>
-        <p:spPr>
-          <a:xfrm>
-            <a:off x="411480" y="6510528"/>
-            <a:ext cx="9875520" cy="201168"/>
-          </a:xfrm>
-          <a:prstGeom prst="rect">
-            <a:avLst/>
-          </a:prstGeom>
-          <a:noFill/>
-        </p:spPr>
-        <p:txBody>
-          <a:bodyPr wrap="square">
-            <a:spAutoFit/>
-          </a:bodyPr>
-          <a:lstStyle/>
-          <a:p>
-            <a:r>
-              <a:rPr sz="800" b="0" u="none">
-                <a:solidFill>
-                  <a:srgbClr val="566070"/>
-                </a:solidFill>
-                <a:latin typeface="맑은 고딕"/>
-              </a:rPr>
-              <a:t>draft skeleton</a:t>
-            </a:r>
-          </a:p>
-        </p:txBody>
-      </p:sp>
-      <p:sp>
-        <p:nvSpPr>
-          <p:cNvPr id="5" name="TextBox 4"/>
-          <p:cNvSpPr txBox="1"/>
-          <p:nvPr/>
-        </p:nvSpPr>
-        <p:spPr>
-          <a:xfrm>
-            <a:off x="10607040" y="6510528"/>
-            <a:ext cx="1143000" cy="201168"/>
-          </a:xfrm>
-          <a:prstGeom prst="rect">
-            <a:avLst/>
-          </a:prstGeom>
-          <a:noFill/>
-        </p:spPr>
-        <p:txBody>
-          <a:bodyPr wrap="square">
-            <a:spAutoFit/>
-          </a:bodyPr>
-          <a:lstStyle/>
-          <a:p>
-            <a:pPr algn="r"/>
-            <a:r>
-              <a:rPr sz="800" b="0" u="none">
-                <a:solidFill>
-                  <a:srgbClr val="566070"/>
-                </a:solidFill>
-                <a:latin typeface="맑은 고딕"/>
-              </a:rPr>
-              <a:t>20</a:t>
-            </a:r>
-          </a:p>
-        </p:txBody>
-      </p:sp>
     </p:spTree>
   </p:cSld>
   <p:clrMapOvr>
@@ -13244,8 +12230,8 @@
         </p:nvSpPr>
         <p:spPr>
           <a:xfrm>
-            <a:off x="594360" y="502920"/>
-            <a:ext cx="10972800" cy="777240"/>
+            <a:off x="572414" y="356616"/>
+            <a:ext cx="11192256" cy="521207"/>
           </a:xfrm>
           <a:prstGeom prst="rect">
             <a:avLst/>
@@ -13278,7 +12264,7 @@
         </p:nvSpPr>
         <p:spPr>
           <a:xfrm>
-            <a:off x="731520" y="1600200"/>
+            <a:off x="731520" y="1417320"/>
             <a:ext cx="5257800" cy="4069080"/>
           </a:xfrm>
           <a:prstGeom prst="rect">
@@ -13323,7 +12309,7 @@
         </p:nvSpPr>
         <p:spPr>
           <a:xfrm>
-            <a:off x="6172200" y="1600200"/>
+            <a:off x="6172200" y="1417320"/>
             <a:ext cx="5257800" cy="4069080"/>
           </a:xfrm>
           <a:prstGeom prst="rect">
@@ -13368,7 +12354,7 @@
         </p:nvSpPr>
         <p:spPr>
           <a:xfrm>
-            <a:off x="960120" y="1874519"/>
+            <a:off x="960120" y="1691640"/>
             <a:ext cx="4800600" cy="3383280"/>
           </a:xfrm>
           <a:prstGeom prst="rect">
@@ -13423,7 +12409,7 @@
         </p:nvSpPr>
         <p:spPr>
           <a:xfrm>
-            <a:off x="6400800" y="1874519"/>
+            <a:off x="6400800" y="1691640"/>
             <a:ext cx="4800600" cy="3383280"/>
           </a:xfrm>
           <a:prstGeom prst="rect">
@@ -13450,75 +12436,6 @@
                 <a:latin typeface="맑은 고딕"/>
               </a:rPr>
               <a:t>그래서 문제는 사용 여부가 아니라, 어떤 질문을 던지고 어떤 답을 의심할지에 가깝다</a:t>
-            </a:r>
-          </a:p>
-        </p:txBody>
-      </p:sp>
-      <p:sp>
-        <p:nvSpPr>
-          <p:cNvPr id="7" name="TextBox 6"/>
-          <p:cNvSpPr txBox="1"/>
-          <p:nvPr/>
-        </p:nvSpPr>
-        <p:spPr>
-          <a:xfrm>
-            <a:off x="411480" y="6510528"/>
-            <a:ext cx="9875520" cy="201168"/>
-          </a:xfrm>
-          <a:prstGeom prst="rect">
-            <a:avLst/>
-          </a:prstGeom>
-          <a:noFill/>
-        </p:spPr>
-        <p:txBody>
-          <a:bodyPr wrap="square">
-            <a:spAutoFit/>
-          </a:bodyPr>
-          <a:lstStyle/>
-          <a:p>
-            <a:r>
-              <a:rPr sz="800" b="0" u="none">
-                <a:solidFill>
-                  <a:srgbClr val="566070"/>
-                </a:solidFill>
-                <a:latin typeface="맑은 고딕"/>
-              </a:rPr>
-              <a:t>needs_fact_check</a:t>
-            </a:r>
-          </a:p>
-        </p:txBody>
-      </p:sp>
-      <p:sp>
-        <p:nvSpPr>
-          <p:cNvPr id="8" name="TextBox 7"/>
-          <p:cNvSpPr txBox="1"/>
-          <p:nvPr/>
-        </p:nvSpPr>
-        <p:spPr>
-          <a:xfrm>
-            <a:off x="10607040" y="6510528"/>
-            <a:ext cx="1143000" cy="201168"/>
-          </a:xfrm>
-          <a:prstGeom prst="rect">
-            <a:avLst/>
-          </a:prstGeom>
-          <a:noFill/>
-        </p:spPr>
-        <p:txBody>
-          <a:bodyPr wrap="square">
-            <a:spAutoFit/>
-          </a:bodyPr>
-          <a:lstStyle/>
-          <a:p>
-            <a:pPr algn="r"/>
-            <a:r>
-              <a:rPr sz="800" b="0" u="none">
-                <a:solidFill>
-                  <a:srgbClr val="566070"/>
-                </a:solidFill>
-                <a:latin typeface="맑은 고딕"/>
-              </a:rPr>
-              <a:t>21</a:t>
             </a:r>
           </a:p>
         </p:txBody>
@@ -13557,8 +12474,8 @@
         </p:nvSpPr>
         <p:spPr>
           <a:xfrm>
-            <a:off x="572414" y="411480"/>
-            <a:ext cx="10972800" cy="685800"/>
+            <a:off x="572414" y="356616"/>
+            <a:ext cx="11192256" cy="521207"/>
           </a:xfrm>
           <a:prstGeom prst="rect">
             <a:avLst/>
@@ -13591,7 +12508,7 @@
         </p:nvSpPr>
         <p:spPr>
           <a:xfrm>
-            <a:off x="572414" y="1208836"/>
+            <a:off x="572414" y="1874519"/>
             <a:ext cx="11193170" cy="1302105"/>
           </a:xfrm>
           <a:prstGeom prst="rect">
@@ -13650,75 +12567,6 @@
                 <a:latin typeface="맑은 고딕"/>
               </a:rPr>
               <a:t>다른 자료와 비교하는 법</a:t>
-            </a:r>
-          </a:p>
-        </p:txBody>
-      </p:sp>
-      <p:sp>
-        <p:nvSpPr>
-          <p:cNvPr id="4" name="TextBox 3"/>
-          <p:cNvSpPr txBox="1"/>
-          <p:nvPr/>
-        </p:nvSpPr>
-        <p:spPr>
-          <a:xfrm>
-            <a:off x="411480" y="6510528"/>
-            <a:ext cx="9875520" cy="201168"/>
-          </a:xfrm>
-          <a:prstGeom prst="rect">
-            <a:avLst/>
-          </a:prstGeom>
-          <a:noFill/>
-        </p:spPr>
-        <p:txBody>
-          <a:bodyPr wrap="square">
-            <a:spAutoFit/>
-          </a:bodyPr>
-          <a:lstStyle/>
-          <a:p>
-            <a:r>
-              <a:rPr sz="800" b="0" u="none">
-                <a:solidFill>
-                  <a:srgbClr val="566070"/>
-                </a:solidFill>
-                <a:latin typeface="맑은 고딕"/>
-              </a:rPr>
-              <a:t>needs_fact_check</a:t>
-            </a:r>
-          </a:p>
-        </p:txBody>
-      </p:sp>
-      <p:sp>
-        <p:nvSpPr>
-          <p:cNvPr id="5" name="TextBox 4"/>
-          <p:cNvSpPr txBox="1"/>
-          <p:nvPr/>
-        </p:nvSpPr>
-        <p:spPr>
-          <a:xfrm>
-            <a:off x="10607040" y="6510528"/>
-            <a:ext cx="1143000" cy="201168"/>
-          </a:xfrm>
-          <a:prstGeom prst="rect">
-            <a:avLst/>
-          </a:prstGeom>
-          <a:noFill/>
-        </p:spPr>
-        <p:txBody>
-          <a:bodyPr wrap="square">
-            <a:spAutoFit/>
-          </a:bodyPr>
-          <a:lstStyle/>
-          <a:p>
-            <a:pPr algn="r"/>
-            <a:r>
-              <a:rPr sz="800" b="0" u="none">
-                <a:solidFill>
-                  <a:srgbClr val="566070"/>
-                </a:solidFill>
-                <a:latin typeface="맑은 고딕"/>
-              </a:rPr>
-              <a:t>22</a:t>
             </a:r>
           </a:p>
         </p:txBody>
@@ -13757,8 +12605,8 @@
         </p:nvSpPr>
         <p:spPr>
           <a:xfrm>
-            <a:off x="914400" y="1234440"/>
-            <a:ext cx="10332720" cy="1280160"/>
+            <a:off x="572414" y="356616"/>
+            <a:ext cx="11192256" cy="521207"/>
           </a:xfrm>
           <a:prstGeom prst="rect">
             <a:avLst/>
@@ -13771,7 +12619,6 @@
           </a:bodyPr>
           <a:lstStyle/>
           <a:p>
-            <a:pPr algn="ctr"/>
             <a:r>
               <a:rPr sz="2800" b="1" u="none">
                 <a:solidFill>
@@ -13792,8 +12639,8 @@
         </p:nvSpPr>
         <p:spPr>
           <a:xfrm>
-            <a:off x="1417320" y="2926080"/>
-            <a:ext cx="9326880" cy="2011680"/>
+            <a:off x="713232" y="2103120"/>
+            <a:ext cx="10652760" cy="2926080"/>
           </a:xfrm>
           <a:prstGeom prst="rect">
             <a:avLst/>
@@ -13851,75 +12698,6 @@
                 <a:latin typeface="맑은 고딕"/>
               </a:rPr>
               <a:t>AI도 답을 대신 주는 도구로만 쓰기보다, 더 좋은 질문을 돕는 도구가 될 수 있는지 묻는다</a:t>
-            </a:r>
-          </a:p>
-        </p:txBody>
-      </p:sp>
-      <p:sp>
-        <p:nvSpPr>
-          <p:cNvPr id="4" name="TextBox 3"/>
-          <p:cNvSpPr txBox="1"/>
-          <p:nvPr/>
-        </p:nvSpPr>
-        <p:spPr>
-          <a:xfrm>
-            <a:off x="411480" y="6510528"/>
-            <a:ext cx="9875520" cy="201168"/>
-          </a:xfrm>
-          <a:prstGeom prst="rect">
-            <a:avLst/>
-          </a:prstGeom>
-          <a:noFill/>
-        </p:spPr>
-        <p:txBody>
-          <a:bodyPr wrap="square">
-            <a:spAutoFit/>
-          </a:bodyPr>
-          <a:lstStyle/>
-          <a:p>
-            <a:r>
-              <a:rPr sz="800" b="0" u="none">
-                <a:solidFill>
-                  <a:srgbClr val="566070"/>
-                </a:solidFill>
-                <a:latin typeface="맑은 고딕"/>
-              </a:rPr>
-              <a:t>draft skeleton</a:t>
-            </a:r>
-          </a:p>
-        </p:txBody>
-      </p:sp>
-      <p:sp>
-        <p:nvSpPr>
-          <p:cNvPr id="5" name="TextBox 4"/>
-          <p:cNvSpPr txBox="1"/>
-          <p:nvPr/>
-        </p:nvSpPr>
-        <p:spPr>
-          <a:xfrm>
-            <a:off x="10607040" y="6510528"/>
-            <a:ext cx="1143000" cy="201168"/>
-          </a:xfrm>
-          <a:prstGeom prst="rect">
-            <a:avLst/>
-          </a:prstGeom>
-          <a:noFill/>
-        </p:spPr>
-        <p:txBody>
-          <a:bodyPr wrap="square">
-            <a:spAutoFit/>
-          </a:bodyPr>
-          <a:lstStyle/>
-          <a:p>
-            <a:pPr algn="r"/>
-            <a:r>
-              <a:rPr sz="800" b="0" u="none">
-                <a:solidFill>
-                  <a:srgbClr val="566070"/>
-                </a:solidFill>
-                <a:latin typeface="맑은 고딕"/>
-              </a:rPr>
-              <a:t>23</a:t>
             </a:r>
           </a:p>
         </p:txBody>
@@ -13958,8 +12736,8 @@
         </p:nvSpPr>
         <p:spPr>
           <a:xfrm>
-            <a:off x="3495751" y="3058668"/>
-            <a:ext cx="3383280" cy="523036"/>
+            <a:off x="572414" y="356616"/>
+            <a:ext cx="11192256" cy="521207"/>
           </a:xfrm>
           <a:prstGeom prst="rect">
             <a:avLst/>
@@ -13992,7 +12770,7 @@
         </p:nvSpPr>
         <p:spPr>
           <a:xfrm>
-            <a:off x="822960" y="3810304"/>
+            <a:off x="822960" y="1508760"/>
             <a:ext cx="10424160" cy="4480560"/>
           </a:xfrm>
           <a:prstGeom prst="rect">
@@ -14051,75 +12829,6 @@
                 <a:latin typeface="맑은 고딕"/>
               </a:rPr>
               <a:t>AI 접근성/개인화라는 counterpoint</a:t>
-            </a:r>
-          </a:p>
-        </p:txBody>
-      </p:sp>
-      <p:sp>
-        <p:nvSpPr>
-          <p:cNvPr id="4" name="TextBox 3"/>
-          <p:cNvSpPr txBox="1"/>
-          <p:nvPr/>
-        </p:nvSpPr>
-        <p:spPr>
-          <a:xfrm>
-            <a:off x="411480" y="6510528"/>
-            <a:ext cx="9875520" cy="201168"/>
-          </a:xfrm>
-          <a:prstGeom prst="rect">
-            <a:avLst/>
-          </a:prstGeom>
-          <a:noFill/>
-        </p:spPr>
-        <p:txBody>
-          <a:bodyPr wrap="square">
-            <a:spAutoFit/>
-          </a:bodyPr>
-          <a:lstStyle/>
-          <a:p>
-            <a:r>
-              <a:rPr sz="800" b="0" u="none">
-                <a:solidFill>
-                  <a:srgbClr val="566070"/>
-                </a:solidFill>
-                <a:latin typeface="맑은 고딕"/>
-              </a:rPr>
-              <a:t>needs_fact_check</a:t>
-            </a:r>
-          </a:p>
-        </p:txBody>
-      </p:sp>
-      <p:sp>
-        <p:nvSpPr>
-          <p:cNvPr id="5" name="TextBox 4"/>
-          <p:cNvSpPr txBox="1"/>
-          <p:nvPr/>
-        </p:nvSpPr>
-        <p:spPr>
-          <a:xfrm>
-            <a:off x="10607040" y="6510528"/>
-            <a:ext cx="1143000" cy="201168"/>
-          </a:xfrm>
-          <a:prstGeom prst="rect">
-            <a:avLst/>
-          </a:prstGeom>
-          <a:noFill/>
-        </p:spPr>
-        <p:txBody>
-          <a:bodyPr wrap="square">
-            <a:spAutoFit/>
-          </a:bodyPr>
-          <a:lstStyle/>
-          <a:p>
-            <a:pPr algn="r"/>
-            <a:r>
-              <a:rPr sz="800" b="0" u="none">
-                <a:solidFill>
-                  <a:srgbClr val="566070"/>
-                </a:solidFill>
-                <a:latin typeface="맑은 고딕"/>
-              </a:rPr>
-              <a:t>24</a:t>
             </a:r>
           </a:p>
         </p:txBody>
@@ -14158,8 +12867,8 @@
         </p:nvSpPr>
         <p:spPr>
           <a:xfrm>
-            <a:off x="914400" y="1234440"/>
-            <a:ext cx="10332720" cy="1280160"/>
+            <a:off x="572414" y="356616"/>
+            <a:ext cx="11192256" cy="521207"/>
           </a:xfrm>
           <a:prstGeom prst="rect">
             <a:avLst/>
@@ -14172,7 +12881,6 @@
           </a:bodyPr>
           <a:lstStyle/>
           <a:p>
-            <a:pPr algn="ctr"/>
             <a:r>
               <a:rPr sz="2800" b="1" u="none">
                 <a:solidFill>
@@ -14193,8 +12901,8 @@
         </p:nvSpPr>
         <p:spPr>
           <a:xfrm>
-            <a:off x="1417320" y="2926080"/>
-            <a:ext cx="9326880" cy="2011680"/>
+            <a:off x="713232" y="2103120"/>
+            <a:ext cx="10652760" cy="2926080"/>
           </a:xfrm>
           <a:prstGeom prst="rect">
             <a:avLst/>
@@ -14252,75 +12960,6 @@
                 <a:latin typeface="맑은 고딕"/>
               </a:rPr>
               <a:t>모르는 것을 남겨두는 법을 배우는 일일지도 모른다</a:t>
-            </a:r>
-          </a:p>
-        </p:txBody>
-      </p:sp>
-      <p:sp>
-        <p:nvSpPr>
-          <p:cNvPr id="4" name="TextBox 3"/>
-          <p:cNvSpPr txBox="1"/>
-          <p:nvPr/>
-        </p:nvSpPr>
-        <p:spPr>
-          <a:xfrm>
-            <a:off x="411480" y="6510528"/>
-            <a:ext cx="9875520" cy="201168"/>
-          </a:xfrm>
-          <a:prstGeom prst="rect">
-            <a:avLst/>
-          </a:prstGeom>
-          <a:noFill/>
-        </p:spPr>
-        <p:txBody>
-          <a:bodyPr wrap="square">
-            <a:spAutoFit/>
-          </a:bodyPr>
-          <a:lstStyle/>
-          <a:p>
-            <a:r>
-              <a:rPr sz="800" b="0" u="none">
-                <a:solidFill>
-                  <a:srgbClr val="566070"/>
-                </a:solidFill>
-                <a:latin typeface="맑은 고딕"/>
-              </a:rPr>
-              <a:t>draft skeleton</a:t>
-            </a:r>
-          </a:p>
-        </p:txBody>
-      </p:sp>
-      <p:sp>
-        <p:nvSpPr>
-          <p:cNvPr id="5" name="TextBox 4"/>
-          <p:cNvSpPr txBox="1"/>
-          <p:nvPr/>
-        </p:nvSpPr>
-        <p:spPr>
-          <a:xfrm>
-            <a:off x="10607040" y="6510528"/>
-            <a:ext cx="1143000" cy="201168"/>
-          </a:xfrm>
-          <a:prstGeom prst="rect">
-            <a:avLst/>
-          </a:prstGeom>
-          <a:noFill/>
-        </p:spPr>
-        <p:txBody>
-          <a:bodyPr wrap="square">
-            <a:spAutoFit/>
-          </a:bodyPr>
-          <a:lstStyle/>
-          <a:p>
-            <a:pPr algn="r"/>
-            <a:r>
-              <a:rPr sz="800" b="0" u="none">
-                <a:solidFill>
-                  <a:srgbClr val="566070"/>
-                </a:solidFill>
-                <a:latin typeface="맑은 고딕"/>
-              </a:rPr>
-              <a:t>25</a:t>
             </a:r>
           </a:p>
         </p:txBody>
@@ -14359,8 +12998,8 @@
         </p:nvSpPr>
         <p:spPr>
           <a:xfrm>
-            <a:off x="6372453" y="1952243"/>
-            <a:ext cx="3709720" cy="523036"/>
+            <a:off x="572414" y="356616"/>
+            <a:ext cx="11192256" cy="521207"/>
           </a:xfrm>
           <a:prstGeom prst="rect">
             <a:avLst/>
@@ -14393,7 +13032,7 @@
         </p:nvSpPr>
         <p:spPr>
           <a:xfrm>
-            <a:off x="713232" y="2795320"/>
+            <a:off x="713232" y="1874519"/>
             <a:ext cx="9875520" cy="2651760"/>
           </a:xfrm>
           <a:prstGeom prst="rect">
@@ -14436,75 +13075,6 @@
                 <a:latin typeface="맑은 고딕"/>
               </a:rPr>
               <a:t>답은 AI가 했는데, 질문은 누가 했습니까?</a:t>
-            </a:r>
-          </a:p>
-        </p:txBody>
-      </p:sp>
-      <p:sp>
-        <p:nvSpPr>
-          <p:cNvPr id="4" name="TextBox 3"/>
-          <p:cNvSpPr txBox="1"/>
-          <p:nvPr/>
-        </p:nvSpPr>
-        <p:spPr>
-          <a:xfrm>
-            <a:off x="411480" y="6510528"/>
-            <a:ext cx="9875520" cy="201168"/>
-          </a:xfrm>
-          <a:prstGeom prst="rect">
-            <a:avLst/>
-          </a:prstGeom>
-          <a:noFill/>
-        </p:spPr>
-        <p:txBody>
-          <a:bodyPr wrap="square">
-            <a:spAutoFit/>
-          </a:bodyPr>
-          <a:lstStyle/>
-          <a:p>
-            <a:r>
-              <a:rPr sz="800" b="0" u="none">
-                <a:solidFill>
-                  <a:srgbClr val="566070"/>
-                </a:solidFill>
-                <a:latin typeface="맑은 고딕"/>
-              </a:rPr>
-              <a:t>draft skeleton</a:t>
-            </a:r>
-          </a:p>
-        </p:txBody>
-      </p:sp>
-      <p:sp>
-        <p:nvSpPr>
-          <p:cNvPr id="5" name="TextBox 4"/>
-          <p:cNvSpPr txBox="1"/>
-          <p:nvPr/>
-        </p:nvSpPr>
-        <p:spPr>
-          <a:xfrm>
-            <a:off x="10607040" y="6510528"/>
-            <a:ext cx="1143000" cy="201168"/>
-          </a:xfrm>
-          <a:prstGeom prst="rect">
-            <a:avLst/>
-          </a:prstGeom>
-          <a:noFill/>
-        </p:spPr>
-        <p:txBody>
-          <a:bodyPr wrap="square">
-            <a:spAutoFit/>
-          </a:bodyPr>
-          <a:lstStyle/>
-          <a:p>
-            <a:pPr algn="r"/>
-            <a:r>
-              <a:rPr sz="800" b="0" u="none">
-                <a:solidFill>
-                  <a:srgbClr val="566070"/>
-                </a:solidFill>
-                <a:latin typeface="맑은 고딕"/>
-              </a:rPr>
-              <a:t>26</a:t>
             </a:r>
           </a:p>
         </p:txBody>
@@ -14588,8 +13158,8 @@
         </p:nvSpPr>
         <p:spPr>
           <a:xfrm>
-            <a:off x="572414" y="940003"/>
-            <a:ext cx="7295083" cy="868680"/>
+            <a:off x="572414" y="356616"/>
+            <a:ext cx="11192256" cy="521207"/>
           </a:xfrm>
           <a:prstGeom prst="rect">
             <a:avLst/>
@@ -14622,7 +13192,7 @@
         </p:nvSpPr>
         <p:spPr>
           <a:xfrm>
-            <a:off x="572414" y="2174443"/>
+            <a:off x="572414" y="1874519"/>
             <a:ext cx="7295083" cy="2468880"/>
           </a:xfrm>
           <a:prstGeom prst="rect">
@@ -14681,75 +13251,6 @@
                 <a:latin typeface="맑은 고딕"/>
               </a:rPr>
               <a:t>단일 기관 사례이므로 모든 지식기관의 공식 입장처럼 일반화하지 않는다</a:t>
-            </a:r>
-          </a:p>
-        </p:txBody>
-      </p:sp>
-      <p:sp>
-        <p:nvSpPr>
-          <p:cNvPr id="5" name="TextBox 4"/>
-          <p:cNvSpPr txBox="1"/>
-          <p:nvPr/>
-        </p:nvSpPr>
-        <p:spPr>
-          <a:xfrm>
-            <a:off x="411480" y="6510528"/>
-            <a:ext cx="9875520" cy="201168"/>
-          </a:xfrm>
-          <a:prstGeom prst="rect">
-            <a:avLst/>
-          </a:prstGeom>
-          <a:noFill/>
-        </p:spPr>
-        <p:txBody>
-          <a:bodyPr wrap="square">
-            <a:spAutoFit/>
-          </a:bodyPr>
-          <a:lstStyle/>
-          <a:p>
-            <a:r>
-              <a:rPr sz="800" b="0" u="none">
-                <a:solidFill>
-                  <a:srgbClr val="566070"/>
-                </a:solidFill>
-                <a:latin typeface="맑은 고딕"/>
-              </a:rPr>
-              <a:t>needs_fact_check</a:t>
-            </a:r>
-          </a:p>
-        </p:txBody>
-      </p:sp>
-      <p:sp>
-        <p:nvSpPr>
-          <p:cNvPr id="6" name="TextBox 5"/>
-          <p:cNvSpPr txBox="1"/>
-          <p:nvPr/>
-        </p:nvSpPr>
-        <p:spPr>
-          <a:xfrm>
-            <a:off x="10607040" y="6510528"/>
-            <a:ext cx="1143000" cy="201168"/>
-          </a:xfrm>
-          <a:prstGeom prst="rect">
-            <a:avLst/>
-          </a:prstGeom>
-          <a:noFill/>
-        </p:spPr>
-        <p:txBody>
-          <a:bodyPr wrap="square">
-            <a:spAutoFit/>
-          </a:bodyPr>
-          <a:lstStyle/>
-          <a:p>
-            <a:pPr algn="r"/>
-            <a:r>
-              <a:rPr sz="800" b="0" u="none">
-                <a:solidFill>
-                  <a:srgbClr val="566070"/>
-                </a:solidFill>
-                <a:latin typeface="맑은 고딕"/>
-              </a:rPr>
-              <a:t>03</a:t>
             </a:r>
           </a:p>
         </p:txBody>
@@ -14788,8 +13289,8 @@
         </p:nvSpPr>
         <p:spPr>
           <a:xfrm>
-            <a:off x="572414" y="411480"/>
-            <a:ext cx="10972800" cy="685800"/>
+            <a:off x="572414" y="356616"/>
+            <a:ext cx="11192256" cy="521207"/>
           </a:xfrm>
           <a:prstGeom prst="rect">
             <a:avLst/>
@@ -14822,7 +13323,7 @@
         </p:nvSpPr>
         <p:spPr>
           <a:xfrm>
-            <a:off x="572414" y="1208836"/>
+            <a:off x="572414" y="1874519"/>
             <a:ext cx="11193170" cy="1302105"/>
           </a:xfrm>
           <a:prstGeom prst="rect">
@@ -14881,75 +13382,6 @@
                 <a:latin typeface="맑은 고딕"/>
               </a:rPr>
               <a:t>여기서는 사실 증명보다 방송용 문제 제기: 도구가 답을 줄 때 사람의 관찰은 어디에 남는가</a:t>
-            </a:r>
-          </a:p>
-        </p:txBody>
-      </p:sp>
-      <p:sp>
-        <p:nvSpPr>
-          <p:cNvPr id="4" name="TextBox 3"/>
-          <p:cNvSpPr txBox="1"/>
-          <p:nvPr/>
-        </p:nvSpPr>
-        <p:spPr>
-          <a:xfrm>
-            <a:off x="411480" y="6510528"/>
-            <a:ext cx="9875520" cy="201168"/>
-          </a:xfrm>
-          <a:prstGeom prst="rect">
-            <a:avLst/>
-          </a:prstGeom>
-          <a:noFill/>
-        </p:spPr>
-        <p:txBody>
-          <a:bodyPr wrap="square">
-            <a:spAutoFit/>
-          </a:bodyPr>
-          <a:lstStyle/>
-          <a:p>
-            <a:r>
-              <a:rPr sz="800" b="0" u="none">
-                <a:solidFill>
-                  <a:srgbClr val="566070"/>
-                </a:solidFill>
-                <a:latin typeface="맑은 고딕"/>
-              </a:rPr>
-              <a:t>needs_fact_check</a:t>
-            </a:r>
-          </a:p>
-        </p:txBody>
-      </p:sp>
-      <p:sp>
-        <p:nvSpPr>
-          <p:cNvPr id="5" name="TextBox 4"/>
-          <p:cNvSpPr txBox="1"/>
-          <p:nvPr/>
-        </p:nvSpPr>
-        <p:spPr>
-          <a:xfrm>
-            <a:off x="10607040" y="6510528"/>
-            <a:ext cx="1143000" cy="201168"/>
-          </a:xfrm>
-          <a:prstGeom prst="rect">
-            <a:avLst/>
-          </a:prstGeom>
-          <a:noFill/>
-        </p:spPr>
-        <p:txBody>
-          <a:bodyPr wrap="square">
-            <a:spAutoFit/>
-          </a:bodyPr>
-          <a:lstStyle/>
-          <a:p>
-            <a:pPr algn="r"/>
-            <a:r>
-              <a:rPr sz="800" b="0" u="none">
-                <a:solidFill>
-                  <a:srgbClr val="566070"/>
-                </a:solidFill>
-                <a:latin typeface="맑은 고딕"/>
-              </a:rPr>
-              <a:t>04</a:t>
             </a:r>
           </a:p>
         </p:txBody>
@@ -14988,8 +13420,8 @@
         </p:nvSpPr>
         <p:spPr>
           <a:xfrm>
-            <a:off x="914400" y="1234440"/>
-            <a:ext cx="10332720" cy="1280160"/>
+            <a:off x="572414" y="356616"/>
+            <a:ext cx="11192256" cy="521207"/>
           </a:xfrm>
           <a:prstGeom prst="rect">
             <a:avLst/>
@@ -15002,7 +13434,6 @@
           </a:bodyPr>
           <a:lstStyle/>
           <a:p>
-            <a:pPr algn="ctr"/>
             <a:r>
               <a:rPr sz="2800" b="1" u="none">
                 <a:solidFill>
@@ -15023,8 +13454,8 @@
         </p:nvSpPr>
         <p:spPr>
           <a:xfrm>
-            <a:off x="1417320" y="2926080"/>
-            <a:ext cx="9326880" cy="2011680"/>
+            <a:off x="713232" y="2103120"/>
+            <a:ext cx="10652760" cy="2926080"/>
           </a:xfrm>
           <a:prstGeom prst="rect">
             <a:avLst/>
@@ -15082,75 +13513,6 @@
                 <a:latin typeface="맑은 고딕"/>
               </a:rPr>
               <a:t>따라서 핵심은 답 제공 경쟁이 아니라 질문·검증·맥락을 가르치는 역할 변화다</a:t>
-            </a:r>
-          </a:p>
-        </p:txBody>
-      </p:sp>
-      <p:sp>
-        <p:nvSpPr>
-          <p:cNvPr id="4" name="TextBox 3"/>
-          <p:cNvSpPr txBox="1"/>
-          <p:nvPr/>
-        </p:nvSpPr>
-        <p:spPr>
-          <a:xfrm>
-            <a:off x="411480" y="6510528"/>
-            <a:ext cx="9875520" cy="201168"/>
-          </a:xfrm>
-          <a:prstGeom prst="rect">
-            <a:avLst/>
-          </a:prstGeom>
-          <a:noFill/>
-        </p:spPr>
-        <p:txBody>
-          <a:bodyPr wrap="square">
-            <a:spAutoFit/>
-          </a:bodyPr>
-          <a:lstStyle/>
-          <a:p>
-            <a:r>
-              <a:rPr sz="800" b="0" u="none">
-                <a:solidFill>
-                  <a:srgbClr val="566070"/>
-                </a:solidFill>
-                <a:latin typeface="맑은 고딕"/>
-              </a:rPr>
-              <a:t>needs_fact_check</a:t>
-            </a:r>
-          </a:p>
-        </p:txBody>
-      </p:sp>
-      <p:sp>
-        <p:nvSpPr>
-          <p:cNvPr id="5" name="TextBox 4"/>
-          <p:cNvSpPr txBox="1"/>
-          <p:nvPr/>
-        </p:nvSpPr>
-        <p:spPr>
-          <a:xfrm>
-            <a:off x="10607040" y="6510528"/>
-            <a:ext cx="1143000" cy="201168"/>
-          </a:xfrm>
-          <a:prstGeom prst="rect">
-            <a:avLst/>
-          </a:prstGeom>
-          <a:noFill/>
-        </p:spPr>
-        <p:txBody>
-          <a:bodyPr wrap="square">
-            <a:spAutoFit/>
-          </a:bodyPr>
-          <a:lstStyle/>
-          <a:p>
-            <a:pPr algn="r"/>
-            <a:r>
-              <a:rPr sz="800" b="0" u="none">
-                <a:solidFill>
-                  <a:srgbClr val="566070"/>
-                </a:solidFill>
-                <a:latin typeface="맑은 고딕"/>
-              </a:rPr>
-              <a:t>05</a:t>
             </a:r>
           </a:p>
         </p:txBody>
@@ -15189,8 +13551,8 @@
         </p:nvSpPr>
         <p:spPr>
           <a:xfrm>
-            <a:off x="914400" y="1234440"/>
-            <a:ext cx="10332720" cy="1280160"/>
+            <a:off x="572414" y="356616"/>
+            <a:ext cx="11192256" cy="521207"/>
           </a:xfrm>
           <a:prstGeom prst="rect">
             <a:avLst/>
@@ -15203,7 +13565,6 @@
           </a:bodyPr>
           <a:lstStyle/>
           <a:p>
-            <a:pPr algn="ctr"/>
             <a:r>
               <a:rPr sz="2800" b="1" u="none">
                 <a:solidFill>
@@ -15224,8 +13585,8 @@
         </p:nvSpPr>
         <p:spPr>
           <a:xfrm>
-            <a:off x="1417320" y="2926080"/>
-            <a:ext cx="9326880" cy="2011680"/>
+            <a:off x="713232" y="2103120"/>
+            <a:ext cx="10652760" cy="2926080"/>
           </a:xfrm>
           <a:prstGeom prst="rect">
             <a:avLst/>
@@ -15283,75 +13644,6 @@
                 <a:latin typeface="맑은 고딕"/>
               </a:rPr>
               <a:t>혹은 더 좋은 질문을 만드는 능력인가</a:t>
-            </a:r>
-          </a:p>
-        </p:txBody>
-      </p:sp>
-      <p:sp>
-        <p:nvSpPr>
-          <p:cNvPr id="4" name="TextBox 3"/>
-          <p:cNvSpPr txBox="1"/>
-          <p:nvPr/>
-        </p:nvSpPr>
-        <p:spPr>
-          <a:xfrm>
-            <a:off x="411480" y="6510528"/>
-            <a:ext cx="9875520" cy="201168"/>
-          </a:xfrm>
-          <a:prstGeom prst="rect">
-            <a:avLst/>
-          </a:prstGeom>
-          <a:noFill/>
-        </p:spPr>
-        <p:txBody>
-          <a:bodyPr wrap="square">
-            <a:spAutoFit/>
-          </a:bodyPr>
-          <a:lstStyle/>
-          <a:p>
-            <a:r>
-              <a:rPr sz="800" b="0" u="none">
-                <a:solidFill>
-                  <a:srgbClr val="566070"/>
-                </a:solidFill>
-                <a:latin typeface="맑은 고딕"/>
-              </a:rPr>
-              <a:t>draft skeleton</a:t>
-            </a:r>
-          </a:p>
-        </p:txBody>
-      </p:sp>
-      <p:sp>
-        <p:nvSpPr>
-          <p:cNvPr id="5" name="TextBox 4"/>
-          <p:cNvSpPr txBox="1"/>
-          <p:nvPr/>
-        </p:nvSpPr>
-        <p:spPr>
-          <a:xfrm>
-            <a:off x="10607040" y="6510528"/>
-            <a:ext cx="1143000" cy="201168"/>
-          </a:xfrm>
-          <a:prstGeom prst="rect">
-            <a:avLst/>
-          </a:prstGeom>
-          <a:noFill/>
-        </p:spPr>
-        <p:txBody>
-          <a:bodyPr wrap="square">
-            <a:spAutoFit/>
-          </a:bodyPr>
-          <a:lstStyle/>
-          <a:p>
-            <a:pPr algn="r"/>
-            <a:r>
-              <a:rPr sz="800" b="0" u="none">
-                <a:solidFill>
-                  <a:srgbClr val="566070"/>
-                </a:solidFill>
-                <a:latin typeface="맑은 고딕"/>
-              </a:rPr>
-              <a:t>06</a:t>
             </a:r>
           </a:p>
         </p:txBody>
@@ -15416,114 +13708,6 @@
           </a:p>
         </p:txBody>
       </p:sp>
-      <p:sp>
-        <p:nvSpPr>
-          <p:cNvPr id="3" name="TextBox 2"/>
-          <p:cNvSpPr txBox="1"/>
-          <p:nvPr/>
-        </p:nvSpPr>
-        <p:spPr>
-          <a:xfrm>
-            <a:off x="843991" y="2508199"/>
-            <a:ext cx="9875520" cy="914400"/>
-          </a:xfrm>
-          <a:prstGeom prst="rect">
-            <a:avLst/>
-          </a:prstGeom>
-          <a:noFill/>
-        </p:spPr>
-        <p:txBody>
-          <a:bodyPr wrap="square">
-            <a:spAutoFit/>
-          </a:bodyPr>
-          <a:lstStyle/>
-          <a:p>
-            <a:pPr>
-              <a:spcAft>
-                <a:spcPts val="800"/>
-              </a:spcAft>
-            </a:pPr>
-            <a:r>
-              <a:rPr sz="2800" b="0" u="none">
-                <a:solidFill>
-                  <a:srgbClr val="181C23"/>
-                </a:solidFill>
-                <a:latin typeface="맑은 고딕"/>
-              </a:rPr>
-              <a:t>AI가 답을 주면, 사람은 무엇을 덜 하게 될까</a:t>
-            </a:r>
-          </a:p>
-        </p:txBody>
-      </p:sp>
-      <p:sp>
-        <p:nvSpPr>
-          <p:cNvPr id="4" name="TextBox 3"/>
-          <p:cNvSpPr txBox="1"/>
-          <p:nvPr/>
-        </p:nvSpPr>
-        <p:spPr>
-          <a:xfrm>
-            <a:off x="411480" y="6510528"/>
-            <a:ext cx="9875520" cy="201168"/>
-          </a:xfrm>
-          <a:prstGeom prst="rect">
-            <a:avLst/>
-          </a:prstGeom>
-          <a:noFill/>
-        </p:spPr>
-        <p:txBody>
-          <a:bodyPr wrap="square">
-            <a:spAutoFit/>
-          </a:bodyPr>
-          <a:lstStyle/>
-          <a:p>
-            <a:r>
-              <a:rPr sz="800" b="0" u="none">
-                <a:solidFill>
-                  <a:srgbClr val="566070"/>
-                </a:solidFill>
-                <a:latin typeface="맑은 고딕"/>
-              </a:rPr>
-              <a:t>draft skeleton</a:t>
-            </a:r>
-          </a:p>
-        </p:txBody>
-      </p:sp>
-      <p:sp>
-        <p:nvSpPr>
-          <p:cNvPr id="5" name="TextBox 4"/>
-          <p:cNvSpPr txBox="1"/>
-          <p:nvPr/>
-        </p:nvSpPr>
-        <p:spPr>
-          <a:xfrm>
-            <a:off x="10607040" y="6510528"/>
-            <a:ext cx="1143000" cy="201168"/>
-          </a:xfrm>
-          <a:prstGeom prst="rect">
-            <a:avLst/>
-          </a:prstGeom>
-          <a:noFill/>
-        </p:spPr>
-        <p:txBody>
-          <a:bodyPr wrap="square">
-            <a:spAutoFit/>
-          </a:bodyPr>
-          <a:lstStyle/>
-          <a:p>
-            <a:pPr algn="r"/>
-            <a:r>
-              <a:rPr sz="800" b="0" u="none">
-                <a:solidFill>
-                  <a:srgbClr val="566070"/>
-                </a:solidFill>
-                <a:latin typeface="맑은 고딕"/>
-              </a:rPr>
-              <a:t>07</a:t>
-            </a:r>
-          </a:p>
-        </p:txBody>
-      </p:sp>
     </p:spTree>
   </p:cSld>
   <p:clrMapOvr>
@@ -15558,8 +13742,8 @@
         </p:nvSpPr>
         <p:spPr>
           <a:xfrm>
-            <a:off x="572414" y="411480"/>
-            <a:ext cx="10972800" cy="685800"/>
+            <a:off x="572414" y="356616"/>
+            <a:ext cx="11192256" cy="521207"/>
           </a:xfrm>
           <a:prstGeom prst="rect">
             <a:avLst/>
@@ -15592,7 +13776,7 @@
         </p:nvSpPr>
         <p:spPr>
           <a:xfrm>
-            <a:off x="572414" y="1208836"/>
+            <a:off x="572414" y="1874519"/>
             <a:ext cx="11193170" cy="1302105"/>
           </a:xfrm>
           <a:prstGeom prst="rect">
@@ -15651,75 +13835,6 @@
                 <a:latin typeface="맑은 고딕"/>
               </a:rPr>
               <a:t>Microsoft Research 자료는 generative AI가 정보 탐색 다양성에 어떤 영향을 줄 수 있는지 문제를 제기한다</a:t>
-            </a:r>
-          </a:p>
-        </p:txBody>
-      </p:sp>
-      <p:sp>
-        <p:nvSpPr>
-          <p:cNvPr id="4" name="TextBox 3"/>
-          <p:cNvSpPr txBox="1"/>
-          <p:nvPr/>
-        </p:nvSpPr>
-        <p:spPr>
-          <a:xfrm>
-            <a:off x="411480" y="6510528"/>
-            <a:ext cx="9875520" cy="201168"/>
-          </a:xfrm>
-          <a:prstGeom prst="rect">
-            <a:avLst/>
-          </a:prstGeom>
-          <a:noFill/>
-        </p:spPr>
-        <p:txBody>
-          <a:bodyPr wrap="square">
-            <a:spAutoFit/>
-          </a:bodyPr>
-          <a:lstStyle/>
-          <a:p>
-            <a:r>
-              <a:rPr sz="800" b="0" u="none">
-                <a:solidFill>
-                  <a:srgbClr val="566070"/>
-                </a:solidFill>
-                <a:latin typeface="맑은 고딕"/>
-              </a:rPr>
-              <a:t>needs_fact_check</a:t>
-            </a:r>
-          </a:p>
-        </p:txBody>
-      </p:sp>
-      <p:sp>
-        <p:nvSpPr>
-          <p:cNvPr id="5" name="TextBox 4"/>
-          <p:cNvSpPr txBox="1"/>
-          <p:nvPr/>
-        </p:nvSpPr>
-        <p:spPr>
-          <a:xfrm>
-            <a:off x="10607040" y="6510528"/>
-            <a:ext cx="1143000" cy="201168"/>
-          </a:xfrm>
-          <a:prstGeom prst="rect">
-            <a:avLst/>
-          </a:prstGeom>
-          <a:noFill/>
-        </p:spPr>
-        <p:txBody>
-          <a:bodyPr wrap="square">
-            <a:spAutoFit/>
-          </a:bodyPr>
-          <a:lstStyle/>
-          <a:p>
-            <a:pPr algn="r"/>
-            <a:r>
-              <a:rPr sz="800" b="0" u="none">
-                <a:solidFill>
-                  <a:srgbClr val="566070"/>
-                </a:solidFill>
-                <a:latin typeface="맑은 고딕"/>
-              </a:rPr>
-              <a:t>08</a:t>
             </a:r>
           </a:p>
         </p:txBody>
@@ -15758,8 +13873,8 @@
         </p:nvSpPr>
         <p:spPr>
           <a:xfrm>
-            <a:off x="594360" y="502920"/>
-            <a:ext cx="10972800" cy="777240"/>
+            <a:off x="572414" y="356616"/>
+            <a:ext cx="11192256" cy="521207"/>
           </a:xfrm>
           <a:prstGeom prst="rect">
             <a:avLst/>
@@ -15792,7 +13907,7 @@
         </p:nvSpPr>
         <p:spPr>
           <a:xfrm>
-            <a:off x="731520" y="1600200"/>
+            <a:off x="731520" y="1417320"/>
             <a:ext cx="5257800" cy="4069080"/>
           </a:xfrm>
           <a:prstGeom prst="rect">
@@ -15837,7 +13952,7 @@
         </p:nvSpPr>
         <p:spPr>
           <a:xfrm>
-            <a:off x="6172200" y="1600200"/>
+            <a:off x="6172200" y="1417320"/>
             <a:ext cx="5257800" cy="4069080"/>
           </a:xfrm>
           <a:prstGeom prst="rect">
@@ -15882,7 +13997,7 @@
         </p:nvSpPr>
         <p:spPr>
           <a:xfrm>
-            <a:off x="960120" y="1874519"/>
+            <a:off x="960120" y="1691640"/>
             <a:ext cx="4800600" cy="3383280"/>
           </a:xfrm>
           <a:prstGeom prst="rect">
@@ -15937,7 +14052,7 @@
         </p:nvSpPr>
         <p:spPr>
           <a:xfrm>
-            <a:off x="6400800" y="1874519"/>
+            <a:off x="6400800" y="1691640"/>
             <a:ext cx="4800600" cy="3383280"/>
           </a:xfrm>
           <a:prstGeom prst="rect">
@@ -15964,75 +14079,6 @@
                 <a:latin typeface="맑은 고딕"/>
               </a:rPr>
               <a:t>중요: 이것이 곧 학습 저하라는 단정은 아니며, 설계와 교육 원칙에 따라 달라질 수 있다</a:t>
-            </a:r>
-          </a:p>
-        </p:txBody>
-      </p:sp>
-      <p:sp>
-        <p:nvSpPr>
-          <p:cNvPr id="7" name="TextBox 6"/>
-          <p:cNvSpPr txBox="1"/>
-          <p:nvPr/>
-        </p:nvSpPr>
-        <p:spPr>
-          <a:xfrm>
-            <a:off x="411480" y="6510528"/>
-            <a:ext cx="9875520" cy="201168"/>
-          </a:xfrm>
-          <a:prstGeom prst="rect">
-            <a:avLst/>
-          </a:prstGeom>
-          <a:noFill/>
-        </p:spPr>
-        <p:txBody>
-          <a:bodyPr wrap="square">
-            <a:spAutoFit/>
-          </a:bodyPr>
-          <a:lstStyle/>
-          <a:p>
-            <a:r>
-              <a:rPr sz="800" b="0" u="none">
-                <a:solidFill>
-                  <a:srgbClr val="566070"/>
-                </a:solidFill>
-                <a:latin typeface="맑은 고딕"/>
-              </a:rPr>
-              <a:t>needs_fact_check</a:t>
-            </a:r>
-          </a:p>
-        </p:txBody>
-      </p:sp>
-      <p:sp>
-        <p:nvSpPr>
-          <p:cNvPr id="8" name="TextBox 7"/>
-          <p:cNvSpPr txBox="1"/>
-          <p:nvPr/>
-        </p:nvSpPr>
-        <p:spPr>
-          <a:xfrm>
-            <a:off x="10607040" y="6510528"/>
-            <a:ext cx="1143000" cy="201168"/>
-          </a:xfrm>
-          <a:prstGeom prst="rect">
-            <a:avLst/>
-          </a:prstGeom>
-          <a:noFill/>
-        </p:spPr>
-        <p:txBody>
-          <a:bodyPr wrap="square">
-            <a:spAutoFit/>
-          </a:bodyPr>
-          <a:lstStyle/>
-          <a:p>
-            <a:pPr algn="r"/>
-            <a:r>
-              <a:rPr sz="800" b="0" u="none">
-                <a:solidFill>
-                  <a:srgbClr val="566070"/>
-                </a:solidFill>
-                <a:latin typeface="맑은 고딕"/>
-              </a:rPr>
-              <a:t>09</a:t>
             </a:r>
           </a:p>
         </p:txBody>

--- a/outputs/pptx/ai_knowledge_institution_styled_draft.pptx
+++ b/outputs/pptx/ai_knowledge_institution_styled_draft.pptx
@@ -572,6 +572,21 @@
           </a:p>
           <a:p>
             <a:r>
+              <a:t>proof_object_type: none</a:t>
+            </a:r>
+          </a:p>
+          <a:p>
+            <a:r>
+              <a:t>proof_object_required: False</a:t>
+            </a:r>
+          </a:p>
+          <a:p>
+            <a:r>
+              <a:t>proof_object_screen_position: none</a:t>
+            </a:r>
+          </a:p>
+          <a:p>
+            <a:r>
               <a:t>manual_placeholder_hidden: True</a:t>
             </a:r>
           </a:p>
@@ -687,6 +702,62 @@
           <a:p>
             <a:r>
               <a:t>  "prompt_if_ai_image": null</a:t>
+            </a:r>
+          </a:p>
+          <a:p>
+            <a:r>
+              <a:t>}</a:t>
+            </a:r>
+          </a:p>
+          <a:p/>
+          <a:p>
+            <a:r>
+              <a:t>proof_object:</a:t>
+            </a:r>
+          </a:p>
+          <a:p>
+            <a:r>
+              <a:t>{</a:t>
+            </a:r>
+          </a:p>
+          <a:p>
+            <a:r>
+              <a:t>  "type": "none",</a:t>
+            </a:r>
+          </a:p>
+          <a:p>
+            <a:r>
+              <a:t>  "required": false,</a:t>
+            </a:r>
+          </a:p>
+          <a:p>
+            <a:r>
+              <a:t>  "screen_position": "none",</a:t>
+            </a:r>
+          </a:p>
+          <a:p>
+            <a:r>
+              <a:t>  "display_label": "",</a:t>
+            </a:r>
+          </a:p>
+          <a:p>
+            <a:r>
+              <a:t>  "source_url": null,</a:t>
+            </a:r>
+          </a:p>
+          <a:p>
+            <a:r>
+              <a:t>  "image_url": null,</a:t>
+            </a:r>
+          </a:p>
+          <a:p>
+            <a:r>
+              <a:t>  "copyright_risk": false,</a:t>
+            </a:r>
+          </a:p>
+          <a:p>
+            <a:r>
+              <a:t>  "manual_insert_required": false</a:t>
             </a:r>
           </a:p>
           <a:p>
@@ -823,6 +894,21 @@
           </a:p>
           <a:p>
             <a:r>
+              <a:t>proof_object_type: none</a:t>
+            </a:r>
+          </a:p>
+          <a:p>
+            <a:r>
+              <a:t>proof_object_required: False</a:t>
+            </a:r>
+          </a:p>
+          <a:p>
+            <a:r>
+              <a:t>proof_object_screen_position: none</a:t>
+            </a:r>
+          </a:p>
+          <a:p>
+            <a:r>
               <a:t>manual_placeholder_hidden: True</a:t>
             </a:r>
           </a:p>
@@ -953,6 +1039,62 @@
           <a:p>
             <a:r>
               <a:t>  "prompt_if_ai_image": null</a:t>
+            </a:r>
+          </a:p>
+          <a:p>
+            <a:r>
+              <a:t>}</a:t>
+            </a:r>
+          </a:p>
+          <a:p/>
+          <a:p>
+            <a:r>
+              <a:t>proof_object:</a:t>
+            </a:r>
+          </a:p>
+          <a:p>
+            <a:r>
+              <a:t>{</a:t>
+            </a:r>
+          </a:p>
+          <a:p>
+            <a:r>
+              <a:t>  "type": "none",</a:t>
+            </a:r>
+          </a:p>
+          <a:p>
+            <a:r>
+              <a:t>  "required": false,</a:t>
+            </a:r>
+          </a:p>
+          <a:p>
+            <a:r>
+              <a:t>  "screen_position": "none",</a:t>
+            </a:r>
+          </a:p>
+          <a:p>
+            <a:r>
+              <a:t>  "display_label": "",</a:t>
+            </a:r>
+          </a:p>
+          <a:p>
+            <a:r>
+              <a:t>  "source_url": "https://www.microsoft.com/en-us/research/publication/from-searchable-to-non-searchable-generative-ai-and-information-diversity-in-online-information-seeking/",</a:t>
+            </a:r>
+          </a:p>
+          <a:p>
+            <a:r>
+              <a:t>  "image_url": null,</a:t>
+            </a:r>
+          </a:p>
+          <a:p>
+            <a:r>
+              <a:t>  "copyright_risk": false,</a:t>
+            </a:r>
+          </a:p>
+          <a:p>
+            <a:r>
+              <a:t>  "manual_insert_required": false</a:t>
             </a:r>
           </a:p>
           <a:p>
@@ -1104,6 +1246,21 @@
           </a:p>
           <a:p>
             <a:r>
+              <a:t>proof_object_type: article_quote</a:t>
+            </a:r>
+          </a:p>
+          <a:p>
+            <a:r>
+              <a:t>proof_object_required: True</a:t>
+            </a:r>
+          </a:p>
+          <a:p>
+            <a:r>
+              <a:t>proof_object_screen_position: left_half</a:t>
+            </a:r>
+          </a:p>
+          <a:p>
+            <a:r>
               <a:t>manual_placeholder_hidden: True</a:t>
             </a:r>
           </a:p>
@@ -1229,6 +1386,62 @@
           <a:p>
             <a:r>
               <a:t>  "prompt_if_ai_image": null</a:t>
+            </a:r>
+          </a:p>
+          <a:p>
+            <a:r>
+              <a:t>}</a:t>
+            </a:r>
+          </a:p>
+          <a:p/>
+          <a:p>
+            <a:r>
+              <a:t>proof_object:</a:t>
+            </a:r>
+          </a:p>
+          <a:p>
+            <a:r>
+              <a:t>{</a:t>
+            </a:r>
+          </a:p>
+          <a:p>
+            <a:r>
+              <a:t>  "type": "article_quote",</a:t>
+            </a:r>
+          </a:p>
+          <a:p>
+            <a:r>
+              <a:t>  "required": true,</a:t>
+            </a:r>
+          </a:p>
+          <a:p>
+            <a:r>
+              <a:t>  "screen_position": "left_half",</a:t>
+            </a:r>
+          </a:p>
+          <a:p>
+            <a:r>
+              <a:t>  "display_label": "[기사 인용]",</a:t>
+            </a:r>
+          </a:p>
+          <a:p>
+            <a:r>
+              <a:t>  "source_url": "https://www.bbc.com/news/articles/c2023l60370o?at_medium=RSS&amp;at_campaign=rss",</a:t>
+            </a:r>
+          </a:p>
+          <a:p>
+            <a:r>
+              <a:t>  "image_url": null,</a:t>
+            </a:r>
+          </a:p>
+          <a:p>
+            <a:r>
+              <a:t>  "copyright_risk": false,</a:t>
+            </a:r>
+          </a:p>
+          <a:p>
+            <a:r>
+              <a:t>  "manual_insert_required": true</a:t>
             </a:r>
           </a:p>
           <a:p>
@@ -1375,6 +1588,21 @@
           </a:p>
           <a:p>
             <a:r>
+              <a:t>proof_object_type: none</a:t>
+            </a:r>
+          </a:p>
+          <a:p>
+            <a:r>
+              <a:t>proof_object_required: False</a:t>
+            </a:r>
+          </a:p>
+          <a:p>
+            <a:r>
+              <a:t>proof_object_screen_position: none</a:t>
+            </a:r>
+          </a:p>
+          <a:p>
+            <a:r>
               <a:t>manual_placeholder_hidden: True</a:t>
             </a:r>
           </a:p>
@@ -1495,6 +1723,62 @@
           <a:p>
             <a:r>
               <a:t>  "prompt_if_ai_image": null</a:t>
+            </a:r>
+          </a:p>
+          <a:p>
+            <a:r>
+              <a:t>}</a:t>
+            </a:r>
+          </a:p>
+          <a:p/>
+          <a:p>
+            <a:r>
+              <a:t>proof_object:</a:t>
+            </a:r>
+          </a:p>
+          <a:p>
+            <a:r>
+              <a:t>{</a:t>
+            </a:r>
+          </a:p>
+          <a:p>
+            <a:r>
+              <a:t>  "type": "none",</a:t>
+            </a:r>
+          </a:p>
+          <a:p>
+            <a:r>
+              <a:t>  "required": false,</a:t>
+            </a:r>
+          </a:p>
+          <a:p>
+            <a:r>
+              <a:t>  "screen_position": "none",</a:t>
+            </a:r>
+          </a:p>
+          <a:p>
+            <a:r>
+              <a:t>  "display_label": "",</a:t>
+            </a:r>
+          </a:p>
+          <a:p>
+            <a:r>
+              <a:t>  "source_url": null,</a:t>
+            </a:r>
+          </a:p>
+          <a:p>
+            <a:r>
+              <a:t>  "image_url": null,</a:t>
+            </a:r>
+          </a:p>
+          <a:p>
+            <a:r>
+              <a:t>  "copyright_risk": false,</a:t>
+            </a:r>
+          </a:p>
+          <a:p>
+            <a:r>
+              <a:t>  "manual_insert_required": false</a:t>
             </a:r>
           </a:p>
           <a:p>
@@ -1631,6 +1915,21 @@
           </a:p>
           <a:p>
             <a:r>
+              <a:t>proof_object_type: none</a:t>
+            </a:r>
+          </a:p>
+          <a:p>
+            <a:r>
+              <a:t>proof_object_required: False</a:t>
+            </a:r>
+          </a:p>
+          <a:p>
+            <a:r>
+              <a:t>proof_object_screen_position: none</a:t>
+            </a:r>
+          </a:p>
+          <a:p>
+            <a:r>
               <a:t>manual_placeholder_hidden: True</a:t>
             </a:r>
           </a:p>
@@ -1741,6 +2040,62 @@
           <a:p>
             <a:r>
               <a:t>  "prompt_if_ai_image": null</a:t>
+            </a:r>
+          </a:p>
+          <a:p>
+            <a:r>
+              <a:t>}</a:t>
+            </a:r>
+          </a:p>
+          <a:p/>
+          <a:p>
+            <a:r>
+              <a:t>proof_object:</a:t>
+            </a:r>
+          </a:p>
+          <a:p>
+            <a:r>
+              <a:t>{</a:t>
+            </a:r>
+          </a:p>
+          <a:p>
+            <a:r>
+              <a:t>  "type": "none",</a:t>
+            </a:r>
+          </a:p>
+          <a:p>
+            <a:r>
+              <a:t>  "required": false,</a:t>
+            </a:r>
+          </a:p>
+          <a:p>
+            <a:r>
+              <a:t>  "screen_position": "none",</a:t>
+            </a:r>
+          </a:p>
+          <a:p>
+            <a:r>
+              <a:t>  "display_label": "",</a:t>
+            </a:r>
+          </a:p>
+          <a:p>
+            <a:r>
+              <a:t>  "source_url": null,</a:t>
+            </a:r>
+          </a:p>
+          <a:p>
+            <a:r>
+              <a:t>  "image_url": null,</a:t>
+            </a:r>
+          </a:p>
+          <a:p>
+            <a:r>
+              <a:t>  "copyright_risk": false,</a:t>
+            </a:r>
+          </a:p>
+          <a:p>
+            <a:r>
+              <a:t>  "manual_insert_required": false</a:t>
             </a:r>
           </a:p>
           <a:p>
@@ -1877,6 +2232,21 @@
           </a:p>
           <a:p>
             <a:r>
+              <a:t>proof_object_type: none</a:t>
+            </a:r>
+          </a:p>
+          <a:p>
+            <a:r>
+              <a:t>proof_object_required: False</a:t>
+            </a:r>
+          </a:p>
+          <a:p>
+            <a:r>
+              <a:t>proof_object_screen_position: none</a:t>
+            </a:r>
+          </a:p>
+          <a:p>
+            <a:r>
               <a:t>manual_placeholder_hidden: True</a:t>
             </a:r>
           </a:p>
@@ -2007,6 +2377,62 @@
           <a:p>
             <a:r>
               <a:t>  "prompt_if_ai_image": null</a:t>
+            </a:r>
+          </a:p>
+          <a:p>
+            <a:r>
+              <a:t>}</a:t>
+            </a:r>
+          </a:p>
+          <a:p/>
+          <a:p>
+            <a:r>
+              <a:t>proof_object:</a:t>
+            </a:r>
+          </a:p>
+          <a:p>
+            <a:r>
+              <a:t>{</a:t>
+            </a:r>
+          </a:p>
+          <a:p>
+            <a:r>
+              <a:t>  "type": "none",</a:t>
+            </a:r>
+          </a:p>
+          <a:p>
+            <a:r>
+              <a:t>  "required": false,</a:t>
+            </a:r>
+          </a:p>
+          <a:p>
+            <a:r>
+              <a:t>  "screen_position": "none",</a:t>
+            </a:r>
+          </a:p>
+          <a:p>
+            <a:r>
+              <a:t>  "display_label": "",</a:t>
+            </a:r>
+          </a:p>
+          <a:p>
+            <a:r>
+              <a:t>  "source_url": "https://www.oecd.org/en/publications/oecd-digital-education-outlook-2026_062a7394-en.html",</a:t>
+            </a:r>
+          </a:p>
+          <a:p>
+            <a:r>
+              <a:t>  "image_url": null,</a:t>
+            </a:r>
+          </a:p>
+          <a:p>
+            <a:r>
+              <a:t>  "copyright_risk": false,</a:t>
+            </a:r>
+          </a:p>
+          <a:p>
+            <a:r>
+              <a:t>  "manual_insert_required": false</a:t>
             </a:r>
           </a:p>
           <a:p>
@@ -2158,6 +2584,21 @@
           </a:p>
           <a:p>
             <a:r>
+              <a:t>proof_object_type: none</a:t>
+            </a:r>
+          </a:p>
+          <a:p>
+            <a:r>
+              <a:t>proof_object_required: False</a:t>
+            </a:r>
+          </a:p>
+          <a:p>
+            <a:r>
+              <a:t>proof_object_screen_position: none</a:t>
+            </a:r>
+          </a:p>
+          <a:p>
+            <a:r>
               <a:t>manual_placeholder_hidden: True</a:t>
             </a:r>
           </a:p>
@@ -2288,6 +2729,62 @@
           <a:p>
             <a:r>
               <a:t>  "prompt_if_ai_image": null</a:t>
+            </a:r>
+          </a:p>
+          <a:p>
+            <a:r>
+              <a:t>}</a:t>
+            </a:r>
+          </a:p>
+          <a:p/>
+          <a:p>
+            <a:r>
+              <a:t>proof_object:</a:t>
+            </a:r>
+          </a:p>
+          <a:p>
+            <a:r>
+              <a:t>{</a:t>
+            </a:r>
+          </a:p>
+          <a:p>
+            <a:r>
+              <a:t>  "type": "none",</a:t>
+            </a:r>
+          </a:p>
+          <a:p>
+            <a:r>
+              <a:t>  "required": false,</a:t>
+            </a:r>
+          </a:p>
+          <a:p>
+            <a:r>
+              <a:t>  "screen_position": "none",</a:t>
+            </a:r>
+          </a:p>
+          <a:p>
+            <a:r>
+              <a:t>  "display_label": "",</a:t>
+            </a:r>
+          </a:p>
+          <a:p>
+            <a:r>
+              <a:t>  "source_url": "https://www.unesco.org/en/articles/ai-competency-framework-students",</a:t>
+            </a:r>
+          </a:p>
+          <a:p>
+            <a:r>
+              <a:t>  "image_url": null,</a:t>
+            </a:r>
+          </a:p>
+          <a:p>
+            <a:r>
+              <a:t>  "copyright_risk": true,</a:t>
+            </a:r>
+          </a:p>
+          <a:p>
+            <a:r>
+              <a:t>  "manual_insert_required": false</a:t>
             </a:r>
           </a:p>
           <a:p>
@@ -2445,6 +2942,21 @@
           </a:p>
           <a:p>
             <a:r>
+              <a:t>proof_object_type: none</a:t>
+            </a:r>
+          </a:p>
+          <a:p>
+            <a:r>
+              <a:t>proof_object_required: False</a:t>
+            </a:r>
+          </a:p>
+          <a:p>
+            <a:r>
+              <a:t>proof_object_screen_position: none</a:t>
+            </a:r>
+          </a:p>
+          <a:p>
+            <a:r>
               <a:t>manual_placeholder_hidden: True</a:t>
             </a:r>
           </a:p>
@@ -2575,6 +3087,62 @@
           <a:p>
             <a:r>
               <a:t>  "prompt_if_ai_image": null</a:t>
+            </a:r>
+          </a:p>
+          <a:p>
+            <a:r>
+              <a:t>}</a:t>
+            </a:r>
+          </a:p>
+          <a:p/>
+          <a:p>
+            <a:r>
+              <a:t>proof_object:</a:t>
+            </a:r>
+          </a:p>
+          <a:p>
+            <a:r>
+              <a:t>{</a:t>
+            </a:r>
+          </a:p>
+          <a:p>
+            <a:r>
+              <a:t>  "type": "none",</a:t>
+            </a:r>
+          </a:p>
+          <a:p>
+            <a:r>
+              <a:t>  "required": false,</a:t>
+            </a:r>
+          </a:p>
+          <a:p>
+            <a:r>
+              <a:t>  "screen_position": "none",</a:t>
+            </a:r>
+          </a:p>
+          <a:p>
+            <a:r>
+              <a:t>  "display_label": "",</a:t>
+            </a:r>
+          </a:p>
+          <a:p>
+            <a:r>
+              <a:t>  "source_url": "https://www.bbc.com/news/articles/c2023l60370o?at_medium=RSS&amp;at_campaign=rss",</a:t>
+            </a:r>
+          </a:p>
+          <a:p>
+            <a:r>
+              <a:t>  "image_url": null,</a:t>
+            </a:r>
+          </a:p>
+          <a:p>
+            <a:r>
+              <a:t>  "copyright_risk": false,</a:t>
+            </a:r>
+          </a:p>
+          <a:p>
+            <a:r>
+              <a:t>  "manual_insert_required": false</a:t>
             </a:r>
           </a:p>
           <a:p>
@@ -2726,6 +3294,21 @@
           </a:p>
           <a:p>
             <a:r>
+              <a:t>proof_object_type: chart</a:t>
+            </a:r>
+          </a:p>
+          <a:p>
+            <a:r>
+              <a:t>proof_object_required: True</a:t>
+            </a:r>
+          </a:p>
+          <a:p>
+            <a:r>
+              <a:t>proof_object_screen_position: full_width_chart</a:t>
+            </a:r>
+          </a:p>
+          <a:p>
+            <a:r>
               <a:t>manual_placeholder_hidden: False</a:t>
             </a:r>
           </a:p>
@@ -2861,6 +3444,62 @@
           <a:p>
             <a:r>
               <a:t>  "prompt_if_ai_image": null</a:t>
+            </a:r>
+          </a:p>
+          <a:p>
+            <a:r>
+              <a:t>}</a:t>
+            </a:r>
+          </a:p>
+          <a:p/>
+          <a:p>
+            <a:r>
+              <a:t>proof_object:</a:t>
+            </a:r>
+          </a:p>
+          <a:p>
+            <a:r>
+              <a:t>{</a:t>
+            </a:r>
+          </a:p>
+          <a:p>
+            <a:r>
+              <a:t>  "type": "chart",</a:t>
+            </a:r>
+          </a:p>
+          <a:p>
+            <a:r>
+              <a:t>  "required": true,</a:t>
+            </a:r>
+          </a:p>
+          <a:p>
+            <a:r>
+              <a:t>  "screen_position": "full_width_chart",</a:t>
+            </a:r>
+          </a:p>
+          <a:p>
+            <a:r>
+              <a:t>  "display_label": "[차트]",</a:t>
+            </a:r>
+          </a:p>
+          <a:p>
+            <a:r>
+              <a:t>  "source_url": "https://www.oecd.org/en/publications/oecd-digital-education-outlook-2026_062a7394-en.html",</a:t>
+            </a:r>
+          </a:p>
+          <a:p>
+            <a:r>
+              <a:t>  "image_url": null,</a:t>
+            </a:r>
+          </a:p>
+          <a:p>
+            <a:r>
+              <a:t>  "copyright_risk": false,</a:t>
+            </a:r>
+          </a:p>
+          <a:p>
+            <a:r>
+              <a:t>  "manual_insert_required": true</a:t>
             </a:r>
           </a:p>
           <a:p>
@@ -3017,6 +3656,21 @@
           </a:p>
           <a:p>
             <a:r>
+              <a:t>proof_object_type: diagram</a:t>
+            </a:r>
+          </a:p>
+          <a:p>
+            <a:r>
+              <a:t>proof_object_required: True</a:t>
+            </a:r>
+          </a:p>
+          <a:p>
+            <a:r>
+              <a:t>proof_object_screen_position: left_half</a:t>
+            </a:r>
+          </a:p>
+          <a:p>
+            <a:r>
               <a:t>manual_placeholder_hidden: False</a:t>
             </a:r>
           </a:p>
@@ -3147,6 +3801,62 @@
           <a:p>
             <a:r>
               <a:t>  "prompt_if_ai_image": null</a:t>
+            </a:r>
+          </a:p>
+          <a:p>
+            <a:r>
+              <a:t>}</a:t>
+            </a:r>
+          </a:p>
+          <a:p/>
+          <a:p>
+            <a:r>
+              <a:t>proof_object:</a:t>
+            </a:r>
+          </a:p>
+          <a:p>
+            <a:r>
+              <a:t>{</a:t>
+            </a:r>
+          </a:p>
+          <a:p>
+            <a:r>
+              <a:t>  "type": "diagram",</a:t>
+            </a:r>
+          </a:p>
+          <a:p>
+            <a:r>
+              <a:t>  "required": true,</a:t>
+            </a:r>
+          </a:p>
+          <a:p>
+            <a:r>
+              <a:t>  "screen_position": "left_half",</a:t>
+            </a:r>
+          </a:p>
+          <a:p>
+            <a:r>
+              <a:t>  "display_label": "[도식]",</a:t>
+            </a:r>
+          </a:p>
+          <a:p>
+            <a:r>
+              <a:t>  "source_url": "https://www.korea.kr/news/policyNewsView.do?newsId=148912089",</a:t>
+            </a:r>
+          </a:p>
+          <a:p>
+            <a:r>
+              <a:t>  "image_url": null,</a:t>
+            </a:r>
+          </a:p>
+          <a:p>
+            <a:r>
+              <a:t>  "copyright_risk": false,</a:t>
+            </a:r>
+          </a:p>
+          <a:p>
+            <a:r>
+              <a:t>  "manual_insert_required": true</a:t>
             </a:r>
           </a:p>
           <a:p>
@@ -3298,6 +4008,21 @@
           </a:p>
           <a:p>
             <a:r>
+              <a:t>proof_object_type: none</a:t>
+            </a:r>
+          </a:p>
+          <a:p>
+            <a:r>
+              <a:t>proof_object_required: False</a:t>
+            </a:r>
+          </a:p>
+          <a:p>
+            <a:r>
+              <a:t>proof_object_screen_position: none</a:t>
+            </a:r>
+          </a:p>
+          <a:p>
+            <a:r>
               <a:t>manual_placeholder_hidden: True</a:t>
             </a:r>
           </a:p>
@@ -3423,6 +4148,62 @@
           <a:p>
             <a:r>
               <a:t>  "prompt_if_ai_image": null</a:t>
+            </a:r>
+          </a:p>
+          <a:p>
+            <a:r>
+              <a:t>}</a:t>
+            </a:r>
+          </a:p>
+          <a:p/>
+          <a:p>
+            <a:r>
+              <a:t>proof_object:</a:t>
+            </a:r>
+          </a:p>
+          <a:p>
+            <a:r>
+              <a:t>{</a:t>
+            </a:r>
+          </a:p>
+          <a:p>
+            <a:r>
+              <a:t>  "type": "none",</a:t>
+            </a:r>
+          </a:p>
+          <a:p>
+            <a:r>
+              <a:t>  "required": false,</a:t>
+            </a:r>
+          </a:p>
+          <a:p>
+            <a:r>
+              <a:t>  "screen_position": "none",</a:t>
+            </a:r>
+          </a:p>
+          <a:p>
+            <a:r>
+              <a:t>  "display_label": "",</a:t>
+            </a:r>
+          </a:p>
+          <a:p>
+            <a:r>
+              <a:t>  "source_url": "https://www.microsoft.com/en-us/research/publication/from-searchable-to-non-searchable-generative-ai-and-information-diversity-in-online-information-seeking/",</a:t>
+            </a:r>
+          </a:p>
+          <a:p>
+            <a:r>
+              <a:t>  "image_url": null,</a:t>
+            </a:r>
+          </a:p>
+          <a:p>
+            <a:r>
+              <a:t>  "copyright_risk": false,</a:t>
+            </a:r>
+          </a:p>
+          <a:p>
+            <a:r>
+              <a:t>  "manual_insert_required": false</a:t>
             </a:r>
           </a:p>
           <a:p>
@@ -3564,6 +4345,21 @@
           </a:p>
           <a:p>
             <a:r>
+              <a:t>proof_object_type: none</a:t>
+            </a:r>
+          </a:p>
+          <a:p>
+            <a:r>
+              <a:t>proof_object_required: False</a:t>
+            </a:r>
+          </a:p>
+          <a:p>
+            <a:r>
+              <a:t>proof_object_screen_position: none</a:t>
+            </a:r>
+          </a:p>
+          <a:p>
+            <a:r>
               <a:t>manual_placeholder_hidden: True</a:t>
             </a:r>
           </a:p>
@@ -3694,6 +4490,62 @@
           <a:p>
             <a:r>
               <a:t>  "prompt_if_ai_image": null</a:t>
+            </a:r>
+          </a:p>
+          <a:p>
+            <a:r>
+              <a:t>}</a:t>
+            </a:r>
+          </a:p>
+          <a:p/>
+          <a:p>
+            <a:r>
+              <a:t>proof_object:</a:t>
+            </a:r>
+          </a:p>
+          <a:p>
+            <a:r>
+              <a:t>{</a:t>
+            </a:r>
+          </a:p>
+          <a:p>
+            <a:r>
+              <a:t>  "type": "none",</a:t>
+            </a:r>
+          </a:p>
+          <a:p>
+            <a:r>
+              <a:t>  "required": false,</a:t>
+            </a:r>
+          </a:p>
+          <a:p>
+            <a:r>
+              <a:t>  "screen_position": "none",</a:t>
+            </a:r>
+          </a:p>
+          <a:p>
+            <a:r>
+              <a:t>  "display_label": "",</a:t>
+            </a:r>
+          </a:p>
+          <a:p>
+            <a:r>
+              <a:t>  "source_url": "https://www.microsoft.com/en-us/research/publication/from-searchable-to-non-searchable-generative-ai-and-information-diversity-in-online-information-seeking/",</a:t>
+            </a:r>
+          </a:p>
+          <a:p>
+            <a:r>
+              <a:t>  "image_url": null,</a:t>
+            </a:r>
+          </a:p>
+          <a:p>
+            <a:r>
+              <a:t>  "copyright_risk": false,</a:t>
+            </a:r>
+          </a:p>
+          <a:p>
+            <a:r>
+              <a:t>  "manual_insert_required": false</a:t>
             </a:r>
           </a:p>
           <a:p>
@@ -3845,6 +4697,21 @@
           </a:p>
           <a:p>
             <a:r>
+              <a:t>proof_object_type: none</a:t>
+            </a:r>
+          </a:p>
+          <a:p>
+            <a:r>
+              <a:t>proof_object_required: False</a:t>
+            </a:r>
+          </a:p>
+          <a:p>
+            <a:r>
+              <a:t>proof_object_screen_position: none</a:t>
+            </a:r>
+          </a:p>
+          <a:p>
+            <a:r>
               <a:t>manual_placeholder_hidden: True</a:t>
             </a:r>
           </a:p>
@@ -3955,6 +4822,62 @@
           <a:p>
             <a:r>
               <a:t>  "prompt_if_ai_image": null</a:t>
+            </a:r>
+          </a:p>
+          <a:p>
+            <a:r>
+              <a:t>}</a:t>
+            </a:r>
+          </a:p>
+          <a:p/>
+          <a:p>
+            <a:r>
+              <a:t>proof_object:</a:t>
+            </a:r>
+          </a:p>
+          <a:p>
+            <a:r>
+              <a:t>{</a:t>
+            </a:r>
+          </a:p>
+          <a:p>
+            <a:r>
+              <a:t>  "type": "none",</a:t>
+            </a:r>
+          </a:p>
+          <a:p>
+            <a:r>
+              <a:t>  "required": false,</a:t>
+            </a:r>
+          </a:p>
+          <a:p>
+            <a:r>
+              <a:t>  "screen_position": "none",</a:t>
+            </a:r>
+          </a:p>
+          <a:p>
+            <a:r>
+              <a:t>  "display_label": "",</a:t>
+            </a:r>
+          </a:p>
+          <a:p>
+            <a:r>
+              <a:t>  "source_url": null,</a:t>
+            </a:r>
+          </a:p>
+          <a:p>
+            <a:r>
+              <a:t>  "image_url": null,</a:t>
+            </a:r>
+          </a:p>
+          <a:p>
+            <a:r>
+              <a:t>  "copyright_risk": false,</a:t>
+            </a:r>
+          </a:p>
+          <a:p>
+            <a:r>
+              <a:t>  "manual_insert_required": false</a:t>
             </a:r>
           </a:p>
           <a:p>
@@ -4091,6 +5014,21 @@
           </a:p>
           <a:p>
             <a:r>
+              <a:t>proof_object_type: diagram</a:t>
+            </a:r>
+          </a:p>
+          <a:p>
+            <a:r>
+              <a:t>proof_object_required: True</a:t>
+            </a:r>
+          </a:p>
+          <a:p>
+            <a:r>
+              <a:t>proof_object_screen_position: left_half</a:t>
+            </a:r>
+          </a:p>
+          <a:p>
+            <a:r>
               <a:t>manual_placeholder_hidden: False</a:t>
             </a:r>
           </a:p>
@@ -4221,6 +5159,62 @@
           <a:p>
             <a:r>
               <a:t>  "prompt_if_ai_image": null</a:t>
+            </a:r>
+          </a:p>
+          <a:p>
+            <a:r>
+              <a:t>}</a:t>
+            </a:r>
+          </a:p>
+          <a:p/>
+          <a:p>
+            <a:r>
+              <a:t>proof_object:</a:t>
+            </a:r>
+          </a:p>
+          <a:p>
+            <a:r>
+              <a:t>{</a:t>
+            </a:r>
+          </a:p>
+          <a:p>
+            <a:r>
+              <a:t>  "type": "diagram",</a:t>
+            </a:r>
+          </a:p>
+          <a:p>
+            <a:r>
+              <a:t>  "required": true,</a:t>
+            </a:r>
+          </a:p>
+          <a:p>
+            <a:r>
+              <a:t>  "screen_position": "left_half",</a:t>
+            </a:r>
+          </a:p>
+          <a:p>
+            <a:r>
+              <a:t>  "display_label": "[도식]",</a:t>
+            </a:r>
+          </a:p>
+          <a:p>
+            <a:r>
+              <a:t>  "source_url": "https://www.unesco.org/en/articles/ai-and-education-protecting-rights-learners",</a:t>
+            </a:r>
+          </a:p>
+          <a:p>
+            <a:r>
+              <a:t>  "image_url": null,</a:t>
+            </a:r>
+          </a:p>
+          <a:p>
+            <a:r>
+              <a:t>  "copyright_risk": false,</a:t>
+            </a:r>
+          </a:p>
+          <a:p>
+            <a:r>
+              <a:t>  "manual_insert_required": true</a:t>
             </a:r>
           </a:p>
           <a:p>
@@ -4372,6 +5366,21 @@
           </a:p>
           <a:p>
             <a:r>
+              <a:t>proof_object_type: none</a:t>
+            </a:r>
+          </a:p>
+          <a:p>
+            <a:r>
+              <a:t>proof_object_required: False</a:t>
+            </a:r>
+          </a:p>
+          <a:p>
+            <a:r>
+              <a:t>proof_object_screen_position: none</a:t>
+            </a:r>
+          </a:p>
+          <a:p>
+            <a:r>
               <a:t>manual_placeholder_hidden: True</a:t>
             </a:r>
           </a:p>
@@ -4512,6 +5521,62 @@
           <a:p>
             <a:r>
               <a:t>  "prompt_if_ai_image": null</a:t>
+            </a:r>
+          </a:p>
+          <a:p>
+            <a:r>
+              <a:t>}</a:t>
+            </a:r>
+          </a:p>
+          <a:p/>
+          <a:p>
+            <a:r>
+              <a:t>proof_object:</a:t>
+            </a:r>
+          </a:p>
+          <a:p>
+            <a:r>
+              <a:t>{</a:t>
+            </a:r>
+          </a:p>
+          <a:p>
+            <a:r>
+              <a:t>  "type": "none",</a:t>
+            </a:r>
+          </a:p>
+          <a:p>
+            <a:r>
+              <a:t>  "required": false,</a:t>
+            </a:r>
+          </a:p>
+          <a:p>
+            <a:r>
+              <a:t>  "screen_position": "none",</a:t>
+            </a:r>
+          </a:p>
+          <a:p>
+            <a:r>
+              <a:t>  "display_label": "",</a:t>
+            </a:r>
+          </a:p>
+          <a:p>
+            <a:r>
+              <a:t>  "source_url": "https://www.unesco.org/en/articles/ai-competency-framework-students",</a:t>
+            </a:r>
+          </a:p>
+          <a:p>
+            <a:r>
+              <a:t>  "image_url": null,</a:t>
+            </a:r>
+          </a:p>
+          <a:p>
+            <a:r>
+              <a:t>  "copyright_risk": false,</a:t>
+            </a:r>
+          </a:p>
+          <a:p>
+            <a:r>
+              <a:t>  "manual_insert_required": false</a:t>
             </a:r>
           </a:p>
           <a:p>
@@ -4673,6 +5738,21 @@
           </a:p>
           <a:p>
             <a:r>
+              <a:t>proof_object_type: diagram</a:t>
+            </a:r>
+          </a:p>
+          <a:p>
+            <a:r>
+              <a:t>proof_object_required: True</a:t>
+            </a:r>
+          </a:p>
+          <a:p>
+            <a:r>
+              <a:t>proof_object_screen_position: left_half</a:t>
+            </a:r>
+          </a:p>
+          <a:p>
+            <a:r>
               <a:t>manual_placeholder_hidden: False</a:t>
             </a:r>
           </a:p>
@@ -4798,6 +5878,62 @@
           <a:p>
             <a:r>
               <a:t>  "prompt_if_ai_image": null</a:t>
+            </a:r>
+          </a:p>
+          <a:p>
+            <a:r>
+              <a:t>}</a:t>
+            </a:r>
+          </a:p>
+          <a:p/>
+          <a:p>
+            <a:r>
+              <a:t>proof_object:</a:t>
+            </a:r>
+          </a:p>
+          <a:p>
+            <a:r>
+              <a:t>{</a:t>
+            </a:r>
+          </a:p>
+          <a:p>
+            <a:r>
+              <a:t>  "type": "diagram",</a:t>
+            </a:r>
+          </a:p>
+          <a:p>
+            <a:r>
+              <a:t>  "required": true,</a:t>
+            </a:r>
+          </a:p>
+          <a:p>
+            <a:r>
+              <a:t>  "screen_position": "left_half",</a:t>
+            </a:r>
+          </a:p>
+          <a:p>
+            <a:r>
+              <a:t>  "display_label": "[도식]",</a:t>
+            </a:r>
+          </a:p>
+          <a:p>
+            <a:r>
+              <a:t>  "source_url": "https://www.bbc.com/news/articles/c2023l60370o?at_medium=RSS&amp;at_campaign=rss",</a:t>
+            </a:r>
+          </a:p>
+          <a:p>
+            <a:r>
+              <a:t>  "image_url": null,</a:t>
+            </a:r>
+          </a:p>
+          <a:p>
+            <a:r>
+              <a:t>  "copyright_risk": false,</a:t>
+            </a:r>
+          </a:p>
+          <a:p>
+            <a:r>
+              <a:t>  "manual_insert_required": true</a:t>
             </a:r>
           </a:p>
           <a:p>
@@ -4939,6 +6075,21 @@
           </a:p>
           <a:p>
             <a:r>
+              <a:t>proof_object_type: none</a:t>
+            </a:r>
+          </a:p>
+          <a:p>
+            <a:r>
+              <a:t>proof_object_required: False</a:t>
+            </a:r>
+          </a:p>
+          <a:p>
+            <a:r>
+              <a:t>proof_object_screen_position: none</a:t>
+            </a:r>
+          </a:p>
+          <a:p>
+            <a:r>
               <a:t>manual_placeholder_hidden: False</a:t>
             </a:r>
           </a:p>
@@ -5114,6 +6265,62 @@
           <a:p>
             <a:r>
               <a:t>  "prompt_if_ai_image": null</a:t>
+            </a:r>
+          </a:p>
+          <a:p>
+            <a:r>
+              <a:t>}</a:t>
+            </a:r>
+          </a:p>
+          <a:p/>
+          <a:p>
+            <a:r>
+              <a:t>proof_object:</a:t>
+            </a:r>
+          </a:p>
+          <a:p>
+            <a:r>
+              <a:t>{</a:t>
+            </a:r>
+          </a:p>
+          <a:p>
+            <a:r>
+              <a:t>  "type": "none",</a:t>
+            </a:r>
+          </a:p>
+          <a:p>
+            <a:r>
+              <a:t>  "required": false,</a:t>
+            </a:r>
+          </a:p>
+          <a:p>
+            <a:r>
+              <a:t>  "screen_position": "none",</a:t>
+            </a:r>
+          </a:p>
+          <a:p>
+            <a:r>
+              <a:t>  "display_label": "",</a:t>
+            </a:r>
+          </a:p>
+          <a:p>
+            <a:r>
+              <a:t>  "source_url": "https://www.bbc.com/news/articles/c2023l60370o?at_medium=RSS&amp;at_campaign=rss",</a:t>
+            </a:r>
+          </a:p>
+          <a:p>
+            <a:r>
+              <a:t>  "image_url": null,</a:t>
+            </a:r>
+          </a:p>
+          <a:p>
+            <a:r>
+              <a:t>  "copyright_risk": false,</a:t>
+            </a:r>
+          </a:p>
+          <a:p>
+            <a:r>
+              <a:t>  "manual_insert_required": false</a:t>
             </a:r>
           </a:p>
           <a:p>
@@ -5295,6 +6502,21 @@
           </a:p>
           <a:p>
             <a:r>
+              <a:t>proof_object_type: none</a:t>
+            </a:r>
+          </a:p>
+          <a:p>
+            <a:r>
+              <a:t>proof_object_required: False</a:t>
+            </a:r>
+          </a:p>
+          <a:p>
+            <a:r>
+              <a:t>proof_object_screen_position: none</a:t>
+            </a:r>
+          </a:p>
+          <a:p>
+            <a:r>
               <a:t>manual_placeholder_hidden: True</a:t>
             </a:r>
           </a:p>
@@ -5415,6 +6637,62 @@
           <a:p>
             <a:r>
               <a:t>  "prompt_if_ai_image": null</a:t>
+            </a:r>
+          </a:p>
+          <a:p>
+            <a:r>
+              <a:t>}</a:t>
+            </a:r>
+          </a:p>
+          <a:p/>
+          <a:p>
+            <a:r>
+              <a:t>proof_object:</a:t>
+            </a:r>
+          </a:p>
+          <a:p>
+            <a:r>
+              <a:t>{</a:t>
+            </a:r>
+          </a:p>
+          <a:p>
+            <a:r>
+              <a:t>  "type": "none",</a:t>
+            </a:r>
+          </a:p>
+          <a:p>
+            <a:r>
+              <a:t>  "required": false,</a:t>
+            </a:r>
+          </a:p>
+          <a:p>
+            <a:r>
+              <a:t>  "screen_position": "none",</a:t>
+            </a:r>
+          </a:p>
+          <a:p>
+            <a:r>
+              <a:t>  "display_label": "",</a:t>
+            </a:r>
+          </a:p>
+          <a:p>
+            <a:r>
+              <a:t>  "source_url": null,</a:t>
+            </a:r>
+          </a:p>
+          <a:p>
+            <a:r>
+              <a:t>  "image_url": null,</a:t>
+            </a:r>
+          </a:p>
+          <a:p>
+            <a:r>
+              <a:t>  "copyright_risk": false,</a:t>
+            </a:r>
+          </a:p>
+          <a:p>
+            <a:r>
+              <a:t>  "manual_insert_required": false</a:t>
             </a:r>
           </a:p>
           <a:p>
@@ -5551,6 +6829,21 @@
           </a:p>
           <a:p>
             <a:r>
+              <a:t>proof_object_type: none</a:t>
+            </a:r>
+          </a:p>
+          <a:p>
+            <a:r>
+              <a:t>proof_object_required: False</a:t>
+            </a:r>
+          </a:p>
+          <a:p>
+            <a:r>
+              <a:t>proof_object_screen_position: none</a:t>
+            </a:r>
+          </a:p>
+          <a:p>
+            <a:r>
               <a:t>manual_placeholder_hidden: True</a:t>
             </a:r>
           </a:p>
@@ -5666,6 +6959,62 @@
           <a:p>
             <a:r>
               <a:t>  "prompt_if_ai_image": null</a:t>
+            </a:r>
+          </a:p>
+          <a:p>
+            <a:r>
+              <a:t>}</a:t>
+            </a:r>
+          </a:p>
+          <a:p/>
+          <a:p>
+            <a:r>
+              <a:t>proof_object:</a:t>
+            </a:r>
+          </a:p>
+          <a:p>
+            <a:r>
+              <a:t>{</a:t>
+            </a:r>
+          </a:p>
+          <a:p>
+            <a:r>
+              <a:t>  "type": "none",</a:t>
+            </a:r>
+          </a:p>
+          <a:p>
+            <a:r>
+              <a:t>  "required": false,</a:t>
+            </a:r>
+          </a:p>
+          <a:p>
+            <a:r>
+              <a:t>  "screen_position": "none",</a:t>
+            </a:r>
+          </a:p>
+          <a:p>
+            <a:r>
+              <a:t>  "display_label": "",</a:t>
+            </a:r>
+          </a:p>
+          <a:p>
+            <a:r>
+              <a:t>  "source_url": null,</a:t>
+            </a:r>
+          </a:p>
+          <a:p>
+            <a:r>
+              <a:t>  "image_url": null,</a:t>
+            </a:r>
+          </a:p>
+          <a:p>
+            <a:r>
+              <a:t>  "copyright_risk": false,</a:t>
+            </a:r>
+          </a:p>
+          <a:p>
+            <a:r>
+              <a:t>  "manual_insert_required": false</a:t>
             </a:r>
           </a:p>
           <a:p>
@@ -5802,6 +7151,21 @@
           </a:p>
           <a:p>
             <a:r>
+              <a:t>proof_object_type: article_quote</a:t>
+            </a:r>
+          </a:p>
+          <a:p>
+            <a:r>
+              <a:t>proof_object_required: True</a:t>
+            </a:r>
+          </a:p>
+          <a:p>
+            <a:r>
+              <a:t>proof_object_screen_position: left_half</a:t>
+            </a:r>
+          </a:p>
+          <a:p>
+            <a:r>
               <a:t>manual_placeholder_hidden: True</a:t>
             </a:r>
           </a:p>
@@ -5927,6 +7291,62 @@
           <a:p>
             <a:r>
               <a:t>  "prompt_if_ai_image": null</a:t>
+            </a:r>
+          </a:p>
+          <a:p>
+            <a:r>
+              <a:t>}</a:t>
+            </a:r>
+          </a:p>
+          <a:p/>
+          <a:p>
+            <a:r>
+              <a:t>proof_object:</a:t>
+            </a:r>
+          </a:p>
+          <a:p>
+            <a:r>
+              <a:t>{</a:t>
+            </a:r>
+          </a:p>
+          <a:p>
+            <a:r>
+              <a:t>  "type": "article_quote",</a:t>
+            </a:r>
+          </a:p>
+          <a:p>
+            <a:r>
+              <a:t>  "required": true,</a:t>
+            </a:r>
+          </a:p>
+          <a:p>
+            <a:r>
+              <a:t>  "screen_position": "left_half",</a:t>
+            </a:r>
+          </a:p>
+          <a:p>
+            <a:r>
+              <a:t>  "display_label": "[기사 인용]",</a:t>
+            </a:r>
+          </a:p>
+          <a:p>
+            <a:r>
+              <a:t>  "source_url": "https://www.bbc.com/news/articles/c2023l60370o?at_medium=RSS&amp;at_campaign=rss",</a:t>
+            </a:r>
+          </a:p>
+          <a:p>
+            <a:r>
+              <a:t>  "image_url": null,</a:t>
+            </a:r>
+          </a:p>
+          <a:p>
+            <a:r>
+              <a:t>  "copyright_risk": false,</a:t>
+            </a:r>
+          </a:p>
+          <a:p>
+            <a:r>
+              <a:t>  "manual_insert_required": true</a:t>
             </a:r>
           </a:p>
           <a:p>
@@ -6073,6 +7493,21 @@
           </a:p>
           <a:p>
             <a:r>
+              <a:t>proof_object_type: none</a:t>
+            </a:r>
+          </a:p>
+          <a:p>
+            <a:r>
+              <a:t>proof_object_required: False</a:t>
+            </a:r>
+          </a:p>
+          <a:p>
+            <a:r>
+              <a:t>proof_object_screen_position: none</a:t>
+            </a:r>
+          </a:p>
+          <a:p>
+            <a:r>
               <a:t>manual_placeholder_hidden: True</a:t>
             </a:r>
           </a:p>
@@ -6203,6 +7638,62 @@
           <a:p>
             <a:r>
               <a:t>  "prompt_if_ai_image": null</a:t>
+            </a:r>
+          </a:p>
+          <a:p>
+            <a:r>
+              <a:t>}</a:t>
+            </a:r>
+          </a:p>
+          <a:p/>
+          <a:p>
+            <a:r>
+              <a:t>proof_object:</a:t>
+            </a:r>
+          </a:p>
+          <a:p>
+            <a:r>
+              <a:t>{</a:t>
+            </a:r>
+          </a:p>
+          <a:p>
+            <a:r>
+              <a:t>  "type": "none",</a:t>
+            </a:r>
+          </a:p>
+          <a:p>
+            <a:r>
+              <a:t>  "required": false,</a:t>
+            </a:r>
+          </a:p>
+          <a:p>
+            <a:r>
+              <a:t>  "screen_position": "none",</a:t>
+            </a:r>
+          </a:p>
+          <a:p>
+            <a:r>
+              <a:t>  "display_label": "",</a:t>
+            </a:r>
+          </a:p>
+          <a:p>
+            <a:r>
+              <a:t>  "source_url": "https://www.bbc.com/news/articles/c2023l60370o?at_medium=RSS&amp;at_campaign=rss",</a:t>
+            </a:r>
+          </a:p>
+          <a:p>
+            <a:r>
+              <a:t>  "image_url": null,</a:t>
+            </a:r>
+          </a:p>
+          <a:p>
+            <a:r>
+              <a:t>  "copyright_risk": false,</a:t>
+            </a:r>
+          </a:p>
+          <a:p>
+            <a:r>
+              <a:t>  "manual_insert_required": false</a:t>
             </a:r>
           </a:p>
           <a:p>
@@ -6354,6 +7845,21 @@
           </a:p>
           <a:p>
             <a:r>
+              <a:t>proof_object_type: diagram</a:t>
+            </a:r>
+          </a:p>
+          <a:p>
+            <a:r>
+              <a:t>proof_object_required: True</a:t>
+            </a:r>
+          </a:p>
+          <a:p>
+            <a:r>
+              <a:t>proof_object_screen_position: left_half</a:t>
+            </a:r>
+          </a:p>
+          <a:p>
+            <a:r>
               <a:t>manual_placeholder_hidden: False</a:t>
             </a:r>
           </a:p>
@@ -6484,6 +7990,62 @@
           <a:p>
             <a:r>
               <a:t>  "prompt_if_ai_image": null</a:t>
+            </a:r>
+          </a:p>
+          <a:p>
+            <a:r>
+              <a:t>}</a:t>
+            </a:r>
+          </a:p>
+          <a:p/>
+          <a:p>
+            <a:r>
+              <a:t>proof_object:</a:t>
+            </a:r>
+          </a:p>
+          <a:p>
+            <a:r>
+              <a:t>{</a:t>
+            </a:r>
+          </a:p>
+          <a:p>
+            <a:r>
+              <a:t>  "type": "diagram",</a:t>
+            </a:r>
+          </a:p>
+          <a:p>
+            <a:r>
+              <a:t>  "required": true,</a:t>
+            </a:r>
+          </a:p>
+          <a:p>
+            <a:r>
+              <a:t>  "screen_position": "left_half",</a:t>
+            </a:r>
+          </a:p>
+          <a:p>
+            <a:r>
+              <a:t>  "display_label": "[도식]",</a:t>
+            </a:r>
+          </a:p>
+          <a:p>
+            <a:r>
+              <a:t>  "source_url": "https://www.unesco.org/en/articles/ai-competency-framework-students",</a:t>
+            </a:r>
+          </a:p>
+          <a:p>
+            <a:r>
+              <a:t>  "image_url": null,</a:t>
+            </a:r>
+          </a:p>
+          <a:p>
+            <a:r>
+              <a:t>  "copyright_risk": false,</a:t>
+            </a:r>
+          </a:p>
+          <a:p>
+            <a:r>
+              <a:t>  "manual_insert_required": true</a:t>
             </a:r>
           </a:p>
           <a:p>
@@ -6635,6 +8197,21 @@
           </a:p>
           <a:p>
             <a:r>
+              <a:t>proof_object_type: none</a:t>
+            </a:r>
+          </a:p>
+          <a:p>
+            <a:r>
+              <a:t>proof_object_required: False</a:t>
+            </a:r>
+          </a:p>
+          <a:p>
+            <a:r>
+              <a:t>proof_object_screen_position: none</a:t>
+            </a:r>
+          </a:p>
+          <a:p>
+            <a:r>
               <a:t>manual_placeholder_hidden: True</a:t>
             </a:r>
           </a:p>
@@ -6755,6 +8332,62 @@
           <a:p>
             <a:r>
               <a:t>  "prompt_if_ai_image": null</a:t>
+            </a:r>
+          </a:p>
+          <a:p>
+            <a:r>
+              <a:t>}</a:t>
+            </a:r>
+          </a:p>
+          <a:p/>
+          <a:p>
+            <a:r>
+              <a:t>proof_object:</a:t>
+            </a:r>
+          </a:p>
+          <a:p>
+            <a:r>
+              <a:t>{</a:t>
+            </a:r>
+          </a:p>
+          <a:p>
+            <a:r>
+              <a:t>  "type": "none",</a:t>
+            </a:r>
+          </a:p>
+          <a:p>
+            <a:r>
+              <a:t>  "required": false,</a:t>
+            </a:r>
+          </a:p>
+          <a:p>
+            <a:r>
+              <a:t>  "screen_position": "none",</a:t>
+            </a:r>
+          </a:p>
+          <a:p>
+            <a:r>
+              <a:t>  "display_label": "",</a:t>
+            </a:r>
+          </a:p>
+          <a:p>
+            <a:r>
+              <a:t>  "source_url": null,</a:t>
+            </a:r>
+          </a:p>
+          <a:p>
+            <a:r>
+              <a:t>  "image_url": null,</a:t>
+            </a:r>
+          </a:p>
+          <a:p>
+            <a:r>
+              <a:t>  "copyright_risk": false,</a:t>
+            </a:r>
+          </a:p>
+          <a:p>
+            <a:r>
+              <a:t>  "manual_insert_required": false</a:t>
             </a:r>
           </a:p>
           <a:p>
@@ -6891,6 +8524,21 @@
           </a:p>
           <a:p>
             <a:r>
+              <a:t>proof_object_type: none</a:t>
+            </a:r>
+          </a:p>
+          <a:p>
+            <a:r>
+              <a:t>proof_object_required: False</a:t>
+            </a:r>
+          </a:p>
+          <a:p>
+            <a:r>
+              <a:t>proof_object_screen_position: none</a:t>
+            </a:r>
+          </a:p>
+          <a:p>
+            <a:r>
               <a:t>manual_placeholder_hidden: True</a:t>
             </a:r>
           </a:p>
@@ -7001,6 +8649,62 @@
           <a:p>
             <a:r>
               <a:t>  "prompt_if_ai_image": null</a:t>
+            </a:r>
+          </a:p>
+          <a:p>
+            <a:r>
+              <a:t>}</a:t>
+            </a:r>
+          </a:p>
+          <a:p/>
+          <a:p>
+            <a:r>
+              <a:t>proof_object:</a:t>
+            </a:r>
+          </a:p>
+          <a:p>
+            <a:r>
+              <a:t>{</a:t>
+            </a:r>
+          </a:p>
+          <a:p>
+            <a:r>
+              <a:t>  "type": "none",</a:t>
+            </a:r>
+          </a:p>
+          <a:p>
+            <a:r>
+              <a:t>  "required": false,</a:t>
+            </a:r>
+          </a:p>
+          <a:p>
+            <a:r>
+              <a:t>  "screen_position": "none",</a:t>
+            </a:r>
+          </a:p>
+          <a:p>
+            <a:r>
+              <a:t>  "display_label": "",</a:t>
+            </a:r>
+          </a:p>
+          <a:p>
+            <a:r>
+              <a:t>  "source_url": null,</a:t>
+            </a:r>
+          </a:p>
+          <a:p>
+            <a:r>
+              <a:t>  "image_url": null,</a:t>
+            </a:r>
+          </a:p>
+          <a:p>
+            <a:r>
+              <a:t>  "copyright_risk": false,</a:t>
+            </a:r>
+          </a:p>
+          <a:p>
+            <a:r>
+              <a:t>  "manual_insert_required": false</a:t>
             </a:r>
           </a:p>
           <a:p>
@@ -7137,6 +8841,21 @@
           </a:p>
           <a:p>
             <a:r>
+              <a:t>proof_object_type: none</a:t>
+            </a:r>
+          </a:p>
+          <a:p>
+            <a:r>
+              <a:t>proof_object_required: False</a:t>
+            </a:r>
+          </a:p>
+          <a:p>
+            <a:r>
+              <a:t>proof_object_screen_position: none</a:t>
+            </a:r>
+          </a:p>
+          <a:p>
+            <a:r>
               <a:t>manual_placeholder_hidden: True</a:t>
             </a:r>
           </a:p>
@@ -7262,6 +8981,62 @@
           <a:p>
             <a:r>
               <a:t>  "prompt_if_ai_image": null</a:t>
+            </a:r>
+          </a:p>
+          <a:p>
+            <a:r>
+              <a:t>}</a:t>
+            </a:r>
+          </a:p>
+          <a:p/>
+          <a:p>
+            <a:r>
+              <a:t>proof_object:</a:t>
+            </a:r>
+          </a:p>
+          <a:p>
+            <a:r>
+              <a:t>{</a:t>
+            </a:r>
+          </a:p>
+          <a:p>
+            <a:r>
+              <a:t>  "type": "none",</a:t>
+            </a:r>
+          </a:p>
+          <a:p>
+            <a:r>
+              <a:t>  "required": false,</a:t>
+            </a:r>
+          </a:p>
+          <a:p>
+            <a:r>
+              <a:t>  "screen_position": "none",</a:t>
+            </a:r>
+          </a:p>
+          <a:p>
+            <a:r>
+              <a:t>  "display_label": "",</a:t>
+            </a:r>
+          </a:p>
+          <a:p>
+            <a:r>
+              <a:t>  "source_url": "https://www.microsoft.com/en-us/research/publication/from-searchable-to-non-searchable-generative-ai-and-information-diversity-in-online-information-seeking/",</a:t>
+            </a:r>
+          </a:p>
+          <a:p>
+            <a:r>
+              <a:t>  "image_url": null,</a:t>
+            </a:r>
+          </a:p>
+          <a:p>
+            <a:r>
+              <a:t>  "copyright_risk": false,</a:t>
+            </a:r>
+          </a:p>
+          <a:p>
+            <a:r>
+              <a:t>  "manual_insert_required": false</a:t>
             </a:r>
           </a:p>
           <a:p>
@@ -7408,6 +9183,21 @@
           </a:p>
           <a:p>
             <a:r>
+              <a:t>proof_object_type: diagram</a:t>
+            </a:r>
+          </a:p>
+          <a:p>
+            <a:r>
+              <a:t>proof_object_required: True</a:t>
+            </a:r>
+          </a:p>
+          <a:p>
+            <a:r>
+              <a:t>proof_object_screen_position: left_half</a:t>
+            </a:r>
+          </a:p>
+          <a:p>
+            <a:r>
               <a:t>manual_placeholder_hidden: False</a:t>
             </a:r>
           </a:p>
@@ -7538,6 +9328,62 @@
           <a:p>
             <a:r>
               <a:t>  "prompt_if_ai_image": null</a:t>
+            </a:r>
+          </a:p>
+          <a:p>
+            <a:r>
+              <a:t>}</a:t>
+            </a:r>
+          </a:p>
+          <a:p/>
+          <a:p>
+            <a:r>
+              <a:t>proof_object:</a:t>
+            </a:r>
+          </a:p>
+          <a:p>
+            <a:r>
+              <a:t>{</a:t>
+            </a:r>
+          </a:p>
+          <a:p>
+            <a:r>
+              <a:t>  "type": "diagram",</a:t>
+            </a:r>
+          </a:p>
+          <a:p>
+            <a:r>
+              <a:t>  "required": true,</a:t>
+            </a:r>
+          </a:p>
+          <a:p>
+            <a:r>
+              <a:t>  "screen_position": "left_half",</a:t>
+            </a:r>
+          </a:p>
+          <a:p>
+            <a:r>
+              <a:t>  "display_label": "[도식]",</a:t>
+            </a:r>
+          </a:p>
+          <a:p>
+            <a:r>
+              <a:t>  "source_url": "https://www.microsoft.com/en-us/research/publication/from-searchable-to-non-searchable-generative-ai-and-information-diversity-in-online-information-seeking/",</a:t>
+            </a:r>
+          </a:p>
+          <a:p>
+            <a:r>
+              <a:t>  "image_url": null,</a:t>
+            </a:r>
+          </a:p>
+          <a:p>
+            <a:r>
+              <a:t>  "copyright_risk": false,</a:t>
+            </a:r>
+          </a:p>
+          <a:p>
+            <a:r>
+              <a:t>  "manual_insert_required": true</a:t>
             </a:r>
           </a:p>
           <a:p>
@@ -10787,8 +12633,62 @@
         </p:nvSpPr>
         <p:spPr>
           <a:xfrm>
-            <a:off x="572414" y="757123"/>
-            <a:ext cx="7843723" cy="3108960"/>
+            <a:off x="685800" y="1508760"/>
+            <a:ext cx="4800600" cy="3794760"/>
+          </a:xfrm>
+          <a:prstGeom prst="rect">
+            <a:avLst/>
+          </a:prstGeom>
+          <a:solidFill>
+            <a:srgbClr val="F5F5F5"/>
+          </a:solidFill>
+          <a:ln w="12700">
+            <a:solidFill>
+              <a:srgbClr val="BEBEBE"/>
+            </a:solidFill>
+          </a:ln>
+        </p:spPr>
+        <p:style>
+          <a:lnRef idx="1">
+            <a:schemeClr val="accent1"/>
+          </a:lnRef>
+          <a:fillRef idx="3">
+            <a:schemeClr val="accent1"/>
+          </a:fillRef>
+          <a:effectRef idx="2">
+            <a:schemeClr val="accent1"/>
+          </a:effectRef>
+          <a:fontRef idx="minor">
+            <a:schemeClr val="lt1"/>
+          </a:fontRef>
+        </p:style>
+        <p:txBody>
+          <a:bodyPr rtlCol="0" anchor="ctr" wrap="square"/>
+          <a:lstStyle/>
+          <a:p>
+            <a:pPr algn="ctr"/>
+            <a:r>
+              <a:rPr sz="1300">
+                <a:solidFill>
+                  <a:srgbClr val="566070"/>
+                </a:solidFill>
+                <a:latin typeface="맑은 고딕"/>
+              </a:rPr>
+              <a:t>[기사 인용]</a:t>
+            </a:r>
+          </a:p>
+        </p:txBody>
+      </p:sp>
+      <p:sp>
+        <p:nvSpPr>
+          <p:cNvPr id="3" name="Rectangle 2"/>
+          <p:cNvSpPr/>
+          <p:nvPr/>
+        </p:nvSpPr>
+        <p:spPr>
+          <a:xfrm>
+            <a:off x="5806440" y="731520"/>
+            <a:ext cx="6126479" cy="6446520"/>
           </a:xfrm>
           <a:prstGeom prst="rect">
             <a:avLst/>
@@ -10826,7 +12726,7 @@
       </p:sp>
       <p:sp>
         <p:nvSpPr>
-          <p:cNvPr id="3" name="TextBox 2"/>
+          <p:cNvPr id="4" name="TextBox 3"/>
           <p:cNvSpPr txBox="1"/>
           <p:nvPr/>
         </p:nvSpPr>
@@ -10860,14 +12760,49 @@
       </p:sp>
       <p:sp>
         <p:nvSpPr>
-          <p:cNvPr id="4" name="TextBox 3"/>
+          <p:cNvPr id="5" name="TextBox 4"/>
           <p:cNvSpPr txBox="1"/>
           <p:nvPr/>
         </p:nvSpPr>
         <p:spPr>
           <a:xfrm>
-            <a:off x="572414" y="1874519"/>
-            <a:ext cx="7295083" cy="2468880"/>
+            <a:off x="8321040" y="621792"/>
+            <a:ext cx="2971800" cy="292608"/>
+          </a:xfrm>
+          <a:prstGeom prst="rect">
+            <a:avLst/>
+          </a:prstGeom>
+          <a:noFill/>
+        </p:spPr>
+        <p:txBody>
+          <a:bodyPr wrap="square">
+            <a:spAutoFit/>
+          </a:bodyPr>
+          <a:lstStyle/>
+          <a:p>
+            <a:pPr algn="r"/>
+            <a:r>
+              <a:rPr sz="1600" b="1" u="none">
+                <a:solidFill>
+                  <a:srgbClr val="000000"/>
+                </a:solidFill>
+                <a:latin typeface="맑은 고딕"/>
+              </a:rPr>
+              <a:t>www.bbc.com</a:t>
+            </a:r>
+          </a:p>
+        </p:txBody>
+      </p:sp>
+      <p:sp>
+        <p:nvSpPr>
+          <p:cNvPr id="6" name="TextBox 5"/>
+          <p:cNvSpPr txBox="1"/>
+          <p:nvPr/>
+        </p:nvSpPr>
+        <p:spPr>
+          <a:xfrm>
+            <a:off x="5806440" y="1965960"/>
+            <a:ext cx="5577840" cy="2468880"/>
           </a:xfrm>
           <a:prstGeom prst="rect">
             <a:avLst/>
@@ -11805,14 +13740,68 @@
       </p:sp>
       <p:sp>
         <p:nvSpPr>
-          <p:cNvPr id="3" name="TextBox 2"/>
+          <p:cNvPr id="3" name="Rectangle 2"/>
+          <p:cNvSpPr/>
+          <p:nvPr/>
+        </p:nvSpPr>
+        <p:spPr>
+          <a:xfrm>
+            <a:off x="713232" y="1417320"/>
+            <a:ext cx="4892040" cy="4114800"/>
+          </a:xfrm>
+          <a:prstGeom prst="rect">
+            <a:avLst/>
+          </a:prstGeom>
+          <a:solidFill>
+            <a:srgbClr val="F5F5F5"/>
+          </a:solidFill>
+          <a:ln w="12700">
+            <a:solidFill>
+              <a:srgbClr val="BEBEBE"/>
+            </a:solidFill>
+          </a:ln>
+        </p:spPr>
+        <p:style>
+          <a:lnRef idx="1">
+            <a:schemeClr val="accent1"/>
+          </a:lnRef>
+          <a:fillRef idx="3">
+            <a:schemeClr val="accent1"/>
+          </a:fillRef>
+          <a:effectRef idx="2">
+            <a:schemeClr val="accent1"/>
+          </a:effectRef>
+          <a:fontRef idx="minor">
+            <a:schemeClr val="lt1"/>
+          </a:fontRef>
+        </p:style>
+        <p:txBody>
+          <a:bodyPr rtlCol="0" anchor="ctr" wrap="square"/>
+          <a:lstStyle/>
+          <a:p>
+            <a:pPr algn="ctr"/>
+            <a:r>
+              <a:rPr sz="1300">
+                <a:solidFill>
+                  <a:srgbClr val="566070"/>
+                </a:solidFill>
+                <a:latin typeface="맑은 고딕"/>
+              </a:rPr>
+              <a:t>[도식]</a:t>
+            </a:r>
+          </a:p>
+        </p:txBody>
+      </p:sp>
+      <p:sp>
+        <p:nvSpPr>
+          <p:cNvPr id="4" name="TextBox 3"/>
           <p:cNvSpPr txBox="1"/>
           <p:nvPr/>
         </p:nvSpPr>
         <p:spPr>
           <a:xfrm>
-            <a:off x="713232" y="2103120"/>
-            <a:ext cx="10652760" cy="2926080"/>
+            <a:off x="5989320" y="2103120"/>
+            <a:ext cx="5303520" cy="2926080"/>
           </a:xfrm>
           <a:prstGeom prst="rect">
             <a:avLst/>
@@ -11831,7 +13820,7 @@
               </a:spcAft>
             </a:pPr>
             <a:r>
-              <a:rPr sz="2800" b="0" u="none">
+              <a:rPr sz="2400" b="0" u="none">
                 <a:solidFill>
                   <a:srgbClr val="000000"/>
                 </a:solidFill>
@@ -11847,7 +13836,7 @@
               </a:spcAft>
             </a:pPr>
             <a:r>
-              <a:rPr sz="2800" b="0" u="none">
+              <a:rPr sz="2400" b="0" u="none">
                 <a:solidFill>
                   <a:srgbClr val="000000"/>
                 </a:solidFill>
@@ -11863,7 +13852,7 @@
               </a:spcAft>
             </a:pPr>
             <a:r>
-              <a:rPr sz="2800" b="0" u="none">
+              <a:rPr sz="2400" b="0" u="none">
                 <a:solidFill>
                   <a:srgbClr val="000000"/>
                 </a:solidFill>
@@ -12264,18 +14253,18 @@
         </p:nvSpPr>
         <p:spPr>
           <a:xfrm>
-            <a:off x="731520" y="1417320"/>
-            <a:ext cx="5257800" cy="4069080"/>
+            <a:off x="713232" y="1417320"/>
+            <a:ext cx="4892040" cy="4114800"/>
           </a:xfrm>
           <a:prstGeom prst="rect">
             <a:avLst/>
           </a:prstGeom>
           <a:solidFill>
-            <a:srgbClr val="FFFFFF"/>
+            <a:srgbClr val="F5F5F5"/>
           </a:solidFill>
           <a:ln w="12700">
             <a:solidFill>
-              <a:srgbClr val="D2D8E0"/>
+              <a:srgbClr val="BEBEBE"/>
             </a:solidFill>
           </a:ln>
         </p:spPr>
@@ -12294,68 +14283,32 @@
           </a:fontRef>
         </p:style>
         <p:txBody>
-          <a:bodyPr rtlCol="0" anchor="ctr"/>
+          <a:bodyPr rtlCol="0" anchor="ctr" wrap="square"/>
           <a:lstStyle/>
           <a:p>
             <a:pPr algn="ctr"/>
+            <a:r>
+              <a:rPr sz="1300">
+                <a:solidFill>
+                  <a:srgbClr val="566070"/>
+                </a:solidFill>
+                <a:latin typeface="맑은 고딕"/>
+              </a:rPr>
+              <a:t>[도식]</a:t>
+            </a:r>
           </a:p>
         </p:txBody>
       </p:sp>
       <p:sp>
         <p:nvSpPr>
-          <p:cNvPr id="4" name="Rectangle 3"/>
-          <p:cNvSpPr/>
+          <p:cNvPr id="4" name="TextBox 3"/>
+          <p:cNvSpPr txBox="1"/>
           <p:nvPr/>
         </p:nvSpPr>
         <p:spPr>
           <a:xfrm>
-            <a:off x="6172200" y="1417320"/>
-            <a:ext cx="5257800" cy="4069080"/>
-          </a:xfrm>
-          <a:prstGeom prst="rect">
-            <a:avLst/>
-          </a:prstGeom>
-          <a:solidFill>
-            <a:srgbClr val="EFF6F7"/>
-          </a:solidFill>
-          <a:ln w="12700">
-            <a:solidFill>
-              <a:srgbClr val="AACACE"/>
-            </a:solidFill>
-          </a:ln>
-        </p:spPr>
-        <p:style>
-          <a:lnRef idx="1">
-            <a:schemeClr val="accent1"/>
-          </a:lnRef>
-          <a:fillRef idx="3">
-            <a:schemeClr val="accent1"/>
-          </a:fillRef>
-          <a:effectRef idx="2">
-            <a:schemeClr val="accent1"/>
-          </a:effectRef>
-          <a:fontRef idx="minor">
-            <a:schemeClr val="lt1"/>
-          </a:fontRef>
-        </p:style>
-        <p:txBody>
-          <a:bodyPr rtlCol="0" anchor="ctr"/>
-          <a:lstStyle/>
-          <a:p>
-            <a:pPr algn="ctr"/>
-          </a:p>
-        </p:txBody>
-      </p:sp>
-      <p:sp>
-        <p:nvSpPr>
-          <p:cNvPr id="5" name="TextBox 4"/>
-          <p:cNvSpPr txBox="1"/>
-          <p:nvPr/>
-        </p:nvSpPr>
-        <p:spPr>
-          <a:xfrm>
-            <a:off x="960120" y="1691640"/>
-            <a:ext cx="4800600" cy="3383280"/>
+            <a:off x="5989320" y="1508760"/>
+            <a:ext cx="5303520" cy="3337560"/>
           </a:xfrm>
           <a:prstGeom prst="rect">
             <a:avLst/>
@@ -12374,7 +14327,7 @@
               </a:spcAft>
             </a:pPr>
             <a:r>
-              <a:rPr sz="2800" b="0" u="none">
+              <a:rPr sz="2400" b="0" u="none">
                 <a:solidFill>
                   <a:srgbClr val="000000"/>
                 </a:solidFill>
@@ -12390,7 +14343,7 @@
               </a:spcAft>
             </a:pPr>
             <a:r>
-              <a:rPr sz="2800" b="0" u="none">
+              <a:rPr sz="2400" b="0" u="none">
                 <a:solidFill>
                   <a:srgbClr val="000000"/>
                 </a:solidFill>
@@ -12399,29 +14352,6 @@
               <a:t>반대로 AI는 학습 접근성과 개인화 가능성을 높일 수 있다는 주장도 있다</a:t>
             </a:r>
           </a:p>
-        </p:txBody>
-      </p:sp>
-      <p:sp>
-        <p:nvSpPr>
-          <p:cNvPr id="6" name="TextBox 5"/>
-          <p:cNvSpPr txBox="1"/>
-          <p:nvPr/>
-        </p:nvSpPr>
-        <p:spPr>
-          <a:xfrm>
-            <a:off x="6400800" y="1691640"/>
-            <a:ext cx="4800600" cy="3383280"/>
-          </a:xfrm>
-          <a:prstGeom prst="rect">
-            <a:avLst/>
-          </a:prstGeom>
-          <a:noFill/>
-        </p:spPr>
-        <p:txBody>
-          <a:bodyPr wrap="square">
-            <a:spAutoFit/>
-          </a:bodyPr>
-          <a:lstStyle/>
           <a:p>
             <a:pPr>
               <a:spcAft>
@@ -12429,7 +14359,7 @@
               </a:spcAft>
             </a:pPr>
             <a:r>
-              <a:rPr sz="2800" b="0" u="none">
+              <a:rPr sz="2400" b="0" u="none">
                 <a:solidFill>
                   <a:srgbClr val="000000"/>
                 </a:solidFill>
@@ -12633,14 +14563,68 @@
       </p:sp>
       <p:sp>
         <p:nvSpPr>
-          <p:cNvPr id="3" name="TextBox 2"/>
+          <p:cNvPr id="3" name="Rectangle 2"/>
+          <p:cNvSpPr/>
+          <p:nvPr/>
+        </p:nvSpPr>
+        <p:spPr>
+          <a:xfrm>
+            <a:off x="713232" y="1417320"/>
+            <a:ext cx="4892040" cy="4114800"/>
+          </a:xfrm>
+          <a:prstGeom prst="rect">
+            <a:avLst/>
+          </a:prstGeom>
+          <a:solidFill>
+            <a:srgbClr val="F5F5F5"/>
+          </a:solidFill>
+          <a:ln w="12700">
+            <a:solidFill>
+              <a:srgbClr val="BEBEBE"/>
+            </a:solidFill>
+          </a:ln>
+        </p:spPr>
+        <p:style>
+          <a:lnRef idx="1">
+            <a:schemeClr val="accent1"/>
+          </a:lnRef>
+          <a:fillRef idx="3">
+            <a:schemeClr val="accent1"/>
+          </a:fillRef>
+          <a:effectRef idx="2">
+            <a:schemeClr val="accent1"/>
+          </a:effectRef>
+          <a:fontRef idx="minor">
+            <a:schemeClr val="lt1"/>
+          </a:fontRef>
+        </p:style>
+        <p:txBody>
+          <a:bodyPr rtlCol="0" anchor="ctr" wrap="square"/>
+          <a:lstStyle/>
+          <a:p>
+            <a:pPr algn="ctr"/>
+            <a:r>
+              <a:rPr sz="1300">
+                <a:solidFill>
+                  <a:srgbClr val="566070"/>
+                </a:solidFill>
+                <a:latin typeface="맑은 고딕"/>
+              </a:rPr>
+              <a:t>[도식]</a:t>
+            </a:r>
+          </a:p>
+        </p:txBody>
+      </p:sp>
+      <p:sp>
+        <p:nvSpPr>
+          <p:cNvPr id="4" name="TextBox 3"/>
           <p:cNvSpPr txBox="1"/>
           <p:nvPr/>
         </p:nvSpPr>
         <p:spPr>
           <a:xfrm>
-            <a:off x="713232" y="2103120"/>
-            <a:ext cx="10652760" cy="2926080"/>
+            <a:off x="5989320" y="2103120"/>
+            <a:ext cx="5303520" cy="2926080"/>
           </a:xfrm>
           <a:prstGeom prst="rect">
             <a:avLst/>
@@ -12659,7 +14643,7 @@
               </a:spcAft>
             </a:pPr>
             <a:r>
-              <a:rPr sz="2800" b="0" u="none">
+              <a:rPr sz="2400" b="0" u="none">
                 <a:solidFill>
                   <a:srgbClr val="000000"/>
                 </a:solidFill>
@@ -12675,7 +14659,7 @@
               </a:spcAft>
             </a:pPr>
             <a:r>
-              <a:rPr sz="2800" b="0" u="none">
+              <a:rPr sz="2400" b="0" u="none">
                 <a:solidFill>
                   <a:srgbClr val="000000"/>
                 </a:solidFill>
@@ -12691,7 +14675,7 @@
               </a:spcAft>
             </a:pPr>
             <a:r>
-              <a:rPr sz="2800" b="0" u="none">
+              <a:rPr sz="2400" b="0" u="none">
                 <a:solidFill>
                   <a:srgbClr val="000000"/>
                 </a:solidFill>
@@ -13113,8 +15097,62 @@
         </p:nvSpPr>
         <p:spPr>
           <a:xfrm>
-            <a:off x="572414" y="757123"/>
-            <a:ext cx="7843723" cy="3108960"/>
+            <a:off x="685800" y="1508760"/>
+            <a:ext cx="4800600" cy="3794760"/>
+          </a:xfrm>
+          <a:prstGeom prst="rect">
+            <a:avLst/>
+          </a:prstGeom>
+          <a:solidFill>
+            <a:srgbClr val="F5F5F5"/>
+          </a:solidFill>
+          <a:ln w="12700">
+            <a:solidFill>
+              <a:srgbClr val="BEBEBE"/>
+            </a:solidFill>
+          </a:ln>
+        </p:spPr>
+        <p:style>
+          <a:lnRef idx="1">
+            <a:schemeClr val="accent1"/>
+          </a:lnRef>
+          <a:fillRef idx="3">
+            <a:schemeClr val="accent1"/>
+          </a:fillRef>
+          <a:effectRef idx="2">
+            <a:schemeClr val="accent1"/>
+          </a:effectRef>
+          <a:fontRef idx="minor">
+            <a:schemeClr val="lt1"/>
+          </a:fontRef>
+        </p:style>
+        <p:txBody>
+          <a:bodyPr rtlCol="0" anchor="ctr" wrap="square"/>
+          <a:lstStyle/>
+          <a:p>
+            <a:pPr algn="ctr"/>
+            <a:r>
+              <a:rPr sz="1300">
+                <a:solidFill>
+                  <a:srgbClr val="566070"/>
+                </a:solidFill>
+                <a:latin typeface="맑은 고딕"/>
+              </a:rPr>
+              <a:t>[기사 인용]</a:t>
+            </a:r>
+          </a:p>
+        </p:txBody>
+      </p:sp>
+      <p:sp>
+        <p:nvSpPr>
+          <p:cNvPr id="3" name="Rectangle 2"/>
+          <p:cNvSpPr/>
+          <p:nvPr/>
+        </p:nvSpPr>
+        <p:spPr>
+          <a:xfrm>
+            <a:off x="5806440" y="731520"/>
+            <a:ext cx="6126479" cy="6446520"/>
           </a:xfrm>
           <a:prstGeom prst="rect">
             <a:avLst/>
@@ -13152,7 +15190,7 @@
       </p:sp>
       <p:sp>
         <p:nvSpPr>
-          <p:cNvPr id="3" name="TextBox 2"/>
+          <p:cNvPr id="4" name="TextBox 3"/>
           <p:cNvSpPr txBox="1"/>
           <p:nvPr/>
         </p:nvSpPr>
@@ -13186,14 +15224,49 @@
       </p:sp>
       <p:sp>
         <p:nvSpPr>
-          <p:cNvPr id="4" name="TextBox 3"/>
+          <p:cNvPr id="5" name="TextBox 4"/>
           <p:cNvSpPr txBox="1"/>
           <p:nvPr/>
         </p:nvSpPr>
         <p:spPr>
           <a:xfrm>
-            <a:off x="572414" y="1874519"/>
-            <a:ext cx="7295083" cy="2468880"/>
+            <a:off x="8321040" y="621792"/>
+            <a:ext cx="2971800" cy="292608"/>
+          </a:xfrm>
+          <a:prstGeom prst="rect">
+            <a:avLst/>
+          </a:prstGeom>
+          <a:noFill/>
+        </p:spPr>
+        <p:txBody>
+          <a:bodyPr wrap="square">
+            <a:spAutoFit/>
+          </a:bodyPr>
+          <a:lstStyle/>
+          <a:p>
+            <a:pPr algn="r"/>
+            <a:r>
+              <a:rPr sz="1600" b="1" u="none">
+                <a:solidFill>
+                  <a:srgbClr val="000000"/>
+                </a:solidFill>
+                <a:latin typeface="맑은 고딕"/>
+              </a:rPr>
+              <a:t>www.bbc.com</a:t>
+            </a:r>
+          </a:p>
+        </p:txBody>
+      </p:sp>
+      <p:sp>
+        <p:nvSpPr>
+          <p:cNvPr id="6" name="TextBox 5"/>
+          <p:cNvSpPr txBox="1"/>
+          <p:nvPr/>
+        </p:nvSpPr>
+        <p:spPr>
+          <a:xfrm>
+            <a:off x="5806440" y="1965960"/>
+            <a:ext cx="5577840" cy="2468880"/>
           </a:xfrm>
           <a:prstGeom prst="rect">
             <a:avLst/>
@@ -13448,14 +15521,68 @@
       </p:sp>
       <p:sp>
         <p:nvSpPr>
-          <p:cNvPr id="3" name="TextBox 2"/>
+          <p:cNvPr id="3" name="Rectangle 2"/>
+          <p:cNvSpPr/>
+          <p:nvPr/>
+        </p:nvSpPr>
+        <p:spPr>
+          <a:xfrm>
+            <a:off x="713232" y="1417320"/>
+            <a:ext cx="4892040" cy="4114800"/>
+          </a:xfrm>
+          <a:prstGeom prst="rect">
+            <a:avLst/>
+          </a:prstGeom>
+          <a:solidFill>
+            <a:srgbClr val="F5F5F5"/>
+          </a:solidFill>
+          <a:ln w="12700">
+            <a:solidFill>
+              <a:srgbClr val="BEBEBE"/>
+            </a:solidFill>
+          </a:ln>
+        </p:spPr>
+        <p:style>
+          <a:lnRef idx="1">
+            <a:schemeClr val="accent1"/>
+          </a:lnRef>
+          <a:fillRef idx="3">
+            <a:schemeClr val="accent1"/>
+          </a:fillRef>
+          <a:effectRef idx="2">
+            <a:schemeClr val="accent1"/>
+          </a:effectRef>
+          <a:fontRef idx="minor">
+            <a:schemeClr val="lt1"/>
+          </a:fontRef>
+        </p:style>
+        <p:txBody>
+          <a:bodyPr rtlCol="0" anchor="ctr" wrap="square"/>
+          <a:lstStyle/>
+          <a:p>
+            <a:pPr algn="ctr"/>
+            <a:r>
+              <a:rPr sz="1300">
+                <a:solidFill>
+                  <a:srgbClr val="566070"/>
+                </a:solidFill>
+                <a:latin typeface="맑은 고딕"/>
+              </a:rPr>
+              <a:t>[도식]</a:t>
+            </a:r>
+          </a:p>
+        </p:txBody>
+      </p:sp>
+      <p:sp>
+        <p:nvSpPr>
+          <p:cNvPr id="4" name="TextBox 3"/>
           <p:cNvSpPr txBox="1"/>
           <p:nvPr/>
         </p:nvSpPr>
         <p:spPr>
           <a:xfrm>
-            <a:off x="713232" y="2103120"/>
-            <a:ext cx="10652760" cy="2926080"/>
+            <a:off x="5989320" y="2103120"/>
+            <a:ext cx="5303520" cy="2926080"/>
           </a:xfrm>
           <a:prstGeom prst="rect">
             <a:avLst/>
@@ -13474,7 +15601,7 @@
               </a:spcAft>
             </a:pPr>
             <a:r>
-              <a:rPr sz="2800" b="0" u="none">
+              <a:rPr sz="2400" b="0" u="none">
                 <a:solidFill>
                   <a:srgbClr val="000000"/>
                 </a:solidFill>
@@ -13490,7 +15617,7 @@
               </a:spcAft>
             </a:pPr>
             <a:r>
-              <a:rPr sz="2800" b="0" u="none">
+              <a:rPr sz="2400" b="0" u="none">
                 <a:solidFill>
                   <a:srgbClr val="000000"/>
                 </a:solidFill>
@@ -13506,7 +15633,7 @@
               </a:spcAft>
             </a:pPr>
             <a:r>
-              <a:rPr sz="2800" b="0" u="none">
+              <a:rPr sz="2400" b="0" u="none">
                 <a:solidFill>
                   <a:srgbClr val="000000"/>
                 </a:solidFill>
@@ -13907,18 +16034,18 @@
         </p:nvSpPr>
         <p:spPr>
           <a:xfrm>
-            <a:off x="731520" y="1417320"/>
-            <a:ext cx="5257800" cy="4069080"/>
+            <a:off x="713232" y="1417320"/>
+            <a:ext cx="4892040" cy="4114800"/>
           </a:xfrm>
           <a:prstGeom prst="rect">
             <a:avLst/>
           </a:prstGeom>
           <a:solidFill>
-            <a:srgbClr val="FFFFFF"/>
+            <a:srgbClr val="F5F5F5"/>
           </a:solidFill>
           <a:ln w="12700">
             <a:solidFill>
-              <a:srgbClr val="D2D8E0"/>
+              <a:srgbClr val="BEBEBE"/>
             </a:solidFill>
           </a:ln>
         </p:spPr>
@@ -13937,68 +16064,32 @@
           </a:fontRef>
         </p:style>
         <p:txBody>
-          <a:bodyPr rtlCol="0" anchor="ctr"/>
+          <a:bodyPr rtlCol="0" anchor="ctr" wrap="square"/>
           <a:lstStyle/>
           <a:p>
             <a:pPr algn="ctr"/>
+            <a:r>
+              <a:rPr sz="1300">
+                <a:solidFill>
+                  <a:srgbClr val="566070"/>
+                </a:solidFill>
+                <a:latin typeface="맑은 고딕"/>
+              </a:rPr>
+              <a:t>[도식]</a:t>
+            </a:r>
           </a:p>
         </p:txBody>
       </p:sp>
       <p:sp>
         <p:nvSpPr>
-          <p:cNvPr id="4" name="Rectangle 3"/>
-          <p:cNvSpPr/>
+          <p:cNvPr id="4" name="TextBox 3"/>
+          <p:cNvSpPr txBox="1"/>
           <p:nvPr/>
         </p:nvSpPr>
         <p:spPr>
           <a:xfrm>
-            <a:off x="6172200" y="1417320"/>
-            <a:ext cx="5257800" cy="4069080"/>
-          </a:xfrm>
-          <a:prstGeom prst="rect">
-            <a:avLst/>
-          </a:prstGeom>
-          <a:solidFill>
-            <a:srgbClr val="EFF6F7"/>
-          </a:solidFill>
-          <a:ln w="12700">
-            <a:solidFill>
-              <a:srgbClr val="AACACE"/>
-            </a:solidFill>
-          </a:ln>
-        </p:spPr>
-        <p:style>
-          <a:lnRef idx="1">
-            <a:schemeClr val="accent1"/>
-          </a:lnRef>
-          <a:fillRef idx="3">
-            <a:schemeClr val="accent1"/>
-          </a:fillRef>
-          <a:effectRef idx="2">
-            <a:schemeClr val="accent1"/>
-          </a:effectRef>
-          <a:fontRef idx="minor">
-            <a:schemeClr val="lt1"/>
-          </a:fontRef>
-        </p:style>
-        <p:txBody>
-          <a:bodyPr rtlCol="0" anchor="ctr"/>
-          <a:lstStyle/>
-          <a:p>
-            <a:pPr algn="ctr"/>
-          </a:p>
-        </p:txBody>
-      </p:sp>
-      <p:sp>
-        <p:nvSpPr>
-          <p:cNvPr id="5" name="TextBox 4"/>
-          <p:cNvSpPr txBox="1"/>
-          <p:nvPr/>
-        </p:nvSpPr>
-        <p:spPr>
-          <a:xfrm>
-            <a:off x="960120" y="1691640"/>
-            <a:ext cx="4800600" cy="3383280"/>
+            <a:off x="5989320" y="1508760"/>
+            <a:ext cx="5303520" cy="3337560"/>
           </a:xfrm>
           <a:prstGeom prst="rect">
             <a:avLst/>
@@ -14017,7 +16108,7 @@
               </a:spcAft>
             </a:pPr>
             <a:r>
-              <a:rPr sz="2800" b="0" u="none">
+              <a:rPr sz="2400" b="0" u="none">
                 <a:solidFill>
                   <a:srgbClr val="000000"/>
                 </a:solidFill>
@@ -14033,7 +16124,7 @@
               </a:spcAft>
             </a:pPr>
             <a:r>
-              <a:rPr sz="2800" b="0" u="none">
+              <a:rPr sz="2400" b="0" u="none">
                 <a:solidFill>
                   <a:srgbClr val="000000"/>
                 </a:solidFill>
@@ -14042,29 +16133,6 @@
               <a:t>걱정되는 점: 비교·검증·실패의 경험이 줄어들 가능성이 있다</a:t>
             </a:r>
           </a:p>
-        </p:txBody>
-      </p:sp>
-      <p:sp>
-        <p:nvSpPr>
-          <p:cNvPr id="6" name="TextBox 5"/>
-          <p:cNvSpPr txBox="1"/>
-          <p:nvPr/>
-        </p:nvSpPr>
-        <p:spPr>
-          <a:xfrm>
-            <a:off x="6400800" y="1691640"/>
-            <a:ext cx="4800600" cy="3383280"/>
-          </a:xfrm>
-          <a:prstGeom prst="rect">
-            <a:avLst/>
-          </a:prstGeom>
-          <a:noFill/>
-        </p:spPr>
-        <p:txBody>
-          <a:bodyPr wrap="square">
-            <a:spAutoFit/>
-          </a:bodyPr>
-          <a:lstStyle/>
           <a:p>
             <a:pPr>
               <a:spcAft>
@@ -14072,7 +16140,7 @@
               </a:spcAft>
             </a:pPr>
             <a:r>
-              <a:rPr sz="2800" b="0" u="none">
+              <a:rPr sz="2400" b="0" u="none">
                 <a:solidFill>
                   <a:srgbClr val="000000"/>
                 </a:solidFill>

--- a/outputs/pptx/ai_knowledge_institution_styled_draft.pptx
+++ b/outputs/pptx/ai_knowledge_institution_styled_draft.pptx
@@ -894,17 +894,17 @@
           </a:p>
           <a:p>
             <a:r>
-              <a:t>proof_object_type: none</a:t>
-            </a:r>
-          </a:p>
-          <a:p>
-            <a:r>
-              <a:t>proof_object_required: False</a:t>
-            </a:r>
-          </a:p>
-          <a:p>
-            <a:r>
-              <a:t>proof_object_screen_position: none</a:t>
+              <a:t>proof_object_type: article_quote</a:t>
+            </a:r>
+          </a:p>
+          <a:p>
+            <a:r>
+              <a:t>proof_object_required: True</a:t>
+            </a:r>
+          </a:p>
+          <a:p>
+            <a:r>
+              <a:t>proof_object_screen_position: left_half</a:t>
             </a:r>
           </a:p>
           <a:p>
@@ -930,7 +930,22 @@
           </a:p>
           <a:p>
             <a:r>
-              <a:t>  "AI 역량 교육은 답을 받는 법보다 질문하고 평가하고 책임 있게 쓰는 법으로 확장될 필요가 있다",</a:t>
+              <a:t>  "AI 역량 교육은 답을 받는 법보다 질문하고 평가하고 책임 있게 쓰는 법으로 확장될 필요가 있다"</a:t>
+            </a:r>
+          </a:p>
+          <a:p>
+            <a:r>
+              <a:t>]</a:t>
+            </a:r>
+          </a:p>
+          <a:p>
+            <a:r>
+              <a:t>overflow_body_lines:</a:t>
+            </a:r>
+          </a:p>
+          <a:p>
+            <a:r>
+              <a:t>[</a:t>
             </a:r>
           </a:p>
           <a:p>
@@ -943,16 +958,6 @@
               <a:t>]</a:t>
             </a:r>
           </a:p>
-          <a:p>
-            <a:r>
-              <a:t>overflow_body_lines:</a:t>
-            </a:r>
-          </a:p>
-          <a:p>
-            <a:r>
-              <a:t>[]</a:t>
-            </a:r>
-          </a:p>
           <a:p/>
           <a:p>
             <a:r>
@@ -1059,22 +1064,22 @@
           </a:p>
           <a:p>
             <a:r>
-              <a:t>  "type": "none",</a:t>
-            </a:r>
-          </a:p>
-          <a:p>
-            <a:r>
-              <a:t>  "required": false,</a:t>
-            </a:r>
-          </a:p>
-          <a:p>
-            <a:r>
-              <a:t>  "screen_position": "none",</a:t>
-            </a:r>
-          </a:p>
-          <a:p>
-            <a:r>
-              <a:t>  "display_label": "",</a:t>
+              <a:t>  "type": "article_quote",</a:t>
+            </a:r>
+          </a:p>
+          <a:p>
+            <a:r>
+              <a:t>  "required": true,</a:t>
+            </a:r>
+          </a:p>
+          <a:p>
+            <a:r>
+              <a:t>  "screen_position": "left_half",</a:t>
+            </a:r>
+          </a:p>
+          <a:p>
+            <a:r>
+              <a:t>  "display_label": "[기사 인용]",</a:t>
             </a:r>
           </a:p>
           <a:p>
@@ -1094,7 +1099,7 @@
           </a:p>
           <a:p>
             <a:r>
-              <a:t>  "manual_insert_required": false</a:t>
+              <a:t>  "manual_insert_required": true</a:t>
             </a:r>
           </a:p>
           <a:p>
@@ -2232,17 +2237,17 @@
           </a:p>
           <a:p>
             <a:r>
-              <a:t>proof_object_type: none</a:t>
-            </a:r>
-          </a:p>
-          <a:p>
-            <a:r>
-              <a:t>proof_object_required: False</a:t>
-            </a:r>
-          </a:p>
-          <a:p>
-            <a:r>
-              <a:t>proof_object_screen_position: none</a:t>
+              <a:t>proof_object_type: article_quote</a:t>
+            </a:r>
+          </a:p>
+          <a:p>
+            <a:r>
+              <a:t>proof_object_required: True</a:t>
+            </a:r>
+          </a:p>
+          <a:p>
+            <a:r>
+              <a:t>proof_object_screen_position: left_half</a:t>
             </a:r>
           </a:p>
           <a:p>
@@ -2268,7 +2273,22 @@
           </a:p>
           <a:p>
             <a:r>
-              <a:t>  "OECD와 UNESCO 자료는 AI 교육을 교수 원칙과 학생 역량의 문제로 다룬다",</a:t>
+              <a:t>  "OECD와 UNESCO 자료는 AI 교육을 교수 원칙과 학생 역량의 문제로 다룬다"</a:t>
+            </a:r>
+          </a:p>
+          <a:p>
+            <a:r>
+              <a:t>]</a:t>
+            </a:r>
+          </a:p>
+          <a:p>
+            <a:r>
+              <a:t>overflow_body_lines:</a:t>
+            </a:r>
+          </a:p>
+          <a:p>
+            <a:r>
+              <a:t>[</a:t>
             </a:r>
           </a:p>
           <a:p>
@@ -2281,16 +2301,6 @@
               <a:t>]</a:t>
             </a:r>
           </a:p>
-          <a:p>
-            <a:r>
-              <a:t>overflow_body_lines:</a:t>
-            </a:r>
-          </a:p>
-          <a:p>
-            <a:r>
-              <a:t>[]</a:t>
-            </a:r>
-          </a:p>
           <a:p/>
           <a:p>
             <a:r>
@@ -2397,22 +2407,22 @@
           </a:p>
           <a:p>
             <a:r>
-              <a:t>  "type": "none",</a:t>
-            </a:r>
-          </a:p>
-          <a:p>
-            <a:r>
-              <a:t>  "required": false,</a:t>
-            </a:r>
-          </a:p>
-          <a:p>
-            <a:r>
-              <a:t>  "screen_position": "none",</a:t>
-            </a:r>
-          </a:p>
-          <a:p>
-            <a:r>
-              <a:t>  "display_label": "",</a:t>
+              <a:t>  "type": "article_quote",</a:t>
+            </a:r>
+          </a:p>
+          <a:p>
+            <a:r>
+              <a:t>  "required": true,</a:t>
+            </a:r>
+          </a:p>
+          <a:p>
+            <a:r>
+              <a:t>  "screen_position": "left_half",</a:t>
+            </a:r>
+          </a:p>
+          <a:p>
+            <a:r>
+              <a:t>  "display_label": "[기사 인용]",</a:t>
             </a:r>
           </a:p>
           <a:p>
@@ -2432,7 +2442,7 @@
           </a:p>
           <a:p>
             <a:r>
-              <a:t>  "manual_insert_required": false</a:t>
+              <a:t>  "manual_insert_required": true</a:t>
             </a:r>
           </a:p>
           <a:p>
@@ -2584,17 +2594,17 @@
           </a:p>
           <a:p>
             <a:r>
-              <a:t>proof_object_type: none</a:t>
-            </a:r>
-          </a:p>
-          <a:p>
-            <a:r>
-              <a:t>proof_object_required: False</a:t>
-            </a:r>
-          </a:p>
-          <a:p>
-            <a:r>
-              <a:t>proof_object_screen_position: none</a:t>
+              <a:t>proof_object_type: article_quote</a:t>
+            </a:r>
+          </a:p>
+          <a:p>
+            <a:r>
+              <a:t>proof_object_required: True</a:t>
+            </a:r>
+          </a:p>
+          <a:p>
+            <a:r>
+              <a:t>proof_object_screen_position: left_half</a:t>
             </a:r>
           </a:p>
           <a:p>
@@ -2620,7 +2630,22 @@
           </a:p>
           <a:p>
             <a:r>
-              <a:t>  "그렇다면 박물관·과학관은 맥락, 경험, 질문, 토론을 더 강조해야 할 수 있다",</a:t>
+              <a:t>  "그렇다면 박물관·과학관은 맥락, 경험, 질문, 토론을 더 강조해야 할 수 있다"</a:t>
+            </a:r>
+          </a:p>
+          <a:p>
+            <a:r>
+              <a:t>]</a:t>
+            </a:r>
+          </a:p>
+          <a:p>
+            <a:r>
+              <a:t>overflow_body_lines:</a:t>
+            </a:r>
+          </a:p>
+          <a:p>
+            <a:r>
+              <a:t>[</a:t>
             </a:r>
           </a:p>
           <a:p>
@@ -2633,16 +2658,6 @@
               <a:t>]</a:t>
             </a:r>
           </a:p>
-          <a:p>
-            <a:r>
-              <a:t>overflow_body_lines:</a:t>
-            </a:r>
-          </a:p>
-          <a:p>
-            <a:r>
-              <a:t>[]</a:t>
-            </a:r>
-          </a:p>
           <a:p/>
           <a:p>
             <a:r>
@@ -2749,22 +2764,22 @@
           </a:p>
           <a:p>
             <a:r>
-              <a:t>  "type": "none",</a:t>
-            </a:r>
-          </a:p>
-          <a:p>
-            <a:r>
-              <a:t>  "required": false,</a:t>
-            </a:r>
-          </a:p>
-          <a:p>
-            <a:r>
-              <a:t>  "screen_position": "none",</a:t>
-            </a:r>
-          </a:p>
-          <a:p>
-            <a:r>
-              <a:t>  "display_label": "",</a:t>
+              <a:t>  "type": "article_quote",</a:t>
+            </a:r>
+          </a:p>
+          <a:p>
+            <a:r>
+              <a:t>  "required": true,</a:t>
+            </a:r>
+          </a:p>
+          <a:p>
+            <a:r>
+              <a:t>  "screen_position": "left_half",</a:t>
+            </a:r>
+          </a:p>
+          <a:p>
+            <a:r>
+              <a:t>  "display_label": "[기사 인용]",</a:t>
             </a:r>
           </a:p>
           <a:p>
@@ -2784,7 +2799,7 @@
           </a:p>
           <a:p>
             <a:r>
-              <a:t>  "manual_insert_required": false</a:t>
+              <a:t>  "manual_insert_required": true</a:t>
             </a:r>
           </a:p>
           <a:p>
@@ -2942,17 +2957,17 @@
           </a:p>
           <a:p>
             <a:r>
-              <a:t>proof_object_type: none</a:t>
-            </a:r>
-          </a:p>
-          <a:p>
-            <a:r>
-              <a:t>proof_object_required: False</a:t>
-            </a:r>
-          </a:p>
-          <a:p>
-            <a:r>
-              <a:t>proof_object_screen_position: none</a:t>
+              <a:t>proof_object_type: article_quote</a:t>
+            </a:r>
+          </a:p>
+          <a:p>
+            <a:r>
+              <a:t>proof_object_required: True</a:t>
+            </a:r>
+          </a:p>
+          <a:p>
+            <a:r>
+              <a:t>proof_object_screen_position: left_half</a:t>
             </a:r>
           </a:p>
           <a:p>
@@ -2978,7 +2993,22 @@
           </a:p>
           <a:p>
             <a:r>
-              <a:t>  "하지만 밤하늘을 관찰하고, 위치를 추정하고, 계절과 시간을 연결하는 경험은 다르다",</a:t>
+              <a:t>  "하지만 밤하늘을 관찰하고, 위치를 추정하고, 계절과 시간을 연결하는 경험은 다르다"</a:t>
+            </a:r>
+          </a:p>
+          <a:p>
+            <a:r>
+              <a:t>]</a:t>
+            </a:r>
+          </a:p>
+          <a:p>
+            <a:r>
+              <a:t>overflow_body_lines:</a:t>
+            </a:r>
+          </a:p>
+          <a:p>
+            <a:r>
+              <a:t>[</a:t>
             </a:r>
           </a:p>
           <a:p>
@@ -2991,16 +3021,6 @@
               <a:t>]</a:t>
             </a:r>
           </a:p>
-          <a:p>
-            <a:r>
-              <a:t>overflow_body_lines:</a:t>
-            </a:r>
-          </a:p>
-          <a:p>
-            <a:r>
-              <a:t>[]</a:t>
-            </a:r>
-          </a:p>
           <a:p/>
           <a:p>
             <a:r>
@@ -3107,22 +3127,22 @@
           </a:p>
           <a:p>
             <a:r>
-              <a:t>  "type": "none",</a:t>
-            </a:r>
-          </a:p>
-          <a:p>
-            <a:r>
-              <a:t>  "required": false,</a:t>
-            </a:r>
-          </a:p>
-          <a:p>
-            <a:r>
-              <a:t>  "screen_position": "none",</a:t>
-            </a:r>
-          </a:p>
-          <a:p>
-            <a:r>
-              <a:t>  "display_label": "",</a:t>
+              <a:t>  "type": "article_quote",</a:t>
+            </a:r>
+          </a:p>
+          <a:p>
+            <a:r>
+              <a:t>  "required": true,</a:t>
+            </a:r>
+          </a:p>
+          <a:p>
+            <a:r>
+              <a:t>  "screen_position": "left_half",</a:t>
+            </a:r>
+          </a:p>
+          <a:p>
+            <a:r>
+              <a:t>  "display_label": "[기사 인용]",</a:t>
             </a:r>
           </a:p>
           <a:p>
@@ -3142,7 +3162,7 @@
           </a:p>
           <a:p>
             <a:r>
-              <a:t>  "manual_insert_required": false</a:t>
+              <a:t>  "manual_insert_required": true</a:t>
             </a:r>
           </a:p>
           <a:p>
@@ -3692,7 +3712,22 @@
           </a:p>
           <a:p>
             <a:r>
-              <a:t>  "다만 한국 사례는 메인 논지의 증명이 아니라 후반 보조 연결로 사용한다",</a:t>
+              <a:t>  "다만 한국 사례는 메인 논지의 증명이 아니라 후반 보조 연결로 사용한다"</a:t>
+            </a:r>
+          </a:p>
+          <a:p>
+            <a:r>
+              <a:t>]</a:t>
+            </a:r>
+          </a:p>
+          <a:p>
+            <a:r>
+              <a:t>overflow_body_lines:</a:t>
+            </a:r>
+          </a:p>
+          <a:p>
+            <a:r>
+              <a:t>[</a:t>
             </a:r>
           </a:p>
           <a:p>
@@ -3703,16 +3738,6 @@
           <a:p>
             <a:r>
               <a:t>]</a:t>
-            </a:r>
-          </a:p>
-          <a:p>
-            <a:r>
-              <a:t>overflow_body_lines:</a:t>
-            </a:r>
-          </a:p>
-          <a:p>
-            <a:r>
-              <a:t>[]</a:t>
             </a:r>
           </a:p>
           <a:p/>
@@ -4008,17 +4033,17 @@
           </a:p>
           <a:p>
             <a:r>
-              <a:t>proof_object_type: none</a:t>
-            </a:r>
-          </a:p>
-          <a:p>
-            <a:r>
-              <a:t>proof_object_required: False</a:t>
-            </a:r>
-          </a:p>
-          <a:p>
-            <a:r>
-              <a:t>proof_object_screen_position: none</a:t>
+              <a:t>proof_object_type: article_quote</a:t>
+            </a:r>
+          </a:p>
+          <a:p>
+            <a:r>
+              <a:t>proof_object_required: True</a:t>
+            </a:r>
+          </a:p>
+          <a:p>
+            <a:r>
+              <a:t>proof_object_screen_position: left_half</a:t>
             </a:r>
           </a:p>
           <a:p>
@@ -4044,7 +4069,22 @@
           </a:p>
           <a:p>
             <a:r>
-              <a:t>  "그렇다면 사람에게 남겨야 할 것은 답이 아니라 과정일 수 있다",</a:t>
+              <a:t>  "그렇다면 사람에게 남겨야 할 것은 답이 아니라 과정일 수 있다"</a:t>
+            </a:r>
+          </a:p>
+          <a:p>
+            <a:r>
+              <a:t>]</a:t>
+            </a:r>
+          </a:p>
+          <a:p>
+            <a:r>
+              <a:t>overflow_body_lines:</a:t>
+            </a:r>
+          </a:p>
+          <a:p>
+            <a:r>
+              <a:t>[</a:t>
             </a:r>
           </a:p>
           <a:p>
@@ -4057,16 +4097,6 @@
               <a:t>]</a:t>
             </a:r>
           </a:p>
-          <a:p>
-            <a:r>
-              <a:t>overflow_body_lines:</a:t>
-            </a:r>
-          </a:p>
-          <a:p>
-            <a:r>
-              <a:t>[]</a:t>
-            </a:r>
-          </a:p>
           <a:p/>
           <a:p>
             <a:r>
@@ -4168,22 +4198,22 @@
           </a:p>
           <a:p>
             <a:r>
-              <a:t>  "type": "none",</a:t>
-            </a:r>
-          </a:p>
-          <a:p>
-            <a:r>
-              <a:t>  "required": false,</a:t>
-            </a:r>
-          </a:p>
-          <a:p>
-            <a:r>
-              <a:t>  "screen_position": "none",</a:t>
-            </a:r>
-          </a:p>
-          <a:p>
-            <a:r>
-              <a:t>  "display_label": "",</a:t>
+              <a:t>  "type": "article_quote",</a:t>
+            </a:r>
+          </a:p>
+          <a:p>
+            <a:r>
+              <a:t>  "required": true,</a:t>
+            </a:r>
+          </a:p>
+          <a:p>
+            <a:r>
+              <a:t>  "screen_position": "left_half",</a:t>
+            </a:r>
+          </a:p>
+          <a:p>
+            <a:r>
+              <a:t>  "display_label": "[기사 인용]",</a:t>
             </a:r>
           </a:p>
           <a:p>
@@ -4203,7 +4233,7 @@
           </a:p>
           <a:p>
             <a:r>
-              <a:t>  "manual_insert_required": false</a:t>
+              <a:t>  "manual_insert_required": true</a:t>
             </a:r>
           </a:p>
           <a:p>
@@ -4345,17 +4375,17 @@
           </a:p>
           <a:p>
             <a:r>
-              <a:t>proof_object_type: none</a:t>
-            </a:r>
-          </a:p>
-          <a:p>
-            <a:r>
-              <a:t>proof_object_required: False</a:t>
-            </a:r>
-          </a:p>
-          <a:p>
-            <a:r>
-              <a:t>proof_object_screen_position: none</a:t>
+              <a:t>proof_object_type: article_quote</a:t>
+            </a:r>
+          </a:p>
+          <a:p>
+            <a:r>
+              <a:t>proof_object_required: True</a:t>
+            </a:r>
+          </a:p>
+          <a:p>
+            <a:r>
+              <a:t>proof_object_screen_position: left_half</a:t>
             </a:r>
           </a:p>
           <a:p>
@@ -4381,7 +4411,22 @@
           </a:p>
           <a:p>
             <a:r>
-              <a:t>  "AI는 접근성과 개인화 가능성도 넓힐 수 있다",</a:t>
+              <a:t>  "AI는 접근성과 개인화 가능성도 넓힐 수 있다"</a:t>
+            </a:r>
+          </a:p>
+          <a:p>
+            <a:r>
+              <a:t>]</a:t>
+            </a:r>
+          </a:p>
+          <a:p>
+            <a:r>
+              <a:t>overflow_body_lines:</a:t>
+            </a:r>
+          </a:p>
+          <a:p>
+            <a:r>
+              <a:t>[</a:t>
             </a:r>
           </a:p>
           <a:p>
@@ -4394,16 +4439,6 @@
               <a:t>]</a:t>
             </a:r>
           </a:p>
-          <a:p>
-            <a:r>
-              <a:t>overflow_body_lines:</a:t>
-            </a:r>
-          </a:p>
-          <a:p>
-            <a:r>
-              <a:t>[]</a:t>
-            </a:r>
-          </a:p>
           <a:p/>
           <a:p>
             <a:r>
@@ -4510,22 +4545,22 @@
           </a:p>
           <a:p>
             <a:r>
-              <a:t>  "type": "none",</a:t>
-            </a:r>
-          </a:p>
-          <a:p>
-            <a:r>
-              <a:t>  "required": false,</a:t>
-            </a:r>
-          </a:p>
-          <a:p>
-            <a:r>
-              <a:t>  "screen_position": "none",</a:t>
-            </a:r>
-          </a:p>
-          <a:p>
-            <a:r>
-              <a:t>  "display_label": "",</a:t>
+              <a:t>  "type": "article_quote",</a:t>
+            </a:r>
+          </a:p>
+          <a:p>
+            <a:r>
+              <a:t>  "required": true,</a:t>
+            </a:r>
+          </a:p>
+          <a:p>
+            <a:r>
+              <a:t>  "screen_position": "left_half",</a:t>
+            </a:r>
+          </a:p>
+          <a:p>
+            <a:r>
+              <a:t>  "display_label": "[기사 인용]",</a:t>
             </a:r>
           </a:p>
           <a:p>
@@ -4545,7 +4580,7 @@
           </a:p>
           <a:p>
             <a:r>
-              <a:t>  "manual_insert_required": false</a:t>
+              <a:t>  "manual_insert_required": true</a:t>
             </a:r>
           </a:p>
           <a:p>
@@ -5050,7 +5085,22 @@
           </a:p>
           <a:p>
             <a:r>
-              <a:t>  "반대로 AI는 학습 접근성과 개인화 가능성을 높일 수 있다는 주장도 있다",</a:t>
+              <a:t>  "반대로 AI는 학습 접근성과 개인화 가능성을 높일 수 있다는 주장도 있다"</a:t>
+            </a:r>
+          </a:p>
+          <a:p>
+            <a:r>
+              <a:t>]</a:t>
+            </a:r>
+          </a:p>
+          <a:p>
+            <a:r>
+              <a:t>overflow_body_lines:</a:t>
+            </a:r>
+          </a:p>
+          <a:p>
+            <a:r>
+              <a:t>[</a:t>
             </a:r>
           </a:p>
           <a:p>
@@ -5061,16 +5111,6 @@
           <a:p>
             <a:r>
               <a:t>]</a:t>
-            </a:r>
-          </a:p>
-          <a:p>
-            <a:r>
-              <a:t>overflow_body_lines:</a:t>
-            </a:r>
-          </a:p>
-          <a:p>
-            <a:r>
-              <a:t>[]</a:t>
             </a:r>
           </a:p>
           <a:p/>
@@ -5366,17 +5406,17 @@
           </a:p>
           <a:p>
             <a:r>
-              <a:t>proof_object_type: none</a:t>
-            </a:r>
-          </a:p>
-          <a:p>
-            <a:r>
-              <a:t>proof_object_required: False</a:t>
-            </a:r>
-          </a:p>
-          <a:p>
-            <a:r>
-              <a:t>proof_object_screen_position: none</a:t>
+              <a:t>proof_object_type: article_quote</a:t>
+            </a:r>
+          </a:p>
+          <a:p>
+            <a:r>
+              <a:t>proof_object_required: True</a:t>
+            </a:r>
+          </a:p>
+          <a:p>
+            <a:r>
+              <a:t>proof_object_screen_position: left_half</a:t>
             </a:r>
           </a:p>
           <a:p>
@@ -5402,12 +5442,7 @@
           </a:p>
           <a:p>
             <a:r>
-              <a:t>  "AI 답변의 빈틈을 찾는 법",</a:t>
-            </a:r>
-          </a:p>
-          <a:p>
-            <a:r>
-              <a:t>  "다른 자료와 비교하는 법"</a:t>
+              <a:t>  "AI 답변의 빈틈을 찾는 법"</a:t>
             </a:r>
           </a:p>
           <a:p>
@@ -5427,6 +5462,11 @@
           </a:p>
           <a:p>
             <a:r>
+              <a:t>  "다른 자료와 비교하는 법",</a:t>
+            </a:r>
+          </a:p>
+          <a:p>
+            <a:r>
               <a:t>  "모르는 것을 모른다고 남기는 법"</a:t>
             </a:r>
           </a:p>
@@ -5541,22 +5581,22 @@
           </a:p>
           <a:p>
             <a:r>
-              <a:t>  "type": "none",</a:t>
-            </a:r>
-          </a:p>
-          <a:p>
-            <a:r>
-              <a:t>  "required": false,</a:t>
-            </a:r>
-          </a:p>
-          <a:p>
-            <a:r>
-              <a:t>  "screen_position": "none",</a:t>
-            </a:r>
-          </a:p>
-          <a:p>
-            <a:r>
-              <a:t>  "display_label": "",</a:t>
+              <a:t>  "type": "article_quote",</a:t>
+            </a:r>
+          </a:p>
+          <a:p>
+            <a:r>
+              <a:t>  "required": true,</a:t>
+            </a:r>
+          </a:p>
+          <a:p>
+            <a:r>
+              <a:t>  "screen_position": "left_half",</a:t>
+            </a:r>
+          </a:p>
+          <a:p>
+            <a:r>
+              <a:t>  "display_label": "[기사 인용]",</a:t>
             </a:r>
           </a:p>
           <a:p>
@@ -5576,7 +5616,7 @@
           </a:p>
           <a:p>
             <a:r>
-              <a:t>  "manual_insert_required": false</a:t>
+              <a:t>  "manual_insert_required": true</a:t>
             </a:r>
           </a:p>
           <a:p>
@@ -5774,7 +5814,22 @@
           </a:p>
           <a:p>
             <a:r>
-              <a:t>  "더 멀리 보게 해줄 뿐, 어디를 볼지는 사람이 정한다",</a:t>
+              <a:t>  "더 멀리 보게 해줄 뿐, 어디를 볼지는 사람이 정한다"</a:t>
+            </a:r>
+          </a:p>
+          <a:p>
+            <a:r>
+              <a:t>]</a:t>
+            </a:r>
+          </a:p>
+          <a:p>
+            <a:r>
+              <a:t>overflow_body_lines:</a:t>
+            </a:r>
+          </a:p>
+          <a:p>
+            <a:r>
+              <a:t>[</a:t>
             </a:r>
           </a:p>
           <a:p>
@@ -5785,16 +5840,6 @@
           <a:p>
             <a:r>
               <a:t>]</a:t>
-            </a:r>
-          </a:p>
-          <a:p>
-            <a:r>
-              <a:t>overflow_body_lines:</a:t>
-            </a:r>
-          </a:p>
-          <a:p>
-            <a:r>
-              <a:t>[]</a:t>
             </a:r>
           </a:p>
           <a:p/>
@@ -7493,17 +7538,17 @@
           </a:p>
           <a:p>
             <a:r>
-              <a:t>proof_object_type: none</a:t>
-            </a:r>
-          </a:p>
-          <a:p>
-            <a:r>
-              <a:t>proof_object_required: False</a:t>
-            </a:r>
-          </a:p>
-          <a:p>
-            <a:r>
-              <a:t>proof_object_screen_position: none</a:t>
+              <a:t>proof_object_type: article_quote</a:t>
+            </a:r>
+          </a:p>
+          <a:p>
+            <a:r>
+              <a:t>proof_object_required: True</a:t>
+            </a:r>
+          </a:p>
+          <a:p>
+            <a:r>
+              <a:t>proof_object_screen_position: left_half</a:t>
             </a:r>
           </a:p>
           <a:p>
@@ -7529,7 +7574,22 @@
           </a:p>
           <a:p>
             <a:r>
-              <a:t>  "AI 즉답은 그 과정을 도와줄 수도, 일부 건너뛰게 만들 수도 있다",</a:t>
+              <a:t>  "AI 즉답은 그 과정을 도와줄 수도, 일부 건너뛰게 만들 수도 있다"</a:t>
+            </a:r>
+          </a:p>
+          <a:p>
+            <a:r>
+              <a:t>]</a:t>
+            </a:r>
+          </a:p>
+          <a:p>
+            <a:r>
+              <a:t>overflow_body_lines:</a:t>
+            </a:r>
+          </a:p>
+          <a:p>
+            <a:r>
+              <a:t>[</a:t>
             </a:r>
           </a:p>
           <a:p>
@@ -7542,16 +7602,6 @@
               <a:t>]</a:t>
             </a:r>
           </a:p>
-          <a:p>
-            <a:r>
-              <a:t>overflow_body_lines:</a:t>
-            </a:r>
-          </a:p>
-          <a:p>
-            <a:r>
-              <a:t>[]</a:t>
-            </a:r>
-          </a:p>
           <a:p/>
           <a:p>
             <a:r>
@@ -7658,22 +7708,22 @@
           </a:p>
           <a:p>
             <a:r>
-              <a:t>  "type": "none",</a:t>
-            </a:r>
-          </a:p>
-          <a:p>
-            <a:r>
-              <a:t>  "required": false,</a:t>
-            </a:r>
-          </a:p>
-          <a:p>
-            <a:r>
-              <a:t>  "screen_position": "none",</a:t>
-            </a:r>
-          </a:p>
-          <a:p>
-            <a:r>
-              <a:t>  "display_label": "",</a:t>
+              <a:t>  "type": "article_quote",</a:t>
+            </a:r>
+          </a:p>
+          <a:p>
+            <a:r>
+              <a:t>  "required": true,</a:t>
+            </a:r>
+          </a:p>
+          <a:p>
+            <a:r>
+              <a:t>  "screen_position": "left_half",</a:t>
+            </a:r>
+          </a:p>
+          <a:p>
+            <a:r>
+              <a:t>  "display_label": "[기사 인용]",</a:t>
             </a:r>
           </a:p>
           <a:p>
@@ -7693,7 +7743,7 @@
           </a:p>
           <a:p>
             <a:r>
-              <a:t>  "manual_insert_required": false</a:t>
+              <a:t>  "manual_insert_required": true</a:t>
             </a:r>
           </a:p>
           <a:p>
@@ -7881,7 +7931,22 @@
           </a:p>
           <a:p>
             <a:r>
-              <a:t>  "UNESCO와 OECD 자료는 AI 교육을 단순 도구 사용이 아니라 역량·원칙의 문제로 다룬다",</a:t>
+              <a:t>  "UNESCO와 OECD 자료는 AI 교육을 단순 도구 사용이 아니라 역량·원칙의 문제로 다룬다"</a:t>
+            </a:r>
+          </a:p>
+          <a:p>
+            <a:r>
+              <a:t>]</a:t>
+            </a:r>
+          </a:p>
+          <a:p>
+            <a:r>
+              <a:t>overflow_body_lines:</a:t>
+            </a:r>
+          </a:p>
+          <a:p>
+            <a:r>
+              <a:t>[</a:t>
             </a:r>
           </a:p>
           <a:p>
@@ -7892,16 +7957,6 @@
           <a:p>
             <a:r>
               <a:t>]</a:t>
-            </a:r>
-          </a:p>
-          <a:p>
-            <a:r>
-              <a:t>overflow_body_lines:</a:t>
-            </a:r>
-          </a:p>
-          <a:p>
-            <a:r>
-              <a:t>[]</a:t>
             </a:r>
           </a:p>
           <a:p/>
@@ -8841,17 +8896,17 @@
           </a:p>
           <a:p>
             <a:r>
-              <a:t>proof_object_type: none</a:t>
-            </a:r>
-          </a:p>
-          <a:p>
-            <a:r>
-              <a:t>proof_object_required: False</a:t>
-            </a:r>
-          </a:p>
-          <a:p>
-            <a:r>
-              <a:t>proof_object_screen_position: none</a:t>
+              <a:t>proof_object_type: article_quote</a:t>
+            </a:r>
+          </a:p>
+          <a:p>
+            <a:r>
+              <a:t>proof_object_required: True</a:t>
+            </a:r>
+          </a:p>
+          <a:p>
+            <a:r>
+              <a:t>proof_object_screen_position: left_half</a:t>
             </a:r>
           </a:p>
           <a:p>
@@ -8877,7 +8932,22 @@
           </a:p>
           <a:p>
             <a:r>
-              <a:t>  "이 과정은 느리지만 정보 탐색의 다양성과 판단 훈련을 남긴다",</a:t>
+              <a:t>  "이 과정은 느리지만 정보 탐색의 다양성과 판단 훈련을 남긴다"</a:t>
+            </a:r>
+          </a:p>
+          <a:p>
+            <a:r>
+              <a:t>]</a:t>
+            </a:r>
+          </a:p>
+          <a:p>
+            <a:r>
+              <a:t>overflow_body_lines:</a:t>
+            </a:r>
+          </a:p>
+          <a:p>
+            <a:r>
+              <a:t>[</a:t>
             </a:r>
           </a:p>
           <a:p>
@@ -8890,16 +8960,6 @@
               <a:t>]</a:t>
             </a:r>
           </a:p>
-          <a:p>
-            <a:r>
-              <a:t>overflow_body_lines:</a:t>
-            </a:r>
-          </a:p>
-          <a:p>
-            <a:r>
-              <a:t>[]</a:t>
-            </a:r>
-          </a:p>
           <a:p/>
           <a:p>
             <a:r>
@@ -9001,22 +9061,22 @@
           </a:p>
           <a:p>
             <a:r>
-              <a:t>  "type": "none",</a:t>
-            </a:r>
-          </a:p>
-          <a:p>
-            <a:r>
-              <a:t>  "required": false,</a:t>
-            </a:r>
-          </a:p>
-          <a:p>
-            <a:r>
-              <a:t>  "screen_position": "none",</a:t>
-            </a:r>
-          </a:p>
-          <a:p>
-            <a:r>
-              <a:t>  "display_label": "",</a:t>
+              <a:t>  "type": "article_quote",</a:t>
+            </a:r>
+          </a:p>
+          <a:p>
+            <a:r>
+              <a:t>  "required": true,</a:t>
+            </a:r>
+          </a:p>
+          <a:p>
+            <a:r>
+              <a:t>  "screen_position": "left_half",</a:t>
+            </a:r>
+          </a:p>
+          <a:p>
+            <a:r>
+              <a:t>  "display_label": "[기사 인용]",</a:t>
             </a:r>
           </a:p>
           <a:p>
@@ -9036,7 +9096,7 @@
           </a:p>
           <a:p>
             <a:r>
-              <a:t>  "manual_insert_required": false</a:t>
+              <a:t>  "manual_insert_required": true</a:t>
             </a:r>
           </a:p>
           <a:p>
@@ -9219,7 +9279,22 @@
           </a:p>
           <a:p>
             <a:r>
-              <a:t>  "걱정되는 점: 비교·검증·실패의 경험이 줄어들 가능성이 있다",</a:t>
+              <a:t>  "걱정되는 점: 비교·검증·실패의 경험이 줄어들 가능성이 있다"</a:t>
+            </a:r>
+          </a:p>
+          <a:p>
+            <a:r>
+              <a:t>]</a:t>
+            </a:r>
+          </a:p>
+          <a:p>
+            <a:r>
+              <a:t>overflow_body_lines:</a:t>
+            </a:r>
+          </a:p>
+          <a:p>
+            <a:r>
+              <a:t>[</a:t>
             </a:r>
           </a:p>
           <a:p>
@@ -9230,16 +9305,6 @@
           <a:p>
             <a:r>
               <a:t>]</a:t>
-            </a:r>
-          </a:p>
-          <a:p>
-            <a:r>
-              <a:t>overflow_body_lines:</a:t>
-            </a:r>
-          </a:p>
-          <a:p>
-            <a:r>
-              <a:t>[]</a:t>
             </a:r>
           </a:p>
           <a:p/>
@@ -12536,8 +12601,8 @@
         </p:nvSpPr>
         <p:spPr>
           <a:xfrm>
-            <a:off x="572414" y="1874519"/>
-            <a:ext cx="11193170" cy="1302105"/>
+            <a:off x="5989320" y="1208836"/>
+            <a:ext cx="5394960" cy="1302105"/>
           </a:xfrm>
           <a:prstGeom prst="rect">
             <a:avLst/>
@@ -12581,20 +12646,90 @@
               <a:t>AI 역량 교육은 답을 받는 법보다 질문하고 평가하고 책임 있게 쓰는 법으로 확장될 필요가 있다</a:t>
             </a:r>
           </a:p>
-          <a:p>
-            <a:pPr>
-              <a:spcAft>
+        </p:txBody>
+      </p:sp>
+      <p:sp>
+        <p:nvSpPr>
+          <p:cNvPr id="4" name="Rectangle 3"/>
+          <p:cNvSpPr/>
+          <p:nvPr/>
+        </p:nvSpPr>
+        <p:spPr>
+          <a:xfrm>
+            <a:off x="713232" y="1417320"/>
+            <a:ext cx="4892040" cy="4114800"/>
+          </a:xfrm>
+          <a:prstGeom prst="rect">
+            <a:avLst/>
+          </a:prstGeom>
+          <a:solidFill>
+            <a:srgbClr val="F5F5F5"/>
+          </a:solidFill>
+          <a:ln w="12700">
+            <a:solidFill>
+              <a:srgbClr val="BEBEBE"/>
+            </a:solidFill>
+          </a:ln>
+        </p:spPr>
+        <p:style>
+          <a:lnRef idx="1">
+            <a:schemeClr val="accent1"/>
+          </a:lnRef>
+          <a:fillRef idx="3">
+            <a:schemeClr val="accent1"/>
+          </a:fillRef>
+          <a:effectRef idx="2">
+            <a:schemeClr val="accent1"/>
+          </a:effectRef>
+          <a:fontRef idx="minor">
+            <a:schemeClr val="lt1"/>
+          </a:fontRef>
+        </p:style>
+        <p:txBody>
+          <a:bodyPr rtlCol="0" anchor="ctr" wrap="square"/>
+          <a:lstStyle/>
+          <a:p>
+            <a:pPr algn="ctr"/>
+            <a:r>
+              <a:rPr sz="1300" b="1">
+                <a:solidFill>
+                  <a:srgbClr val="566070"/>
+                </a:solidFill>
+                <a:latin typeface="맑은 고딕"/>
+              </a:rPr>
+              <a:t>[기사 인용]</a:t>
+            </a:r>
+          </a:p>
+          <a:p>
+            <a:pPr algn="ctr">
+              <a:spcBef>
                 <a:spcPts val="800"/>
-              </a:spcAft>
+              </a:spcBef>
             </a:pPr>
             <a:r>
-              <a:rPr sz="2800" b="0" u="none">
+              <a:rPr sz="1800" b="1">
                 <a:solidFill>
                   <a:srgbClr val="000000"/>
                 </a:solidFill>
                 <a:latin typeface="맑은 고딕"/>
               </a:rPr>
-              <a:t>이 주장은 연구·프레임워크에 기대되, 인지 효과를 확정적으로 말하지 않는다</a:t>
+              <a:t>Microsoft</a:t>
+            </a:r>
+          </a:p>
+          <a:p>
+            <a:pPr algn="ctr">
+              <a:spcBef>
+                <a:spcPts val="400"/>
+              </a:spcBef>
+            </a:pPr>
+            <a:r>
+              <a:rPr sz="1400" b="0">
+                <a:solidFill>
+                  <a:srgbClr val="566070"/>
+                </a:solidFill>
+                <a:latin typeface="맑은 고딕"/>
+              </a:rPr>
+              <a:t>생각은 결과가 아니라 중간 과정에 숨어 있다</a:t>
             </a:r>
           </a:p>
         </p:txBody>
@@ -12668,13 +12803,45 @@
           <a:p>
             <a:pPr algn="ctr"/>
             <a:r>
-              <a:rPr sz="1300">
+              <a:rPr sz="1300" b="1">
                 <a:solidFill>
                   <a:srgbClr val="566070"/>
                 </a:solidFill>
                 <a:latin typeface="맑은 고딕"/>
               </a:rPr>
               <a:t>[기사 인용]</a:t>
+            </a:r>
+          </a:p>
+          <a:p>
+            <a:pPr algn="ctr">
+              <a:spcBef>
+                <a:spcPts val="800"/>
+              </a:spcBef>
+            </a:pPr>
+            <a:r>
+              <a:rPr sz="1800" b="1">
+                <a:solidFill>
+                  <a:srgbClr val="000000"/>
+                </a:solidFill>
+                <a:latin typeface="맑은 고딕"/>
+              </a:rPr>
+              <a:t>BBC</a:t>
+            </a:r>
+          </a:p>
+          <a:p>
+            <a:pPr algn="ctr">
+              <a:spcBef>
+                <a:spcPts val="400"/>
+              </a:spcBef>
+            </a:pPr>
+            <a:r>
+              <a:rPr sz="1400" b="0">
+                <a:solidFill>
+                  <a:srgbClr val="566070"/>
+                </a:solidFill>
+                <a:latin typeface="맑은 고딕"/>
+              </a:rPr>
+              <a:t>Royal Observatory의 문제의식도 여기에 가깝다</a:t>
             </a:r>
           </a:p>
         </p:txBody>
@@ -13123,8 +13290,8 @@
         </p:nvSpPr>
         <p:spPr>
           <a:xfrm>
-            <a:off x="572414" y="1874519"/>
-            <a:ext cx="11193170" cy="1302105"/>
+            <a:off x="5989320" y="1208836"/>
+            <a:ext cx="5394960" cy="1302105"/>
           </a:xfrm>
           <a:prstGeom prst="rect">
             <a:avLst/>
@@ -13168,20 +13335,90 @@
               <a:t>OECD와 UNESCO 자료는 AI 교육을 교수 원칙과 학생 역량의 문제로 다룬다</a:t>
             </a:r>
           </a:p>
-          <a:p>
-            <a:pPr>
-              <a:spcAft>
+        </p:txBody>
+      </p:sp>
+      <p:sp>
+        <p:nvSpPr>
+          <p:cNvPr id="4" name="Rectangle 3"/>
+          <p:cNvSpPr/>
+          <p:nvPr/>
+        </p:nvSpPr>
+        <p:spPr>
+          <a:xfrm>
+            <a:off x="713232" y="1417320"/>
+            <a:ext cx="4892040" cy="4114800"/>
+          </a:xfrm>
+          <a:prstGeom prst="rect">
+            <a:avLst/>
+          </a:prstGeom>
+          <a:solidFill>
+            <a:srgbClr val="F5F5F5"/>
+          </a:solidFill>
+          <a:ln w="12700">
+            <a:solidFill>
+              <a:srgbClr val="BEBEBE"/>
+            </a:solidFill>
+          </a:ln>
+        </p:spPr>
+        <p:style>
+          <a:lnRef idx="1">
+            <a:schemeClr val="accent1"/>
+          </a:lnRef>
+          <a:fillRef idx="3">
+            <a:schemeClr val="accent1"/>
+          </a:fillRef>
+          <a:effectRef idx="2">
+            <a:schemeClr val="accent1"/>
+          </a:effectRef>
+          <a:fontRef idx="minor">
+            <a:schemeClr val="lt1"/>
+          </a:fontRef>
+        </p:style>
+        <p:txBody>
+          <a:bodyPr rtlCol="0" anchor="ctr" wrap="square"/>
+          <a:lstStyle/>
+          <a:p>
+            <a:pPr algn="ctr"/>
+            <a:r>
+              <a:rPr sz="1300" b="1">
+                <a:solidFill>
+                  <a:srgbClr val="566070"/>
+                </a:solidFill>
+                <a:latin typeface="맑은 고딕"/>
+              </a:rPr>
+              <a:t>[기사 인용]</a:t>
+            </a:r>
+          </a:p>
+          <a:p>
+            <a:pPr algn="ctr">
+              <a:spcBef>
                 <a:spcPts val="800"/>
-              </a:spcAft>
+              </a:spcBef>
             </a:pPr>
             <a:r>
-              <a:rPr sz="2800" b="0" u="none">
+              <a:rPr sz="1800" b="1">
                 <a:solidFill>
                   <a:srgbClr val="000000"/>
                 </a:solidFill>
                 <a:latin typeface="맑은 고딕"/>
               </a:rPr>
-              <a:t>다만 교육 효과는 아직 단정하지 않고, 수업 설계의 과제로 남긴다</a:t>
+              <a:t>OECD</a:t>
+            </a:r>
+          </a:p>
+          <a:p>
+            <a:pPr algn="ctr">
+              <a:spcBef>
+                <a:spcPts val="400"/>
+              </a:spcBef>
+            </a:pPr>
+            <a:r>
+              <a:rPr sz="1400" b="0">
+                <a:solidFill>
+                  <a:srgbClr val="566070"/>
+                </a:solidFill>
+                <a:latin typeface="맑은 고딕"/>
+              </a:rPr>
+              <a:t>학교는 이제 정답 암기만으로 버티기 어렵다</a:t>
             </a:r>
           </a:p>
         </p:txBody>
@@ -13254,8 +13491,8 @@
         </p:nvSpPr>
         <p:spPr>
           <a:xfrm>
-            <a:off x="572414" y="1874519"/>
-            <a:ext cx="11193170" cy="1302105"/>
+            <a:off x="5989320" y="1208836"/>
+            <a:ext cx="5394960" cy="1302105"/>
           </a:xfrm>
           <a:prstGeom prst="rect">
             <a:avLst/>
@@ -13299,20 +13536,90 @@
               <a:t>그렇다면 박물관·과학관은 맥락, 경험, 질문, 토론을 더 강조해야 할 수 있다</a:t>
             </a:r>
           </a:p>
-          <a:p>
-            <a:pPr>
-              <a:spcAft>
+        </p:txBody>
+      </p:sp>
+      <p:sp>
+        <p:nvSpPr>
+          <p:cNvPr id="4" name="Rectangle 3"/>
+          <p:cNvSpPr/>
+          <p:nvPr/>
+        </p:nvSpPr>
+        <p:spPr>
+          <a:xfrm>
+            <a:off x="713232" y="1417320"/>
+            <a:ext cx="4892040" cy="4114800"/>
+          </a:xfrm>
+          <a:prstGeom prst="rect">
+            <a:avLst/>
+          </a:prstGeom>
+          <a:solidFill>
+            <a:srgbClr val="F5F5F5"/>
+          </a:solidFill>
+          <a:ln w="12700">
+            <a:solidFill>
+              <a:srgbClr val="BEBEBE"/>
+            </a:solidFill>
+          </a:ln>
+        </p:spPr>
+        <p:style>
+          <a:lnRef idx="1">
+            <a:schemeClr val="accent1"/>
+          </a:lnRef>
+          <a:fillRef idx="3">
+            <a:schemeClr val="accent1"/>
+          </a:fillRef>
+          <a:effectRef idx="2">
+            <a:schemeClr val="accent1"/>
+          </a:effectRef>
+          <a:fontRef idx="minor">
+            <a:schemeClr val="lt1"/>
+          </a:fontRef>
+        </p:style>
+        <p:txBody>
+          <a:bodyPr rtlCol="0" anchor="ctr" wrap="square"/>
+          <a:lstStyle/>
+          <a:p>
+            <a:pPr algn="ctr"/>
+            <a:r>
+              <a:rPr sz="1300" b="1">
+                <a:solidFill>
+                  <a:srgbClr val="566070"/>
+                </a:solidFill>
+                <a:latin typeface="맑은 고딕"/>
+              </a:rPr>
+              <a:t>[기사 인용]</a:t>
+            </a:r>
+          </a:p>
+          <a:p>
+            <a:pPr algn="ctr">
+              <a:spcBef>
                 <a:spcPts val="800"/>
-              </a:spcAft>
+              </a:spcBef>
             </a:pPr>
             <a:r>
-              <a:rPr sz="2800" b="0" u="none">
+              <a:rPr sz="1800" b="1">
                 <a:solidFill>
                   <a:srgbClr val="000000"/>
                 </a:solidFill>
                 <a:latin typeface="맑은 고딕"/>
               </a:rPr>
-              <a:t>국립과학관 AI 전시 사례는 기술을 체험형 맥락으로 보여주는 보조 사례로만 사용한다</a:t>
+              <a:t>UNESCO</a:t>
+            </a:r>
+          </a:p>
+          <a:p>
+            <a:pPr algn="ctr">
+              <a:spcBef>
+                <a:spcPts val="400"/>
+              </a:spcBef>
+            </a:pPr>
+            <a:r>
+              <a:rPr sz="1400" b="0">
+                <a:solidFill>
+                  <a:srgbClr val="566070"/>
+                </a:solidFill>
+                <a:latin typeface="맑은 고딕"/>
+              </a:rPr>
+              <a:t>박물관은 전시품 옆 설명문 이상의 것이 필요해진다</a:t>
             </a:r>
           </a:p>
         </p:txBody>
@@ -13385,8 +13692,8 @@
         </p:nvSpPr>
         <p:spPr>
           <a:xfrm>
-            <a:off x="572414" y="1874519"/>
-            <a:ext cx="11193170" cy="1302105"/>
+            <a:off x="5989320" y="1208836"/>
+            <a:ext cx="5394960" cy="1302105"/>
           </a:xfrm>
           <a:prstGeom prst="rect">
             <a:avLst/>
@@ -13430,20 +13737,90 @@
               <a:t>하지만 밤하늘을 관찰하고, 위치를 추정하고, 계절과 시간을 연결하는 경험은 다르다</a:t>
             </a:r>
           </a:p>
-          <a:p>
-            <a:pPr>
-              <a:spcAft>
+        </p:txBody>
+      </p:sp>
+      <p:sp>
+        <p:nvSpPr>
+          <p:cNvPr id="4" name="Rectangle 3"/>
+          <p:cNvSpPr/>
+          <p:nvPr/>
+        </p:nvSpPr>
+        <p:spPr>
+          <a:xfrm>
+            <a:off x="713232" y="1417320"/>
+            <a:ext cx="4892040" cy="4114800"/>
+          </a:xfrm>
+          <a:prstGeom prst="rect">
+            <a:avLst/>
+          </a:prstGeom>
+          <a:solidFill>
+            <a:srgbClr val="F5F5F5"/>
+          </a:solidFill>
+          <a:ln w="12700">
+            <a:solidFill>
+              <a:srgbClr val="BEBEBE"/>
+            </a:solidFill>
+          </a:ln>
+        </p:spPr>
+        <p:style>
+          <a:lnRef idx="1">
+            <a:schemeClr val="accent1"/>
+          </a:lnRef>
+          <a:fillRef idx="3">
+            <a:schemeClr val="accent1"/>
+          </a:fillRef>
+          <a:effectRef idx="2">
+            <a:schemeClr val="accent1"/>
+          </a:effectRef>
+          <a:fontRef idx="minor">
+            <a:schemeClr val="lt1"/>
+          </a:fontRef>
+        </p:style>
+        <p:txBody>
+          <a:bodyPr rtlCol="0" anchor="ctr" wrap="square"/>
+          <a:lstStyle/>
+          <a:p>
+            <a:pPr algn="ctr"/>
+            <a:r>
+              <a:rPr sz="1300" b="1">
+                <a:solidFill>
+                  <a:srgbClr val="566070"/>
+                </a:solidFill>
+                <a:latin typeface="맑은 고딕"/>
+              </a:rPr>
+              <a:t>[기사 인용]</a:t>
+            </a:r>
+          </a:p>
+          <a:p>
+            <a:pPr algn="ctr">
+              <a:spcBef>
                 <a:spcPts val="800"/>
-              </a:spcAft>
+              </a:spcBef>
             </a:pPr>
             <a:r>
-              <a:rPr sz="2800" b="0" u="none">
+              <a:rPr sz="1800" b="1">
                 <a:solidFill>
                   <a:srgbClr val="000000"/>
                 </a:solidFill>
                 <a:latin typeface="맑은 고딕"/>
               </a:rPr>
-              <a:t>천문관 비유는 정보 전달보다 보는 법과 질문하는 법을 강조하기 위한 방송용 구조다</a:t>
+              <a:t>BBC</a:t>
+            </a:r>
+          </a:p>
+          <a:p>
+            <a:pPr algn="ctr">
+              <a:spcBef>
+                <a:spcPts val="400"/>
+              </a:spcBef>
+            </a:pPr>
+            <a:r>
+              <a:rPr sz="1400" b="0">
+                <a:solidFill>
+                  <a:srgbClr val="566070"/>
+                </a:solidFill>
+                <a:latin typeface="맑은 고딕"/>
+              </a:rPr>
+              <a:t>천문관은 ‘별 이름’보다 ‘보는 법’을 가르치는 곳</a:t>
             </a:r>
           </a:p>
         </p:txBody>
@@ -13590,14 +13967,143 @@
       </p:sp>
       <p:sp>
         <p:nvSpPr>
-          <p:cNvPr id="5" name="TextBox 4"/>
+          <p:cNvPr id="5" name="Rectangle 4"/>
+          <p:cNvSpPr/>
+          <p:nvPr/>
+        </p:nvSpPr>
+        <p:spPr>
+          <a:xfrm>
+            <a:off x="1572768" y="2304288"/>
+            <a:ext cx="16459" cy="2907792"/>
+          </a:xfrm>
+          <a:prstGeom prst="rect">
+            <a:avLst/>
+          </a:prstGeom>
+          <a:solidFill>
+            <a:srgbClr val="D2D2D2"/>
+          </a:solidFill>
+          <a:ln>
+            <a:noFill/>
+          </a:ln>
+        </p:spPr>
+        <p:style>
+          <a:lnRef idx="1">
+            <a:schemeClr val="accent1"/>
+          </a:lnRef>
+          <a:fillRef idx="3">
+            <a:schemeClr val="accent1"/>
+          </a:fillRef>
+          <a:effectRef idx="2">
+            <a:schemeClr val="accent1"/>
+          </a:effectRef>
+          <a:fontRef idx="minor">
+            <a:schemeClr val="lt1"/>
+          </a:fontRef>
+        </p:style>
+        <p:txBody>
+          <a:bodyPr rtlCol="0" anchor="ctr"/>
+          <a:lstStyle/>
+          <a:p>
+            <a:pPr algn="ctr"/>
+          </a:p>
+        </p:txBody>
+      </p:sp>
+      <p:sp>
+        <p:nvSpPr>
+          <p:cNvPr id="6" name="Rectangle 5"/>
+          <p:cNvSpPr/>
+          <p:nvPr/>
+        </p:nvSpPr>
+        <p:spPr>
+          <a:xfrm>
+            <a:off x="1572768" y="5138928"/>
+            <a:ext cx="9235440" cy="16459"/>
+          </a:xfrm>
+          <a:prstGeom prst="rect">
+            <a:avLst/>
+          </a:prstGeom>
+          <a:solidFill>
+            <a:srgbClr val="D2D2D2"/>
+          </a:solidFill>
+          <a:ln>
+            <a:noFill/>
+          </a:ln>
+        </p:spPr>
+        <p:style>
+          <a:lnRef idx="1">
+            <a:schemeClr val="accent1"/>
+          </a:lnRef>
+          <a:fillRef idx="3">
+            <a:schemeClr val="accent1"/>
+          </a:fillRef>
+          <a:effectRef idx="2">
+            <a:schemeClr val="accent1"/>
+          </a:effectRef>
+          <a:fontRef idx="minor">
+            <a:schemeClr val="lt1"/>
+          </a:fontRef>
+        </p:style>
+        <p:txBody>
+          <a:bodyPr rtlCol="0" anchor="ctr"/>
+          <a:lstStyle/>
+          <a:p>
+            <a:pPr algn="ctr"/>
+          </a:p>
+        </p:txBody>
+      </p:sp>
+      <p:sp>
+        <p:nvSpPr>
+          <p:cNvPr id="7" name="Rectangle 6"/>
+          <p:cNvSpPr/>
+          <p:nvPr/>
+        </p:nvSpPr>
+        <p:spPr>
+          <a:xfrm>
+            <a:off x="1901952" y="3776472"/>
+            <a:ext cx="658368" cy="1362456"/>
+          </a:xfrm>
+          <a:prstGeom prst="rect">
+            <a:avLst/>
+          </a:prstGeom>
+          <a:solidFill>
+            <a:srgbClr val="4872C4"/>
+          </a:solidFill>
+          <a:ln>
+            <a:noFill/>
+          </a:ln>
+        </p:spPr>
+        <p:style>
+          <a:lnRef idx="1">
+            <a:schemeClr val="accent1"/>
+          </a:lnRef>
+          <a:fillRef idx="3">
+            <a:schemeClr val="accent1"/>
+          </a:fillRef>
+          <a:effectRef idx="2">
+            <a:schemeClr val="accent1"/>
+          </a:effectRef>
+          <a:fontRef idx="minor">
+            <a:schemeClr val="lt1"/>
+          </a:fontRef>
+        </p:style>
+        <p:txBody>
+          <a:bodyPr rtlCol="0" anchor="ctr"/>
+          <a:lstStyle/>
+          <a:p>
+            <a:pPr algn="ctr"/>
+          </a:p>
+        </p:txBody>
+      </p:sp>
+      <p:sp>
+        <p:nvSpPr>
+          <p:cNvPr id="8" name="TextBox 7"/>
           <p:cNvSpPr txBox="1"/>
           <p:nvPr/>
         </p:nvSpPr>
         <p:spPr>
           <a:xfrm>
-            <a:off x="1234440" y="2423160"/>
-            <a:ext cx="9692640" cy="2514600"/>
+            <a:off x="1645920" y="3465576"/>
+            <a:ext cx="1170432" cy="237744"/>
           </a:xfrm>
           <a:prstGeom prst="rect">
             <a:avLst/>
@@ -13610,11 +14116,7 @@
           </a:bodyPr>
           <a:lstStyle/>
           <a:p>
-            <a:pPr>
-              <a:spcAft>
-                <a:spcPts val="800"/>
-              </a:spcAft>
-            </a:pPr>
+            <a:pPr algn="ctr"/>
             <a:r>
               <a:rPr sz="1800" b="1" u="none">
                 <a:solidFill>
@@ -13622,15 +14124,112 @@
                 </a:solidFill>
                 <a:latin typeface="맑은 고딕"/>
               </a:rPr>
-              <a:t>이번 enriched dry run은 OECD·정책브리핑·과학관 사례로 1차 틀만 보강한다</a:t>
-            </a:r>
-          </a:p>
-          <a:p>
-            <a:pPr>
-              <a:spcAft>
-                <a:spcPts val="800"/>
-              </a:spcAft>
-            </a:pPr>
+              <a:t>이번 enriched dry r…</a:t>
+            </a:r>
+          </a:p>
+        </p:txBody>
+      </p:sp>
+      <p:sp>
+        <p:nvSpPr>
+          <p:cNvPr id="9" name="TextBox 8"/>
+          <p:cNvSpPr txBox="1"/>
+          <p:nvPr/>
+        </p:nvSpPr>
+        <p:spPr>
+          <a:xfrm>
+            <a:off x="1609344" y="5212080"/>
+            <a:ext cx="1243584" cy="301752"/>
+          </a:xfrm>
+          <a:prstGeom prst="rect">
+            <a:avLst/>
+          </a:prstGeom>
+          <a:noFill/>
+        </p:spPr>
+        <p:txBody>
+          <a:bodyPr wrap="square">
+            <a:spAutoFit/>
+          </a:bodyPr>
+          <a:lstStyle/>
+          <a:p>
+            <a:pPr algn="ctr"/>
+            <a:r>
+              <a:rPr sz="1400" b="1" u="none">
+                <a:solidFill>
+                  <a:srgbClr val="373737"/>
+                </a:solidFill>
+                <a:latin typeface="맑은 고딕"/>
+              </a:rPr>
+              <a:t>이번</a:t>
+            </a:r>
+          </a:p>
+        </p:txBody>
+      </p:sp>
+      <p:sp>
+        <p:nvSpPr>
+          <p:cNvPr id="10" name="Rectangle 9"/>
+          <p:cNvSpPr/>
+          <p:nvPr/>
+        </p:nvSpPr>
+        <p:spPr>
+          <a:xfrm>
+            <a:off x="6268212" y="4069080"/>
+            <a:ext cx="658368" cy="1069848"/>
+          </a:xfrm>
+          <a:prstGeom prst="rect">
+            <a:avLst/>
+          </a:prstGeom>
+          <a:solidFill>
+            <a:srgbClr val="4872C4"/>
+          </a:solidFill>
+          <a:ln>
+            <a:noFill/>
+          </a:ln>
+        </p:spPr>
+        <p:style>
+          <a:lnRef idx="1">
+            <a:schemeClr val="accent1"/>
+          </a:lnRef>
+          <a:fillRef idx="3">
+            <a:schemeClr val="accent1"/>
+          </a:fillRef>
+          <a:effectRef idx="2">
+            <a:schemeClr val="accent1"/>
+          </a:effectRef>
+          <a:fontRef idx="minor">
+            <a:schemeClr val="lt1"/>
+          </a:fontRef>
+        </p:style>
+        <p:txBody>
+          <a:bodyPr rtlCol="0" anchor="ctr"/>
+          <a:lstStyle/>
+          <a:p>
+            <a:pPr algn="ctr"/>
+          </a:p>
+        </p:txBody>
+      </p:sp>
+      <p:sp>
+        <p:nvSpPr>
+          <p:cNvPr id="11" name="TextBox 10"/>
+          <p:cNvSpPr txBox="1"/>
+          <p:nvPr/>
+        </p:nvSpPr>
+        <p:spPr>
+          <a:xfrm>
+            <a:off x="6012179" y="3758184"/>
+            <a:ext cx="1170432" cy="237744"/>
+          </a:xfrm>
+          <a:prstGeom prst="rect">
+            <a:avLst/>
+          </a:prstGeom>
+          <a:noFill/>
+        </p:spPr>
+        <p:txBody>
+          <a:bodyPr wrap="square">
+            <a:spAutoFit/>
+          </a:bodyPr>
+          <a:lstStyle/>
+          <a:p>
+            <a:pPr algn="ctr"/>
             <a:r>
               <a:rPr sz="1800" b="1" u="none">
                 <a:solidFill>
@@ -13638,14 +14237,49 @@
                 </a:solidFill>
                 <a:latin typeface="맑은 고딕"/>
               </a:rPr>
-              <a:t>정량 수치가 필요한 문장은 여전히 fact check 대상으로 남긴다</a:t>
+              <a:t>정량 수치가 필요한 문장은 여전…</a:t>
             </a:r>
           </a:p>
         </p:txBody>
       </p:sp>
       <p:sp>
         <p:nvSpPr>
-          <p:cNvPr id="6" name="TextBox 5"/>
+          <p:cNvPr id="12" name="TextBox 11"/>
+          <p:cNvSpPr txBox="1"/>
+          <p:nvPr/>
+        </p:nvSpPr>
+        <p:spPr>
+          <a:xfrm>
+            <a:off x="5975603" y="5212080"/>
+            <a:ext cx="1243584" cy="301752"/>
+          </a:xfrm>
+          <a:prstGeom prst="rect">
+            <a:avLst/>
+          </a:prstGeom>
+          <a:noFill/>
+        </p:spPr>
+        <p:txBody>
+          <a:bodyPr wrap="square">
+            <a:spAutoFit/>
+          </a:bodyPr>
+          <a:lstStyle/>
+          <a:p>
+            <a:pPr algn="ctr"/>
+            <a:r>
+              <a:rPr sz="1400" b="1" u="none">
+                <a:solidFill>
+                  <a:srgbClr val="373737"/>
+                </a:solidFill>
+                <a:latin typeface="맑은 고딕"/>
+              </a:rPr>
+              <a:t>정량</a:t>
+            </a:r>
+          </a:p>
+        </p:txBody>
+      </p:sp>
+      <p:sp>
+        <p:nvSpPr>
+          <p:cNvPr id="13" name="TextBox 12"/>
           <p:cNvSpPr txBox="1"/>
           <p:nvPr/>
         </p:nvSpPr>
@@ -13781,7 +14415,7 @@
           <a:p>
             <a:pPr algn="ctr"/>
             <a:r>
-              <a:rPr sz="1300">
+              <a:rPr sz="1300" b="0">
                 <a:solidFill>
                   <a:srgbClr val="566070"/>
                 </a:solidFill>
@@ -13820,7 +14454,7 @@
               </a:spcAft>
             </a:pPr>
             <a:r>
-              <a:rPr sz="2400" b="0" u="none">
+              <a:rPr sz="2800" b="0" u="none">
                 <a:solidFill>
                   <a:srgbClr val="000000"/>
                 </a:solidFill>
@@ -13836,29 +14470,13 @@
               </a:spcAft>
             </a:pPr>
             <a:r>
-              <a:rPr sz="2400" b="0" u="none">
+              <a:rPr sz="2800" b="0" u="none">
                 <a:solidFill>
                   <a:srgbClr val="000000"/>
                 </a:solidFill>
                 <a:latin typeface="맑은 고딕"/>
               </a:rPr>
               <a:t>다만 한국 사례는 메인 논지의 증명이 아니라 후반 보조 연결로 사용한다</a:t>
-            </a:r>
-          </a:p>
-          <a:p>
-            <a:pPr>
-              <a:spcAft>
-                <a:spcPts val="800"/>
-              </a:spcAft>
-            </a:pPr>
-            <a:r>
-              <a:rPr sz="2400" b="0" u="none">
-                <a:solidFill>
-                  <a:srgbClr val="000000"/>
-                </a:solidFill>
-                <a:latin typeface="맑은 고딕"/>
-              </a:rPr>
-              <a:t>핵심 질문은 한국도 결국 AI를 금지할지보다 어떻게 다룰지라는 쪽으로 옮겨갈 수 있다는 점이다</a:t>
             </a:r>
           </a:p>
         </p:txBody>
@@ -13919,328 +14537,6 @@
                 <a:latin typeface="맑은 고딕"/>
               </a:rPr>
               <a:t>지식기관의 경쟁자는 AI가 아니라 ‘무심코 넘어가는 습관’일지도</a:t>
-            </a:r>
-          </a:p>
-        </p:txBody>
-      </p:sp>
-      <p:sp>
-        <p:nvSpPr>
-          <p:cNvPr id="3" name="TextBox 2"/>
-          <p:cNvSpPr txBox="1"/>
-          <p:nvPr/>
-        </p:nvSpPr>
-        <p:spPr>
-          <a:xfrm>
-            <a:off x="713232" y="2103120"/>
-            <a:ext cx="10652760" cy="2926080"/>
-          </a:xfrm>
-          <a:prstGeom prst="rect">
-            <a:avLst/>
-          </a:prstGeom>
-          <a:noFill/>
-        </p:spPr>
-        <p:txBody>
-          <a:bodyPr wrap="square">
-            <a:spAutoFit/>
-          </a:bodyPr>
-          <a:lstStyle/>
-          <a:p>
-            <a:pPr>
-              <a:spcAft>
-                <a:spcPts val="800"/>
-              </a:spcAft>
-            </a:pPr>
-            <a:r>
-              <a:rPr sz="2800" b="0" u="none">
-                <a:solidFill>
-                  <a:srgbClr val="000000"/>
-                </a:solidFill>
-                <a:latin typeface="맑은 고딕"/>
-              </a:rPr>
-              <a:t>AI가 답을 주는 건 막기 어렵다</a:t>
-            </a:r>
-          </a:p>
-          <a:p>
-            <a:pPr>
-              <a:spcAft>
-                <a:spcPts val="800"/>
-              </a:spcAft>
-            </a:pPr>
-            <a:r>
-              <a:rPr sz="2800" b="0" u="none">
-                <a:solidFill>
-                  <a:srgbClr val="000000"/>
-                </a:solidFill>
-                <a:latin typeface="맑은 고딕"/>
-              </a:rPr>
-              <a:t>그렇다면 사람에게 남겨야 할 것은 답이 아니라 과정일 수 있다</a:t>
-            </a:r>
-          </a:p>
-          <a:p>
-            <a:pPr>
-              <a:spcAft>
-                <a:spcPts val="800"/>
-              </a:spcAft>
-            </a:pPr>
-            <a:r>
-              <a:rPr sz="2800" b="0" u="none">
-                <a:solidFill>
-                  <a:srgbClr val="000000"/>
-                </a:solidFill>
-                <a:latin typeface="맑은 고딕"/>
-              </a:rPr>
-              <a:t>보고, 의심하고, 질문하고, 다시 확인하는 습관이 지식기관의 교육 목표가 될 수 있다</a:t>
-            </a:r>
-          </a:p>
-        </p:txBody>
-      </p:sp>
-    </p:spTree>
-  </p:cSld>
-  <p:clrMapOvr>
-    <a:masterClrMapping/>
-  </p:clrMapOvr>
-</p:sld>
-</file>
-
-<file path=ppt/slides/slide2.xml><?xml version="1.0" encoding="utf-8"?>
-<p:sld xmlns:a="http://schemas.openxmlformats.org/drawingml/2006/main" xmlns:p="http://schemas.openxmlformats.org/presentationml/2006/main" xmlns:r="http://schemas.openxmlformats.org/officeDocument/2006/relationships">
-  <p:cSld>
-    <p:bg>
-      <p:bgPr>
-        <a:solidFill>
-          <a:srgbClr val="F8F9FA"/>
-        </a:solidFill>
-        <a:effectLst/>
-      </p:bgPr>
-    </p:bg>
-    <p:spTree>
-      <p:nvGrpSpPr>
-        <p:cNvPr id="1" name=""/>
-        <p:cNvGrpSpPr/>
-        <p:nvPr/>
-      </p:nvGrpSpPr>
-      <p:grpSpPr/>
-      <p:sp>
-        <p:nvSpPr>
-          <p:cNvPr id="2" name="TextBox 1"/>
-          <p:cNvSpPr txBox="1"/>
-          <p:nvPr/>
-        </p:nvSpPr>
-        <p:spPr>
-          <a:xfrm>
-            <a:off x="572414" y="356616"/>
-            <a:ext cx="11192256" cy="521207"/>
-          </a:xfrm>
-          <a:prstGeom prst="rect">
-            <a:avLst/>
-          </a:prstGeom>
-          <a:noFill/>
-        </p:spPr>
-        <p:txBody>
-          <a:bodyPr wrap="square">
-            <a:spAutoFit/>
-          </a:bodyPr>
-          <a:lstStyle/>
-          <a:p>
-            <a:r>
-              <a:rPr sz="2800" b="1" u="none">
-                <a:solidFill>
-                  <a:srgbClr val="FF0000"/>
-                </a:solidFill>
-                <a:latin typeface="맑은 고딕"/>
-              </a:rPr>
-              <a:t>AI가 답을 바로 주는 건 정말 편리하다</a:t>
-            </a:r>
-          </a:p>
-        </p:txBody>
-      </p:sp>
-      <p:sp>
-        <p:nvSpPr>
-          <p:cNvPr id="3" name="TextBox 2"/>
-          <p:cNvSpPr txBox="1"/>
-          <p:nvPr/>
-        </p:nvSpPr>
-        <p:spPr>
-          <a:xfrm>
-            <a:off x="713232" y="1874519"/>
-            <a:ext cx="9875520" cy="2651760"/>
-          </a:xfrm>
-          <a:prstGeom prst="rect">
-            <a:avLst/>
-          </a:prstGeom>
-          <a:noFill/>
-        </p:spPr>
-        <p:txBody>
-          <a:bodyPr wrap="square">
-            <a:spAutoFit/>
-          </a:bodyPr>
-          <a:lstStyle/>
-          <a:p>
-            <a:pPr>
-              <a:spcAft>
-                <a:spcPts val="800"/>
-              </a:spcAft>
-            </a:pPr>
-            <a:r>
-              <a:rPr sz="2800" b="0" u="none">
-                <a:solidFill>
-                  <a:srgbClr val="000000"/>
-                </a:solidFill>
-                <a:latin typeface="맑은 고딕"/>
-              </a:rPr>
-              <a:t>모르는 것을 물으면 바로 답이 나오고, 검색 결과를 여러 개 열어보던 시간이 줄어든다</a:t>
-            </a:r>
-          </a:p>
-          <a:p>
-            <a:pPr>
-              <a:spcAft>
-                <a:spcPts val="800"/>
-              </a:spcAft>
-            </a:pPr>
-            <a:r>
-              <a:rPr sz="2800" b="0" u="none">
-                <a:solidFill>
-                  <a:srgbClr val="000000"/>
-                </a:solidFill>
-                <a:latin typeface="맑은 고딕"/>
-              </a:rPr>
-              <a:t>AI는 접근성과 개인화 가능성도 넓힐 수 있다</a:t>
-            </a:r>
-          </a:p>
-          <a:p>
-            <a:pPr>
-              <a:spcAft>
-                <a:spcPts val="800"/>
-              </a:spcAft>
-            </a:pPr>
-            <a:r>
-              <a:rPr sz="2800" b="0" u="none">
-                <a:solidFill>
-                  <a:srgbClr val="000000"/>
-                </a:solidFill>
-                <a:latin typeface="맑은 고딕"/>
-              </a:rPr>
-              <a:t>다만 편리함이 곧 배움이라는 뜻은 아니므로, 정보 탐색 과정의 변화로 조심스럽게 다룬다</a:t>
-            </a:r>
-          </a:p>
-        </p:txBody>
-      </p:sp>
-    </p:spTree>
-  </p:cSld>
-  <p:clrMapOvr>
-    <a:masterClrMapping/>
-  </p:clrMapOvr>
-</p:sld>
-</file>
-
-<file path=ppt/slides/slide20.xml><?xml version="1.0" encoding="utf-8"?>
-<p:sld xmlns:a="http://schemas.openxmlformats.org/drawingml/2006/main" xmlns:p="http://schemas.openxmlformats.org/presentationml/2006/main" xmlns:r="http://schemas.openxmlformats.org/officeDocument/2006/relationships">
-  <p:cSld>
-    <p:bg>
-      <p:bgPr>
-        <a:solidFill>
-          <a:srgbClr val="F8F9FA"/>
-        </a:solidFill>
-        <a:effectLst/>
-      </p:bgPr>
-    </p:bg>
-    <p:spTree>
-      <p:nvGrpSpPr>
-        <p:cNvPr id="1" name=""/>
-        <p:cNvGrpSpPr/>
-        <p:nvPr/>
-      </p:nvGrpSpPr>
-      <p:grpSpPr/>
-      <p:sp>
-        <p:nvSpPr>
-          <p:cNvPr id="2" name="TextBox 1"/>
-          <p:cNvSpPr txBox="1"/>
-          <p:nvPr/>
-        </p:nvSpPr>
-        <p:spPr>
-          <a:xfrm>
-            <a:off x="843991" y="1273759"/>
-            <a:ext cx="10752429" cy="2424988"/>
-          </a:xfrm>
-          <a:prstGeom prst="rect">
-            <a:avLst/>
-          </a:prstGeom>
-          <a:noFill/>
-        </p:spPr>
-        <p:txBody>
-          <a:bodyPr wrap="square">
-            <a:spAutoFit/>
-          </a:bodyPr>
-          <a:lstStyle/>
-          <a:p>
-            <a:r>
-              <a:rPr sz="5400" b="1" u="none">
-                <a:solidFill>
-                  <a:srgbClr val="181C23"/>
-                </a:solidFill>
-                <a:latin typeface="맑은 고딕"/>
-              </a:rPr>
-              <a:t>AI를 금지할 것인가, 다루는 법을 가르칠 것인가</a:t>
-            </a:r>
-          </a:p>
-        </p:txBody>
-      </p:sp>
-    </p:spTree>
-  </p:cSld>
-  <p:clrMapOvr>
-    <a:masterClrMapping/>
-  </p:clrMapOvr>
-</p:sld>
-</file>
-
-<file path=ppt/slides/slide21.xml><?xml version="1.0" encoding="utf-8"?>
-<p:sld xmlns:a="http://schemas.openxmlformats.org/drawingml/2006/main" xmlns:p="http://schemas.openxmlformats.org/presentationml/2006/main" xmlns:r="http://schemas.openxmlformats.org/officeDocument/2006/relationships">
-  <p:cSld>
-    <p:bg>
-      <p:bgPr>
-        <a:solidFill>
-          <a:srgbClr val="F8F9FA"/>
-        </a:solidFill>
-        <a:effectLst/>
-      </p:bgPr>
-    </p:bg>
-    <p:spTree>
-      <p:nvGrpSpPr>
-        <p:cNvPr id="1" name=""/>
-        <p:cNvGrpSpPr/>
-        <p:nvPr/>
-      </p:nvGrpSpPr>
-      <p:grpSpPr/>
-      <p:sp>
-        <p:nvSpPr>
-          <p:cNvPr id="2" name="TextBox 1"/>
-          <p:cNvSpPr txBox="1"/>
-          <p:nvPr/>
-        </p:nvSpPr>
-        <p:spPr>
-          <a:xfrm>
-            <a:off x="572414" y="356616"/>
-            <a:ext cx="11192256" cy="521207"/>
-          </a:xfrm>
-          <a:prstGeom prst="rect">
-            <a:avLst/>
-          </a:prstGeom>
-          <a:noFill/>
-        </p:spPr>
-        <p:txBody>
-          <a:bodyPr wrap="square">
-            <a:spAutoFit/>
-          </a:bodyPr>
-          <a:lstStyle/>
-          <a:p>
-            <a:r>
-              <a:rPr sz="2800" b="1" u="none">
-                <a:solidFill>
-                  <a:srgbClr val="FF0000"/>
-                </a:solidFill>
-                <a:latin typeface="맑은 고딕"/>
-              </a:rPr>
-              <a:t>AI를 안 쓰게 하는 건 점점 어려워진다</a:t>
             </a:r>
           </a:p>
         </p:txBody>
@@ -14288,13 +14584,45 @@
           <a:p>
             <a:pPr algn="ctr"/>
             <a:r>
-              <a:rPr sz="1300">
+              <a:rPr sz="1300" b="1">
                 <a:solidFill>
                   <a:srgbClr val="566070"/>
                 </a:solidFill>
                 <a:latin typeface="맑은 고딕"/>
               </a:rPr>
-              <a:t>[도식]</a:t>
+              <a:t>[기사 인용]</a:t>
+            </a:r>
+          </a:p>
+          <a:p>
+            <a:pPr algn="ctr">
+              <a:spcBef>
+                <a:spcPts val="800"/>
+              </a:spcBef>
+            </a:pPr>
+            <a:r>
+              <a:rPr sz="1800" b="1">
+                <a:solidFill>
+                  <a:srgbClr val="000000"/>
+                </a:solidFill>
+                <a:latin typeface="맑은 고딕"/>
+              </a:rPr>
+              <a:t>Microsoft</a:t>
+            </a:r>
+          </a:p>
+          <a:p>
+            <a:pPr algn="ctr">
+              <a:spcBef>
+                <a:spcPts val="400"/>
+              </a:spcBef>
+            </a:pPr>
+            <a:r>
+              <a:rPr sz="1400" b="0">
+                <a:solidFill>
+                  <a:srgbClr val="566070"/>
+                </a:solidFill>
+                <a:latin typeface="맑은 고딕"/>
+              </a:rPr>
+              <a:t>지식기관의 경쟁자는 AI가 아니라 ‘무심코 넘어가는 습관’일지도</a:t>
             </a:r>
           </a:p>
         </p:txBody>
@@ -14307,8 +14635,8 @@
         </p:nvSpPr>
         <p:spPr>
           <a:xfrm>
-            <a:off x="5989320" y="1508760"/>
-            <a:ext cx="5303520" cy="3337560"/>
+            <a:off x="5989320" y="2103120"/>
+            <a:ext cx="5303520" cy="2926080"/>
           </a:xfrm>
           <a:prstGeom prst="rect">
             <a:avLst/>
@@ -14327,13 +14655,13 @@
               </a:spcAft>
             </a:pPr>
             <a:r>
-              <a:rPr sz="2400" b="0" u="none">
+              <a:rPr sz="2800" b="0" u="none">
                 <a:solidFill>
                   <a:srgbClr val="000000"/>
                 </a:solidFill>
                 <a:latin typeface="맑은 고딕"/>
               </a:rPr>
-              <a:t>학생도, 직장인도, 관람객도 이미 AI와 함께 정보를 찾는다</a:t>
+              <a:t>AI가 답을 주는 건 막기 어렵다</a:t>
             </a:r>
           </a:p>
           <a:p>
@@ -14343,29 +14671,13 @@
               </a:spcAft>
             </a:pPr>
             <a:r>
-              <a:rPr sz="2400" b="0" u="none">
+              <a:rPr sz="2800" b="0" u="none">
                 <a:solidFill>
                   <a:srgbClr val="000000"/>
                 </a:solidFill>
                 <a:latin typeface="맑은 고딕"/>
               </a:rPr>
-              <a:t>반대로 AI는 학습 접근성과 개인화 가능성을 높일 수 있다는 주장도 있다</a:t>
-            </a:r>
-          </a:p>
-          <a:p>
-            <a:pPr>
-              <a:spcAft>
-                <a:spcPts val="800"/>
-              </a:spcAft>
-            </a:pPr>
-            <a:r>
-              <a:rPr sz="2400" b="0" u="none">
-                <a:solidFill>
-                  <a:srgbClr val="000000"/>
-                </a:solidFill>
-                <a:latin typeface="맑은 고딕"/>
-              </a:rPr>
-              <a:t>그래서 문제는 사용 여부가 아니라, 어떤 질문을 던지고 어떤 답을 의심할지에 가깝다</a:t>
+              <a:t>그렇다면 사람에게 남겨야 할 것은 답이 아니라 과정일 수 있다</a:t>
             </a:r>
           </a:p>
         </p:txBody>
@@ -14378,7 +14690,7 @@
 </p:sld>
 </file>
 
-<file path=ppt/slides/slide22.xml><?xml version="1.0" encoding="utf-8"?>
+<file path=ppt/slides/slide2.xml><?xml version="1.0" encoding="utf-8"?>
 <p:sld xmlns:a="http://schemas.openxmlformats.org/drawingml/2006/main" xmlns:p="http://schemas.openxmlformats.org/presentationml/2006/main" xmlns:r="http://schemas.openxmlformats.org/officeDocument/2006/relationships">
   <p:cSld>
     <p:bg>
@@ -14425,7 +14737,7 @@
                 </a:solidFill>
                 <a:latin typeface="맑은 고딕"/>
               </a:rPr>
-              <a:t>그래서 가르쳐야 할 것은 ‘AI 정답’이 아니라 ‘AI 검산’</a:t>
+              <a:t>AI가 답을 바로 주는 건 정말 편리하다</a:t>
             </a:r>
           </a:p>
         </p:txBody>
@@ -14438,8 +14750,8 @@
         </p:nvSpPr>
         <p:spPr>
           <a:xfrm>
-            <a:off x="572414" y="1874519"/>
-            <a:ext cx="11193170" cy="1302105"/>
+            <a:off x="5989320" y="1874519"/>
+            <a:ext cx="5303520" cy="2651760"/>
           </a:xfrm>
           <a:prstGeom prst="rect">
             <a:avLst/>
@@ -14464,7 +14776,7 @@
                 </a:solidFill>
                 <a:latin typeface="맑은 고딕"/>
               </a:rPr>
-              <a:t>출처를 확인하는 법</a:t>
+              <a:t>모르는 것을 물으면 바로 답이 나오고, 검색 결과를 여러 개 열어보던 시간이 줄어든다</a:t>
             </a:r>
           </a:p>
           <a:p>
@@ -14480,90 +14792,14 @@
                 </a:solidFill>
                 <a:latin typeface="맑은 고딕"/>
               </a:rPr>
-              <a:t>AI 답변의 빈틈을 찾는 법</a:t>
-            </a:r>
-          </a:p>
-          <a:p>
-            <a:pPr>
-              <a:spcAft>
-                <a:spcPts val="800"/>
-              </a:spcAft>
-            </a:pPr>
-            <a:r>
-              <a:rPr sz="2800" b="0" u="none">
-                <a:solidFill>
-                  <a:srgbClr val="000000"/>
-                </a:solidFill>
-                <a:latin typeface="맑은 고딕"/>
-              </a:rPr>
-              <a:t>다른 자료와 비교하는 법</a:t>
+              <a:t>AI는 접근성과 개인화 가능성도 넓힐 수 있다</a:t>
             </a:r>
           </a:p>
         </p:txBody>
       </p:sp>
-    </p:spTree>
-  </p:cSld>
-  <p:clrMapOvr>
-    <a:masterClrMapping/>
-  </p:clrMapOvr>
-</p:sld>
-</file>
-
-<file path=ppt/slides/slide23.xml><?xml version="1.0" encoding="utf-8"?>
-<p:sld xmlns:a="http://schemas.openxmlformats.org/drawingml/2006/main" xmlns:p="http://schemas.openxmlformats.org/presentationml/2006/main" xmlns:r="http://schemas.openxmlformats.org/officeDocument/2006/relationships">
-  <p:cSld>
-    <p:bg>
-      <p:bgPr>
-        <a:solidFill>
-          <a:srgbClr val="F8F9FA"/>
-        </a:solidFill>
-        <a:effectLst/>
-      </p:bgPr>
-    </p:bg>
-    <p:spTree>
-      <p:nvGrpSpPr>
-        <p:cNvPr id="1" name=""/>
-        <p:cNvGrpSpPr/>
-        <p:nvPr/>
-      </p:nvGrpSpPr>
-      <p:grpSpPr/>
-      <p:sp>
-        <p:nvSpPr>
-          <p:cNvPr id="2" name="TextBox 1"/>
-          <p:cNvSpPr txBox="1"/>
-          <p:nvPr/>
-        </p:nvSpPr>
-        <p:spPr>
-          <a:xfrm>
-            <a:off x="572414" y="356616"/>
-            <a:ext cx="11192256" cy="521207"/>
-          </a:xfrm>
-          <a:prstGeom prst="rect">
-            <a:avLst/>
-          </a:prstGeom>
-          <a:noFill/>
-        </p:spPr>
-        <p:txBody>
-          <a:bodyPr wrap="square">
-            <a:spAutoFit/>
-          </a:bodyPr>
-          <a:lstStyle/>
-          <a:p>
-            <a:r>
-              <a:rPr sz="2800" b="1" u="none">
-                <a:solidFill>
-                  <a:srgbClr val="FF0000"/>
-                </a:solidFill>
-                <a:latin typeface="맑은 고딕"/>
-              </a:rPr>
-              <a:t>천문학이 좋은 비유인 이유</a:t>
-            </a:r>
-          </a:p>
-        </p:txBody>
-      </p:sp>
-      <p:sp>
-        <p:nvSpPr>
-          <p:cNvPr id="3" name="Rectangle 2"/>
+      <p:sp>
+        <p:nvSpPr>
+          <p:cNvPr id="4" name="Rectangle 3"/>
           <p:cNvSpPr/>
           <p:nvPr/>
         </p:nvSpPr>
@@ -14604,7 +14840,583 @@
           <a:p>
             <a:pPr algn="ctr"/>
             <a:r>
-              <a:rPr sz="1300">
+              <a:rPr sz="1300" b="1">
+                <a:solidFill>
+                  <a:srgbClr val="566070"/>
+                </a:solidFill>
+                <a:latin typeface="맑은 고딕"/>
+              </a:rPr>
+              <a:t>[기사 인용]</a:t>
+            </a:r>
+          </a:p>
+          <a:p>
+            <a:pPr algn="ctr">
+              <a:spcBef>
+                <a:spcPts val="800"/>
+              </a:spcBef>
+            </a:pPr>
+            <a:r>
+              <a:rPr sz="1800" b="1">
+                <a:solidFill>
+                  <a:srgbClr val="000000"/>
+                </a:solidFill>
+                <a:latin typeface="맑은 고딕"/>
+              </a:rPr>
+              <a:t>Microsoft</a:t>
+            </a:r>
+          </a:p>
+          <a:p>
+            <a:pPr algn="ctr">
+              <a:spcBef>
+                <a:spcPts val="400"/>
+              </a:spcBef>
+            </a:pPr>
+            <a:r>
+              <a:rPr sz="1400" b="0">
+                <a:solidFill>
+                  <a:srgbClr val="566070"/>
+                </a:solidFill>
+                <a:latin typeface="맑은 고딕"/>
+              </a:rPr>
+              <a:t>AI가 답을 바로 주는 건 정말 편리하다</a:t>
+            </a:r>
+          </a:p>
+        </p:txBody>
+      </p:sp>
+    </p:spTree>
+  </p:cSld>
+  <p:clrMapOvr>
+    <a:masterClrMapping/>
+  </p:clrMapOvr>
+</p:sld>
+</file>
+
+<file path=ppt/slides/slide20.xml><?xml version="1.0" encoding="utf-8"?>
+<p:sld xmlns:a="http://schemas.openxmlformats.org/drawingml/2006/main" xmlns:p="http://schemas.openxmlformats.org/presentationml/2006/main" xmlns:r="http://schemas.openxmlformats.org/officeDocument/2006/relationships">
+  <p:cSld>
+    <p:bg>
+      <p:bgPr>
+        <a:solidFill>
+          <a:srgbClr val="F8F9FA"/>
+        </a:solidFill>
+        <a:effectLst/>
+      </p:bgPr>
+    </p:bg>
+    <p:spTree>
+      <p:nvGrpSpPr>
+        <p:cNvPr id="1" name=""/>
+        <p:cNvGrpSpPr/>
+        <p:nvPr/>
+      </p:nvGrpSpPr>
+      <p:grpSpPr/>
+      <p:sp>
+        <p:nvSpPr>
+          <p:cNvPr id="2" name="TextBox 1"/>
+          <p:cNvSpPr txBox="1"/>
+          <p:nvPr/>
+        </p:nvSpPr>
+        <p:spPr>
+          <a:xfrm>
+            <a:off x="843991" y="1273759"/>
+            <a:ext cx="10752429" cy="2424988"/>
+          </a:xfrm>
+          <a:prstGeom prst="rect">
+            <a:avLst/>
+          </a:prstGeom>
+          <a:noFill/>
+        </p:spPr>
+        <p:txBody>
+          <a:bodyPr wrap="square">
+            <a:spAutoFit/>
+          </a:bodyPr>
+          <a:lstStyle/>
+          <a:p>
+            <a:r>
+              <a:rPr sz="5400" b="1" u="none">
+                <a:solidFill>
+                  <a:srgbClr val="181C23"/>
+                </a:solidFill>
+                <a:latin typeface="맑은 고딕"/>
+              </a:rPr>
+              <a:t>AI를 금지할 것인가, 다루는 법을 가르칠 것인가</a:t>
+            </a:r>
+          </a:p>
+        </p:txBody>
+      </p:sp>
+    </p:spTree>
+  </p:cSld>
+  <p:clrMapOvr>
+    <a:masterClrMapping/>
+  </p:clrMapOvr>
+</p:sld>
+</file>
+
+<file path=ppt/slides/slide21.xml><?xml version="1.0" encoding="utf-8"?>
+<p:sld xmlns:a="http://schemas.openxmlformats.org/drawingml/2006/main" xmlns:p="http://schemas.openxmlformats.org/presentationml/2006/main" xmlns:r="http://schemas.openxmlformats.org/officeDocument/2006/relationships">
+  <p:cSld>
+    <p:bg>
+      <p:bgPr>
+        <a:solidFill>
+          <a:srgbClr val="F8F9FA"/>
+        </a:solidFill>
+        <a:effectLst/>
+      </p:bgPr>
+    </p:bg>
+    <p:spTree>
+      <p:nvGrpSpPr>
+        <p:cNvPr id="1" name=""/>
+        <p:cNvGrpSpPr/>
+        <p:nvPr/>
+      </p:nvGrpSpPr>
+      <p:grpSpPr/>
+      <p:sp>
+        <p:nvSpPr>
+          <p:cNvPr id="2" name="TextBox 1"/>
+          <p:cNvSpPr txBox="1"/>
+          <p:nvPr/>
+        </p:nvSpPr>
+        <p:spPr>
+          <a:xfrm>
+            <a:off x="572414" y="356616"/>
+            <a:ext cx="11192256" cy="521207"/>
+          </a:xfrm>
+          <a:prstGeom prst="rect">
+            <a:avLst/>
+          </a:prstGeom>
+          <a:noFill/>
+        </p:spPr>
+        <p:txBody>
+          <a:bodyPr wrap="square">
+            <a:spAutoFit/>
+          </a:bodyPr>
+          <a:lstStyle/>
+          <a:p>
+            <a:r>
+              <a:rPr sz="2800" b="1" u="none">
+                <a:solidFill>
+                  <a:srgbClr val="FF0000"/>
+                </a:solidFill>
+                <a:latin typeface="맑은 고딕"/>
+              </a:rPr>
+              <a:t>AI를 안 쓰게 하는 건 점점 어려워진다</a:t>
+            </a:r>
+          </a:p>
+        </p:txBody>
+      </p:sp>
+      <p:sp>
+        <p:nvSpPr>
+          <p:cNvPr id="3" name="Rectangle 2"/>
+          <p:cNvSpPr/>
+          <p:nvPr/>
+        </p:nvSpPr>
+        <p:spPr>
+          <a:xfrm>
+            <a:off x="713232" y="1417320"/>
+            <a:ext cx="4892040" cy="4114800"/>
+          </a:xfrm>
+          <a:prstGeom prst="rect">
+            <a:avLst/>
+          </a:prstGeom>
+          <a:solidFill>
+            <a:srgbClr val="F5F5F5"/>
+          </a:solidFill>
+          <a:ln w="12700">
+            <a:solidFill>
+              <a:srgbClr val="BEBEBE"/>
+            </a:solidFill>
+          </a:ln>
+        </p:spPr>
+        <p:style>
+          <a:lnRef idx="1">
+            <a:schemeClr val="accent1"/>
+          </a:lnRef>
+          <a:fillRef idx="3">
+            <a:schemeClr val="accent1"/>
+          </a:fillRef>
+          <a:effectRef idx="2">
+            <a:schemeClr val="accent1"/>
+          </a:effectRef>
+          <a:fontRef idx="minor">
+            <a:schemeClr val="lt1"/>
+          </a:fontRef>
+        </p:style>
+        <p:txBody>
+          <a:bodyPr rtlCol="0" anchor="ctr" wrap="square"/>
+          <a:lstStyle/>
+          <a:p>
+            <a:pPr algn="ctr"/>
+            <a:r>
+              <a:rPr sz="1300" b="0">
+                <a:solidFill>
+                  <a:srgbClr val="566070"/>
+                </a:solidFill>
+                <a:latin typeface="맑은 고딕"/>
+              </a:rPr>
+              <a:t>[도식]</a:t>
+            </a:r>
+          </a:p>
+        </p:txBody>
+      </p:sp>
+      <p:sp>
+        <p:nvSpPr>
+          <p:cNvPr id="4" name="TextBox 3"/>
+          <p:cNvSpPr txBox="1"/>
+          <p:nvPr/>
+        </p:nvSpPr>
+        <p:spPr>
+          <a:xfrm>
+            <a:off x="5989320" y="1508760"/>
+            <a:ext cx="5303520" cy="3337560"/>
+          </a:xfrm>
+          <a:prstGeom prst="rect">
+            <a:avLst/>
+          </a:prstGeom>
+          <a:noFill/>
+        </p:spPr>
+        <p:txBody>
+          <a:bodyPr wrap="square">
+            <a:spAutoFit/>
+          </a:bodyPr>
+          <a:lstStyle/>
+          <a:p>
+            <a:pPr>
+              <a:spcAft>
+                <a:spcPts val="800"/>
+              </a:spcAft>
+            </a:pPr>
+            <a:r>
+              <a:rPr sz="2800" b="0" u="none">
+                <a:solidFill>
+                  <a:srgbClr val="000000"/>
+                </a:solidFill>
+                <a:latin typeface="맑은 고딕"/>
+              </a:rPr>
+              <a:t>학생도, 직장인도, 관람객도 이미 AI와 함께 정보를 찾는다</a:t>
+            </a:r>
+          </a:p>
+          <a:p>
+            <a:pPr>
+              <a:spcAft>
+                <a:spcPts val="800"/>
+              </a:spcAft>
+            </a:pPr>
+            <a:r>
+              <a:rPr sz="2800" b="0" u="none">
+                <a:solidFill>
+                  <a:srgbClr val="000000"/>
+                </a:solidFill>
+                <a:latin typeface="맑은 고딕"/>
+              </a:rPr>
+              <a:t>반대로 AI는 학습 접근성과 개인화 가능성을 높일 수 있다는 주장도 있다</a:t>
+            </a:r>
+          </a:p>
+        </p:txBody>
+      </p:sp>
+    </p:spTree>
+  </p:cSld>
+  <p:clrMapOvr>
+    <a:masterClrMapping/>
+  </p:clrMapOvr>
+</p:sld>
+</file>
+
+<file path=ppt/slides/slide22.xml><?xml version="1.0" encoding="utf-8"?>
+<p:sld xmlns:a="http://schemas.openxmlformats.org/drawingml/2006/main" xmlns:p="http://schemas.openxmlformats.org/presentationml/2006/main" xmlns:r="http://schemas.openxmlformats.org/officeDocument/2006/relationships">
+  <p:cSld>
+    <p:bg>
+      <p:bgPr>
+        <a:solidFill>
+          <a:srgbClr val="F8F9FA"/>
+        </a:solidFill>
+        <a:effectLst/>
+      </p:bgPr>
+    </p:bg>
+    <p:spTree>
+      <p:nvGrpSpPr>
+        <p:cNvPr id="1" name=""/>
+        <p:cNvGrpSpPr/>
+        <p:nvPr/>
+      </p:nvGrpSpPr>
+      <p:grpSpPr/>
+      <p:sp>
+        <p:nvSpPr>
+          <p:cNvPr id="2" name="TextBox 1"/>
+          <p:cNvSpPr txBox="1"/>
+          <p:nvPr/>
+        </p:nvSpPr>
+        <p:spPr>
+          <a:xfrm>
+            <a:off x="572414" y="356616"/>
+            <a:ext cx="11192256" cy="521207"/>
+          </a:xfrm>
+          <a:prstGeom prst="rect">
+            <a:avLst/>
+          </a:prstGeom>
+          <a:noFill/>
+        </p:spPr>
+        <p:txBody>
+          <a:bodyPr wrap="square">
+            <a:spAutoFit/>
+          </a:bodyPr>
+          <a:lstStyle/>
+          <a:p>
+            <a:r>
+              <a:rPr sz="2800" b="1" u="none">
+                <a:solidFill>
+                  <a:srgbClr val="FF0000"/>
+                </a:solidFill>
+                <a:latin typeface="맑은 고딕"/>
+              </a:rPr>
+              <a:t>그래서 가르쳐야 할 것은 ‘AI 정답’이 아니라 ‘AI 검산’</a:t>
+            </a:r>
+          </a:p>
+        </p:txBody>
+      </p:sp>
+      <p:sp>
+        <p:nvSpPr>
+          <p:cNvPr id="3" name="TextBox 2"/>
+          <p:cNvSpPr txBox="1"/>
+          <p:nvPr/>
+        </p:nvSpPr>
+        <p:spPr>
+          <a:xfrm>
+            <a:off x="5989320" y="1208836"/>
+            <a:ext cx="5394960" cy="1302105"/>
+          </a:xfrm>
+          <a:prstGeom prst="rect">
+            <a:avLst/>
+          </a:prstGeom>
+          <a:noFill/>
+        </p:spPr>
+        <p:txBody>
+          <a:bodyPr wrap="square">
+            <a:spAutoFit/>
+          </a:bodyPr>
+          <a:lstStyle/>
+          <a:p>
+            <a:pPr>
+              <a:spcAft>
+                <a:spcPts val="800"/>
+              </a:spcAft>
+            </a:pPr>
+            <a:r>
+              <a:rPr sz="2800" b="0" u="none">
+                <a:solidFill>
+                  <a:srgbClr val="000000"/>
+                </a:solidFill>
+                <a:latin typeface="맑은 고딕"/>
+              </a:rPr>
+              <a:t>출처를 확인하는 법</a:t>
+            </a:r>
+          </a:p>
+          <a:p>
+            <a:pPr>
+              <a:spcAft>
+                <a:spcPts val="800"/>
+              </a:spcAft>
+            </a:pPr>
+            <a:r>
+              <a:rPr sz="2800" b="0" u="none">
+                <a:solidFill>
+                  <a:srgbClr val="000000"/>
+                </a:solidFill>
+                <a:latin typeface="맑은 고딕"/>
+              </a:rPr>
+              <a:t>AI 답변의 빈틈을 찾는 법</a:t>
+            </a:r>
+          </a:p>
+        </p:txBody>
+      </p:sp>
+      <p:sp>
+        <p:nvSpPr>
+          <p:cNvPr id="4" name="Rectangle 3"/>
+          <p:cNvSpPr/>
+          <p:nvPr/>
+        </p:nvSpPr>
+        <p:spPr>
+          <a:xfrm>
+            <a:off x="713232" y="1417320"/>
+            <a:ext cx="4892040" cy="4114800"/>
+          </a:xfrm>
+          <a:prstGeom prst="rect">
+            <a:avLst/>
+          </a:prstGeom>
+          <a:solidFill>
+            <a:srgbClr val="F5F5F5"/>
+          </a:solidFill>
+          <a:ln w="12700">
+            <a:solidFill>
+              <a:srgbClr val="BEBEBE"/>
+            </a:solidFill>
+          </a:ln>
+        </p:spPr>
+        <p:style>
+          <a:lnRef idx="1">
+            <a:schemeClr val="accent1"/>
+          </a:lnRef>
+          <a:fillRef idx="3">
+            <a:schemeClr val="accent1"/>
+          </a:fillRef>
+          <a:effectRef idx="2">
+            <a:schemeClr val="accent1"/>
+          </a:effectRef>
+          <a:fontRef idx="minor">
+            <a:schemeClr val="lt1"/>
+          </a:fontRef>
+        </p:style>
+        <p:txBody>
+          <a:bodyPr rtlCol="0" anchor="ctr" wrap="square"/>
+          <a:lstStyle/>
+          <a:p>
+            <a:pPr algn="ctr"/>
+            <a:r>
+              <a:rPr sz="1300" b="1">
+                <a:solidFill>
+                  <a:srgbClr val="566070"/>
+                </a:solidFill>
+                <a:latin typeface="맑은 고딕"/>
+              </a:rPr>
+              <a:t>[기사 인용]</a:t>
+            </a:r>
+          </a:p>
+          <a:p>
+            <a:pPr algn="ctr">
+              <a:spcBef>
+                <a:spcPts val="800"/>
+              </a:spcBef>
+            </a:pPr>
+            <a:r>
+              <a:rPr sz="1800" b="1">
+                <a:solidFill>
+                  <a:srgbClr val="000000"/>
+                </a:solidFill>
+                <a:latin typeface="맑은 고딕"/>
+              </a:rPr>
+              <a:t>UNESCO</a:t>
+            </a:r>
+          </a:p>
+          <a:p>
+            <a:pPr algn="ctr">
+              <a:spcBef>
+                <a:spcPts val="400"/>
+              </a:spcBef>
+            </a:pPr>
+            <a:r>
+              <a:rPr sz="1400" b="0">
+                <a:solidFill>
+                  <a:srgbClr val="566070"/>
+                </a:solidFill>
+                <a:latin typeface="맑은 고딕"/>
+              </a:rPr>
+              <a:t>그래서 가르쳐야 할 것은 ‘AI 정답’이 아니라 ‘AI 검산’</a:t>
+            </a:r>
+          </a:p>
+        </p:txBody>
+      </p:sp>
+    </p:spTree>
+  </p:cSld>
+  <p:clrMapOvr>
+    <a:masterClrMapping/>
+  </p:clrMapOvr>
+</p:sld>
+</file>
+
+<file path=ppt/slides/slide23.xml><?xml version="1.0" encoding="utf-8"?>
+<p:sld xmlns:a="http://schemas.openxmlformats.org/drawingml/2006/main" xmlns:p="http://schemas.openxmlformats.org/presentationml/2006/main" xmlns:r="http://schemas.openxmlformats.org/officeDocument/2006/relationships">
+  <p:cSld>
+    <p:bg>
+      <p:bgPr>
+        <a:solidFill>
+          <a:srgbClr val="F8F9FA"/>
+        </a:solidFill>
+        <a:effectLst/>
+      </p:bgPr>
+    </p:bg>
+    <p:spTree>
+      <p:nvGrpSpPr>
+        <p:cNvPr id="1" name=""/>
+        <p:cNvGrpSpPr/>
+        <p:nvPr/>
+      </p:nvGrpSpPr>
+      <p:grpSpPr/>
+      <p:sp>
+        <p:nvSpPr>
+          <p:cNvPr id="2" name="TextBox 1"/>
+          <p:cNvSpPr txBox="1"/>
+          <p:nvPr/>
+        </p:nvSpPr>
+        <p:spPr>
+          <a:xfrm>
+            <a:off x="572414" y="356616"/>
+            <a:ext cx="11192256" cy="521207"/>
+          </a:xfrm>
+          <a:prstGeom prst="rect">
+            <a:avLst/>
+          </a:prstGeom>
+          <a:noFill/>
+        </p:spPr>
+        <p:txBody>
+          <a:bodyPr wrap="square">
+            <a:spAutoFit/>
+          </a:bodyPr>
+          <a:lstStyle/>
+          <a:p>
+            <a:r>
+              <a:rPr sz="2800" b="1" u="none">
+                <a:solidFill>
+                  <a:srgbClr val="FF0000"/>
+                </a:solidFill>
+                <a:latin typeface="맑은 고딕"/>
+              </a:rPr>
+              <a:t>천문학이 좋은 비유인 이유</a:t>
+            </a:r>
+          </a:p>
+        </p:txBody>
+      </p:sp>
+      <p:sp>
+        <p:nvSpPr>
+          <p:cNvPr id="3" name="Rectangle 2"/>
+          <p:cNvSpPr/>
+          <p:nvPr/>
+        </p:nvSpPr>
+        <p:spPr>
+          <a:xfrm>
+            <a:off x="713232" y="1417320"/>
+            <a:ext cx="4892040" cy="4114800"/>
+          </a:xfrm>
+          <a:prstGeom prst="rect">
+            <a:avLst/>
+          </a:prstGeom>
+          <a:solidFill>
+            <a:srgbClr val="F5F5F5"/>
+          </a:solidFill>
+          <a:ln w="12700">
+            <a:solidFill>
+              <a:srgbClr val="BEBEBE"/>
+            </a:solidFill>
+          </a:ln>
+        </p:spPr>
+        <p:style>
+          <a:lnRef idx="1">
+            <a:schemeClr val="accent1"/>
+          </a:lnRef>
+          <a:fillRef idx="3">
+            <a:schemeClr val="accent1"/>
+          </a:fillRef>
+          <a:effectRef idx="2">
+            <a:schemeClr val="accent1"/>
+          </a:effectRef>
+          <a:fontRef idx="minor">
+            <a:schemeClr val="lt1"/>
+          </a:fontRef>
+        </p:style>
+        <p:txBody>
+          <a:bodyPr rtlCol="0" anchor="ctr" wrap="square"/>
+          <a:lstStyle/>
+          <a:p>
+            <a:pPr algn="ctr"/>
+            <a:r>
+              <a:rPr sz="1300" b="0">
                 <a:solidFill>
                   <a:srgbClr val="566070"/>
                 </a:solidFill>
@@ -14643,7 +15455,7 @@
               </a:spcAft>
             </a:pPr>
             <a:r>
-              <a:rPr sz="2400" b="0" u="none">
+              <a:rPr sz="2800" b="0" u="none">
                 <a:solidFill>
                   <a:srgbClr val="000000"/>
                 </a:solidFill>
@@ -14659,29 +15471,13 @@
               </a:spcAft>
             </a:pPr>
             <a:r>
-              <a:rPr sz="2400" b="0" u="none">
+              <a:rPr sz="2800" b="0" u="none">
                 <a:solidFill>
                   <a:srgbClr val="000000"/>
                 </a:solidFill>
                 <a:latin typeface="맑은 고딕"/>
               </a:rPr>
               <a:t>더 멀리 보게 해줄 뿐, 어디를 볼지는 사람이 정한다</a:t>
-            </a:r>
-          </a:p>
-          <a:p>
-            <a:pPr>
-              <a:spcAft>
-                <a:spcPts val="800"/>
-              </a:spcAft>
-            </a:pPr>
-            <a:r>
-              <a:rPr sz="2400" b="0" u="none">
-                <a:solidFill>
-                  <a:srgbClr val="000000"/>
-                </a:solidFill>
-                <a:latin typeface="맑은 고딕"/>
-              </a:rPr>
-              <a:t>AI도 답을 대신 주는 도구로만 쓰기보다, 더 좋은 질문을 돕는 도구가 될 수 있는지 묻는다</a:t>
             </a:r>
           </a:p>
         </p:txBody>
@@ -15132,13 +15928,45 @@
           <a:p>
             <a:pPr algn="ctr"/>
             <a:r>
-              <a:rPr sz="1300">
+              <a:rPr sz="1300" b="1">
                 <a:solidFill>
                   <a:srgbClr val="566070"/>
                 </a:solidFill>
                 <a:latin typeface="맑은 고딕"/>
               </a:rPr>
               <a:t>[기사 인용]</a:t>
+            </a:r>
+          </a:p>
+          <a:p>
+            <a:pPr algn="ctr">
+              <a:spcBef>
+                <a:spcPts val="800"/>
+              </a:spcBef>
+            </a:pPr>
+            <a:r>
+              <a:rPr sz="1800" b="1">
+                <a:solidFill>
+                  <a:srgbClr val="000000"/>
+                </a:solidFill>
+                <a:latin typeface="맑은 고딕"/>
+              </a:rPr>
+              <a:t>BBC</a:t>
+            </a:r>
+          </a:p>
+          <a:p>
+            <a:pPr algn="ctr">
+              <a:spcBef>
+                <a:spcPts val="400"/>
+              </a:spcBef>
+            </a:pPr>
+            <a:r>
+              <a:rPr sz="1400" b="0">
+                <a:solidFill>
+                  <a:srgbClr val="566070"/>
+                </a:solidFill>
+                <a:latin typeface="맑은 고딕"/>
+              </a:rPr>
+              <a:t>영국 왕립천문대 쪽에서 나온 경고</a:t>
             </a:r>
           </a:p>
         </p:txBody>
@@ -15396,8 +16224,8 @@
         </p:nvSpPr>
         <p:spPr>
           <a:xfrm>
-            <a:off x="572414" y="1874519"/>
-            <a:ext cx="11193170" cy="1302105"/>
+            <a:off x="5989320" y="1208836"/>
+            <a:ext cx="5394960" cy="1302105"/>
           </a:xfrm>
           <a:prstGeom prst="rect">
             <a:avLst/>
@@ -15441,87 +16269,11 @@
               <a:t>AI 즉답은 그 과정을 도와줄 수도, 일부 건너뛰게 만들 수도 있다</a:t>
             </a:r>
           </a:p>
-          <a:p>
-            <a:pPr>
-              <a:spcAft>
-                <a:spcPts val="800"/>
-              </a:spcAft>
-            </a:pPr>
-            <a:r>
-              <a:rPr sz="2800" b="0" u="none">
-                <a:solidFill>
-                  <a:srgbClr val="000000"/>
-                </a:solidFill>
-                <a:latin typeface="맑은 고딕"/>
-              </a:rPr>
-              <a:t>여기서는 사실 증명보다 방송용 문제 제기: 도구가 답을 줄 때 사람의 관찰은 어디에 남는가</a:t>
-            </a:r>
-          </a:p>
         </p:txBody>
       </p:sp>
-    </p:spTree>
-  </p:cSld>
-  <p:clrMapOvr>
-    <a:masterClrMapping/>
-  </p:clrMapOvr>
-</p:sld>
-</file>
-
-<file path=ppt/slides/slide5.xml><?xml version="1.0" encoding="utf-8"?>
-<p:sld xmlns:a="http://schemas.openxmlformats.org/drawingml/2006/main" xmlns:p="http://schemas.openxmlformats.org/presentationml/2006/main" xmlns:r="http://schemas.openxmlformats.org/officeDocument/2006/relationships">
-  <p:cSld>
-    <p:bg>
-      <p:bgPr>
-        <a:solidFill>
-          <a:srgbClr val="F8F9FA"/>
-        </a:solidFill>
-        <a:effectLst/>
-      </p:bgPr>
-    </p:bg>
-    <p:spTree>
-      <p:nvGrpSpPr>
-        <p:cNvPr id="1" name=""/>
-        <p:cNvGrpSpPr/>
-        <p:nvPr/>
-      </p:nvGrpSpPr>
-      <p:grpSpPr/>
-      <p:sp>
-        <p:nvSpPr>
-          <p:cNvPr id="2" name="TextBox 1"/>
-          <p:cNvSpPr txBox="1"/>
-          <p:nvPr/>
-        </p:nvSpPr>
-        <p:spPr>
-          <a:xfrm>
-            <a:off x="572414" y="356616"/>
-            <a:ext cx="11192256" cy="521207"/>
-          </a:xfrm>
-          <a:prstGeom prst="rect">
-            <a:avLst/>
-          </a:prstGeom>
-          <a:noFill/>
-        </p:spPr>
-        <p:txBody>
-          <a:bodyPr wrap="square">
-            <a:spAutoFit/>
-          </a:bodyPr>
-          <a:lstStyle/>
-          <a:p>
-            <a:r>
-              <a:rPr sz="2800" b="1" u="none">
-                <a:solidFill>
-                  <a:srgbClr val="FF0000"/>
-                </a:solidFill>
-                <a:latin typeface="맑은 고딕"/>
-              </a:rPr>
-              <a:t>이 이야기는 천문대만의 이야기가 아니다</a:t>
-            </a:r>
-          </a:p>
-        </p:txBody>
-      </p:sp>
-      <p:sp>
-        <p:nvSpPr>
-          <p:cNvPr id="3" name="Rectangle 2"/>
+      <p:sp>
+        <p:nvSpPr>
+          <p:cNvPr id="4" name="Rectangle 3"/>
           <p:cNvSpPr/>
           <p:nvPr/>
         </p:nvSpPr>
@@ -15562,84 +16314,45 @@
           <a:p>
             <a:pPr algn="ctr"/>
             <a:r>
-              <a:rPr sz="1300">
+              <a:rPr sz="1300" b="1">
                 <a:solidFill>
                   <a:srgbClr val="566070"/>
                 </a:solidFill>
                 <a:latin typeface="맑은 고딕"/>
               </a:rPr>
-              <a:t>[도식]</a:t>
-            </a:r>
-          </a:p>
-        </p:txBody>
-      </p:sp>
-      <p:sp>
-        <p:nvSpPr>
-          <p:cNvPr id="4" name="TextBox 3"/>
-          <p:cNvSpPr txBox="1"/>
-          <p:nvPr/>
-        </p:nvSpPr>
-        <p:spPr>
-          <a:xfrm>
-            <a:off x="5989320" y="2103120"/>
-            <a:ext cx="5303520" cy="2926080"/>
-          </a:xfrm>
-          <a:prstGeom prst="rect">
-            <a:avLst/>
-          </a:prstGeom>
-          <a:noFill/>
-        </p:spPr>
-        <p:txBody>
-          <a:bodyPr wrap="square">
-            <a:spAutoFit/>
-          </a:bodyPr>
-          <a:lstStyle/>
-          <a:p>
-            <a:pPr>
-              <a:spcAft>
+              <a:t>[기사 인용]</a:t>
+            </a:r>
+          </a:p>
+          <a:p>
+            <a:pPr algn="ctr">
+              <a:spcBef>
                 <a:spcPts val="800"/>
-              </a:spcAft>
+              </a:spcBef>
             </a:pPr>
             <a:r>
-              <a:rPr sz="2400" b="0" u="none">
+              <a:rPr sz="1800" b="1">
                 <a:solidFill>
                   <a:srgbClr val="000000"/>
                 </a:solidFill>
                 <a:latin typeface="맑은 고딕"/>
               </a:rPr>
-              <a:t>학교, 박물관, 도서관, 과학관도 AI가 설명을 대신하는 시대의 질문을 마주한다</a:t>
-            </a:r>
-          </a:p>
-          <a:p>
-            <a:pPr>
-              <a:spcAft>
-                <a:spcPts val="800"/>
-              </a:spcAft>
+              <a:t>BBC</a:t>
+            </a:r>
+          </a:p>
+          <a:p>
+            <a:pPr algn="ctr">
+              <a:spcBef>
+                <a:spcPts val="400"/>
+              </a:spcBef>
             </a:pPr>
             <a:r>
-              <a:rPr sz="2400" b="0" u="none">
+              <a:rPr sz="1400" b="0">
                 <a:solidFill>
-                  <a:srgbClr val="000000"/>
+                  <a:srgbClr val="566070"/>
                 </a:solidFill>
                 <a:latin typeface="맑은 고딕"/>
               </a:rPr>
-              <a:t>UNESCO와 OECD 자료는 AI 교육을 단순 도구 사용이 아니라 역량·원칙의 문제로 다룬다</a:t>
-            </a:r>
-          </a:p>
-          <a:p>
-            <a:pPr>
-              <a:spcAft>
-                <a:spcPts val="800"/>
-              </a:spcAft>
-            </a:pPr>
-            <a:r>
-              <a:rPr sz="2400" b="0" u="none">
-                <a:solidFill>
-                  <a:srgbClr val="000000"/>
-                </a:solidFill>
-                <a:latin typeface="맑은 고딕"/>
-              </a:rPr>
-              <a:t>따라서 핵심은 답 제공 경쟁이 아니라 질문·검증·맥락을 가르치는 역할 변화다</a:t>
+              <a:t>천문대가 왜 이런 말을 했을까</a:t>
             </a:r>
           </a:p>
         </p:txBody>
@@ -15652,7 +16365,7 @@
 </p:sld>
 </file>
 
-<file path=ppt/slides/slide6.xml><?xml version="1.0" encoding="utf-8"?>
+<file path=ppt/slides/slide5.xml><?xml version="1.0" encoding="utf-8"?>
 <p:sld xmlns:a="http://schemas.openxmlformats.org/drawingml/2006/main" xmlns:p="http://schemas.openxmlformats.org/presentationml/2006/main" xmlns:r="http://schemas.openxmlformats.org/officeDocument/2006/relationships">
   <p:cSld>
     <p:bg>
@@ -15699,329 +16412,7 @@
                 </a:solidFill>
                 <a:latin typeface="맑은 고딕"/>
               </a:rPr>
-              <a:t>그러면 이제 공부는 무엇이 되는가</a:t>
-            </a:r>
-          </a:p>
-        </p:txBody>
-      </p:sp>
-      <p:sp>
-        <p:nvSpPr>
-          <p:cNvPr id="3" name="TextBox 2"/>
-          <p:cNvSpPr txBox="1"/>
-          <p:nvPr/>
-        </p:nvSpPr>
-        <p:spPr>
-          <a:xfrm>
-            <a:off x="713232" y="2103120"/>
-            <a:ext cx="10652760" cy="2926080"/>
-          </a:xfrm>
-          <a:prstGeom prst="rect">
-            <a:avLst/>
-          </a:prstGeom>
-          <a:noFill/>
-        </p:spPr>
-        <p:txBody>
-          <a:bodyPr wrap="square">
-            <a:spAutoFit/>
-          </a:bodyPr>
-          <a:lstStyle/>
-          <a:p>
-            <a:pPr>
-              <a:spcAft>
-                <a:spcPts val="800"/>
-              </a:spcAft>
-            </a:pPr>
-            <a:r>
-              <a:rPr sz="2800" b="0" u="none">
-                <a:solidFill>
-                  <a:srgbClr val="000000"/>
-                </a:solidFill>
-                <a:latin typeface="맑은 고딕"/>
-              </a:rPr>
-              <a:t>답을 아는 능력인가</a:t>
-            </a:r>
-          </a:p>
-          <a:p>
-            <a:pPr>
-              <a:spcAft>
-                <a:spcPts val="800"/>
-              </a:spcAft>
-            </a:pPr>
-            <a:r>
-              <a:rPr sz="2800" b="0" u="none">
-                <a:solidFill>
-                  <a:srgbClr val="000000"/>
-                </a:solidFill>
-                <a:latin typeface="맑은 고딕"/>
-              </a:rPr>
-              <a:t>답을 의심하고 확인하는 능력인가</a:t>
-            </a:r>
-          </a:p>
-          <a:p>
-            <a:pPr>
-              <a:spcAft>
-                <a:spcPts val="800"/>
-              </a:spcAft>
-            </a:pPr>
-            <a:r>
-              <a:rPr sz="2800" b="0" u="none">
-                <a:solidFill>
-                  <a:srgbClr val="000000"/>
-                </a:solidFill>
-                <a:latin typeface="맑은 고딕"/>
-              </a:rPr>
-              <a:t>혹은 더 좋은 질문을 만드는 능력인가</a:t>
-            </a:r>
-          </a:p>
-        </p:txBody>
-      </p:sp>
-    </p:spTree>
-  </p:cSld>
-  <p:clrMapOvr>
-    <a:masterClrMapping/>
-  </p:clrMapOvr>
-</p:sld>
-</file>
-
-<file path=ppt/slides/slide7.xml><?xml version="1.0" encoding="utf-8"?>
-<p:sld xmlns:a="http://schemas.openxmlformats.org/drawingml/2006/main" xmlns:p="http://schemas.openxmlformats.org/presentationml/2006/main" xmlns:r="http://schemas.openxmlformats.org/officeDocument/2006/relationships">
-  <p:cSld>
-    <p:bg>
-      <p:bgPr>
-        <a:solidFill>
-          <a:srgbClr val="F8F9FA"/>
-        </a:solidFill>
-        <a:effectLst/>
-      </p:bgPr>
-    </p:bg>
-    <p:spTree>
-      <p:nvGrpSpPr>
-        <p:cNvPr id="1" name=""/>
-        <p:cNvGrpSpPr/>
-        <p:nvPr/>
-      </p:nvGrpSpPr>
-      <p:grpSpPr/>
-      <p:sp>
-        <p:nvSpPr>
-          <p:cNvPr id="2" name="TextBox 1"/>
-          <p:cNvSpPr txBox="1"/>
-          <p:nvPr/>
-        </p:nvSpPr>
-        <p:spPr>
-          <a:xfrm>
-            <a:off x="843991" y="1273759"/>
-            <a:ext cx="10752429" cy="2424988"/>
-          </a:xfrm>
-          <a:prstGeom prst="rect">
-            <a:avLst/>
-          </a:prstGeom>
-          <a:noFill/>
-        </p:spPr>
-        <p:txBody>
-          <a:bodyPr wrap="square">
-            <a:spAutoFit/>
-          </a:bodyPr>
-          <a:lstStyle/>
-          <a:p>
-            <a:r>
-              <a:rPr sz="5400" b="1" u="none">
-                <a:solidFill>
-                  <a:srgbClr val="181C23"/>
-                </a:solidFill>
-                <a:latin typeface="맑은 고딕"/>
-              </a:rPr>
-              <a:t>생략되는 건 답이 아니라 과정</a:t>
-            </a:r>
-          </a:p>
-        </p:txBody>
-      </p:sp>
-    </p:spTree>
-  </p:cSld>
-  <p:clrMapOvr>
-    <a:masterClrMapping/>
-  </p:clrMapOvr>
-</p:sld>
-</file>
-
-<file path=ppt/slides/slide8.xml><?xml version="1.0" encoding="utf-8"?>
-<p:sld xmlns:a="http://schemas.openxmlformats.org/drawingml/2006/main" xmlns:p="http://schemas.openxmlformats.org/presentationml/2006/main" xmlns:r="http://schemas.openxmlformats.org/officeDocument/2006/relationships">
-  <p:cSld>
-    <p:bg>
-      <p:bgPr>
-        <a:solidFill>
-          <a:srgbClr val="F8F9FA"/>
-        </a:solidFill>
-        <a:effectLst/>
-      </p:bgPr>
-    </p:bg>
-    <p:spTree>
-      <p:nvGrpSpPr>
-        <p:cNvPr id="1" name=""/>
-        <p:cNvGrpSpPr/>
-        <p:nvPr/>
-      </p:nvGrpSpPr>
-      <p:grpSpPr/>
-      <p:sp>
-        <p:nvSpPr>
-          <p:cNvPr id="2" name="TextBox 1"/>
-          <p:cNvSpPr txBox="1"/>
-          <p:nvPr/>
-        </p:nvSpPr>
-        <p:spPr>
-          <a:xfrm>
-            <a:off x="572414" y="356616"/>
-            <a:ext cx="11192256" cy="521207"/>
-          </a:xfrm>
-          <a:prstGeom prst="rect">
-            <a:avLst/>
-          </a:prstGeom>
-          <a:noFill/>
-        </p:spPr>
-        <p:txBody>
-          <a:bodyPr wrap="square">
-            <a:spAutoFit/>
-          </a:bodyPr>
-          <a:lstStyle/>
-          <a:p>
-            <a:r>
-              <a:rPr sz="2800" b="1" u="none">
-                <a:solidFill>
-                  <a:srgbClr val="FF0000"/>
-                </a:solidFill>
-                <a:latin typeface="맑은 고딕"/>
-              </a:rPr>
-              <a:t>예전 검색은 귀찮았지만 흔적이 남았다</a:t>
-            </a:r>
-          </a:p>
-        </p:txBody>
-      </p:sp>
-      <p:sp>
-        <p:nvSpPr>
-          <p:cNvPr id="3" name="TextBox 2"/>
-          <p:cNvSpPr txBox="1"/>
-          <p:nvPr/>
-        </p:nvSpPr>
-        <p:spPr>
-          <a:xfrm>
-            <a:off x="572414" y="1874519"/>
-            <a:ext cx="11193170" cy="1302105"/>
-          </a:xfrm>
-          <a:prstGeom prst="rect">
-            <a:avLst/>
-          </a:prstGeom>
-          <a:noFill/>
-        </p:spPr>
-        <p:txBody>
-          <a:bodyPr wrap="square">
-            <a:spAutoFit/>
-          </a:bodyPr>
-          <a:lstStyle/>
-          <a:p>
-            <a:pPr>
-              <a:spcAft>
-                <a:spcPts val="800"/>
-              </a:spcAft>
-            </a:pPr>
-            <a:r>
-              <a:rPr sz="2800" b="0" u="none">
-                <a:solidFill>
-                  <a:srgbClr val="000000"/>
-                </a:solidFill>
-                <a:latin typeface="맑은 고딕"/>
-              </a:rPr>
-              <a:t>검색어를 바꿔보고, 여러 결과를 비교하고, 출처를 고르는 과정이 있었다</a:t>
-            </a:r>
-          </a:p>
-          <a:p>
-            <a:pPr>
-              <a:spcAft>
-                <a:spcPts val="800"/>
-              </a:spcAft>
-            </a:pPr>
-            <a:r>
-              <a:rPr sz="2800" b="0" u="none">
-                <a:solidFill>
-                  <a:srgbClr val="000000"/>
-                </a:solidFill>
-                <a:latin typeface="맑은 고딕"/>
-              </a:rPr>
-              <a:t>이 과정은 느리지만 정보 탐색의 다양성과 판단 훈련을 남긴다</a:t>
-            </a:r>
-          </a:p>
-          <a:p>
-            <a:pPr>
-              <a:spcAft>
-                <a:spcPts val="800"/>
-              </a:spcAft>
-            </a:pPr>
-            <a:r>
-              <a:rPr sz="2800" b="0" u="none">
-                <a:solidFill>
-                  <a:srgbClr val="000000"/>
-                </a:solidFill>
-                <a:latin typeface="맑은 고딕"/>
-              </a:rPr>
-              <a:t>Microsoft Research 자료는 generative AI가 정보 탐색 다양성에 어떤 영향을 줄 수 있는지 문제를 제기한다</a:t>
-            </a:r>
-          </a:p>
-        </p:txBody>
-      </p:sp>
-    </p:spTree>
-  </p:cSld>
-  <p:clrMapOvr>
-    <a:masterClrMapping/>
-  </p:clrMapOvr>
-</p:sld>
-</file>
-
-<file path=ppt/slides/slide9.xml><?xml version="1.0" encoding="utf-8"?>
-<p:sld xmlns:a="http://schemas.openxmlformats.org/drawingml/2006/main" xmlns:p="http://schemas.openxmlformats.org/presentationml/2006/main" xmlns:r="http://schemas.openxmlformats.org/officeDocument/2006/relationships">
-  <p:cSld>
-    <p:bg>
-      <p:bgPr>
-        <a:solidFill>
-          <a:srgbClr val="F8F9FA"/>
-        </a:solidFill>
-        <a:effectLst/>
-      </p:bgPr>
-    </p:bg>
-    <p:spTree>
-      <p:nvGrpSpPr>
-        <p:cNvPr id="1" name=""/>
-        <p:cNvGrpSpPr/>
-        <p:nvPr/>
-      </p:nvGrpSpPr>
-      <p:grpSpPr/>
-      <p:sp>
-        <p:nvSpPr>
-          <p:cNvPr id="2" name="TextBox 1"/>
-          <p:cNvSpPr txBox="1"/>
-          <p:nvPr/>
-        </p:nvSpPr>
-        <p:spPr>
-          <a:xfrm>
-            <a:off x="572414" y="356616"/>
-            <a:ext cx="11192256" cy="521207"/>
-          </a:xfrm>
-          <a:prstGeom prst="rect">
-            <a:avLst/>
-          </a:prstGeom>
-          <a:noFill/>
-        </p:spPr>
-        <p:txBody>
-          <a:bodyPr wrap="square">
-            <a:spAutoFit/>
-          </a:bodyPr>
-          <a:lstStyle/>
-          <a:p>
-            <a:r>
-              <a:rPr sz="2800" b="1" u="none">
-                <a:solidFill>
-                  <a:srgbClr val="FF0000"/>
-                </a:solidFill>
-                <a:latin typeface="맑은 고딕"/>
-              </a:rPr>
-              <a:t>AI 즉답은 그 과정을 압축한다</a:t>
+              <a:t>이 이야기는 천문대만의 이야기가 아니다</a:t>
             </a:r>
           </a:p>
         </p:txBody>
@@ -16069,7 +16460,568 @@
           <a:p>
             <a:pPr algn="ctr"/>
             <a:r>
-              <a:rPr sz="1300">
+              <a:rPr sz="1300" b="0">
+                <a:solidFill>
+                  <a:srgbClr val="566070"/>
+                </a:solidFill>
+                <a:latin typeface="맑은 고딕"/>
+              </a:rPr>
+              <a:t>[도식]</a:t>
+            </a:r>
+          </a:p>
+        </p:txBody>
+      </p:sp>
+      <p:sp>
+        <p:nvSpPr>
+          <p:cNvPr id="4" name="TextBox 3"/>
+          <p:cNvSpPr txBox="1"/>
+          <p:nvPr/>
+        </p:nvSpPr>
+        <p:spPr>
+          <a:xfrm>
+            <a:off x="5989320" y="2103120"/>
+            <a:ext cx="5303520" cy="2926080"/>
+          </a:xfrm>
+          <a:prstGeom prst="rect">
+            <a:avLst/>
+          </a:prstGeom>
+          <a:noFill/>
+        </p:spPr>
+        <p:txBody>
+          <a:bodyPr wrap="square">
+            <a:spAutoFit/>
+          </a:bodyPr>
+          <a:lstStyle/>
+          <a:p>
+            <a:pPr>
+              <a:spcAft>
+                <a:spcPts val="800"/>
+              </a:spcAft>
+            </a:pPr>
+            <a:r>
+              <a:rPr sz="2800" b="0" u="none">
+                <a:solidFill>
+                  <a:srgbClr val="000000"/>
+                </a:solidFill>
+                <a:latin typeface="맑은 고딕"/>
+              </a:rPr>
+              <a:t>학교, 박물관, 도서관, 과학관도 AI가 설명을 대신하는 시대의 질문을 마주한다</a:t>
+            </a:r>
+          </a:p>
+          <a:p>
+            <a:pPr>
+              <a:spcAft>
+                <a:spcPts val="800"/>
+              </a:spcAft>
+            </a:pPr>
+            <a:r>
+              <a:rPr sz="2800" b="0" u="none">
+                <a:solidFill>
+                  <a:srgbClr val="000000"/>
+                </a:solidFill>
+                <a:latin typeface="맑은 고딕"/>
+              </a:rPr>
+              <a:t>UNESCO와 OECD 자료는 AI 교육을 단순 도구 사용이 아니라 역량·원칙의 문제로 다룬다</a:t>
+            </a:r>
+          </a:p>
+        </p:txBody>
+      </p:sp>
+    </p:spTree>
+  </p:cSld>
+  <p:clrMapOvr>
+    <a:masterClrMapping/>
+  </p:clrMapOvr>
+</p:sld>
+</file>
+
+<file path=ppt/slides/slide6.xml><?xml version="1.0" encoding="utf-8"?>
+<p:sld xmlns:a="http://schemas.openxmlformats.org/drawingml/2006/main" xmlns:p="http://schemas.openxmlformats.org/presentationml/2006/main" xmlns:r="http://schemas.openxmlformats.org/officeDocument/2006/relationships">
+  <p:cSld>
+    <p:bg>
+      <p:bgPr>
+        <a:solidFill>
+          <a:srgbClr val="F8F9FA"/>
+        </a:solidFill>
+        <a:effectLst/>
+      </p:bgPr>
+    </p:bg>
+    <p:spTree>
+      <p:nvGrpSpPr>
+        <p:cNvPr id="1" name=""/>
+        <p:cNvGrpSpPr/>
+        <p:nvPr/>
+      </p:nvGrpSpPr>
+      <p:grpSpPr/>
+      <p:sp>
+        <p:nvSpPr>
+          <p:cNvPr id="2" name="TextBox 1"/>
+          <p:cNvSpPr txBox="1"/>
+          <p:nvPr/>
+        </p:nvSpPr>
+        <p:spPr>
+          <a:xfrm>
+            <a:off x="572414" y="356616"/>
+            <a:ext cx="11192256" cy="521207"/>
+          </a:xfrm>
+          <a:prstGeom prst="rect">
+            <a:avLst/>
+          </a:prstGeom>
+          <a:noFill/>
+        </p:spPr>
+        <p:txBody>
+          <a:bodyPr wrap="square">
+            <a:spAutoFit/>
+          </a:bodyPr>
+          <a:lstStyle/>
+          <a:p>
+            <a:r>
+              <a:rPr sz="2800" b="1" u="none">
+                <a:solidFill>
+                  <a:srgbClr val="FF0000"/>
+                </a:solidFill>
+                <a:latin typeface="맑은 고딕"/>
+              </a:rPr>
+              <a:t>그러면 이제 공부는 무엇이 되는가</a:t>
+            </a:r>
+          </a:p>
+        </p:txBody>
+      </p:sp>
+      <p:sp>
+        <p:nvSpPr>
+          <p:cNvPr id="3" name="TextBox 2"/>
+          <p:cNvSpPr txBox="1"/>
+          <p:nvPr/>
+        </p:nvSpPr>
+        <p:spPr>
+          <a:xfrm>
+            <a:off x="713232" y="2103120"/>
+            <a:ext cx="10652760" cy="2926080"/>
+          </a:xfrm>
+          <a:prstGeom prst="rect">
+            <a:avLst/>
+          </a:prstGeom>
+          <a:noFill/>
+        </p:spPr>
+        <p:txBody>
+          <a:bodyPr wrap="square">
+            <a:spAutoFit/>
+          </a:bodyPr>
+          <a:lstStyle/>
+          <a:p>
+            <a:pPr>
+              <a:spcAft>
+                <a:spcPts val="800"/>
+              </a:spcAft>
+            </a:pPr>
+            <a:r>
+              <a:rPr sz="2800" b="0" u="none">
+                <a:solidFill>
+                  <a:srgbClr val="000000"/>
+                </a:solidFill>
+                <a:latin typeface="맑은 고딕"/>
+              </a:rPr>
+              <a:t>답을 아는 능력인가</a:t>
+            </a:r>
+          </a:p>
+          <a:p>
+            <a:pPr>
+              <a:spcAft>
+                <a:spcPts val="800"/>
+              </a:spcAft>
+            </a:pPr>
+            <a:r>
+              <a:rPr sz="2800" b="0" u="none">
+                <a:solidFill>
+                  <a:srgbClr val="000000"/>
+                </a:solidFill>
+                <a:latin typeface="맑은 고딕"/>
+              </a:rPr>
+              <a:t>답을 의심하고 확인하는 능력인가</a:t>
+            </a:r>
+          </a:p>
+          <a:p>
+            <a:pPr>
+              <a:spcAft>
+                <a:spcPts val="800"/>
+              </a:spcAft>
+            </a:pPr>
+            <a:r>
+              <a:rPr sz="2800" b="0" u="none">
+                <a:solidFill>
+                  <a:srgbClr val="000000"/>
+                </a:solidFill>
+                <a:latin typeface="맑은 고딕"/>
+              </a:rPr>
+              <a:t>혹은 더 좋은 질문을 만드는 능력인가</a:t>
+            </a:r>
+          </a:p>
+        </p:txBody>
+      </p:sp>
+    </p:spTree>
+  </p:cSld>
+  <p:clrMapOvr>
+    <a:masterClrMapping/>
+  </p:clrMapOvr>
+</p:sld>
+</file>
+
+<file path=ppt/slides/slide7.xml><?xml version="1.0" encoding="utf-8"?>
+<p:sld xmlns:a="http://schemas.openxmlformats.org/drawingml/2006/main" xmlns:p="http://schemas.openxmlformats.org/presentationml/2006/main" xmlns:r="http://schemas.openxmlformats.org/officeDocument/2006/relationships">
+  <p:cSld>
+    <p:bg>
+      <p:bgPr>
+        <a:solidFill>
+          <a:srgbClr val="F8F9FA"/>
+        </a:solidFill>
+        <a:effectLst/>
+      </p:bgPr>
+    </p:bg>
+    <p:spTree>
+      <p:nvGrpSpPr>
+        <p:cNvPr id="1" name=""/>
+        <p:cNvGrpSpPr/>
+        <p:nvPr/>
+      </p:nvGrpSpPr>
+      <p:grpSpPr/>
+      <p:sp>
+        <p:nvSpPr>
+          <p:cNvPr id="2" name="TextBox 1"/>
+          <p:cNvSpPr txBox="1"/>
+          <p:nvPr/>
+        </p:nvSpPr>
+        <p:spPr>
+          <a:xfrm>
+            <a:off x="843991" y="1273759"/>
+            <a:ext cx="10752429" cy="2424988"/>
+          </a:xfrm>
+          <a:prstGeom prst="rect">
+            <a:avLst/>
+          </a:prstGeom>
+          <a:noFill/>
+        </p:spPr>
+        <p:txBody>
+          <a:bodyPr wrap="square">
+            <a:spAutoFit/>
+          </a:bodyPr>
+          <a:lstStyle/>
+          <a:p>
+            <a:r>
+              <a:rPr sz="5400" b="1" u="none">
+                <a:solidFill>
+                  <a:srgbClr val="181C23"/>
+                </a:solidFill>
+                <a:latin typeface="맑은 고딕"/>
+              </a:rPr>
+              <a:t>생략되는 건 답이 아니라 과정</a:t>
+            </a:r>
+          </a:p>
+        </p:txBody>
+      </p:sp>
+    </p:spTree>
+  </p:cSld>
+  <p:clrMapOvr>
+    <a:masterClrMapping/>
+  </p:clrMapOvr>
+</p:sld>
+</file>
+
+<file path=ppt/slides/slide8.xml><?xml version="1.0" encoding="utf-8"?>
+<p:sld xmlns:a="http://schemas.openxmlformats.org/drawingml/2006/main" xmlns:p="http://schemas.openxmlformats.org/presentationml/2006/main" xmlns:r="http://schemas.openxmlformats.org/officeDocument/2006/relationships">
+  <p:cSld>
+    <p:bg>
+      <p:bgPr>
+        <a:solidFill>
+          <a:srgbClr val="F8F9FA"/>
+        </a:solidFill>
+        <a:effectLst/>
+      </p:bgPr>
+    </p:bg>
+    <p:spTree>
+      <p:nvGrpSpPr>
+        <p:cNvPr id="1" name=""/>
+        <p:cNvGrpSpPr/>
+        <p:nvPr/>
+      </p:nvGrpSpPr>
+      <p:grpSpPr/>
+      <p:sp>
+        <p:nvSpPr>
+          <p:cNvPr id="2" name="TextBox 1"/>
+          <p:cNvSpPr txBox="1"/>
+          <p:nvPr/>
+        </p:nvSpPr>
+        <p:spPr>
+          <a:xfrm>
+            <a:off x="572414" y="356616"/>
+            <a:ext cx="11192256" cy="521207"/>
+          </a:xfrm>
+          <a:prstGeom prst="rect">
+            <a:avLst/>
+          </a:prstGeom>
+          <a:noFill/>
+        </p:spPr>
+        <p:txBody>
+          <a:bodyPr wrap="square">
+            <a:spAutoFit/>
+          </a:bodyPr>
+          <a:lstStyle/>
+          <a:p>
+            <a:r>
+              <a:rPr sz="2800" b="1" u="none">
+                <a:solidFill>
+                  <a:srgbClr val="FF0000"/>
+                </a:solidFill>
+                <a:latin typeface="맑은 고딕"/>
+              </a:rPr>
+              <a:t>예전 검색은 귀찮았지만 흔적이 남았다</a:t>
+            </a:r>
+          </a:p>
+        </p:txBody>
+      </p:sp>
+      <p:sp>
+        <p:nvSpPr>
+          <p:cNvPr id="3" name="TextBox 2"/>
+          <p:cNvSpPr txBox="1"/>
+          <p:nvPr/>
+        </p:nvSpPr>
+        <p:spPr>
+          <a:xfrm>
+            <a:off x="5989320" y="1208836"/>
+            <a:ext cx="5394960" cy="1302105"/>
+          </a:xfrm>
+          <a:prstGeom prst="rect">
+            <a:avLst/>
+          </a:prstGeom>
+          <a:noFill/>
+        </p:spPr>
+        <p:txBody>
+          <a:bodyPr wrap="square">
+            <a:spAutoFit/>
+          </a:bodyPr>
+          <a:lstStyle/>
+          <a:p>
+            <a:pPr>
+              <a:spcAft>
+                <a:spcPts val="800"/>
+              </a:spcAft>
+            </a:pPr>
+            <a:r>
+              <a:rPr sz="2800" b="0" u="none">
+                <a:solidFill>
+                  <a:srgbClr val="000000"/>
+                </a:solidFill>
+                <a:latin typeface="맑은 고딕"/>
+              </a:rPr>
+              <a:t>검색어를 바꿔보고, 여러 결과를 비교하고, 출처를 고르는 과정이 있었다</a:t>
+            </a:r>
+          </a:p>
+          <a:p>
+            <a:pPr>
+              <a:spcAft>
+                <a:spcPts val="800"/>
+              </a:spcAft>
+            </a:pPr>
+            <a:r>
+              <a:rPr sz="2800" b="0" u="none">
+                <a:solidFill>
+                  <a:srgbClr val="000000"/>
+                </a:solidFill>
+                <a:latin typeface="맑은 고딕"/>
+              </a:rPr>
+              <a:t>이 과정은 느리지만 정보 탐색의 다양성과 판단 훈련을 남긴다</a:t>
+            </a:r>
+          </a:p>
+        </p:txBody>
+      </p:sp>
+      <p:sp>
+        <p:nvSpPr>
+          <p:cNvPr id="4" name="Rectangle 3"/>
+          <p:cNvSpPr/>
+          <p:nvPr/>
+        </p:nvSpPr>
+        <p:spPr>
+          <a:xfrm>
+            <a:off x="713232" y="1417320"/>
+            <a:ext cx="4892040" cy="4114800"/>
+          </a:xfrm>
+          <a:prstGeom prst="rect">
+            <a:avLst/>
+          </a:prstGeom>
+          <a:solidFill>
+            <a:srgbClr val="F5F5F5"/>
+          </a:solidFill>
+          <a:ln w="12700">
+            <a:solidFill>
+              <a:srgbClr val="BEBEBE"/>
+            </a:solidFill>
+          </a:ln>
+        </p:spPr>
+        <p:style>
+          <a:lnRef idx="1">
+            <a:schemeClr val="accent1"/>
+          </a:lnRef>
+          <a:fillRef idx="3">
+            <a:schemeClr val="accent1"/>
+          </a:fillRef>
+          <a:effectRef idx="2">
+            <a:schemeClr val="accent1"/>
+          </a:effectRef>
+          <a:fontRef idx="minor">
+            <a:schemeClr val="lt1"/>
+          </a:fontRef>
+        </p:style>
+        <p:txBody>
+          <a:bodyPr rtlCol="0" anchor="ctr" wrap="square"/>
+          <a:lstStyle/>
+          <a:p>
+            <a:pPr algn="ctr"/>
+            <a:r>
+              <a:rPr sz="1300" b="1">
+                <a:solidFill>
+                  <a:srgbClr val="566070"/>
+                </a:solidFill>
+                <a:latin typeface="맑은 고딕"/>
+              </a:rPr>
+              <a:t>[기사 인용]</a:t>
+            </a:r>
+          </a:p>
+          <a:p>
+            <a:pPr algn="ctr">
+              <a:spcBef>
+                <a:spcPts val="800"/>
+              </a:spcBef>
+            </a:pPr>
+            <a:r>
+              <a:rPr sz="1800" b="1">
+                <a:solidFill>
+                  <a:srgbClr val="000000"/>
+                </a:solidFill>
+                <a:latin typeface="맑은 고딕"/>
+              </a:rPr>
+              <a:t>Microsoft</a:t>
+            </a:r>
+          </a:p>
+          <a:p>
+            <a:pPr algn="ctr">
+              <a:spcBef>
+                <a:spcPts val="400"/>
+              </a:spcBef>
+            </a:pPr>
+            <a:r>
+              <a:rPr sz="1400" b="0">
+                <a:solidFill>
+                  <a:srgbClr val="566070"/>
+                </a:solidFill>
+                <a:latin typeface="맑은 고딕"/>
+              </a:rPr>
+              <a:t>예전 검색은 귀찮았지만 흔적이 남았다</a:t>
+            </a:r>
+          </a:p>
+        </p:txBody>
+      </p:sp>
+    </p:spTree>
+  </p:cSld>
+  <p:clrMapOvr>
+    <a:masterClrMapping/>
+  </p:clrMapOvr>
+</p:sld>
+</file>
+
+<file path=ppt/slides/slide9.xml><?xml version="1.0" encoding="utf-8"?>
+<p:sld xmlns:a="http://schemas.openxmlformats.org/drawingml/2006/main" xmlns:p="http://schemas.openxmlformats.org/presentationml/2006/main" xmlns:r="http://schemas.openxmlformats.org/officeDocument/2006/relationships">
+  <p:cSld>
+    <p:bg>
+      <p:bgPr>
+        <a:solidFill>
+          <a:srgbClr val="F8F9FA"/>
+        </a:solidFill>
+        <a:effectLst/>
+      </p:bgPr>
+    </p:bg>
+    <p:spTree>
+      <p:nvGrpSpPr>
+        <p:cNvPr id="1" name=""/>
+        <p:cNvGrpSpPr/>
+        <p:nvPr/>
+      </p:nvGrpSpPr>
+      <p:grpSpPr/>
+      <p:sp>
+        <p:nvSpPr>
+          <p:cNvPr id="2" name="TextBox 1"/>
+          <p:cNvSpPr txBox="1"/>
+          <p:nvPr/>
+        </p:nvSpPr>
+        <p:spPr>
+          <a:xfrm>
+            <a:off x="572414" y="356616"/>
+            <a:ext cx="11192256" cy="521207"/>
+          </a:xfrm>
+          <a:prstGeom prst="rect">
+            <a:avLst/>
+          </a:prstGeom>
+          <a:noFill/>
+        </p:spPr>
+        <p:txBody>
+          <a:bodyPr wrap="square">
+            <a:spAutoFit/>
+          </a:bodyPr>
+          <a:lstStyle/>
+          <a:p>
+            <a:r>
+              <a:rPr sz="2800" b="1" u="none">
+                <a:solidFill>
+                  <a:srgbClr val="FF0000"/>
+                </a:solidFill>
+                <a:latin typeface="맑은 고딕"/>
+              </a:rPr>
+              <a:t>AI 즉답은 그 과정을 압축한다</a:t>
+            </a:r>
+          </a:p>
+        </p:txBody>
+      </p:sp>
+      <p:sp>
+        <p:nvSpPr>
+          <p:cNvPr id="3" name="Rectangle 2"/>
+          <p:cNvSpPr/>
+          <p:nvPr/>
+        </p:nvSpPr>
+        <p:spPr>
+          <a:xfrm>
+            <a:off x="713232" y="1417320"/>
+            <a:ext cx="4892040" cy="4114800"/>
+          </a:xfrm>
+          <a:prstGeom prst="rect">
+            <a:avLst/>
+          </a:prstGeom>
+          <a:solidFill>
+            <a:srgbClr val="F5F5F5"/>
+          </a:solidFill>
+          <a:ln w="12700">
+            <a:solidFill>
+              <a:srgbClr val="BEBEBE"/>
+            </a:solidFill>
+          </a:ln>
+        </p:spPr>
+        <p:style>
+          <a:lnRef idx="1">
+            <a:schemeClr val="accent1"/>
+          </a:lnRef>
+          <a:fillRef idx="3">
+            <a:schemeClr val="accent1"/>
+          </a:fillRef>
+          <a:effectRef idx="2">
+            <a:schemeClr val="accent1"/>
+          </a:effectRef>
+          <a:fontRef idx="minor">
+            <a:schemeClr val="lt1"/>
+          </a:fontRef>
+        </p:style>
+        <p:txBody>
+          <a:bodyPr rtlCol="0" anchor="ctr" wrap="square"/>
+          <a:lstStyle/>
+          <a:p>
+            <a:pPr algn="ctr"/>
+            <a:r>
+              <a:rPr sz="1300" b="0">
                 <a:solidFill>
                   <a:srgbClr val="566070"/>
                 </a:solidFill>
@@ -16108,7 +17060,7 @@
               </a:spcAft>
             </a:pPr>
             <a:r>
-              <a:rPr sz="2400" b="0" u="none">
+              <a:rPr sz="2800" b="0" u="none">
                 <a:solidFill>
                   <a:srgbClr val="000000"/>
                 </a:solidFill>
@@ -16124,29 +17076,13 @@
               </a:spcAft>
             </a:pPr>
             <a:r>
-              <a:rPr sz="2400" b="0" u="none">
+              <a:rPr sz="2800" b="0" u="none">
                 <a:solidFill>
                   <a:srgbClr val="000000"/>
                 </a:solidFill>
                 <a:latin typeface="맑은 고딕"/>
               </a:rPr>
               <a:t>걱정되는 점: 비교·검증·실패의 경험이 줄어들 가능성이 있다</a:t>
-            </a:r>
-          </a:p>
-          <a:p>
-            <a:pPr>
-              <a:spcAft>
-                <a:spcPts val="800"/>
-              </a:spcAft>
-            </a:pPr>
-            <a:r>
-              <a:rPr sz="2400" b="0" u="none">
-                <a:solidFill>
-                  <a:srgbClr val="000000"/>
-                </a:solidFill>
-                <a:latin typeface="맑은 고딕"/>
-              </a:rPr>
-              <a:t>중요: 이것이 곧 학습 저하라는 단정은 아니며, 설계와 교육 원칙에 따라 달라질 수 있다</a:t>
             </a:r>
           </a:p>
         </p:txBody>

--- a/outputs/pptx/ai_knowledge_institution_styled_draft.pptx
+++ b/outputs/pptx/ai_knowledge_institution_styled_draft.pptx
@@ -12616,6 +12616,9 @@
           <a:lstStyle/>
           <a:p>
             <a:pPr>
+              <a:lnSpc>
+                <a:spcPct val="150000"/>
+              </a:lnSpc>
               <a:spcAft>
                 <a:spcPts val="800"/>
               </a:spcAft>
@@ -12632,6 +12635,9 @@
           </a:p>
           <a:p>
             <a:pPr>
+              <a:lnSpc>
+                <a:spcPct val="150000"/>
+              </a:lnSpc>
               <a:spcAft>
                 <a:spcPts val="800"/>
               </a:spcAft>
@@ -12983,6 +12989,9 @@
           <a:lstStyle/>
           <a:p>
             <a:pPr>
+              <a:lnSpc>
+                <a:spcPct val="150000"/>
+              </a:lnSpc>
               <a:spcAft>
                 <a:spcPts val="800"/>
               </a:spcAft>
@@ -12999,6 +13008,9 @@
           </a:p>
           <a:p>
             <a:pPr>
+              <a:lnSpc>
+                <a:spcPct val="150000"/>
+              </a:lnSpc>
               <a:spcAft>
                 <a:spcPts val="800"/>
               </a:spcAft>
@@ -13015,6 +13027,9 @@
           </a:p>
           <a:p>
             <a:pPr>
+              <a:lnSpc>
+                <a:spcPct val="150000"/>
+              </a:lnSpc>
               <a:spcAft>
                 <a:spcPts val="800"/>
               </a:spcAft>
@@ -13114,6 +13129,9 @@
           <a:lstStyle/>
           <a:p>
             <a:pPr>
+              <a:lnSpc>
+                <a:spcPct val="150000"/>
+              </a:lnSpc>
               <a:spcAft>
                 <a:spcPts val="800"/>
               </a:spcAft>
@@ -13130,6 +13148,9 @@
           </a:p>
           <a:p>
             <a:pPr>
+              <a:lnSpc>
+                <a:spcPct val="150000"/>
+              </a:lnSpc>
               <a:spcAft>
                 <a:spcPts val="800"/>
               </a:spcAft>
@@ -13146,6 +13167,9 @@
           </a:p>
           <a:p>
             <a:pPr>
+              <a:lnSpc>
+                <a:spcPct val="150000"/>
+              </a:lnSpc>
               <a:spcAft>
                 <a:spcPts val="800"/>
               </a:spcAft>
@@ -13305,6 +13329,9 @@
           <a:lstStyle/>
           <a:p>
             <a:pPr>
+              <a:lnSpc>
+                <a:spcPct val="150000"/>
+              </a:lnSpc>
               <a:spcAft>
                 <a:spcPts val="800"/>
               </a:spcAft>
@@ -13321,6 +13348,9 @@
           </a:p>
           <a:p>
             <a:pPr>
+              <a:lnSpc>
+                <a:spcPct val="150000"/>
+              </a:lnSpc>
               <a:spcAft>
                 <a:spcPts val="800"/>
               </a:spcAft>
@@ -13506,6 +13536,9 @@
           <a:lstStyle/>
           <a:p>
             <a:pPr>
+              <a:lnSpc>
+                <a:spcPct val="150000"/>
+              </a:lnSpc>
               <a:spcAft>
                 <a:spcPts val="800"/>
               </a:spcAft>
@@ -13522,6 +13555,9 @@
           </a:p>
           <a:p>
             <a:pPr>
+              <a:lnSpc>
+                <a:spcPct val="150000"/>
+              </a:lnSpc>
               <a:spcAft>
                 <a:spcPts val="800"/>
               </a:spcAft>
@@ -13707,6 +13743,9 @@
           <a:lstStyle/>
           <a:p>
             <a:pPr>
+              <a:lnSpc>
+                <a:spcPct val="150000"/>
+              </a:lnSpc>
               <a:spcAft>
                 <a:spcPts val="800"/>
               </a:spcAft>
@@ -13723,6 +13762,9 @@
           </a:p>
           <a:p>
             <a:pPr>
+              <a:lnSpc>
+                <a:spcPct val="150000"/>
+              </a:lnSpc>
               <a:spcAft>
                 <a:spcPts val="800"/>
               </a:spcAft>
@@ -14449,6 +14491,9 @@
           <a:lstStyle/>
           <a:p>
             <a:pPr>
+              <a:lnSpc>
+                <a:spcPct val="150000"/>
+              </a:lnSpc>
               <a:spcAft>
                 <a:spcPts val="800"/>
               </a:spcAft>
@@ -14465,6 +14510,9 @@
           </a:p>
           <a:p>
             <a:pPr>
+              <a:lnSpc>
+                <a:spcPct val="150000"/>
+              </a:lnSpc>
               <a:spcAft>
                 <a:spcPts val="800"/>
               </a:spcAft>
@@ -14650,6 +14698,9 @@
           <a:lstStyle/>
           <a:p>
             <a:pPr>
+              <a:lnSpc>
+                <a:spcPct val="150000"/>
+              </a:lnSpc>
               <a:spcAft>
                 <a:spcPts val="800"/>
               </a:spcAft>
@@ -14666,6 +14717,9 @@
           </a:p>
           <a:p>
             <a:pPr>
+              <a:lnSpc>
+                <a:spcPct val="150000"/>
+              </a:lnSpc>
               <a:spcAft>
                 <a:spcPts val="800"/>
               </a:spcAft>
@@ -14765,6 +14819,9 @@
           <a:lstStyle/>
           <a:p>
             <a:pPr>
+              <a:lnSpc>
+                <a:spcPct val="150000"/>
+              </a:lnSpc>
               <a:spcAft>
                 <a:spcPts val="800"/>
               </a:spcAft>
@@ -14781,6 +14838,9 @@
           </a:p>
           <a:p>
             <a:pPr>
+              <a:lnSpc>
+                <a:spcPct val="150000"/>
+              </a:lnSpc>
               <a:spcAft>
                 <a:spcPts val="800"/>
               </a:spcAft>
@@ -15080,6 +15140,9 @@
           <a:lstStyle/>
           <a:p>
             <a:pPr>
+              <a:lnSpc>
+                <a:spcPct val="150000"/>
+              </a:lnSpc>
               <a:spcAft>
                 <a:spcPts val="800"/>
               </a:spcAft>
@@ -15096,6 +15159,9 @@
           </a:p>
           <a:p>
             <a:pPr>
+              <a:lnSpc>
+                <a:spcPct val="150000"/>
+              </a:lnSpc>
               <a:spcAft>
                 <a:spcPts val="800"/>
               </a:spcAft>
@@ -15195,6 +15261,9 @@
           <a:lstStyle/>
           <a:p>
             <a:pPr>
+              <a:lnSpc>
+                <a:spcPct val="150000"/>
+              </a:lnSpc>
               <a:spcAft>
                 <a:spcPts val="800"/>
               </a:spcAft>
@@ -15211,6 +15280,9 @@
           </a:p>
           <a:p>
             <a:pPr>
+              <a:lnSpc>
+                <a:spcPct val="150000"/>
+              </a:lnSpc>
               <a:spcAft>
                 <a:spcPts val="800"/>
               </a:spcAft>
@@ -15450,6 +15522,9 @@
           <a:lstStyle/>
           <a:p>
             <a:pPr>
+              <a:lnSpc>
+                <a:spcPct val="150000"/>
+              </a:lnSpc>
               <a:spcAft>
                 <a:spcPts val="800"/>
               </a:spcAft>
@@ -15466,6 +15541,9 @@
           </a:p>
           <a:p>
             <a:pPr>
+              <a:lnSpc>
+                <a:spcPct val="150000"/>
+              </a:lnSpc>
               <a:spcAft>
                 <a:spcPts val="800"/>
               </a:spcAft>
@@ -15565,6 +15643,9 @@
           <a:lstStyle/>
           <a:p>
             <a:pPr>
+              <a:lnSpc>
+                <a:spcPct val="150000"/>
+              </a:lnSpc>
               <a:spcAft>
                 <a:spcPts val="800"/>
               </a:spcAft>
@@ -15581,6 +15662,9 @@
           </a:p>
           <a:p>
             <a:pPr>
+              <a:lnSpc>
+                <a:spcPct val="150000"/>
+              </a:lnSpc>
               <a:spcAft>
                 <a:spcPts val="800"/>
               </a:spcAft>
@@ -15597,6 +15681,9 @@
           </a:p>
           <a:p>
             <a:pPr>
+              <a:lnSpc>
+                <a:spcPct val="150000"/>
+              </a:lnSpc>
               <a:spcAft>
                 <a:spcPts val="800"/>
               </a:spcAft>
@@ -15696,6 +15783,9 @@
           <a:lstStyle/>
           <a:p>
             <a:pPr>
+              <a:lnSpc>
+                <a:spcPct val="150000"/>
+              </a:lnSpc>
               <a:spcAft>
                 <a:spcPts val="800"/>
               </a:spcAft>
@@ -15712,6 +15802,9 @@
           </a:p>
           <a:p>
             <a:pPr>
+              <a:lnSpc>
+                <a:spcPct val="150000"/>
+              </a:lnSpc>
               <a:spcAft>
                 <a:spcPts val="800"/>
               </a:spcAft>
@@ -15728,6 +15821,9 @@
           </a:p>
           <a:p>
             <a:pPr>
+              <a:lnSpc>
+                <a:spcPct val="150000"/>
+              </a:lnSpc>
               <a:spcAft>
                 <a:spcPts val="800"/>
               </a:spcAft>
@@ -15827,6 +15923,9 @@
           <a:lstStyle/>
           <a:p>
             <a:pPr>
+              <a:lnSpc>
+                <a:spcPct val="150000"/>
+              </a:lnSpc>
               <a:spcAft>
                 <a:spcPts val="800"/>
               </a:spcAft>
@@ -15843,6 +15942,9 @@
           </a:p>
           <a:p>
             <a:pPr>
+              <a:lnSpc>
+                <a:spcPct val="150000"/>
+              </a:lnSpc>
               <a:spcAft>
                 <a:spcPts val="800"/>
               </a:spcAft>
@@ -16108,6 +16210,9 @@
           <a:lstStyle/>
           <a:p>
             <a:pPr>
+              <a:lnSpc>
+                <a:spcPct val="150000"/>
+              </a:lnSpc>
               <a:spcAft>
                 <a:spcPts val="800"/>
               </a:spcAft>
@@ -16124,6 +16229,9 @@
           </a:p>
           <a:p>
             <a:pPr>
+              <a:lnSpc>
+                <a:spcPct val="150000"/>
+              </a:lnSpc>
               <a:spcAft>
                 <a:spcPts val="800"/>
               </a:spcAft>
@@ -16140,6 +16248,9 @@
           </a:p>
           <a:p>
             <a:pPr>
+              <a:lnSpc>
+                <a:spcPct val="150000"/>
+              </a:lnSpc>
               <a:spcAft>
                 <a:spcPts val="800"/>
               </a:spcAft>
@@ -16239,6 +16350,9 @@
           <a:lstStyle/>
           <a:p>
             <a:pPr>
+              <a:lnSpc>
+                <a:spcPct val="150000"/>
+              </a:lnSpc>
               <a:spcAft>
                 <a:spcPts val="800"/>
               </a:spcAft>
@@ -16255,6 +16369,9 @@
           </a:p>
           <a:p>
             <a:pPr>
+              <a:lnSpc>
+                <a:spcPct val="150000"/>
+              </a:lnSpc>
               <a:spcAft>
                 <a:spcPts val="800"/>
               </a:spcAft>
@@ -16494,6 +16611,9 @@
           <a:lstStyle/>
           <a:p>
             <a:pPr>
+              <a:lnSpc>
+                <a:spcPct val="150000"/>
+              </a:lnSpc>
               <a:spcAft>
                 <a:spcPts val="800"/>
               </a:spcAft>
@@ -16510,6 +16630,9 @@
           </a:p>
           <a:p>
             <a:pPr>
+              <a:lnSpc>
+                <a:spcPct val="150000"/>
+              </a:lnSpc>
               <a:spcAft>
                 <a:spcPts val="800"/>
               </a:spcAft>
@@ -16609,6 +16732,9 @@
           <a:lstStyle/>
           <a:p>
             <a:pPr>
+              <a:lnSpc>
+                <a:spcPct val="150000"/>
+              </a:lnSpc>
               <a:spcAft>
                 <a:spcPts val="800"/>
               </a:spcAft>
@@ -16625,6 +16751,9 @@
           </a:p>
           <a:p>
             <a:pPr>
+              <a:lnSpc>
+                <a:spcPct val="150000"/>
+              </a:lnSpc>
               <a:spcAft>
                 <a:spcPts val="800"/>
               </a:spcAft>
@@ -16641,6 +16770,9 @@
           </a:p>
           <a:p>
             <a:pPr>
+              <a:lnSpc>
+                <a:spcPct val="150000"/>
+              </a:lnSpc>
               <a:spcAft>
                 <a:spcPts val="800"/>
               </a:spcAft>
@@ -16800,6 +16932,9 @@
           <a:lstStyle/>
           <a:p>
             <a:pPr>
+              <a:lnSpc>
+                <a:spcPct val="150000"/>
+              </a:lnSpc>
               <a:spcAft>
                 <a:spcPts val="800"/>
               </a:spcAft>
@@ -16816,6 +16951,9 @@
           </a:p>
           <a:p>
             <a:pPr>
+              <a:lnSpc>
+                <a:spcPct val="150000"/>
+              </a:lnSpc>
               <a:spcAft>
                 <a:spcPts val="800"/>
               </a:spcAft>
@@ -17055,6 +17193,9 @@
           <a:lstStyle/>
           <a:p>
             <a:pPr>
+              <a:lnSpc>
+                <a:spcPct val="150000"/>
+              </a:lnSpc>
               <a:spcAft>
                 <a:spcPts val="800"/>
               </a:spcAft>
@@ -17071,6 +17212,9 @@
           </a:p>
           <a:p>
             <a:pPr>
+              <a:lnSpc>
+                <a:spcPct val="150000"/>
+              </a:lnSpc>
               <a:spcAft>
                 <a:spcPts val="800"/>
               </a:spcAft>

--- a/outputs/pptx/ai_knowledge_institution_styled_draft.pptx
+++ b/outputs/pptx/ai_knowledge_institution_styled_draft.pptx
@@ -12582,7 +12582,7 @@
           <a:lstStyle/>
           <a:p>
             <a:r>
-              <a:rPr sz="2800" b="1" u="none">
+              <a:rPr sz="2800" b="0" u="none">
                 <a:solidFill>
                   <a:srgbClr val="FF0000"/>
                 </a:solidFill>
@@ -12610,7 +12610,7 @@
           <a:noFill/>
         </p:spPr>
         <p:txBody>
-          <a:bodyPr wrap="square">
+          <a:bodyPr wrap="square" anchor="ctr">
             <a:spAutoFit/>
           </a:bodyPr>
           <a:lstStyle/>
@@ -12697,9 +12697,9 @@
           <a:p>
             <a:pPr algn="ctr"/>
             <a:r>
-              <a:rPr sz="1300" b="1">
+              <a:rPr sz="1800" b="0">
                 <a:solidFill>
-                  <a:srgbClr val="566070"/>
+                  <a:srgbClr val="0070C0"/>
                 </a:solidFill>
                 <a:latin typeface="맑은 고딕"/>
               </a:rPr>
@@ -12809,9 +12809,9 @@
           <a:p>
             <a:pPr algn="ctr"/>
             <a:r>
-              <a:rPr sz="1300" b="1">
+              <a:rPr sz="1800" b="0">
                 <a:solidFill>
-                  <a:srgbClr val="566070"/>
+                  <a:srgbClr val="0070C0"/>
                 </a:solidFill>
                 <a:latin typeface="맑은 고딕"/>
               </a:rPr>
@@ -12920,7 +12920,7 @@
           <a:lstStyle/>
           <a:p>
             <a:r>
-              <a:rPr sz="2800" b="1" u="none">
+              <a:rPr sz="2800" b="0" u="none">
                 <a:solidFill>
                   <a:srgbClr val="FF0000"/>
                 </a:solidFill>
@@ -12983,7 +12983,7 @@
           <a:noFill/>
         </p:spPr>
         <p:txBody>
-          <a:bodyPr wrap="square">
+          <a:bodyPr wrap="square" anchor="ctr">
             <a:spAutoFit/>
           </a:bodyPr>
           <a:lstStyle/>
@@ -13095,7 +13095,7 @@
           <a:lstStyle/>
           <a:p>
             <a:r>
-              <a:rPr sz="2800" b="1" u="none">
+              <a:rPr sz="2800" b="0" u="none">
                 <a:solidFill>
                   <a:srgbClr val="FF0000"/>
                 </a:solidFill>
@@ -13123,7 +13123,7 @@
           <a:noFill/>
         </p:spPr>
         <p:txBody>
-          <a:bodyPr wrap="square">
+          <a:bodyPr wrap="square" anchor="ctr">
             <a:spAutoFit/>
           </a:bodyPr>
           <a:lstStyle/>
@@ -13295,7 +13295,7 @@
           <a:lstStyle/>
           <a:p>
             <a:r>
-              <a:rPr sz="2800" b="1" u="none">
+              <a:rPr sz="2800" b="0" u="none">
                 <a:solidFill>
                   <a:srgbClr val="FF0000"/>
                 </a:solidFill>
@@ -13323,7 +13323,7 @@
           <a:noFill/>
         </p:spPr>
         <p:txBody>
-          <a:bodyPr wrap="square">
+          <a:bodyPr wrap="square" anchor="ctr">
             <a:spAutoFit/>
           </a:bodyPr>
           <a:lstStyle/>
@@ -13410,9 +13410,9 @@
           <a:p>
             <a:pPr algn="ctr"/>
             <a:r>
-              <a:rPr sz="1300" b="1">
+              <a:rPr sz="1800" b="0">
                 <a:solidFill>
-                  <a:srgbClr val="566070"/>
+                  <a:srgbClr val="0070C0"/>
                 </a:solidFill>
                 <a:latin typeface="맑은 고딕"/>
               </a:rPr>
@@ -13502,7 +13502,7 @@
           <a:lstStyle/>
           <a:p>
             <a:r>
-              <a:rPr sz="2800" b="1" u="none">
+              <a:rPr sz="2800" b="0" u="none">
                 <a:solidFill>
                   <a:srgbClr val="FF0000"/>
                 </a:solidFill>
@@ -13530,7 +13530,7 @@
           <a:noFill/>
         </p:spPr>
         <p:txBody>
-          <a:bodyPr wrap="square">
+          <a:bodyPr wrap="square" anchor="ctr">
             <a:spAutoFit/>
           </a:bodyPr>
           <a:lstStyle/>
@@ -13617,9 +13617,9 @@
           <a:p>
             <a:pPr algn="ctr"/>
             <a:r>
-              <a:rPr sz="1300" b="1">
+              <a:rPr sz="1800" b="0">
                 <a:solidFill>
-                  <a:srgbClr val="566070"/>
+                  <a:srgbClr val="0070C0"/>
                 </a:solidFill>
                 <a:latin typeface="맑은 고딕"/>
               </a:rPr>
@@ -13709,7 +13709,7 @@
           <a:lstStyle/>
           <a:p>
             <a:r>
-              <a:rPr sz="2800" b="1" u="none">
+              <a:rPr sz="2800" b="0" u="none">
                 <a:solidFill>
                   <a:srgbClr val="FF0000"/>
                 </a:solidFill>
@@ -13737,7 +13737,7 @@
           <a:noFill/>
         </p:spPr>
         <p:txBody>
-          <a:bodyPr wrap="square">
+          <a:bodyPr wrap="square" anchor="ctr">
             <a:spAutoFit/>
           </a:bodyPr>
           <a:lstStyle/>
@@ -13824,9 +13824,9 @@
           <a:p>
             <a:pPr algn="ctr"/>
             <a:r>
-              <a:rPr sz="1300" b="1">
+              <a:rPr sz="1800" b="0">
                 <a:solidFill>
-                  <a:srgbClr val="566070"/>
+                  <a:srgbClr val="0070C0"/>
                 </a:solidFill>
                 <a:latin typeface="맑은 고딕"/>
               </a:rPr>
@@ -13916,7 +13916,7 @@
           <a:lstStyle/>
           <a:p>
             <a:r>
-              <a:rPr sz="2800" b="1" u="none">
+              <a:rPr sz="2800" b="0" u="none">
                 <a:solidFill>
                   <a:srgbClr val="FF0000"/>
                 </a:solidFill>
@@ -14403,7 +14403,7 @@
           <a:lstStyle/>
           <a:p>
             <a:r>
-              <a:rPr sz="2800" b="1" u="none">
+              <a:rPr sz="2800" b="0" u="none">
                 <a:solidFill>
                   <a:srgbClr val="FF0000"/>
                 </a:solidFill>
@@ -14457,9 +14457,9 @@
           <a:p>
             <a:pPr algn="ctr"/>
             <a:r>
-              <a:rPr sz="1300" b="0">
+              <a:rPr sz="1800" b="0">
                 <a:solidFill>
-                  <a:srgbClr val="566070"/>
+                  <a:srgbClr val="0070C0"/>
                 </a:solidFill>
                 <a:latin typeface="맑은 고딕"/>
               </a:rPr>
@@ -14485,7 +14485,7 @@
           <a:noFill/>
         </p:spPr>
         <p:txBody>
-          <a:bodyPr wrap="square">
+          <a:bodyPr wrap="square" anchor="ctr">
             <a:spAutoFit/>
           </a:bodyPr>
           <a:lstStyle/>
@@ -14578,7 +14578,7 @@
           <a:lstStyle/>
           <a:p>
             <a:r>
-              <a:rPr sz="2800" b="1" u="none">
+              <a:rPr sz="2800" b="0" u="none">
                 <a:solidFill>
                   <a:srgbClr val="FF0000"/>
                 </a:solidFill>
@@ -14632,9 +14632,9 @@
           <a:p>
             <a:pPr algn="ctr"/>
             <a:r>
-              <a:rPr sz="1300" b="1">
+              <a:rPr sz="1800" b="0">
                 <a:solidFill>
-                  <a:srgbClr val="566070"/>
+                  <a:srgbClr val="0070C0"/>
                 </a:solidFill>
                 <a:latin typeface="맑은 고딕"/>
               </a:rPr>
@@ -14692,7 +14692,7 @@
           <a:noFill/>
         </p:spPr>
         <p:txBody>
-          <a:bodyPr wrap="square">
+          <a:bodyPr wrap="square" anchor="ctr">
             <a:spAutoFit/>
           </a:bodyPr>
           <a:lstStyle/>
@@ -14785,7 +14785,7 @@
           <a:lstStyle/>
           <a:p>
             <a:r>
-              <a:rPr sz="2800" b="1" u="none">
+              <a:rPr sz="2800" b="0" u="none">
                 <a:solidFill>
                   <a:srgbClr val="FF0000"/>
                 </a:solidFill>
@@ -14813,7 +14813,7 @@
           <a:noFill/>
         </p:spPr>
         <p:txBody>
-          <a:bodyPr wrap="square">
+          <a:bodyPr wrap="square" anchor="ctr">
             <a:spAutoFit/>
           </a:bodyPr>
           <a:lstStyle/>
@@ -14900,9 +14900,9 @@
           <a:p>
             <a:pPr algn="ctr"/>
             <a:r>
-              <a:rPr sz="1300" b="1">
+              <a:rPr sz="1800" b="0">
                 <a:solidFill>
-                  <a:srgbClr val="566070"/>
+                  <a:srgbClr val="0070C0"/>
                 </a:solidFill>
                 <a:latin typeface="맑은 고딕"/>
               </a:rPr>
@@ -15052,7 +15052,7 @@
           <a:lstStyle/>
           <a:p>
             <a:r>
-              <a:rPr sz="2800" b="1" u="none">
+              <a:rPr sz="2800" b="0" u="none">
                 <a:solidFill>
                   <a:srgbClr val="FF0000"/>
                 </a:solidFill>
@@ -15106,9 +15106,9 @@
           <a:p>
             <a:pPr algn="ctr"/>
             <a:r>
-              <a:rPr sz="1300" b="0">
+              <a:rPr sz="1800" b="0">
                 <a:solidFill>
-                  <a:srgbClr val="566070"/>
+                  <a:srgbClr val="0070C0"/>
                 </a:solidFill>
                 <a:latin typeface="맑은 고딕"/>
               </a:rPr>
@@ -15134,7 +15134,7 @@
           <a:noFill/>
         </p:spPr>
         <p:txBody>
-          <a:bodyPr wrap="square">
+          <a:bodyPr wrap="square" anchor="ctr">
             <a:spAutoFit/>
           </a:bodyPr>
           <a:lstStyle/>
@@ -15227,7 +15227,7 @@
           <a:lstStyle/>
           <a:p>
             <a:r>
-              <a:rPr sz="2800" b="1" u="none">
+              <a:rPr sz="2800" b="0" u="none">
                 <a:solidFill>
                   <a:srgbClr val="FF0000"/>
                 </a:solidFill>
@@ -15255,7 +15255,7 @@
           <a:noFill/>
         </p:spPr>
         <p:txBody>
-          <a:bodyPr wrap="square">
+          <a:bodyPr wrap="square" anchor="ctr">
             <a:spAutoFit/>
           </a:bodyPr>
           <a:lstStyle/>
@@ -15342,9 +15342,9 @@
           <a:p>
             <a:pPr algn="ctr"/>
             <a:r>
-              <a:rPr sz="1300" b="1">
+              <a:rPr sz="1800" b="0">
                 <a:solidFill>
-                  <a:srgbClr val="566070"/>
+                  <a:srgbClr val="0070C0"/>
                 </a:solidFill>
                 <a:latin typeface="맑은 고딕"/>
               </a:rPr>
@@ -15434,7 +15434,7 @@
           <a:lstStyle/>
           <a:p>
             <a:r>
-              <a:rPr sz="2800" b="1" u="none">
+              <a:rPr sz="2800" b="0" u="none">
                 <a:solidFill>
                   <a:srgbClr val="FF0000"/>
                 </a:solidFill>
@@ -15488,9 +15488,9 @@
           <a:p>
             <a:pPr algn="ctr"/>
             <a:r>
-              <a:rPr sz="1300" b="0">
+              <a:rPr sz="1800" b="0">
                 <a:solidFill>
-                  <a:srgbClr val="566070"/>
+                  <a:srgbClr val="0070C0"/>
                 </a:solidFill>
                 <a:latin typeface="맑은 고딕"/>
               </a:rPr>
@@ -15516,7 +15516,7 @@
           <a:noFill/>
         </p:spPr>
         <p:txBody>
-          <a:bodyPr wrap="square">
+          <a:bodyPr wrap="square" anchor="ctr">
             <a:spAutoFit/>
           </a:bodyPr>
           <a:lstStyle/>
@@ -15609,7 +15609,7 @@
           <a:lstStyle/>
           <a:p>
             <a:r>
-              <a:rPr sz="2800" b="1" u="none">
+              <a:rPr sz="2800" b="0" u="none">
                 <a:solidFill>
                   <a:srgbClr val="FF0000"/>
                 </a:solidFill>
@@ -15637,7 +15637,7 @@
           <a:noFill/>
         </p:spPr>
         <p:txBody>
-          <a:bodyPr wrap="square">
+          <a:bodyPr wrap="square" anchor="ctr">
             <a:spAutoFit/>
           </a:bodyPr>
           <a:lstStyle/>
@@ -15749,7 +15749,7 @@
           <a:lstStyle/>
           <a:p>
             <a:r>
-              <a:rPr sz="2800" b="1" u="none">
+              <a:rPr sz="2800" b="0" u="none">
                 <a:solidFill>
                   <a:srgbClr val="FF0000"/>
                 </a:solidFill>
@@ -15777,7 +15777,7 @@
           <a:noFill/>
         </p:spPr>
         <p:txBody>
-          <a:bodyPr wrap="square">
+          <a:bodyPr wrap="square" anchor="ctr">
             <a:spAutoFit/>
           </a:bodyPr>
           <a:lstStyle/>
@@ -15889,7 +15889,7 @@
           <a:lstStyle/>
           <a:p>
             <a:r>
-              <a:rPr sz="2800" b="1" u="none">
+              <a:rPr sz="2800" b="0" u="none">
                 <a:solidFill>
                   <a:srgbClr val="FF0000"/>
                 </a:solidFill>
@@ -15917,7 +15917,7 @@
           <a:noFill/>
         </p:spPr>
         <p:txBody>
-          <a:bodyPr wrap="square">
+          <a:bodyPr wrap="square" anchor="ctr">
             <a:spAutoFit/>
           </a:bodyPr>
           <a:lstStyle/>
@@ -16030,9 +16030,9 @@
           <a:p>
             <a:pPr algn="ctr"/>
             <a:r>
-              <a:rPr sz="1300" b="1">
+              <a:rPr sz="1800" b="0">
                 <a:solidFill>
-                  <a:srgbClr val="566070"/>
+                  <a:srgbClr val="0070C0"/>
                 </a:solidFill>
                 <a:latin typeface="맑은 고딕"/>
               </a:rPr>
@@ -16141,7 +16141,7 @@
           <a:lstStyle/>
           <a:p>
             <a:r>
-              <a:rPr sz="2800" b="1" u="none">
+              <a:rPr sz="2800" b="0" u="none">
                 <a:solidFill>
                   <a:srgbClr val="FF0000"/>
                 </a:solidFill>
@@ -16204,7 +16204,7 @@
           <a:noFill/>
         </p:spPr>
         <p:txBody>
-          <a:bodyPr wrap="square">
+          <a:bodyPr wrap="square" anchor="ctr">
             <a:spAutoFit/>
           </a:bodyPr>
           <a:lstStyle/>
@@ -16316,7 +16316,7 @@
           <a:lstStyle/>
           <a:p>
             <a:r>
-              <a:rPr sz="2800" b="1" u="none">
+              <a:rPr sz="2800" b="0" u="none">
                 <a:solidFill>
                   <a:srgbClr val="FF0000"/>
                 </a:solidFill>
@@ -16344,7 +16344,7 @@
           <a:noFill/>
         </p:spPr>
         <p:txBody>
-          <a:bodyPr wrap="square">
+          <a:bodyPr wrap="square" anchor="ctr">
             <a:spAutoFit/>
           </a:bodyPr>
           <a:lstStyle/>
@@ -16431,9 +16431,9 @@
           <a:p>
             <a:pPr algn="ctr"/>
             <a:r>
-              <a:rPr sz="1300" b="1">
+              <a:rPr sz="1800" b="0">
                 <a:solidFill>
-                  <a:srgbClr val="566070"/>
+                  <a:srgbClr val="0070C0"/>
                 </a:solidFill>
                 <a:latin typeface="맑은 고딕"/>
               </a:rPr>
@@ -16523,7 +16523,7 @@
           <a:lstStyle/>
           <a:p>
             <a:r>
-              <a:rPr sz="2800" b="1" u="none">
+              <a:rPr sz="2800" b="0" u="none">
                 <a:solidFill>
                   <a:srgbClr val="FF0000"/>
                 </a:solidFill>
@@ -16577,9 +16577,9 @@
           <a:p>
             <a:pPr algn="ctr"/>
             <a:r>
-              <a:rPr sz="1300" b="0">
+              <a:rPr sz="1800" b="0">
                 <a:solidFill>
-                  <a:srgbClr val="566070"/>
+                  <a:srgbClr val="0070C0"/>
                 </a:solidFill>
                 <a:latin typeface="맑은 고딕"/>
               </a:rPr>
@@ -16605,7 +16605,7 @@
           <a:noFill/>
         </p:spPr>
         <p:txBody>
-          <a:bodyPr wrap="square">
+          <a:bodyPr wrap="square" anchor="ctr">
             <a:spAutoFit/>
           </a:bodyPr>
           <a:lstStyle/>
@@ -16698,7 +16698,7 @@
           <a:lstStyle/>
           <a:p>
             <a:r>
-              <a:rPr sz="2800" b="1" u="none">
+              <a:rPr sz="2800" b="0" u="none">
                 <a:solidFill>
                   <a:srgbClr val="FF0000"/>
                 </a:solidFill>
@@ -16726,7 +16726,7 @@
           <a:noFill/>
         </p:spPr>
         <p:txBody>
-          <a:bodyPr wrap="square">
+          <a:bodyPr wrap="square" anchor="ctr">
             <a:spAutoFit/>
           </a:bodyPr>
           <a:lstStyle/>
@@ -16898,7 +16898,7 @@
           <a:lstStyle/>
           <a:p>
             <a:r>
-              <a:rPr sz="2800" b="1" u="none">
+              <a:rPr sz="2800" b="0" u="none">
                 <a:solidFill>
                   <a:srgbClr val="FF0000"/>
                 </a:solidFill>
@@ -16926,7 +16926,7 @@
           <a:noFill/>
         </p:spPr>
         <p:txBody>
-          <a:bodyPr wrap="square">
+          <a:bodyPr wrap="square" anchor="ctr">
             <a:spAutoFit/>
           </a:bodyPr>
           <a:lstStyle/>
@@ -17013,9 +17013,9 @@
           <a:p>
             <a:pPr algn="ctr"/>
             <a:r>
-              <a:rPr sz="1300" b="1">
+              <a:rPr sz="1800" b="0">
                 <a:solidFill>
-                  <a:srgbClr val="566070"/>
+                  <a:srgbClr val="0070C0"/>
                 </a:solidFill>
                 <a:latin typeface="맑은 고딕"/>
               </a:rPr>
@@ -17105,7 +17105,7 @@
           <a:lstStyle/>
           <a:p>
             <a:r>
-              <a:rPr sz="2800" b="1" u="none">
+              <a:rPr sz="2800" b="0" u="none">
                 <a:solidFill>
                   <a:srgbClr val="FF0000"/>
                 </a:solidFill>
@@ -17159,9 +17159,9 @@
           <a:p>
             <a:pPr algn="ctr"/>
             <a:r>
-              <a:rPr sz="1300" b="0">
+              <a:rPr sz="1800" b="0">
                 <a:solidFill>
-                  <a:srgbClr val="566070"/>
+                  <a:srgbClr val="0070C0"/>
                 </a:solidFill>
                 <a:latin typeface="맑은 고딕"/>
               </a:rPr>
@@ -17187,7 +17187,7 @@
           <a:noFill/>
         </p:spPr>
         <p:txBody>
-          <a:bodyPr wrap="square">
+          <a:bodyPr wrap="square" anchor="ctr">
             <a:spAutoFit/>
           </a:bodyPr>
           <a:lstStyle/>

--- a/outputs/pptx/ai_knowledge_institution_styled_draft.pptx
+++ b/outputs/pptx/ai_knowledge_institution_styled_draft.pptx
@@ -894,7 +894,7 @@
           </a:p>
           <a:p>
             <a:r>
-              <a:t>proof_object_type: article_quote</a:t>
+              <a:t>proof_object_type: source_card</a:t>
             </a:r>
           </a:p>
           <a:p>
@@ -925,12 +925,12 @@
           </a:p>
           <a:p>
             <a:r>
-              <a:t>  "틀린 가설을 세워보고, 다른 자료와 부딪히고, 왜 틀렸는지 고치는 시간이 사고를 만든다",</a:t>
-            </a:r>
-          </a:p>
-          <a:p>
-            <a:r>
-              <a:t>  "AI 역량 교육은 답을 받는 법보다 질문하고 평가하고 책임 있게 쓰는 법으로 확장될 필요가 있다"</a:t>
+              <a:t>  "틀린 가설을 세워보고",</a:t>
+            </a:r>
+          </a:p>
+          <a:p>
+            <a:r>
+              <a:t>  "AI 역량 교육은 답을 받는 법보다 질문하고 평가하고 책임 있게…"</a:t>
             </a:r>
           </a:p>
           <a:p>
@@ -1064,7 +1064,7 @@
           </a:p>
           <a:p>
             <a:r>
-              <a:t>  "type": "article_quote",</a:t>
+              <a:t>  "type": "source_card",</a:t>
             </a:r>
           </a:p>
           <a:p>
@@ -1079,7 +1079,7 @@
           </a:p>
           <a:p>
             <a:r>
-              <a:t>  "display_label": "[기사 인용]",</a:t>
+              <a:t>  "display_label": "[출처]",</a:t>
             </a:r>
           </a:p>
           <a:p>
@@ -1251,7 +1251,7 @@
           </a:p>
           <a:p>
             <a:r>
-              <a:t>proof_object_type: article_quote</a:t>
+              <a:t>proof_object_type: source_card</a:t>
             </a:r>
           </a:p>
           <a:p>
@@ -1282,12 +1282,7 @@
           </a:p>
           <a:p>
             <a:r>
-              <a:t>  "Royal Observatory 관련 보도는 AI 의존 경고를 인간 지식과 배움의 가치라는 맥락에 둔다",</a:t>
-            </a:r>
-          </a:p>
-          <a:p>
-            <a:r>
-              <a:t>  "이를 AI 반대가 아니라 질문과 검증의 필요성을 상기시키는 장면으로 사용한다",</a:t>
+              <a:t>  "이를 AI 반대가 아니라 질문과 검증의 필요성을 상기시키는 장면…",</a:t>
             </a:r>
           </a:p>
           <a:p>
@@ -1307,7 +1302,17 @@
           </a:p>
           <a:p>
             <a:r>
-              <a:t>[]</a:t>
+              <a:t>[</a:t>
+            </a:r>
+          </a:p>
+          <a:p>
+            <a:r>
+              <a:t>  "단일 기사 기반 맥락이므로 표현은 보수적으로 유지한다"</a:t>
+            </a:r>
+          </a:p>
+          <a:p>
+            <a:r>
+              <a:t>]</a:t>
             </a:r>
           </a:p>
           <a:p/>
@@ -1411,7 +1416,7 @@
           </a:p>
           <a:p>
             <a:r>
-              <a:t>  "type": "article_quote",</a:t>
+              <a:t>  "type": "source_card",</a:t>
             </a:r>
           </a:p>
           <a:p>
@@ -1426,7 +1431,7 @@
           </a:p>
           <a:p>
             <a:r>
-              <a:t>  "display_label": "[기사 인용]",</a:t>
+              <a:t>  "display_label": "[출처]",</a:t>
             </a:r>
           </a:p>
           <a:p>
@@ -2237,7 +2242,7 @@
           </a:p>
           <a:p>
             <a:r>
-              <a:t>proof_object_type: article_quote</a:t>
+              <a:t>proof_object_type: source_card</a:t>
             </a:r>
           </a:p>
           <a:p>
@@ -2268,12 +2273,7 @@
           </a:p>
           <a:p>
             <a:r>
-              <a:t>  "AI가 많은 정보를 설명할 수 있다면, 수업은 무엇을 외웠나보다 어떻게 확인했나를 더 물어야 할 수 있다",</a:t>
-            </a:r>
-          </a:p>
-          <a:p>
-            <a:r>
-              <a:t>  "OECD와 UNESCO 자료는 AI 교육을 교수 원칙과 학생 역량의 문제로 다룬다"</a:t>
+              <a:t>  "AI가 많은 정보를 설명할 수 있다면"</a:t>
             </a:r>
           </a:p>
           <a:p>
@@ -2293,6 +2293,11 @@
           </a:p>
           <a:p>
             <a:r>
+              <a:t>  "OECD와 UNESCO 자료는 AI 교육을 교수 원칙과 학생 역량의 문제로 다룬다",</a:t>
+            </a:r>
+          </a:p>
+          <a:p>
+            <a:r>
               <a:t>  "다만 교육 효과는 아직 단정하지 않고, 수업 설계의 과제로 남긴다"</a:t>
             </a:r>
           </a:p>
@@ -2407,7 +2412,7 @@
           </a:p>
           <a:p>
             <a:r>
-              <a:t>  "type": "article_quote",</a:t>
+              <a:t>  "type": "source_card",</a:t>
             </a:r>
           </a:p>
           <a:p>
@@ -2422,7 +2427,7 @@
           </a:p>
           <a:p>
             <a:r>
-              <a:t>  "display_label": "[기사 인용]",</a:t>
+              <a:t>  "display_label": "[출처]",</a:t>
             </a:r>
           </a:p>
           <a:p>
@@ -2594,7 +2599,7 @@
           </a:p>
           <a:p>
             <a:r>
-              <a:t>proof_object_type: article_quote</a:t>
+              <a:t>proof_object_type: source_card</a:t>
             </a:r>
           </a:p>
           <a:p>
@@ -2630,7 +2635,7 @@
           </a:p>
           <a:p>
             <a:r>
-              <a:t>  "그렇다면 박물관·과학관은 맥락, 경험, 질문, 토론을 더 강조해야 할 수 있다"</a:t>
+              <a:t>  "그렇다면 박물관·과학관은 맥락"</a:t>
             </a:r>
           </a:p>
           <a:p>
@@ -2764,7 +2769,7 @@
           </a:p>
           <a:p>
             <a:r>
-              <a:t>  "type": "article_quote",</a:t>
+              <a:t>  "type": "source_card",</a:t>
             </a:r>
           </a:p>
           <a:p>
@@ -2779,7 +2784,7 @@
           </a:p>
           <a:p>
             <a:r>
-              <a:t>  "display_label": "[기사 인용]",</a:t>
+              <a:t>  "display_label": "[출처]",</a:t>
             </a:r>
           </a:p>
           <a:p>
@@ -2957,7 +2962,7 @@
           </a:p>
           <a:p>
             <a:r>
-              <a:t>proof_object_type: article_quote</a:t>
+              <a:t>proof_object_type: source_card</a:t>
             </a:r>
           </a:p>
           <a:p>
@@ -2993,7 +2998,7 @@
           </a:p>
           <a:p>
             <a:r>
-              <a:t>  "하지만 밤하늘을 관찰하고, 위치를 추정하고, 계절과 시간을 연결하는 경험은 다르다"</a:t>
+              <a:t>  ""</a:t>
             </a:r>
           </a:p>
           <a:p>
@@ -3127,7 +3132,7 @@
           </a:p>
           <a:p>
             <a:r>
-              <a:t>  "type": "article_quote",</a:t>
+              <a:t>  "type": "source_card",</a:t>
             </a:r>
           </a:p>
           <a:p>
@@ -3142,7 +3147,7 @@
           </a:p>
           <a:p>
             <a:r>
-              <a:t>  "display_label": "[기사 인용]",</a:t>
+              <a:t>  "display_label": "[출처]",</a:t>
             </a:r>
           </a:p>
           <a:p>
@@ -3340,6 +3345,16 @@
           </a:p>
           <a:p>
             <a:r>
+              <a:t>[]</a:t>
+            </a:r>
+          </a:p>
+          <a:p>
+            <a:r>
+              <a:t>overflow_body_lines:</a:t>
+            </a:r>
+          </a:p>
+          <a:p>
+            <a:r>
               <a:t>[</a:t>
             </a:r>
           </a:p>
@@ -3361,16 +3376,6 @@
           <a:p>
             <a:r>
               <a:t>]</a:t>
-            </a:r>
-          </a:p>
-          <a:p>
-            <a:r>
-              <a:t>overflow_body_lines:</a:t>
-            </a:r>
-          </a:p>
-          <a:p>
-            <a:r>
-              <a:t>[]</a:t>
             </a:r>
           </a:p>
           <a:p/>
@@ -3707,12 +3712,12 @@
           </a:p>
           <a:p>
             <a:r>
-              <a:t>  "한국에서도 AI 디지털교과서와 AI 체험 전시가 이미 정책·기관 사례로 등장한다",</a:t>
-            </a:r>
-          </a:p>
-          <a:p>
-            <a:r>
-              <a:t>  "다만 한국 사례는 메인 논지의 증명이 아니라 후반 보조 연결로 사용한다"</a:t>
+              <a:t>  "한국에서도 AI 디지털교과서와 AI 체험 전시가 이미 정책·기관…",</a:t>
+            </a:r>
+          </a:p>
+          <a:p>
+            <a:r>
+              <a:t>  "핵심 질문은 한국도 결국 AI를 금지할지보다 어떻게 다룰지라는…"</a:t>
             </a:r>
           </a:p>
           <a:p>
@@ -4033,7 +4038,7 @@
           </a:p>
           <a:p>
             <a:r>
-              <a:t>proof_object_type: article_quote</a:t>
+              <a:t>proof_object_type: source_card</a:t>
             </a:r>
           </a:p>
           <a:p>
@@ -4198,7 +4203,7 @@
           </a:p>
           <a:p>
             <a:r>
-              <a:t>  "type": "article_quote",</a:t>
+              <a:t>  "type": "source_card",</a:t>
             </a:r>
           </a:p>
           <a:p>
@@ -4213,7 +4218,7 @@
           </a:p>
           <a:p>
             <a:r>
-              <a:t>  "display_label": "[기사 인용]",</a:t>
+              <a:t>  "display_label": "[출처]",</a:t>
             </a:r>
           </a:p>
           <a:p>
@@ -4375,7 +4380,7 @@
           </a:p>
           <a:p>
             <a:r>
-              <a:t>proof_object_type: article_quote</a:t>
+              <a:t>proof_object_type: source_card</a:t>
             </a:r>
           </a:p>
           <a:p>
@@ -4406,7 +4411,7 @@
           </a:p>
           <a:p>
             <a:r>
-              <a:t>  "모르는 것을 물으면 바로 답이 나오고, 검색 결과를 여러 개 열어보던 시간이 줄어든다",</a:t>
+              <a:t>  "모르는 것을 물으면 바로 답이 나오고",</a:t>
             </a:r>
           </a:p>
           <a:p>
@@ -4545,7 +4550,7 @@
           </a:p>
           <a:p>
             <a:r>
-              <a:t>  "type": "article_quote",</a:t>
+              <a:t>  "type": "source_card",</a:t>
             </a:r>
           </a:p>
           <a:p>
@@ -4560,7 +4565,7 @@
           </a:p>
           <a:p>
             <a:r>
-              <a:t>  "display_label": "[기사 인용]",</a:t>
+              <a:t>  "display_label": "[출처]",</a:t>
             </a:r>
           </a:p>
           <a:p>
@@ -5085,7 +5090,7 @@
           </a:p>
           <a:p>
             <a:r>
-              <a:t>  "반대로 AI는 학습 접근성과 개인화 가능성을 높일 수 있다는 주장도 있다"</a:t>
+              <a:t>  "반대로 AI는 학습 접근성과 개인화 가능성을 높일 수 있다는 주…"</a:t>
             </a:r>
           </a:p>
           <a:p>
@@ -5406,7 +5411,7 @@
           </a:p>
           <a:p>
             <a:r>
-              <a:t>proof_object_type: article_quote</a:t>
+              <a:t>proof_object_type: source_card</a:t>
             </a:r>
           </a:p>
           <a:p>
@@ -5437,12 +5442,12 @@
           </a:p>
           <a:p>
             <a:r>
-              <a:t>  "출처를 확인하는 법",</a:t>
-            </a:r>
-          </a:p>
-          <a:p>
-            <a:r>
-              <a:t>  "AI 답변의 빈틈을 찾는 법"</a:t>
+              <a:t>  "AI 답변의 빈틈을 찾는 법",</a:t>
+            </a:r>
+          </a:p>
+          <a:p>
+            <a:r>
+              <a:t>  "다른 자료와 비교하는 법"</a:t>
             </a:r>
           </a:p>
           <a:p>
@@ -5581,7 +5586,7 @@
           </a:p>
           <a:p>
             <a:r>
-              <a:t>  "type": "article_quote",</a:t>
+              <a:t>  "type": "source_card",</a:t>
             </a:r>
           </a:p>
           <a:p>
@@ -5596,7 +5601,7 @@
           </a:p>
           <a:p>
             <a:r>
-              <a:t>  "display_label": "[기사 인용]",</a:t>
+              <a:t>  "display_label": "[출처]",</a:t>
             </a:r>
           </a:p>
           <a:p>
@@ -6583,11 +6588,6 @@
           </a:p>
           <a:p>
             <a:r>
-              <a:t>  "답의 출처를 확인하고",</a:t>
-            </a:r>
-          </a:p>
-          <a:p>
-            <a:r>
               <a:t>  "모르는 것을 남겨두는 법을 배우는 일일지도 모른다"</a:t>
             </a:r>
           </a:p>
@@ -6603,7 +6603,17 @@
           </a:p>
           <a:p>
             <a:r>
-              <a:t>[]</a:t>
+              <a:t>[</a:t>
+            </a:r>
+          </a:p>
+          <a:p>
+            <a:r>
+              <a:t>  "모르는 것을 남겨두는 법을 배우는 일일지도 모른다"</a:t>
+            </a:r>
+          </a:p>
+          <a:p>
+            <a:r>
+              <a:t>]</a:t>
             </a:r>
           </a:p>
           <a:p/>
@@ -7196,7 +7206,7 @@
           </a:p>
           <a:p>
             <a:r>
-              <a:t>proof_object_type: article_quote</a:t>
+              <a:t>proof_object_type: source_card</a:t>
             </a:r>
           </a:p>
           <a:p>
@@ -7227,12 +7237,27 @@
           </a:p>
           <a:p>
             <a:r>
-              <a:t>  "BBC 보도는 Royal Observatory 쪽 경고를 AI 의존과 인간 지식의 역할이라는 맥락에서 소개한다",</a:t>
-            </a:r>
-          </a:p>
-          <a:p>
-            <a:r>
-              <a:t>  "이 메시지는 AI 금지가 아니라, 답을 받는 사람이 무엇을 배워야 하느냐는 질문으로 읽는다",</a:t>
+              <a:t>  "이 메시지는 AI 금지가 아니라",</a:t>
+            </a:r>
+          </a:p>
+          <a:p>
+            <a:r>
+              <a:t>  "단일 기관 사례이므로 모든 지식기관의 공식 입장처럼 일반화하지…"</a:t>
+            </a:r>
+          </a:p>
+          <a:p>
+            <a:r>
+              <a:t>]</a:t>
+            </a:r>
+          </a:p>
+          <a:p>
+            <a:r>
+              <a:t>overflow_body_lines:</a:t>
+            </a:r>
+          </a:p>
+          <a:p>
+            <a:r>
+              <a:t>[</a:t>
             </a:r>
           </a:p>
           <a:p>
@@ -7245,16 +7270,6 @@
               <a:t>]</a:t>
             </a:r>
           </a:p>
-          <a:p>
-            <a:r>
-              <a:t>overflow_body_lines:</a:t>
-            </a:r>
-          </a:p>
-          <a:p>
-            <a:r>
-              <a:t>[]</a:t>
-            </a:r>
-          </a:p>
           <a:p/>
           <a:p>
             <a:r>
@@ -7356,7 +7371,7 @@
           </a:p>
           <a:p>
             <a:r>
-              <a:t>  "type": "article_quote",</a:t>
+              <a:t>  "type": "source_card",</a:t>
             </a:r>
           </a:p>
           <a:p>
@@ -7371,7 +7386,7 @@
           </a:p>
           <a:p>
             <a:r>
-              <a:t>  "display_label": "[기사 인용]",</a:t>
+              <a:t>  "display_label": "[출처]",</a:t>
             </a:r>
           </a:p>
           <a:p>
@@ -7538,7 +7553,7 @@
           </a:p>
           <a:p>
             <a:r>
-              <a:t>proof_object_type: article_quote</a:t>
+              <a:t>proof_object_type: source_card</a:t>
             </a:r>
           </a:p>
           <a:p>
@@ -7574,7 +7589,7 @@
           </a:p>
           <a:p>
             <a:r>
-              <a:t>  "AI 즉답은 그 과정을 도와줄 수도, 일부 건너뛰게 만들 수도 있다"</a:t>
+              <a:t>  "AI 즉답은 그 과정을 도와줄 수도"</a:t>
             </a:r>
           </a:p>
           <a:p>
@@ -7708,7 +7723,7 @@
           </a:p>
           <a:p>
             <a:r>
-              <a:t>  "type": "article_quote",</a:t>
+              <a:t>  "type": "source_card",</a:t>
             </a:r>
           </a:p>
           <a:p>
@@ -7723,7 +7738,7 @@
           </a:p>
           <a:p>
             <a:r>
-              <a:t>  "display_label": "[기사 인용]",</a:t>
+              <a:t>  "display_label": "[출처]",</a:t>
             </a:r>
           </a:p>
           <a:p>
@@ -7926,12 +7941,12 @@
           </a:p>
           <a:p>
             <a:r>
-              <a:t>  "학교, 박물관, 도서관, 과학관도 AI가 설명을 대신하는 시대의 질문을 마주한다",</a:t>
-            </a:r>
-          </a:p>
-          <a:p>
-            <a:r>
-              <a:t>  "UNESCO와 OECD 자료는 AI 교육을 단순 도구 사용이 아니라 역량·원칙의 문제로 다룬다"</a:t>
+              <a:t>  "학교",</a:t>
+            </a:r>
+          </a:p>
+          <a:p>
+            <a:r>
+              <a:t>  "따라서 핵심은 답 제공 경쟁이 아니라 질문·검증·맥락을 가르치는…"</a:t>
             </a:r>
           </a:p>
           <a:p>
@@ -8288,11 +8303,6 @@
           </a:p>
           <a:p>
             <a:r>
-              <a:t>  "답을 의심하고 확인하는 능력인가",</a:t>
-            </a:r>
-          </a:p>
-          <a:p>
-            <a:r>
               <a:t>  "혹은 더 좋은 질문을 만드는 능력인가"</a:t>
             </a:r>
           </a:p>
@@ -8308,7 +8318,17 @@
           </a:p>
           <a:p>
             <a:r>
-              <a:t>[]</a:t>
+              <a:t>[</a:t>
+            </a:r>
+          </a:p>
+          <a:p>
+            <a:r>
+              <a:t>  "혹은 더 좋은 질문을 만드는 능력인가"</a:t>
+            </a:r>
+          </a:p>
+          <a:p>
+            <a:r>
+              <a:t>]</a:t>
             </a:r>
           </a:p>
           <a:p/>
@@ -8896,7 +8916,7 @@
           </a:p>
           <a:p>
             <a:r>
-              <a:t>proof_object_type: article_quote</a:t>
+              <a:t>proof_object_type: source_card</a:t>
             </a:r>
           </a:p>
           <a:p>
@@ -8927,11 +8947,6 @@
           </a:p>
           <a:p>
             <a:r>
-              <a:t>  "검색어를 바꿔보고, 여러 결과를 비교하고, 출처를 고르는 과정이 있었다",</a:t>
-            </a:r>
-          </a:p>
-          <a:p>
-            <a:r>
               <a:t>  "이 과정은 느리지만 정보 탐색의 다양성과 판단 훈련을 남긴다"</a:t>
             </a:r>
           </a:p>
@@ -8952,6 +8967,11 @@
           </a:p>
           <a:p>
             <a:r>
+              <a:t>  "이 과정은 느리지만 정보 탐색의 다양성과 판단 훈련을 남긴다",</a:t>
+            </a:r>
+          </a:p>
+          <a:p>
+            <a:r>
               <a:t>  "Microsoft Research 자료는 generative AI가 정보 탐색 다양성에 어떤 영향을 줄 수 있는지 문제를 제기한다"</a:t>
             </a:r>
           </a:p>
@@ -9061,7 +9081,7 @@
           </a:p>
           <a:p>
             <a:r>
-              <a:t>  "type": "article_quote",</a:t>
+              <a:t>  "type": "source_card",</a:t>
             </a:r>
           </a:p>
           <a:p>
@@ -9076,7 +9096,7 @@
           </a:p>
           <a:p>
             <a:r>
-              <a:t>  "display_label": "[기사 인용]",</a:t>
+              <a:t>  "display_label": "[출처]",</a:t>
             </a:r>
           </a:p>
           <a:p>
@@ -12630,7 +12650,7 @@
                 </a:solidFill>
                 <a:latin typeface="맑은 고딕"/>
               </a:rPr>
-              <a:t>틀린 가설을 세워보고, 다른 자료와 부딪히고, 왜 틀렸는지 고치는 시간이 사고를 만든다</a:t>
+              <a:t>틀린 가설을 세워보고</a:t>
             </a:r>
           </a:p>
           <a:p>
@@ -12649,7 +12669,7 @@
                 </a:solidFill>
                 <a:latin typeface="맑은 고딕"/>
               </a:rPr>
-              <a:t>AI 역량 교육은 답을 받는 법보다 질문하고 평가하고 책임 있게 쓰는 법으로 확장될 필요가 있다</a:t>
+              <a:t>AI 역량 교육은 답을 받는 법보다 질문하고 평가하고 책임 있게…</a:t>
             </a:r>
           </a:p>
         </p:txBody>
@@ -12697,13 +12717,13 @@
           <a:p>
             <a:pPr algn="ctr"/>
             <a:r>
-              <a:rPr sz="1800" b="0">
+              <a:rPr sz="1200" b="0">
                 <a:solidFill>
                   <a:srgbClr val="0070C0"/>
                 </a:solidFill>
                 <a:latin typeface="맑은 고딕"/>
               </a:rPr>
-              <a:t>[기사 인용]</a:t>
+              <a:t>[출처]</a:t>
             </a:r>
           </a:p>
           <a:p>
@@ -12713,7 +12733,7 @@
               </a:spcBef>
             </a:pPr>
             <a:r>
-              <a:rPr sz="1800" b="1">
+              <a:rPr sz="2100" b="1">
                 <a:solidFill>
                   <a:srgbClr val="000000"/>
                 </a:solidFill>
@@ -12731,11 +12751,11 @@
             <a:r>
               <a:rPr sz="1400" b="0">
                 <a:solidFill>
-                  <a:srgbClr val="566070"/>
+                  <a:srgbClr val="373737"/>
                 </a:solidFill>
                 <a:latin typeface="맑은 고딕"/>
               </a:rPr>
-              <a:t>생각은 결과가 아니라 중간 과정에 숨어 있다</a:t>
+              <a:t>Research, UNESCO AI Competency Framework.…</a:t>
             </a:r>
           </a:p>
         </p:txBody>
@@ -12809,13 +12829,13 @@
           <a:p>
             <a:pPr algn="ctr"/>
             <a:r>
-              <a:rPr sz="1800" b="0">
+              <a:rPr sz="1200" b="0">
                 <a:solidFill>
                   <a:srgbClr val="0070C0"/>
                 </a:solidFill>
                 <a:latin typeface="맑은 고딕"/>
               </a:rPr>
-              <a:t>[기사 인용]</a:t>
+              <a:t>[출처]</a:t>
             </a:r>
           </a:p>
           <a:p>
@@ -12825,7 +12845,7 @@
               </a:spcBef>
             </a:pPr>
             <a:r>
-              <a:rPr sz="1800" b="1">
+              <a:rPr sz="2100" b="1">
                 <a:solidFill>
                   <a:srgbClr val="000000"/>
                 </a:solidFill>
@@ -12843,11 +12863,11 @@
             <a:r>
               <a:rPr sz="1400" b="0">
                 <a:solidFill>
-                  <a:srgbClr val="566070"/>
+                  <a:srgbClr val="373737"/>
                 </a:solidFill>
                 <a:latin typeface="맑은 고딕"/>
               </a:rPr>
-              <a:t>Royal Observatory의 문제의식도 여기에 가깝다</a:t>
+              <a:t>Royal Observatory article. 단일 기사 기반이므로 발언…</a:t>
             </a:r>
           </a:p>
         </p:txBody>
@@ -12939,41 +12959,6 @@
         </p:nvSpPr>
         <p:spPr>
           <a:xfrm>
-            <a:off x="8321040" y="621792"/>
-            <a:ext cx="2971800" cy="292608"/>
-          </a:xfrm>
-          <a:prstGeom prst="rect">
-            <a:avLst/>
-          </a:prstGeom>
-          <a:noFill/>
-        </p:spPr>
-        <p:txBody>
-          <a:bodyPr wrap="square">
-            <a:spAutoFit/>
-          </a:bodyPr>
-          <a:lstStyle/>
-          <a:p>
-            <a:pPr algn="r"/>
-            <a:r>
-              <a:rPr sz="1600" b="1" u="none">
-                <a:solidFill>
-                  <a:srgbClr val="000000"/>
-                </a:solidFill>
-                <a:latin typeface="맑은 고딕"/>
-              </a:rPr>
-              <a:t>www.bbc.com</a:t>
-            </a:r>
-          </a:p>
-        </p:txBody>
-      </p:sp>
-      <p:sp>
-        <p:nvSpPr>
-          <p:cNvPr id="6" name="TextBox 5"/>
-          <p:cNvSpPr txBox="1"/>
-          <p:nvPr/>
-        </p:nvSpPr>
-        <p:spPr>
-          <a:xfrm>
             <a:off x="5806440" y="1965960"/>
             <a:ext cx="5577840" cy="2468880"/>
           </a:xfrm>
@@ -13003,26 +12988,7 @@
                 </a:solidFill>
                 <a:latin typeface="맑은 고딕"/>
               </a:rPr>
-              <a:t>Royal Observatory 관련 보도는 AI 의존 경고를 인간 지식과 배움의 가치라는 맥락에 둔다</a:t>
-            </a:r>
-          </a:p>
-          <a:p>
-            <a:pPr>
-              <a:lnSpc>
-                <a:spcPct val="150000"/>
-              </a:lnSpc>
-              <a:spcAft>
-                <a:spcPts val="800"/>
-              </a:spcAft>
-            </a:pPr>
-            <a:r>
-              <a:rPr sz="2800" b="0" u="none">
-                <a:solidFill>
-                  <a:srgbClr val="000000"/>
-                </a:solidFill>
-                <a:latin typeface="맑은 고딕"/>
-              </a:rPr>
-              <a:t>이를 AI 반대가 아니라 질문과 검증의 필요성을 상기시키는 장면으로 사용한다</a:t>
+              <a:t>이를 AI 반대가 아니라 질문과 검증의 필요성을 상기시키는 장면…</a:t>
             </a:r>
           </a:p>
           <a:p>
@@ -13343,26 +13309,7 @@
                 </a:solidFill>
                 <a:latin typeface="맑은 고딕"/>
               </a:rPr>
-              <a:t>AI가 많은 정보를 설명할 수 있다면, 수업은 무엇을 외웠나보다 어떻게 확인했나를 더 물어야 할 수 있다</a:t>
-            </a:r>
-          </a:p>
-          <a:p>
-            <a:pPr>
-              <a:lnSpc>
-                <a:spcPct val="150000"/>
-              </a:lnSpc>
-              <a:spcAft>
-                <a:spcPts val="800"/>
-              </a:spcAft>
-            </a:pPr>
-            <a:r>
-              <a:rPr sz="2800" b="0" u="none">
-                <a:solidFill>
-                  <a:srgbClr val="000000"/>
-                </a:solidFill>
-                <a:latin typeface="맑은 고딕"/>
-              </a:rPr>
-              <a:t>OECD와 UNESCO 자료는 AI 교육을 교수 원칙과 학생 역량의 문제로 다룬다</a:t>
+              <a:t>AI가 많은 정보를 설명할 수 있다면</a:t>
             </a:r>
           </a:p>
         </p:txBody>
@@ -13410,13 +13357,13 @@
           <a:p>
             <a:pPr algn="ctr"/>
             <a:r>
-              <a:rPr sz="1800" b="0">
+              <a:rPr sz="1200" b="0">
                 <a:solidFill>
                   <a:srgbClr val="0070C0"/>
                 </a:solidFill>
                 <a:latin typeface="맑은 고딕"/>
               </a:rPr>
-              <a:t>[기사 인용]</a:t>
+              <a:t>[출처]</a:t>
             </a:r>
           </a:p>
           <a:p>
@@ -13426,7 +13373,7 @@
               </a:spcBef>
             </a:pPr>
             <a:r>
-              <a:rPr sz="1800" b="1">
+              <a:rPr sz="2100" b="1">
                 <a:solidFill>
                   <a:srgbClr val="000000"/>
                 </a:solidFill>
@@ -13444,11 +13391,11 @@
             <a:r>
               <a:rPr sz="1400" b="0">
                 <a:solidFill>
-                  <a:srgbClr val="566070"/>
+                  <a:srgbClr val="373737"/>
                 </a:solidFill>
                 <a:latin typeface="맑은 고딕"/>
               </a:rPr>
-              <a:t>학교는 이제 정답 암기만으로 버티기 어렵다</a:t>
+              <a:t>Digital Education Outlook, UNESCO AI Comp…</a:t>
             </a:r>
           </a:p>
         </p:txBody>
@@ -13569,7 +13516,7 @@
                 </a:solidFill>
                 <a:latin typeface="맑은 고딕"/>
               </a:rPr>
-              <a:t>그렇다면 박물관·과학관은 맥락, 경험, 질문, 토론을 더 강조해야 할 수 있다</a:t>
+              <a:t>그렇다면 박물관·과학관은 맥락</a:t>
             </a:r>
           </a:p>
         </p:txBody>
@@ -13617,13 +13564,13 @@
           <a:p>
             <a:pPr algn="ctr"/>
             <a:r>
-              <a:rPr sz="1800" b="0">
+              <a:rPr sz="1200" b="0">
                 <a:solidFill>
                   <a:srgbClr val="0070C0"/>
                 </a:solidFill>
                 <a:latin typeface="맑은 고딕"/>
               </a:rPr>
-              <a:t>[기사 인용]</a:t>
+              <a:t>[출처]</a:t>
             </a:r>
           </a:p>
           <a:p>
@@ -13633,7 +13580,7 @@
               </a:spcBef>
             </a:pPr>
             <a:r>
-              <a:rPr sz="1800" b="1">
+              <a:rPr sz="2100" b="1">
                 <a:solidFill>
                   <a:srgbClr val="000000"/>
                 </a:solidFill>
@@ -13651,11 +13598,11 @@
             <a:r>
               <a:rPr sz="1400" b="0">
                 <a:solidFill>
-                  <a:srgbClr val="566070"/>
+                  <a:srgbClr val="373737"/>
                 </a:solidFill>
                 <a:latin typeface="맑은 고딕"/>
               </a:rPr>
-              <a:t>박물관은 전시품 옆 설명문 이상의 것이 필요해진다</a:t>
+              <a:t>AI Competency Framework. National Science…</a:t>
             </a:r>
           </a:p>
         </p:txBody>
@@ -13769,15 +13716,6 @@
                 <a:spcPts val="800"/>
               </a:spcAft>
             </a:pPr>
-            <a:r>
-              <a:rPr sz="2800" b="0" u="none">
-                <a:solidFill>
-                  <a:srgbClr val="000000"/>
-                </a:solidFill>
-                <a:latin typeface="맑은 고딕"/>
-              </a:rPr>
-              <a:t>하지만 밤하늘을 관찰하고, 위치를 추정하고, 계절과 시간을 연결하는 경험은 다르다</a:t>
-            </a:r>
           </a:p>
         </p:txBody>
       </p:sp>
@@ -13824,13 +13762,13 @@
           <a:p>
             <a:pPr algn="ctr"/>
             <a:r>
-              <a:rPr sz="1800" b="0">
+              <a:rPr sz="1200" b="0">
                 <a:solidFill>
                   <a:srgbClr val="0070C0"/>
                 </a:solidFill>
                 <a:latin typeface="맑은 고딕"/>
               </a:rPr>
-              <a:t>[기사 인용]</a:t>
+              <a:t>[출처]</a:t>
             </a:r>
           </a:p>
           <a:p>
@@ -13840,7 +13778,7 @@
               </a:spcBef>
             </a:pPr>
             <a:r>
-              <a:rPr sz="1800" b="1">
+              <a:rPr sz="2100" b="1">
                 <a:solidFill>
                   <a:srgbClr val="000000"/>
                 </a:solidFill>
@@ -13858,11 +13796,11 @@
             <a:r>
               <a:rPr sz="1400" b="0">
                 <a:solidFill>
-                  <a:srgbClr val="566070"/>
+                  <a:srgbClr val="373737"/>
                 </a:solidFill>
                 <a:latin typeface="맑은 고딕"/>
               </a:rPr>
-              <a:t>천문관은 ‘별 이름’보다 ‘보는 법’을 가르치는 곳</a:t>
+              <a:t>Royal Observatory article. science museum…</a:t>
             </a:r>
           </a:p>
         </p:txBody>
@@ -14101,7 +14039,120 @@
         </p:nvSpPr>
         <p:spPr>
           <a:xfrm>
-            <a:off x="1901952" y="3776472"/>
+            <a:off x="1901952" y="3483864"/>
+            <a:ext cx="658368" cy="1655064"/>
+          </a:xfrm>
+          <a:prstGeom prst="rect">
+            <a:avLst/>
+          </a:prstGeom>
+          <a:solidFill>
+            <a:srgbClr val="4872C4"/>
+          </a:solidFill>
+          <a:ln>
+            <a:noFill/>
+          </a:ln>
+        </p:spPr>
+        <p:style>
+          <a:lnRef idx="1">
+            <a:schemeClr val="accent1"/>
+          </a:lnRef>
+          <a:fillRef idx="3">
+            <a:schemeClr val="accent1"/>
+          </a:fillRef>
+          <a:effectRef idx="2">
+            <a:schemeClr val="accent1"/>
+          </a:effectRef>
+          <a:fontRef idx="minor">
+            <a:schemeClr val="lt1"/>
+          </a:fontRef>
+        </p:style>
+        <p:txBody>
+          <a:bodyPr rtlCol="0" anchor="ctr"/>
+          <a:lstStyle/>
+          <a:p>
+            <a:pPr algn="ctr"/>
+          </a:p>
+        </p:txBody>
+      </p:sp>
+      <p:sp>
+        <p:nvSpPr>
+          <p:cNvPr id="8" name="TextBox 7"/>
+          <p:cNvSpPr txBox="1"/>
+          <p:nvPr/>
+        </p:nvSpPr>
+        <p:spPr>
+          <a:xfrm>
+            <a:off x="1645920" y="3172968"/>
+            <a:ext cx="1170432" cy="237744"/>
+          </a:xfrm>
+          <a:prstGeom prst="rect">
+            <a:avLst/>
+          </a:prstGeom>
+          <a:noFill/>
+        </p:spPr>
+        <p:txBody>
+          <a:bodyPr wrap="square">
+            <a:spAutoFit/>
+          </a:bodyPr>
+          <a:lstStyle/>
+          <a:p>
+            <a:pPr algn="ctr"/>
+            <a:r>
+              <a:rPr sz="1800" b="1" u="none">
+                <a:solidFill>
+                  <a:srgbClr val="373737"/>
+                </a:solidFill>
+                <a:latin typeface="맑은 고딕"/>
+              </a:rPr>
+              <a:t>데이터 라벨</a:t>
+            </a:r>
+          </a:p>
+        </p:txBody>
+      </p:sp>
+      <p:sp>
+        <p:nvSpPr>
+          <p:cNvPr id="9" name="TextBox 8"/>
+          <p:cNvSpPr txBox="1"/>
+          <p:nvPr/>
+        </p:nvSpPr>
+        <p:spPr>
+          <a:xfrm>
+            <a:off x="1609344" y="5212080"/>
+            <a:ext cx="1243584" cy="301752"/>
+          </a:xfrm>
+          <a:prstGeom prst="rect">
+            <a:avLst/>
+          </a:prstGeom>
+          <a:noFill/>
+        </p:spPr>
+        <p:txBody>
+          <a:bodyPr wrap="square">
+            <a:spAutoFit/>
+          </a:bodyPr>
+          <a:lstStyle/>
+          <a:p>
+            <a:pPr algn="ctr"/>
+            <a:r>
+              <a:rPr sz="1400" b="1" u="none">
+                <a:solidFill>
+                  <a:srgbClr val="373737"/>
+                </a:solidFill>
+                <a:latin typeface="맑은 고딕"/>
+              </a:rPr>
+              <a:t>데이터</a:t>
+            </a:r>
+          </a:p>
+        </p:txBody>
+      </p:sp>
+      <p:sp>
+        <p:nvSpPr>
+          <p:cNvPr id="10" name="Rectangle 9"/>
+          <p:cNvSpPr/>
+          <p:nvPr/>
+        </p:nvSpPr>
+        <p:spPr>
+          <a:xfrm>
+            <a:off x="4812792" y="3776472"/>
             <a:ext cx="658368" cy="1362456"/>
           </a:xfrm>
           <a:prstGeom prst="rect">
@@ -14138,13 +14189,13 @@
       </p:sp>
       <p:sp>
         <p:nvSpPr>
-          <p:cNvPr id="8" name="TextBox 7"/>
+          <p:cNvPr id="11" name="TextBox 10"/>
           <p:cNvSpPr txBox="1"/>
           <p:nvPr/>
         </p:nvSpPr>
         <p:spPr>
           <a:xfrm>
-            <a:off x="1645920" y="3465576"/>
+            <a:off x="4556760" y="3465576"/>
             <a:ext cx="1170432" cy="237744"/>
           </a:xfrm>
           <a:prstGeom prst="rect">
@@ -14166,20 +14217,20 @@
                 </a:solidFill>
                 <a:latin typeface="맑은 고딕"/>
               </a:rPr>
-              <a:t>이번 enriched dry r…</a:t>
-            </a:r>
-          </a:p>
-        </p:txBody>
-      </p:sp>
-      <p:sp>
-        <p:nvSpPr>
-          <p:cNvPr id="9" name="TextBox 8"/>
+              <a:t>비교값</a:t>
+            </a:r>
+          </a:p>
+        </p:txBody>
+      </p:sp>
+      <p:sp>
+        <p:nvSpPr>
+          <p:cNvPr id="12" name="TextBox 11"/>
           <p:cNvSpPr txBox="1"/>
           <p:nvPr/>
         </p:nvSpPr>
         <p:spPr>
           <a:xfrm>
-            <a:off x="1609344" y="5212080"/>
+            <a:off x="4520184" y="5212080"/>
             <a:ext cx="1243584" cy="301752"/>
           </a:xfrm>
           <a:prstGeom prst="rect">
@@ -14201,20 +14252,20 @@
                 </a:solidFill>
                 <a:latin typeface="맑은 고딕"/>
               </a:rPr>
-              <a:t>이번</a:t>
-            </a:r>
-          </a:p>
-        </p:txBody>
-      </p:sp>
-      <p:sp>
-        <p:nvSpPr>
-          <p:cNvPr id="10" name="Rectangle 9"/>
+              <a:t>비교값</a:t>
+            </a:r>
+          </a:p>
+        </p:txBody>
+      </p:sp>
+      <p:sp>
+        <p:nvSpPr>
+          <p:cNvPr id="13" name="Rectangle 12"/>
           <p:cNvSpPr/>
           <p:nvPr/>
         </p:nvSpPr>
         <p:spPr>
           <a:xfrm>
-            <a:off x="6268212" y="4069080"/>
+            <a:off x="7723631" y="4069080"/>
             <a:ext cx="658368" cy="1069848"/>
           </a:xfrm>
           <a:prstGeom prst="rect">
@@ -14251,13 +14302,13 @@
       </p:sp>
       <p:sp>
         <p:nvSpPr>
-          <p:cNvPr id="11" name="TextBox 10"/>
+          <p:cNvPr id="14" name="TextBox 13"/>
           <p:cNvSpPr txBox="1"/>
           <p:nvPr/>
         </p:nvSpPr>
         <p:spPr>
           <a:xfrm>
-            <a:off x="6012179" y="3758184"/>
+            <a:off x="7467599" y="3758184"/>
             <a:ext cx="1170432" cy="237744"/>
           </a:xfrm>
           <a:prstGeom prst="rect">
@@ -14279,20 +14330,20 @@
                 </a:solidFill>
                 <a:latin typeface="맑은 고딕"/>
               </a:rPr>
-              <a:t>정량 수치가 필요한 문장은 여전…</a:t>
-            </a:r>
-          </a:p>
-        </p:txBody>
-      </p:sp>
-      <p:sp>
-        <p:nvSpPr>
-          <p:cNvPr id="12" name="TextBox 11"/>
+              <a:t>확인 필요</a:t>
+            </a:r>
+          </a:p>
+        </p:txBody>
+      </p:sp>
+      <p:sp>
+        <p:nvSpPr>
+          <p:cNvPr id="15" name="TextBox 14"/>
           <p:cNvSpPr txBox="1"/>
           <p:nvPr/>
         </p:nvSpPr>
         <p:spPr>
           <a:xfrm>
-            <a:off x="5975603" y="5212080"/>
+            <a:off x="7431023" y="5212080"/>
             <a:ext cx="1243584" cy="301752"/>
           </a:xfrm>
           <a:prstGeom prst="rect">
@@ -14314,14 +14365,14 @@
                 </a:solidFill>
                 <a:latin typeface="맑은 고딕"/>
               </a:rPr>
-              <a:t>정량</a:t>
-            </a:r>
-          </a:p>
-        </p:txBody>
-      </p:sp>
-      <p:sp>
-        <p:nvSpPr>
-          <p:cNvPr id="13" name="TextBox 12"/>
+              <a:t>확인</a:t>
+            </a:r>
+          </a:p>
+        </p:txBody>
+      </p:sp>
+      <p:sp>
+        <p:nvSpPr>
+          <p:cNvPr id="16" name="TextBox 15"/>
           <p:cNvSpPr txBox="1"/>
           <p:nvPr/>
         </p:nvSpPr>
@@ -14349,7 +14400,7 @@
                 </a:solidFill>
                 <a:latin typeface="맑은 고딕"/>
               </a:rPr>
-              <a:t>(출처: www.oecd.org; speaker notes 참조)</a:t>
+              <a:t>(출처: OECD; speaker notes 참조)</a:t>
             </a:r>
           </a:p>
         </p:txBody>
@@ -14410,6 +14461,471 @@
                 <a:latin typeface="맑은 고딕"/>
               </a:rPr>
               <a:t>한국에서도 곧 같은 질문이 온다</a:t>
+            </a:r>
+          </a:p>
+        </p:txBody>
+      </p:sp>
+      <p:sp>
+        <p:nvSpPr>
+          <p:cNvPr id="3" name="Rectangle 2"/>
+          <p:cNvSpPr/>
+          <p:nvPr/>
+        </p:nvSpPr>
+        <p:spPr>
+          <a:xfrm>
+            <a:off x="713232" y="1417320"/>
+            <a:ext cx="4892040" cy="4114800"/>
+          </a:xfrm>
+          <a:prstGeom prst="rect">
+            <a:avLst/>
+          </a:prstGeom>
+          <a:solidFill>
+            <a:srgbClr val="F8F8F8"/>
+          </a:solidFill>
+          <a:ln w="12700">
+            <a:solidFill>
+              <a:srgbClr val="BEBEBE"/>
+            </a:solidFill>
+          </a:ln>
+        </p:spPr>
+        <p:style>
+          <a:lnRef idx="1">
+            <a:schemeClr val="accent1"/>
+          </a:lnRef>
+          <a:fillRef idx="3">
+            <a:schemeClr val="accent1"/>
+          </a:fillRef>
+          <a:effectRef idx="2">
+            <a:schemeClr val="accent1"/>
+          </a:effectRef>
+          <a:fontRef idx="minor">
+            <a:schemeClr val="lt1"/>
+          </a:fontRef>
+        </p:style>
+        <p:txBody>
+          <a:bodyPr rtlCol="0" anchor="ctr"/>
+          <a:lstStyle/>
+          <a:p>
+            <a:pPr algn="ctr"/>
+          </a:p>
+        </p:txBody>
+      </p:sp>
+      <p:sp>
+        <p:nvSpPr>
+          <p:cNvPr id="4" name="TextBox 3"/>
+          <p:cNvSpPr txBox="1"/>
+          <p:nvPr/>
+        </p:nvSpPr>
+        <p:spPr>
+          <a:xfrm>
+            <a:off x="822960" y="1527048"/>
+            <a:ext cx="914400" cy="201168"/>
+          </a:xfrm>
+          <a:prstGeom prst="rect">
+            <a:avLst/>
+          </a:prstGeom>
+          <a:noFill/>
+        </p:spPr>
+        <p:txBody>
+          <a:bodyPr wrap="square">
+            <a:spAutoFit/>
+          </a:bodyPr>
+          <a:lstStyle/>
+          <a:p>
+            <a:r>
+              <a:rPr sz="1200" b="0" u="none">
+                <a:solidFill>
+                  <a:srgbClr val="0070C0"/>
+                </a:solidFill>
+                <a:latin typeface="맑은 고딕"/>
+              </a:rPr>
+              <a:t>[도식]</a:t>
+            </a:r>
+          </a:p>
+        </p:txBody>
+      </p:sp>
+      <p:sp>
+        <p:nvSpPr>
+          <p:cNvPr id="5" name="Rectangle 4"/>
+          <p:cNvSpPr/>
+          <p:nvPr/>
+        </p:nvSpPr>
+        <p:spPr>
+          <a:xfrm>
+            <a:off x="1033271" y="3040380"/>
+            <a:ext cx="1828799" cy="1143000"/>
+          </a:xfrm>
+          <a:prstGeom prst="rect">
+            <a:avLst/>
+          </a:prstGeom>
+          <a:solidFill>
+            <a:srgbClr val="FFFFFF"/>
+          </a:solidFill>
+          <a:ln w="12700">
+            <a:solidFill>
+              <a:srgbClr val="A0A0A0"/>
+            </a:solidFill>
+          </a:ln>
+        </p:spPr>
+        <p:style>
+          <a:lnRef idx="1">
+            <a:schemeClr val="accent1"/>
+          </a:lnRef>
+          <a:fillRef idx="3">
+            <a:schemeClr val="accent1"/>
+          </a:fillRef>
+          <a:effectRef idx="2">
+            <a:schemeClr val="accent1"/>
+          </a:effectRef>
+          <a:fontRef idx="minor">
+            <a:schemeClr val="lt1"/>
+          </a:fontRef>
+        </p:style>
+        <p:txBody>
+          <a:bodyPr rtlCol="0" anchor="ctr"/>
+          <a:lstStyle/>
+          <a:p>
+            <a:pPr algn="ctr"/>
+          </a:p>
+        </p:txBody>
+      </p:sp>
+      <p:sp>
+        <p:nvSpPr>
+          <p:cNvPr id="6" name="Rectangle 5"/>
+          <p:cNvSpPr/>
+          <p:nvPr/>
+        </p:nvSpPr>
+        <p:spPr>
+          <a:xfrm>
+            <a:off x="3456432" y="3040380"/>
+            <a:ext cx="1828799" cy="1143000"/>
+          </a:xfrm>
+          <a:prstGeom prst="rect">
+            <a:avLst/>
+          </a:prstGeom>
+          <a:solidFill>
+            <a:srgbClr val="FFFFFF"/>
+          </a:solidFill>
+          <a:ln w="12700">
+            <a:solidFill>
+              <a:srgbClr val="A0A0A0"/>
+            </a:solidFill>
+          </a:ln>
+        </p:spPr>
+        <p:style>
+          <a:lnRef idx="1">
+            <a:schemeClr val="accent1"/>
+          </a:lnRef>
+          <a:fillRef idx="3">
+            <a:schemeClr val="accent1"/>
+          </a:fillRef>
+          <a:effectRef idx="2">
+            <a:schemeClr val="accent1"/>
+          </a:effectRef>
+          <a:fontRef idx="minor">
+            <a:schemeClr val="lt1"/>
+          </a:fontRef>
+        </p:style>
+        <p:txBody>
+          <a:bodyPr rtlCol="0" anchor="ctr"/>
+          <a:lstStyle/>
+          <a:p>
+            <a:pPr algn="ctr"/>
+          </a:p>
+        </p:txBody>
+      </p:sp>
+      <p:sp>
+        <p:nvSpPr>
+          <p:cNvPr id="7" name="TextBox 6"/>
+          <p:cNvSpPr txBox="1"/>
+          <p:nvPr/>
+        </p:nvSpPr>
+        <p:spPr>
+          <a:xfrm>
+            <a:off x="1124712" y="3204972"/>
+            <a:ext cx="1645919" cy="320040"/>
+          </a:xfrm>
+          <a:prstGeom prst="rect">
+            <a:avLst/>
+          </a:prstGeom>
+          <a:noFill/>
+        </p:spPr>
+        <p:txBody>
+          <a:bodyPr wrap="square">
+            <a:spAutoFit/>
+          </a:bodyPr>
+          <a:lstStyle/>
+          <a:p>
+            <a:pPr algn="ctr"/>
+            <a:r>
+              <a:rPr sz="1800" b="1" u="none">
+                <a:solidFill>
+                  <a:srgbClr val="000000"/>
+                </a:solidFill>
+                <a:latin typeface="맑은 고딕"/>
+              </a:rPr>
+              <a:t>안전한 금융</a:t>
+            </a:r>
+          </a:p>
+        </p:txBody>
+      </p:sp>
+      <p:sp>
+        <p:nvSpPr>
+          <p:cNvPr id="8" name="TextBox 7"/>
+          <p:cNvSpPr txBox="1"/>
+          <p:nvPr/>
+        </p:nvSpPr>
+        <p:spPr>
+          <a:xfrm>
+            <a:off x="1124712" y="3607308"/>
+            <a:ext cx="1645919" cy="274320"/>
+          </a:xfrm>
+          <a:prstGeom prst="rect">
+            <a:avLst/>
+          </a:prstGeom>
+          <a:noFill/>
+        </p:spPr>
+        <p:txBody>
+          <a:bodyPr wrap="square">
+            <a:spAutoFit/>
+          </a:bodyPr>
+          <a:lstStyle/>
+          <a:p>
+            <a:pPr algn="ctr"/>
+            <a:r>
+              <a:rPr sz="1500" b="0" u="none">
+                <a:solidFill>
+                  <a:srgbClr val="373737"/>
+                </a:solidFill>
+                <a:latin typeface="맑은 고딕"/>
+              </a:rPr>
+              <a:t>담보 / 단기</a:t>
+            </a:r>
+          </a:p>
+        </p:txBody>
+      </p:sp>
+      <p:sp>
+        <p:nvSpPr>
+          <p:cNvPr id="9" name="TextBox 8"/>
+          <p:cNvSpPr txBox="1"/>
+          <p:nvPr/>
+        </p:nvSpPr>
+        <p:spPr>
+          <a:xfrm>
+            <a:off x="3547872" y="3204972"/>
+            <a:ext cx="1645919" cy="320040"/>
+          </a:xfrm>
+          <a:prstGeom prst="rect">
+            <a:avLst/>
+          </a:prstGeom>
+          <a:noFill/>
+        </p:spPr>
+        <p:txBody>
+          <a:bodyPr wrap="square">
+            <a:spAutoFit/>
+          </a:bodyPr>
+          <a:lstStyle/>
+          <a:p>
+            <a:pPr algn="ctr"/>
+            <a:r>
+              <a:rPr sz="1800" b="1" u="none">
+                <a:solidFill>
+                  <a:srgbClr val="000000"/>
+                </a:solidFill>
+                <a:latin typeface="맑은 고딕"/>
+              </a:rPr>
+              <a:t>성장 금융</a:t>
+            </a:r>
+          </a:p>
+        </p:txBody>
+      </p:sp>
+      <p:sp>
+        <p:nvSpPr>
+          <p:cNvPr id="10" name="TextBox 9"/>
+          <p:cNvSpPr txBox="1"/>
+          <p:nvPr/>
+        </p:nvSpPr>
+        <p:spPr>
+          <a:xfrm>
+            <a:off x="3547872" y="3607308"/>
+            <a:ext cx="1645919" cy="274320"/>
+          </a:xfrm>
+          <a:prstGeom prst="rect">
+            <a:avLst/>
+          </a:prstGeom>
+          <a:noFill/>
+        </p:spPr>
+        <p:txBody>
+          <a:bodyPr wrap="square">
+            <a:spAutoFit/>
+          </a:bodyPr>
+          <a:lstStyle/>
+          <a:p>
+            <a:pPr algn="ctr"/>
+            <a:r>
+              <a:rPr sz="1500" b="0" u="none">
+                <a:solidFill>
+                  <a:srgbClr val="373737"/>
+                </a:solidFill>
+                <a:latin typeface="맑은 고딕"/>
+              </a:rPr>
+              <a:t>장기 / 위험분담</a:t>
+            </a:r>
+          </a:p>
+        </p:txBody>
+      </p:sp>
+      <p:sp>
+        <p:nvSpPr>
+          <p:cNvPr id="11" name="TextBox 10"/>
+          <p:cNvSpPr txBox="1"/>
+          <p:nvPr/>
+        </p:nvSpPr>
+        <p:spPr>
+          <a:xfrm>
+            <a:off x="2930652" y="3387852"/>
+            <a:ext cx="457200" cy="347472"/>
+          </a:xfrm>
+          <a:prstGeom prst="rect">
+            <a:avLst/>
+          </a:prstGeom>
+          <a:noFill/>
+        </p:spPr>
+        <p:txBody>
+          <a:bodyPr wrap="square">
+            <a:spAutoFit/>
+          </a:bodyPr>
+          <a:lstStyle/>
+          <a:p>
+            <a:pPr algn="ctr"/>
+            <a:r>
+              <a:rPr sz="2200" b="1" u="none">
+                <a:solidFill>
+                  <a:srgbClr val="373737"/>
+                </a:solidFill>
+                <a:latin typeface="맑은 고딕"/>
+              </a:rPr>
+              <a:t>→</a:t>
+            </a:r>
+          </a:p>
+        </p:txBody>
+      </p:sp>
+      <p:sp>
+        <p:nvSpPr>
+          <p:cNvPr id="12" name="TextBox 11"/>
+          <p:cNvSpPr txBox="1"/>
+          <p:nvPr/>
+        </p:nvSpPr>
+        <p:spPr>
+          <a:xfrm>
+            <a:off x="5989320" y="2103120"/>
+            <a:ext cx="5303520" cy="2926080"/>
+          </a:xfrm>
+          <a:prstGeom prst="rect">
+            <a:avLst/>
+          </a:prstGeom>
+          <a:noFill/>
+        </p:spPr>
+        <p:txBody>
+          <a:bodyPr wrap="square" anchor="ctr">
+            <a:spAutoFit/>
+          </a:bodyPr>
+          <a:lstStyle/>
+          <a:p>
+            <a:pPr>
+              <a:lnSpc>
+                <a:spcPct val="150000"/>
+              </a:lnSpc>
+              <a:spcAft>
+                <a:spcPts val="800"/>
+              </a:spcAft>
+            </a:pPr>
+            <a:r>
+              <a:rPr sz="2800" b="0" u="none">
+                <a:solidFill>
+                  <a:srgbClr val="000000"/>
+                </a:solidFill>
+                <a:latin typeface="맑은 고딕"/>
+              </a:rPr>
+              <a:t>한국에서도 AI 디지털교과서와 AI 체험 전시가 이미 정책·기관…</a:t>
+            </a:r>
+          </a:p>
+          <a:p>
+            <a:pPr>
+              <a:lnSpc>
+                <a:spcPct val="150000"/>
+              </a:lnSpc>
+              <a:spcAft>
+                <a:spcPts val="800"/>
+              </a:spcAft>
+            </a:pPr>
+            <a:r>
+              <a:rPr sz="2800" b="0" u="none">
+                <a:solidFill>
+                  <a:srgbClr val="000000"/>
+                </a:solidFill>
+                <a:latin typeface="맑은 고딕"/>
+              </a:rPr>
+              <a:t>핵심 질문은 한국도 결국 AI를 금지할지보다 어떻게 다룰지라는…</a:t>
+            </a:r>
+          </a:p>
+        </p:txBody>
+      </p:sp>
+    </p:spTree>
+  </p:cSld>
+  <p:clrMapOvr>
+    <a:masterClrMapping/>
+  </p:clrMapOvr>
+</p:sld>
+</file>
+
+<file path=ppt/slides/slide19.xml><?xml version="1.0" encoding="utf-8"?>
+<p:sld xmlns:a="http://schemas.openxmlformats.org/drawingml/2006/main" xmlns:p="http://schemas.openxmlformats.org/presentationml/2006/main" xmlns:r="http://schemas.openxmlformats.org/officeDocument/2006/relationships">
+  <p:cSld>
+    <p:bg>
+      <p:bgPr>
+        <a:solidFill>
+          <a:srgbClr val="F8F9FA"/>
+        </a:solidFill>
+        <a:effectLst/>
+      </p:bgPr>
+    </p:bg>
+    <p:spTree>
+      <p:nvGrpSpPr>
+        <p:cNvPr id="1" name=""/>
+        <p:cNvGrpSpPr/>
+        <p:nvPr/>
+      </p:nvGrpSpPr>
+      <p:grpSpPr/>
+      <p:sp>
+        <p:nvSpPr>
+          <p:cNvPr id="2" name="TextBox 1"/>
+          <p:cNvSpPr txBox="1"/>
+          <p:nvPr/>
+        </p:nvSpPr>
+        <p:spPr>
+          <a:xfrm>
+            <a:off x="572414" y="356616"/>
+            <a:ext cx="11192256" cy="521207"/>
+          </a:xfrm>
+          <a:prstGeom prst="rect">
+            <a:avLst/>
+          </a:prstGeom>
+          <a:noFill/>
+        </p:spPr>
+        <p:txBody>
+          <a:bodyPr wrap="square">
+            <a:spAutoFit/>
+          </a:bodyPr>
+          <a:lstStyle/>
+          <a:p>
+            <a:r>
+              <a:rPr sz="2800" b="0" u="none">
+                <a:solidFill>
+                  <a:srgbClr val="FF0000"/>
+                </a:solidFill>
+                <a:latin typeface="맑은 고딕"/>
+              </a:rPr>
+              <a:t>지식기관의 경쟁자는 AI가 아니라 ‘무심코 넘어가는 습관’일지도</a:t>
             </a:r>
           </a:p>
         </p:txBody>
@@ -14457,13 +14973,45 @@
           <a:p>
             <a:pPr algn="ctr"/>
             <a:r>
-              <a:rPr sz="1800" b="0">
+              <a:rPr sz="1200" b="0">
                 <a:solidFill>
                   <a:srgbClr val="0070C0"/>
                 </a:solidFill>
                 <a:latin typeface="맑은 고딕"/>
               </a:rPr>
-              <a:t>[도식]</a:t>
+              <a:t>[출처]</a:t>
+            </a:r>
+          </a:p>
+          <a:p>
+            <a:pPr algn="ctr">
+              <a:spcBef>
+                <a:spcPts val="800"/>
+              </a:spcBef>
+            </a:pPr>
+            <a:r>
+              <a:rPr sz="2100" b="1">
+                <a:solidFill>
+                  <a:srgbClr val="000000"/>
+                </a:solidFill>
+                <a:latin typeface="맑은 고딕"/>
+              </a:rPr>
+              <a:t>Microsoft</a:t>
+            </a:r>
+          </a:p>
+          <a:p>
+            <a:pPr algn="ctr">
+              <a:spcBef>
+                <a:spcPts val="400"/>
+              </a:spcBef>
+            </a:pPr>
+            <a:r>
+              <a:rPr sz="1400" b="0">
+                <a:solidFill>
+                  <a:srgbClr val="373737"/>
+                </a:solidFill>
+                <a:latin typeface="맑은 고딕"/>
+              </a:rPr>
+              <a:t>Research의 정보탐색 다양성 문제의식과 연결. 결론 후보로만 사용</a:t>
             </a:r>
           </a:p>
         </p:txBody>
@@ -14505,7 +15053,7 @@
                 </a:solidFill>
                 <a:latin typeface="맑은 고딕"/>
               </a:rPr>
-              <a:t>한국에서도 AI 디지털교과서와 AI 체험 전시가 이미 정책·기관 사례로 등장한다</a:t>
+              <a:t>AI가 답을 주는 건 막기 어렵다</a:t>
             </a:r>
           </a:p>
           <a:p>
@@ -14524,7 +15072,7 @@
                 </a:solidFill>
                 <a:latin typeface="맑은 고딕"/>
               </a:rPr>
-              <a:t>다만 한국 사례는 메인 논지의 증명이 아니라 후반 보조 연결로 사용한다</a:t>
+              <a:t>그렇다면 사람에게 남겨야 할 것은 답이 아니라 과정일 수 있다</a:t>
             </a:r>
           </a:p>
         </p:txBody>
@@ -14537,7 +15085,7 @@
 </p:sld>
 </file>
 
-<file path=ppt/slides/slide19.xml><?xml version="1.0" encoding="utf-8"?>
+<file path=ppt/slides/slide2.xml><?xml version="1.0" encoding="utf-8"?>
 <p:sld xmlns:a="http://schemas.openxmlformats.org/drawingml/2006/main" xmlns:p="http://schemas.openxmlformats.org/presentationml/2006/main" xmlns:r="http://schemas.openxmlformats.org/officeDocument/2006/relationships">
   <p:cSld>
     <p:bg>
@@ -14584,14 +15132,75 @@
                 </a:solidFill>
                 <a:latin typeface="맑은 고딕"/>
               </a:rPr>
-              <a:t>지식기관의 경쟁자는 AI가 아니라 ‘무심코 넘어가는 습관’일지도</a:t>
-            </a:r>
-          </a:p>
-        </p:txBody>
-      </p:sp>
-      <p:sp>
-        <p:nvSpPr>
-          <p:cNvPr id="3" name="Rectangle 2"/>
+              <a:t>AI가 답을 바로 주는 건 정말 편리하다</a:t>
+            </a:r>
+          </a:p>
+        </p:txBody>
+      </p:sp>
+      <p:sp>
+        <p:nvSpPr>
+          <p:cNvPr id="3" name="TextBox 2"/>
+          <p:cNvSpPr txBox="1"/>
+          <p:nvPr/>
+        </p:nvSpPr>
+        <p:spPr>
+          <a:xfrm>
+            <a:off x="5989320" y="1874519"/>
+            <a:ext cx="5303520" cy="2651760"/>
+          </a:xfrm>
+          <a:prstGeom prst="rect">
+            <a:avLst/>
+          </a:prstGeom>
+          <a:noFill/>
+        </p:spPr>
+        <p:txBody>
+          <a:bodyPr wrap="square" anchor="ctr">
+            <a:spAutoFit/>
+          </a:bodyPr>
+          <a:lstStyle/>
+          <a:p>
+            <a:pPr>
+              <a:lnSpc>
+                <a:spcPct val="150000"/>
+              </a:lnSpc>
+              <a:spcAft>
+                <a:spcPts val="800"/>
+              </a:spcAft>
+            </a:pPr>
+            <a:r>
+              <a:rPr sz="2800" b="0" u="none">
+                <a:solidFill>
+                  <a:srgbClr val="000000"/>
+                </a:solidFill>
+                <a:latin typeface="맑은 고딕"/>
+              </a:rPr>
+              <a:t>모르는 것을 물으면 바로 답이 나오고</a:t>
+            </a:r>
+          </a:p>
+          <a:p>
+            <a:pPr>
+              <a:lnSpc>
+                <a:spcPct val="150000"/>
+              </a:lnSpc>
+              <a:spcAft>
+                <a:spcPts val="800"/>
+              </a:spcAft>
+            </a:pPr>
+            <a:r>
+              <a:rPr sz="2800" b="0" u="none">
+                <a:solidFill>
+                  <a:srgbClr val="000000"/>
+                </a:solidFill>
+                <a:latin typeface="맑은 고딕"/>
+              </a:rPr>
+              <a:t>AI는 접근성과 개인화 가능성도 넓힐 수 있다</a:t>
+            </a:r>
+          </a:p>
+        </p:txBody>
+      </p:sp>
+      <p:sp>
+        <p:nvSpPr>
+          <p:cNvPr id="4" name="Rectangle 3"/>
           <p:cNvSpPr/>
           <p:nvPr/>
         </p:nvSpPr>
@@ -14632,13 +15241,13 @@
           <a:p>
             <a:pPr algn="ctr"/>
             <a:r>
-              <a:rPr sz="1800" b="0">
+              <a:rPr sz="1200" b="0">
                 <a:solidFill>
                   <a:srgbClr val="0070C0"/>
                 </a:solidFill>
                 <a:latin typeface="맑은 고딕"/>
               </a:rPr>
-              <a:t>[기사 인용]</a:t>
+              <a:t>[출처]</a:t>
             </a:r>
           </a:p>
           <a:p>
@@ -14648,7 +15257,7 @@
               </a:spcBef>
             </a:pPr>
             <a:r>
-              <a:rPr sz="1800" b="1">
+              <a:rPr sz="2100" b="1">
                 <a:solidFill>
                   <a:srgbClr val="000000"/>
                 </a:solidFill>
@@ -14666,72 +15275,11 @@
             <a:r>
               <a:rPr sz="1400" b="0">
                 <a:solidFill>
-                  <a:srgbClr val="566070"/>
+                  <a:srgbClr val="373737"/>
                 </a:solidFill>
                 <a:latin typeface="맑은 고딕"/>
               </a:rPr>
-              <a:t>지식기관의 경쟁자는 AI가 아니라 ‘무심코 넘어가는 습관’일지도</a:t>
-            </a:r>
-          </a:p>
-        </p:txBody>
-      </p:sp>
-      <p:sp>
-        <p:nvSpPr>
-          <p:cNvPr id="4" name="TextBox 3"/>
-          <p:cNvSpPr txBox="1"/>
-          <p:nvPr/>
-        </p:nvSpPr>
-        <p:spPr>
-          <a:xfrm>
-            <a:off x="5989320" y="2103120"/>
-            <a:ext cx="5303520" cy="2926080"/>
-          </a:xfrm>
-          <a:prstGeom prst="rect">
-            <a:avLst/>
-          </a:prstGeom>
-          <a:noFill/>
-        </p:spPr>
-        <p:txBody>
-          <a:bodyPr wrap="square" anchor="ctr">
-            <a:spAutoFit/>
-          </a:bodyPr>
-          <a:lstStyle/>
-          <a:p>
-            <a:pPr>
-              <a:lnSpc>
-                <a:spcPct val="150000"/>
-              </a:lnSpc>
-              <a:spcAft>
-                <a:spcPts val="800"/>
-              </a:spcAft>
-            </a:pPr>
-            <a:r>
-              <a:rPr sz="2800" b="0" u="none">
-                <a:solidFill>
-                  <a:srgbClr val="000000"/>
-                </a:solidFill>
-                <a:latin typeface="맑은 고딕"/>
-              </a:rPr>
-              <a:t>AI가 답을 주는 건 막기 어렵다</a:t>
-            </a:r>
-          </a:p>
-          <a:p>
-            <a:pPr>
-              <a:lnSpc>
-                <a:spcPct val="150000"/>
-              </a:lnSpc>
-              <a:spcAft>
-                <a:spcPts val="800"/>
-              </a:spcAft>
-            </a:pPr>
-            <a:r>
-              <a:rPr sz="2800" b="0" u="none">
-                <a:solidFill>
-                  <a:srgbClr val="000000"/>
-                </a:solidFill>
-                <a:latin typeface="맑은 고딕"/>
-              </a:rPr>
-              <a:t>그렇다면 사람에게 남겨야 할 것은 답이 아니라 과정일 수 있다</a:t>
+              <a:t>Research — generative AI and information…</a:t>
             </a:r>
           </a:p>
         </p:txBody>
@@ -14744,7 +15292,7 @@
 </p:sld>
 </file>
 
-<file path=ppt/slides/slide2.xml><?xml version="1.0" encoding="utf-8"?>
+<file path=ppt/slides/slide20.xml><?xml version="1.0" encoding="utf-8"?>
 <p:sld xmlns:a="http://schemas.openxmlformats.org/drawingml/2006/main" xmlns:p="http://schemas.openxmlformats.org/presentationml/2006/main" xmlns:r="http://schemas.openxmlformats.org/officeDocument/2006/relationships">
   <p:cSld>
     <p:bg>
@@ -14770,6 +15318,66 @@
         </p:nvSpPr>
         <p:spPr>
           <a:xfrm>
+            <a:off x="843991" y="1273759"/>
+            <a:ext cx="10752429" cy="2424988"/>
+          </a:xfrm>
+          <a:prstGeom prst="rect">
+            <a:avLst/>
+          </a:prstGeom>
+          <a:noFill/>
+        </p:spPr>
+        <p:txBody>
+          <a:bodyPr wrap="square">
+            <a:spAutoFit/>
+          </a:bodyPr>
+          <a:lstStyle/>
+          <a:p>
+            <a:r>
+              <a:rPr sz="5400" b="1" u="none">
+                <a:solidFill>
+                  <a:srgbClr val="181C23"/>
+                </a:solidFill>
+                <a:latin typeface="맑은 고딕"/>
+              </a:rPr>
+              <a:t>AI를 금지할 것인가, 다루는 법을 가르칠 것인가</a:t>
+            </a:r>
+          </a:p>
+        </p:txBody>
+      </p:sp>
+    </p:spTree>
+  </p:cSld>
+  <p:clrMapOvr>
+    <a:masterClrMapping/>
+  </p:clrMapOvr>
+</p:sld>
+</file>
+
+<file path=ppt/slides/slide21.xml><?xml version="1.0" encoding="utf-8"?>
+<p:sld xmlns:a="http://schemas.openxmlformats.org/drawingml/2006/main" xmlns:p="http://schemas.openxmlformats.org/presentationml/2006/main" xmlns:r="http://schemas.openxmlformats.org/officeDocument/2006/relationships">
+  <p:cSld>
+    <p:bg>
+      <p:bgPr>
+        <a:solidFill>
+          <a:srgbClr val="F8F9FA"/>
+        </a:solidFill>
+        <a:effectLst/>
+      </p:bgPr>
+    </p:bg>
+    <p:spTree>
+      <p:nvGrpSpPr>
+        <p:cNvPr id="1" name=""/>
+        <p:cNvGrpSpPr/>
+        <p:nvPr/>
+      </p:nvGrpSpPr>
+      <p:grpSpPr/>
+      <p:sp>
+        <p:nvSpPr>
+          <p:cNvPr id="2" name="TextBox 1"/>
+          <p:cNvSpPr txBox="1"/>
+          <p:nvPr/>
+        </p:nvSpPr>
+        <p:spPr>
+          <a:xfrm>
             <a:off x="572414" y="356616"/>
             <a:ext cx="11192256" cy="521207"/>
           </a:xfrm>
@@ -14791,21 +15399,365 @@
                 </a:solidFill>
                 <a:latin typeface="맑은 고딕"/>
               </a:rPr>
-              <a:t>AI가 답을 바로 주는 건 정말 편리하다</a:t>
-            </a:r>
-          </a:p>
-        </p:txBody>
-      </p:sp>
-      <p:sp>
-        <p:nvSpPr>
-          <p:cNvPr id="3" name="TextBox 2"/>
+              <a:t>AI를 안 쓰게 하는 건 점점 어려워진다</a:t>
+            </a:r>
+          </a:p>
+        </p:txBody>
+      </p:sp>
+      <p:sp>
+        <p:nvSpPr>
+          <p:cNvPr id="3" name="Rectangle 2"/>
+          <p:cNvSpPr/>
+          <p:nvPr/>
+        </p:nvSpPr>
+        <p:spPr>
+          <a:xfrm>
+            <a:off x="713232" y="1417320"/>
+            <a:ext cx="4892040" cy="4114800"/>
+          </a:xfrm>
+          <a:prstGeom prst="rect">
+            <a:avLst/>
+          </a:prstGeom>
+          <a:solidFill>
+            <a:srgbClr val="F8F8F8"/>
+          </a:solidFill>
+          <a:ln w="12700">
+            <a:solidFill>
+              <a:srgbClr val="BEBEBE"/>
+            </a:solidFill>
+          </a:ln>
+        </p:spPr>
+        <p:style>
+          <a:lnRef idx="1">
+            <a:schemeClr val="accent1"/>
+          </a:lnRef>
+          <a:fillRef idx="3">
+            <a:schemeClr val="accent1"/>
+          </a:fillRef>
+          <a:effectRef idx="2">
+            <a:schemeClr val="accent1"/>
+          </a:effectRef>
+          <a:fontRef idx="minor">
+            <a:schemeClr val="lt1"/>
+          </a:fontRef>
+        </p:style>
+        <p:txBody>
+          <a:bodyPr rtlCol="0" anchor="ctr"/>
+          <a:lstStyle/>
+          <a:p>
+            <a:pPr algn="ctr"/>
+          </a:p>
+        </p:txBody>
+      </p:sp>
+      <p:sp>
+        <p:nvSpPr>
+          <p:cNvPr id="4" name="TextBox 3"/>
           <p:cNvSpPr txBox="1"/>
           <p:nvPr/>
         </p:nvSpPr>
         <p:spPr>
           <a:xfrm>
-            <a:off x="5989320" y="1874519"/>
-            <a:ext cx="5303520" cy="2651760"/>
+            <a:off x="822960" y="1527048"/>
+            <a:ext cx="914400" cy="201168"/>
+          </a:xfrm>
+          <a:prstGeom prst="rect">
+            <a:avLst/>
+          </a:prstGeom>
+          <a:noFill/>
+        </p:spPr>
+        <p:txBody>
+          <a:bodyPr wrap="square">
+            <a:spAutoFit/>
+          </a:bodyPr>
+          <a:lstStyle/>
+          <a:p>
+            <a:r>
+              <a:rPr sz="1200" b="0" u="none">
+                <a:solidFill>
+                  <a:srgbClr val="0070C0"/>
+                </a:solidFill>
+                <a:latin typeface="맑은 고딕"/>
+              </a:rPr>
+              <a:t>[도식]</a:t>
+            </a:r>
+          </a:p>
+        </p:txBody>
+      </p:sp>
+      <p:sp>
+        <p:nvSpPr>
+          <p:cNvPr id="5" name="Rectangle 4"/>
+          <p:cNvSpPr/>
+          <p:nvPr/>
+        </p:nvSpPr>
+        <p:spPr>
+          <a:xfrm>
+            <a:off x="1033271" y="3040380"/>
+            <a:ext cx="1828799" cy="1143000"/>
+          </a:xfrm>
+          <a:prstGeom prst="rect">
+            <a:avLst/>
+          </a:prstGeom>
+          <a:solidFill>
+            <a:srgbClr val="FFFFFF"/>
+          </a:solidFill>
+          <a:ln w="12700">
+            <a:solidFill>
+              <a:srgbClr val="A0A0A0"/>
+            </a:solidFill>
+          </a:ln>
+        </p:spPr>
+        <p:style>
+          <a:lnRef idx="1">
+            <a:schemeClr val="accent1"/>
+          </a:lnRef>
+          <a:fillRef idx="3">
+            <a:schemeClr val="accent1"/>
+          </a:fillRef>
+          <a:effectRef idx="2">
+            <a:schemeClr val="accent1"/>
+          </a:effectRef>
+          <a:fontRef idx="minor">
+            <a:schemeClr val="lt1"/>
+          </a:fontRef>
+        </p:style>
+        <p:txBody>
+          <a:bodyPr rtlCol="0" anchor="ctr"/>
+          <a:lstStyle/>
+          <a:p>
+            <a:pPr algn="ctr"/>
+          </a:p>
+        </p:txBody>
+      </p:sp>
+      <p:sp>
+        <p:nvSpPr>
+          <p:cNvPr id="6" name="Rectangle 5"/>
+          <p:cNvSpPr/>
+          <p:nvPr/>
+        </p:nvSpPr>
+        <p:spPr>
+          <a:xfrm>
+            <a:off x="3456432" y="3040380"/>
+            <a:ext cx="1828799" cy="1143000"/>
+          </a:xfrm>
+          <a:prstGeom prst="rect">
+            <a:avLst/>
+          </a:prstGeom>
+          <a:solidFill>
+            <a:srgbClr val="FFFFFF"/>
+          </a:solidFill>
+          <a:ln w="12700">
+            <a:solidFill>
+              <a:srgbClr val="A0A0A0"/>
+            </a:solidFill>
+          </a:ln>
+        </p:spPr>
+        <p:style>
+          <a:lnRef idx="1">
+            <a:schemeClr val="accent1"/>
+          </a:lnRef>
+          <a:fillRef idx="3">
+            <a:schemeClr val="accent1"/>
+          </a:fillRef>
+          <a:effectRef idx="2">
+            <a:schemeClr val="accent1"/>
+          </a:effectRef>
+          <a:fontRef idx="minor">
+            <a:schemeClr val="lt1"/>
+          </a:fontRef>
+        </p:style>
+        <p:txBody>
+          <a:bodyPr rtlCol="0" anchor="ctr"/>
+          <a:lstStyle/>
+          <a:p>
+            <a:pPr algn="ctr"/>
+          </a:p>
+        </p:txBody>
+      </p:sp>
+      <p:sp>
+        <p:nvSpPr>
+          <p:cNvPr id="7" name="TextBox 6"/>
+          <p:cNvSpPr txBox="1"/>
+          <p:nvPr/>
+        </p:nvSpPr>
+        <p:spPr>
+          <a:xfrm>
+            <a:off x="1124712" y="3204972"/>
+            <a:ext cx="1645919" cy="320040"/>
+          </a:xfrm>
+          <a:prstGeom prst="rect">
+            <a:avLst/>
+          </a:prstGeom>
+          <a:noFill/>
+        </p:spPr>
+        <p:txBody>
+          <a:bodyPr wrap="square">
+            <a:spAutoFit/>
+          </a:bodyPr>
+          <a:lstStyle/>
+          <a:p>
+            <a:pPr algn="ctr"/>
+            <a:r>
+              <a:rPr sz="1800" b="1" u="none">
+                <a:solidFill>
+                  <a:srgbClr val="000000"/>
+                </a:solidFill>
+                <a:latin typeface="맑은 고딕"/>
+              </a:rPr>
+              <a:t>기존 방식</a:t>
+            </a:r>
+          </a:p>
+        </p:txBody>
+      </p:sp>
+      <p:sp>
+        <p:nvSpPr>
+          <p:cNvPr id="8" name="TextBox 7"/>
+          <p:cNvSpPr txBox="1"/>
+          <p:nvPr/>
+        </p:nvSpPr>
+        <p:spPr>
+          <a:xfrm>
+            <a:off x="1124712" y="3607308"/>
+            <a:ext cx="1645919" cy="274320"/>
+          </a:xfrm>
+          <a:prstGeom prst="rect">
+            <a:avLst/>
+          </a:prstGeom>
+          <a:noFill/>
+        </p:spPr>
+        <p:txBody>
+          <a:bodyPr wrap="square">
+            <a:spAutoFit/>
+          </a:bodyPr>
+          <a:lstStyle/>
+          <a:p>
+            <a:pPr algn="ctr"/>
+            <a:r>
+              <a:rPr sz="1500" b="0" u="none">
+                <a:solidFill>
+                  <a:srgbClr val="373737"/>
+                </a:solidFill>
+                <a:latin typeface="맑은 고딕"/>
+              </a:rPr>
+              <a:t>검색 / 비교</a:t>
+            </a:r>
+          </a:p>
+        </p:txBody>
+      </p:sp>
+      <p:sp>
+        <p:nvSpPr>
+          <p:cNvPr id="9" name="TextBox 8"/>
+          <p:cNvSpPr txBox="1"/>
+          <p:nvPr/>
+        </p:nvSpPr>
+        <p:spPr>
+          <a:xfrm>
+            <a:off x="3547872" y="3204972"/>
+            <a:ext cx="1645919" cy="320040"/>
+          </a:xfrm>
+          <a:prstGeom prst="rect">
+            <a:avLst/>
+          </a:prstGeom>
+          <a:noFill/>
+        </p:spPr>
+        <p:txBody>
+          <a:bodyPr wrap="square">
+            <a:spAutoFit/>
+          </a:bodyPr>
+          <a:lstStyle/>
+          <a:p>
+            <a:pPr algn="ctr"/>
+            <a:r>
+              <a:rPr sz="1800" b="1" u="none">
+                <a:solidFill>
+                  <a:srgbClr val="000000"/>
+                </a:solidFill>
+                <a:latin typeface="맑은 고딕"/>
+              </a:rPr>
+              <a:t>AI 즉답</a:t>
+            </a:r>
+          </a:p>
+        </p:txBody>
+      </p:sp>
+      <p:sp>
+        <p:nvSpPr>
+          <p:cNvPr id="10" name="TextBox 9"/>
+          <p:cNvSpPr txBox="1"/>
+          <p:nvPr/>
+        </p:nvSpPr>
+        <p:spPr>
+          <a:xfrm>
+            <a:off x="3547872" y="3607308"/>
+            <a:ext cx="1645919" cy="274320"/>
+          </a:xfrm>
+          <a:prstGeom prst="rect">
+            <a:avLst/>
+          </a:prstGeom>
+          <a:noFill/>
+        </p:spPr>
+        <p:txBody>
+          <a:bodyPr wrap="square">
+            <a:spAutoFit/>
+          </a:bodyPr>
+          <a:lstStyle/>
+          <a:p>
+            <a:pPr algn="ctr"/>
+            <a:r>
+              <a:rPr sz="1500" b="0" u="none">
+                <a:solidFill>
+                  <a:srgbClr val="373737"/>
+                </a:solidFill>
+                <a:latin typeface="맑은 고딕"/>
+              </a:rPr>
+              <a:t>요약 / 검증</a:t>
+            </a:r>
+          </a:p>
+        </p:txBody>
+      </p:sp>
+      <p:sp>
+        <p:nvSpPr>
+          <p:cNvPr id="11" name="TextBox 10"/>
+          <p:cNvSpPr txBox="1"/>
+          <p:nvPr/>
+        </p:nvSpPr>
+        <p:spPr>
+          <a:xfrm>
+            <a:off x="2930652" y="3387852"/>
+            <a:ext cx="457200" cy="347472"/>
+          </a:xfrm>
+          <a:prstGeom prst="rect">
+            <a:avLst/>
+          </a:prstGeom>
+          <a:noFill/>
+        </p:spPr>
+        <p:txBody>
+          <a:bodyPr wrap="square">
+            <a:spAutoFit/>
+          </a:bodyPr>
+          <a:lstStyle/>
+          <a:p>
+            <a:pPr algn="ctr"/>
+            <a:r>
+              <a:rPr sz="2200" b="1" u="none">
+                <a:solidFill>
+                  <a:srgbClr val="373737"/>
+                </a:solidFill>
+                <a:latin typeface="맑은 고딕"/>
+              </a:rPr>
+              <a:t>→</a:t>
+            </a:r>
+          </a:p>
+        </p:txBody>
+      </p:sp>
+      <p:sp>
+        <p:nvSpPr>
+          <p:cNvPr id="12" name="TextBox 11"/>
+          <p:cNvSpPr txBox="1"/>
+          <p:nvPr/>
+        </p:nvSpPr>
+        <p:spPr>
+          <a:xfrm>
+            <a:off x="5989320" y="1508760"/>
+            <a:ext cx="5303520" cy="3337560"/>
           </a:xfrm>
           <a:prstGeom prst="rect">
             <a:avLst/>
@@ -14833,7 +15785,7 @@
                 </a:solidFill>
                 <a:latin typeface="맑은 고딕"/>
               </a:rPr>
-              <a:t>모르는 것을 물으면 바로 답이 나오고, 검색 결과를 여러 개 열어보던 시간이 줄어든다</a:t>
+              <a:t>학생도, 직장인도, 관람객도 이미 AI와 함께 정보를 찾는다</a:t>
             </a:r>
           </a:p>
           <a:p>
@@ -14852,7 +15804,128 @@
                 </a:solidFill>
                 <a:latin typeface="맑은 고딕"/>
               </a:rPr>
-              <a:t>AI는 접근성과 개인화 가능성도 넓힐 수 있다</a:t>
+              <a:t>반대로 AI는 학습 접근성과 개인화 가능성을 높일 수 있다는 주…</a:t>
+            </a:r>
+          </a:p>
+        </p:txBody>
+      </p:sp>
+    </p:spTree>
+  </p:cSld>
+  <p:clrMapOvr>
+    <a:masterClrMapping/>
+  </p:clrMapOvr>
+</p:sld>
+</file>
+
+<file path=ppt/slides/slide22.xml><?xml version="1.0" encoding="utf-8"?>
+<p:sld xmlns:a="http://schemas.openxmlformats.org/drawingml/2006/main" xmlns:p="http://schemas.openxmlformats.org/presentationml/2006/main" xmlns:r="http://schemas.openxmlformats.org/officeDocument/2006/relationships">
+  <p:cSld>
+    <p:bg>
+      <p:bgPr>
+        <a:solidFill>
+          <a:srgbClr val="F8F9FA"/>
+        </a:solidFill>
+        <a:effectLst/>
+      </p:bgPr>
+    </p:bg>
+    <p:spTree>
+      <p:nvGrpSpPr>
+        <p:cNvPr id="1" name=""/>
+        <p:cNvGrpSpPr/>
+        <p:nvPr/>
+      </p:nvGrpSpPr>
+      <p:grpSpPr/>
+      <p:sp>
+        <p:nvSpPr>
+          <p:cNvPr id="2" name="TextBox 1"/>
+          <p:cNvSpPr txBox="1"/>
+          <p:nvPr/>
+        </p:nvSpPr>
+        <p:spPr>
+          <a:xfrm>
+            <a:off x="572414" y="356616"/>
+            <a:ext cx="11192256" cy="521207"/>
+          </a:xfrm>
+          <a:prstGeom prst="rect">
+            <a:avLst/>
+          </a:prstGeom>
+          <a:noFill/>
+        </p:spPr>
+        <p:txBody>
+          <a:bodyPr wrap="square">
+            <a:spAutoFit/>
+          </a:bodyPr>
+          <a:lstStyle/>
+          <a:p>
+            <a:r>
+              <a:rPr sz="2800" b="0" u="none">
+                <a:solidFill>
+                  <a:srgbClr val="FF0000"/>
+                </a:solidFill>
+                <a:latin typeface="맑은 고딕"/>
+              </a:rPr>
+              <a:t>그래서 가르쳐야 할 것은 ‘AI 정답’이 아니라 ‘AI 검산’</a:t>
+            </a:r>
+          </a:p>
+        </p:txBody>
+      </p:sp>
+      <p:sp>
+        <p:nvSpPr>
+          <p:cNvPr id="3" name="TextBox 2"/>
+          <p:cNvSpPr txBox="1"/>
+          <p:nvPr/>
+        </p:nvSpPr>
+        <p:spPr>
+          <a:xfrm>
+            <a:off x="5989320" y="1208836"/>
+            <a:ext cx="5394960" cy="1302105"/>
+          </a:xfrm>
+          <a:prstGeom prst="rect">
+            <a:avLst/>
+          </a:prstGeom>
+          <a:noFill/>
+        </p:spPr>
+        <p:txBody>
+          <a:bodyPr wrap="square" anchor="ctr">
+            <a:spAutoFit/>
+          </a:bodyPr>
+          <a:lstStyle/>
+          <a:p>
+            <a:pPr>
+              <a:lnSpc>
+                <a:spcPct val="150000"/>
+              </a:lnSpc>
+              <a:spcAft>
+                <a:spcPts val="800"/>
+              </a:spcAft>
+            </a:pPr>
+            <a:r>
+              <a:rPr sz="2800" b="0" u="none">
+                <a:solidFill>
+                  <a:srgbClr val="000000"/>
+                </a:solidFill>
+                <a:latin typeface="맑은 고딕"/>
+              </a:rPr>
+              <a:t>AI 답변의 빈틈을 찾는 법</a:t>
+            </a:r>
+          </a:p>
+          <a:p>
+            <a:pPr>
+              <a:lnSpc>
+                <a:spcPct val="150000"/>
+              </a:lnSpc>
+              <a:spcAft>
+                <a:spcPts val="800"/>
+              </a:spcAft>
+            </a:pPr>
+            <a:r>
+              <a:rPr sz="2800" b="0" u="none">
+                <a:solidFill>
+                  <a:srgbClr val="000000"/>
+                </a:solidFill>
+                <a:latin typeface="맑은 고딕"/>
+              </a:rPr>
+              <a:t>다른 자료와 비교하는 법</a:t>
             </a:r>
           </a:p>
         </p:txBody>
@@ -14900,13 +15973,13 @@
           <a:p>
             <a:pPr algn="ctr"/>
             <a:r>
-              <a:rPr sz="1800" b="0">
+              <a:rPr sz="1200" b="0">
                 <a:solidFill>
                   <a:srgbClr val="0070C0"/>
                 </a:solidFill>
                 <a:latin typeface="맑은 고딕"/>
               </a:rPr>
-              <a:t>[기사 인용]</a:t>
+              <a:t>[출처]</a:t>
             </a:r>
           </a:p>
           <a:p>
@@ -14916,13 +15989,13 @@
               </a:spcBef>
             </a:pPr>
             <a:r>
-              <a:rPr sz="1800" b="1">
+              <a:rPr sz="2100" b="1">
                 <a:solidFill>
                   <a:srgbClr val="000000"/>
                 </a:solidFill>
                 <a:latin typeface="맑은 고딕"/>
               </a:rPr>
-              <a:t>Microsoft</a:t>
+              <a:t>UNESCO</a:t>
             </a:r>
           </a:p>
           <a:p>
@@ -14934,11 +16007,11 @@
             <a:r>
               <a:rPr sz="1400" b="0">
                 <a:solidFill>
-                  <a:srgbClr val="566070"/>
+                  <a:srgbClr val="373737"/>
                 </a:solidFill>
                 <a:latin typeface="맑은 고딕"/>
               </a:rPr>
-              <a:t>AI가 답을 바로 주는 건 정말 편리하다</a:t>
+              <a:t>AI Competency Framework, Microsoft Resear…</a:t>
             </a:r>
           </a:p>
         </p:txBody>
@@ -14951,7 +16024,7 @@
 </p:sld>
 </file>
 
-<file path=ppt/slides/slide20.xml><?xml version="1.0" encoding="utf-8"?>
+<file path=ppt/slides/slide23.xml><?xml version="1.0" encoding="utf-8"?>
 <p:sld xmlns:a="http://schemas.openxmlformats.org/drawingml/2006/main" xmlns:p="http://schemas.openxmlformats.org/presentationml/2006/main" xmlns:r="http://schemas.openxmlformats.org/officeDocument/2006/relationships">
   <p:cSld>
     <p:bg>
@@ -14977,8 +16050,8 @@
         </p:nvSpPr>
         <p:spPr>
           <a:xfrm>
-            <a:off x="843991" y="1273759"/>
-            <a:ext cx="10752429" cy="2424988"/>
+            <a:off x="572414" y="356616"/>
+            <a:ext cx="11192256" cy="521207"/>
           </a:xfrm>
           <a:prstGeom prst="rect">
             <a:avLst/>
@@ -14992,13 +16065,418 @@
           <a:lstStyle/>
           <a:p>
             <a:r>
-              <a:rPr sz="5400" b="1" u="none">
+              <a:rPr sz="2800" b="0" u="none">
                 <a:solidFill>
-                  <a:srgbClr val="181C23"/>
+                  <a:srgbClr val="FF0000"/>
                 </a:solidFill>
                 <a:latin typeface="맑은 고딕"/>
               </a:rPr>
-              <a:t>AI를 금지할 것인가, 다루는 법을 가르칠 것인가</a:t>
+              <a:t>천문학이 좋은 비유인 이유</a:t>
+            </a:r>
+          </a:p>
+        </p:txBody>
+      </p:sp>
+      <p:sp>
+        <p:nvSpPr>
+          <p:cNvPr id="3" name="Rectangle 2"/>
+          <p:cNvSpPr/>
+          <p:nvPr/>
+        </p:nvSpPr>
+        <p:spPr>
+          <a:xfrm>
+            <a:off x="713232" y="1417320"/>
+            <a:ext cx="4892040" cy="4114800"/>
+          </a:xfrm>
+          <a:prstGeom prst="rect">
+            <a:avLst/>
+          </a:prstGeom>
+          <a:solidFill>
+            <a:srgbClr val="F8F8F8"/>
+          </a:solidFill>
+          <a:ln w="12700">
+            <a:solidFill>
+              <a:srgbClr val="BEBEBE"/>
+            </a:solidFill>
+          </a:ln>
+        </p:spPr>
+        <p:style>
+          <a:lnRef idx="1">
+            <a:schemeClr val="accent1"/>
+          </a:lnRef>
+          <a:fillRef idx="3">
+            <a:schemeClr val="accent1"/>
+          </a:fillRef>
+          <a:effectRef idx="2">
+            <a:schemeClr val="accent1"/>
+          </a:effectRef>
+          <a:fontRef idx="minor">
+            <a:schemeClr val="lt1"/>
+          </a:fontRef>
+        </p:style>
+        <p:txBody>
+          <a:bodyPr rtlCol="0" anchor="ctr"/>
+          <a:lstStyle/>
+          <a:p>
+            <a:pPr algn="ctr"/>
+          </a:p>
+        </p:txBody>
+      </p:sp>
+      <p:sp>
+        <p:nvSpPr>
+          <p:cNvPr id="4" name="TextBox 3"/>
+          <p:cNvSpPr txBox="1"/>
+          <p:nvPr/>
+        </p:nvSpPr>
+        <p:spPr>
+          <a:xfrm>
+            <a:off x="822960" y="1527048"/>
+            <a:ext cx="914400" cy="201168"/>
+          </a:xfrm>
+          <a:prstGeom prst="rect">
+            <a:avLst/>
+          </a:prstGeom>
+          <a:noFill/>
+        </p:spPr>
+        <p:txBody>
+          <a:bodyPr wrap="square">
+            <a:spAutoFit/>
+          </a:bodyPr>
+          <a:lstStyle/>
+          <a:p>
+            <a:r>
+              <a:rPr sz="1200" b="0" u="none">
+                <a:solidFill>
+                  <a:srgbClr val="0070C0"/>
+                </a:solidFill>
+                <a:latin typeface="맑은 고딕"/>
+              </a:rPr>
+              <a:t>[도식]</a:t>
+            </a:r>
+          </a:p>
+        </p:txBody>
+      </p:sp>
+      <p:sp>
+        <p:nvSpPr>
+          <p:cNvPr id="5" name="Rectangle 4"/>
+          <p:cNvSpPr/>
+          <p:nvPr/>
+        </p:nvSpPr>
+        <p:spPr>
+          <a:xfrm>
+            <a:off x="1033271" y="3040380"/>
+            <a:ext cx="1828799" cy="1143000"/>
+          </a:xfrm>
+          <a:prstGeom prst="rect">
+            <a:avLst/>
+          </a:prstGeom>
+          <a:solidFill>
+            <a:srgbClr val="FFFFFF"/>
+          </a:solidFill>
+          <a:ln w="12700">
+            <a:solidFill>
+              <a:srgbClr val="A0A0A0"/>
+            </a:solidFill>
+          </a:ln>
+        </p:spPr>
+        <p:style>
+          <a:lnRef idx="1">
+            <a:schemeClr val="accent1"/>
+          </a:lnRef>
+          <a:fillRef idx="3">
+            <a:schemeClr val="accent1"/>
+          </a:fillRef>
+          <a:effectRef idx="2">
+            <a:schemeClr val="accent1"/>
+          </a:effectRef>
+          <a:fontRef idx="minor">
+            <a:schemeClr val="lt1"/>
+          </a:fontRef>
+        </p:style>
+        <p:txBody>
+          <a:bodyPr rtlCol="0" anchor="ctr"/>
+          <a:lstStyle/>
+          <a:p>
+            <a:pPr algn="ctr"/>
+          </a:p>
+        </p:txBody>
+      </p:sp>
+      <p:sp>
+        <p:nvSpPr>
+          <p:cNvPr id="6" name="Rectangle 5"/>
+          <p:cNvSpPr/>
+          <p:nvPr/>
+        </p:nvSpPr>
+        <p:spPr>
+          <a:xfrm>
+            <a:off x="3456432" y="3040380"/>
+            <a:ext cx="1828799" cy="1143000"/>
+          </a:xfrm>
+          <a:prstGeom prst="rect">
+            <a:avLst/>
+          </a:prstGeom>
+          <a:solidFill>
+            <a:srgbClr val="FFFFFF"/>
+          </a:solidFill>
+          <a:ln w="12700">
+            <a:solidFill>
+              <a:srgbClr val="A0A0A0"/>
+            </a:solidFill>
+          </a:ln>
+        </p:spPr>
+        <p:style>
+          <a:lnRef idx="1">
+            <a:schemeClr val="accent1"/>
+          </a:lnRef>
+          <a:fillRef idx="3">
+            <a:schemeClr val="accent1"/>
+          </a:fillRef>
+          <a:effectRef idx="2">
+            <a:schemeClr val="accent1"/>
+          </a:effectRef>
+          <a:fontRef idx="minor">
+            <a:schemeClr val="lt1"/>
+          </a:fontRef>
+        </p:style>
+        <p:txBody>
+          <a:bodyPr rtlCol="0" anchor="ctr"/>
+          <a:lstStyle/>
+          <a:p>
+            <a:pPr algn="ctr"/>
+          </a:p>
+        </p:txBody>
+      </p:sp>
+      <p:sp>
+        <p:nvSpPr>
+          <p:cNvPr id="7" name="TextBox 6"/>
+          <p:cNvSpPr txBox="1"/>
+          <p:nvPr/>
+        </p:nvSpPr>
+        <p:spPr>
+          <a:xfrm>
+            <a:off x="1124712" y="3204972"/>
+            <a:ext cx="1645919" cy="320040"/>
+          </a:xfrm>
+          <a:prstGeom prst="rect">
+            <a:avLst/>
+          </a:prstGeom>
+          <a:noFill/>
+        </p:spPr>
+        <p:txBody>
+          <a:bodyPr wrap="square">
+            <a:spAutoFit/>
+          </a:bodyPr>
+          <a:lstStyle/>
+          <a:p>
+            <a:pPr algn="ctr"/>
+            <a:r>
+              <a:rPr sz="1800" b="1" u="none">
+                <a:solidFill>
+                  <a:srgbClr val="000000"/>
+                </a:solidFill>
+                <a:latin typeface="맑은 고딕"/>
+              </a:rPr>
+              <a:t>기존 방식</a:t>
+            </a:r>
+          </a:p>
+        </p:txBody>
+      </p:sp>
+      <p:sp>
+        <p:nvSpPr>
+          <p:cNvPr id="8" name="TextBox 7"/>
+          <p:cNvSpPr txBox="1"/>
+          <p:nvPr/>
+        </p:nvSpPr>
+        <p:spPr>
+          <a:xfrm>
+            <a:off x="1124712" y="3607308"/>
+            <a:ext cx="1645919" cy="274320"/>
+          </a:xfrm>
+          <a:prstGeom prst="rect">
+            <a:avLst/>
+          </a:prstGeom>
+          <a:noFill/>
+        </p:spPr>
+        <p:txBody>
+          <a:bodyPr wrap="square">
+            <a:spAutoFit/>
+          </a:bodyPr>
+          <a:lstStyle/>
+          <a:p>
+            <a:pPr algn="ctr"/>
+            <a:r>
+              <a:rPr sz="1500" b="0" u="none">
+                <a:solidFill>
+                  <a:srgbClr val="373737"/>
+                </a:solidFill>
+                <a:latin typeface="맑은 고딕"/>
+              </a:rPr>
+              <a:t>검색 / 비교</a:t>
+            </a:r>
+          </a:p>
+        </p:txBody>
+      </p:sp>
+      <p:sp>
+        <p:nvSpPr>
+          <p:cNvPr id="9" name="TextBox 8"/>
+          <p:cNvSpPr txBox="1"/>
+          <p:nvPr/>
+        </p:nvSpPr>
+        <p:spPr>
+          <a:xfrm>
+            <a:off x="3547872" y="3204972"/>
+            <a:ext cx="1645919" cy="320040"/>
+          </a:xfrm>
+          <a:prstGeom prst="rect">
+            <a:avLst/>
+          </a:prstGeom>
+          <a:noFill/>
+        </p:spPr>
+        <p:txBody>
+          <a:bodyPr wrap="square">
+            <a:spAutoFit/>
+          </a:bodyPr>
+          <a:lstStyle/>
+          <a:p>
+            <a:pPr algn="ctr"/>
+            <a:r>
+              <a:rPr sz="1800" b="1" u="none">
+                <a:solidFill>
+                  <a:srgbClr val="000000"/>
+                </a:solidFill>
+                <a:latin typeface="맑은 고딕"/>
+              </a:rPr>
+              <a:t>AI 즉답</a:t>
+            </a:r>
+          </a:p>
+        </p:txBody>
+      </p:sp>
+      <p:sp>
+        <p:nvSpPr>
+          <p:cNvPr id="10" name="TextBox 9"/>
+          <p:cNvSpPr txBox="1"/>
+          <p:nvPr/>
+        </p:nvSpPr>
+        <p:spPr>
+          <a:xfrm>
+            <a:off x="3547872" y="3607308"/>
+            <a:ext cx="1645919" cy="274320"/>
+          </a:xfrm>
+          <a:prstGeom prst="rect">
+            <a:avLst/>
+          </a:prstGeom>
+          <a:noFill/>
+        </p:spPr>
+        <p:txBody>
+          <a:bodyPr wrap="square">
+            <a:spAutoFit/>
+          </a:bodyPr>
+          <a:lstStyle/>
+          <a:p>
+            <a:pPr algn="ctr"/>
+            <a:r>
+              <a:rPr sz="1500" b="0" u="none">
+                <a:solidFill>
+                  <a:srgbClr val="373737"/>
+                </a:solidFill>
+                <a:latin typeface="맑은 고딕"/>
+              </a:rPr>
+              <a:t>요약 / 검증</a:t>
+            </a:r>
+          </a:p>
+        </p:txBody>
+      </p:sp>
+      <p:sp>
+        <p:nvSpPr>
+          <p:cNvPr id="11" name="TextBox 10"/>
+          <p:cNvSpPr txBox="1"/>
+          <p:nvPr/>
+        </p:nvSpPr>
+        <p:spPr>
+          <a:xfrm>
+            <a:off x="2930652" y="3387852"/>
+            <a:ext cx="457200" cy="347472"/>
+          </a:xfrm>
+          <a:prstGeom prst="rect">
+            <a:avLst/>
+          </a:prstGeom>
+          <a:noFill/>
+        </p:spPr>
+        <p:txBody>
+          <a:bodyPr wrap="square">
+            <a:spAutoFit/>
+          </a:bodyPr>
+          <a:lstStyle/>
+          <a:p>
+            <a:pPr algn="ctr"/>
+            <a:r>
+              <a:rPr sz="2200" b="1" u="none">
+                <a:solidFill>
+                  <a:srgbClr val="373737"/>
+                </a:solidFill>
+                <a:latin typeface="맑은 고딕"/>
+              </a:rPr>
+              <a:t>→</a:t>
+            </a:r>
+          </a:p>
+        </p:txBody>
+      </p:sp>
+      <p:sp>
+        <p:nvSpPr>
+          <p:cNvPr id="12" name="TextBox 11"/>
+          <p:cNvSpPr txBox="1"/>
+          <p:nvPr/>
+        </p:nvSpPr>
+        <p:spPr>
+          <a:xfrm>
+            <a:off x="5989320" y="2103120"/>
+            <a:ext cx="5303520" cy="2926080"/>
+          </a:xfrm>
+          <a:prstGeom prst="rect">
+            <a:avLst/>
+          </a:prstGeom>
+          <a:noFill/>
+        </p:spPr>
+        <p:txBody>
+          <a:bodyPr wrap="square" anchor="ctr">
+            <a:spAutoFit/>
+          </a:bodyPr>
+          <a:lstStyle/>
+          <a:p>
+            <a:pPr>
+              <a:lnSpc>
+                <a:spcPct val="150000"/>
+              </a:lnSpc>
+              <a:spcAft>
+                <a:spcPts val="800"/>
+              </a:spcAft>
+            </a:pPr>
+            <a:r>
+              <a:rPr sz="2800" b="0" u="none">
+                <a:solidFill>
+                  <a:srgbClr val="000000"/>
+                </a:solidFill>
+                <a:latin typeface="맑은 고딕"/>
+              </a:rPr>
+              <a:t>망원경은 하늘을 대신 봐주지 않는다</a:t>
+            </a:r>
+          </a:p>
+          <a:p>
+            <a:pPr>
+              <a:lnSpc>
+                <a:spcPct val="150000"/>
+              </a:lnSpc>
+              <a:spcAft>
+                <a:spcPts val="800"/>
+              </a:spcAft>
+            </a:pPr>
+            <a:r>
+              <a:rPr sz="2800" b="0" u="none">
+                <a:solidFill>
+                  <a:srgbClr val="000000"/>
+                </a:solidFill>
+                <a:latin typeface="맑은 고딕"/>
+              </a:rPr>
+              <a:t>더 멀리 보게 해줄 뿐, 어디를 볼지는 사람이 정한다</a:t>
             </a:r>
           </a:p>
         </p:txBody>
@@ -15011,7 +16489,7 @@
 </p:sld>
 </file>
 
-<file path=ppt/slides/slide21.xml><?xml version="1.0" encoding="utf-8"?>
+<file path=ppt/slides/slide24.xml><?xml version="1.0" encoding="utf-8"?>
 <p:sld xmlns:a="http://schemas.openxmlformats.org/drawingml/2006/main" xmlns:p="http://schemas.openxmlformats.org/presentationml/2006/main" xmlns:r="http://schemas.openxmlformats.org/officeDocument/2006/relationships">
   <p:cSld>
     <p:bg>
@@ -15058,7 +16536,441 @@
                 </a:solidFill>
                 <a:latin typeface="맑은 고딕"/>
               </a:rPr>
-              <a:t>AI를 안 쓰게 하는 건 점점 어려워진다</a:t>
+              <a:t>방송 전 꼭 채워야 할 자료</a:t>
+            </a:r>
+          </a:p>
+        </p:txBody>
+      </p:sp>
+      <p:sp>
+        <p:nvSpPr>
+          <p:cNvPr id="3" name="TextBox 2"/>
+          <p:cNvSpPr txBox="1"/>
+          <p:nvPr/>
+        </p:nvSpPr>
+        <p:spPr>
+          <a:xfrm>
+            <a:off x="822960" y="1508760"/>
+            <a:ext cx="10424160" cy="4480560"/>
+          </a:xfrm>
+          <a:prstGeom prst="rect">
+            <a:avLst/>
+          </a:prstGeom>
+          <a:noFill/>
+        </p:spPr>
+        <p:txBody>
+          <a:bodyPr wrap="square" anchor="ctr">
+            <a:spAutoFit/>
+          </a:bodyPr>
+          <a:lstStyle/>
+          <a:p>
+            <a:pPr>
+              <a:lnSpc>
+                <a:spcPct val="150000"/>
+              </a:lnSpc>
+              <a:spcAft>
+                <a:spcPts val="800"/>
+              </a:spcAft>
+            </a:pPr>
+            <a:r>
+              <a:rPr sz="2800" b="0" u="none">
+                <a:solidFill>
+                  <a:srgbClr val="000000"/>
+                </a:solidFill>
+                <a:latin typeface="맑은 고딕"/>
+              </a:rPr>
+              <a:t>BBC/Royal Observatory 원문 맥락</a:t>
+            </a:r>
+          </a:p>
+          <a:p>
+            <a:pPr>
+              <a:lnSpc>
+                <a:spcPct val="150000"/>
+              </a:lnSpc>
+              <a:spcAft>
+                <a:spcPts val="800"/>
+              </a:spcAft>
+            </a:pPr>
+            <a:r>
+              <a:rPr sz="2800" b="0" u="none">
+                <a:solidFill>
+                  <a:srgbClr val="000000"/>
+                </a:solidFill>
+                <a:latin typeface="맑은 고딕"/>
+              </a:rPr>
+              <a:t>AI 정보탐색·교육 관련 보조 연구</a:t>
+            </a:r>
+          </a:p>
+          <a:p>
+            <a:pPr>
+              <a:lnSpc>
+                <a:spcPct val="150000"/>
+              </a:lnSpc>
+              <a:spcAft>
+                <a:spcPts val="800"/>
+              </a:spcAft>
+            </a:pPr>
+            <a:r>
+              <a:rPr sz="2800" b="0" u="none">
+                <a:solidFill>
+                  <a:srgbClr val="000000"/>
+                </a:solidFill>
+                <a:latin typeface="맑은 고딕"/>
+              </a:rPr>
+              <a:t>AI 접근성/개인화라는 counterpoint</a:t>
+            </a:r>
+          </a:p>
+        </p:txBody>
+      </p:sp>
+    </p:spTree>
+  </p:cSld>
+  <p:clrMapOvr>
+    <a:masterClrMapping/>
+  </p:clrMapOvr>
+</p:sld>
+</file>
+
+<file path=ppt/slides/slide25.xml><?xml version="1.0" encoding="utf-8"?>
+<p:sld xmlns:a="http://schemas.openxmlformats.org/drawingml/2006/main" xmlns:p="http://schemas.openxmlformats.org/presentationml/2006/main" xmlns:r="http://schemas.openxmlformats.org/officeDocument/2006/relationships">
+  <p:cSld>
+    <p:bg>
+      <p:bgPr>
+        <a:solidFill>
+          <a:srgbClr val="F8F9FA"/>
+        </a:solidFill>
+        <a:effectLst/>
+      </p:bgPr>
+    </p:bg>
+    <p:spTree>
+      <p:nvGrpSpPr>
+        <p:cNvPr id="1" name=""/>
+        <p:cNvGrpSpPr/>
+        <p:nvPr/>
+      </p:nvGrpSpPr>
+      <p:grpSpPr/>
+      <p:sp>
+        <p:nvSpPr>
+          <p:cNvPr id="2" name="TextBox 1"/>
+          <p:cNvSpPr txBox="1"/>
+          <p:nvPr/>
+        </p:nvSpPr>
+        <p:spPr>
+          <a:xfrm>
+            <a:off x="572414" y="356616"/>
+            <a:ext cx="11192256" cy="521207"/>
+          </a:xfrm>
+          <a:prstGeom prst="rect">
+            <a:avLst/>
+          </a:prstGeom>
+          <a:noFill/>
+        </p:spPr>
+        <p:txBody>
+          <a:bodyPr wrap="square">
+            <a:spAutoFit/>
+          </a:bodyPr>
+          <a:lstStyle/>
+          <a:p>
+            <a:r>
+              <a:rPr sz="2800" b="0" u="none">
+                <a:solidFill>
+                  <a:srgbClr val="FF0000"/>
+                </a:solidFill>
+                <a:latin typeface="맑은 고딕"/>
+              </a:rPr>
+              <a:t>AI 시대의 공부는 정답을 맞히는 일이 아니라</a:t>
+            </a:r>
+          </a:p>
+        </p:txBody>
+      </p:sp>
+      <p:sp>
+        <p:nvSpPr>
+          <p:cNvPr id="3" name="TextBox 2"/>
+          <p:cNvSpPr txBox="1"/>
+          <p:nvPr/>
+        </p:nvSpPr>
+        <p:spPr>
+          <a:xfrm>
+            <a:off x="713232" y="2103120"/>
+            <a:ext cx="10652760" cy="2926080"/>
+          </a:xfrm>
+          <a:prstGeom prst="rect">
+            <a:avLst/>
+          </a:prstGeom>
+          <a:noFill/>
+        </p:spPr>
+        <p:txBody>
+          <a:bodyPr wrap="square" anchor="ctr">
+            <a:spAutoFit/>
+          </a:bodyPr>
+          <a:lstStyle/>
+          <a:p>
+            <a:pPr>
+              <a:lnSpc>
+                <a:spcPct val="150000"/>
+              </a:lnSpc>
+              <a:spcAft>
+                <a:spcPts val="800"/>
+              </a:spcAft>
+            </a:pPr>
+            <a:r>
+              <a:rPr sz="2800" b="0" u="none">
+                <a:solidFill>
+                  <a:srgbClr val="000000"/>
+                </a:solidFill>
+                <a:latin typeface="맑은 고딕"/>
+              </a:rPr>
+              <a:t>좋은 질문을 만들고</a:t>
+            </a:r>
+          </a:p>
+          <a:p>
+            <a:pPr>
+              <a:lnSpc>
+                <a:spcPct val="150000"/>
+              </a:lnSpc>
+              <a:spcAft>
+                <a:spcPts val="800"/>
+              </a:spcAft>
+            </a:pPr>
+            <a:r>
+              <a:rPr sz="2800" b="0" u="none">
+                <a:solidFill>
+                  <a:srgbClr val="000000"/>
+                </a:solidFill>
+                <a:latin typeface="맑은 고딕"/>
+              </a:rPr>
+              <a:t>모르는 것을 남겨두는 법을 배우는 일일지도 모른다</a:t>
+            </a:r>
+          </a:p>
+        </p:txBody>
+      </p:sp>
+    </p:spTree>
+  </p:cSld>
+  <p:clrMapOvr>
+    <a:masterClrMapping/>
+  </p:clrMapOvr>
+</p:sld>
+</file>
+
+<file path=ppt/slides/slide26.xml><?xml version="1.0" encoding="utf-8"?>
+<p:sld xmlns:a="http://schemas.openxmlformats.org/drawingml/2006/main" xmlns:p="http://schemas.openxmlformats.org/presentationml/2006/main" xmlns:r="http://schemas.openxmlformats.org/officeDocument/2006/relationships">
+  <p:cSld>
+    <p:bg>
+      <p:bgPr>
+        <a:solidFill>
+          <a:srgbClr val="F8F9FA"/>
+        </a:solidFill>
+        <a:effectLst/>
+      </p:bgPr>
+    </p:bg>
+    <p:spTree>
+      <p:nvGrpSpPr>
+        <p:cNvPr id="1" name=""/>
+        <p:cNvGrpSpPr/>
+        <p:nvPr/>
+      </p:nvGrpSpPr>
+      <p:grpSpPr/>
+      <p:sp>
+        <p:nvSpPr>
+          <p:cNvPr id="2" name="TextBox 1"/>
+          <p:cNvSpPr txBox="1"/>
+          <p:nvPr/>
+        </p:nvSpPr>
+        <p:spPr>
+          <a:xfrm>
+            <a:off x="572414" y="356616"/>
+            <a:ext cx="11192256" cy="521207"/>
+          </a:xfrm>
+          <a:prstGeom prst="rect">
+            <a:avLst/>
+          </a:prstGeom>
+          <a:noFill/>
+        </p:spPr>
+        <p:txBody>
+          <a:bodyPr wrap="square">
+            <a:spAutoFit/>
+          </a:bodyPr>
+          <a:lstStyle/>
+          <a:p>
+            <a:r>
+              <a:rPr sz="2800" b="0" u="none">
+                <a:solidFill>
+                  <a:srgbClr val="FF0000"/>
+                </a:solidFill>
+                <a:latin typeface="맑은 고딕"/>
+              </a:rPr>
+              <a:t>AI가 답을 해주면, 사람은 질문을 해야 한다</a:t>
+            </a:r>
+          </a:p>
+        </p:txBody>
+      </p:sp>
+      <p:sp>
+        <p:nvSpPr>
+          <p:cNvPr id="3" name="TextBox 2"/>
+          <p:cNvSpPr txBox="1"/>
+          <p:nvPr/>
+        </p:nvSpPr>
+        <p:spPr>
+          <a:xfrm>
+            <a:off x="713232" y="1874519"/>
+            <a:ext cx="9875520" cy="2651760"/>
+          </a:xfrm>
+          <a:prstGeom prst="rect">
+            <a:avLst/>
+          </a:prstGeom>
+          <a:noFill/>
+        </p:spPr>
+        <p:txBody>
+          <a:bodyPr wrap="square" anchor="ctr">
+            <a:spAutoFit/>
+          </a:bodyPr>
+          <a:lstStyle/>
+          <a:p>
+            <a:pPr>
+              <a:lnSpc>
+                <a:spcPct val="150000"/>
+              </a:lnSpc>
+              <a:spcAft>
+                <a:spcPts val="800"/>
+              </a:spcAft>
+            </a:pPr>
+            <a:r>
+              <a:rPr sz="2800" b="0" u="none">
+                <a:solidFill>
+                  <a:srgbClr val="000000"/>
+                </a:solidFill>
+                <a:latin typeface="맑은 고딕"/>
+              </a:rPr>
+              <a:t>이제 진짜 시험 문제는 이걸지도 모른다</a:t>
+            </a:r>
+          </a:p>
+          <a:p>
+            <a:pPr>
+              <a:lnSpc>
+                <a:spcPct val="150000"/>
+              </a:lnSpc>
+              <a:spcAft>
+                <a:spcPts val="800"/>
+              </a:spcAft>
+            </a:pPr>
+            <a:r>
+              <a:rPr sz="2800" b="0" u="none">
+                <a:solidFill>
+                  <a:srgbClr val="000000"/>
+                </a:solidFill>
+                <a:latin typeface="맑은 고딕"/>
+              </a:rPr>
+              <a:t>답은 AI가 했는데, 질문은 누가 했습니까?</a:t>
+            </a:r>
+          </a:p>
+        </p:txBody>
+      </p:sp>
+    </p:spTree>
+  </p:cSld>
+  <p:clrMapOvr>
+    <a:masterClrMapping/>
+  </p:clrMapOvr>
+</p:sld>
+</file>
+
+<file path=ppt/slides/slide3.xml><?xml version="1.0" encoding="utf-8"?>
+<p:sld xmlns:a="http://schemas.openxmlformats.org/drawingml/2006/main" xmlns:p="http://schemas.openxmlformats.org/presentationml/2006/main" xmlns:r="http://schemas.openxmlformats.org/officeDocument/2006/relationships">
+  <p:cSld>
+    <p:bg>
+      <p:bgPr>
+        <a:solidFill>
+          <a:srgbClr val="F8F9FA"/>
+        </a:solidFill>
+        <a:effectLst/>
+      </p:bgPr>
+    </p:bg>
+    <p:spTree>
+      <p:nvGrpSpPr>
+        <p:cNvPr id="1" name=""/>
+        <p:cNvGrpSpPr/>
+        <p:nvPr/>
+      </p:nvGrpSpPr>
+      <p:grpSpPr/>
+      <p:sp>
+        <p:nvSpPr>
+          <p:cNvPr id="2" name="Rectangle 1"/>
+          <p:cNvSpPr/>
+          <p:nvPr/>
+        </p:nvSpPr>
+        <p:spPr>
+          <a:xfrm>
+            <a:off x="685800" y="1508760"/>
+            <a:ext cx="4800600" cy="3794760"/>
+          </a:xfrm>
+          <a:prstGeom prst="rect">
+            <a:avLst/>
+          </a:prstGeom>
+          <a:solidFill>
+            <a:srgbClr val="F5F5F5"/>
+          </a:solidFill>
+          <a:ln w="12700">
+            <a:solidFill>
+              <a:srgbClr val="BEBEBE"/>
+            </a:solidFill>
+          </a:ln>
+        </p:spPr>
+        <p:style>
+          <a:lnRef idx="1">
+            <a:schemeClr val="accent1"/>
+          </a:lnRef>
+          <a:fillRef idx="3">
+            <a:schemeClr val="accent1"/>
+          </a:fillRef>
+          <a:effectRef idx="2">
+            <a:schemeClr val="accent1"/>
+          </a:effectRef>
+          <a:fontRef idx="minor">
+            <a:schemeClr val="lt1"/>
+          </a:fontRef>
+        </p:style>
+        <p:txBody>
+          <a:bodyPr rtlCol="0" anchor="ctr" wrap="square"/>
+          <a:lstStyle/>
+          <a:p>
+            <a:pPr algn="ctr"/>
+            <a:r>
+              <a:rPr sz="1200" b="0">
+                <a:solidFill>
+                  <a:srgbClr val="0070C0"/>
+                </a:solidFill>
+                <a:latin typeface="맑은 고딕"/>
+              </a:rPr>
+              <a:t>[출처]</a:t>
+            </a:r>
+          </a:p>
+          <a:p>
+            <a:pPr algn="ctr">
+              <a:spcBef>
+                <a:spcPts val="800"/>
+              </a:spcBef>
+            </a:pPr>
+            <a:r>
+              <a:rPr sz="2100" b="1">
+                <a:solidFill>
+                  <a:srgbClr val="000000"/>
+                </a:solidFill>
+                <a:latin typeface="맑은 고딕"/>
+              </a:rPr>
+              <a:t>BBC</a:t>
+            </a:r>
+          </a:p>
+          <a:p>
+            <a:pPr algn="ctr">
+              <a:spcBef>
+                <a:spcPts val="400"/>
+              </a:spcBef>
+            </a:pPr>
+            <a:r>
+              <a:rPr sz="1400" b="0">
+                <a:solidFill>
+                  <a:srgbClr val="373737"/>
+                </a:solidFill>
+                <a:latin typeface="맑은 고딕"/>
+              </a:rPr>
+              <a:t>Royal Observatory article. Royal Observat…</a:t>
             </a:r>
           </a:p>
         </p:txBody>
@@ -15066,6 +16978,267 @@
       <p:sp>
         <p:nvSpPr>
           <p:cNvPr id="3" name="Rectangle 2"/>
+          <p:cNvSpPr/>
+          <p:nvPr/>
+        </p:nvSpPr>
+        <p:spPr>
+          <a:xfrm>
+            <a:off x="5806440" y="731520"/>
+            <a:ext cx="6126479" cy="6446520"/>
+          </a:xfrm>
+          <a:prstGeom prst="rect">
+            <a:avLst/>
+          </a:prstGeom>
+          <a:solidFill>
+            <a:srgbClr val="FFFFFF"/>
+          </a:solidFill>
+          <a:ln w="15240">
+            <a:solidFill>
+              <a:srgbClr val="D2D8E0"/>
+            </a:solidFill>
+          </a:ln>
+        </p:spPr>
+        <p:style>
+          <a:lnRef idx="1">
+            <a:schemeClr val="accent1"/>
+          </a:lnRef>
+          <a:fillRef idx="3">
+            <a:schemeClr val="accent1"/>
+          </a:fillRef>
+          <a:effectRef idx="2">
+            <a:schemeClr val="accent1"/>
+          </a:effectRef>
+          <a:fontRef idx="minor">
+            <a:schemeClr val="lt1"/>
+          </a:fontRef>
+        </p:style>
+        <p:txBody>
+          <a:bodyPr rtlCol="0" anchor="ctr"/>
+          <a:lstStyle/>
+          <a:p>
+            <a:pPr algn="ctr"/>
+          </a:p>
+        </p:txBody>
+      </p:sp>
+      <p:sp>
+        <p:nvSpPr>
+          <p:cNvPr id="4" name="TextBox 3"/>
+          <p:cNvSpPr txBox="1"/>
+          <p:nvPr/>
+        </p:nvSpPr>
+        <p:spPr>
+          <a:xfrm>
+            <a:off x="572414" y="356616"/>
+            <a:ext cx="11192256" cy="521207"/>
+          </a:xfrm>
+          <a:prstGeom prst="rect">
+            <a:avLst/>
+          </a:prstGeom>
+          <a:noFill/>
+        </p:spPr>
+        <p:txBody>
+          <a:bodyPr wrap="square">
+            <a:spAutoFit/>
+          </a:bodyPr>
+          <a:lstStyle/>
+          <a:p>
+            <a:r>
+              <a:rPr sz="2800" b="0" u="none">
+                <a:solidFill>
+                  <a:srgbClr val="FF0000"/>
+                </a:solidFill>
+                <a:latin typeface="맑은 고딕"/>
+              </a:rPr>
+              <a:t>영국 왕립천문대 쪽에서 나온 경고</a:t>
+            </a:r>
+          </a:p>
+        </p:txBody>
+      </p:sp>
+      <p:sp>
+        <p:nvSpPr>
+          <p:cNvPr id="5" name="TextBox 4"/>
+          <p:cNvSpPr txBox="1"/>
+          <p:nvPr/>
+        </p:nvSpPr>
+        <p:spPr>
+          <a:xfrm>
+            <a:off x="5806440" y="1965960"/>
+            <a:ext cx="5577840" cy="2468880"/>
+          </a:xfrm>
+          <a:prstGeom prst="rect">
+            <a:avLst/>
+          </a:prstGeom>
+          <a:noFill/>
+        </p:spPr>
+        <p:txBody>
+          <a:bodyPr wrap="square" anchor="ctr">
+            <a:spAutoFit/>
+          </a:bodyPr>
+          <a:lstStyle/>
+          <a:p>
+            <a:pPr>
+              <a:lnSpc>
+                <a:spcPct val="150000"/>
+              </a:lnSpc>
+              <a:spcAft>
+                <a:spcPts val="800"/>
+              </a:spcAft>
+            </a:pPr>
+            <a:r>
+              <a:rPr sz="2800" b="0" u="none">
+                <a:solidFill>
+                  <a:srgbClr val="000000"/>
+                </a:solidFill>
+                <a:latin typeface="맑은 고딕"/>
+              </a:rPr>
+              <a:t>이 메시지는 AI 금지가 아니라</a:t>
+            </a:r>
+          </a:p>
+          <a:p>
+            <a:pPr>
+              <a:lnSpc>
+                <a:spcPct val="150000"/>
+              </a:lnSpc>
+              <a:spcAft>
+                <a:spcPts val="800"/>
+              </a:spcAft>
+            </a:pPr>
+            <a:r>
+              <a:rPr sz="2800" b="0" u="none">
+                <a:solidFill>
+                  <a:srgbClr val="000000"/>
+                </a:solidFill>
+                <a:latin typeface="맑은 고딕"/>
+              </a:rPr>
+              <a:t>단일 기관 사례이므로 모든 지식기관의 공식 입장처럼 일반화하지…</a:t>
+            </a:r>
+          </a:p>
+        </p:txBody>
+      </p:sp>
+    </p:spTree>
+  </p:cSld>
+  <p:clrMapOvr>
+    <a:masterClrMapping/>
+  </p:clrMapOvr>
+</p:sld>
+</file>
+
+<file path=ppt/slides/slide4.xml><?xml version="1.0" encoding="utf-8"?>
+<p:sld xmlns:a="http://schemas.openxmlformats.org/drawingml/2006/main" xmlns:p="http://schemas.openxmlformats.org/presentationml/2006/main" xmlns:r="http://schemas.openxmlformats.org/officeDocument/2006/relationships">
+  <p:cSld>
+    <p:bg>
+      <p:bgPr>
+        <a:solidFill>
+          <a:srgbClr val="F8F9FA"/>
+        </a:solidFill>
+        <a:effectLst/>
+      </p:bgPr>
+    </p:bg>
+    <p:spTree>
+      <p:nvGrpSpPr>
+        <p:cNvPr id="1" name=""/>
+        <p:cNvGrpSpPr/>
+        <p:nvPr/>
+      </p:nvGrpSpPr>
+      <p:grpSpPr/>
+      <p:sp>
+        <p:nvSpPr>
+          <p:cNvPr id="2" name="TextBox 1"/>
+          <p:cNvSpPr txBox="1"/>
+          <p:nvPr/>
+        </p:nvSpPr>
+        <p:spPr>
+          <a:xfrm>
+            <a:off x="572414" y="356616"/>
+            <a:ext cx="11192256" cy="521207"/>
+          </a:xfrm>
+          <a:prstGeom prst="rect">
+            <a:avLst/>
+          </a:prstGeom>
+          <a:noFill/>
+        </p:spPr>
+        <p:txBody>
+          <a:bodyPr wrap="square">
+            <a:spAutoFit/>
+          </a:bodyPr>
+          <a:lstStyle/>
+          <a:p>
+            <a:r>
+              <a:rPr sz="2800" b="0" u="none">
+                <a:solidFill>
+                  <a:srgbClr val="FF0000"/>
+                </a:solidFill>
+                <a:latin typeface="맑은 고딕"/>
+              </a:rPr>
+              <a:t>천문대가 왜 이런 말을 했을까</a:t>
+            </a:r>
+          </a:p>
+        </p:txBody>
+      </p:sp>
+      <p:sp>
+        <p:nvSpPr>
+          <p:cNvPr id="3" name="TextBox 2"/>
+          <p:cNvSpPr txBox="1"/>
+          <p:nvPr/>
+        </p:nvSpPr>
+        <p:spPr>
+          <a:xfrm>
+            <a:off x="5989320" y="1208836"/>
+            <a:ext cx="5394960" cy="1302105"/>
+          </a:xfrm>
+          <a:prstGeom prst="rect">
+            <a:avLst/>
+          </a:prstGeom>
+          <a:noFill/>
+        </p:spPr>
+        <p:txBody>
+          <a:bodyPr wrap="square" anchor="ctr">
+            <a:spAutoFit/>
+          </a:bodyPr>
+          <a:lstStyle/>
+          <a:p>
+            <a:pPr>
+              <a:lnSpc>
+                <a:spcPct val="150000"/>
+              </a:lnSpc>
+              <a:spcAft>
+                <a:spcPts val="800"/>
+              </a:spcAft>
+            </a:pPr>
+            <a:r>
+              <a:rPr sz="2800" b="0" u="none">
+                <a:solidFill>
+                  <a:srgbClr val="000000"/>
+                </a:solidFill>
+                <a:latin typeface="맑은 고딕"/>
+              </a:rPr>
+              <a:t>천문학은 답 하나보다 관찰·추론·검증의 과정이 중요한 분야다</a:t>
+            </a:r>
+          </a:p>
+          <a:p>
+            <a:pPr>
+              <a:lnSpc>
+                <a:spcPct val="150000"/>
+              </a:lnSpc>
+              <a:spcAft>
+                <a:spcPts val="800"/>
+              </a:spcAft>
+            </a:pPr>
+            <a:r>
+              <a:rPr sz="2800" b="0" u="none">
+                <a:solidFill>
+                  <a:srgbClr val="000000"/>
+                </a:solidFill>
+                <a:latin typeface="맑은 고딕"/>
+              </a:rPr>
+              <a:t>AI 즉답은 그 과정을 도와줄 수도</a:t>
+            </a:r>
+          </a:p>
+        </p:txBody>
+      </p:sp>
+      <p:sp>
+        <p:nvSpPr>
+          <p:cNvPr id="4" name="Rectangle 3"/>
           <p:cNvSpPr/>
           <p:nvPr/>
         </p:nvSpPr>
@@ -15106,74 +17279,45 @@
           <a:p>
             <a:pPr algn="ctr"/>
             <a:r>
-              <a:rPr sz="1800" b="0">
+              <a:rPr sz="1200" b="0">
                 <a:solidFill>
                   <a:srgbClr val="0070C0"/>
                 </a:solidFill>
                 <a:latin typeface="맑은 고딕"/>
               </a:rPr>
-              <a:t>[도식]</a:t>
-            </a:r>
-          </a:p>
-        </p:txBody>
-      </p:sp>
-      <p:sp>
-        <p:nvSpPr>
-          <p:cNvPr id="4" name="TextBox 3"/>
-          <p:cNvSpPr txBox="1"/>
-          <p:nvPr/>
-        </p:nvSpPr>
-        <p:spPr>
-          <a:xfrm>
-            <a:off x="5989320" y="1508760"/>
-            <a:ext cx="5303520" cy="3337560"/>
-          </a:xfrm>
-          <a:prstGeom prst="rect">
-            <a:avLst/>
-          </a:prstGeom>
-          <a:noFill/>
-        </p:spPr>
-        <p:txBody>
-          <a:bodyPr wrap="square" anchor="ctr">
-            <a:spAutoFit/>
-          </a:bodyPr>
-          <a:lstStyle/>
-          <a:p>
-            <a:pPr>
-              <a:lnSpc>
-                <a:spcPct val="150000"/>
-              </a:lnSpc>
-              <a:spcAft>
+              <a:t>[출처]</a:t>
+            </a:r>
+          </a:p>
+          <a:p>
+            <a:pPr algn="ctr">
+              <a:spcBef>
                 <a:spcPts val="800"/>
-              </a:spcAft>
+              </a:spcBef>
             </a:pPr>
             <a:r>
-              <a:rPr sz="2800" b="0" u="none">
+              <a:rPr sz="2100" b="1">
                 <a:solidFill>
                   <a:srgbClr val="000000"/>
                 </a:solidFill>
                 <a:latin typeface="맑은 고딕"/>
               </a:rPr>
-              <a:t>학생도, 직장인도, 관람객도 이미 AI와 함께 정보를 찾는다</a:t>
-            </a:r>
-          </a:p>
-          <a:p>
-            <a:pPr>
-              <a:lnSpc>
-                <a:spcPct val="150000"/>
-              </a:lnSpc>
-              <a:spcAft>
-                <a:spcPts val="800"/>
-              </a:spcAft>
+              <a:t>BBC</a:t>
+            </a:r>
+          </a:p>
+          <a:p>
+            <a:pPr algn="ctr">
+              <a:spcBef>
+                <a:spcPts val="400"/>
+              </a:spcBef>
             </a:pPr>
             <a:r>
-              <a:rPr sz="2800" b="0" u="none">
+              <a:rPr sz="1400" b="0">
                 <a:solidFill>
-                  <a:srgbClr val="000000"/>
+                  <a:srgbClr val="373737"/>
                 </a:solidFill>
                 <a:latin typeface="맑은 고딕"/>
               </a:rPr>
-              <a:t>반대로 AI는 학습 접근성과 개인화 가능성을 높일 수 있다는 주장도 있다</a:t>
+              <a:t>Royal Observatory article. Microsoft Rese…</a:t>
             </a:r>
           </a:p>
         </p:txBody>
@@ -15186,7 +17330,7 @@
 </p:sld>
 </file>
 
-<file path=ppt/slides/slide22.xml><?xml version="1.0" encoding="utf-8"?>
+<file path=ppt/slides/slide5.xml><?xml version="1.0" encoding="utf-8"?>
 <p:sld xmlns:a="http://schemas.openxmlformats.org/drawingml/2006/main" xmlns:p="http://schemas.openxmlformats.org/presentationml/2006/main" xmlns:r="http://schemas.openxmlformats.org/officeDocument/2006/relationships">
   <p:cSld>
     <p:bg>
@@ -15233,7 +17377,653 @@
                 </a:solidFill>
                 <a:latin typeface="맑은 고딕"/>
               </a:rPr>
-              <a:t>그래서 가르쳐야 할 것은 ‘AI 정답’이 아니라 ‘AI 검산’</a:t>
+              <a:t>이 이야기는 천문대만의 이야기가 아니다</a:t>
+            </a:r>
+          </a:p>
+        </p:txBody>
+      </p:sp>
+      <p:sp>
+        <p:nvSpPr>
+          <p:cNvPr id="3" name="Rectangle 2"/>
+          <p:cNvSpPr/>
+          <p:nvPr/>
+        </p:nvSpPr>
+        <p:spPr>
+          <a:xfrm>
+            <a:off x="713232" y="1417320"/>
+            <a:ext cx="4892040" cy="4114800"/>
+          </a:xfrm>
+          <a:prstGeom prst="rect">
+            <a:avLst/>
+          </a:prstGeom>
+          <a:solidFill>
+            <a:srgbClr val="F8F8F8"/>
+          </a:solidFill>
+          <a:ln w="12700">
+            <a:solidFill>
+              <a:srgbClr val="BEBEBE"/>
+            </a:solidFill>
+          </a:ln>
+        </p:spPr>
+        <p:style>
+          <a:lnRef idx="1">
+            <a:schemeClr val="accent1"/>
+          </a:lnRef>
+          <a:fillRef idx="3">
+            <a:schemeClr val="accent1"/>
+          </a:fillRef>
+          <a:effectRef idx="2">
+            <a:schemeClr val="accent1"/>
+          </a:effectRef>
+          <a:fontRef idx="minor">
+            <a:schemeClr val="lt1"/>
+          </a:fontRef>
+        </p:style>
+        <p:txBody>
+          <a:bodyPr rtlCol="0" anchor="ctr"/>
+          <a:lstStyle/>
+          <a:p>
+            <a:pPr algn="ctr"/>
+          </a:p>
+        </p:txBody>
+      </p:sp>
+      <p:sp>
+        <p:nvSpPr>
+          <p:cNvPr id="4" name="TextBox 3"/>
+          <p:cNvSpPr txBox="1"/>
+          <p:nvPr/>
+        </p:nvSpPr>
+        <p:spPr>
+          <a:xfrm>
+            <a:off x="822960" y="1527048"/>
+            <a:ext cx="914400" cy="201168"/>
+          </a:xfrm>
+          <a:prstGeom prst="rect">
+            <a:avLst/>
+          </a:prstGeom>
+          <a:noFill/>
+        </p:spPr>
+        <p:txBody>
+          <a:bodyPr wrap="square">
+            <a:spAutoFit/>
+          </a:bodyPr>
+          <a:lstStyle/>
+          <a:p>
+            <a:r>
+              <a:rPr sz="1200" b="0" u="none">
+                <a:solidFill>
+                  <a:srgbClr val="0070C0"/>
+                </a:solidFill>
+                <a:latin typeface="맑은 고딕"/>
+              </a:rPr>
+              <a:t>[도식]</a:t>
+            </a:r>
+          </a:p>
+        </p:txBody>
+      </p:sp>
+      <p:sp>
+        <p:nvSpPr>
+          <p:cNvPr id="5" name="Rectangle 4"/>
+          <p:cNvSpPr/>
+          <p:nvPr/>
+        </p:nvSpPr>
+        <p:spPr>
+          <a:xfrm>
+            <a:off x="1033271" y="3040380"/>
+            <a:ext cx="1828799" cy="1143000"/>
+          </a:xfrm>
+          <a:prstGeom prst="rect">
+            <a:avLst/>
+          </a:prstGeom>
+          <a:solidFill>
+            <a:srgbClr val="FFFFFF"/>
+          </a:solidFill>
+          <a:ln w="12700">
+            <a:solidFill>
+              <a:srgbClr val="A0A0A0"/>
+            </a:solidFill>
+          </a:ln>
+        </p:spPr>
+        <p:style>
+          <a:lnRef idx="1">
+            <a:schemeClr val="accent1"/>
+          </a:lnRef>
+          <a:fillRef idx="3">
+            <a:schemeClr val="accent1"/>
+          </a:fillRef>
+          <a:effectRef idx="2">
+            <a:schemeClr val="accent1"/>
+          </a:effectRef>
+          <a:fontRef idx="minor">
+            <a:schemeClr val="lt1"/>
+          </a:fontRef>
+        </p:style>
+        <p:txBody>
+          <a:bodyPr rtlCol="0" anchor="ctr"/>
+          <a:lstStyle/>
+          <a:p>
+            <a:pPr algn="ctr"/>
+          </a:p>
+        </p:txBody>
+      </p:sp>
+      <p:sp>
+        <p:nvSpPr>
+          <p:cNvPr id="6" name="Rectangle 5"/>
+          <p:cNvSpPr/>
+          <p:nvPr/>
+        </p:nvSpPr>
+        <p:spPr>
+          <a:xfrm>
+            <a:off x="3456432" y="3040380"/>
+            <a:ext cx="1828799" cy="1143000"/>
+          </a:xfrm>
+          <a:prstGeom prst="rect">
+            <a:avLst/>
+          </a:prstGeom>
+          <a:solidFill>
+            <a:srgbClr val="FFFFFF"/>
+          </a:solidFill>
+          <a:ln w="12700">
+            <a:solidFill>
+              <a:srgbClr val="A0A0A0"/>
+            </a:solidFill>
+          </a:ln>
+        </p:spPr>
+        <p:style>
+          <a:lnRef idx="1">
+            <a:schemeClr val="accent1"/>
+          </a:lnRef>
+          <a:fillRef idx="3">
+            <a:schemeClr val="accent1"/>
+          </a:fillRef>
+          <a:effectRef idx="2">
+            <a:schemeClr val="accent1"/>
+          </a:effectRef>
+          <a:fontRef idx="minor">
+            <a:schemeClr val="lt1"/>
+          </a:fontRef>
+        </p:style>
+        <p:txBody>
+          <a:bodyPr rtlCol="0" anchor="ctr"/>
+          <a:lstStyle/>
+          <a:p>
+            <a:pPr algn="ctr"/>
+          </a:p>
+        </p:txBody>
+      </p:sp>
+      <p:sp>
+        <p:nvSpPr>
+          <p:cNvPr id="7" name="TextBox 6"/>
+          <p:cNvSpPr txBox="1"/>
+          <p:nvPr/>
+        </p:nvSpPr>
+        <p:spPr>
+          <a:xfrm>
+            <a:off x="1124712" y="3204972"/>
+            <a:ext cx="1645919" cy="320040"/>
+          </a:xfrm>
+          <a:prstGeom prst="rect">
+            <a:avLst/>
+          </a:prstGeom>
+          <a:noFill/>
+        </p:spPr>
+        <p:txBody>
+          <a:bodyPr wrap="square">
+            <a:spAutoFit/>
+          </a:bodyPr>
+          <a:lstStyle/>
+          <a:p>
+            <a:pPr algn="ctr"/>
+            <a:r>
+              <a:rPr sz="1800" b="1" u="none">
+                <a:solidFill>
+                  <a:srgbClr val="000000"/>
+                </a:solidFill>
+                <a:latin typeface="맑은 고딕"/>
+              </a:rPr>
+              <a:t>기존 방식</a:t>
+            </a:r>
+          </a:p>
+        </p:txBody>
+      </p:sp>
+      <p:sp>
+        <p:nvSpPr>
+          <p:cNvPr id="8" name="TextBox 7"/>
+          <p:cNvSpPr txBox="1"/>
+          <p:nvPr/>
+        </p:nvSpPr>
+        <p:spPr>
+          <a:xfrm>
+            <a:off x="1124712" y="3607308"/>
+            <a:ext cx="1645919" cy="274320"/>
+          </a:xfrm>
+          <a:prstGeom prst="rect">
+            <a:avLst/>
+          </a:prstGeom>
+          <a:noFill/>
+        </p:spPr>
+        <p:txBody>
+          <a:bodyPr wrap="square">
+            <a:spAutoFit/>
+          </a:bodyPr>
+          <a:lstStyle/>
+          <a:p>
+            <a:pPr algn="ctr"/>
+            <a:r>
+              <a:rPr sz="1500" b="0" u="none">
+                <a:solidFill>
+                  <a:srgbClr val="373737"/>
+                </a:solidFill>
+                <a:latin typeface="맑은 고딕"/>
+              </a:rPr>
+              <a:t>검색 / 비교</a:t>
+            </a:r>
+          </a:p>
+        </p:txBody>
+      </p:sp>
+      <p:sp>
+        <p:nvSpPr>
+          <p:cNvPr id="9" name="TextBox 8"/>
+          <p:cNvSpPr txBox="1"/>
+          <p:nvPr/>
+        </p:nvSpPr>
+        <p:spPr>
+          <a:xfrm>
+            <a:off x="3547872" y="3204972"/>
+            <a:ext cx="1645919" cy="320040"/>
+          </a:xfrm>
+          <a:prstGeom prst="rect">
+            <a:avLst/>
+          </a:prstGeom>
+          <a:noFill/>
+        </p:spPr>
+        <p:txBody>
+          <a:bodyPr wrap="square">
+            <a:spAutoFit/>
+          </a:bodyPr>
+          <a:lstStyle/>
+          <a:p>
+            <a:pPr algn="ctr"/>
+            <a:r>
+              <a:rPr sz="1800" b="1" u="none">
+                <a:solidFill>
+                  <a:srgbClr val="000000"/>
+                </a:solidFill>
+                <a:latin typeface="맑은 고딕"/>
+              </a:rPr>
+              <a:t>AI 즉답</a:t>
+            </a:r>
+          </a:p>
+        </p:txBody>
+      </p:sp>
+      <p:sp>
+        <p:nvSpPr>
+          <p:cNvPr id="10" name="TextBox 9"/>
+          <p:cNvSpPr txBox="1"/>
+          <p:nvPr/>
+        </p:nvSpPr>
+        <p:spPr>
+          <a:xfrm>
+            <a:off x="3547872" y="3607308"/>
+            <a:ext cx="1645919" cy="274320"/>
+          </a:xfrm>
+          <a:prstGeom prst="rect">
+            <a:avLst/>
+          </a:prstGeom>
+          <a:noFill/>
+        </p:spPr>
+        <p:txBody>
+          <a:bodyPr wrap="square">
+            <a:spAutoFit/>
+          </a:bodyPr>
+          <a:lstStyle/>
+          <a:p>
+            <a:pPr algn="ctr"/>
+            <a:r>
+              <a:rPr sz="1500" b="0" u="none">
+                <a:solidFill>
+                  <a:srgbClr val="373737"/>
+                </a:solidFill>
+                <a:latin typeface="맑은 고딕"/>
+              </a:rPr>
+              <a:t>요약 / 검증</a:t>
+            </a:r>
+          </a:p>
+        </p:txBody>
+      </p:sp>
+      <p:sp>
+        <p:nvSpPr>
+          <p:cNvPr id="11" name="TextBox 10"/>
+          <p:cNvSpPr txBox="1"/>
+          <p:nvPr/>
+        </p:nvSpPr>
+        <p:spPr>
+          <a:xfrm>
+            <a:off x="2930652" y="3387852"/>
+            <a:ext cx="457200" cy="347472"/>
+          </a:xfrm>
+          <a:prstGeom prst="rect">
+            <a:avLst/>
+          </a:prstGeom>
+          <a:noFill/>
+        </p:spPr>
+        <p:txBody>
+          <a:bodyPr wrap="square">
+            <a:spAutoFit/>
+          </a:bodyPr>
+          <a:lstStyle/>
+          <a:p>
+            <a:pPr algn="ctr"/>
+            <a:r>
+              <a:rPr sz="2200" b="1" u="none">
+                <a:solidFill>
+                  <a:srgbClr val="373737"/>
+                </a:solidFill>
+                <a:latin typeface="맑은 고딕"/>
+              </a:rPr>
+              <a:t>→</a:t>
+            </a:r>
+          </a:p>
+        </p:txBody>
+      </p:sp>
+      <p:sp>
+        <p:nvSpPr>
+          <p:cNvPr id="12" name="TextBox 11"/>
+          <p:cNvSpPr txBox="1"/>
+          <p:nvPr/>
+        </p:nvSpPr>
+        <p:spPr>
+          <a:xfrm>
+            <a:off x="5989320" y="2103120"/>
+            <a:ext cx="5303520" cy="2926080"/>
+          </a:xfrm>
+          <a:prstGeom prst="rect">
+            <a:avLst/>
+          </a:prstGeom>
+          <a:noFill/>
+        </p:spPr>
+        <p:txBody>
+          <a:bodyPr wrap="square" anchor="ctr">
+            <a:spAutoFit/>
+          </a:bodyPr>
+          <a:lstStyle/>
+          <a:p>
+            <a:pPr>
+              <a:lnSpc>
+                <a:spcPct val="150000"/>
+              </a:lnSpc>
+              <a:spcAft>
+                <a:spcPts val="800"/>
+              </a:spcAft>
+            </a:pPr>
+            <a:r>
+              <a:rPr sz="2800" b="0" u="none">
+                <a:solidFill>
+                  <a:srgbClr val="000000"/>
+                </a:solidFill>
+                <a:latin typeface="맑은 고딕"/>
+              </a:rPr>
+              <a:t>학교</a:t>
+            </a:r>
+          </a:p>
+          <a:p>
+            <a:pPr>
+              <a:lnSpc>
+                <a:spcPct val="150000"/>
+              </a:lnSpc>
+              <a:spcAft>
+                <a:spcPts val="800"/>
+              </a:spcAft>
+            </a:pPr>
+            <a:r>
+              <a:rPr sz="2800" b="0" u="none">
+                <a:solidFill>
+                  <a:srgbClr val="000000"/>
+                </a:solidFill>
+                <a:latin typeface="맑은 고딕"/>
+              </a:rPr>
+              <a:t>따라서 핵심은 답 제공 경쟁이 아니라 질문·검증·맥락을 가르치는…</a:t>
+            </a:r>
+          </a:p>
+        </p:txBody>
+      </p:sp>
+    </p:spTree>
+  </p:cSld>
+  <p:clrMapOvr>
+    <a:masterClrMapping/>
+  </p:clrMapOvr>
+</p:sld>
+</file>
+
+<file path=ppt/slides/slide6.xml><?xml version="1.0" encoding="utf-8"?>
+<p:sld xmlns:a="http://schemas.openxmlformats.org/drawingml/2006/main" xmlns:p="http://schemas.openxmlformats.org/presentationml/2006/main" xmlns:r="http://schemas.openxmlformats.org/officeDocument/2006/relationships">
+  <p:cSld>
+    <p:bg>
+      <p:bgPr>
+        <a:solidFill>
+          <a:srgbClr val="F8F9FA"/>
+        </a:solidFill>
+        <a:effectLst/>
+      </p:bgPr>
+    </p:bg>
+    <p:spTree>
+      <p:nvGrpSpPr>
+        <p:cNvPr id="1" name=""/>
+        <p:cNvGrpSpPr/>
+        <p:nvPr/>
+      </p:nvGrpSpPr>
+      <p:grpSpPr/>
+      <p:sp>
+        <p:nvSpPr>
+          <p:cNvPr id="2" name="TextBox 1"/>
+          <p:cNvSpPr txBox="1"/>
+          <p:nvPr/>
+        </p:nvSpPr>
+        <p:spPr>
+          <a:xfrm>
+            <a:off x="572414" y="356616"/>
+            <a:ext cx="11192256" cy="521207"/>
+          </a:xfrm>
+          <a:prstGeom prst="rect">
+            <a:avLst/>
+          </a:prstGeom>
+          <a:noFill/>
+        </p:spPr>
+        <p:txBody>
+          <a:bodyPr wrap="square">
+            <a:spAutoFit/>
+          </a:bodyPr>
+          <a:lstStyle/>
+          <a:p>
+            <a:r>
+              <a:rPr sz="2800" b="0" u="none">
+                <a:solidFill>
+                  <a:srgbClr val="FF0000"/>
+                </a:solidFill>
+                <a:latin typeface="맑은 고딕"/>
+              </a:rPr>
+              <a:t>그러면 이제 공부는 무엇이 되는가</a:t>
+            </a:r>
+          </a:p>
+        </p:txBody>
+      </p:sp>
+      <p:sp>
+        <p:nvSpPr>
+          <p:cNvPr id="3" name="TextBox 2"/>
+          <p:cNvSpPr txBox="1"/>
+          <p:nvPr/>
+        </p:nvSpPr>
+        <p:spPr>
+          <a:xfrm>
+            <a:off x="713232" y="2103120"/>
+            <a:ext cx="10652760" cy="2926080"/>
+          </a:xfrm>
+          <a:prstGeom prst="rect">
+            <a:avLst/>
+          </a:prstGeom>
+          <a:noFill/>
+        </p:spPr>
+        <p:txBody>
+          <a:bodyPr wrap="square" anchor="ctr">
+            <a:spAutoFit/>
+          </a:bodyPr>
+          <a:lstStyle/>
+          <a:p>
+            <a:pPr>
+              <a:lnSpc>
+                <a:spcPct val="150000"/>
+              </a:lnSpc>
+              <a:spcAft>
+                <a:spcPts val="800"/>
+              </a:spcAft>
+            </a:pPr>
+            <a:r>
+              <a:rPr sz="2800" b="0" u="none">
+                <a:solidFill>
+                  <a:srgbClr val="000000"/>
+                </a:solidFill>
+                <a:latin typeface="맑은 고딕"/>
+              </a:rPr>
+              <a:t>답을 아는 능력인가</a:t>
+            </a:r>
+          </a:p>
+          <a:p>
+            <a:pPr>
+              <a:lnSpc>
+                <a:spcPct val="150000"/>
+              </a:lnSpc>
+              <a:spcAft>
+                <a:spcPts val="800"/>
+              </a:spcAft>
+            </a:pPr>
+            <a:r>
+              <a:rPr sz="2800" b="0" u="none">
+                <a:solidFill>
+                  <a:srgbClr val="000000"/>
+                </a:solidFill>
+                <a:latin typeface="맑은 고딕"/>
+              </a:rPr>
+              <a:t>혹은 더 좋은 질문을 만드는 능력인가</a:t>
+            </a:r>
+          </a:p>
+        </p:txBody>
+      </p:sp>
+    </p:spTree>
+  </p:cSld>
+  <p:clrMapOvr>
+    <a:masterClrMapping/>
+  </p:clrMapOvr>
+</p:sld>
+</file>
+
+<file path=ppt/slides/slide7.xml><?xml version="1.0" encoding="utf-8"?>
+<p:sld xmlns:a="http://schemas.openxmlformats.org/drawingml/2006/main" xmlns:p="http://schemas.openxmlformats.org/presentationml/2006/main" xmlns:r="http://schemas.openxmlformats.org/officeDocument/2006/relationships">
+  <p:cSld>
+    <p:bg>
+      <p:bgPr>
+        <a:solidFill>
+          <a:srgbClr val="F8F9FA"/>
+        </a:solidFill>
+        <a:effectLst/>
+      </p:bgPr>
+    </p:bg>
+    <p:spTree>
+      <p:nvGrpSpPr>
+        <p:cNvPr id="1" name=""/>
+        <p:cNvGrpSpPr/>
+        <p:nvPr/>
+      </p:nvGrpSpPr>
+      <p:grpSpPr/>
+      <p:sp>
+        <p:nvSpPr>
+          <p:cNvPr id="2" name="TextBox 1"/>
+          <p:cNvSpPr txBox="1"/>
+          <p:nvPr/>
+        </p:nvSpPr>
+        <p:spPr>
+          <a:xfrm>
+            <a:off x="843991" y="1273759"/>
+            <a:ext cx="10752429" cy="2424988"/>
+          </a:xfrm>
+          <a:prstGeom prst="rect">
+            <a:avLst/>
+          </a:prstGeom>
+          <a:noFill/>
+        </p:spPr>
+        <p:txBody>
+          <a:bodyPr wrap="square">
+            <a:spAutoFit/>
+          </a:bodyPr>
+          <a:lstStyle/>
+          <a:p>
+            <a:r>
+              <a:rPr sz="5400" b="1" u="none">
+                <a:solidFill>
+                  <a:srgbClr val="181C23"/>
+                </a:solidFill>
+                <a:latin typeface="맑은 고딕"/>
+              </a:rPr>
+              <a:t>생략되는 건 답이 아니라 과정</a:t>
+            </a:r>
+          </a:p>
+        </p:txBody>
+      </p:sp>
+    </p:spTree>
+  </p:cSld>
+  <p:clrMapOvr>
+    <a:masterClrMapping/>
+  </p:clrMapOvr>
+</p:sld>
+</file>
+
+<file path=ppt/slides/slide8.xml><?xml version="1.0" encoding="utf-8"?>
+<p:sld xmlns:a="http://schemas.openxmlformats.org/drawingml/2006/main" xmlns:p="http://schemas.openxmlformats.org/presentationml/2006/main" xmlns:r="http://schemas.openxmlformats.org/officeDocument/2006/relationships">
+  <p:cSld>
+    <p:bg>
+      <p:bgPr>
+        <a:solidFill>
+          <a:srgbClr val="F8F9FA"/>
+        </a:solidFill>
+        <a:effectLst/>
+      </p:bgPr>
+    </p:bg>
+    <p:spTree>
+      <p:nvGrpSpPr>
+        <p:cNvPr id="1" name=""/>
+        <p:cNvGrpSpPr/>
+        <p:nvPr/>
+      </p:nvGrpSpPr>
+      <p:grpSpPr/>
+      <p:sp>
+        <p:nvSpPr>
+          <p:cNvPr id="2" name="TextBox 1"/>
+          <p:cNvSpPr txBox="1"/>
+          <p:nvPr/>
+        </p:nvSpPr>
+        <p:spPr>
+          <a:xfrm>
+            <a:off x="572414" y="356616"/>
+            <a:ext cx="11192256" cy="521207"/>
+          </a:xfrm>
+          <a:prstGeom prst="rect">
+            <a:avLst/>
+          </a:prstGeom>
+          <a:noFill/>
+        </p:spPr>
+        <p:txBody>
+          <a:bodyPr wrap="square">
+            <a:spAutoFit/>
+          </a:bodyPr>
+          <a:lstStyle/>
+          <a:p>
+            <a:r>
+              <a:rPr sz="2800" b="0" u="none">
+                <a:solidFill>
+                  <a:srgbClr val="FF0000"/>
+                </a:solidFill>
+                <a:latin typeface="맑은 고딕"/>
+              </a:rPr>
+              <a:t>예전 검색은 귀찮았지만 흔적이 남았다</a:t>
             </a:r>
           </a:p>
         </p:txBody>
@@ -15275,26 +18065,7 @@
                 </a:solidFill>
                 <a:latin typeface="맑은 고딕"/>
               </a:rPr>
-              <a:t>출처를 확인하는 법</a:t>
-            </a:r>
-          </a:p>
-          <a:p>
-            <a:pPr>
-              <a:lnSpc>
-                <a:spcPct val="150000"/>
-              </a:lnSpc>
-              <a:spcAft>
-                <a:spcPts val="800"/>
-              </a:spcAft>
-            </a:pPr>
-            <a:r>
-              <a:rPr sz="2800" b="0" u="none">
-                <a:solidFill>
-                  <a:srgbClr val="000000"/>
-                </a:solidFill>
-                <a:latin typeface="맑은 고딕"/>
-              </a:rPr>
-              <a:t>AI 답변의 빈틈을 찾는 법</a:t>
+              <a:t>이 과정은 느리지만 정보 탐색의 다양성과 판단 훈련을 남긴다</a:t>
             </a:r>
           </a:p>
         </p:txBody>
@@ -15342,13 +18113,13 @@
           <a:p>
             <a:pPr algn="ctr"/>
             <a:r>
-              <a:rPr sz="1800" b="0">
+              <a:rPr sz="1200" b="0">
                 <a:solidFill>
                   <a:srgbClr val="0070C0"/>
                 </a:solidFill>
                 <a:latin typeface="맑은 고딕"/>
               </a:rPr>
-              <a:t>[기사 인용]</a:t>
+              <a:t>[출처]</a:t>
             </a:r>
           </a:p>
           <a:p>
@@ -15358,1678 +18129,7 @@
               </a:spcBef>
             </a:pPr>
             <a:r>
-              <a:rPr sz="1800" b="1">
-                <a:solidFill>
-                  <a:srgbClr val="000000"/>
-                </a:solidFill>
-                <a:latin typeface="맑은 고딕"/>
-              </a:rPr>
-              <a:t>UNESCO</a:t>
-            </a:r>
-          </a:p>
-          <a:p>
-            <a:pPr algn="ctr">
-              <a:spcBef>
-                <a:spcPts val="400"/>
-              </a:spcBef>
-            </a:pPr>
-            <a:r>
-              <a:rPr sz="1400" b="0">
-                <a:solidFill>
-                  <a:srgbClr val="566070"/>
-                </a:solidFill>
-                <a:latin typeface="맑은 고딕"/>
-              </a:rPr>
-              <a:t>그래서 가르쳐야 할 것은 ‘AI 정답’이 아니라 ‘AI 검산’</a:t>
-            </a:r>
-          </a:p>
-        </p:txBody>
-      </p:sp>
-    </p:spTree>
-  </p:cSld>
-  <p:clrMapOvr>
-    <a:masterClrMapping/>
-  </p:clrMapOvr>
-</p:sld>
-</file>
-
-<file path=ppt/slides/slide23.xml><?xml version="1.0" encoding="utf-8"?>
-<p:sld xmlns:a="http://schemas.openxmlformats.org/drawingml/2006/main" xmlns:p="http://schemas.openxmlformats.org/presentationml/2006/main" xmlns:r="http://schemas.openxmlformats.org/officeDocument/2006/relationships">
-  <p:cSld>
-    <p:bg>
-      <p:bgPr>
-        <a:solidFill>
-          <a:srgbClr val="F8F9FA"/>
-        </a:solidFill>
-        <a:effectLst/>
-      </p:bgPr>
-    </p:bg>
-    <p:spTree>
-      <p:nvGrpSpPr>
-        <p:cNvPr id="1" name=""/>
-        <p:cNvGrpSpPr/>
-        <p:nvPr/>
-      </p:nvGrpSpPr>
-      <p:grpSpPr/>
-      <p:sp>
-        <p:nvSpPr>
-          <p:cNvPr id="2" name="TextBox 1"/>
-          <p:cNvSpPr txBox="1"/>
-          <p:nvPr/>
-        </p:nvSpPr>
-        <p:spPr>
-          <a:xfrm>
-            <a:off x="572414" y="356616"/>
-            <a:ext cx="11192256" cy="521207"/>
-          </a:xfrm>
-          <a:prstGeom prst="rect">
-            <a:avLst/>
-          </a:prstGeom>
-          <a:noFill/>
-        </p:spPr>
-        <p:txBody>
-          <a:bodyPr wrap="square">
-            <a:spAutoFit/>
-          </a:bodyPr>
-          <a:lstStyle/>
-          <a:p>
-            <a:r>
-              <a:rPr sz="2800" b="0" u="none">
-                <a:solidFill>
-                  <a:srgbClr val="FF0000"/>
-                </a:solidFill>
-                <a:latin typeface="맑은 고딕"/>
-              </a:rPr>
-              <a:t>천문학이 좋은 비유인 이유</a:t>
-            </a:r>
-          </a:p>
-        </p:txBody>
-      </p:sp>
-      <p:sp>
-        <p:nvSpPr>
-          <p:cNvPr id="3" name="Rectangle 2"/>
-          <p:cNvSpPr/>
-          <p:nvPr/>
-        </p:nvSpPr>
-        <p:spPr>
-          <a:xfrm>
-            <a:off x="713232" y="1417320"/>
-            <a:ext cx="4892040" cy="4114800"/>
-          </a:xfrm>
-          <a:prstGeom prst="rect">
-            <a:avLst/>
-          </a:prstGeom>
-          <a:solidFill>
-            <a:srgbClr val="F5F5F5"/>
-          </a:solidFill>
-          <a:ln w="12700">
-            <a:solidFill>
-              <a:srgbClr val="BEBEBE"/>
-            </a:solidFill>
-          </a:ln>
-        </p:spPr>
-        <p:style>
-          <a:lnRef idx="1">
-            <a:schemeClr val="accent1"/>
-          </a:lnRef>
-          <a:fillRef idx="3">
-            <a:schemeClr val="accent1"/>
-          </a:fillRef>
-          <a:effectRef idx="2">
-            <a:schemeClr val="accent1"/>
-          </a:effectRef>
-          <a:fontRef idx="minor">
-            <a:schemeClr val="lt1"/>
-          </a:fontRef>
-        </p:style>
-        <p:txBody>
-          <a:bodyPr rtlCol="0" anchor="ctr" wrap="square"/>
-          <a:lstStyle/>
-          <a:p>
-            <a:pPr algn="ctr"/>
-            <a:r>
-              <a:rPr sz="1800" b="0">
-                <a:solidFill>
-                  <a:srgbClr val="0070C0"/>
-                </a:solidFill>
-                <a:latin typeface="맑은 고딕"/>
-              </a:rPr>
-              <a:t>[도식]</a:t>
-            </a:r>
-          </a:p>
-        </p:txBody>
-      </p:sp>
-      <p:sp>
-        <p:nvSpPr>
-          <p:cNvPr id="4" name="TextBox 3"/>
-          <p:cNvSpPr txBox="1"/>
-          <p:nvPr/>
-        </p:nvSpPr>
-        <p:spPr>
-          <a:xfrm>
-            <a:off x="5989320" y="2103120"/>
-            <a:ext cx="5303520" cy="2926080"/>
-          </a:xfrm>
-          <a:prstGeom prst="rect">
-            <a:avLst/>
-          </a:prstGeom>
-          <a:noFill/>
-        </p:spPr>
-        <p:txBody>
-          <a:bodyPr wrap="square" anchor="ctr">
-            <a:spAutoFit/>
-          </a:bodyPr>
-          <a:lstStyle/>
-          <a:p>
-            <a:pPr>
-              <a:lnSpc>
-                <a:spcPct val="150000"/>
-              </a:lnSpc>
-              <a:spcAft>
-                <a:spcPts val="800"/>
-              </a:spcAft>
-            </a:pPr>
-            <a:r>
-              <a:rPr sz="2800" b="0" u="none">
-                <a:solidFill>
-                  <a:srgbClr val="000000"/>
-                </a:solidFill>
-                <a:latin typeface="맑은 고딕"/>
-              </a:rPr>
-              <a:t>망원경은 하늘을 대신 봐주지 않는다</a:t>
-            </a:r>
-          </a:p>
-          <a:p>
-            <a:pPr>
-              <a:lnSpc>
-                <a:spcPct val="150000"/>
-              </a:lnSpc>
-              <a:spcAft>
-                <a:spcPts val="800"/>
-              </a:spcAft>
-            </a:pPr>
-            <a:r>
-              <a:rPr sz="2800" b="0" u="none">
-                <a:solidFill>
-                  <a:srgbClr val="000000"/>
-                </a:solidFill>
-                <a:latin typeface="맑은 고딕"/>
-              </a:rPr>
-              <a:t>더 멀리 보게 해줄 뿐, 어디를 볼지는 사람이 정한다</a:t>
-            </a:r>
-          </a:p>
-        </p:txBody>
-      </p:sp>
-    </p:spTree>
-  </p:cSld>
-  <p:clrMapOvr>
-    <a:masterClrMapping/>
-  </p:clrMapOvr>
-</p:sld>
-</file>
-
-<file path=ppt/slides/slide24.xml><?xml version="1.0" encoding="utf-8"?>
-<p:sld xmlns:a="http://schemas.openxmlformats.org/drawingml/2006/main" xmlns:p="http://schemas.openxmlformats.org/presentationml/2006/main" xmlns:r="http://schemas.openxmlformats.org/officeDocument/2006/relationships">
-  <p:cSld>
-    <p:bg>
-      <p:bgPr>
-        <a:solidFill>
-          <a:srgbClr val="F8F9FA"/>
-        </a:solidFill>
-        <a:effectLst/>
-      </p:bgPr>
-    </p:bg>
-    <p:spTree>
-      <p:nvGrpSpPr>
-        <p:cNvPr id="1" name=""/>
-        <p:cNvGrpSpPr/>
-        <p:nvPr/>
-      </p:nvGrpSpPr>
-      <p:grpSpPr/>
-      <p:sp>
-        <p:nvSpPr>
-          <p:cNvPr id="2" name="TextBox 1"/>
-          <p:cNvSpPr txBox="1"/>
-          <p:nvPr/>
-        </p:nvSpPr>
-        <p:spPr>
-          <a:xfrm>
-            <a:off x="572414" y="356616"/>
-            <a:ext cx="11192256" cy="521207"/>
-          </a:xfrm>
-          <a:prstGeom prst="rect">
-            <a:avLst/>
-          </a:prstGeom>
-          <a:noFill/>
-        </p:spPr>
-        <p:txBody>
-          <a:bodyPr wrap="square">
-            <a:spAutoFit/>
-          </a:bodyPr>
-          <a:lstStyle/>
-          <a:p>
-            <a:r>
-              <a:rPr sz="2800" b="0" u="none">
-                <a:solidFill>
-                  <a:srgbClr val="FF0000"/>
-                </a:solidFill>
-                <a:latin typeface="맑은 고딕"/>
-              </a:rPr>
-              <a:t>방송 전 꼭 채워야 할 자료</a:t>
-            </a:r>
-          </a:p>
-        </p:txBody>
-      </p:sp>
-      <p:sp>
-        <p:nvSpPr>
-          <p:cNvPr id="3" name="TextBox 2"/>
-          <p:cNvSpPr txBox="1"/>
-          <p:nvPr/>
-        </p:nvSpPr>
-        <p:spPr>
-          <a:xfrm>
-            <a:off x="822960" y="1508760"/>
-            <a:ext cx="10424160" cy="4480560"/>
-          </a:xfrm>
-          <a:prstGeom prst="rect">
-            <a:avLst/>
-          </a:prstGeom>
-          <a:noFill/>
-        </p:spPr>
-        <p:txBody>
-          <a:bodyPr wrap="square" anchor="ctr">
-            <a:spAutoFit/>
-          </a:bodyPr>
-          <a:lstStyle/>
-          <a:p>
-            <a:pPr>
-              <a:lnSpc>
-                <a:spcPct val="150000"/>
-              </a:lnSpc>
-              <a:spcAft>
-                <a:spcPts val="800"/>
-              </a:spcAft>
-            </a:pPr>
-            <a:r>
-              <a:rPr sz="2800" b="0" u="none">
-                <a:solidFill>
-                  <a:srgbClr val="000000"/>
-                </a:solidFill>
-                <a:latin typeface="맑은 고딕"/>
-              </a:rPr>
-              <a:t>BBC/Royal Observatory 원문 맥락</a:t>
-            </a:r>
-          </a:p>
-          <a:p>
-            <a:pPr>
-              <a:lnSpc>
-                <a:spcPct val="150000"/>
-              </a:lnSpc>
-              <a:spcAft>
-                <a:spcPts val="800"/>
-              </a:spcAft>
-            </a:pPr>
-            <a:r>
-              <a:rPr sz="2800" b="0" u="none">
-                <a:solidFill>
-                  <a:srgbClr val="000000"/>
-                </a:solidFill>
-                <a:latin typeface="맑은 고딕"/>
-              </a:rPr>
-              <a:t>AI 정보탐색·교육 관련 보조 연구</a:t>
-            </a:r>
-          </a:p>
-          <a:p>
-            <a:pPr>
-              <a:lnSpc>
-                <a:spcPct val="150000"/>
-              </a:lnSpc>
-              <a:spcAft>
-                <a:spcPts val="800"/>
-              </a:spcAft>
-            </a:pPr>
-            <a:r>
-              <a:rPr sz="2800" b="0" u="none">
-                <a:solidFill>
-                  <a:srgbClr val="000000"/>
-                </a:solidFill>
-                <a:latin typeface="맑은 고딕"/>
-              </a:rPr>
-              <a:t>AI 접근성/개인화라는 counterpoint</a:t>
-            </a:r>
-          </a:p>
-        </p:txBody>
-      </p:sp>
-    </p:spTree>
-  </p:cSld>
-  <p:clrMapOvr>
-    <a:masterClrMapping/>
-  </p:clrMapOvr>
-</p:sld>
-</file>
-
-<file path=ppt/slides/slide25.xml><?xml version="1.0" encoding="utf-8"?>
-<p:sld xmlns:a="http://schemas.openxmlformats.org/drawingml/2006/main" xmlns:p="http://schemas.openxmlformats.org/presentationml/2006/main" xmlns:r="http://schemas.openxmlformats.org/officeDocument/2006/relationships">
-  <p:cSld>
-    <p:bg>
-      <p:bgPr>
-        <a:solidFill>
-          <a:srgbClr val="F8F9FA"/>
-        </a:solidFill>
-        <a:effectLst/>
-      </p:bgPr>
-    </p:bg>
-    <p:spTree>
-      <p:nvGrpSpPr>
-        <p:cNvPr id="1" name=""/>
-        <p:cNvGrpSpPr/>
-        <p:nvPr/>
-      </p:nvGrpSpPr>
-      <p:grpSpPr/>
-      <p:sp>
-        <p:nvSpPr>
-          <p:cNvPr id="2" name="TextBox 1"/>
-          <p:cNvSpPr txBox="1"/>
-          <p:nvPr/>
-        </p:nvSpPr>
-        <p:spPr>
-          <a:xfrm>
-            <a:off x="572414" y="356616"/>
-            <a:ext cx="11192256" cy="521207"/>
-          </a:xfrm>
-          <a:prstGeom prst="rect">
-            <a:avLst/>
-          </a:prstGeom>
-          <a:noFill/>
-        </p:spPr>
-        <p:txBody>
-          <a:bodyPr wrap="square">
-            <a:spAutoFit/>
-          </a:bodyPr>
-          <a:lstStyle/>
-          <a:p>
-            <a:r>
-              <a:rPr sz="2800" b="0" u="none">
-                <a:solidFill>
-                  <a:srgbClr val="FF0000"/>
-                </a:solidFill>
-                <a:latin typeface="맑은 고딕"/>
-              </a:rPr>
-              <a:t>AI 시대의 공부는 정답을 맞히는 일이 아니라</a:t>
-            </a:r>
-          </a:p>
-        </p:txBody>
-      </p:sp>
-      <p:sp>
-        <p:nvSpPr>
-          <p:cNvPr id="3" name="TextBox 2"/>
-          <p:cNvSpPr txBox="1"/>
-          <p:nvPr/>
-        </p:nvSpPr>
-        <p:spPr>
-          <a:xfrm>
-            <a:off x="713232" y="2103120"/>
-            <a:ext cx="10652760" cy="2926080"/>
-          </a:xfrm>
-          <a:prstGeom prst="rect">
-            <a:avLst/>
-          </a:prstGeom>
-          <a:noFill/>
-        </p:spPr>
-        <p:txBody>
-          <a:bodyPr wrap="square" anchor="ctr">
-            <a:spAutoFit/>
-          </a:bodyPr>
-          <a:lstStyle/>
-          <a:p>
-            <a:pPr>
-              <a:lnSpc>
-                <a:spcPct val="150000"/>
-              </a:lnSpc>
-              <a:spcAft>
-                <a:spcPts val="800"/>
-              </a:spcAft>
-            </a:pPr>
-            <a:r>
-              <a:rPr sz="2800" b="0" u="none">
-                <a:solidFill>
-                  <a:srgbClr val="000000"/>
-                </a:solidFill>
-                <a:latin typeface="맑은 고딕"/>
-              </a:rPr>
-              <a:t>좋은 질문을 만들고</a:t>
-            </a:r>
-          </a:p>
-          <a:p>
-            <a:pPr>
-              <a:lnSpc>
-                <a:spcPct val="150000"/>
-              </a:lnSpc>
-              <a:spcAft>
-                <a:spcPts val="800"/>
-              </a:spcAft>
-            </a:pPr>
-            <a:r>
-              <a:rPr sz="2800" b="0" u="none">
-                <a:solidFill>
-                  <a:srgbClr val="000000"/>
-                </a:solidFill>
-                <a:latin typeface="맑은 고딕"/>
-              </a:rPr>
-              <a:t>답의 출처를 확인하고</a:t>
-            </a:r>
-          </a:p>
-          <a:p>
-            <a:pPr>
-              <a:lnSpc>
-                <a:spcPct val="150000"/>
-              </a:lnSpc>
-              <a:spcAft>
-                <a:spcPts val="800"/>
-              </a:spcAft>
-            </a:pPr>
-            <a:r>
-              <a:rPr sz="2800" b="0" u="none">
-                <a:solidFill>
-                  <a:srgbClr val="000000"/>
-                </a:solidFill>
-                <a:latin typeface="맑은 고딕"/>
-              </a:rPr>
-              <a:t>모르는 것을 남겨두는 법을 배우는 일일지도 모른다</a:t>
-            </a:r>
-          </a:p>
-        </p:txBody>
-      </p:sp>
-    </p:spTree>
-  </p:cSld>
-  <p:clrMapOvr>
-    <a:masterClrMapping/>
-  </p:clrMapOvr>
-</p:sld>
-</file>
-
-<file path=ppt/slides/slide26.xml><?xml version="1.0" encoding="utf-8"?>
-<p:sld xmlns:a="http://schemas.openxmlformats.org/drawingml/2006/main" xmlns:p="http://schemas.openxmlformats.org/presentationml/2006/main" xmlns:r="http://schemas.openxmlformats.org/officeDocument/2006/relationships">
-  <p:cSld>
-    <p:bg>
-      <p:bgPr>
-        <a:solidFill>
-          <a:srgbClr val="F8F9FA"/>
-        </a:solidFill>
-        <a:effectLst/>
-      </p:bgPr>
-    </p:bg>
-    <p:spTree>
-      <p:nvGrpSpPr>
-        <p:cNvPr id="1" name=""/>
-        <p:cNvGrpSpPr/>
-        <p:nvPr/>
-      </p:nvGrpSpPr>
-      <p:grpSpPr/>
-      <p:sp>
-        <p:nvSpPr>
-          <p:cNvPr id="2" name="TextBox 1"/>
-          <p:cNvSpPr txBox="1"/>
-          <p:nvPr/>
-        </p:nvSpPr>
-        <p:spPr>
-          <a:xfrm>
-            <a:off x="572414" y="356616"/>
-            <a:ext cx="11192256" cy="521207"/>
-          </a:xfrm>
-          <a:prstGeom prst="rect">
-            <a:avLst/>
-          </a:prstGeom>
-          <a:noFill/>
-        </p:spPr>
-        <p:txBody>
-          <a:bodyPr wrap="square">
-            <a:spAutoFit/>
-          </a:bodyPr>
-          <a:lstStyle/>
-          <a:p>
-            <a:r>
-              <a:rPr sz="2800" b="0" u="none">
-                <a:solidFill>
-                  <a:srgbClr val="FF0000"/>
-                </a:solidFill>
-                <a:latin typeface="맑은 고딕"/>
-              </a:rPr>
-              <a:t>AI가 답을 해주면, 사람은 질문을 해야 한다</a:t>
-            </a:r>
-          </a:p>
-        </p:txBody>
-      </p:sp>
-      <p:sp>
-        <p:nvSpPr>
-          <p:cNvPr id="3" name="TextBox 2"/>
-          <p:cNvSpPr txBox="1"/>
-          <p:nvPr/>
-        </p:nvSpPr>
-        <p:spPr>
-          <a:xfrm>
-            <a:off x="713232" y="1874519"/>
-            <a:ext cx="9875520" cy="2651760"/>
-          </a:xfrm>
-          <a:prstGeom prst="rect">
-            <a:avLst/>
-          </a:prstGeom>
-          <a:noFill/>
-        </p:spPr>
-        <p:txBody>
-          <a:bodyPr wrap="square" anchor="ctr">
-            <a:spAutoFit/>
-          </a:bodyPr>
-          <a:lstStyle/>
-          <a:p>
-            <a:pPr>
-              <a:lnSpc>
-                <a:spcPct val="150000"/>
-              </a:lnSpc>
-              <a:spcAft>
-                <a:spcPts val="800"/>
-              </a:spcAft>
-            </a:pPr>
-            <a:r>
-              <a:rPr sz="2800" b="0" u="none">
-                <a:solidFill>
-                  <a:srgbClr val="000000"/>
-                </a:solidFill>
-                <a:latin typeface="맑은 고딕"/>
-              </a:rPr>
-              <a:t>이제 진짜 시험 문제는 이걸지도 모른다</a:t>
-            </a:r>
-          </a:p>
-          <a:p>
-            <a:pPr>
-              <a:lnSpc>
-                <a:spcPct val="150000"/>
-              </a:lnSpc>
-              <a:spcAft>
-                <a:spcPts val="800"/>
-              </a:spcAft>
-            </a:pPr>
-            <a:r>
-              <a:rPr sz="2800" b="0" u="none">
-                <a:solidFill>
-                  <a:srgbClr val="000000"/>
-                </a:solidFill>
-                <a:latin typeface="맑은 고딕"/>
-              </a:rPr>
-              <a:t>답은 AI가 했는데, 질문은 누가 했습니까?</a:t>
-            </a:r>
-          </a:p>
-        </p:txBody>
-      </p:sp>
-    </p:spTree>
-  </p:cSld>
-  <p:clrMapOvr>
-    <a:masterClrMapping/>
-  </p:clrMapOvr>
-</p:sld>
-</file>
-
-<file path=ppt/slides/slide3.xml><?xml version="1.0" encoding="utf-8"?>
-<p:sld xmlns:a="http://schemas.openxmlformats.org/drawingml/2006/main" xmlns:p="http://schemas.openxmlformats.org/presentationml/2006/main" xmlns:r="http://schemas.openxmlformats.org/officeDocument/2006/relationships">
-  <p:cSld>
-    <p:bg>
-      <p:bgPr>
-        <a:solidFill>
-          <a:srgbClr val="F8F9FA"/>
-        </a:solidFill>
-        <a:effectLst/>
-      </p:bgPr>
-    </p:bg>
-    <p:spTree>
-      <p:nvGrpSpPr>
-        <p:cNvPr id="1" name=""/>
-        <p:cNvGrpSpPr/>
-        <p:nvPr/>
-      </p:nvGrpSpPr>
-      <p:grpSpPr/>
-      <p:sp>
-        <p:nvSpPr>
-          <p:cNvPr id="2" name="Rectangle 1"/>
-          <p:cNvSpPr/>
-          <p:nvPr/>
-        </p:nvSpPr>
-        <p:spPr>
-          <a:xfrm>
-            <a:off x="685800" y="1508760"/>
-            <a:ext cx="4800600" cy="3794760"/>
-          </a:xfrm>
-          <a:prstGeom prst="rect">
-            <a:avLst/>
-          </a:prstGeom>
-          <a:solidFill>
-            <a:srgbClr val="F5F5F5"/>
-          </a:solidFill>
-          <a:ln w="12700">
-            <a:solidFill>
-              <a:srgbClr val="BEBEBE"/>
-            </a:solidFill>
-          </a:ln>
-        </p:spPr>
-        <p:style>
-          <a:lnRef idx="1">
-            <a:schemeClr val="accent1"/>
-          </a:lnRef>
-          <a:fillRef idx="3">
-            <a:schemeClr val="accent1"/>
-          </a:fillRef>
-          <a:effectRef idx="2">
-            <a:schemeClr val="accent1"/>
-          </a:effectRef>
-          <a:fontRef idx="minor">
-            <a:schemeClr val="lt1"/>
-          </a:fontRef>
-        </p:style>
-        <p:txBody>
-          <a:bodyPr rtlCol="0" anchor="ctr" wrap="square"/>
-          <a:lstStyle/>
-          <a:p>
-            <a:pPr algn="ctr"/>
-            <a:r>
-              <a:rPr sz="1800" b="0">
-                <a:solidFill>
-                  <a:srgbClr val="0070C0"/>
-                </a:solidFill>
-                <a:latin typeface="맑은 고딕"/>
-              </a:rPr>
-              <a:t>[기사 인용]</a:t>
-            </a:r>
-          </a:p>
-          <a:p>
-            <a:pPr algn="ctr">
-              <a:spcBef>
-                <a:spcPts val="800"/>
-              </a:spcBef>
-            </a:pPr>
-            <a:r>
-              <a:rPr sz="1800" b="1">
-                <a:solidFill>
-                  <a:srgbClr val="000000"/>
-                </a:solidFill>
-                <a:latin typeface="맑은 고딕"/>
-              </a:rPr>
-              <a:t>BBC</a:t>
-            </a:r>
-          </a:p>
-          <a:p>
-            <a:pPr algn="ctr">
-              <a:spcBef>
-                <a:spcPts val="400"/>
-              </a:spcBef>
-            </a:pPr>
-            <a:r>
-              <a:rPr sz="1400" b="0">
-                <a:solidFill>
-                  <a:srgbClr val="566070"/>
-                </a:solidFill>
-                <a:latin typeface="맑은 고딕"/>
-              </a:rPr>
-              <a:t>영국 왕립천문대 쪽에서 나온 경고</a:t>
-            </a:r>
-          </a:p>
-        </p:txBody>
-      </p:sp>
-      <p:sp>
-        <p:nvSpPr>
-          <p:cNvPr id="3" name="Rectangle 2"/>
-          <p:cNvSpPr/>
-          <p:nvPr/>
-        </p:nvSpPr>
-        <p:spPr>
-          <a:xfrm>
-            <a:off x="5806440" y="731520"/>
-            <a:ext cx="6126479" cy="6446520"/>
-          </a:xfrm>
-          <a:prstGeom prst="rect">
-            <a:avLst/>
-          </a:prstGeom>
-          <a:solidFill>
-            <a:srgbClr val="FFFFFF"/>
-          </a:solidFill>
-          <a:ln w="15240">
-            <a:solidFill>
-              <a:srgbClr val="D2D8E0"/>
-            </a:solidFill>
-          </a:ln>
-        </p:spPr>
-        <p:style>
-          <a:lnRef idx="1">
-            <a:schemeClr val="accent1"/>
-          </a:lnRef>
-          <a:fillRef idx="3">
-            <a:schemeClr val="accent1"/>
-          </a:fillRef>
-          <a:effectRef idx="2">
-            <a:schemeClr val="accent1"/>
-          </a:effectRef>
-          <a:fontRef idx="minor">
-            <a:schemeClr val="lt1"/>
-          </a:fontRef>
-        </p:style>
-        <p:txBody>
-          <a:bodyPr rtlCol="0" anchor="ctr"/>
-          <a:lstStyle/>
-          <a:p>
-            <a:pPr algn="ctr"/>
-          </a:p>
-        </p:txBody>
-      </p:sp>
-      <p:sp>
-        <p:nvSpPr>
-          <p:cNvPr id="4" name="TextBox 3"/>
-          <p:cNvSpPr txBox="1"/>
-          <p:nvPr/>
-        </p:nvSpPr>
-        <p:spPr>
-          <a:xfrm>
-            <a:off x="572414" y="356616"/>
-            <a:ext cx="11192256" cy="521207"/>
-          </a:xfrm>
-          <a:prstGeom prst="rect">
-            <a:avLst/>
-          </a:prstGeom>
-          <a:noFill/>
-        </p:spPr>
-        <p:txBody>
-          <a:bodyPr wrap="square">
-            <a:spAutoFit/>
-          </a:bodyPr>
-          <a:lstStyle/>
-          <a:p>
-            <a:r>
-              <a:rPr sz="2800" b="0" u="none">
-                <a:solidFill>
-                  <a:srgbClr val="FF0000"/>
-                </a:solidFill>
-                <a:latin typeface="맑은 고딕"/>
-              </a:rPr>
-              <a:t>영국 왕립천문대 쪽에서 나온 경고</a:t>
-            </a:r>
-          </a:p>
-        </p:txBody>
-      </p:sp>
-      <p:sp>
-        <p:nvSpPr>
-          <p:cNvPr id="5" name="TextBox 4"/>
-          <p:cNvSpPr txBox="1"/>
-          <p:nvPr/>
-        </p:nvSpPr>
-        <p:spPr>
-          <a:xfrm>
-            <a:off x="8321040" y="621792"/>
-            <a:ext cx="2971800" cy="292608"/>
-          </a:xfrm>
-          <a:prstGeom prst="rect">
-            <a:avLst/>
-          </a:prstGeom>
-          <a:noFill/>
-        </p:spPr>
-        <p:txBody>
-          <a:bodyPr wrap="square">
-            <a:spAutoFit/>
-          </a:bodyPr>
-          <a:lstStyle/>
-          <a:p>
-            <a:pPr algn="r"/>
-            <a:r>
-              <a:rPr sz="1600" b="1" u="none">
-                <a:solidFill>
-                  <a:srgbClr val="000000"/>
-                </a:solidFill>
-                <a:latin typeface="맑은 고딕"/>
-              </a:rPr>
-              <a:t>www.bbc.com</a:t>
-            </a:r>
-          </a:p>
-        </p:txBody>
-      </p:sp>
-      <p:sp>
-        <p:nvSpPr>
-          <p:cNvPr id="6" name="TextBox 5"/>
-          <p:cNvSpPr txBox="1"/>
-          <p:nvPr/>
-        </p:nvSpPr>
-        <p:spPr>
-          <a:xfrm>
-            <a:off x="5806440" y="1965960"/>
-            <a:ext cx="5577840" cy="2468880"/>
-          </a:xfrm>
-          <a:prstGeom prst="rect">
-            <a:avLst/>
-          </a:prstGeom>
-          <a:noFill/>
-        </p:spPr>
-        <p:txBody>
-          <a:bodyPr wrap="square" anchor="ctr">
-            <a:spAutoFit/>
-          </a:bodyPr>
-          <a:lstStyle/>
-          <a:p>
-            <a:pPr>
-              <a:lnSpc>
-                <a:spcPct val="150000"/>
-              </a:lnSpc>
-              <a:spcAft>
-                <a:spcPts val="800"/>
-              </a:spcAft>
-            </a:pPr>
-            <a:r>
-              <a:rPr sz="2800" b="0" u="none">
-                <a:solidFill>
-                  <a:srgbClr val="000000"/>
-                </a:solidFill>
-                <a:latin typeface="맑은 고딕"/>
-              </a:rPr>
-              <a:t>BBC 보도는 Royal Observatory 쪽 경고를 AI 의존과 인간 지식의 역할이라는 맥락에서 소개한다</a:t>
-            </a:r>
-          </a:p>
-          <a:p>
-            <a:pPr>
-              <a:lnSpc>
-                <a:spcPct val="150000"/>
-              </a:lnSpc>
-              <a:spcAft>
-                <a:spcPts val="800"/>
-              </a:spcAft>
-            </a:pPr>
-            <a:r>
-              <a:rPr sz="2800" b="0" u="none">
-                <a:solidFill>
-                  <a:srgbClr val="000000"/>
-                </a:solidFill>
-                <a:latin typeface="맑은 고딕"/>
-              </a:rPr>
-              <a:t>이 메시지는 AI 금지가 아니라, 답을 받는 사람이 무엇을 배워야 하느냐는 질문으로 읽는다</a:t>
-            </a:r>
-          </a:p>
-          <a:p>
-            <a:pPr>
-              <a:lnSpc>
-                <a:spcPct val="150000"/>
-              </a:lnSpc>
-              <a:spcAft>
-                <a:spcPts val="800"/>
-              </a:spcAft>
-            </a:pPr>
-            <a:r>
-              <a:rPr sz="2800" b="0" u="none">
-                <a:solidFill>
-                  <a:srgbClr val="000000"/>
-                </a:solidFill>
-                <a:latin typeface="맑은 고딕"/>
-              </a:rPr>
-              <a:t>단일 기관 사례이므로 모든 지식기관의 공식 입장처럼 일반화하지 않는다</a:t>
-            </a:r>
-          </a:p>
-        </p:txBody>
-      </p:sp>
-    </p:spTree>
-  </p:cSld>
-  <p:clrMapOvr>
-    <a:masterClrMapping/>
-  </p:clrMapOvr>
-</p:sld>
-</file>
-
-<file path=ppt/slides/slide4.xml><?xml version="1.0" encoding="utf-8"?>
-<p:sld xmlns:a="http://schemas.openxmlformats.org/drawingml/2006/main" xmlns:p="http://schemas.openxmlformats.org/presentationml/2006/main" xmlns:r="http://schemas.openxmlformats.org/officeDocument/2006/relationships">
-  <p:cSld>
-    <p:bg>
-      <p:bgPr>
-        <a:solidFill>
-          <a:srgbClr val="F8F9FA"/>
-        </a:solidFill>
-        <a:effectLst/>
-      </p:bgPr>
-    </p:bg>
-    <p:spTree>
-      <p:nvGrpSpPr>
-        <p:cNvPr id="1" name=""/>
-        <p:cNvGrpSpPr/>
-        <p:nvPr/>
-      </p:nvGrpSpPr>
-      <p:grpSpPr/>
-      <p:sp>
-        <p:nvSpPr>
-          <p:cNvPr id="2" name="TextBox 1"/>
-          <p:cNvSpPr txBox="1"/>
-          <p:nvPr/>
-        </p:nvSpPr>
-        <p:spPr>
-          <a:xfrm>
-            <a:off x="572414" y="356616"/>
-            <a:ext cx="11192256" cy="521207"/>
-          </a:xfrm>
-          <a:prstGeom prst="rect">
-            <a:avLst/>
-          </a:prstGeom>
-          <a:noFill/>
-        </p:spPr>
-        <p:txBody>
-          <a:bodyPr wrap="square">
-            <a:spAutoFit/>
-          </a:bodyPr>
-          <a:lstStyle/>
-          <a:p>
-            <a:r>
-              <a:rPr sz="2800" b="0" u="none">
-                <a:solidFill>
-                  <a:srgbClr val="FF0000"/>
-                </a:solidFill>
-                <a:latin typeface="맑은 고딕"/>
-              </a:rPr>
-              <a:t>천문대가 왜 이런 말을 했을까</a:t>
-            </a:r>
-          </a:p>
-        </p:txBody>
-      </p:sp>
-      <p:sp>
-        <p:nvSpPr>
-          <p:cNvPr id="3" name="TextBox 2"/>
-          <p:cNvSpPr txBox="1"/>
-          <p:nvPr/>
-        </p:nvSpPr>
-        <p:spPr>
-          <a:xfrm>
-            <a:off x="5989320" y="1208836"/>
-            <a:ext cx="5394960" cy="1302105"/>
-          </a:xfrm>
-          <a:prstGeom prst="rect">
-            <a:avLst/>
-          </a:prstGeom>
-          <a:noFill/>
-        </p:spPr>
-        <p:txBody>
-          <a:bodyPr wrap="square" anchor="ctr">
-            <a:spAutoFit/>
-          </a:bodyPr>
-          <a:lstStyle/>
-          <a:p>
-            <a:pPr>
-              <a:lnSpc>
-                <a:spcPct val="150000"/>
-              </a:lnSpc>
-              <a:spcAft>
-                <a:spcPts val="800"/>
-              </a:spcAft>
-            </a:pPr>
-            <a:r>
-              <a:rPr sz="2800" b="0" u="none">
-                <a:solidFill>
-                  <a:srgbClr val="000000"/>
-                </a:solidFill>
-                <a:latin typeface="맑은 고딕"/>
-              </a:rPr>
-              <a:t>천문학은 답 하나보다 관찰·추론·검증의 과정이 중요한 분야다</a:t>
-            </a:r>
-          </a:p>
-          <a:p>
-            <a:pPr>
-              <a:lnSpc>
-                <a:spcPct val="150000"/>
-              </a:lnSpc>
-              <a:spcAft>
-                <a:spcPts val="800"/>
-              </a:spcAft>
-            </a:pPr>
-            <a:r>
-              <a:rPr sz="2800" b="0" u="none">
-                <a:solidFill>
-                  <a:srgbClr val="000000"/>
-                </a:solidFill>
-                <a:latin typeface="맑은 고딕"/>
-              </a:rPr>
-              <a:t>AI 즉답은 그 과정을 도와줄 수도, 일부 건너뛰게 만들 수도 있다</a:t>
-            </a:r>
-          </a:p>
-        </p:txBody>
-      </p:sp>
-      <p:sp>
-        <p:nvSpPr>
-          <p:cNvPr id="4" name="Rectangle 3"/>
-          <p:cNvSpPr/>
-          <p:nvPr/>
-        </p:nvSpPr>
-        <p:spPr>
-          <a:xfrm>
-            <a:off x="713232" y="1417320"/>
-            <a:ext cx="4892040" cy="4114800"/>
-          </a:xfrm>
-          <a:prstGeom prst="rect">
-            <a:avLst/>
-          </a:prstGeom>
-          <a:solidFill>
-            <a:srgbClr val="F5F5F5"/>
-          </a:solidFill>
-          <a:ln w="12700">
-            <a:solidFill>
-              <a:srgbClr val="BEBEBE"/>
-            </a:solidFill>
-          </a:ln>
-        </p:spPr>
-        <p:style>
-          <a:lnRef idx="1">
-            <a:schemeClr val="accent1"/>
-          </a:lnRef>
-          <a:fillRef idx="3">
-            <a:schemeClr val="accent1"/>
-          </a:fillRef>
-          <a:effectRef idx="2">
-            <a:schemeClr val="accent1"/>
-          </a:effectRef>
-          <a:fontRef idx="minor">
-            <a:schemeClr val="lt1"/>
-          </a:fontRef>
-        </p:style>
-        <p:txBody>
-          <a:bodyPr rtlCol="0" anchor="ctr" wrap="square"/>
-          <a:lstStyle/>
-          <a:p>
-            <a:pPr algn="ctr"/>
-            <a:r>
-              <a:rPr sz="1800" b="0">
-                <a:solidFill>
-                  <a:srgbClr val="0070C0"/>
-                </a:solidFill>
-                <a:latin typeface="맑은 고딕"/>
-              </a:rPr>
-              <a:t>[기사 인용]</a:t>
-            </a:r>
-          </a:p>
-          <a:p>
-            <a:pPr algn="ctr">
-              <a:spcBef>
-                <a:spcPts val="800"/>
-              </a:spcBef>
-            </a:pPr>
-            <a:r>
-              <a:rPr sz="1800" b="1">
-                <a:solidFill>
-                  <a:srgbClr val="000000"/>
-                </a:solidFill>
-                <a:latin typeface="맑은 고딕"/>
-              </a:rPr>
-              <a:t>BBC</a:t>
-            </a:r>
-          </a:p>
-          <a:p>
-            <a:pPr algn="ctr">
-              <a:spcBef>
-                <a:spcPts val="400"/>
-              </a:spcBef>
-            </a:pPr>
-            <a:r>
-              <a:rPr sz="1400" b="0">
-                <a:solidFill>
-                  <a:srgbClr val="566070"/>
-                </a:solidFill>
-                <a:latin typeface="맑은 고딕"/>
-              </a:rPr>
-              <a:t>천문대가 왜 이런 말을 했을까</a:t>
-            </a:r>
-          </a:p>
-        </p:txBody>
-      </p:sp>
-    </p:spTree>
-  </p:cSld>
-  <p:clrMapOvr>
-    <a:masterClrMapping/>
-  </p:clrMapOvr>
-</p:sld>
-</file>
-
-<file path=ppt/slides/slide5.xml><?xml version="1.0" encoding="utf-8"?>
-<p:sld xmlns:a="http://schemas.openxmlformats.org/drawingml/2006/main" xmlns:p="http://schemas.openxmlformats.org/presentationml/2006/main" xmlns:r="http://schemas.openxmlformats.org/officeDocument/2006/relationships">
-  <p:cSld>
-    <p:bg>
-      <p:bgPr>
-        <a:solidFill>
-          <a:srgbClr val="F8F9FA"/>
-        </a:solidFill>
-        <a:effectLst/>
-      </p:bgPr>
-    </p:bg>
-    <p:spTree>
-      <p:nvGrpSpPr>
-        <p:cNvPr id="1" name=""/>
-        <p:cNvGrpSpPr/>
-        <p:nvPr/>
-      </p:nvGrpSpPr>
-      <p:grpSpPr/>
-      <p:sp>
-        <p:nvSpPr>
-          <p:cNvPr id="2" name="TextBox 1"/>
-          <p:cNvSpPr txBox="1"/>
-          <p:nvPr/>
-        </p:nvSpPr>
-        <p:spPr>
-          <a:xfrm>
-            <a:off x="572414" y="356616"/>
-            <a:ext cx="11192256" cy="521207"/>
-          </a:xfrm>
-          <a:prstGeom prst="rect">
-            <a:avLst/>
-          </a:prstGeom>
-          <a:noFill/>
-        </p:spPr>
-        <p:txBody>
-          <a:bodyPr wrap="square">
-            <a:spAutoFit/>
-          </a:bodyPr>
-          <a:lstStyle/>
-          <a:p>
-            <a:r>
-              <a:rPr sz="2800" b="0" u="none">
-                <a:solidFill>
-                  <a:srgbClr val="FF0000"/>
-                </a:solidFill>
-                <a:latin typeface="맑은 고딕"/>
-              </a:rPr>
-              <a:t>이 이야기는 천문대만의 이야기가 아니다</a:t>
-            </a:r>
-          </a:p>
-        </p:txBody>
-      </p:sp>
-      <p:sp>
-        <p:nvSpPr>
-          <p:cNvPr id="3" name="Rectangle 2"/>
-          <p:cNvSpPr/>
-          <p:nvPr/>
-        </p:nvSpPr>
-        <p:spPr>
-          <a:xfrm>
-            <a:off x="713232" y="1417320"/>
-            <a:ext cx="4892040" cy="4114800"/>
-          </a:xfrm>
-          <a:prstGeom prst="rect">
-            <a:avLst/>
-          </a:prstGeom>
-          <a:solidFill>
-            <a:srgbClr val="F5F5F5"/>
-          </a:solidFill>
-          <a:ln w="12700">
-            <a:solidFill>
-              <a:srgbClr val="BEBEBE"/>
-            </a:solidFill>
-          </a:ln>
-        </p:spPr>
-        <p:style>
-          <a:lnRef idx="1">
-            <a:schemeClr val="accent1"/>
-          </a:lnRef>
-          <a:fillRef idx="3">
-            <a:schemeClr val="accent1"/>
-          </a:fillRef>
-          <a:effectRef idx="2">
-            <a:schemeClr val="accent1"/>
-          </a:effectRef>
-          <a:fontRef idx="minor">
-            <a:schemeClr val="lt1"/>
-          </a:fontRef>
-        </p:style>
-        <p:txBody>
-          <a:bodyPr rtlCol="0" anchor="ctr" wrap="square"/>
-          <a:lstStyle/>
-          <a:p>
-            <a:pPr algn="ctr"/>
-            <a:r>
-              <a:rPr sz="1800" b="0">
-                <a:solidFill>
-                  <a:srgbClr val="0070C0"/>
-                </a:solidFill>
-                <a:latin typeface="맑은 고딕"/>
-              </a:rPr>
-              <a:t>[도식]</a:t>
-            </a:r>
-          </a:p>
-        </p:txBody>
-      </p:sp>
-      <p:sp>
-        <p:nvSpPr>
-          <p:cNvPr id="4" name="TextBox 3"/>
-          <p:cNvSpPr txBox="1"/>
-          <p:nvPr/>
-        </p:nvSpPr>
-        <p:spPr>
-          <a:xfrm>
-            <a:off x="5989320" y="2103120"/>
-            <a:ext cx="5303520" cy="2926080"/>
-          </a:xfrm>
-          <a:prstGeom prst="rect">
-            <a:avLst/>
-          </a:prstGeom>
-          <a:noFill/>
-        </p:spPr>
-        <p:txBody>
-          <a:bodyPr wrap="square" anchor="ctr">
-            <a:spAutoFit/>
-          </a:bodyPr>
-          <a:lstStyle/>
-          <a:p>
-            <a:pPr>
-              <a:lnSpc>
-                <a:spcPct val="150000"/>
-              </a:lnSpc>
-              <a:spcAft>
-                <a:spcPts val="800"/>
-              </a:spcAft>
-            </a:pPr>
-            <a:r>
-              <a:rPr sz="2800" b="0" u="none">
-                <a:solidFill>
-                  <a:srgbClr val="000000"/>
-                </a:solidFill>
-                <a:latin typeface="맑은 고딕"/>
-              </a:rPr>
-              <a:t>학교, 박물관, 도서관, 과학관도 AI가 설명을 대신하는 시대의 질문을 마주한다</a:t>
-            </a:r>
-          </a:p>
-          <a:p>
-            <a:pPr>
-              <a:lnSpc>
-                <a:spcPct val="150000"/>
-              </a:lnSpc>
-              <a:spcAft>
-                <a:spcPts val="800"/>
-              </a:spcAft>
-            </a:pPr>
-            <a:r>
-              <a:rPr sz="2800" b="0" u="none">
-                <a:solidFill>
-                  <a:srgbClr val="000000"/>
-                </a:solidFill>
-                <a:latin typeface="맑은 고딕"/>
-              </a:rPr>
-              <a:t>UNESCO와 OECD 자료는 AI 교육을 단순 도구 사용이 아니라 역량·원칙의 문제로 다룬다</a:t>
-            </a:r>
-          </a:p>
-        </p:txBody>
-      </p:sp>
-    </p:spTree>
-  </p:cSld>
-  <p:clrMapOvr>
-    <a:masterClrMapping/>
-  </p:clrMapOvr>
-</p:sld>
-</file>
-
-<file path=ppt/slides/slide6.xml><?xml version="1.0" encoding="utf-8"?>
-<p:sld xmlns:a="http://schemas.openxmlformats.org/drawingml/2006/main" xmlns:p="http://schemas.openxmlformats.org/presentationml/2006/main" xmlns:r="http://schemas.openxmlformats.org/officeDocument/2006/relationships">
-  <p:cSld>
-    <p:bg>
-      <p:bgPr>
-        <a:solidFill>
-          <a:srgbClr val="F8F9FA"/>
-        </a:solidFill>
-        <a:effectLst/>
-      </p:bgPr>
-    </p:bg>
-    <p:spTree>
-      <p:nvGrpSpPr>
-        <p:cNvPr id="1" name=""/>
-        <p:cNvGrpSpPr/>
-        <p:nvPr/>
-      </p:nvGrpSpPr>
-      <p:grpSpPr/>
-      <p:sp>
-        <p:nvSpPr>
-          <p:cNvPr id="2" name="TextBox 1"/>
-          <p:cNvSpPr txBox="1"/>
-          <p:nvPr/>
-        </p:nvSpPr>
-        <p:spPr>
-          <a:xfrm>
-            <a:off x="572414" y="356616"/>
-            <a:ext cx="11192256" cy="521207"/>
-          </a:xfrm>
-          <a:prstGeom prst="rect">
-            <a:avLst/>
-          </a:prstGeom>
-          <a:noFill/>
-        </p:spPr>
-        <p:txBody>
-          <a:bodyPr wrap="square">
-            <a:spAutoFit/>
-          </a:bodyPr>
-          <a:lstStyle/>
-          <a:p>
-            <a:r>
-              <a:rPr sz="2800" b="0" u="none">
-                <a:solidFill>
-                  <a:srgbClr val="FF0000"/>
-                </a:solidFill>
-                <a:latin typeface="맑은 고딕"/>
-              </a:rPr>
-              <a:t>그러면 이제 공부는 무엇이 되는가</a:t>
-            </a:r>
-          </a:p>
-        </p:txBody>
-      </p:sp>
-      <p:sp>
-        <p:nvSpPr>
-          <p:cNvPr id="3" name="TextBox 2"/>
-          <p:cNvSpPr txBox="1"/>
-          <p:nvPr/>
-        </p:nvSpPr>
-        <p:spPr>
-          <a:xfrm>
-            <a:off x="713232" y="2103120"/>
-            <a:ext cx="10652760" cy="2926080"/>
-          </a:xfrm>
-          <a:prstGeom prst="rect">
-            <a:avLst/>
-          </a:prstGeom>
-          <a:noFill/>
-        </p:spPr>
-        <p:txBody>
-          <a:bodyPr wrap="square" anchor="ctr">
-            <a:spAutoFit/>
-          </a:bodyPr>
-          <a:lstStyle/>
-          <a:p>
-            <a:pPr>
-              <a:lnSpc>
-                <a:spcPct val="150000"/>
-              </a:lnSpc>
-              <a:spcAft>
-                <a:spcPts val="800"/>
-              </a:spcAft>
-            </a:pPr>
-            <a:r>
-              <a:rPr sz="2800" b="0" u="none">
-                <a:solidFill>
-                  <a:srgbClr val="000000"/>
-                </a:solidFill>
-                <a:latin typeface="맑은 고딕"/>
-              </a:rPr>
-              <a:t>답을 아는 능력인가</a:t>
-            </a:r>
-          </a:p>
-          <a:p>
-            <a:pPr>
-              <a:lnSpc>
-                <a:spcPct val="150000"/>
-              </a:lnSpc>
-              <a:spcAft>
-                <a:spcPts val="800"/>
-              </a:spcAft>
-            </a:pPr>
-            <a:r>
-              <a:rPr sz="2800" b="0" u="none">
-                <a:solidFill>
-                  <a:srgbClr val="000000"/>
-                </a:solidFill>
-                <a:latin typeface="맑은 고딕"/>
-              </a:rPr>
-              <a:t>답을 의심하고 확인하는 능력인가</a:t>
-            </a:r>
-          </a:p>
-          <a:p>
-            <a:pPr>
-              <a:lnSpc>
-                <a:spcPct val="150000"/>
-              </a:lnSpc>
-              <a:spcAft>
-                <a:spcPts val="800"/>
-              </a:spcAft>
-            </a:pPr>
-            <a:r>
-              <a:rPr sz="2800" b="0" u="none">
-                <a:solidFill>
-                  <a:srgbClr val="000000"/>
-                </a:solidFill>
-                <a:latin typeface="맑은 고딕"/>
-              </a:rPr>
-              <a:t>혹은 더 좋은 질문을 만드는 능력인가</a:t>
-            </a:r>
-          </a:p>
-        </p:txBody>
-      </p:sp>
-    </p:spTree>
-  </p:cSld>
-  <p:clrMapOvr>
-    <a:masterClrMapping/>
-  </p:clrMapOvr>
-</p:sld>
-</file>
-
-<file path=ppt/slides/slide7.xml><?xml version="1.0" encoding="utf-8"?>
-<p:sld xmlns:a="http://schemas.openxmlformats.org/drawingml/2006/main" xmlns:p="http://schemas.openxmlformats.org/presentationml/2006/main" xmlns:r="http://schemas.openxmlformats.org/officeDocument/2006/relationships">
-  <p:cSld>
-    <p:bg>
-      <p:bgPr>
-        <a:solidFill>
-          <a:srgbClr val="F8F9FA"/>
-        </a:solidFill>
-        <a:effectLst/>
-      </p:bgPr>
-    </p:bg>
-    <p:spTree>
-      <p:nvGrpSpPr>
-        <p:cNvPr id="1" name=""/>
-        <p:cNvGrpSpPr/>
-        <p:nvPr/>
-      </p:nvGrpSpPr>
-      <p:grpSpPr/>
-      <p:sp>
-        <p:nvSpPr>
-          <p:cNvPr id="2" name="TextBox 1"/>
-          <p:cNvSpPr txBox="1"/>
-          <p:nvPr/>
-        </p:nvSpPr>
-        <p:spPr>
-          <a:xfrm>
-            <a:off x="843991" y="1273759"/>
-            <a:ext cx="10752429" cy="2424988"/>
-          </a:xfrm>
-          <a:prstGeom prst="rect">
-            <a:avLst/>
-          </a:prstGeom>
-          <a:noFill/>
-        </p:spPr>
-        <p:txBody>
-          <a:bodyPr wrap="square">
-            <a:spAutoFit/>
-          </a:bodyPr>
-          <a:lstStyle/>
-          <a:p>
-            <a:r>
-              <a:rPr sz="5400" b="1" u="none">
-                <a:solidFill>
-                  <a:srgbClr val="181C23"/>
-                </a:solidFill>
-                <a:latin typeface="맑은 고딕"/>
-              </a:rPr>
-              <a:t>생략되는 건 답이 아니라 과정</a:t>
-            </a:r>
-          </a:p>
-        </p:txBody>
-      </p:sp>
-    </p:spTree>
-  </p:cSld>
-  <p:clrMapOvr>
-    <a:masterClrMapping/>
-  </p:clrMapOvr>
-</p:sld>
-</file>
-
-<file path=ppt/slides/slide8.xml><?xml version="1.0" encoding="utf-8"?>
-<p:sld xmlns:a="http://schemas.openxmlformats.org/drawingml/2006/main" xmlns:p="http://schemas.openxmlformats.org/presentationml/2006/main" xmlns:r="http://schemas.openxmlformats.org/officeDocument/2006/relationships">
-  <p:cSld>
-    <p:bg>
-      <p:bgPr>
-        <a:solidFill>
-          <a:srgbClr val="F8F9FA"/>
-        </a:solidFill>
-        <a:effectLst/>
-      </p:bgPr>
-    </p:bg>
-    <p:spTree>
-      <p:nvGrpSpPr>
-        <p:cNvPr id="1" name=""/>
-        <p:cNvGrpSpPr/>
-        <p:nvPr/>
-      </p:nvGrpSpPr>
-      <p:grpSpPr/>
-      <p:sp>
-        <p:nvSpPr>
-          <p:cNvPr id="2" name="TextBox 1"/>
-          <p:cNvSpPr txBox="1"/>
-          <p:nvPr/>
-        </p:nvSpPr>
-        <p:spPr>
-          <a:xfrm>
-            <a:off x="572414" y="356616"/>
-            <a:ext cx="11192256" cy="521207"/>
-          </a:xfrm>
-          <a:prstGeom prst="rect">
-            <a:avLst/>
-          </a:prstGeom>
-          <a:noFill/>
-        </p:spPr>
-        <p:txBody>
-          <a:bodyPr wrap="square">
-            <a:spAutoFit/>
-          </a:bodyPr>
-          <a:lstStyle/>
-          <a:p>
-            <a:r>
-              <a:rPr sz="2800" b="0" u="none">
-                <a:solidFill>
-                  <a:srgbClr val="FF0000"/>
-                </a:solidFill>
-                <a:latin typeface="맑은 고딕"/>
-              </a:rPr>
-              <a:t>예전 검색은 귀찮았지만 흔적이 남았다</a:t>
-            </a:r>
-          </a:p>
-        </p:txBody>
-      </p:sp>
-      <p:sp>
-        <p:nvSpPr>
-          <p:cNvPr id="3" name="TextBox 2"/>
-          <p:cNvSpPr txBox="1"/>
-          <p:nvPr/>
-        </p:nvSpPr>
-        <p:spPr>
-          <a:xfrm>
-            <a:off x="5989320" y="1208836"/>
-            <a:ext cx="5394960" cy="1302105"/>
-          </a:xfrm>
-          <a:prstGeom prst="rect">
-            <a:avLst/>
-          </a:prstGeom>
-          <a:noFill/>
-        </p:spPr>
-        <p:txBody>
-          <a:bodyPr wrap="square" anchor="ctr">
-            <a:spAutoFit/>
-          </a:bodyPr>
-          <a:lstStyle/>
-          <a:p>
-            <a:pPr>
-              <a:lnSpc>
-                <a:spcPct val="150000"/>
-              </a:lnSpc>
-              <a:spcAft>
-                <a:spcPts val="800"/>
-              </a:spcAft>
-            </a:pPr>
-            <a:r>
-              <a:rPr sz="2800" b="0" u="none">
-                <a:solidFill>
-                  <a:srgbClr val="000000"/>
-                </a:solidFill>
-                <a:latin typeface="맑은 고딕"/>
-              </a:rPr>
-              <a:t>검색어를 바꿔보고, 여러 결과를 비교하고, 출처를 고르는 과정이 있었다</a:t>
-            </a:r>
-          </a:p>
-          <a:p>
-            <a:pPr>
-              <a:lnSpc>
-                <a:spcPct val="150000"/>
-              </a:lnSpc>
-              <a:spcAft>
-                <a:spcPts val="800"/>
-              </a:spcAft>
-            </a:pPr>
-            <a:r>
-              <a:rPr sz="2800" b="0" u="none">
-                <a:solidFill>
-                  <a:srgbClr val="000000"/>
-                </a:solidFill>
-                <a:latin typeface="맑은 고딕"/>
-              </a:rPr>
-              <a:t>이 과정은 느리지만 정보 탐색의 다양성과 판단 훈련을 남긴다</a:t>
-            </a:r>
-          </a:p>
-        </p:txBody>
-      </p:sp>
-      <p:sp>
-        <p:nvSpPr>
-          <p:cNvPr id="4" name="Rectangle 3"/>
-          <p:cNvSpPr/>
-          <p:nvPr/>
-        </p:nvSpPr>
-        <p:spPr>
-          <a:xfrm>
-            <a:off x="713232" y="1417320"/>
-            <a:ext cx="4892040" cy="4114800"/>
-          </a:xfrm>
-          <a:prstGeom prst="rect">
-            <a:avLst/>
-          </a:prstGeom>
-          <a:solidFill>
-            <a:srgbClr val="F5F5F5"/>
-          </a:solidFill>
-          <a:ln w="12700">
-            <a:solidFill>
-              <a:srgbClr val="BEBEBE"/>
-            </a:solidFill>
-          </a:ln>
-        </p:spPr>
-        <p:style>
-          <a:lnRef idx="1">
-            <a:schemeClr val="accent1"/>
-          </a:lnRef>
-          <a:fillRef idx="3">
-            <a:schemeClr val="accent1"/>
-          </a:fillRef>
-          <a:effectRef idx="2">
-            <a:schemeClr val="accent1"/>
-          </a:effectRef>
-          <a:fontRef idx="minor">
-            <a:schemeClr val="lt1"/>
-          </a:fontRef>
-        </p:style>
-        <p:txBody>
-          <a:bodyPr rtlCol="0" anchor="ctr" wrap="square"/>
-          <a:lstStyle/>
-          <a:p>
-            <a:pPr algn="ctr"/>
-            <a:r>
-              <a:rPr sz="1800" b="0">
-                <a:solidFill>
-                  <a:srgbClr val="0070C0"/>
-                </a:solidFill>
-                <a:latin typeface="맑은 고딕"/>
-              </a:rPr>
-              <a:t>[기사 인용]</a:t>
-            </a:r>
-          </a:p>
-          <a:p>
-            <a:pPr algn="ctr">
-              <a:spcBef>
-                <a:spcPts val="800"/>
-              </a:spcBef>
-            </a:pPr>
-            <a:r>
-              <a:rPr sz="1800" b="1">
+              <a:rPr sz="2100" b="1">
                 <a:solidFill>
                   <a:srgbClr val="000000"/>
                 </a:solidFill>
@@ -17047,11 +18147,11 @@
             <a:r>
               <a:rPr sz="1400" b="0">
                 <a:solidFill>
-                  <a:srgbClr val="566070"/>
+                  <a:srgbClr val="373737"/>
                 </a:solidFill>
                 <a:latin typeface="맑은 고딕"/>
               </a:rPr>
-              <a:t>예전 검색은 귀찮았지만 흔적이 남았다</a:t>
+              <a:t>Research — information diversity in onlin…</a:t>
             </a:r>
           </a:p>
         </p:txBody>
@@ -17131,7 +18231,7 @@
             <a:avLst/>
           </a:prstGeom>
           <a:solidFill>
-            <a:srgbClr val="F5F5F5"/>
+            <a:srgbClr val="F8F8F8"/>
           </a:solidFill>
           <a:ln w="12700">
             <a:solidFill>
@@ -17154,12 +18254,37 @@
           </a:fontRef>
         </p:style>
         <p:txBody>
-          <a:bodyPr rtlCol="0" anchor="ctr" wrap="square"/>
+          <a:bodyPr rtlCol="0" anchor="ctr"/>
           <a:lstStyle/>
           <a:p>
             <a:pPr algn="ctr"/>
-            <a:r>
-              <a:rPr sz="1800" b="0">
+          </a:p>
+        </p:txBody>
+      </p:sp>
+      <p:sp>
+        <p:nvSpPr>
+          <p:cNvPr id="4" name="TextBox 3"/>
+          <p:cNvSpPr txBox="1"/>
+          <p:nvPr/>
+        </p:nvSpPr>
+        <p:spPr>
+          <a:xfrm>
+            <a:off x="822960" y="1527048"/>
+            <a:ext cx="914400" cy="201168"/>
+          </a:xfrm>
+          <a:prstGeom prst="rect">
+            <a:avLst/>
+          </a:prstGeom>
+          <a:noFill/>
+        </p:spPr>
+        <p:txBody>
+          <a:bodyPr wrap="square">
+            <a:spAutoFit/>
+          </a:bodyPr>
+          <a:lstStyle/>
+          <a:p>
+            <a:r>
+              <a:rPr sz="1200" b="0" u="none">
                 <a:solidFill>
                   <a:srgbClr val="0070C0"/>
                 </a:solidFill>
@@ -17172,7 +18297,272 @@
       </p:sp>
       <p:sp>
         <p:nvSpPr>
-          <p:cNvPr id="4" name="TextBox 3"/>
+          <p:cNvPr id="5" name="Rectangle 4"/>
+          <p:cNvSpPr/>
+          <p:nvPr/>
+        </p:nvSpPr>
+        <p:spPr>
+          <a:xfrm>
+            <a:off x="1033271" y="3040380"/>
+            <a:ext cx="1828799" cy="1143000"/>
+          </a:xfrm>
+          <a:prstGeom prst="rect">
+            <a:avLst/>
+          </a:prstGeom>
+          <a:solidFill>
+            <a:srgbClr val="FFFFFF"/>
+          </a:solidFill>
+          <a:ln w="12700">
+            <a:solidFill>
+              <a:srgbClr val="A0A0A0"/>
+            </a:solidFill>
+          </a:ln>
+        </p:spPr>
+        <p:style>
+          <a:lnRef idx="1">
+            <a:schemeClr val="accent1"/>
+          </a:lnRef>
+          <a:fillRef idx="3">
+            <a:schemeClr val="accent1"/>
+          </a:fillRef>
+          <a:effectRef idx="2">
+            <a:schemeClr val="accent1"/>
+          </a:effectRef>
+          <a:fontRef idx="minor">
+            <a:schemeClr val="lt1"/>
+          </a:fontRef>
+        </p:style>
+        <p:txBody>
+          <a:bodyPr rtlCol="0" anchor="ctr"/>
+          <a:lstStyle/>
+          <a:p>
+            <a:pPr algn="ctr"/>
+          </a:p>
+        </p:txBody>
+      </p:sp>
+      <p:sp>
+        <p:nvSpPr>
+          <p:cNvPr id="6" name="Rectangle 5"/>
+          <p:cNvSpPr/>
+          <p:nvPr/>
+        </p:nvSpPr>
+        <p:spPr>
+          <a:xfrm>
+            <a:off x="3456432" y="3040380"/>
+            <a:ext cx="1828799" cy="1143000"/>
+          </a:xfrm>
+          <a:prstGeom prst="rect">
+            <a:avLst/>
+          </a:prstGeom>
+          <a:solidFill>
+            <a:srgbClr val="FFFFFF"/>
+          </a:solidFill>
+          <a:ln w="12700">
+            <a:solidFill>
+              <a:srgbClr val="A0A0A0"/>
+            </a:solidFill>
+          </a:ln>
+        </p:spPr>
+        <p:style>
+          <a:lnRef idx="1">
+            <a:schemeClr val="accent1"/>
+          </a:lnRef>
+          <a:fillRef idx="3">
+            <a:schemeClr val="accent1"/>
+          </a:fillRef>
+          <a:effectRef idx="2">
+            <a:schemeClr val="accent1"/>
+          </a:effectRef>
+          <a:fontRef idx="minor">
+            <a:schemeClr val="lt1"/>
+          </a:fontRef>
+        </p:style>
+        <p:txBody>
+          <a:bodyPr rtlCol="0" anchor="ctr"/>
+          <a:lstStyle/>
+          <a:p>
+            <a:pPr algn="ctr"/>
+          </a:p>
+        </p:txBody>
+      </p:sp>
+      <p:sp>
+        <p:nvSpPr>
+          <p:cNvPr id="7" name="TextBox 6"/>
+          <p:cNvSpPr txBox="1"/>
+          <p:nvPr/>
+        </p:nvSpPr>
+        <p:spPr>
+          <a:xfrm>
+            <a:off x="1124712" y="3204972"/>
+            <a:ext cx="1645919" cy="320040"/>
+          </a:xfrm>
+          <a:prstGeom prst="rect">
+            <a:avLst/>
+          </a:prstGeom>
+          <a:noFill/>
+        </p:spPr>
+        <p:txBody>
+          <a:bodyPr wrap="square">
+            <a:spAutoFit/>
+          </a:bodyPr>
+          <a:lstStyle/>
+          <a:p>
+            <a:pPr algn="ctr"/>
+            <a:r>
+              <a:rPr sz="1800" b="1" u="none">
+                <a:solidFill>
+                  <a:srgbClr val="000000"/>
+                </a:solidFill>
+                <a:latin typeface="맑은 고딕"/>
+              </a:rPr>
+              <a:t>기존 방식</a:t>
+            </a:r>
+          </a:p>
+        </p:txBody>
+      </p:sp>
+      <p:sp>
+        <p:nvSpPr>
+          <p:cNvPr id="8" name="TextBox 7"/>
+          <p:cNvSpPr txBox="1"/>
+          <p:nvPr/>
+        </p:nvSpPr>
+        <p:spPr>
+          <a:xfrm>
+            <a:off x="1124712" y="3607308"/>
+            <a:ext cx="1645919" cy="274320"/>
+          </a:xfrm>
+          <a:prstGeom prst="rect">
+            <a:avLst/>
+          </a:prstGeom>
+          <a:noFill/>
+        </p:spPr>
+        <p:txBody>
+          <a:bodyPr wrap="square">
+            <a:spAutoFit/>
+          </a:bodyPr>
+          <a:lstStyle/>
+          <a:p>
+            <a:pPr algn="ctr"/>
+            <a:r>
+              <a:rPr sz="1500" b="0" u="none">
+                <a:solidFill>
+                  <a:srgbClr val="373737"/>
+                </a:solidFill>
+                <a:latin typeface="맑은 고딕"/>
+              </a:rPr>
+              <a:t>검색 / 비교</a:t>
+            </a:r>
+          </a:p>
+        </p:txBody>
+      </p:sp>
+      <p:sp>
+        <p:nvSpPr>
+          <p:cNvPr id="9" name="TextBox 8"/>
+          <p:cNvSpPr txBox="1"/>
+          <p:nvPr/>
+        </p:nvSpPr>
+        <p:spPr>
+          <a:xfrm>
+            <a:off x="3547872" y="3204972"/>
+            <a:ext cx="1645919" cy="320040"/>
+          </a:xfrm>
+          <a:prstGeom prst="rect">
+            <a:avLst/>
+          </a:prstGeom>
+          <a:noFill/>
+        </p:spPr>
+        <p:txBody>
+          <a:bodyPr wrap="square">
+            <a:spAutoFit/>
+          </a:bodyPr>
+          <a:lstStyle/>
+          <a:p>
+            <a:pPr algn="ctr"/>
+            <a:r>
+              <a:rPr sz="1800" b="1" u="none">
+                <a:solidFill>
+                  <a:srgbClr val="000000"/>
+                </a:solidFill>
+                <a:latin typeface="맑은 고딕"/>
+              </a:rPr>
+              <a:t>AI 즉답</a:t>
+            </a:r>
+          </a:p>
+        </p:txBody>
+      </p:sp>
+      <p:sp>
+        <p:nvSpPr>
+          <p:cNvPr id="10" name="TextBox 9"/>
+          <p:cNvSpPr txBox="1"/>
+          <p:nvPr/>
+        </p:nvSpPr>
+        <p:spPr>
+          <a:xfrm>
+            <a:off x="3547872" y="3607308"/>
+            <a:ext cx="1645919" cy="274320"/>
+          </a:xfrm>
+          <a:prstGeom prst="rect">
+            <a:avLst/>
+          </a:prstGeom>
+          <a:noFill/>
+        </p:spPr>
+        <p:txBody>
+          <a:bodyPr wrap="square">
+            <a:spAutoFit/>
+          </a:bodyPr>
+          <a:lstStyle/>
+          <a:p>
+            <a:pPr algn="ctr"/>
+            <a:r>
+              <a:rPr sz="1500" b="0" u="none">
+                <a:solidFill>
+                  <a:srgbClr val="373737"/>
+                </a:solidFill>
+                <a:latin typeface="맑은 고딕"/>
+              </a:rPr>
+              <a:t>요약 / 검증</a:t>
+            </a:r>
+          </a:p>
+        </p:txBody>
+      </p:sp>
+      <p:sp>
+        <p:nvSpPr>
+          <p:cNvPr id="11" name="TextBox 10"/>
+          <p:cNvSpPr txBox="1"/>
+          <p:nvPr/>
+        </p:nvSpPr>
+        <p:spPr>
+          <a:xfrm>
+            <a:off x="2930652" y="3387852"/>
+            <a:ext cx="457200" cy="347472"/>
+          </a:xfrm>
+          <a:prstGeom prst="rect">
+            <a:avLst/>
+          </a:prstGeom>
+          <a:noFill/>
+        </p:spPr>
+        <p:txBody>
+          <a:bodyPr wrap="square">
+            <a:spAutoFit/>
+          </a:bodyPr>
+          <a:lstStyle/>
+          <a:p>
+            <a:pPr algn="ctr"/>
+            <a:r>
+              <a:rPr sz="2200" b="1" u="none">
+                <a:solidFill>
+                  <a:srgbClr val="373737"/>
+                </a:solidFill>
+                <a:latin typeface="맑은 고딕"/>
+              </a:rPr>
+              <a:t>→</a:t>
+            </a:r>
+          </a:p>
+        </p:txBody>
+      </p:sp>
+      <p:sp>
+        <p:nvSpPr>
+          <p:cNvPr id="12" name="TextBox 11"/>
           <p:cNvSpPr txBox="1"/>
           <p:nvPr/>
         </p:nvSpPr>

--- a/outputs/pptx/ai_knowledge_institution_styled_draft.pptx
+++ b/outputs/pptx/ai_knowledge_institution_styled_draft.pptx
@@ -925,12 +925,7 @@
           </a:p>
           <a:p>
             <a:r>
-              <a:t>  "틀린 가설을 세워보고",</a:t>
-            </a:r>
-          </a:p>
-          <a:p>
-            <a:r>
-              <a:t>  "AI 역량 교육은 답을 받는 법보다 질문하고 평가하고 책임 있게…"</a:t>
+              <a:t>  "틀린 가설을 세워보고"</a:t>
             </a:r>
           </a:p>
           <a:p>
@@ -946,6 +941,11 @@
           <a:p>
             <a:r>
               <a:t>[</a:t>
+            </a:r>
+          </a:p>
+          <a:p>
+            <a:r>
+              <a:t>  "AI 역량 교육은 답을 받는 법보다 질문하고 평가하고 책임 있게 쓰는 법으로 확장될 필요가 있다",</a:t>
             </a:r>
           </a:p>
           <a:p>
@@ -1282,12 +1282,7 @@
           </a:p>
           <a:p>
             <a:r>
-              <a:t>  "이를 AI 반대가 아니라 질문과 검증의 필요성을 상기시키는 장면…",</a:t>
-            </a:r>
-          </a:p>
-          <a:p>
-            <a:r>
-              <a:t>  "단일 기사 기반 맥락이므로 표현은 보수적으로 유지한다"</a:t>
+              <a:t>  "이를 AI 반대가 아니라 질문과 검증의 필요성을 상기시키는 장면…"</a:t>
             </a:r>
           </a:p>
           <a:p>
@@ -1303,6 +1298,11 @@
           <a:p>
             <a:r>
               <a:t>[</a:t>
+            </a:r>
+          </a:p>
+          <a:p>
+            <a:r>
+              <a:t>  "이를 AI 반대가 아니라 질문과 검증의 필요성을 상기시키는 장면으로 사용한다",</a:t>
             </a:r>
           </a:p>
           <a:p>
@@ -2630,12 +2630,7 @@
           </a:p>
           <a:p>
             <a:r>
-              <a:t>  "설명 자체는 AI도 해줄 수 있다",</a:t>
-            </a:r>
-          </a:p>
-          <a:p>
-            <a:r>
-              <a:t>  "그렇다면 박물관·과학관은 맥락"</a:t>
+              <a:t>  "설명 자체는 AI도 해줄 수 있다"</a:t>
             </a:r>
           </a:p>
           <a:p>
@@ -2651,6 +2646,11 @@
           <a:p>
             <a:r>
               <a:t>[</a:t>
+            </a:r>
+          </a:p>
+          <a:p>
+            <a:r>
+              <a:t>  "그렇다면 박물관·과학관은 맥락, 경험, 질문, 토론을 더 강조해야 할 수 있다",</a:t>
             </a:r>
           </a:p>
           <a:p>
@@ -2993,12 +2993,7 @@
           </a:p>
           <a:p>
             <a:r>
-              <a:t>  "AI는 별자리 정보를 바로 줄 수 있다",</a:t>
-            </a:r>
-          </a:p>
-          <a:p>
-            <a:r>
-              <a:t>  ""</a:t>
+              <a:t>  "AI는 별자리 정보를 바로 줄 수 있다"</a:t>
             </a:r>
           </a:p>
           <a:p>
@@ -3014,6 +3009,11 @@
           <a:p>
             <a:r>
               <a:t>[</a:t>
+            </a:r>
+          </a:p>
+          <a:p>
+            <a:r>
+              <a:t>  "하지만 밤하늘을 관찰하고, 위치를 추정하고, 계절과 시간을 연결하는 경험은 다르다",</a:t>
             </a:r>
           </a:p>
           <a:p>
@@ -3707,32 +3707,27 @@
           </a:p>
           <a:p>
             <a:r>
+              <a:t>[]</a:t>
+            </a:r>
+          </a:p>
+          <a:p>
+            <a:r>
+              <a:t>overflow_body_lines:</a:t>
+            </a:r>
+          </a:p>
+          <a:p>
+            <a:r>
               <a:t>[</a:t>
             </a:r>
           </a:p>
           <a:p>
             <a:r>
-              <a:t>  "한국에서도 AI 디지털교과서와 AI 체험 전시가 이미 정책·기관…",</a:t>
-            </a:r>
-          </a:p>
-          <a:p>
-            <a:r>
-              <a:t>  "핵심 질문은 한국도 결국 AI를 금지할지보다 어떻게 다룰지라는…"</a:t>
-            </a:r>
-          </a:p>
-          <a:p>
-            <a:r>
-              <a:t>]</a:t>
-            </a:r>
-          </a:p>
-          <a:p>
-            <a:r>
-              <a:t>overflow_body_lines:</a:t>
-            </a:r>
-          </a:p>
-          <a:p>
-            <a:r>
-              <a:t>[</a:t>
+              <a:t>  "한국에서도 AI 디지털교과서와 AI 체험 전시가 이미 정책·기관 사례로 등장한다",</a:t>
+            </a:r>
+          </a:p>
+          <a:p>
+            <a:r>
+              <a:t>  "다만 한국 사례는 메인 논지의 증명이 아니라 후반 보조 연결로 사용한다",</a:t>
             </a:r>
           </a:p>
           <a:p>
@@ -4069,12 +4064,7 @@
           </a:p>
           <a:p>
             <a:r>
-              <a:t>  "AI가 답을 주는 건 막기 어렵다",</a:t>
-            </a:r>
-          </a:p>
-          <a:p>
-            <a:r>
-              <a:t>  "그렇다면 사람에게 남겨야 할 것은 답이 아니라 과정일 수 있다"</a:t>
+              <a:t>  "AI가 답을 주는 건 막기 어렵다"</a:t>
             </a:r>
           </a:p>
           <a:p>
@@ -4090,6 +4080,11 @@
           <a:p>
             <a:r>
               <a:t>[</a:t>
+            </a:r>
+          </a:p>
+          <a:p>
+            <a:r>
+              <a:t>  "그렇다면 사람에게 남겨야 할 것은 답이 아니라 과정일 수 있다",</a:t>
             </a:r>
           </a:p>
           <a:p>
@@ -4411,12 +4406,12 @@
           </a:p>
           <a:p>
             <a:r>
-              <a:t>  "모르는 것을 물으면 바로 답이 나오고",</a:t>
-            </a:r>
-          </a:p>
-          <a:p>
-            <a:r>
-              <a:t>  "AI는 접근성과 개인화 가능성도 넓힐 수 있다"</a:t>
+              <a:t>  "검색창을 열기도 전에",</a:t>
+            </a:r>
+          </a:p>
+          <a:p>
+            <a:r>
+              <a:t>  "답안지가 먼저 나온다"</a:t>
             </a:r>
           </a:p>
           <a:p>
@@ -5080,6 +5075,16 @@
           </a:p>
           <a:p>
             <a:r>
+              <a:t>[]</a:t>
+            </a:r>
+          </a:p>
+          <a:p>
+            <a:r>
+              <a:t>overflow_body_lines:</a:t>
+            </a:r>
+          </a:p>
+          <a:p>
+            <a:r>
               <a:t>[</a:t>
             </a:r>
           </a:p>
@@ -5090,22 +5095,7 @@
           </a:p>
           <a:p>
             <a:r>
-              <a:t>  "반대로 AI는 학습 접근성과 개인화 가능성을 높일 수 있다는 주…"</a:t>
-            </a:r>
-          </a:p>
-          <a:p>
-            <a:r>
-              <a:t>]</a:t>
-            </a:r>
-          </a:p>
-          <a:p>
-            <a:r>
-              <a:t>overflow_body_lines:</a:t>
-            </a:r>
-          </a:p>
-          <a:p>
-            <a:r>
-              <a:t>[</a:t>
+              <a:t>  "반대로 AI는 학습 접근성과 개인화 가능성을 높일 수 있다는 주장도 있다",</a:t>
             </a:r>
           </a:p>
           <a:p>
@@ -5442,27 +5432,27 @@
           </a:p>
           <a:p>
             <a:r>
+              <a:t>  "AI 답변의 빈틈을 찾는 법"</a:t>
+            </a:r>
+          </a:p>
+          <a:p>
+            <a:r>
+              <a:t>]</a:t>
+            </a:r>
+          </a:p>
+          <a:p>
+            <a:r>
+              <a:t>overflow_body_lines:</a:t>
+            </a:r>
+          </a:p>
+          <a:p>
+            <a:r>
+              <a:t>[</a:t>
+            </a:r>
+          </a:p>
+          <a:p>
+            <a:r>
               <a:t>  "AI 답변의 빈틈을 찾는 법",</a:t>
-            </a:r>
-          </a:p>
-          <a:p>
-            <a:r>
-              <a:t>  "다른 자료와 비교하는 법"</a:t>
-            </a:r>
-          </a:p>
-          <a:p>
-            <a:r>
-              <a:t>]</a:t>
-            </a:r>
-          </a:p>
-          <a:p>
-            <a:r>
-              <a:t>overflow_body_lines:</a:t>
-            </a:r>
-          </a:p>
-          <a:p>
-            <a:r>
-              <a:t>[</a:t>
             </a:r>
           </a:p>
           <a:p>
@@ -5809,6 +5799,16 @@
           </a:p>
           <a:p>
             <a:r>
+              <a:t>[]</a:t>
+            </a:r>
+          </a:p>
+          <a:p>
+            <a:r>
+              <a:t>overflow_body_lines:</a:t>
+            </a:r>
+          </a:p>
+          <a:p>
+            <a:r>
               <a:t>[</a:t>
             </a:r>
           </a:p>
@@ -5819,22 +5819,7 @@
           </a:p>
           <a:p>
             <a:r>
-              <a:t>  "더 멀리 보게 해줄 뿐, 어디를 볼지는 사람이 정한다"</a:t>
-            </a:r>
-          </a:p>
-          <a:p>
-            <a:r>
-              <a:t>]</a:t>
-            </a:r>
-          </a:p>
-          <a:p>
-            <a:r>
-              <a:t>overflow_body_lines:</a:t>
-            </a:r>
-          </a:p>
-          <a:p>
-            <a:r>
-              <a:t>[</a:t>
+              <a:t>  "더 멀리 보게 해줄 뿐, 어디를 볼지는 사람이 정한다",</a:t>
             </a:r>
           </a:p>
           <a:p>
@@ -7237,12 +7222,7 @@
           </a:p>
           <a:p>
             <a:r>
-              <a:t>  "이 메시지는 AI 금지가 아니라",</a:t>
-            </a:r>
-          </a:p>
-          <a:p>
-            <a:r>
-              <a:t>  "단일 기관 사례이므로 모든 지식기관의 공식 입장처럼 일반화하지…"</a:t>
+              <a:t>  "이 메시지는 AI 금지가 아니라"</a:t>
             </a:r>
           </a:p>
           <a:p>
@@ -7258,6 +7238,11 @@
           <a:p>
             <a:r>
               <a:t>[</a:t>
+            </a:r>
+          </a:p>
+          <a:p>
+            <a:r>
+              <a:t>  "이 메시지는 AI 금지가 아니라, 답을 받는 사람이 무엇을 배워야 하느냐는 질문으로 읽는다",</a:t>
             </a:r>
           </a:p>
           <a:p>
@@ -7584,12 +7569,7 @@
           </a:p>
           <a:p>
             <a:r>
-              <a:t>  "천문학은 답 하나보다 관찰·추론·검증의 과정이 중요한 분야다",</a:t>
-            </a:r>
-          </a:p>
-          <a:p>
-            <a:r>
-              <a:t>  "AI 즉답은 그 과정을 도와줄 수도"</a:t>
+              <a:t>  "천문학은 답 하나보다 관찰·추론·검증의 과정이 중요한 분야다"</a:t>
             </a:r>
           </a:p>
           <a:p>
@@ -7605,6 +7585,11 @@
           <a:p>
             <a:r>
               <a:t>[</a:t>
+            </a:r>
+          </a:p>
+          <a:p>
+            <a:r>
+              <a:t>  "AI 즉답은 그 과정을 도와줄 수도, 일부 건너뛰게 만들 수도 있다",</a:t>
             </a:r>
           </a:p>
           <a:p>
@@ -7936,32 +7921,27 @@
           </a:p>
           <a:p>
             <a:r>
+              <a:t>[]</a:t>
+            </a:r>
+          </a:p>
+          <a:p>
+            <a:r>
+              <a:t>overflow_body_lines:</a:t>
+            </a:r>
+          </a:p>
+          <a:p>
+            <a:r>
               <a:t>[</a:t>
             </a:r>
           </a:p>
           <a:p>
             <a:r>
-              <a:t>  "학교",</a:t>
-            </a:r>
-          </a:p>
-          <a:p>
-            <a:r>
-              <a:t>  "따라서 핵심은 답 제공 경쟁이 아니라 질문·검증·맥락을 가르치는…"</a:t>
-            </a:r>
-          </a:p>
-          <a:p>
-            <a:r>
-              <a:t>]</a:t>
-            </a:r>
-          </a:p>
-          <a:p>
-            <a:r>
-              <a:t>overflow_body_lines:</a:t>
-            </a:r>
-          </a:p>
-          <a:p>
-            <a:r>
-              <a:t>[</a:t>
+              <a:t>  "학교, 박물관, 도서관, 과학관도 AI가 설명을 대신하는 시대의 질문을 마주한다",</a:t>
+            </a:r>
+          </a:p>
+          <a:p>
+            <a:r>
+              <a:t>  "UNESCO와 OECD 자료는 AI 교육을 단순 도구 사용이 아니라 역량·원칙의 문제로 다룬다",</a:t>
             </a:r>
           </a:p>
           <a:p>
@@ -8947,7 +8927,12 @@
           </a:p>
           <a:p>
             <a:r>
-              <a:t>  "이 과정은 느리지만 정보 탐색의 다양성과 판단 훈련을 남긴다"</a:t>
+              <a:t>  "예전 검색은 느렸지만",</a:t>
+            </a:r>
+          </a:p>
+          <a:p>
+            <a:r>
+              <a:t>  "비교하는 흔적이 남았다"</a:t>
             </a:r>
           </a:p>
           <a:p>
@@ -8963,11 +8948,6 @@
           <a:p>
             <a:r>
               <a:t>[</a:t>
-            </a:r>
-          </a:p>
-          <a:p>
-            <a:r>
-              <a:t>  "이 과정은 느리지만 정보 탐색의 다양성과 판단 훈련을 남긴다",</a:t>
             </a:r>
           </a:p>
           <a:p>
@@ -9289,6 +9269,16 @@
           </a:p>
           <a:p>
             <a:r>
+              <a:t>[]</a:t>
+            </a:r>
+          </a:p>
+          <a:p>
+            <a:r>
+              <a:t>overflow_body_lines:</a:t>
+            </a:r>
+          </a:p>
+          <a:p>
+            <a:r>
               <a:t>[</a:t>
             </a:r>
           </a:p>
@@ -9299,22 +9289,7 @@
           </a:p>
           <a:p>
             <a:r>
-              <a:t>  "걱정되는 점: 비교·검증·실패의 경험이 줄어들 가능성이 있다"</a:t>
-            </a:r>
-          </a:p>
-          <a:p>
-            <a:r>
-              <a:t>]</a:t>
-            </a:r>
-          </a:p>
-          <a:p>
-            <a:r>
-              <a:t>overflow_body_lines:</a:t>
-            </a:r>
-          </a:p>
-          <a:p>
-            <a:r>
-              <a:t>[</a:t>
+              <a:t>  "걱정되는 점: 비교·검증·실패의 경험이 줄어들 가능성이 있다",</a:t>
             </a:r>
           </a:p>
           <a:p>
@@ -12653,25 +12628,6 @@
               <a:t>틀린 가설을 세워보고</a:t>
             </a:r>
           </a:p>
-          <a:p>
-            <a:pPr>
-              <a:lnSpc>
-                <a:spcPct val="150000"/>
-              </a:lnSpc>
-              <a:spcAft>
-                <a:spcPts val="800"/>
-              </a:spcAft>
-            </a:pPr>
-            <a:r>
-              <a:rPr sz="2800" b="0" u="none">
-                <a:solidFill>
-                  <a:srgbClr val="000000"/>
-                </a:solidFill>
-                <a:latin typeface="맑은 고딕"/>
-              </a:rPr>
-              <a:t>AI 역량 교육은 답을 받는 법보다 질문하고 평가하고 책임 있게…</a:t>
-            </a:r>
-          </a:p>
         </p:txBody>
       </p:sp>
       <p:sp>
@@ -12717,29 +12673,13 @@
           <a:p>
             <a:pPr algn="ctr"/>
             <a:r>
-              <a:rPr sz="1200" b="0">
-                <a:solidFill>
-                  <a:srgbClr val="0070C0"/>
-                </a:solidFill>
-                <a:latin typeface="맑은 고딕"/>
-              </a:rPr>
-              <a:t>[출처]</a:t>
-            </a:r>
-          </a:p>
-          <a:p>
-            <a:pPr algn="ctr">
-              <a:spcBef>
-                <a:spcPts val="800"/>
-              </a:spcBef>
-            </a:pPr>
-            <a:r>
               <a:rPr sz="2100" b="1">
                 <a:solidFill>
                   <a:srgbClr val="000000"/>
                 </a:solidFill>
                 <a:latin typeface="맑은 고딕"/>
               </a:rPr>
-              <a:t>Microsoft</a:t>
+              <a:t>Microsoft Research</a:t>
             </a:r>
           </a:p>
           <a:p>
@@ -12755,7 +12695,7 @@
                 </a:solidFill>
                 <a:latin typeface="맑은 고딕"/>
               </a:rPr>
-              <a:t>Research, UNESCO AI Competency Framework.…</a:t>
+              <a:t>, UNESCO AI Competency Framework. 사고 과정 일…</a:t>
             </a:r>
           </a:p>
         </p:txBody>
@@ -12829,22 +12769,6 @@
           <a:p>
             <a:pPr algn="ctr"/>
             <a:r>
-              <a:rPr sz="1200" b="0">
-                <a:solidFill>
-                  <a:srgbClr val="0070C0"/>
-                </a:solidFill>
-                <a:latin typeface="맑은 고딕"/>
-              </a:rPr>
-              <a:t>[출처]</a:t>
-            </a:r>
-          </a:p>
-          <a:p>
-            <a:pPr algn="ctr">
-              <a:spcBef>
-                <a:spcPts val="800"/>
-              </a:spcBef>
-            </a:pPr>
-            <a:r>
               <a:rPr sz="2100" b="1">
                 <a:solidFill>
                   <a:srgbClr val="000000"/>
@@ -12991,25 +12915,6 @@
               <a:t>이를 AI 반대가 아니라 질문과 검증의 필요성을 상기시키는 장면…</a:t>
             </a:r>
           </a:p>
-          <a:p>
-            <a:pPr>
-              <a:lnSpc>
-                <a:spcPct val="150000"/>
-              </a:lnSpc>
-              <a:spcAft>
-                <a:spcPts val="800"/>
-              </a:spcAft>
-            </a:pPr>
-            <a:r>
-              <a:rPr sz="2800" b="0" u="none">
-                <a:solidFill>
-                  <a:srgbClr val="000000"/>
-                </a:solidFill>
-                <a:latin typeface="맑은 고딕"/>
-              </a:rPr>
-              <a:t>단일 기사 기반 맥락이므로 표현은 보수적으로 유지한다</a:t>
-            </a:r>
-          </a:p>
         </p:txBody>
       </p:sp>
     </p:spTree>
@@ -13357,22 +13262,6 @@
           <a:p>
             <a:pPr algn="ctr"/>
             <a:r>
-              <a:rPr sz="1200" b="0">
-                <a:solidFill>
-                  <a:srgbClr val="0070C0"/>
-                </a:solidFill>
-                <a:latin typeface="맑은 고딕"/>
-              </a:rPr>
-              <a:t>[출처]</a:t>
-            </a:r>
-          </a:p>
-          <a:p>
-            <a:pPr algn="ctr">
-              <a:spcBef>
-                <a:spcPts val="800"/>
-              </a:spcBef>
-            </a:pPr>
-            <a:r>
               <a:rPr sz="2100" b="1">
                 <a:solidFill>
                   <a:srgbClr val="000000"/>
@@ -13498,25 +13387,6 @@
                 <a:latin typeface="맑은 고딕"/>
               </a:rPr>
               <a:t>설명 자체는 AI도 해줄 수 있다</a:t>
-            </a:r>
-          </a:p>
-          <a:p>
-            <a:pPr>
-              <a:lnSpc>
-                <a:spcPct val="150000"/>
-              </a:lnSpc>
-              <a:spcAft>
-                <a:spcPts val="800"/>
-              </a:spcAft>
-            </a:pPr>
-            <a:r>
-              <a:rPr sz="2800" b="0" u="none">
-                <a:solidFill>
-                  <a:srgbClr val="000000"/>
-                </a:solidFill>
-                <a:latin typeface="맑은 고딕"/>
-              </a:rPr>
-              <a:t>그렇다면 박물관·과학관은 맥락</a:t>
             </a:r>
           </a:p>
         </p:txBody>
@@ -13564,22 +13434,6 @@
           <a:p>
             <a:pPr algn="ctr"/>
             <a:r>
-              <a:rPr sz="1200" b="0">
-                <a:solidFill>
-                  <a:srgbClr val="0070C0"/>
-                </a:solidFill>
-                <a:latin typeface="맑은 고딕"/>
-              </a:rPr>
-              <a:t>[출처]</a:t>
-            </a:r>
-          </a:p>
-          <a:p>
-            <a:pPr algn="ctr">
-              <a:spcBef>
-                <a:spcPts val="800"/>
-              </a:spcBef>
-            </a:pPr>
-            <a:r>
               <a:rPr sz="2100" b="1">
                 <a:solidFill>
                   <a:srgbClr val="000000"/>
@@ -13706,16 +13560,6 @@
               </a:rPr>
               <a:t>AI는 별자리 정보를 바로 줄 수 있다</a:t>
             </a:r>
-          </a:p>
-          <a:p>
-            <a:pPr>
-              <a:lnSpc>
-                <a:spcPct val="150000"/>
-              </a:lnSpc>
-              <a:spcAft>
-                <a:spcPts val="800"/>
-              </a:spcAft>
-            </a:pPr>
           </a:p>
         </p:txBody>
       </p:sp>
@@ -13762,22 +13606,6 @@
           <a:p>
             <a:pPr algn="ctr"/>
             <a:r>
-              <a:rPr sz="1200" b="0">
-                <a:solidFill>
-                  <a:srgbClr val="0070C0"/>
-                </a:solidFill>
-                <a:latin typeface="맑은 고딕"/>
-              </a:rPr>
-              <a:t>[출처]</a:t>
-            </a:r>
-          </a:p>
-          <a:p>
-            <a:pPr algn="ctr">
-              <a:spcBef>
-                <a:spcPts val="800"/>
-              </a:spcBef>
-            </a:pPr>
-            <a:r>
               <a:rPr sz="2100" b="1">
                 <a:solidFill>
                   <a:srgbClr val="000000"/>
@@ -14512,41 +14340,7 @@
       </p:sp>
       <p:sp>
         <p:nvSpPr>
-          <p:cNvPr id="4" name="TextBox 3"/>
-          <p:cNvSpPr txBox="1"/>
-          <p:nvPr/>
-        </p:nvSpPr>
-        <p:spPr>
-          <a:xfrm>
-            <a:off x="822960" y="1527048"/>
-            <a:ext cx="914400" cy="201168"/>
-          </a:xfrm>
-          <a:prstGeom prst="rect">
-            <a:avLst/>
-          </a:prstGeom>
-          <a:noFill/>
-        </p:spPr>
-        <p:txBody>
-          <a:bodyPr wrap="square">
-            <a:spAutoFit/>
-          </a:bodyPr>
-          <a:lstStyle/>
-          <a:p>
-            <a:r>
-              <a:rPr sz="1200" b="0" u="none">
-                <a:solidFill>
-                  <a:srgbClr val="0070C0"/>
-                </a:solidFill>
-                <a:latin typeface="맑은 고딕"/>
-              </a:rPr>
-              <a:t>[도식]</a:t>
-            </a:r>
-          </a:p>
-        </p:txBody>
-      </p:sp>
-      <p:sp>
-        <p:nvSpPr>
-          <p:cNvPr id="5" name="Rectangle 4"/>
+          <p:cNvPr id="4" name="Rectangle 3"/>
           <p:cNvSpPr/>
           <p:nvPr/>
         </p:nvSpPr>
@@ -14591,7 +14385,7 @@
       </p:sp>
       <p:sp>
         <p:nvSpPr>
-          <p:cNvPr id="6" name="Rectangle 5"/>
+          <p:cNvPr id="5" name="Rectangle 4"/>
           <p:cNvSpPr/>
           <p:nvPr/>
         </p:nvSpPr>
@@ -14636,7 +14430,7 @@
       </p:sp>
       <p:sp>
         <p:nvSpPr>
-          <p:cNvPr id="7" name="TextBox 6"/>
+          <p:cNvPr id="6" name="TextBox 5"/>
           <p:cNvSpPr txBox="1"/>
           <p:nvPr/>
         </p:nvSpPr>
@@ -14671,7 +14465,7 @@
       </p:sp>
       <p:sp>
         <p:nvSpPr>
-          <p:cNvPr id="8" name="TextBox 7"/>
+          <p:cNvPr id="7" name="TextBox 6"/>
           <p:cNvSpPr txBox="1"/>
           <p:nvPr/>
         </p:nvSpPr>
@@ -14706,7 +14500,7 @@
       </p:sp>
       <p:sp>
         <p:nvSpPr>
-          <p:cNvPr id="9" name="TextBox 8"/>
+          <p:cNvPr id="8" name="TextBox 7"/>
           <p:cNvSpPr txBox="1"/>
           <p:nvPr/>
         </p:nvSpPr>
@@ -14741,7 +14535,7 @@
       </p:sp>
       <p:sp>
         <p:nvSpPr>
-          <p:cNvPr id="10" name="TextBox 9"/>
+          <p:cNvPr id="9" name="TextBox 8"/>
           <p:cNvSpPr txBox="1"/>
           <p:nvPr/>
         </p:nvSpPr>
@@ -14776,7 +14570,7 @@
       </p:sp>
       <p:sp>
         <p:nvSpPr>
-          <p:cNvPr id="11" name="TextBox 10"/>
+          <p:cNvPr id="10" name="TextBox 9"/>
           <p:cNvSpPr txBox="1"/>
           <p:nvPr/>
         </p:nvSpPr>
@@ -14811,7 +14605,7 @@
       </p:sp>
       <p:sp>
         <p:nvSpPr>
-          <p:cNvPr id="12" name="TextBox 11"/>
+          <p:cNvPr id="11" name="TextBox 10"/>
           <p:cNvSpPr txBox="1"/>
           <p:nvPr/>
         </p:nvSpPr>
@@ -14835,38 +14629,7 @@
               <a:lnSpc>
                 <a:spcPct val="150000"/>
               </a:lnSpc>
-              <a:spcAft>
-                <a:spcPts val="800"/>
-              </a:spcAft>
             </a:pPr>
-            <a:r>
-              <a:rPr sz="2800" b="0" u="none">
-                <a:solidFill>
-                  <a:srgbClr val="000000"/>
-                </a:solidFill>
-                <a:latin typeface="맑은 고딕"/>
-              </a:rPr>
-              <a:t>한국에서도 AI 디지털교과서와 AI 체험 전시가 이미 정책·기관…</a:t>
-            </a:r>
-          </a:p>
-          <a:p>
-            <a:pPr>
-              <a:lnSpc>
-                <a:spcPct val="150000"/>
-              </a:lnSpc>
-              <a:spcAft>
-                <a:spcPts val="800"/>
-              </a:spcAft>
-            </a:pPr>
-            <a:r>
-              <a:rPr sz="2800" b="0" u="none">
-                <a:solidFill>
-                  <a:srgbClr val="000000"/>
-                </a:solidFill>
-                <a:latin typeface="맑은 고딕"/>
-              </a:rPr>
-              <a:t>핵심 질문은 한국도 결국 AI를 금지할지보다 어떻게 다룰지라는…</a:t>
-            </a:r>
           </a:p>
         </p:txBody>
       </p:sp>
@@ -14973,29 +14736,13 @@
           <a:p>
             <a:pPr algn="ctr"/>
             <a:r>
-              <a:rPr sz="1200" b="0">
-                <a:solidFill>
-                  <a:srgbClr val="0070C0"/>
-                </a:solidFill>
-                <a:latin typeface="맑은 고딕"/>
-              </a:rPr>
-              <a:t>[출처]</a:t>
-            </a:r>
-          </a:p>
-          <a:p>
-            <a:pPr algn="ctr">
-              <a:spcBef>
-                <a:spcPts val="800"/>
-              </a:spcBef>
-            </a:pPr>
-            <a:r>
               <a:rPr sz="2100" b="1">
                 <a:solidFill>
                   <a:srgbClr val="000000"/>
                 </a:solidFill>
                 <a:latin typeface="맑은 고딕"/>
               </a:rPr>
-              <a:t>Microsoft</a:t>
+              <a:t>Microsoft Research</a:t>
             </a:r>
           </a:p>
           <a:p>
@@ -15011,7 +14758,7 @@
                 </a:solidFill>
                 <a:latin typeface="맑은 고딕"/>
               </a:rPr>
-              <a:t>Research의 정보탐색 다양성 문제의식과 연결. 결론 후보로만 사용</a:t>
+              <a:t>의 정보탐색 다양성 문제의식과 연결. 결론 후보로만 사용</a:t>
             </a:r>
           </a:p>
         </p:txBody>
@@ -15054,25 +14801,6 @@
                 <a:latin typeface="맑은 고딕"/>
               </a:rPr>
               <a:t>AI가 답을 주는 건 막기 어렵다</a:t>
-            </a:r>
-          </a:p>
-          <a:p>
-            <a:pPr>
-              <a:lnSpc>
-                <a:spcPct val="150000"/>
-              </a:lnSpc>
-              <a:spcAft>
-                <a:spcPts val="800"/>
-              </a:spcAft>
-            </a:pPr>
-            <a:r>
-              <a:rPr sz="2800" b="0" u="none">
-                <a:solidFill>
-                  <a:srgbClr val="000000"/>
-                </a:solidFill>
-                <a:latin typeface="맑은 고딕"/>
-              </a:rPr>
-              <a:t>그렇다면 사람에게 남겨야 할 것은 답이 아니라 과정일 수 있다</a:t>
             </a:r>
           </a:p>
         </p:txBody>
@@ -15174,7 +14902,7 @@
                 </a:solidFill>
                 <a:latin typeface="맑은 고딕"/>
               </a:rPr>
-              <a:t>모르는 것을 물으면 바로 답이 나오고</a:t>
+              <a:t>검색창을 열기도 전에</a:t>
             </a:r>
           </a:p>
           <a:p>
@@ -15193,7 +14921,7 @@
                 </a:solidFill>
                 <a:latin typeface="맑은 고딕"/>
               </a:rPr>
-              <a:t>AI는 접근성과 개인화 가능성도 넓힐 수 있다</a:t>
+              <a:t>답안지가 먼저 나온다</a:t>
             </a:r>
           </a:p>
         </p:txBody>
@@ -15241,29 +14969,13 @@
           <a:p>
             <a:pPr algn="ctr"/>
             <a:r>
-              <a:rPr sz="1200" b="0">
-                <a:solidFill>
-                  <a:srgbClr val="0070C0"/>
-                </a:solidFill>
-                <a:latin typeface="맑은 고딕"/>
-              </a:rPr>
-              <a:t>[출처]</a:t>
-            </a:r>
-          </a:p>
-          <a:p>
-            <a:pPr algn="ctr">
-              <a:spcBef>
-                <a:spcPts val="800"/>
-              </a:spcBef>
-            </a:pPr>
-            <a:r>
               <a:rPr sz="2100" b="1">
                 <a:solidFill>
                   <a:srgbClr val="000000"/>
                 </a:solidFill>
                 <a:latin typeface="맑은 고딕"/>
               </a:rPr>
-              <a:t>Microsoft</a:t>
+              <a:t>Microsoft Research</a:t>
             </a:r>
           </a:p>
           <a:p>
@@ -15279,7 +14991,7 @@
                 </a:solidFill>
                 <a:latin typeface="맑은 고딕"/>
               </a:rPr>
-              <a:t>Research — generative AI and information…</a:t>
+              <a:t>generative AI and information diversity.…</a:t>
             </a:r>
           </a:p>
         </p:txBody>
@@ -15451,41 +15163,7 @@
       </p:sp>
       <p:sp>
         <p:nvSpPr>
-          <p:cNvPr id="4" name="TextBox 3"/>
-          <p:cNvSpPr txBox="1"/>
-          <p:nvPr/>
-        </p:nvSpPr>
-        <p:spPr>
-          <a:xfrm>
-            <a:off x="822960" y="1527048"/>
-            <a:ext cx="914400" cy="201168"/>
-          </a:xfrm>
-          <a:prstGeom prst="rect">
-            <a:avLst/>
-          </a:prstGeom>
-          <a:noFill/>
-        </p:spPr>
-        <p:txBody>
-          <a:bodyPr wrap="square">
-            <a:spAutoFit/>
-          </a:bodyPr>
-          <a:lstStyle/>
-          <a:p>
-            <a:r>
-              <a:rPr sz="1200" b="0" u="none">
-                <a:solidFill>
-                  <a:srgbClr val="0070C0"/>
-                </a:solidFill>
-                <a:latin typeface="맑은 고딕"/>
-              </a:rPr>
-              <a:t>[도식]</a:t>
-            </a:r>
-          </a:p>
-        </p:txBody>
-      </p:sp>
-      <p:sp>
-        <p:nvSpPr>
-          <p:cNvPr id="5" name="Rectangle 4"/>
+          <p:cNvPr id="4" name="Rectangle 3"/>
           <p:cNvSpPr/>
           <p:nvPr/>
         </p:nvSpPr>
@@ -15530,7 +15208,7 @@
       </p:sp>
       <p:sp>
         <p:nvSpPr>
-          <p:cNvPr id="6" name="Rectangle 5"/>
+          <p:cNvPr id="5" name="Rectangle 4"/>
           <p:cNvSpPr/>
           <p:nvPr/>
         </p:nvSpPr>
@@ -15575,7 +15253,7 @@
       </p:sp>
       <p:sp>
         <p:nvSpPr>
-          <p:cNvPr id="7" name="TextBox 6"/>
+          <p:cNvPr id="6" name="TextBox 5"/>
           <p:cNvSpPr txBox="1"/>
           <p:nvPr/>
         </p:nvSpPr>
@@ -15610,7 +15288,7 @@
       </p:sp>
       <p:sp>
         <p:nvSpPr>
-          <p:cNvPr id="8" name="TextBox 7"/>
+          <p:cNvPr id="7" name="TextBox 6"/>
           <p:cNvSpPr txBox="1"/>
           <p:nvPr/>
         </p:nvSpPr>
@@ -15645,7 +15323,7 @@
       </p:sp>
       <p:sp>
         <p:nvSpPr>
-          <p:cNvPr id="9" name="TextBox 8"/>
+          <p:cNvPr id="8" name="TextBox 7"/>
           <p:cNvSpPr txBox="1"/>
           <p:nvPr/>
         </p:nvSpPr>
@@ -15680,7 +15358,7 @@
       </p:sp>
       <p:sp>
         <p:nvSpPr>
-          <p:cNvPr id="10" name="TextBox 9"/>
+          <p:cNvPr id="9" name="TextBox 8"/>
           <p:cNvSpPr txBox="1"/>
           <p:nvPr/>
         </p:nvSpPr>
@@ -15715,7 +15393,7 @@
       </p:sp>
       <p:sp>
         <p:nvSpPr>
-          <p:cNvPr id="11" name="TextBox 10"/>
+          <p:cNvPr id="10" name="TextBox 9"/>
           <p:cNvSpPr txBox="1"/>
           <p:nvPr/>
         </p:nvSpPr>
@@ -15750,7 +15428,7 @@
       </p:sp>
       <p:sp>
         <p:nvSpPr>
-          <p:cNvPr id="12" name="TextBox 11"/>
+          <p:cNvPr id="11" name="TextBox 10"/>
           <p:cNvSpPr txBox="1"/>
           <p:nvPr/>
         </p:nvSpPr>
@@ -15774,38 +15452,7 @@
               <a:lnSpc>
                 <a:spcPct val="150000"/>
               </a:lnSpc>
-              <a:spcAft>
-                <a:spcPts val="800"/>
-              </a:spcAft>
             </a:pPr>
-            <a:r>
-              <a:rPr sz="2800" b="0" u="none">
-                <a:solidFill>
-                  <a:srgbClr val="000000"/>
-                </a:solidFill>
-                <a:latin typeface="맑은 고딕"/>
-              </a:rPr>
-              <a:t>학생도, 직장인도, 관람객도 이미 AI와 함께 정보를 찾는다</a:t>
-            </a:r>
-          </a:p>
-          <a:p>
-            <a:pPr>
-              <a:lnSpc>
-                <a:spcPct val="150000"/>
-              </a:lnSpc>
-              <a:spcAft>
-                <a:spcPts val="800"/>
-              </a:spcAft>
-            </a:pPr>
-            <a:r>
-              <a:rPr sz="2800" b="0" u="none">
-                <a:solidFill>
-                  <a:srgbClr val="000000"/>
-                </a:solidFill>
-                <a:latin typeface="맑은 고딕"/>
-              </a:rPr>
-              <a:t>반대로 AI는 학습 접근성과 개인화 가능성을 높일 수 있다는 주…</a:t>
-            </a:r>
           </a:p>
         </p:txBody>
       </p:sp>
@@ -15907,25 +15554,6 @@
                 <a:latin typeface="맑은 고딕"/>
               </a:rPr>
               <a:t>AI 답변의 빈틈을 찾는 법</a:t>
-            </a:r>
-          </a:p>
-          <a:p>
-            <a:pPr>
-              <a:lnSpc>
-                <a:spcPct val="150000"/>
-              </a:lnSpc>
-              <a:spcAft>
-                <a:spcPts val="800"/>
-              </a:spcAft>
-            </a:pPr>
-            <a:r>
-              <a:rPr sz="2800" b="0" u="none">
-                <a:solidFill>
-                  <a:srgbClr val="000000"/>
-                </a:solidFill>
-                <a:latin typeface="맑은 고딕"/>
-              </a:rPr>
-              <a:t>다른 자료와 비교하는 법</a:t>
             </a:r>
           </a:p>
         </p:txBody>
@@ -15973,22 +15601,6 @@
           <a:p>
             <a:pPr algn="ctr"/>
             <a:r>
-              <a:rPr sz="1200" b="0">
-                <a:solidFill>
-                  <a:srgbClr val="0070C0"/>
-                </a:solidFill>
-                <a:latin typeface="맑은 고딕"/>
-              </a:rPr>
-              <a:t>[출처]</a:t>
-            </a:r>
-          </a:p>
-          <a:p>
-            <a:pPr algn="ctr">
-              <a:spcBef>
-                <a:spcPts val="800"/>
-              </a:spcBef>
-            </a:pPr>
-            <a:r>
               <a:rPr sz="2100" b="1">
                 <a:solidFill>
                   <a:srgbClr val="000000"/>
@@ -16123,41 +15735,7 @@
       </p:sp>
       <p:sp>
         <p:nvSpPr>
-          <p:cNvPr id="4" name="TextBox 3"/>
-          <p:cNvSpPr txBox="1"/>
-          <p:nvPr/>
-        </p:nvSpPr>
-        <p:spPr>
-          <a:xfrm>
-            <a:off x="822960" y="1527048"/>
-            <a:ext cx="914400" cy="201168"/>
-          </a:xfrm>
-          <a:prstGeom prst="rect">
-            <a:avLst/>
-          </a:prstGeom>
-          <a:noFill/>
-        </p:spPr>
-        <p:txBody>
-          <a:bodyPr wrap="square">
-            <a:spAutoFit/>
-          </a:bodyPr>
-          <a:lstStyle/>
-          <a:p>
-            <a:r>
-              <a:rPr sz="1200" b="0" u="none">
-                <a:solidFill>
-                  <a:srgbClr val="0070C0"/>
-                </a:solidFill>
-                <a:latin typeface="맑은 고딕"/>
-              </a:rPr>
-              <a:t>[도식]</a:t>
-            </a:r>
-          </a:p>
-        </p:txBody>
-      </p:sp>
-      <p:sp>
-        <p:nvSpPr>
-          <p:cNvPr id="5" name="Rectangle 4"/>
+          <p:cNvPr id="4" name="Rectangle 3"/>
           <p:cNvSpPr/>
           <p:nvPr/>
         </p:nvSpPr>
@@ -16202,7 +15780,7 @@
       </p:sp>
       <p:sp>
         <p:nvSpPr>
-          <p:cNvPr id="6" name="Rectangle 5"/>
+          <p:cNvPr id="5" name="Rectangle 4"/>
           <p:cNvSpPr/>
           <p:nvPr/>
         </p:nvSpPr>
@@ -16247,7 +15825,7 @@
       </p:sp>
       <p:sp>
         <p:nvSpPr>
-          <p:cNvPr id="7" name="TextBox 6"/>
+          <p:cNvPr id="6" name="TextBox 5"/>
           <p:cNvSpPr txBox="1"/>
           <p:nvPr/>
         </p:nvSpPr>
@@ -16282,7 +15860,7 @@
       </p:sp>
       <p:sp>
         <p:nvSpPr>
-          <p:cNvPr id="8" name="TextBox 7"/>
+          <p:cNvPr id="7" name="TextBox 6"/>
           <p:cNvSpPr txBox="1"/>
           <p:nvPr/>
         </p:nvSpPr>
@@ -16317,7 +15895,7 @@
       </p:sp>
       <p:sp>
         <p:nvSpPr>
-          <p:cNvPr id="9" name="TextBox 8"/>
+          <p:cNvPr id="8" name="TextBox 7"/>
           <p:cNvSpPr txBox="1"/>
           <p:nvPr/>
         </p:nvSpPr>
@@ -16352,7 +15930,7 @@
       </p:sp>
       <p:sp>
         <p:nvSpPr>
-          <p:cNvPr id="10" name="TextBox 9"/>
+          <p:cNvPr id="9" name="TextBox 8"/>
           <p:cNvSpPr txBox="1"/>
           <p:nvPr/>
         </p:nvSpPr>
@@ -16387,7 +15965,7 @@
       </p:sp>
       <p:sp>
         <p:nvSpPr>
-          <p:cNvPr id="11" name="TextBox 10"/>
+          <p:cNvPr id="10" name="TextBox 9"/>
           <p:cNvSpPr txBox="1"/>
           <p:nvPr/>
         </p:nvSpPr>
@@ -16422,7 +16000,7 @@
       </p:sp>
       <p:sp>
         <p:nvSpPr>
-          <p:cNvPr id="12" name="TextBox 11"/>
+          <p:cNvPr id="11" name="TextBox 10"/>
           <p:cNvSpPr txBox="1"/>
           <p:nvPr/>
         </p:nvSpPr>
@@ -16446,38 +16024,7 @@
               <a:lnSpc>
                 <a:spcPct val="150000"/>
               </a:lnSpc>
-              <a:spcAft>
-                <a:spcPts val="800"/>
-              </a:spcAft>
             </a:pPr>
-            <a:r>
-              <a:rPr sz="2800" b="0" u="none">
-                <a:solidFill>
-                  <a:srgbClr val="000000"/>
-                </a:solidFill>
-                <a:latin typeface="맑은 고딕"/>
-              </a:rPr>
-              <a:t>망원경은 하늘을 대신 봐주지 않는다</a:t>
-            </a:r>
-          </a:p>
-          <a:p>
-            <a:pPr>
-              <a:lnSpc>
-                <a:spcPct val="150000"/>
-              </a:lnSpc>
-              <a:spcAft>
-                <a:spcPts val="800"/>
-              </a:spcAft>
-            </a:pPr>
-            <a:r>
-              <a:rPr sz="2800" b="0" u="none">
-                <a:solidFill>
-                  <a:srgbClr val="000000"/>
-                </a:solidFill>
-                <a:latin typeface="맑은 고딕"/>
-              </a:rPr>
-              <a:t>더 멀리 보게 해줄 뿐, 어디를 볼지는 사람이 정한다</a:t>
-            </a:r>
           </a:p>
         </p:txBody>
       </p:sp>
@@ -16932,22 +16479,6 @@
           <a:p>
             <a:pPr algn="ctr"/>
             <a:r>
-              <a:rPr sz="1200" b="0">
-                <a:solidFill>
-                  <a:srgbClr val="0070C0"/>
-                </a:solidFill>
-                <a:latin typeface="맑은 고딕"/>
-              </a:rPr>
-              <a:t>[출처]</a:t>
-            </a:r>
-          </a:p>
-          <a:p>
-            <a:pPr algn="ctr">
-              <a:spcBef>
-                <a:spcPts val="800"/>
-              </a:spcBef>
-            </a:pPr>
-            <a:r>
               <a:rPr sz="2100" b="1">
                 <a:solidFill>
                   <a:srgbClr val="000000"/>
@@ -17094,25 +16625,6 @@
               <a:t>이 메시지는 AI 금지가 아니라</a:t>
             </a:r>
           </a:p>
-          <a:p>
-            <a:pPr>
-              <a:lnSpc>
-                <a:spcPct val="150000"/>
-              </a:lnSpc>
-              <a:spcAft>
-                <a:spcPts val="800"/>
-              </a:spcAft>
-            </a:pPr>
-            <a:r>
-              <a:rPr sz="2800" b="0" u="none">
-                <a:solidFill>
-                  <a:srgbClr val="000000"/>
-                </a:solidFill>
-                <a:latin typeface="맑은 고딕"/>
-              </a:rPr>
-              <a:t>단일 기관 사례이므로 모든 지식기관의 공식 입장처럼 일반화하지…</a:t>
-            </a:r>
-          </a:p>
         </p:txBody>
       </p:sp>
     </p:spTree>
@@ -17213,25 +16725,6 @@
                 <a:latin typeface="맑은 고딕"/>
               </a:rPr>
               <a:t>천문학은 답 하나보다 관찰·추론·검증의 과정이 중요한 분야다</a:t>
-            </a:r>
-          </a:p>
-          <a:p>
-            <a:pPr>
-              <a:lnSpc>
-                <a:spcPct val="150000"/>
-              </a:lnSpc>
-              <a:spcAft>
-                <a:spcPts val="800"/>
-              </a:spcAft>
-            </a:pPr>
-            <a:r>
-              <a:rPr sz="2800" b="0" u="none">
-                <a:solidFill>
-                  <a:srgbClr val="000000"/>
-                </a:solidFill>
-                <a:latin typeface="맑은 고딕"/>
-              </a:rPr>
-              <a:t>AI 즉답은 그 과정을 도와줄 수도</a:t>
             </a:r>
           </a:p>
         </p:txBody>
@@ -17279,22 +16772,6 @@
           <a:p>
             <a:pPr algn="ctr"/>
             <a:r>
-              <a:rPr sz="1200" b="0">
-                <a:solidFill>
-                  <a:srgbClr val="0070C0"/>
-                </a:solidFill>
-                <a:latin typeface="맑은 고딕"/>
-              </a:rPr>
-              <a:t>[출처]</a:t>
-            </a:r>
-          </a:p>
-          <a:p>
-            <a:pPr algn="ctr">
-              <a:spcBef>
-                <a:spcPts val="800"/>
-              </a:spcBef>
-            </a:pPr>
-            <a:r>
               <a:rPr sz="2100" b="1">
                 <a:solidFill>
                   <a:srgbClr val="000000"/>
@@ -17429,41 +16906,7 @@
       </p:sp>
       <p:sp>
         <p:nvSpPr>
-          <p:cNvPr id="4" name="TextBox 3"/>
-          <p:cNvSpPr txBox="1"/>
-          <p:nvPr/>
-        </p:nvSpPr>
-        <p:spPr>
-          <a:xfrm>
-            <a:off x="822960" y="1527048"/>
-            <a:ext cx="914400" cy="201168"/>
-          </a:xfrm>
-          <a:prstGeom prst="rect">
-            <a:avLst/>
-          </a:prstGeom>
-          <a:noFill/>
-        </p:spPr>
-        <p:txBody>
-          <a:bodyPr wrap="square">
-            <a:spAutoFit/>
-          </a:bodyPr>
-          <a:lstStyle/>
-          <a:p>
-            <a:r>
-              <a:rPr sz="1200" b="0" u="none">
-                <a:solidFill>
-                  <a:srgbClr val="0070C0"/>
-                </a:solidFill>
-                <a:latin typeface="맑은 고딕"/>
-              </a:rPr>
-              <a:t>[도식]</a:t>
-            </a:r>
-          </a:p>
-        </p:txBody>
-      </p:sp>
-      <p:sp>
-        <p:nvSpPr>
-          <p:cNvPr id="5" name="Rectangle 4"/>
+          <p:cNvPr id="4" name="Rectangle 3"/>
           <p:cNvSpPr/>
           <p:nvPr/>
         </p:nvSpPr>
@@ -17508,7 +16951,7 @@
       </p:sp>
       <p:sp>
         <p:nvSpPr>
-          <p:cNvPr id="6" name="Rectangle 5"/>
+          <p:cNvPr id="5" name="Rectangle 4"/>
           <p:cNvSpPr/>
           <p:nvPr/>
         </p:nvSpPr>
@@ -17553,7 +16996,7 @@
       </p:sp>
       <p:sp>
         <p:nvSpPr>
-          <p:cNvPr id="7" name="TextBox 6"/>
+          <p:cNvPr id="6" name="TextBox 5"/>
           <p:cNvSpPr txBox="1"/>
           <p:nvPr/>
         </p:nvSpPr>
@@ -17588,7 +17031,7 @@
       </p:sp>
       <p:sp>
         <p:nvSpPr>
-          <p:cNvPr id="8" name="TextBox 7"/>
+          <p:cNvPr id="7" name="TextBox 6"/>
           <p:cNvSpPr txBox="1"/>
           <p:nvPr/>
         </p:nvSpPr>
@@ -17623,7 +17066,7 @@
       </p:sp>
       <p:sp>
         <p:nvSpPr>
-          <p:cNvPr id="9" name="TextBox 8"/>
+          <p:cNvPr id="8" name="TextBox 7"/>
           <p:cNvSpPr txBox="1"/>
           <p:nvPr/>
         </p:nvSpPr>
@@ -17658,7 +17101,7 @@
       </p:sp>
       <p:sp>
         <p:nvSpPr>
-          <p:cNvPr id="10" name="TextBox 9"/>
+          <p:cNvPr id="9" name="TextBox 8"/>
           <p:cNvSpPr txBox="1"/>
           <p:nvPr/>
         </p:nvSpPr>
@@ -17693,7 +17136,7 @@
       </p:sp>
       <p:sp>
         <p:nvSpPr>
-          <p:cNvPr id="11" name="TextBox 10"/>
+          <p:cNvPr id="10" name="TextBox 9"/>
           <p:cNvSpPr txBox="1"/>
           <p:nvPr/>
         </p:nvSpPr>
@@ -17728,7 +17171,7 @@
       </p:sp>
       <p:sp>
         <p:nvSpPr>
-          <p:cNvPr id="12" name="TextBox 11"/>
+          <p:cNvPr id="11" name="TextBox 10"/>
           <p:cNvSpPr txBox="1"/>
           <p:nvPr/>
         </p:nvSpPr>
@@ -17752,38 +17195,7 @@
               <a:lnSpc>
                 <a:spcPct val="150000"/>
               </a:lnSpc>
-              <a:spcAft>
-                <a:spcPts val="800"/>
-              </a:spcAft>
             </a:pPr>
-            <a:r>
-              <a:rPr sz="2800" b="0" u="none">
-                <a:solidFill>
-                  <a:srgbClr val="000000"/>
-                </a:solidFill>
-                <a:latin typeface="맑은 고딕"/>
-              </a:rPr>
-              <a:t>학교</a:t>
-            </a:r>
-          </a:p>
-          <a:p>
-            <a:pPr>
-              <a:lnSpc>
-                <a:spcPct val="150000"/>
-              </a:lnSpc>
-              <a:spcAft>
-                <a:spcPts val="800"/>
-              </a:spcAft>
-            </a:pPr>
-            <a:r>
-              <a:rPr sz="2800" b="0" u="none">
-                <a:solidFill>
-                  <a:srgbClr val="000000"/>
-                </a:solidFill>
-                <a:latin typeface="맑은 고딕"/>
-              </a:rPr>
-              <a:t>따라서 핵심은 답 제공 경쟁이 아니라 질문·검증·맥락을 가르치는…</a:t>
-            </a:r>
           </a:p>
         </p:txBody>
       </p:sp>
@@ -18065,7 +17477,26 @@
                 </a:solidFill>
                 <a:latin typeface="맑은 고딕"/>
               </a:rPr>
-              <a:t>이 과정은 느리지만 정보 탐색의 다양성과 판단 훈련을 남긴다</a:t>
+              <a:t>예전 검색은 느렸지만</a:t>
+            </a:r>
+          </a:p>
+          <a:p>
+            <a:pPr>
+              <a:lnSpc>
+                <a:spcPct val="150000"/>
+              </a:lnSpc>
+              <a:spcAft>
+                <a:spcPts val="800"/>
+              </a:spcAft>
+            </a:pPr>
+            <a:r>
+              <a:rPr sz="2800" b="0" u="none">
+                <a:solidFill>
+                  <a:srgbClr val="000000"/>
+                </a:solidFill>
+                <a:latin typeface="맑은 고딕"/>
+              </a:rPr>
+              <a:t>비교하는 흔적이 남았다</a:t>
             </a:r>
           </a:p>
         </p:txBody>
@@ -18113,29 +17544,13 @@
           <a:p>
             <a:pPr algn="ctr"/>
             <a:r>
-              <a:rPr sz="1200" b="0">
-                <a:solidFill>
-                  <a:srgbClr val="0070C0"/>
-                </a:solidFill>
-                <a:latin typeface="맑은 고딕"/>
-              </a:rPr>
-              <a:t>[출처]</a:t>
-            </a:r>
-          </a:p>
-          <a:p>
-            <a:pPr algn="ctr">
-              <a:spcBef>
-                <a:spcPts val="800"/>
-              </a:spcBef>
-            </a:pPr>
-            <a:r>
               <a:rPr sz="2100" b="1">
                 <a:solidFill>
                   <a:srgbClr val="000000"/>
                 </a:solidFill>
                 <a:latin typeface="맑은 고딕"/>
               </a:rPr>
-              <a:t>Microsoft</a:t>
+              <a:t>Microsoft Research</a:t>
             </a:r>
           </a:p>
           <a:p>
@@ -18151,7 +17566,7 @@
                 </a:solidFill>
                 <a:latin typeface="맑은 고딕"/>
               </a:rPr>
-              <a:t>Research — information diversity in onlin…</a:t>
+              <a:t>information diversity in online informati…</a:t>
             </a:r>
           </a:p>
         </p:txBody>
@@ -18263,41 +17678,7 @@
       </p:sp>
       <p:sp>
         <p:nvSpPr>
-          <p:cNvPr id="4" name="TextBox 3"/>
-          <p:cNvSpPr txBox="1"/>
-          <p:nvPr/>
-        </p:nvSpPr>
-        <p:spPr>
-          <a:xfrm>
-            <a:off x="822960" y="1527048"/>
-            <a:ext cx="914400" cy="201168"/>
-          </a:xfrm>
-          <a:prstGeom prst="rect">
-            <a:avLst/>
-          </a:prstGeom>
-          <a:noFill/>
-        </p:spPr>
-        <p:txBody>
-          <a:bodyPr wrap="square">
-            <a:spAutoFit/>
-          </a:bodyPr>
-          <a:lstStyle/>
-          <a:p>
-            <a:r>
-              <a:rPr sz="1200" b="0" u="none">
-                <a:solidFill>
-                  <a:srgbClr val="0070C0"/>
-                </a:solidFill>
-                <a:latin typeface="맑은 고딕"/>
-              </a:rPr>
-              <a:t>[도식]</a:t>
-            </a:r>
-          </a:p>
-        </p:txBody>
-      </p:sp>
-      <p:sp>
-        <p:nvSpPr>
-          <p:cNvPr id="5" name="Rectangle 4"/>
+          <p:cNvPr id="4" name="Rectangle 3"/>
           <p:cNvSpPr/>
           <p:nvPr/>
         </p:nvSpPr>
@@ -18342,7 +17723,7 @@
       </p:sp>
       <p:sp>
         <p:nvSpPr>
-          <p:cNvPr id="6" name="Rectangle 5"/>
+          <p:cNvPr id="5" name="Rectangle 4"/>
           <p:cNvSpPr/>
           <p:nvPr/>
         </p:nvSpPr>
@@ -18387,7 +17768,7 @@
       </p:sp>
       <p:sp>
         <p:nvSpPr>
-          <p:cNvPr id="7" name="TextBox 6"/>
+          <p:cNvPr id="6" name="TextBox 5"/>
           <p:cNvSpPr txBox="1"/>
           <p:nvPr/>
         </p:nvSpPr>
@@ -18422,7 +17803,7 @@
       </p:sp>
       <p:sp>
         <p:nvSpPr>
-          <p:cNvPr id="8" name="TextBox 7"/>
+          <p:cNvPr id="7" name="TextBox 6"/>
           <p:cNvSpPr txBox="1"/>
           <p:nvPr/>
         </p:nvSpPr>
@@ -18457,7 +17838,7 @@
       </p:sp>
       <p:sp>
         <p:nvSpPr>
-          <p:cNvPr id="9" name="TextBox 8"/>
+          <p:cNvPr id="8" name="TextBox 7"/>
           <p:cNvSpPr txBox="1"/>
           <p:nvPr/>
         </p:nvSpPr>
@@ -18492,7 +17873,7 @@
       </p:sp>
       <p:sp>
         <p:nvSpPr>
-          <p:cNvPr id="10" name="TextBox 9"/>
+          <p:cNvPr id="9" name="TextBox 8"/>
           <p:cNvSpPr txBox="1"/>
           <p:nvPr/>
         </p:nvSpPr>
@@ -18527,7 +17908,7 @@
       </p:sp>
       <p:sp>
         <p:nvSpPr>
-          <p:cNvPr id="11" name="TextBox 10"/>
+          <p:cNvPr id="10" name="TextBox 9"/>
           <p:cNvSpPr txBox="1"/>
           <p:nvPr/>
         </p:nvSpPr>
@@ -18562,7 +17943,7 @@
       </p:sp>
       <p:sp>
         <p:nvSpPr>
-          <p:cNvPr id="12" name="TextBox 11"/>
+          <p:cNvPr id="11" name="TextBox 10"/>
           <p:cNvSpPr txBox="1"/>
           <p:nvPr/>
         </p:nvSpPr>
@@ -18586,38 +17967,7 @@
               <a:lnSpc>
                 <a:spcPct val="150000"/>
               </a:lnSpc>
-              <a:spcAft>
-                <a:spcPts val="800"/>
-              </a:spcAft>
             </a:pPr>
-            <a:r>
-              <a:rPr sz="2800" b="0" u="none">
-                <a:solidFill>
-                  <a:srgbClr val="000000"/>
-                </a:solidFill>
-                <a:latin typeface="맑은 고딕"/>
-              </a:rPr>
-              <a:t>좋은 점: 빠르고, 친절하고, 맥락을 이어준다</a:t>
-            </a:r>
-          </a:p>
-          <a:p>
-            <a:pPr>
-              <a:lnSpc>
-                <a:spcPct val="150000"/>
-              </a:lnSpc>
-              <a:spcAft>
-                <a:spcPts val="800"/>
-              </a:spcAft>
-            </a:pPr>
-            <a:r>
-              <a:rPr sz="2800" b="0" u="none">
-                <a:solidFill>
-                  <a:srgbClr val="000000"/>
-                </a:solidFill>
-                <a:latin typeface="맑은 고딕"/>
-              </a:rPr>
-              <a:t>걱정되는 점: 비교·검증·실패의 경험이 줄어들 가능성이 있다</a:t>
-            </a:r>
           </a:p>
         </p:txBody>
       </p:sp>
